--- a/docs/larder-presentacion.pptx
+++ b/docs/larder-presentacion.pptx
@@ -686,7 +686,7 @@
           <a:p>
             <a:r>
               <a:rPr lang="en-US" dirty="0"/>
-              <a:t>La fila de Out of Milk se genero con IA (nivel IA-2) y no se pudo verificar como app real. Se documenta la retractacion en vez de ocultarla: es exactamente lo que pide el guion sobre no dar por cierto un dato de IA sin comprobar.</a:t>
+              <a:t>La fuente principal ya no es busqueda por IA sino conversaciones reales con estudiantes/gente joven que comparten piso (mismo perfil que el mercado objetivo). AnyList tiene reconocimiento inteligente al escribir y codigo de barras -casi tan rapido como Notas-, pero todo su valor extra apunta a cocinar. La fila de Out of Milk se genero con IA (IA-2) y no se pudo verificar como app real: se documenta la retractacion en vez de ocultarla.</a:t>
             </a:r>
             <a:endParaRPr lang="en-US" dirty="0"/>
           </a:p>
@@ -774,7 +774,7 @@
           <a:p>
             <a:r>
               <a:rPr lang="en-US" dirty="0"/>
-              <a:t>Conclusion del estado del arte: el hueco es de usabilidad y de combinar nevera+lista, no de estetica.</a:t>
+              <a:t>Conclusion del estado del arte: el hueco no es "mas bonita", es rapidez de Notas + colaboracion de Bring + foco en ahorro/stock, que ninguna cubre. Tambien vale mencionar el testimonio propio: en casa se abandono una app similar tras 2 usos por pereza de abrir "otra app".</a:t>
             </a:r>
             <a:endParaRPr lang="en-US" dirty="0"/>
           </a:p>
@@ -2502,6 +2502,45 @@
           </a:p>
         </p:txBody>
       </p:sp>
+      <p:sp>
+        <p:nvSpPr>
+          <p:cNvPr id="6" name="Text 3"/>
+          <p:cNvSpPr txBox="1"/>
+          <p:nvPr/>
+        </p:nvSpPr>
+        <p:spPr>
+          <a:xfrm>
+            <a:off x="548640" y="1234440"/>
+            <a:ext cx="11094415" cy="274320"/>
+          </a:xfrm>
+          <a:prstGeom prst="rect">
+            <a:avLst/>
+          </a:prstGeom>
+          <a:noFill/>
+          <a:ln/>
+        </p:spPr>
+        <p:txBody>
+          <a:bodyPr wrap="square" lIns="0" tIns="0" rIns="0" bIns="0" rtlCol="0" anchor="ctr"/>
+          <a:lstStyle/>
+          <a:p>
+            <a:pPr indent="0" marL="0">
+              <a:buNone/>
+            </a:pPr>
+            <a:r>
+              <a:rPr lang="en-US" sz="1000" i="1" dirty="0">
+                <a:solidFill>
+                  <a:srgbClr val="8A7A6D"/>
+                </a:solidFill>
+                <a:latin typeface="Calibri" pitchFamily="34" charset="0"/>
+                <a:ea typeface="Calibri" pitchFamily="34" charset="-122"/>
+                <a:cs typeface="Calibri" pitchFamily="34" charset="-120"/>
+              </a:rPr>
+              <a:t>Fuente principal: conversaciones directas con estudiantes/gente joven — el mismo perfil que el mercado objetivo.</a:t>
+            </a:r>
+            <a:endParaRPr lang="en-US" sz="1000" dirty="0"/>
+          </a:p>
+        </p:txBody>
+      </p:sp>
       <p:graphicFrame>
         <p:nvGraphicFramePr>
           <p:cNvPr id="4" name="Table 0"/>
@@ -2517,19 +2556,19 @@
           </p:nvPr>
         </p:nvGraphicFramePr>
         <p:xfrm>
-          <a:off x="548640" y="1417320"/>
-          <a:ext cx="11064240" cy="2194560"/>
+          <a:off x="548640" y="1508760"/>
+          <a:ext cx="11064240" cy="2286000"/>
         </p:xfrm>
         <a:graphic>
           <a:graphicData uri="http://schemas.openxmlformats.org/drawingml/2006/table">
             <a:tbl>
               <a:tblPr/>
               <a:tblGrid>
-                <a:gridCol w="2377440"/>
-                <a:gridCol w="4297680"/>
-                <a:gridCol w="4389120"/>
+                <a:gridCol w="1737360"/>
+                <a:gridCol w="4480560"/>
+                <a:gridCol w="4846320"/>
               </a:tblGrid>
-              <a:tr h="438912">
+              <a:tr h="457200">
                 <a:tc>
                   <a:txBody>
                     <a:bodyPr/>
@@ -2539,7 +2578,7 @@
                         <a:buNone/>
                       </a:pPr>
                       <a:r>
-                        <a:rPr lang="en-US" sz="1250" b="1" dirty="0">
+                        <a:rPr lang="en-US" sz="1200" b="1" dirty="0">
                           <a:solidFill>
                             <a:srgbClr val="FFFFFF"/>
                           </a:solidFill>
@@ -2549,7 +2588,7 @@
                         </a:rPr>
                         <a:t>Solución</a:t>
                       </a:r>
-                      <a:endParaRPr lang="en-US" sz="1250" dirty="0">
+                      <a:endParaRPr lang="en-US" sz="1200" dirty="0">
                         <a:latin typeface="Calibri" charset="0"/>
                         <a:ea typeface="Calibri" charset="0"/>
                         <a:cs typeface="Calibri" charset="0"/>
@@ -2607,7 +2646,7 @@
                         <a:buNone/>
                       </a:pPr>
                       <a:r>
-                        <a:rPr lang="en-US" sz="1250" b="1" dirty="0">
+                        <a:rPr lang="en-US" sz="1200" b="1" dirty="0">
                           <a:solidFill>
                             <a:srgbClr val="FFFFFF"/>
                           </a:solidFill>
@@ -2615,9 +2654,9 @@
                           <a:ea typeface="Calibri" pitchFamily="34" charset="-122"/>
                           <a:cs typeface="Calibri" pitchFamily="34" charset="-120"/>
                         </a:rPr>
-                        <a:t>Qué resuelve bien</a:t>
+                        <a:t>Lo bueno</a:t>
                       </a:r>
-                      <a:endParaRPr lang="en-US" sz="1250" dirty="0">
+                      <a:endParaRPr lang="en-US" sz="1200" dirty="0">
                         <a:latin typeface="Calibri" charset="0"/>
                         <a:ea typeface="Calibri" charset="0"/>
                         <a:cs typeface="Calibri" charset="0"/>
@@ -2675,7 +2714,7 @@
                         <a:buNone/>
                       </a:pPr>
                       <a:r>
-                        <a:rPr lang="en-US" sz="1250" b="1" dirty="0">
+                        <a:rPr lang="en-US" sz="1200" b="1" dirty="0">
                           <a:solidFill>
                             <a:srgbClr val="FFFFFF"/>
                           </a:solidFill>
@@ -2683,9 +2722,9 @@
                           <a:ea typeface="Calibri" pitchFamily="34" charset="-122"/>
                           <a:cs typeface="Calibri" pitchFamily="34" charset="-120"/>
                         </a:rPr>
-                        <a:t>Qué le reprochan</a:t>
+                        <a:t>El problema</a:t>
                       </a:r>
-                      <a:endParaRPr lang="en-US" sz="1250" dirty="0">
+                      <a:endParaRPr lang="en-US" sz="1200" dirty="0">
                         <a:latin typeface="Calibri" charset="0"/>
                         <a:ea typeface="Calibri" charset="0"/>
                         <a:cs typeface="Calibri" charset="0"/>
@@ -2735,7 +2774,7 @@
                   </a:tcPr>
                 </a:tc>
               </a:tr>
-              <a:tr h="438912">
+              <a:tr h="457200">
                 <a:tc>
                   <a:txBody>
                     <a:bodyPr/>
@@ -2745,7 +2784,7 @@
                         <a:buNone/>
                       </a:pPr>
                       <a:r>
-                        <a:rPr lang="en-US" sz="1250" dirty="0">
+                        <a:rPr lang="en-US" sz="1200" dirty="0">
                           <a:solidFill>
                             <a:srgbClr val="2E2119"/>
                           </a:solidFill>
@@ -2755,7 +2794,7 @@
                         </a:rPr>
                         <a:t>Papel y boli</a:t>
                       </a:r>
-                      <a:endParaRPr lang="en-US" sz="1250" dirty="0">
+                      <a:endParaRPr lang="en-US" sz="1200" dirty="0">
                         <a:latin typeface="Calibri" charset="0"/>
                         <a:ea typeface="Calibri" charset="0"/>
                         <a:cs typeface="Calibri" charset="0"/>
@@ -2813,7 +2852,7 @@
                         <a:buNone/>
                       </a:pPr>
                       <a:r>
-                        <a:rPr lang="en-US" sz="1250" dirty="0">
+                        <a:rPr lang="en-US" sz="1200" dirty="0">
                           <a:solidFill>
                             <a:srgbClr val="2E2119"/>
                           </a:solidFill>
@@ -2821,9 +2860,9 @@
                           <a:ea typeface="Calibri" pitchFamily="34" charset="-122"/>
                           <a:cs typeface="Calibri" pitchFamily="34" charset="-120"/>
                         </a:rPr>
-                        <a:t>Gratis, sin curva de aprendizaje</a:t>
+                        <a:t>Rápido y sencillo</a:t>
                       </a:r>
-                      <a:endParaRPr lang="en-US" sz="1250" dirty="0">
+                      <a:endParaRPr lang="en-US" sz="1200" dirty="0">
                         <a:latin typeface="Calibri" charset="0"/>
                         <a:ea typeface="Calibri" charset="0"/>
                         <a:cs typeface="Calibri" charset="0"/>
@@ -2881,7 +2920,7 @@
                         <a:buNone/>
                       </a:pPr>
                       <a:r>
-                        <a:rPr lang="en-US" sz="1250" dirty="0">
+                        <a:rPr lang="en-US" sz="1200" dirty="0">
                           <a:solidFill>
                             <a:srgbClr val="2E2119"/>
                           </a:solidFill>
@@ -2889,9 +2928,9 @@
                           <a:ea typeface="Calibri" pitchFamily="34" charset="-122"/>
                           <a:cs typeface="Calibri" pitchFamily="34" charset="-120"/>
                         </a:rPr>
-                        <a:t>Sin overview fija: no evita duplicados</a:t>
+                        <a:t>Se pierde fácil; de un solo uso (gasta papel)</a:t>
                       </a:r>
-                      <a:endParaRPr lang="en-US" sz="1250" dirty="0">
+                      <a:endParaRPr lang="en-US" sz="1200" dirty="0">
                         <a:latin typeface="Calibri" charset="0"/>
                         <a:ea typeface="Calibri" charset="0"/>
                         <a:cs typeface="Calibri" charset="0"/>
@@ -2941,7 +2980,7 @@
                   </a:tcPr>
                 </a:tc>
               </a:tr>
-              <a:tr h="438912">
+              <a:tr h="457200">
                 <a:tc>
                   <a:txBody>
                     <a:bodyPr/>
@@ -2951,7 +2990,7 @@
                         <a:buNone/>
                       </a:pPr>
                       <a:r>
-                        <a:rPr lang="en-US" sz="1250" dirty="0">
+                        <a:rPr lang="en-US" sz="1200" dirty="0">
                           <a:solidFill>
                             <a:srgbClr val="2E2119"/>
                           </a:solidFill>
@@ -2959,9 +2998,9 @@
                           <a:ea typeface="Calibri" pitchFamily="34" charset="-122"/>
                           <a:cs typeface="Calibri" pitchFamily="34" charset="-120"/>
                         </a:rPr>
-                        <a:t>Grupo de WhatsApp</a:t>
+                        <a:t>Notas (móvil)</a:t>
                       </a:r>
-                      <a:endParaRPr lang="en-US" sz="1250" dirty="0">
+                      <a:endParaRPr lang="en-US" sz="1200" dirty="0">
                         <a:latin typeface="Calibri" charset="0"/>
                         <a:ea typeface="Calibri" charset="0"/>
                         <a:cs typeface="Calibri" charset="0"/>
@@ -3019,7 +3058,7 @@
                         <a:buNone/>
                       </a:pPr>
                       <a:r>
-                        <a:rPr lang="en-US" sz="1250" dirty="0">
+                        <a:rPr lang="en-US" sz="1200" dirty="0">
                           <a:solidFill>
                             <a:srgbClr val="2E2119"/>
                           </a:solidFill>
@@ -3027,9 +3066,9 @@
                           <a:ea typeface="Calibri" pitchFamily="34" charset="-122"/>
                           <a:cs typeface="Calibri" pitchFamily="34" charset="-120"/>
                         </a:rPr>
-                        <a:t>Ya instalado, se mira a diario</a:t>
+                        <a:t>La más usada; simple y reusable — "la que mejor funciona"</a:t>
                       </a:r>
-                      <a:endParaRPr lang="en-US" sz="1250" dirty="0">
+                      <a:endParaRPr lang="en-US" sz="1200" dirty="0">
                         <a:latin typeface="Calibri" charset="0"/>
                         <a:ea typeface="Calibri" charset="0"/>
                         <a:cs typeface="Calibri" charset="0"/>
@@ -3087,7 +3126,7 @@
                         <a:buNone/>
                       </a:pPr>
                       <a:r>
-                        <a:rPr lang="en-US" sz="1250" dirty="0">
+                        <a:rPr lang="en-US" sz="1200" dirty="0">
                           <a:solidFill>
                             <a:srgbClr val="2E2119"/>
                           </a:solidFill>
@@ -3095,9 +3134,9 @@
                           <a:ea typeface="Calibri" pitchFamily="34" charset="-122"/>
                           <a:cs typeface="Calibri" pitchFamily="34" charset="-120"/>
                         </a:rPr>
-                        <a:t>El aviso se pierde entre mensajes</a:t>
+                        <a:t>No se comparte ni coedita en tiempo real</a:t>
                       </a:r>
-                      <a:endParaRPr lang="en-US" sz="1250" dirty="0">
+                      <a:endParaRPr lang="en-US" sz="1200" dirty="0">
                         <a:latin typeface="Calibri" charset="0"/>
                         <a:ea typeface="Calibri" charset="0"/>
                         <a:cs typeface="Calibri" charset="0"/>
@@ -3147,7 +3186,7 @@
                   </a:tcPr>
                 </a:tc>
               </a:tr>
-              <a:tr h="438912">
+              <a:tr h="457200">
                 <a:tc>
                   <a:txBody>
                     <a:bodyPr/>
@@ -3157,7 +3196,7 @@
                         <a:buNone/>
                       </a:pPr>
                       <a:r>
-                        <a:rPr lang="en-US" sz="1250" dirty="0">
+                        <a:rPr lang="en-US" sz="1200" dirty="0">
                           <a:solidFill>
                             <a:srgbClr val="2E2119"/>
                           </a:solidFill>
@@ -3167,7 +3206,7 @@
                         </a:rPr>
                         <a:t>Bring!</a:t>
                       </a:r>
-                      <a:endParaRPr lang="en-US" sz="1250" dirty="0">
+                      <a:endParaRPr lang="en-US" sz="1200" dirty="0">
                         <a:latin typeface="Calibri" charset="0"/>
                         <a:ea typeface="Calibri" charset="0"/>
                         <a:cs typeface="Calibri" charset="0"/>
@@ -3225,7 +3264,7 @@
                         <a:buNone/>
                       </a:pPr>
                       <a:r>
-                        <a:rPr lang="en-US" sz="1250" dirty="0">
+                        <a:rPr lang="en-US" sz="1200" dirty="0">
                           <a:solidFill>
                             <a:srgbClr val="2E2119"/>
                           </a:solidFill>
@@ -3233,9 +3272,9 @@
                           <a:ea typeface="Calibri" pitchFamily="34" charset="-122"/>
                           <a:cs typeface="Calibri" pitchFamily="34" charset="-120"/>
                         </a:rPr>
-                        <a:t>Listas simples por categorías</a:t>
+                        <a:t>Colaborativo de verdad, en tiempo real</a:t>
                       </a:r>
-                      <a:endParaRPr lang="en-US" sz="1250" dirty="0">
+                      <a:endParaRPr lang="en-US" sz="1200" dirty="0">
                         <a:latin typeface="Calibri" charset="0"/>
                         <a:ea typeface="Calibri" charset="0"/>
                         <a:cs typeface="Calibri" charset="0"/>
@@ -3293,7 +3332,7 @@
                         <a:buNone/>
                       </a:pPr>
                       <a:r>
-                        <a:rPr lang="en-US" sz="1250" dirty="0">
+                        <a:rPr lang="en-US" sz="1200" dirty="0">
                           <a:solidFill>
                             <a:srgbClr val="2E2119"/>
                           </a:solidFill>
@@ -3301,9 +3340,9 @@
                           <a:ea typeface="Calibri" pitchFamily="34" charset="-122"/>
                           <a:cs typeface="Calibri" pitchFamily="34" charset="-120"/>
                         </a:rPr>
-                        <a:t>Borra items sin querer; pide cuenta hasta en solitario</a:t>
+                        <a:t>Paso extra al añadir un item; su "Inspiración" no resuelve el caso de uso</a:t>
                       </a:r>
-                      <a:endParaRPr lang="en-US" sz="1250" dirty="0">
+                      <a:endParaRPr lang="en-US" sz="1200" dirty="0">
                         <a:latin typeface="Calibri" charset="0"/>
                         <a:ea typeface="Calibri" charset="0"/>
                         <a:cs typeface="Calibri" charset="0"/>
@@ -3353,7 +3392,7 @@
                   </a:tcPr>
                 </a:tc>
               </a:tr>
-              <a:tr h="438912">
+              <a:tr h="457200">
                 <a:tc>
                   <a:txBody>
                     <a:bodyPr/>
@@ -3363,7 +3402,7 @@
                         <a:buNone/>
                       </a:pPr>
                       <a:r>
-                        <a:rPr lang="en-US" sz="1250" dirty="0">
+                        <a:rPr lang="en-US" sz="1200" dirty="0">
                           <a:solidFill>
                             <a:srgbClr val="2E2119"/>
                           </a:solidFill>
@@ -3373,7 +3412,7 @@
                         </a:rPr>
                         <a:t>AnyList</a:t>
                       </a:r>
-                      <a:endParaRPr lang="en-US" sz="1250" dirty="0">
+                      <a:endParaRPr lang="en-US" sz="1200" dirty="0">
                         <a:latin typeface="Calibri" charset="0"/>
                         <a:ea typeface="Calibri" charset="0"/>
                         <a:cs typeface="Calibri" charset="0"/>
@@ -3431,7 +3470,7 @@
                         <a:buNone/>
                       </a:pPr>
                       <a:r>
-                        <a:rPr lang="en-US" sz="1250" dirty="0">
+                        <a:rPr lang="en-US" sz="1200" dirty="0">
                           <a:solidFill>
                             <a:srgbClr val="2E2119"/>
                           </a:solidFill>
@@ -3439,9 +3478,9 @@
                           <a:ea typeface="Calibri" pitchFamily="34" charset="-122"/>
                           <a:cs typeface="Calibri" pitchFamily="34" charset="-120"/>
                         </a:rPr>
-                        <a:t>Listas compartidas + recetas</a:t>
+                        <a:t>Reconoce items al escribir + código de barras</a:t>
                       </a:r>
-                      <a:endParaRPr lang="en-US" sz="1250" dirty="0">
+                      <a:endParaRPr lang="en-US" sz="1200" dirty="0">
                         <a:latin typeface="Calibri" charset="0"/>
                         <a:ea typeface="Calibri" charset="0"/>
                         <a:cs typeface="Calibri" charset="0"/>
@@ -3499,7 +3538,7 @@
                         <a:buNone/>
                       </a:pPr>
                       <a:r>
-                        <a:rPr lang="en-US" sz="1250" dirty="0">
+                        <a:rPr lang="en-US" sz="1200" dirty="0">
                           <a:solidFill>
                             <a:srgbClr val="2E2119"/>
                           </a:solidFill>
@@ -3507,9 +3546,9 @@
                           <a:ea typeface="Calibri" pitchFamily="34" charset="-122"/>
                           <a:cs typeface="Calibri" pitchFamily="34" charset="-120"/>
                         </a:rPr>
-                        <a:t>Interfaz "obtusa"; borra el item al marcarlo comprado</a:t>
+                        <a:t>Todo el valor apunta a cocinar, no a ahorrar o controlar stock</a:t>
                       </a:r>
-                      <a:endParaRPr lang="en-US" sz="1250" dirty="0">
+                      <a:endParaRPr lang="en-US" sz="1200" dirty="0">
                         <a:latin typeface="Calibri" charset="0"/>
                         <a:ea typeface="Calibri" charset="0"/>
                         <a:cs typeface="Calibri" charset="0"/>
@@ -3565,18 +3604,18 @@
       </p:graphicFrame>
       <p:sp>
         <p:nvSpPr>
-          <p:cNvPr id="7" name="Shape 3"/>
+          <p:cNvPr id="8" name="Shape 4"/>
           <p:cNvSpPr/>
           <p:nvPr/>
         </p:nvSpPr>
         <p:spPr>
           <a:xfrm>
-            <a:off x="548640" y="3840480"/>
-            <a:ext cx="11064240" cy="1417320"/>
+            <a:off x="548640" y="3977640"/>
+            <a:ext cx="11064240" cy="1280160"/>
           </a:xfrm>
           <a:prstGeom prst="roundRect">
             <a:avLst>
-              <a:gd name="adj" fmla="val 7742"/>
+              <a:gd name="adj" fmla="val 8571"/>
             </a:avLst>
           </a:prstGeom>
           <a:solidFill>
@@ -3594,14 +3633,14 @@
       </p:sp>
       <p:sp>
         <p:nvSpPr>
-          <p:cNvPr id="8" name="Text 4"/>
-          <p:cNvSpPr txBox="1"/>
-          <p:nvPr/>
-        </p:nvSpPr>
-        <p:spPr>
-          <a:xfrm>
-            <a:off x="777240" y="3977640"/>
-            <a:ext cx="4572000" cy="274320"/>
+          <p:cNvPr id="9" name="Text 5"/>
+          <p:cNvSpPr txBox="1"/>
+          <p:nvPr/>
+        </p:nvSpPr>
+        <p:spPr>
+          <a:xfrm>
+            <a:off x="777240" y="4096512"/>
+            <a:ext cx="5486400" cy="274320"/>
           </a:xfrm>
           <a:prstGeom prst="rect">
             <a:avLst/>
@@ -3625,7 +3664,7 @@
                 <a:ea typeface="Calibri" pitchFamily="34" charset="-122"/>
                 <a:cs typeface="Calibri" pitchFamily="34" charset="-120"/>
               </a:rPr>
-              <a:t>Cita literal verificada</a:t>
+              <a:t>Cita literal verificada (fuente secundaria)</a:t>
             </a:r>
             <a:endParaRPr lang="en-US" sz="1100" dirty="0"/>
           </a:p>
@@ -3633,14 +3672,14 @@
       </p:sp>
       <p:sp>
         <p:nvSpPr>
-          <p:cNvPr id="9" name="Text 5"/>
-          <p:cNvSpPr txBox="1"/>
-          <p:nvPr/>
-        </p:nvSpPr>
-        <p:spPr>
-          <a:xfrm>
-            <a:off x="777240" y="4251960"/>
-            <a:ext cx="10607040" cy="548640"/>
+          <p:cNvPr id="10" name="Text 6"/>
+          <p:cNvSpPr txBox="1"/>
+          <p:nvPr/>
+        </p:nvSpPr>
+        <p:spPr>
+          <a:xfrm>
+            <a:off x="777240" y="4370832"/>
+            <a:ext cx="10607040" cy="502920"/>
           </a:xfrm>
           <a:prstGeom prst="rect">
             <a:avLst/>
@@ -3656,7 +3695,7 @@
               <a:buNone/>
             </a:pPr>
             <a:r>
-              <a:rPr lang="en-US" sz="1300" i="1" dirty="0">
+              <a:rPr lang="en-US" sz="1250" i="1" dirty="0">
                 <a:solidFill>
                   <a:srgbClr val="2E2119"/>
                 </a:solidFill>
@@ -3666,19 +3705,19 @@
               </a:rPr>
               <a:t>"El icono de la aplicación aparece marcado como comprado en el Apple Watch pero no llega a descargarse ni a instalarse."</a:t>
             </a:r>
-            <a:endParaRPr lang="en-US" sz="1300" dirty="0"/>
-          </a:p>
-        </p:txBody>
-      </p:sp>
-      <p:sp>
-        <p:nvSpPr>
-          <p:cNvPr id="10" name="Text 6"/>
-          <p:cNvSpPr txBox="1"/>
-          <p:nvPr/>
-        </p:nvSpPr>
-        <p:spPr>
-          <a:xfrm>
-            <a:off x="777240" y="4800600"/>
+            <a:endParaRPr lang="en-US" sz="1250" dirty="0"/>
+          </a:p>
+        </p:txBody>
+      </p:sp>
+      <p:sp>
+        <p:nvSpPr>
+          <p:cNvPr id="11" name="Text 7"/>
+          <p:cNvSpPr txBox="1"/>
+          <p:nvPr/>
+        </p:nvSpPr>
+        <p:spPr>
+          <a:xfrm>
+            <a:off x="777240" y="4864608"/>
             <a:ext cx="10607040" cy="320040"/>
           </a:xfrm>
           <a:prstGeom prst="rect">
@@ -3711,7 +3750,7 @@
       </p:sp>
       <p:sp>
         <p:nvSpPr>
-          <p:cNvPr id="11" name="Shape 7"/>
+          <p:cNvPr id="12" name="Shape 8"/>
           <p:cNvSpPr/>
           <p:nvPr/>
         </p:nvSpPr>
@@ -3738,7 +3777,7 @@
       </p:sp>
       <p:sp>
         <p:nvSpPr>
-          <p:cNvPr id="12" name="Text 8"/>
+          <p:cNvPr id="13" name="Text 9"/>
           <p:cNvSpPr txBox="1"/>
           <p:nvPr/>
         </p:nvSpPr>
@@ -4005,7 +4044,7 @@
                 <a:ea typeface="Cambria" pitchFamily="34" charset="-122"/>
                 <a:cs typeface="Cambria" pitchFamily="34" charset="-120"/>
               </a:rPr>
-              <a:t>De usabilidad</a:t>
+              <a:t>De posicionamiento</a:t>
             </a:r>
             <a:endParaRPr lang="en-US" sz="1500" dirty="0"/>
           </a:p>
@@ -4044,7 +4083,7 @@
                 <a:ea typeface="Calibri" pitchFamily="34" charset="-122"/>
                 <a:cs typeface="Calibri" pitchFamily="34" charset="-120"/>
               </a:rPr>
-              <a:t>Toda solución exige abrir "otra app" aparte del WhatsApp de siempre — por eso se abandonan a las 2 pruebas.</a:t>
+              <a:t>Ni Bring! ni AnyList apuntan a ahorrar o controlar stock — las dos están construidas para cocinar y planificar recetas.</a:t>
             </a:r>
             <a:endParaRPr lang="en-US" sz="1300" dirty="0"/>
           </a:p>
@@ -4112,7 +4151,7 @@
                 <a:ea typeface="Cambria" pitchFamily="34" charset="-122"/>
                 <a:cs typeface="Cambria" pitchFamily="34" charset="-120"/>
               </a:rPr>
-              <a:t>Funcional</a:t>
+              <a:t>De fricción</a:t>
             </a:r>
             <a:endParaRPr lang="en-US" sz="1500" dirty="0"/>
           </a:p>
@@ -4151,7 +4190,7 @@
                 <a:ea typeface="Calibri" pitchFamily="34" charset="-122"/>
                 <a:cs typeface="Calibri" pitchFamily="34" charset="-120"/>
               </a:rPr>
-              <a:t>Ninguna combina lista de la compra con inventario real de nevera.</a:t>
+              <a:t>Cualquier paso extra sobre "simplemente escribir" hace que la gente vuelva a Notas, la solución más simple.</a:t>
             </a:r>
             <a:endParaRPr lang="en-US" sz="1300" dirty="0"/>
           </a:p>
@@ -4219,7 +4258,7 @@
                 <a:ea typeface="Cambria" pitchFamily="34" charset="-122"/>
                 <a:cs typeface="Cambria" pitchFamily="34" charset="-120"/>
               </a:rPr>
-              <a:t>De fiabilidad</a:t>
+              <a:t>De colaboración</a:t>
             </a:r>
             <a:endParaRPr lang="en-US" sz="1500" dirty="0"/>
           </a:p>
@@ -4258,7 +4297,7 @@
                 <a:ea typeface="Calibri" pitchFamily="34" charset="-122"/>
                 <a:cs typeface="Calibri" pitchFamily="34" charset="-120"/>
               </a:rPr>
-              <a:t>Hasta las apps "serias" tienen fallos básicos (AnyList borra items al marcarlos comprados).</a:t>
+              <a:t>La solución que mejor funciona en la práctica (Notas) no se puede compartir ni coeditar en tiempo real.</a:t>
             </a:r>
             <a:endParaRPr lang="en-US" sz="1300" dirty="0"/>
           </a:p>
@@ -4319,7 +4358,7 @@
                 <a:ea typeface="Calibri" pitchFamily="34" charset="-122"/>
                 <a:cs typeface="Calibri" pitchFamily="34" charset="-120"/>
               </a:rPr>
-              <a:t>El hueco no es "una lista más bonita": es combinar nevera + lista compartida sin fricción de aprendizaje, resistiendo bien que dos personas la usen a la vez.</a:t>
+              <a:t>El hueco real: una herramienta tan rápida de usar como Notas, tan colaborativa como Bring!, y centrada en ahorro y control de stock — el ángulo que nadie cubre.</a:t>
             </a:r>
             <a:endParaRPr lang="en-US" sz="1400" dirty="0"/>
           </a:p>

--- a/docs/larder-presentacion.pptx
+++ b/docs/larder-presentacion.pptx
@@ -14,9 +14,11 @@
     <p:sldId id="262" r:id="rId8"/>
     <p:sldId id="263" r:id="rId9"/>
     <p:sldId id="264" r:id="rId10"/>
+    <p:sldId id="265" r:id="rId11"/>
+    <p:sldId id="266" r:id="rId12"/>
   </p:sldIdLst>
   <p:notesMasterIdLst>
-    <p:notesMasterId r:id="rId11"/>
+    <p:notesMasterId r:id="rId13"/>
   </p:notesMasterIdLst>
   <p:sldSz cx="12192000" cy="6858000"/>
   <p:notesSz cx="6858000" cy="12192000"/>
@@ -552,6 +554,182 @@
 </p:notes>
 </file>
 
+<file path=ppt/notesSlides/notesSlide10.xml><?xml version="1.0" encoding="utf-8"?>
+<p:notes xmlns:a="http://schemas.openxmlformats.org/drawingml/2006/main" xmlns:r="http://schemas.openxmlformats.org/officeDocument/2006/relationships" xmlns:p="http://schemas.openxmlformats.org/presentationml/2006/main">
+  <p:cSld>
+    <p:spTree>
+      <p:nvGrpSpPr>
+        <p:cNvPr id="1" name=""/>
+        <p:cNvGrpSpPr/>
+        <p:nvPr/>
+      </p:nvGrpSpPr>
+      <p:grpSpPr>
+        <a:xfrm>
+          <a:off x="0" y="0"/>
+          <a:ext cx="0" cy="0"/>
+          <a:chOff x="0" y="0"/>
+          <a:chExt cx="0" cy="0"/>
+        </a:xfrm>
+      </p:grpSpPr>
+      <p:sp>
+        <p:nvSpPr>
+          <p:cNvPr id="2" name="Slide Image Placeholder 1"/>
+          <p:cNvSpPr>
+            <a:spLocks noGrp="1" noRot="1" noChangeAspect="1"/>
+          </p:cNvSpPr>
+          <p:nvPr>
+            <p:ph type="sldImg"/>
+          </p:nvPr>
+        </p:nvSpPr>
+        <p:spPr/>
+      </p:sp>
+      <p:sp>
+        <p:nvSpPr>
+          <p:cNvPr id="3" name="Notes Placeholder 2"/>
+          <p:cNvSpPr>
+            <a:spLocks noGrp="1"/>
+          </p:cNvSpPr>
+          <p:nvPr>
+            <p:ph type="body" idx="1"/>
+          </p:nvPr>
+        </p:nvSpPr>
+        <p:spPr/>
+        <p:txBody>
+          <a:bodyPr/>
+          <a:lstStyle/>
+          <a:p>
+            <a:r>
+              <a:rPr lang="en-US" dirty="0"/>
+              <a:t>El nombre Larder es una palabra inglesa comun (despensa) — revisar en P5 si dificulta encontrarlo en buscadores. De momento se mantiene.</a:t>
+            </a:r>
+            <a:endParaRPr lang="en-US" dirty="0"/>
+          </a:p>
+        </p:txBody>
+      </p:sp>
+      <p:sp>
+        <p:nvSpPr>
+          <p:cNvPr id="4" name="Slide Number Placeholder 3"/>
+          <p:cNvSpPr>
+            <a:spLocks noGrp="1"/>
+          </p:cNvSpPr>
+          <p:nvPr>
+            <p:ph type="sldNum" sz="quarter" idx="10"/>
+          </p:nvPr>
+        </p:nvSpPr>
+        <p:spPr/>
+        <p:txBody>
+          <a:bodyPr/>
+          <a:lstStyle/>
+          <a:p>
+            <a:fld id="{F7021451-1387-4CA6-816F-3879F97B5CBC}" type="slidenum">
+              <a:rPr lang="en-US"/>
+              <a:t>10</a:t>
+            </a:fld>
+            <a:endParaRPr lang="en-US"/>
+          </a:p>
+        </p:txBody>
+      </p:sp>
+    </p:spTree>
+    <p:extLst>
+      <p:ext uri="{BB962C8B-B14F-4D97-AF65-F5344CB8AC3E}">
+        <p14:creationId xmlns:p14="http://schemas.microsoft.com/office/powerpoint/2010/main" val="1024086991"/>
+      </p:ext>
+    </p:extLst>
+  </p:cSld>
+  <p:clrMapOvr>
+    <a:masterClrMapping/>
+  </p:clrMapOvr>
+</p:notes>
+</file>
+
+<file path=ppt/notesSlides/notesSlide11.xml><?xml version="1.0" encoding="utf-8"?>
+<p:notes xmlns:a="http://schemas.openxmlformats.org/drawingml/2006/main" xmlns:r="http://schemas.openxmlformats.org/officeDocument/2006/relationships" xmlns:p="http://schemas.openxmlformats.org/presentationml/2006/main">
+  <p:cSld>
+    <p:spTree>
+      <p:nvGrpSpPr>
+        <p:cNvPr id="1" name=""/>
+        <p:cNvGrpSpPr/>
+        <p:nvPr/>
+      </p:nvGrpSpPr>
+      <p:grpSpPr>
+        <a:xfrm>
+          <a:off x="0" y="0"/>
+          <a:ext cx="0" cy="0"/>
+          <a:chOff x="0" y="0"/>
+          <a:chExt cx="0" cy="0"/>
+        </a:xfrm>
+      </p:grpSpPr>
+      <p:sp>
+        <p:nvSpPr>
+          <p:cNvPr id="2" name="Slide Image Placeholder 1"/>
+          <p:cNvSpPr>
+            <a:spLocks noGrp="1" noRot="1" noChangeAspect="1"/>
+          </p:cNvSpPr>
+          <p:nvPr>
+            <p:ph type="sldImg"/>
+          </p:nvPr>
+        </p:nvSpPr>
+        <p:spPr/>
+      </p:sp>
+      <p:sp>
+        <p:nvSpPr>
+          <p:cNvPr id="3" name="Notes Placeholder 2"/>
+          <p:cNvSpPr>
+            <a:spLocks noGrp="1"/>
+          </p:cNvSpPr>
+          <p:nvPr>
+            <p:ph type="body" idx="1"/>
+          </p:nvPr>
+        </p:nvSpPr>
+        <p:spPr/>
+        <p:txBody>
+          <a:bodyPr/>
+          <a:lstStyle/>
+          <a:p>
+            <a:r>
+              <a:rPr lang="en-US" dirty="0"/>
+              <a:t>Cierre. Recalcar que lo entregado el viernes es la ideacion completa (docs/ideacion.md), no codigo terminado — eso es correcto para P1 en esta fase.</a:t>
+            </a:r>
+            <a:endParaRPr lang="en-US" dirty="0"/>
+          </a:p>
+        </p:txBody>
+      </p:sp>
+      <p:sp>
+        <p:nvSpPr>
+          <p:cNvPr id="4" name="Slide Number Placeholder 3"/>
+          <p:cNvSpPr>
+            <a:spLocks noGrp="1"/>
+          </p:cNvSpPr>
+          <p:nvPr>
+            <p:ph type="sldNum" sz="quarter" idx="10"/>
+          </p:nvPr>
+        </p:nvSpPr>
+        <p:spPr/>
+        <p:txBody>
+          <a:bodyPr/>
+          <a:lstStyle/>
+          <a:p>
+            <a:fld id="{F7021451-1387-4CA6-816F-3879F97B5CBC}" type="slidenum">
+              <a:rPr lang="en-US"/>
+              <a:t>11</a:t>
+            </a:fld>
+            <a:endParaRPr lang="en-US"/>
+          </a:p>
+        </p:txBody>
+      </p:sp>
+    </p:spTree>
+    <p:extLst>
+      <p:ext uri="{BB962C8B-B14F-4D97-AF65-F5344CB8AC3E}">
+        <p14:creationId xmlns:p14="http://schemas.microsoft.com/office/powerpoint/2010/main" val="1024086991"/>
+      </p:ext>
+    </p:extLst>
+  </p:cSld>
+  <p:clrMapOvr>
+    <a:masterClrMapping/>
+  </p:clrMapOvr>
+</p:notes>
+</file>
+
 <file path=ppt/notesSlides/notesSlide2.xml><?xml version="1.0" encoding="utf-8"?>
 <p:notes xmlns:a="http://schemas.openxmlformats.org/drawingml/2006/main" xmlns:r="http://schemas.openxmlformats.org/officeDocument/2006/relationships" xmlns:p="http://schemas.openxmlformats.org/presentationml/2006/main">
   <p:cSld>
@@ -862,7 +1040,7 @@
           <a:p>
             <a:r>
               <a:rPr lang="en-US" dirty="0"/>
-              <a:t>Se amplio el segmento objetivo a estudiantes+parejas+cualquiera que comparta gastos. Al no encontrar un desglose fiable para ese cruce en A Coruña, el mercado objetivo se iguala al accesible, y se documenta honestamente la limitacion de la busqueda.</a:t>
+              <a:t>n=12. Punto clave que pidio Nadia remarcar: la gente no usa apps de listas (0/12), y eso a pesar de que Bring!/AnyList existen y de que "una app especifica" era una opcion de respuesta explicita en la propia pregunta 3 -- nadie la marco. Esto no invalida la idea: valida que el problema no es "falta una app", sino que las que hay no logran adopcion real. Los dos stats de dolor (75% duplico, 75% volvio a la tienda) bajaron un poco respecto a n=11 (82%/73%), como es esperable con muestra pequena -- se anade el dato conjunto (50% sufrio ambas cosas el mismo mes) como refuerzo.</a:t>
             </a:r>
             <a:endParaRPr lang="en-US" dirty="0"/>
           </a:p>
@@ -950,7 +1128,7 @@
           <a:p>
             <a:r>
               <a:rPr lang="en-US" dirty="0"/>
-              <a:t>Coste fijo 0 porque se usa el tier gratuito de Render, sin dominio de pago. Eso hace el punto de equilibrio trivial (1 hogar), pero viene con un coste tecnico real: sleep del servicio y disco efimero para SQLite.</a:t>
+              <a:t>Categorizacion pedida explicitamente: "no se quien compro que" cuenta para AMBAS columnas (coop + tracker de gastos), "no saber que quieren los otros"/"comen mis cosas" es coop puro, "no participan/tardan en pagar" es tracker de gastos puro. El 33% de coop y el 33% de "no llevamos cuenta" en la P8 son numeros independientes que apuntan al mismo sitio: History no es una funcion añadida sin motivo.</a:t>
             </a:r>
             <a:endParaRPr lang="en-US" dirty="0"/>
           </a:p>
@@ -1038,7 +1216,7 @@
           <a:p>
             <a:r>
               <a:rPr lang="en-US" dirty="0"/>
-              <a:t>Nadie nos elegiria por construir facturacion o cobro con tarjeta propios; si por como llevamos nevera y lista compartida. Orden de construccion: una pantalla completa antes de abrir la siguiente.</a:t>
+              <a:t>Se amplio el segmento objetivo a estudiantes+parejas+cualquiera que comparta gastos. Al no encontrar un desglose fiable para ese cruce en A Coruña, el mercado objetivo se iguala al accesible, y se documenta honestamente la limitacion de la busqueda.</a:t>
             </a:r>
             <a:endParaRPr lang="en-US" dirty="0"/>
           </a:p>
@@ -1126,7 +1304,7 @@
           <a:p>
             <a:r>
               <a:rPr lang="en-US" dirty="0"/>
-              <a:t>El nombre Larder es una palabra inglesa comun (despensa) — revisar en P5 si dificulta encontrarlo en buscadores. De momento se mantiene.</a:t>
+              <a:t>Coste fijo 0 porque se usa el tier gratuito de Render, sin dominio de pago. Eso hace el punto de equilibrio trivial (1 hogar), pero viene con un coste tecnico real: sleep del servicio y disco efimero para SQLite.</a:t>
             </a:r>
             <a:endParaRPr lang="en-US" dirty="0"/>
           </a:p>
@@ -1214,7 +1392,7 @@
           <a:p>
             <a:r>
               <a:rPr lang="en-US" dirty="0"/>
-              <a:t>Cierre. Recalcar que lo entregado el viernes es la ideacion completa (docs/ideacion.md), no codigo terminado — eso es correcto para P1 en esta fase.</a:t>
+              <a:t>Nadie nos elegiria por construir facturacion o cobro con tarjeta propios; si por como llevamos nevera y lista compartida. Orden de construccion: una pantalla completa antes de abrir la siguiente.</a:t>
             </a:r>
             <a:endParaRPr lang="en-US" dirty="0"/>
           </a:p>
@@ -1784,6 +1962,1212 @@
               <a:t>2º DAM  ·  Bloque P1 — Que exista  ·  Documento de ideación</a:t>
             </a:r>
             <a:endParaRPr lang="en-US" sz="1300" dirty="0"/>
+          </a:p>
+        </p:txBody>
+      </p:sp>
+    </p:spTree>
+  </p:cSld>
+  <p:clrMapOvr>
+    <a:masterClrMapping/>
+  </p:clrMapOvr>
+</p:sld>
+</file>
+
+<file path=ppt/slides/slide10.xml><?xml version="1.0" encoding="utf-8"?>
+<p:sld xmlns:a="http://schemas.openxmlformats.org/drawingml/2006/main" xmlns:r="http://schemas.openxmlformats.org/officeDocument/2006/relationships" xmlns:p="http://schemas.openxmlformats.org/presentationml/2006/main">
+  <p:cSld name="Slide 10">
+    <p:bg>
+      <p:bgPr>
+        <a:solidFill>
+          <a:srgbClr val="FFFFFF"/>
+        </a:solidFill>
+      </p:bgPr>
+    </p:bg>
+    <p:spTree>
+      <p:nvGrpSpPr>
+        <p:cNvPr id="1" name=""/>
+        <p:cNvGrpSpPr/>
+        <p:nvPr/>
+      </p:nvGrpSpPr>
+      <p:grpSpPr>
+        <a:xfrm>
+          <a:off x="0" y="0"/>
+          <a:ext cx="0" cy="0"/>
+          <a:chOff x="0" y="0"/>
+          <a:chExt cx="0" cy="0"/>
+        </a:xfrm>
+      </p:grpSpPr>
+      <p:sp>
+        <p:nvSpPr>
+          <p:cNvPr id="2" name="Shape 0"/>
+          <p:cNvSpPr/>
+          <p:nvPr/>
+        </p:nvSpPr>
+        <p:spPr>
+          <a:xfrm>
+            <a:off x="548640" y="457200"/>
+            <a:ext cx="566928" cy="566928"/>
+          </a:xfrm>
+          <a:prstGeom prst="ellipse">
+            <a:avLst/>
+          </a:prstGeom>
+          <a:solidFill>
+            <a:srgbClr val="C9682B"/>
+          </a:solidFill>
+          <a:ln/>
+        </p:spPr>
+      </p:sp>
+      <p:pic>
+        <p:nvPicPr>
+          <p:cNvPr id="3" name="Image 0" descr="preencoded.png">    </p:cNvPr>
+          <p:cNvPicPr>
+            <a:picLocks noChangeAspect="1"/>
+          </p:cNvPicPr>
+          <p:nvPr/>
+        </p:nvPicPr>
+        <p:blipFill>
+          <a:blip r:embed="rId1"/>
+          <a:stretch>
+            <a:fillRect/>
+          </a:stretch>
+        </p:blipFill>
+        <p:spPr>
+          <a:xfrm>
+            <a:off x="684703" y="593263"/>
+            <a:ext cx="294803" cy="294803"/>
+          </a:xfrm>
+          <a:prstGeom prst="rect">
+            <a:avLst/>
+          </a:prstGeom>
+        </p:spPr>
+      </p:pic>
+      <p:sp>
+        <p:nvSpPr>
+          <p:cNvPr id="4" name="Text 1"/>
+          <p:cNvSpPr txBox="1"/>
+          <p:nvPr/>
+        </p:nvSpPr>
+        <p:spPr>
+          <a:xfrm>
+            <a:off x="1280160" y="438912"/>
+            <a:ext cx="7315200" cy="274320"/>
+          </a:xfrm>
+          <a:prstGeom prst="rect">
+            <a:avLst/>
+          </a:prstGeom>
+          <a:noFill/>
+          <a:ln/>
+        </p:spPr>
+        <p:txBody>
+          <a:bodyPr wrap="square" lIns="0" tIns="0" rIns="0" bIns="0" rtlCol="0" anchor="ctr"/>
+          <a:lstStyle/>
+          <a:p>
+            <a:pPr indent="0" marL="0">
+              <a:buNone/>
+            </a:pPr>
+            <a:r>
+              <a:rPr lang="en-US" sz="1200" b="1" spc="200" kern="0" dirty="0">
+                <a:solidFill>
+                  <a:srgbClr val="C9682B"/>
+                </a:solidFill>
+                <a:latin typeface="Calibri" pitchFamily="34" charset="0"/>
+                <a:ea typeface="Calibri" pitchFamily="34" charset="-122"/>
+                <a:cs typeface="Calibri" pitchFamily="34" charset="-120"/>
+              </a:rPr>
+              <a:t>PASO 6</a:t>
+            </a:r>
+            <a:endParaRPr lang="en-US" sz="1200" dirty="0"/>
+          </a:p>
+        </p:txBody>
+      </p:sp>
+      <p:sp>
+        <p:nvSpPr>
+          <p:cNvPr id="5" name="Text 2"/>
+          <p:cNvSpPr txBox="1"/>
+          <p:nvPr/>
+        </p:nvSpPr>
+        <p:spPr>
+          <a:xfrm>
+            <a:off x="1280160" y="676656"/>
+            <a:ext cx="9601200" cy="502920"/>
+          </a:xfrm>
+          <a:prstGeom prst="rect">
+            <a:avLst/>
+          </a:prstGeom>
+          <a:noFill/>
+          <a:ln/>
+        </p:spPr>
+        <p:txBody>
+          <a:bodyPr wrap="square" lIns="0" tIns="0" rIns="0" bIns="0" rtlCol="0" anchor="ctr"/>
+          <a:lstStyle/>
+          <a:p>
+            <a:pPr indent="0" marL="0">
+              <a:buNone/>
+            </a:pPr>
+            <a:r>
+              <a:rPr lang="en-US" sz="2800" b="1" dirty="0">
+                <a:solidFill>
+                  <a:srgbClr val="2E2119"/>
+                </a:solidFill>
+                <a:latin typeface="Cambria" pitchFamily="34" charset="0"/>
+                <a:ea typeface="Cambria" pitchFamily="34" charset="-122"/>
+                <a:cs typeface="Cambria" pitchFamily="34" charset="-120"/>
+              </a:rPr>
+              <a:t>Documento de una página</a:t>
+            </a:r>
+            <a:endParaRPr lang="en-US" sz="2800" dirty="0"/>
+          </a:p>
+        </p:txBody>
+      </p:sp>
+      <p:sp>
+        <p:nvSpPr>
+          <p:cNvPr id="6" name="Shape 3"/>
+          <p:cNvSpPr/>
+          <p:nvPr/>
+        </p:nvSpPr>
+        <p:spPr>
+          <a:xfrm>
+            <a:off x="548640" y="1417320"/>
+            <a:ext cx="5440680" cy="896112"/>
+          </a:xfrm>
+          <a:prstGeom prst="roundRect">
+            <a:avLst>
+              <a:gd name="adj" fmla="val 12245"/>
+            </a:avLst>
+          </a:prstGeom>
+          <a:solidFill>
+            <a:srgbClr val="F4E9DA"/>
+          </a:solidFill>
+          <a:ln/>
+          <a:effectLst>
+            <a:outerShdw sx="100000" sy="100000" kx="0" ky="0" algn="bl" rotWithShape="0" blurRad="76200" dist="25400" dir="5400000">
+              <a:srgbClr val="000000">
+                <a:alpha val="12000"/>
+              </a:srgbClr>
+            </a:outerShdw>
+          </a:effectLst>
+        </p:spPr>
+      </p:sp>
+      <p:sp>
+        <p:nvSpPr>
+          <p:cNvPr id="7" name="Text 4"/>
+          <p:cNvSpPr txBox="1"/>
+          <p:nvPr/>
+        </p:nvSpPr>
+        <p:spPr>
+          <a:xfrm>
+            <a:off x="731520" y="1490472"/>
+            <a:ext cx="5074920" cy="237744"/>
+          </a:xfrm>
+          <a:prstGeom prst="rect">
+            <a:avLst/>
+          </a:prstGeom>
+          <a:noFill/>
+          <a:ln/>
+        </p:spPr>
+        <p:txBody>
+          <a:bodyPr wrap="square" lIns="0" tIns="0" rIns="0" bIns="0" rtlCol="0" anchor="ctr"/>
+          <a:lstStyle/>
+          <a:p>
+            <a:pPr indent="0" marL="0">
+              <a:buNone/>
+            </a:pPr>
+            <a:r>
+              <a:rPr lang="en-US" sz="1000" b="1" spc="100" kern="0" dirty="0">
+                <a:solidFill>
+                  <a:srgbClr val="C9682B"/>
+                </a:solidFill>
+                <a:latin typeface="Calibri" pitchFamily="34" charset="0"/>
+                <a:ea typeface="Calibri" pitchFamily="34" charset="-122"/>
+                <a:cs typeface="Calibri" pitchFamily="34" charset="-120"/>
+              </a:rPr>
+              <a:t>NOMBRE Y MENSAJE</a:t>
+            </a:r>
+            <a:endParaRPr lang="en-US" sz="1000" dirty="0"/>
+          </a:p>
+        </p:txBody>
+      </p:sp>
+      <p:sp>
+        <p:nvSpPr>
+          <p:cNvPr id="8" name="Text 5"/>
+          <p:cNvSpPr txBox="1"/>
+          <p:nvPr/>
+        </p:nvSpPr>
+        <p:spPr>
+          <a:xfrm>
+            <a:off x="731520" y="1728216"/>
+            <a:ext cx="5074920" cy="530352"/>
+          </a:xfrm>
+          <a:prstGeom prst="rect">
+            <a:avLst/>
+          </a:prstGeom>
+          <a:noFill/>
+          <a:ln/>
+        </p:spPr>
+        <p:txBody>
+          <a:bodyPr wrap="square" lIns="0" tIns="0" rIns="0" bIns="0" rtlCol="0" anchor="t"/>
+          <a:lstStyle/>
+          <a:p>
+            <a:pPr indent="0" marL="0">
+              <a:buNone/>
+            </a:pPr>
+            <a:r>
+              <a:rPr lang="en-US" sz="1100" dirty="0">
+                <a:solidFill>
+                  <a:srgbClr val="2E2119"/>
+                </a:solidFill>
+                <a:latin typeface="Calibri" pitchFamily="34" charset="0"/>
+                <a:ea typeface="Calibri" pitchFamily="34" charset="-122"/>
+                <a:cs typeface="Calibri" pitchFamily="34" charset="-120"/>
+              </a:rPr>
+              <a:t>Larder — controlar la nevera y la compra sin duplicados ni viajes extra, sin depender de un WhatsApp desordenado.</a:t>
+            </a:r>
+            <a:endParaRPr lang="en-US" sz="1100" dirty="0"/>
+          </a:p>
+        </p:txBody>
+      </p:sp>
+      <p:sp>
+        <p:nvSpPr>
+          <p:cNvPr id="9" name="Shape 6"/>
+          <p:cNvSpPr/>
+          <p:nvPr/>
+        </p:nvSpPr>
+        <p:spPr>
+          <a:xfrm>
+            <a:off x="6172200" y="1417320"/>
+            <a:ext cx="5440680" cy="896112"/>
+          </a:xfrm>
+          <a:prstGeom prst="roundRect">
+            <a:avLst>
+              <a:gd name="adj" fmla="val 12245"/>
+            </a:avLst>
+          </a:prstGeom>
+          <a:solidFill>
+            <a:srgbClr val="EDE6DC"/>
+          </a:solidFill>
+          <a:ln/>
+          <a:effectLst>
+            <a:outerShdw sx="100000" sy="100000" kx="0" ky="0" algn="bl" rotWithShape="0" blurRad="76200" dist="25400" dir="5400000">
+              <a:srgbClr val="000000">
+                <a:alpha val="12000"/>
+              </a:srgbClr>
+            </a:outerShdw>
+          </a:effectLst>
+        </p:spPr>
+      </p:sp>
+      <p:sp>
+        <p:nvSpPr>
+          <p:cNvPr id="10" name="Text 7"/>
+          <p:cNvSpPr txBox="1"/>
+          <p:nvPr/>
+        </p:nvSpPr>
+        <p:spPr>
+          <a:xfrm>
+            <a:off x="6355080" y="1490472"/>
+            <a:ext cx="5074920" cy="237744"/>
+          </a:xfrm>
+          <a:prstGeom prst="rect">
+            <a:avLst/>
+          </a:prstGeom>
+          <a:noFill/>
+          <a:ln/>
+        </p:spPr>
+        <p:txBody>
+          <a:bodyPr wrap="square" lIns="0" tIns="0" rIns="0" bIns="0" rtlCol="0" anchor="ctr"/>
+          <a:lstStyle/>
+          <a:p>
+            <a:pPr indent="0" marL="0">
+              <a:buNone/>
+            </a:pPr>
+            <a:r>
+              <a:rPr lang="en-US" sz="1000" b="1" spc="100" kern="0" dirty="0">
+                <a:solidFill>
+                  <a:srgbClr val="C9682B"/>
+                </a:solidFill>
+                <a:latin typeface="Calibri" pitchFamily="34" charset="0"/>
+                <a:ea typeface="Calibri" pitchFamily="34" charset="-122"/>
+                <a:cs typeface="Calibri" pitchFamily="34" charset="-120"/>
+              </a:rPr>
+              <a:t>PÚBLICO</a:t>
+            </a:r>
+            <a:endParaRPr lang="en-US" sz="1000" dirty="0"/>
+          </a:p>
+        </p:txBody>
+      </p:sp>
+      <p:sp>
+        <p:nvSpPr>
+          <p:cNvPr id="11" name="Text 8"/>
+          <p:cNvSpPr txBox="1"/>
+          <p:nvPr/>
+        </p:nvSpPr>
+        <p:spPr>
+          <a:xfrm>
+            <a:off x="6355080" y="1728216"/>
+            <a:ext cx="5074920" cy="530352"/>
+          </a:xfrm>
+          <a:prstGeom prst="rect">
+            <a:avLst/>
+          </a:prstGeom>
+          <a:noFill/>
+          <a:ln/>
+        </p:spPr>
+        <p:txBody>
+          <a:bodyPr wrap="square" lIns="0" tIns="0" rIns="0" bIns="0" rtlCol="0" anchor="t"/>
+          <a:lstStyle/>
+          <a:p>
+            <a:pPr indent="0" marL="0">
+              <a:buNone/>
+            </a:pPr>
+            <a:r>
+              <a:rPr lang="en-US" sz="1100" dirty="0">
+                <a:solidFill>
+                  <a:srgbClr val="2E2119"/>
+                </a:solidFill>
+                <a:latin typeface="Calibri" pitchFamily="34" charset="0"/>
+                <a:ea typeface="Calibri" pitchFamily="34" charset="-122"/>
+                <a:cs typeface="Calibri" pitchFamily="34" charset="-120"/>
+              </a:rPr>
+              <a:t>Quien organiza la compra en un hogar compartido de A Coruña. ≈99.700 hogares accesibles.</a:t>
+            </a:r>
+            <a:endParaRPr lang="en-US" sz="1100" dirty="0"/>
+          </a:p>
+        </p:txBody>
+      </p:sp>
+      <p:sp>
+        <p:nvSpPr>
+          <p:cNvPr id="12" name="Shape 9"/>
+          <p:cNvSpPr/>
+          <p:nvPr/>
+        </p:nvSpPr>
+        <p:spPr>
+          <a:xfrm>
+            <a:off x="548640" y="2432304"/>
+            <a:ext cx="5440680" cy="896112"/>
+          </a:xfrm>
+          <a:prstGeom prst="roundRect">
+            <a:avLst>
+              <a:gd name="adj" fmla="val 12245"/>
+            </a:avLst>
+          </a:prstGeom>
+          <a:solidFill>
+            <a:srgbClr val="F4E9DA"/>
+          </a:solidFill>
+          <a:ln/>
+          <a:effectLst>
+            <a:outerShdw sx="100000" sy="100000" kx="0" ky="0" algn="bl" rotWithShape="0" blurRad="76200" dist="25400" dir="5400000">
+              <a:srgbClr val="000000">
+                <a:alpha val="12000"/>
+              </a:srgbClr>
+            </a:outerShdw>
+          </a:effectLst>
+        </p:spPr>
+      </p:sp>
+      <p:sp>
+        <p:nvSpPr>
+          <p:cNvPr id="13" name="Text 10"/>
+          <p:cNvSpPr txBox="1"/>
+          <p:nvPr/>
+        </p:nvSpPr>
+        <p:spPr>
+          <a:xfrm>
+            <a:off x="731520" y="2505456"/>
+            <a:ext cx="5074920" cy="237744"/>
+          </a:xfrm>
+          <a:prstGeom prst="rect">
+            <a:avLst/>
+          </a:prstGeom>
+          <a:noFill/>
+          <a:ln/>
+        </p:spPr>
+        <p:txBody>
+          <a:bodyPr wrap="square" lIns="0" tIns="0" rIns="0" bIns="0" rtlCol="0" anchor="ctr"/>
+          <a:lstStyle/>
+          <a:p>
+            <a:pPr indent="0" marL="0">
+              <a:buNone/>
+            </a:pPr>
+            <a:r>
+              <a:rPr lang="en-US" sz="1000" b="1" spc="100" kern="0" dirty="0">
+                <a:solidFill>
+                  <a:srgbClr val="C9682B"/>
+                </a:solidFill>
+                <a:latin typeface="Calibri" pitchFamily="34" charset="0"/>
+                <a:ea typeface="Calibri" pitchFamily="34" charset="-122"/>
+                <a:cs typeface="Calibri" pitchFamily="34" charset="-120"/>
+              </a:rPr>
+              <a:t>PROBLEMA</a:t>
+            </a:r>
+            <a:endParaRPr lang="en-US" sz="1000" dirty="0"/>
+          </a:p>
+        </p:txBody>
+      </p:sp>
+      <p:sp>
+        <p:nvSpPr>
+          <p:cNvPr id="14" name="Text 11"/>
+          <p:cNvSpPr txBox="1"/>
+          <p:nvPr/>
+        </p:nvSpPr>
+        <p:spPr>
+          <a:xfrm>
+            <a:off x="731520" y="2743200"/>
+            <a:ext cx="5074920" cy="530352"/>
+          </a:xfrm>
+          <a:prstGeom prst="rect">
+            <a:avLst/>
+          </a:prstGeom>
+          <a:noFill/>
+          <a:ln/>
+        </p:spPr>
+        <p:txBody>
+          <a:bodyPr wrap="square" lIns="0" tIns="0" rIns="0" bIns="0" rtlCol="0" anchor="t"/>
+          <a:lstStyle/>
+          <a:p>
+            <a:pPr indent="0" marL="0">
+              <a:buNone/>
+            </a:pPr>
+            <a:r>
+              <a:rPr lang="en-US" sz="1100" dirty="0">
+                <a:solidFill>
+                  <a:srgbClr val="2E2119"/>
+                </a:solidFill>
+                <a:latin typeface="Calibri" pitchFamily="34" charset="0"/>
+                <a:ea typeface="Calibri" pitchFamily="34" charset="-122"/>
+                <a:cs typeface="Calibri" pitchFamily="34" charset="-120"/>
+              </a:rPr>
+              <a:t>10-15 min/lista a ojo, 2 viajes/semana sin plan, ≈1.040€/año perdidos.</a:t>
+            </a:r>
+            <a:endParaRPr lang="en-US" sz="1100" dirty="0"/>
+          </a:p>
+        </p:txBody>
+      </p:sp>
+      <p:sp>
+        <p:nvSpPr>
+          <p:cNvPr id="15" name="Shape 12"/>
+          <p:cNvSpPr/>
+          <p:nvPr/>
+        </p:nvSpPr>
+        <p:spPr>
+          <a:xfrm>
+            <a:off x="6172200" y="2432304"/>
+            <a:ext cx="5440680" cy="896112"/>
+          </a:xfrm>
+          <a:prstGeom prst="roundRect">
+            <a:avLst>
+              <a:gd name="adj" fmla="val 12245"/>
+            </a:avLst>
+          </a:prstGeom>
+          <a:solidFill>
+            <a:srgbClr val="EDE6DC"/>
+          </a:solidFill>
+          <a:ln/>
+          <a:effectLst>
+            <a:outerShdw sx="100000" sy="100000" kx="0" ky="0" algn="bl" rotWithShape="0" blurRad="76200" dist="25400" dir="5400000">
+              <a:srgbClr val="000000">
+                <a:alpha val="12000"/>
+              </a:srgbClr>
+            </a:outerShdw>
+          </a:effectLst>
+        </p:spPr>
+      </p:sp>
+      <p:sp>
+        <p:nvSpPr>
+          <p:cNvPr id="16" name="Text 13"/>
+          <p:cNvSpPr txBox="1"/>
+          <p:nvPr/>
+        </p:nvSpPr>
+        <p:spPr>
+          <a:xfrm>
+            <a:off x="6355080" y="2505456"/>
+            <a:ext cx="5074920" cy="237744"/>
+          </a:xfrm>
+          <a:prstGeom prst="rect">
+            <a:avLst/>
+          </a:prstGeom>
+          <a:noFill/>
+          <a:ln/>
+        </p:spPr>
+        <p:txBody>
+          <a:bodyPr wrap="square" lIns="0" tIns="0" rIns="0" bIns="0" rtlCol="0" anchor="ctr"/>
+          <a:lstStyle/>
+          <a:p>
+            <a:pPr indent="0" marL="0">
+              <a:buNone/>
+            </a:pPr>
+            <a:r>
+              <a:rPr lang="en-US" sz="1000" b="1" spc="100" kern="0" dirty="0">
+                <a:solidFill>
+                  <a:srgbClr val="C9682B"/>
+                </a:solidFill>
+                <a:latin typeface="Calibri" pitchFamily="34" charset="0"/>
+                <a:ea typeface="Calibri" pitchFamily="34" charset="-122"/>
+                <a:cs typeface="Calibri" pitchFamily="34" charset="-120"/>
+              </a:rPr>
+              <a:t>NÚMEROS</a:t>
+            </a:r>
+            <a:endParaRPr lang="en-US" sz="1000" dirty="0"/>
+          </a:p>
+        </p:txBody>
+      </p:sp>
+      <p:sp>
+        <p:nvSpPr>
+          <p:cNvPr id="17" name="Text 14"/>
+          <p:cNvSpPr txBox="1"/>
+          <p:nvPr/>
+        </p:nvSpPr>
+        <p:spPr>
+          <a:xfrm>
+            <a:off x="6355080" y="2743200"/>
+            <a:ext cx="5074920" cy="530352"/>
+          </a:xfrm>
+          <a:prstGeom prst="rect">
+            <a:avLst/>
+          </a:prstGeom>
+          <a:noFill/>
+          <a:ln/>
+        </p:spPr>
+        <p:txBody>
+          <a:bodyPr wrap="square" lIns="0" tIns="0" rIns="0" bIns="0" rtlCol="0" anchor="t"/>
+          <a:lstStyle/>
+          <a:p>
+            <a:pPr indent="0" marL="0">
+              <a:buNone/>
+            </a:pPr>
+            <a:r>
+              <a:rPr lang="en-US" sz="1100" dirty="0">
+                <a:solidFill>
+                  <a:srgbClr val="2E2119"/>
+                </a:solidFill>
+                <a:latin typeface="Calibri" pitchFamily="34" charset="0"/>
+                <a:ea typeface="Calibri" pitchFamily="34" charset="-122"/>
+                <a:cs typeface="Calibri" pitchFamily="34" charset="-120"/>
+              </a:rPr>
+              <a:t>0,99€/mes · coste fijo 0€ · equilibrio: 1 hogar.</a:t>
+            </a:r>
+            <a:endParaRPr lang="en-US" sz="1100" dirty="0"/>
+          </a:p>
+        </p:txBody>
+      </p:sp>
+      <p:sp>
+        <p:nvSpPr>
+          <p:cNvPr id="18" name="Shape 15"/>
+          <p:cNvSpPr/>
+          <p:nvPr/>
+        </p:nvSpPr>
+        <p:spPr>
+          <a:xfrm>
+            <a:off x="548640" y="3447288"/>
+            <a:ext cx="5440680" cy="896112"/>
+          </a:xfrm>
+          <a:prstGeom prst="roundRect">
+            <a:avLst>
+              <a:gd name="adj" fmla="val 12245"/>
+            </a:avLst>
+          </a:prstGeom>
+          <a:solidFill>
+            <a:srgbClr val="F4E9DA"/>
+          </a:solidFill>
+          <a:ln/>
+          <a:effectLst>
+            <a:outerShdw sx="100000" sy="100000" kx="0" ky="0" algn="bl" rotWithShape="0" blurRad="76200" dist="25400" dir="5400000">
+              <a:srgbClr val="000000">
+                <a:alpha val="12000"/>
+              </a:srgbClr>
+            </a:outerShdw>
+          </a:effectLst>
+        </p:spPr>
+      </p:sp>
+      <p:sp>
+        <p:nvSpPr>
+          <p:cNvPr id="19" name="Text 16"/>
+          <p:cNvSpPr txBox="1"/>
+          <p:nvPr/>
+        </p:nvSpPr>
+        <p:spPr>
+          <a:xfrm>
+            <a:off x="731520" y="3520440"/>
+            <a:ext cx="5074920" cy="237744"/>
+          </a:xfrm>
+          <a:prstGeom prst="rect">
+            <a:avLst/>
+          </a:prstGeom>
+          <a:noFill/>
+          <a:ln/>
+        </p:spPr>
+        <p:txBody>
+          <a:bodyPr wrap="square" lIns="0" tIns="0" rIns="0" bIns="0" rtlCol="0" anchor="ctr"/>
+          <a:lstStyle/>
+          <a:p>
+            <a:pPr indent="0" marL="0">
+              <a:buNone/>
+            </a:pPr>
+            <a:r>
+              <a:rPr lang="en-US" sz="1000" b="1" spc="100" kern="0" dirty="0">
+                <a:solidFill>
+                  <a:srgbClr val="C9682B"/>
+                </a:solidFill>
+                <a:latin typeface="Calibri" pitchFamily="34" charset="0"/>
+                <a:ea typeface="Calibri" pitchFamily="34" charset="-122"/>
+                <a:cs typeface="Calibri" pitchFamily="34" charset="-120"/>
+              </a:rPr>
+              <a:t>ALCANCE P1</a:t>
+            </a:r>
+            <a:endParaRPr lang="en-US" sz="1000" dirty="0"/>
+          </a:p>
+        </p:txBody>
+      </p:sp>
+      <p:sp>
+        <p:nvSpPr>
+          <p:cNvPr id="20" name="Text 17"/>
+          <p:cNvSpPr txBox="1"/>
+          <p:nvPr/>
+        </p:nvSpPr>
+        <p:spPr>
+          <a:xfrm>
+            <a:off x="731520" y="3758184"/>
+            <a:ext cx="5074920" cy="530352"/>
+          </a:xfrm>
+          <a:prstGeom prst="rect">
+            <a:avLst/>
+          </a:prstGeom>
+          <a:noFill/>
+          <a:ln/>
+        </p:spPr>
+        <p:txBody>
+          <a:bodyPr wrap="square" lIns="0" tIns="0" rIns="0" bIns="0" rtlCol="0" anchor="t"/>
+          <a:lstStyle/>
+          <a:p>
+            <a:pPr indent="0" marL="0">
+              <a:buNone/>
+            </a:pPr>
+            <a:r>
+              <a:rPr lang="en-US" sz="1100" dirty="0">
+                <a:solidFill>
+                  <a:srgbClr val="2E2119"/>
+                </a:solidFill>
+                <a:latin typeface="Calibri" pitchFamily="34" charset="0"/>
+                <a:ea typeface="Calibri" pitchFamily="34" charset="-122"/>
+                <a:cs typeface="Calibri" pitchFamily="34" charset="-120"/>
+              </a:rPr>
+              <a:t>Nevera + Lista + Historial + Precios. Cobro real, fuera de alcance.</a:t>
+            </a:r>
+            <a:endParaRPr lang="en-US" sz="1100" dirty="0"/>
+          </a:p>
+        </p:txBody>
+      </p:sp>
+      <p:sp>
+        <p:nvSpPr>
+          <p:cNvPr id="21" name="Shape 18"/>
+          <p:cNvSpPr/>
+          <p:nvPr/>
+        </p:nvSpPr>
+        <p:spPr>
+          <a:xfrm>
+            <a:off x="6172200" y="3447288"/>
+            <a:ext cx="5440680" cy="896112"/>
+          </a:xfrm>
+          <a:prstGeom prst="roundRect">
+            <a:avLst>
+              <a:gd name="adj" fmla="val 12245"/>
+            </a:avLst>
+          </a:prstGeom>
+          <a:solidFill>
+            <a:srgbClr val="EDE6DC"/>
+          </a:solidFill>
+          <a:ln/>
+          <a:effectLst>
+            <a:outerShdw sx="100000" sy="100000" kx="0" ky="0" algn="bl" rotWithShape="0" blurRad="76200" dist="25400" dir="5400000">
+              <a:srgbClr val="000000">
+                <a:alpha val="12000"/>
+              </a:srgbClr>
+            </a:outerShdw>
+          </a:effectLst>
+        </p:spPr>
+      </p:sp>
+      <p:sp>
+        <p:nvSpPr>
+          <p:cNvPr id="22" name="Text 19"/>
+          <p:cNvSpPr txBox="1"/>
+          <p:nvPr/>
+        </p:nvSpPr>
+        <p:spPr>
+          <a:xfrm>
+            <a:off x="6355080" y="3520440"/>
+            <a:ext cx="5074920" cy="237744"/>
+          </a:xfrm>
+          <a:prstGeom prst="rect">
+            <a:avLst/>
+          </a:prstGeom>
+          <a:noFill/>
+          <a:ln/>
+        </p:spPr>
+        <p:txBody>
+          <a:bodyPr wrap="square" lIns="0" tIns="0" rIns="0" bIns="0" rtlCol="0" anchor="ctr"/>
+          <a:lstStyle/>
+          <a:p>
+            <a:pPr indent="0" marL="0">
+              <a:buNone/>
+            </a:pPr>
+            <a:r>
+              <a:rPr lang="en-US" sz="1000" b="1" spc="100" kern="0" dirty="0">
+                <a:solidFill>
+                  <a:srgbClr val="C9682B"/>
+                </a:solidFill>
+                <a:latin typeface="Calibri" pitchFamily="34" charset="0"/>
+                <a:ea typeface="Calibri" pitchFamily="34" charset="-122"/>
+                <a:cs typeface="Calibri" pitchFamily="34" charset="-120"/>
+              </a:rPr>
+              <a:t>CANAL</a:t>
+            </a:r>
+            <a:endParaRPr lang="en-US" sz="1000" dirty="0"/>
+          </a:p>
+        </p:txBody>
+      </p:sp>
+      <p:sp>
+        <p:nvSpPr>
+          <p:cNvPr id="23" name="Text 20"/>
+          <p:cNvSpPr txBox="1"/>
+          <p:nvPr/>
+        </p:nvSpPr>
+        <p:spPr>
+          <a:xfrm>
+            <a:off x="6355080" y="3758184"/>
+            <a:ext cx="5074920" cy="530352"/>
+          </a:xfrm>
+          <a:prstGeom prst="rect">
+            <a:avLst/>
+          </a:prstGeom>
+          <a:noFill/>
+          <a:ln/>
+        </p:spPr>
+        <p:txBody>
+          <a:bodyPr wrap="square" lIns="0" tIns="0" rIns="0" bIns="0" rtlCol="0" anchor="t"/>
+          <a:lstStyle/>
+          <a:p>
+            <a:pPr indent="0" marL="0">
+              <a:buNone/>
+            </a:pPr>
+            <a:r>
+              <a:rPr lang="en-US" sz="1100" dirty="0">
+                <a:solidFill>
+                  <a:srgbClr val="2E2119"/>
+                </a:solidFill>
+                <a:latin typeface="Calibri" pitchFamily="34" charset="0"/>
+                <a:ea typeface="Calibri" pitchFamily="34" charset="-122"/>
+                <a:cs typeface="Calibri" pitchFamily="34" charset="-120"/>
+              </a:rPr>
+              <a:t>Directo: el propio hogar es el primer usuario real.</a:t>
+            </a:r>
+            <a:endParaRPr lang="en-US" sz="1100" dirty="0"/>
+          </a:p>
+        </p:txBody>
+      </p:sp>
+      <p:sp>
+        <p:nvSpPr>
+          <p:cNvPr id="24" name="Shape 21"/>
+          <p:cNvSpPr/>
+          <p:nvPr/>
+        </p:nvSpPr>
+        <p:spPr>
+          <a:xfrm>
+            <a:off x="548640" y="4462272"/>
+            <a:ext cx="5440680" cy="896112"/>
+          </a:xfrm>
+          <a:prstGeom prst="roundRect">
+            <a:avLst>
+              <a:gd name="adj" fmla="val 12245"/>
+            </a:avLst>
+          </a:prstGeom>
+          <a:solidFill>
+            <a:srgbClr val="F4E9DA"/>
+          </a:solidFill>
+          <a:ln/>
+          <a:effectLst>
+            <a:outerShdw sx="100000" sy="100000" kx="0" ky="0" algn="bl" rotWithShape="0" blurRad="76200" dist="25400" dir="5400000">
+              <a:srgbClr val="000000">
+                <a:alpha val="12000"/>
+              </a:srgbClr>
+            </a:outerShdw>
+          </a:effectLst>
+        </p:spPr>
+      </p:sp>
+      <p:sp>
+        <p:nvSpPr>
+          <p:cNvPr id="25" name="Text 22"/>
+          <p:cNvSpPr txBox="1"/>
+          <p:nvPr/>
+        </p:nvSpPr>
+        <p:spPr>
+          <a:xfrm>
+            <a:off x="731520" y="4535424"/>
+            <a:ext cx="5074920" cy="237744"/>
+          </a:xfrm>
+          <a:prstGeom prst="rect">
+            <a:avLst/>
+          </a:prstGeom>
+          <a:noFill/>
+          <a:ln/>
+        </p:spPr>
+        <p:txBody>
+          <a:bodyPr wrap="square" lIns="0" tIns="0" rIns="0" bIns="0" rtlCol="0" anchor="ctr"/>
+          <a:lstStyle/>
+          <a:p>
+            <a:pPr indent="0" marL="0">
+              <a:buNone/>
+            </a:pPr>
+            <a:r>
+              <a:rPr lang="en-US" sz="1000" b="1" spc="100" kern="0" dirty="0">
+                <a:solidFill>
+                  <a:srgbClr val="C9682B"/>
+                </a:solidFill>
+                <a:latin typeface="Calibri" pitchFamily="34" charset="0"/>
+                <a:ea typeface="Calibri" pitchFamily="34" charset="-122"/>
+                <a:cs typeface="Calibri" pitchFamily="34" charset="-120"/>
+              </a:rPr>
+              <a:t>QUÉ NO HAREMOS</a:t>
+            </a:r>
+            <a:endParaRPr lang="en-US" sz="1000" dirty="0"/>
+          </a:p>
+        </p:txBody>
+      </p:sp>
+      <p:sp>
+        <p:nvSpPr>
+          <p:cNvPr id="26" name="Text 23"/>
+          <p:cNvSpPr txBox="1"/>
+          <p:nvPr/>
+        </p:nvSpPr>
+        <p:spPr>
+          <a:xfrm>
+            <a:off x="731520" y="4773168"/>
+            <a:ext cx="5074920" cy="530352"/>
+          </a:xfrm>
+          <a:prstGeom prst="rect">
+            <a:avLst/>
+          </a:prstGeom>
+          <a:noFill/>
+          <a:ln/>
+        </p:spPr>
+        <p:txBody>
+          <a:bodyPr wrap="square" lIns="0" tIns="0" rIns="0" bIns="0" rtlCol="0" anchor="t"/>
+          <a:lstStyle/>
+          <a:p>
+            <a:pPr indent="0" marL="0">
+              <a:buNone/>
+            </a:pPr>
+            <a:r>
+              <a:rPr lang="en-US" sz="1100" dirty="0">
+                <a:solidFill>
+                  <a:srgbClr val="2E2119"/>
+                </a:solidFill>
+                <a:latin typeface="Calibri" pitchFamily="34" charset="0"/>
+                <a:ea typeface="Calibri" pitchFamily="34" charset="-122"/>
+                <a:cs typeface="Calibri" pitchFamily="34" charset="-120"/>
+              </a:rPr>
+              <a:t>Código de barras, cobro con tarjeta, notificaciones push, liquidar deudas de verdad.</a:t>
+            </a:r>
+            <a:endParaRPr lang="en-US" sz="1100" dirty="0"/>
+          </a:p>
+        </p:txBody>
+      </p:sp>
+    </p:spTree>
+  </p:cSld>
+  <p:clrMapOvr>
+    <a:masterClrMapping/>
+  </p:clrMapOvr>
+</p:sld>
+</file>
+
+<file path=ppt/slides/slide11.xml><?xml version="1.0" encoding="utf-8"?>
+<p:sld xmlns:a="http://schemas.openxmlformats.org/drawingml/2006/main" xmlns:r="http://schemas.openxmlformats.org/officeDocument/2006/relationships" xmlns:p="http://schemas.openxmlformats.org/presentationml/2006/main">
+  <p:cSld name="Slide 11">
+    <p:bg>
+      <p:bgPr>
+        <a:solidFill>
+          <a:srgbClr val="2E2119"/>
+        </a:solidFill>
+      </p:bgPr>
+    </p:bg>
+    <p:spTree>
+      <p:nvGrpSpPr>
+        <p:cNvPr id="1" name=""/>
+        <p:cNvGrpSpPr/>
+        <p:nvPr/>
+      </p:nvGrpSpPr>
+      <p:grpSpPr>
+        <a:xfrm>
+          <a:off x="0" y="0"/>
+          <a:ext cx="0" cy="0"/>
+          <a:chOff x="0" y="0"/>
+          <a:chExt cx="0" cy="0"/>
+        </a:xfrm>
+      </p:grpSpPr>
+      <p:sp>
+        <p:nvSpPr>
+          <p:cNvPr id="2" name="Shape 0"/>
+          <p:cNvSpPr/>
+          <p:nvPr/>
+        </p:nvSpPr>
+        <p:spPr>
+          <a:xfrm>
+            <a:off x="822960" y="731520"/>
+            <a:ext cx="777240" cy="777240"/>
+          </a:xfrm>
+          <a:prstGeom prst="ellipse">
+            <a:avLst/>
+          </a:prstGeom>
+          <a:solidFill>
+            <a:srgbClr val="C9682B"/>
+          </a:solidFill>
+          <a:ln/>
+        </p:spPr>
+      </p:sp>
+      <p:pic>
+        <p:nvPicPr>
+          <p:cNvPr id="3" name="Image 0" descr="preencoded.png">    </p:cNvPr>
+          <p:cNvPicPr>
+            <a:picLocks noChangeAspect="1"/>
+          </p:cNvPicPr>
+          <p:nvPr/>
+        </p:nvPicPr>
+        <p:blipFill>
+          <a:blip r:embed="rId1"/>
+          <a:stretch>
+            <a:fillRect/>
+          </a:stretch>
+        </p:blipFill>
+        <p:spPr>
+          <a:xfrm>
+            <a:off x="1009498" y="918058"/>
+            <a:ext cx="404165" cy="404165"/>
+          </a:xfrm>
+          <a:prstGeom prst="rect">
+            <a:avLst/>
+          </a:prstGeom>
+        </p:spPr>
+      </p:pic>
+      <p:sp>
+        <p:nvSpPr>
+          <p:cNvPr id="4" name="Text 1"/>
+          <p:cNvSpPr txBox="1"/>
+          <p:nvPr/>
+        </p:nvSpPr>
+        <p:spPr>
+          <a:xfrm>
+            <a:off x="777240" y="1737360"/>
+            <a:ext cx="8229600" cy="731520"/>
+          </a:xfrm>
+          <a:prstGeom prst="rect">
+            <a:avLst/>
+          </a:prstGeom>
+          <a:noFill/>
+          <a:ln/>
+        </p:spPr>
+        <p:txBody>
+          <a:bodyPr wrap="square" lIns="0" tIns="0" rIns="0" bIns="0" rtlCol="0" anchor="ctr"/>
+          <a:lstStyle/>
+          <a:p>
+            <a:pPr indent="0" marL="0">
+              <a:buNone/>
+            </a:pPr>
+            <a:r>
+              <a:rPr lang="en-US" sz="3800" b="1" dirty="0">
+                <a:solidFill>
+                  <a:srgbClr val="FFFFFF"/>
+                </a:solidFill>
+                <a:latin typeface="Cambria" pitchFamily="34" charset="0"/>
+                <a:ea typeface="Cambria" pitchFamily="34" charset="-122"/>
+                <a:cs typeface="Cambria" pitchFamily="34" charset="-120"/>
+              </a:rPr>
+              <a:t>Próximos pasos</a:t>
+            </a:r>
+            <a:endParaRPr lang="en-US" sz="3800" dirty="0"/>
+          </a:p>
+        </p:txBody>
+      </p:sp>
+      <p:sp>
+        <p:nvSpPr>
+          <p:cNvPr id="5" name="Text 2"/>
+          <p:cNvSpPr txBox="1"/>
+          <p:nvPr/>
+        </p:nvSpPr>
+        <p:spPr>
+          <a:xfrm>
+            <a:off x="822960" y="2697480"/>
+            <a:ext cx="9601200" cy="2926080"/>
+          </a:xfrm>
+          <a:prstGeom prst="rect">
+            <a:avLst/>
+          </a:prstGeom>
+          <a:noFill/>
+          <a:ln/>
+        </p:spPr>
+        <p:txBody>
+          <a:bodyPr wrap="square" lIns="0" tIns="0" rIns="0" bIns="0" rtlCol="0" anchor="t"/>
+          <a:lstStyle/>
+          <a:p>
+            <a:pPr marL="342900" indent="-342900">
+              <a:spcAft>
+                <a:spcPts val="1200"/>
+              </a:spcAft>
+              <a:buSzPct val="100000"/>
+              <a:buChar char="→"/>
+            </a:pPr>
+            <a:r>
+              <a:rPr lang="en-US" sz="1600" dirty="0">
+                <a:solidFill>
+                  <a:srgbClr val="EFE6DA"/>
+                </a:solidFill>
+                <a:latin typeface="Calibri" pitchFamily="34" charset="0"/>
+                <a:ea typeface="Calibri" pitchFamily="34" charset="-122"/>
+                <a:cs typeface="Calibri" pitchFamily="34" charset="-120"/>
+              </a:rPr>
+              <a:t>Terminar la pantalla de la Nevera (frontend con React + TypeScript)</a:t>
+            </a:r>
+            <a:endParaRPr lang="en-US" sz="1600" dirty="0"/>
+          </a:p>
+          <a:p>
+            <a:pPr marL="342900" indent="-342900">
+              <a:spcAft>
+                <a:spcPts val="1200"/>
+              </a:spcAft>
+              <a:buSzPct val="100000"/>
+              <a:buChar char="→"/>
+            </a:pPr>
+            <a:r>
+              <a:rPr lang="en-US" sz="1600" dirty="0">
+                <a:solidFill>
+                  <a:srgbClr val="EFE6DA"/>
+                </a:solidFill>
+                <a:latin typeface="Calibri" pitchFamily="34" charset="0"/>
+                <a:ea typeface="Calibri" pitchFamily="34" charset="-122"/>
+                <a:cs typeface="Calibri" pitchFamily="34" charset="-120"/>
+              </a:rPr>
+              <a:t>Lista de la compra con control de concurrencia real</a:t>
+            </a:r>
+            <a:endParaRPr lang="en-US" sz="1600" dirty="0"/>
+          </a:p>
+          <a:p>
+            <a:pPr marL="342900" indent="-342900">
+              <a:spcAft>
+                <a:spcPts val="1200"/>
+              </a:spcAft>
+              <a:buSzPct val="100000"/>
+              <a:buChar char="→"/>
+            </a:pPr>
+            <a:r>
+              <a:rPr lang="en-US" sz="1600" dirty="0">
+                <a:solidFill>
+                  <a:srgbClr val="EFE6DA"/>
+                </a:solidFill>
+                <a:latin typeface="Calibri" pitchFamily="34" charset="0"/>
+                <a:ea typeface="Calibri" pitchFamily="34" charset="-122"/>
+                <a:cs typeface="Calibri" pitchFamily="34" charset="-120"/>
+              </a:rPr>
+              <a:t>Instalar y parametrizar Odoo (catálogo + precios por tienda)</a:t>
+            </a:r>
+            <a:endParaRPr lang="en-US" sz="1600" dirty="0"/>
+          </a:p>
+          <a:p>
+            <a:pPr marL="342900" indent="-342900">
+              <a:spcAft>
+                <a:spcPts val="1200"/>
+              </a:spcAft>
+              <a:buSzPct val="100000"/>
+              <a:buChar char="→"/>
+            </a:pPr>
+            <a:r>
+              <a:rPr lang="en-US" sz="1600" dirty="0">
+                <a:solidFill>
+                  <a:srgbClr val="EFE6DA"/>
+                </a:solidFill>
+                <a:latin typeface="Calibri" pitchFamily="34" charset="0"/>
+                <a:ea typeface="Calibri" pitchFamily="34" charset="-122"/>
+                <a:cs typeface="Calibri" pitchFamily="34" charset="-120"/>
+              </a:rPr>
+              <a:t>Conectar el backend con la API de Odoo</a:t>
+            </a:r>
+            <a:endParaRPr lang="en-US" sz="1600" dirty="0"/>
+          </a:p>
+          <a:p>
+            <a:pPr marL="342900" indent="-342900">
+              <a:spcAft>
+                <a:spcPts val="1200"/>
+              </a:spcAft>
+              <a:buSzPct val="100000"/>
+              <a:buChar char="→"/>
+            </a:pPr>
+            <a:r>
+              <a:rPr lang="en-US" sz="1600" dirty="0">
+                <a:solidFill>
+                  <a:srgbClr val="EFE6DA"/>
+                </a:solidFill>
+                <a:latin typeface="Calibri" pitchFamily="34" charset="0"/>
+                <a:ea typeface="Calibri" pitchFamily="34" charset="-122"/>
+                <a:cs typeface="Calibri" pitchFamily="34" charset="-120"/>
+              </a:rPr>
+              <a:t>Historial de gasto y comparador de precios</a:t>
+            </a:r>
+            <a:endParaRPr lang="en-US" sz="1600" dirty="0"/>
+          </a:p>
+        </p:txBody>
+      </p:sp>
+      <p:sp>
+        <p:nvSpPr>
+          <p:cNvPr id="6" name="Shape 3"/>
+          <p:cNvSpPr/>
+          <p:nvPr/>
+        </p:nvSpPr>
+        <p:spPr>
+          <a:xfrm>
+            <a:off x="822960" y="5806440"/>
+            <a:ext cx="7772400" cy="640080"/>
+          </a:xfrm>
+          <a:prstGeom prst="roundRect">
+            <a:avLst>
+              <a:gd name="adj" fmla="val 11429"/>
+            </a:avLst>
+          </a:prstGeom>
+          <a:solidFill>
+            <a:srgbClr val="3D2E23"/>
+          </a:solidFill>
+          <a:ln/>
+        </p:spPr>
+      </p:sp>
+      <p:sp>
+        <p:nvSpPr>
+          <p:cNvPr id="7" name="Text 4"/>
+          <p:cNvSpPr txBox="1"/>
+          <p:nvPr/>
+        </p:nvSpPr>
+        <p:spPr>
+          <a:xfrm>
+            <a:off x="1051560" y="5806440"/>
+            <a:ext cx="7315200" cy="640080"/>
+          </a:xfrm>
+          <a:prstGeom prst="rect">
+            <a:avLst/>
+          </a:prstGeom>
+          <a:noFill/>
+          <a:ln/>
+        </p:spPr>
+        <p:txBody>
+          <a:bodyPr wrap="square" lIns="0" tIns="0" rIns="0" bIns="0" rtlCol="0" anchor="ctr"/>
+          <a:lstStyle/>
+          <a:p>
+            <a:pPr indent="0" marL="0">
+              <a:buNone/>
+            </a:pPr>
+            <a:r>
+              <a:rPr lang="en-US" sz="1250" i="1" dirty="0">
+                <a:solidFill>
+                  <a:srgbClr val="D9A441"/>
+                </a:solidFill>
+                <a:latin typeface="Calibri" pitchFamily="34" charset="0"/>
+                <a:ea typeface="Calibri" pitchFamily="34" charset="-122"/>
+                <a:cs typeface="Calibri" pitchFamily="34" charset="-120"/>
+              </a:rPr>
+              <a:t>Entrega viernes: idea validada, con números y decisiones que se pueden defender.</a:t>
+            </a:r>
+            <a:endParaRPr lang="en-US" sz="1250" dirty="0"/>
           </a:p>
         </p:txBody>
       </p:sp>
@@ -4473,7 +5857,7 @@
                 <a:ea typeface="Calibri" pitchFamily="34" charset="-122"/>
                 <a:cs typeface="Calibri" pitchFamily="34" charset="-120"/>
               </a:rPr>
-              <a:t>PASO 3</a:t>
+              <a:t>PASO 2 — VALIDACIÓN</a:t>
             </a:r>
             <a:endParaRPr lang="en-US" sz="1200" dirty="0"/>
           </a:p>
@@ -4512,7 +5896,7 @@
                 <a:ea typeface="Cambria" pitchFamily="34" charset="-122"/>
                 <a:cs typeface="Cambria" pitchFamily="34" charset="-120"/>
               </a:rPr>
-              <a:t>Estudio de mercado — A Coruña</a:t>
+              <a:t>La encuesta confirma el hueco (n=12)</a:t>
             </a:r>
             <a:endParaRPr lang="en-US" sz="2800" dirty="0"/>
           </a:p>
@@ -4520,18 +5904,396 @@
       </p:sp>
       <p:sp>
         <p:nvSpPr>
-          <p:cNvPr id="6" name="Shape 3"/>
+          <p:cNvPr id="6" name="Text 3"/>
+          <p:cNvSpPr txBox="1"/>
+          <p:nvPr/>
+        </p:nvSpPr>
+        <p:spPr>
+          <a:xfrm>
+            <a:off x="548640" y="1207008"/>
+            <a:ext cx="11094415" cy="274320"/>
+          </a:xfrm>
+          <a:prstGeom prst="rect">
+            <a:avLst/>
+          </a:prstGeom>
+          <a:noFill/>
+          <a:ln/>
+        </p:spPr>
+        <p:txBody>
+          <a:bodyPr wrap="square" lIns="0" tIns="0" rIns="0" bIns="0" rtlCol="0" anchor="ctr"/>
+          <a:lstStyle/>
+          <a:p>
+            <a:pPr indent="0" marL="0">
+              <a:buNone/>
+            </a:pPr>
+            <a:r>
+              <a:rPr lang="en-US" sz="1000" i="1" dirty="0">
+                <a:solidFill>
+                  <a:srgbClr val="8A7A6D"/>
+                </a:solidFill>
+                <a:latin typeface="Calibri" pitchFamily="34" charset="0"/>
+                <a:ea typeface="Calibri" pitchFamily="34" charset="-122"/>
+                <a:cs typeface="Calibri" pitchFamily="34" charset="-120"/>
+              </a:rPr>
+              <a:t>Encuesta bilingüe (ES/EN), 9 preguntas sobre hechos del último mes — no opiniones sobre una app futura. 12 respuestas reales recogidas.</a:t>
+            </a:r>
+            <a:endParaRPr lang="en-US" sz="1000" dirty="0"/>
+          </a:p>
+        </p:txBody>
+      </p:sp>
+      <p:sp>
+        <p:nvSpPr>
+          <p:cNvPr id="7" name="Shape 4"/>
           <p:cNvSpPr/>
           <p:nvPr/>
         </p:nvSpPr>
         <p:spPr>
           <a:xfrm>
-            <a:off x="548640" y="1463040"/>
-            <a:ext cx="3566160" cy="2468880"/>
+            <a:off x="548640" y="1508760"/>
+            <a:ext cx="3611880" cy="1143000"/>
           </a:xfrm>
           <a:prstGeom prst="roundRect">
             <a:avLst>
-              <a:gd name="adj" fmla="val 4444"/>
+              <a:gd name="adj" fmla="val 9600"/>
+            </a:avLst>
+          </a:prstGeom>
+          <a:solidFill>
+            <a:srgbClr val="2E2119"/>
+          </a:solidFill>
+          <a:ln/>
+        </p:spPr>
+      </p:sp>
+      <p:sp>
+        <p:nvSpPr>
+          <p:cNvPr id="8" name="Text 5"/>
+          <p:cNvSpPr txBox="1"/>
+          <p:nvPr/>
+        </p:nvSpPr>
+        <p:spPr>
+          <a:xfrm>
+            <a:off x="731520" y="1600200"/>
+            <a:ext cx="3246120" cy="502920"/>
+          </a:xfrm>
+          <a:prstGeom prst="rect">
+            <a:avLst/>
+          </a:prstGeom>
+          <a:noFill/>
+          <a:ln/>
+        </p:spPr>
+        <p:txBody>
+          <a:bodyPr wrap="square" lIns="0" tIns="0" rIns="0" bIns="0" rtlCol="0" anchor="ctr"/>
+          <a:lstStyle/>
+          <a:p>
+            <a:pPr indent="0" marL="0">
+              <a:buNone/>
+            </a:pPr>
+            <a:r>
+              <a:rPr lang="en-US" sz="3000" b="1" dirty="0">
+                <a:solidFill>
+                  <a:srgbClr val="D9A441"/>
+                </a:solidFill>
+                <a:latin typeface="Cambria" pitchFamily="34" charset="0"/>
+                <a:ea typeface="Cambria" pitchFamily="34" charset="-122"/>
+                <a:cs typeface="Cambria" pitchFamily="34" charset="-120"/>
+              </a:rPr>
+              <a:t>0/12</a:t>
+            </a:r>
+            <a:endParaRPr lang="en-US" sz="3000" dirty="0"/>
+          </a:p>
+        </p:txBody>
+      </p:sp>
+      <p:sp>
+        <p:nvSpPr>
+          <p:cNvPr id="9" name="Text 6"/>
+          <p:cNvSpPr txBox="1"/>
+          <p:nvPr/>
+        </p:nvSpPr>
+        <p:spPr>
+          <a:xfrm>
+            <a:off x="731520" y="2130552"/>
+            <a:ext cx="3246120" cy="475488"/>
+          </a:xfrm>
+          <a:prstGeom prst="rect">
+            <a:avLst/>
+          </a:prstGeom>
+          <a:noFill/>
+          <a:ln/>
+        </p:spPr>
+        <p:txBody>
+          <a:bodyPr wrap="square" lIns="0" tIns="0" rIns="0" bIns="0" rtlCol="0" anchor="t"/>
+          <a:lstStyle/>
+          <a:p>
+            <a:pPr indent="0" marL="0">
+              <a:buNone/>
+            </a:pPr>
+            <a:r>
+              <a:rPr lang="en-US" sz="1000" dirty="0">
+                <a:solidFill>
+                  <a:srgbClr val="D8CBBE"/>
+                </a:solidFill>
+                <a:latin typeface="Calibri" pitchFamily="34" charset="0"/>
+                <a:ea typeface="Calibri" pitchFamily="34" charset="-122"/>
+                <a:cs typeface="Calibri" pitchFamily="34" charset="-120"/>
+              </a:rPr>
+              <a:t>ha probado alguna app específica de listas — aunque podían elegirla como método (ver abajo)</a:t>
+            </a:r>
+            <a:endParaRPr lang="en-US" sz="1000" dirty="0"/>
+          </a:p>
+        </p:txBody>
+      </p:sp>
+      <p:sp>
+        <p:nvSpPr>
+          <p:cNvPr id="10" name="Shape 7"/>
+          <p:cNvSpPr/>
+          <p:nvPr/>
+        </p:nvSpPr>
+        <p:spPr>
+          <a:xfrm>
+            <a:off x="4297680" y="1508760"/>
+            <a:ext cx="3611880" cy="1143000"/>
+          </a:xfrm>
+          <a:prstGeom prst="roundRect">
+            <a:avLst>
+              <a:gd name="adj" fmla="val 9600"/>
+            </a:avLst>
+          </a:prstGeom>
+          <a:solidFill>
+            <a:srgbClr val="2E2119"/>
+          </a:solidFill>
+          <a:ln/>
+        </p:spPr>
+      </p:sp>
+      <p:sp>
+        <p:nvSpPr>
+          <p:cNvPr id="11" name="Text 8"/>
+          <p:cNvSpPr txBox="1"/>
+          <p:nvPr/>
+        </p:nvSpPr>
+        <p:spPr>
+          <a:xfrm>
+            <a:off x="4480560" y="1600200"/>
+            <a:ext cx="3246120" cy="502920"/>
+          </a:xfrm>
+          <a:prstGeom prst="rect">
+            <a:avLst/>
+          </a:prstGeom>
+          <a:noFill/>
+          <a:ln/>
+        </p:spPr>
+        <p:txBody>
+          <a:bodyPr wrap="square" lIns="0" tIns="0" rIns="0" bIns="0" rtlCol="0" anchor="ctr"/>
+          <a:lstStyle/>
+          <a:p>
+            <a:pPr indent="0" marL="0">
+              <a:buNone/>
+            </a:pPr>
+            <a:r>
+              <a:rPr lang="en-US" sz="3000" b="1" dirty="0">
+                <a:solidFill>
+                  <a:srgbClr val="D9A441"/>
+                </a:solidFill>
+                <a:latin typeface="Cambria" pitchFamily="34" charset="0"/>
+                <a:ea typeface="Cambria" pitchFamily="34" charset="-122"/>
+                <a:cs typeface="Cambria" pitchFamily="34" charset="-120"/>
+              </a:rPr>
+              <a:t>75%</a:t>
+            </a:r>
+            <a:endParaRPr lang="en-US" sz="3000" dirty="0"/>
+          </a:p>
+        </p:txBody>
+      </p:sp>
+      <p:sp>
+        <p:nvSpPr>
+          <p:cNvPr id="12" name="Text 9"/>
+          <p:cNvSpPr txBox="1"/>
+          <p:nvPr/>
+        </p:nvSpPr>
+        <p:spPr>
+          <a:xfrm>
+            <a:off x="4480560" y="2130552"/>
+            <a:ext cx="3246120" cy="475488"/>
+          </a:xfrm>
+          <a:prstGeom prst="rect">
+            <a:avLst/>
+          </a:prstGeom>
+          <a:noFill/>
+          <a:ln/>
+        </p:spPr>
+        <p:txBody>
+          <a:bodyPr wrap="square" lIns="0" tIns="0" rIns="0" bIns="0" rtlCol="0" anchor="t"/>
+          <a:lstStyle/>
+          <a:p>
+            <a:pPr indent="0" marL="0">
+              <a:buNone/>
+            </a:pPr>
+            <a:r>
+              <a:rPr lang="en-US" sz="1000" dirty="0">
+                <a:solidFill>
+                  <a:srgbClr val="D8CBBE"/>
+                </a:solidFill>
+                <a:latin typeface="Calibri" pitchFamily="34" charset="0"/>
+                <a:ea typeface="Calibri" pitchFamily="34" charset="-122"/>
+                <a:cs typeface="Calibri" pitchFamily="34" charset="-120"/>
+              </a:rPr>
+              <a:t>compró algo duplicado el último mes</a:t>
+            </a:r>
+            <a:endParaRPr lang="en-US" sz="1000" dirty="0"/>
+          </a:p>
+        </p:txBody>
+      </p:sp>
+      <p:sp>
+        <p:nvSpPr>
+          <p:cNvPr id="13" name="Shape 10"/>
+          <p:cNvSpPr/>
+          <p:nvPr/>
+        </p:nvSpPr>
+        <p:spPr>
+          <a:xfrm>
+            <a:off x="8046720" y="1508760"/>
+            <a:ext cx="3611880" cy="1143000"/>
+          </a:xfrm>
+          <a:prstGeom prst="roundRect">
+            <a:avLst>
+              <a:gd name="adj" fmla="val 9600"/>
+            </a:avLst>
+          </a:prstGeom>
+          <a:solidFill>
+            <a:srgbClr val="2E2119"/>
+          </a:solidFill>
+          <a:ln/>
+        </p:spPr>
+      </p:sp>
+      <p:sp>
+        <p:nvSpPr>
+          <p:cNvPr id="14" name="Text 11"/>
+          <p:cNvSpPr txBox="1"/>
+          <p:nvPr/>
+        </p:nvSpPr>
+        <p:spPr>
+          <a:xfrm>
+            <a:off x="8229600" y="1600200"/>
+            <a:ext cx="3246120" cy="502920"/>
+          </a:xfrm>
+          <a:prstGeom prst="rect">
+            <a:avLst/>
+          </a:prstGeom>
+          <a:noFill/>
+          <a:ln/>
+        </p:spPr>
+        <p:txBody>
+          <a:bodyPr wrap="square" lIns="0" tIns="0" rIns="0" bIns="0" rtlCol="0" anchor="ctr"/>
+          <a:lstStyle/>
+          <a:p>
+            <a:pPr indent="0" marL="0">
+              <a:buNone/>
+            </a:pPr>
+            <a:r>
+              <a:rPr lang="en-US" sz="3000" b="1" dirty="0">
+                <a:solidFill>
+                  <a:srgbClr val="D9A441"/>
+                </a:solidFill>
+                <a:latin typeface="Cambria" pitchFamily="34" charset="0"/>
+                <a:ea typeface="Cambria" pitchFamily="34" charset="-122"/>
+                <a:cs typeface="Cambria" pitchFamily="34" charset="-120"/>
+              </a:rPr>
+              <a:t>75%</a:t>
+            </a:r>
+            <a:endParaRPr lang="en-US" sz="3000" dirty="0"/>
+          </a:p>
+        </p:txBody>
+      </p:sp>
+      <p:sp>
+        <p:nvSpPr>
+          <p:cNvPr id="15" name="Text 12"/>
+          <p:cNvSpPr txBox="1"/>
+          <p:nvPr/>
+        </p:nvSpPr>
+        <p:spPr>
+          <a:xfrm>
+            <a:off x="8229600" y="2130552"/>
+            <a:ext cx="3246120" cy="475488"/>
+          </a:xfrm>
+          <a:prstGeom prst="rect">
+            <a:avLst/>
+          </a:prstGeom>
+          <a:noFill/>
+          <a:ln/>
+        </p:spPr>
+        <p:txBody>
+          <a:bodyPr wrap="square" lIns="0" tIns="0" rIns="0" bIns="0" rtlCol="0" anchor="t"/>
+          <a:lstStyle/>
+          <a:p>
+            <a:pPr indent="0" marL="0">
+              <a:buNone/>
+            </a:pPr>
+            <a:r>
+              <a:rPr lang="en-US" sz="1000" dirty="0">
+                <a:solidFill>
+                  <a:srgbClr val="D8CBBE"/>
+                </a:solidFill>
+                <a:latin typeface="Calibri" pitchFamily="34" charset="0"/>
+                <a:ea typeface="Calibri" pitchFamily="34" charset="-122"/>
+                <a:cs typeface="Calibri" pitchFamily="34" charset="-120"/>
+              </a:rPr>
+              <a:t>tuvo que volver a la tienda por algo olvidado</a:t>
+            </a:r>
+            <a:endParaRPr lang="en-US" sz="1000" dirty="0"/>
+          </a:p>
+        </p:txBody>
+      </p:sp>
+      <p:sp>
+        <p:nvSpPr>
+          <p:cNvPr id="16" name="Text 13"/>
+          <p:cNvSpPr txBox="1"/>
+          <p:nvPr/>
+        </p:nvSpPr>
+        <p:spPr>
+          <a:xfrm>
+            <a:off x="548640" y="2724912"/>
+            <a:ext cx="11064240" cy="292608"/>
+          </a:xfrm>
+          <a:prstGeom prst="rect">
+            <a:avLst/>
+          </a:prstGeom>
+          <a:noFill/>
+          <a:ln/>
+        </p:spPr>
+        <p:txBody>
+          <a:bodyPr wrap="square" lIns="0" tIns="0" rIns="0" bIns="0" rtlCol="0" anchor="ctr"/>
+          <a:lstStyle/>
+          <a:p>
+            <a:pPr indent="0" marL="0">
+              <a:buNone/>
+            </a:pPr>
+            <a:r>
+              <a:rPr lang="en-US" sz="1150" i="1" dirty="0">
+                <a:solidFill>
+                  <a:srgbClr val="8A7A6D"/>
+                </a:solidFill>
+                <a:latin typeface="Calibri" pitchFamily="34" charset="0"/>
+                <a:ea typeface="Calibri" pitchFamily="34" charset="-122"/>
+                <a:cs typeface="Calibri" pitchFamily="34" charset="-120"/>
+              </a:rPr>
+              <a:t>El 50% (6 de 12 personas) sufrió ambas cosas — compró duplicado y volvió a la tienda — en el mismo mes.</a:t>
+            </a:r>
+            <a:endParaRPr lang="en-US" sz="1150" dirty="0"/>
+          </a:p>
+        </p:txBody>
+      </p:sp>
+      <p:sp>
+        <p:nvSpPr>
+          <p:cNvPr id="17" name="Shape 14"/>
+          <p:cNvSpPr/>
+          <p:nvPr/>
+        </p:nvSpPr>
+        <p:spPr>
+          <a:xfrm>
+            <a:off x="548640" y="3108960"/>
+            <a:ext cx="6492240" cy="2148840"/>
+          </a:xfrm>
+          <a:prstGeom prst="roundRect">
+            <a:avLst>
+              <a:gd name="adj" fmla="val 5106"/>
             </a:avLst>
           </a:prstGeom>
           <a:solidFill>
@@ -4549,14 +6311,14 @@
       </p:sp>
       <p:sp>
         <p:nvSpPr>
-          <p:cNvPr id="7" name="Text 4"/>
-          <p:cNvSpPr txBox="1"/>
-          <p:nvPr/>
-        </p:nvSpPr>
-        <p:spPr>
-          <a:xfrm>
-            <a:off x="777240" y="1645920"/>
-            <a:ext cx="3108960" cy="320040"/>
+          <p:cNvPr id="18" name="Text 15"/>
+          <p:cNvSpPr txBox="1"/>
+          <p:nvPr/>
+        </p:nvSpPr>
+        <p:spPr>
+          <a:xfrm>
+            <a:off x="777240" y="3246120"/>
+            <a:ext cx="6035040" cy="320040"/>
           </a:xfrm>
           <a:prstGeom prst="rect">
             <a:avLst/>
@@ -4572,7 +6334,7 @@
               <a:buNone/>
             </a:pPr>
             <a:r>
-              <a:rPr lang="en-US" sz="1100" b="1" spc="100" kern="0" dirty="0">
+              <a:rPr lang="en-US" sz="1150" b="1" dirty="0">
                 <a:solidFill>
                   <a:srgbClr val="C9682B"/>
                 </a:solidFill>
@@ -4580,7 +6342,46 @@
                 <a:ea typeface="Calibri" pitchFamily="34" charset="-122"/>
                 <a:cs typeface="Calibri" pitchFamily="34" charset="-120"/>
               </a:rPr>
-              <a:t>MERCADO TOTAL</a:t>
+              <a:t>Pregunta 3 · ¿Cómo organizáis hoy la lista de la compra?</a:t>
+            </a:r>
+            <a:endParaRPr lang="en-US" sz="1150" dirty="0"/>
+          </a:p>
+        </p:txBody>
+      </p:sp>
+      <p:sp>
+        <p:nvSpPr>
+          <p:cNvPr id="19" name="Text 16"/>
+          <p:cNvSpPr txBox="1"/>
+          <p:nvPr/>
+        </p:nvSpPr>
+        <p:spPr>
+          <a:xfrm>
+            <a:off x="777240" y="3648456"/>
+            <a:ext cx="1920240" cy="274320"/>
+          </a:xfrm>
+          <a:prstGeom prst="rect">
+            <a:avLst/>
+          </a:prstGeom>
+          <a:noFill/>
+          <a:ln/>
+        </p:spPr>
+        <p:txBody>
+          <a:bodyPr wrap="square" lIns="0" tIns="0" rIns="0" bIns="0" rtlCol="0" anchor="ctr"/>
+          <a:lstStyle/>
+          <a:p>
+            <a:pPr algn="r" indent="0" marL="0">
+              <a:buNone/>
+            </a:pPr>
+            <a:r>
+              <a:rPr lang="en-US" sz="1100" dirty="0">
+                <a:solidFill>
+                  <a:srgbClr val="2E2119"/>
+                </a:solidFill>
+                <a:latin typeface="Calibri" pitchFamily="34" charset="0"/>
+                <a:ea typeface="Calibri" pitchFamily="34" charset="-122"/>
+                <a:cs typeface="Calibri" pitchFamily="34" charset="-120"/>
+              </a:rPr>
+              <a:t>Papel y boli</a:t>
             </a:r>
             <a:endParaRPr lang="en-US" sz="1100" dirty="0"/>
           </a:p>
@@ -4588,284 +6389,58 @@
       </p:sp>
       <p:sp>
         <p:nvSpPr>
-          <p:cNvPr id="8" name="Text 5"/>
-          <p:cNvSpPr txBox="1"/>
-          <p:nvPr/>
-        </p:nvSpPr>
-        <p:spPr>
-          <a:xfrm>
-            <a:off x="777240" y="2011680"/>
-            <a:ext cx="3108960" cy="1005840"/>
-          </a:xfrm>
-          <a:prstGeom prst="rect">
-            <a:avLst/>
-          </a:prstGeom>
-          <a:noFill/>
-          <a:ln/>
-        </p:spPr>
-        <p:txBody>
-          <a:bodyPr wrap="square" lIns="0" tIns="0" rIns="0" bIns="0" rtlCol="0" anchor="ctr"/>
-          <a:lstStyle/>
-          <a:p>
-            <a:pPr indent="0" marL="0">
-              <a:buNone/>
-            </a:pPr>
-            <a:r>
-              <a:rPr lang="en-US" sz="2000" b="1" dirty="0">
-                <a:solidFill>
-                  <a:srgbClr val="2E2119"/>
-                </a:solidFill>
-                <a:latin typeface="Cambria" pitchFamily="34" charset="0"/>
-                <a:ea typeface="Cambria" pitchFamily="34" charset="-122"/>
-                <a:cs typeface="Cambria" pitchFamily="34" charset="-120"/>
-              </a:rPr>
-              <a:t>Hogares de</a:t>
-            </a:r>
-            <a:endParaRPr lang="en-US" sz="2000" dirty="0"/>
-          </a:p>
-          <a:p>
-            <a:pPr indent="0" marL="0">
-              <a:buNone/>
-            </a:pPr>
-            <a:r>
-              <a:rPr lang="en-US" sz="2000" b="1" dirty="0">
-                <a:solidFill>
-                  <a:srgbClr val="2E2119"/>
-                </a:solidFill>
-                <a:latin typeface="Cambria" pitchFamily="34" charset="0"/>
-                <a:ea typeface="Cambria" pitchFamily="34" charset="-122"/>
-                <a:cs typeface="Cambria" pitchFamily="34" charset="-120"/>
-              </a:rPr>
-              <a:t>España 2+ pers.</a:t>
-            </a:r>
-            <a:endParaRPr lang="en-US" sz="2000" dirty="0"/>
-          </a:p>
-        </p:txBody>
-      </p:sp>
-      <p:sp>
-        <p:nvSpPr>
-          <p:cNvPr id="9" name="Text 6"/>
-          <p:cNvSpPr txBox="1"/>
-          <p:nvPr/>
-        </p:nvSpPr>
-        <p:spPr>
-          <a:xfrm>
-            <a:off x="777240" y="3063240"/>
-            <a:ext cx="3108960" cy="777240"/>
-          </a:xfrm>
-          <a:prstGeom prst="rect">
-            <a:avLst/>
-          </a:prstGeom>
-          <a:noFill/>
-          <a:ln/>
-        </p:spPr>
-        <p:txBody>
-          <a:bodyPr wrap="square" lIns="0" tIns="0" rIns="0" bIns="0" rtlCol="0" anchor="t"/>
-          <a:lstStyle/>
-          <a:p>
-            <a:pPr indent="0" marL="0">
-              <a:buNone/>
-            </a:pPr>
-            <a:r>
-              <a:rPr lang="en-US" sz="1050" dirty="0">
-                <a:solidFill>
-                  <a:srgbClr val="8A7A6D"/>
-                </a:solidFill>
-                <a:latin typeface="Calibri" pitchFamily="34" charset="0"/>
-                <a:ea typeface="Calibri" pitchFamily="34" charset="-122"/>
-                <a:cs typeface="Calibri" pitchFamily="34" charset="-120"/>
-              </a:rPr>
-              <a:t>Tamaño medio 2,50 pers./hogar (INE 2023)</a:t>
-            </a:r>
-            <a:endParaRPr lang="en-US" sz="1050" dirty="0"/>
-          </a:p>
-        </p:txBody>
-      </p:sp>
-      <p:sp>
-        <p:nvSpPr>
-          <p:cNvPr id="10" name="Shape 7"/>
+          <p:cNvPr id="20" name="Shape 17"/>
           <p:cNvSpPr/>
           <p:nvPr/>
         </p:nvSpPr>
         <p:spPr>
           <a:xfrm>
-            <a:off x="4297680" y="1463040"/>
-            <a:ext cx="3566160" cy="2468880"/>
+            <a:off x="2788920" y="3675888"/>
+            <a:ext cx="3566160" cy="219456"/>
           </a:xfrm>
           <a:prstGeom prst="roundRect">
             <a:avLst>
-              <a:gd name="adj" fmla="val 4444"/>
+              <a:gd name="adj" fmla="val 16667"/>
             </a:avLst>
           </a:prstGeom>
           <a:solidFill>
-            <a:srgbClr val="2E2119"/>
+            <a:srgbClr val="E7DCCB"/>
           </a:solidFill>
           <a:ln/>
-          <a:effectLst>
-            <a:outerShdw sx="100000" sy="100000" kx="0" ky="0" algn="bl" rotWithShape="0" blurRad="76200" dist="25400" dir="5400000">
-              <a:srgbClr val="000000">
-                <a:alpha val="12000"/>
-              </a:srgbClr>
-            </a:outerShdw>
-          </a:effectLst>
-        </p:spPr>
-      </p:sp>
-      <p:sp>
-        <p:nvSpPr>
-          <p:cNvPr id="11" name="Text 8"/>
-          <p:cNvSpPr txBox="1"/>
-          <p:nvPr/>
-        </p:nvSpPr>
-        <p:spPr>
-          <a:xfrm>
-            <a:off x="4526280" y="1645920"/>
-            <a:ext cx="3108960" cy="320040"/>
-          </a:xfrm>
-          <a:prstGeom prst="rect">
-            <a:avLst/>
-          </a:prstGeom>
-          <a:noFill/>
-          <a:ln/>
-        </p:spPr>
-        <p:txBody>
-          <a:bodyPr wrap="square" lIns="0" tIns="0" rIns="0" bIns="0" rtlCol="0" anchor="ctr"/>
-          <a:lstStyle/>
-          <a:p>
-            <a:pPr indent="0" marL="0">
-              <a:buNone/>
-            </a:pPr>
-            <a:r>
-              <a:rPr lang="en-US" sz="1100" b="1" spc="100" kern="0" dirty="0">
-                <a:solidFill>
-                  <a:srgbClr val="D9A441"/>
-                </a:solidFill>
-                <a:latin typeface="Calibri" pitchFamily="34" charset="0"/>
-                <a:ea typeface="Calibri" pitchFamily="34" charset="-122"/>
-                <a:cs typeface="Calibri" pitchFamily="34" charset="-120"/>
-              </a:rPr>
-              <a:t>MERCADO ACCESIBLE</a:t>
-            </a:r>
-            <a:endParaRPr lang="en-US" sz="1100" dirty="0"/>
-          </a:p>
-        </p:txBody>
-      </p:sp>
-      <p:sp>
-        <p:nvSpPr>
-          <p:cNvPr id="12" name="Text 9"/>
-          <p:cNvSpPr txBox="1"/>
-          <p:nvPr/>
-        </p:nvSpPr>
-        <p:spPr>
-          <a:xfrm>
-            <a:off x="4526280" y="2011680"/>
-            <a:ext cx="3108960" cy="1005840"/>
-          </a:xfrm>
-          <a:prstGeom prst="rect">
-            <a:avLst/>
-          </a:prstGeom>
-          <a:noFill/>
-          <a:ln/>
-        </p:spPr>
-        <p:txBody>
-          <a:bodyPr wrap="square" lIns="0" tIns="0" rIns="0" bIns="0" rtlCol="0" anchor="ctr"/>
-          <a:lstStyle/>
-          <a:p>
-            <a:pPr indent="0" marL="0">
-              <a:buNone/>
-            </a:pPr>
-            <a:r>
-              <a:rPr lang="en-US" sz="3400" b="1" dirty="0">
-                <a:solidFill>
-                  <a:srgbClr val="FFFFFF"/>
-                </a:solidFill>
-                <a:latin typeface="Cambria" pitchFamily="34" charset="0"/>
-                <a:ea typeface="Cambria" pitchFamily="34" charset="-122"/>
-                <a:cs typeface="Cambria" pitchFamily="34" charset="-120"/>
-              </a:rPr>
-              <a:t>≈ 99.700</a:t>
-            </a:r>
-            <a:endParaRPr lang="en-US" sz="3400" dirty="0"/>
-          </a:p>
-        </p:txBody>
-      </p:sp>
-      <p:sp>
-        <p:nvSpPr>
-          <p:cNvPr id="13" name="Text 10"/>
-          <p:cNvSpPr txBox="1"/>
-          <p:nvPr/>
-        </p:nvSpPr>
-        <p:spPr>
-          <a:xfrm>
-            <a:off x="4526280" y="3063240"/>
-            <a:ext cx="3108960" cy="777240"/>
-          </a:xfrm>
-          <a:prstGeom prst="rect">
-            <a:avLst/>
-          </a:prstGeom>
-          <a:noFill/>
-          <a:ln/>
-        </p:spPr>
-        <p:txBody>
-          <a:bodyPr wrap="square" lIns="0" tIns="0" rIns="0" bIns="0" rtlCol="0" anchor="t"/>
-          <a:lstStyle/>
-          <a:p>
-            <a:pPr indent="0" marL="0">
-              <a:buNone/>
-            </a:pPr>
-            <a:r>
-              <a:rPr lang="en-US" sz="1050" dirty="0">
-                <a:solidFill>
-                  <a:srgbClr val="D8CBBE"/>
-                </a:solidFill>
-                <a:latin typeface="Calibri" pitchFamily="34" charset="0"/>
-                <a:ea typeface="Calibri" pitchFamily="34" charset="-122"/>
-                <a:cs typeface="Calibri" pitchFamily="34" charset="-120"/>
-              </a:rPr>
-              <a:t>249.261 hab. ÷ 2,50 pers./hogar (INE/IGE 2024)</a:t>
-            </a:r>
-            <a:endParaRPr lang="en-US" sz="1050" dirty="0"/>
-          </a:p>
-        </p:txBody>
-      </p:sp>
-      <p:sp>
-        <p:nvSpPr>
-          <p:cNvPr id="14" name="Shape 11"/>
+        </p:spPr>
+      </p:sp>
+      <p:sp>
+        <p:nvSpPr>
+          <p:cNvPr id="21" name="Shape 18"/>
           <p:cNvSpPr/>
           <p:nvPr/>
         </p:nvSpPr>
         <p:spPr>
           <a:xfrm>
-            <a:off x="8046720" y="1463040"/>
-            <a:ext cx="3566160" cy="2468880"/>
+            <a:off x="2788920" y="3675888"/>
+            <a:ext cx="3566160" cy="219456"/>
           </a:xfrm>
           <a:prstGeom prst="roundRect">
             <a:avLst>
-              <a:gd name="adj" fmla="val 4444"/>
+              <a:gd name="adj" fmla="val 16667"/>
             </a:avLst>
           </a:prstGeom>
           <a:solidFill>
-            <a:srgbClr val="F4E9DA"/>
+            <a:srgbClr val="C9682B"/>
           </a:solidFill>
           <a:ln/>
-          <a:effectLst>
-            <a:outerShdw sx="100000" sy="100000" kx="0" ky="0" algn="bl" rotWithShape="0" blurRad="76200" dist="25400" dir="5400000">
-              <a:srgbClr val="000000">
-                <a:alpha val="12000"/>
-              </a:srgbClr>
-            </a:outerShdw>
-          </a:effectLst>
-        </p:spPr>
-      </p:sp>
-      <p:sp>
-        <p:nvSpPr>
-          <p:cNvPr id="15" name="Text 12"/>
-          <p:cNvSpPr txBox="1"/>
-          <p:nvPr/>
-        </p:nvSpPr>
-        <p:spPr>
-          <a:xfrm>
-            <a:off x="8275320" y="1645920"/>
-            <a:ext cx="3108960" cy="320040"/>
+        </p:spPr>
+      </p:sp>
+      <p:sp>
+        <p:nvSpPr>
+          <p:cNvPr id="22" name="Text 19"/>
+          <p:cNvSpPr txBox="1"/>
+          <p:nvPr/>
+        </p:nvSpPr>
+        <p:spPr>
+          <a:xfrm>
+            <a:off x="6428232" y="3648456"/>
+            <a:ext cx="411480" cy="274320"/>
           </a:xfrm>
           <a:prstGeom prst="rect">
             <a:avLst/>
@@ -4877,19 +6452,19 @@
           <a:bodyPr wrap="square" lIns="0" tIns="0" rIns="0" bIns="0" rtlCol="0" anchor="ctr"/>
           <a:lstStyle/>
           <a:p>
-            <a:pPr indent="0" marL="0">
-              <a:buNone/>
-            </a:pPr>
-            <a:r>
-              <a:rPr lang="en-US" sz="1100" b="1" spc="100" kern="0" dirty="0">
-                <a:solidFill>
-                  <a:srgbClr val="C9682B"/>
-                </a:solidFill>
-                <a:latin typeface="Calibri" pitchFamily="34" charset="0"/>
-                <a:ea typeface="Calibri" pitchFamily="34" charset="-122"/>
-                <a:cs typeface="Calibri" pitchFamily="34" charset="-120"/>
-              </a:rPr>
-              <a:t>MERCADO OBJETIVO</a:t>
+            <a:pPr algn="l" indent="0" marL="0">
+              <a:buNone/>
+            </a:pPr>
+            <a:r>
+              <a:rPr lang="en-US" sz="1100" b="1" dirty="0">
+                <a:solidFill>
+                  <a:srgbClr val="2E2119"/>
+                </a:solidFill>
+                <a:latin typeface="Calibri" pitchFamily="34" charset="0"/>
+                <a:ea typeface="Calibri" pitchFamily="34" charset="-122"/>
+                <a:cs typeface="Calibri" pitchFamily="34" charset="-120"/>
+              </a:rPr>
+              <a:t>5</a:t>
             </a:r>
             <a:endParaRPr lang="en-US" sz="1100" dirty="0"/>
           </a:p>
@@ -4897,14 +6472,14 @@
       </p:sp>
       <p:sp>
         <p:nvSpPr>
-          <p:cNvPr id="16" name="Text 13"/>
-          <p:cNvSpPr txBox="1"/>
-          <p:nvPr/>
-        </p:nvSpPr>
-        <p:spPr>
-          <a:xfrm>
-            <a:off x="8275320" y="2011680"/>
-            <a:ext cx="3108960" cy="1005840"/>
+          <p:cNvPr id="23" name="Text 20"/>
+          <p:cNvSpPr txBox="1"/>
+          <p:nvPr/>
+        </p:nvSpPr>
+        <p:spPr>
+          <a:xfrm>
+            <a:off x="777240" y="3959352"/>
+            <a:ext cx="1920240" cy="274320"/>
           </a:xfrm>
           <a:prstGeom prst="rect">
             <a:avLst/>
@@ -4916,77 +6491,504 @@
           <a:bodyPr wrap="square" lIns="0" tIns="0" rIns="0" bIns="0" rtlCol="0" anchor="ctr"/>
           <a:lstStyle/>
           <a:p>
-            <a:pPr indent="0" marL="0">
-              <a:buNone/>
-            </a:pPr>
-            <a:r>
-              <a:rPr lang="en-US" sz="3400" b="1" dirty="0">
+            <a:pPr algn="r" indent="0" marL="0">
+              <a:buNone/>
+            </a:pPr>
+            <a:r>
+              <a:rPr lang="en-US" sz="1100" dirty="0">
                 <a:solidFill>
                   <a:srgbClr val="2E2119"/>
                 </a:solidFill>
-                <a:latin typeface="Cambria" pitchFamily="34" charset="0"/>
-                <a:ea typeface="Cambria" pitchFamily="34" charset="-122"/>
-                <a:cs typeface="Cambria" pitchFamily="34" charset="-120"/>
-              </a:rPr>
-              <a:t>≈ 99.700</a:t>
-            </a:r>
-            <a:endParaRPr lang="en-US" sz="3400" dirty="0"/>
-          </a:p>
-        </p:txBody>
-      </p:sp>
-      <p:sp>
-        <p:nvSpPr>
-          <p:cNvPr id="17" name="Text 14"/>
-          <p:cNvSpPr txBox="1"/>
-          <p:nvPr/>
-        </p:nvSpPr>
-        <p:spPr>
-          <a:xfrm>
-            <a:off x="8275320" y="3063240"/>
-            <a:ext cx="3108960" cy="777240"/>
-          </a:xfrm>
-          <a:prstGeom prst="rect">
-            <a:avLst/>
-          </a:prstGeom>
-          <a:noFill/>
-          <a:ln/>
-        </p:spPr>
-        <p:txBody>
-          <a:bodyPr wrap="square" lIns="0" tIns="0" rIns="0" bIns="0" rtlCol="0" anchor="t"/>
-          <a:lstStyle/>
-          <a:p>
-            <a:pPr indent="0" marL="0">
-              <a:buNone/>
-            </a:pPr>
-            <a:r>
-              <a:rPr lang="en-US" sz="1050" dirty="0">
-                <a:solidFill>
-                  <a:srgbClr val="8A7A6D"/>
-                </a:solidFill>
-                <a:latin typeface="Calibri" pitchFamily="34" charset="0"/>
-                <a:ea typeface="Calibri" pitchFamily="34" charset="-122"/>
-                <a:cs typeface="Calibri" pitchFamily="34" charset="-120"/>
-              </a:rPr>
-              <a:t>Coincide con el accesible — ver nota abajo</a:t>
-            </a:r>
-            <a:endParaRPr lang="en-US" sz="1050" dirty="0"/>
-          </a:p>
-        </p:txBody>
-      </p:sp>
-      <p:sp>
-        <p:nvSpPr>
-          <p:cNvPr id="18" name="Shape 15"/>
+                <a:latin typeface="Calibri" pitchFamily="34" charset="0"/>
+                <a:ea typeface="Calibri" pitchFamily="34" charset="-122"/>
+                <a:cs typeface="Calibri" pitchFamily="34" charset="-120"/>
+              </a:rPr>
+              <a:t>Notas del móvil</a:t>
+            </a:r>
+            <a:endParaRPr lang="en-US" sz="1100" dirty="0"/>
+          </a:p>
+        </p:txBody>
+      </p:sp>
+      <p:sp>
+        <p:nvSpPr>
+          <p:cNvPr id="24" name="Shape 21"/>
           <p:cNvSpPr/>
           <p:nvPr/>
         </p:nvSpPr>
         <p:spPr>
           <a:xfrm>
-            <a:off x="548640" y="4160520"/>
-            <a:ext cx="11064240" cy="1965960"/>
+            <a:off x="2788920" y="3986784"/>
+            <a:ext cx="3566160" cy="219456"/>
           </a:xfrm>
           <a:prstGeom prst="roundRect">
             <a:avLst>
-              <a:gd name="adj" fmla="val 4651"/>
+              <a:gd name="adj" fmla="val 16667"/>
+            </a:avLst>
+          </a:prstGeom>
+          <a:solidFill>
+            <a:srgbClr val="E7DCCB"/>
+          </a:solidFill>
+          <a:ln/>
+        </p:spPr>
+      </p:sp>
+      <p:sp>
+        <p:nvSpPr>
+          <p:cNvPr id="25" name="Shape 22"/>
+          <p:cNvSpPr/>
+          <p:nvPr/>
+        </p:nvSpPr>
+        <p:spPr>
+          <a:xfrm>
+            <a:off x="2788920" y="3986784"/>
+            <a:ext cx="2852928" cy="219456"/>
+          </a:xfrm>
+          <a:prstGeom prst="roundRect">
+            <a:avLst>
+              <a:gd name="adj" fmla="val 16667"/>
+            </a:avLst>
+          </a:prstGeom>
+          <a:solidFill>
+            <a:srgbClr val="D9A441"/>
+          </a:solidFill>
+          <a:ln/>
+        </p:spPr>
+      </p:sp>
+      <p:sp>
+        <p:nvSpPr>
+          <p:cNvPr id="26" name="Text 23"/>
+          <p:cNvSpPr txBox="1"/>
+          <p:nvPr/>
+        </p:nvSpPr>
+        <p:spPr>
+          <a:xfrm>
+            <a:off x="6428232" y="3959352"/>
+            <a:ext cx="411480" cy="274320"/>
+          </a:xfrm>
+          <a:prstGeom prst="rect">
+            <a:avLst/>
+          </a:prstGeom>
+          <a:noFill/>
+          <a:ln/>
+        </p:spPr>
+        <p:txBody>
+          <a:bodyPr wrap="square" lIns="0" tIns="0" rIns="0" bIns="0" rtlCol="0" anchor="ctr"/>
+          <a:lstStyle/>
+          <a:p>
+            <a:pPr algn="l" indent="0" marL="0">
+              <a:buNone/>
+            </a:pPr>
+            <a:r>
+              <a:rPr lang="en-US" sz="1100" b="1" dirty="0">
+                <a:solidFill>
+                  <a:srgbClr val="2E2119"/>
+                </a:solidFill>
+                <a:latin typeface="Calibri" pitchFamily="34" charset="0"/>
+                <a:ea typeface="Calibri" pitchFamily="34" charset="-122"/>
+                <a:cs typeface="Calibri" pitchFamily="34" charset="-120"/>
+              </a:rPr>
+              <a:t>4</a:t>
+            </a:r>
+            <a:endParaRPr lang="en-US" sz="1100" dirty="0"/>
+          </a:p>
+        </p:txBody>
+      </p:sp>
+      <p:sp>
+        <p:nvSpPr>
+          <p:cNvPr id="27" name="Text 24"/>
+          <p:cNvSpPr txBox="1"/>
+          <p:nvPr/>
+        </p:nvSpPr>
+        <p:spPr>
+          <a:xfrm>
+            <a:off x="777240" y="4270248"/>
+            <a:ext cx="1920240" cy="274320"/>
+          </a:xfrm>
+          <a:prstGeom prst="rect">
+            <a:avLst/>
+          </a:prstGeom>
+          <a:noFill/>
+          <a:ln/>
+        </p:spPr>
+        <p:txBody>
+          <a:bodyPr wrap="square" lIns="0" tIns="0" rIns="0" bIns="0" rtlCol="0" anchor="ctr"/>
+          <a:lstStyle/>
+          <a:p>
+            <a:pPr algn="r" indent="0" marL="0">
+              <a:buNone/>
+            </a:pPr>
+            <a:r>
+              <a:rPr lang="en-US" sz="1100" dirty="0">
+                <a:solidFill>
+                  <a:srgbClr val="2E2119"/>
+                </a:solidFill>
+                <a:latin typeface="Calibri" pitchFamily="34" charset="0"/>
+                <a:ea typeface="Calibri" pitchFamily="34" charset="-122"/>
+                <a:cs typeface="Calibri" pitchFamily="34" charset="-120"/>
+              </a:rPr>
+              <a:t>Ninguno / a ojo</a:t>
+            </a:r>
+            <a:endParaRPr lang="en-US" sz="1100" dirty="0"/>
+          </a:p>
+        </p:txBody>
+      </p:sp>
+      <p:sp>
+        <p:nvSpPr>
+          <p:cNvPr id="28" name="Shape 25"/>
+          <p:cNvSpPr/>
+          <p:nvPr/>
+        </p:nvSpPr>
+        <p:spPr>
+          <a:xfrm>
+            <a:off x="2788920" y="4297680"/>
+            <a:ext cx="3566160" cy="219456"/>
+          </a:xfrm>
+          <a:prstGeom prst="roundRect">
+            <a:avLst>
+              <a:gd name="adj" fmla="val 16667"/>
+            </a:avLst>
+          </a:prstGeom>
+          <a:solidFill>
+            <a:srgbClr val="E7DCCB"/>
+          </a:solidFill>
+          <a:ln/>
+        </p:spPr>
+      </p:sp>
+      <p:sp>
+        <p:nvSpPr>
+          <p:cNvPr id="29" name="Shape 26"/>
+          <p:cNvSpPr/>
+          <p:nvPr/>
+        </p:nvSpPr>
+        <p:spPr>
+          <a:xfrm>
+            <a:off x="2788920" y="4297680"/>
+            <a:ext cx="1426464" cy="219456"/>
+          </a:xfrm>
+          <a:prstGeom prst="roundRect">
+            <a:avLst>
+              <a:gd name="adj" fmla="val 16667"/>
+            </a:avLst>
+          </a:prstGeom>
+          <a:solidFill>
+            <a:srgbClr val="8A7A6D"/>
+          </a:solidFill>
+          <a:ln/>
+        </p:spPr>
+      </p:sp>
+      <p:sp>
+        <p:nvSpPr>
+          <p:cNvPr id="30" name="Text 27"/>
+          <p:cNvSpPr txBox="1"/>
+          <p:nvPr/>
+        </p:nvSpPr>
+        <p:spPr>
+          <a:xfrm>
+            <a:off x="6428232" y="4270248"/>
+            <a:ext cx="411480" cy="274320"/>
+          </a:xfrm>
+          <a:prstGeom prst="rect">
+            <a:avLst/>
+          </a:prstGeom>
+          <a:noFill/>
+          <a:ln/>
+        </p:spPr>
+        <p:txBody>
+          <a:bodyPr wrap="square" lIns="0" tIns="0" rIns="0" bIns="0" rtlCol="0" anchor="ctr"/>
+          <a:lstStyle/>
+          <a:p>
+            <a:pPr algn="l" indent="0" marL="0">
+              <a:buNone/>
+            </a:pPr>
+            <a:r>
+              <a:rPr lang="en-US" sz="1100" b="1" dirty="0">
+                <a:solidFill>
+                  <a:srgbClr val="2E2119"/>
+                </a:solidFill>
+                <a:latin typeface="Calibri" pitchFamily="34" charset="0"/>
+                <a:ea typeface="Calibri" pitchFamily="34" charset="-122"/>
+                <a:cs typeface="Calibri" pitchFamily="34" charset="-120"/>
+              </a:rPr>
+              <a:t>2</a:t>
+            </a:r>
+            <a:endParaRPr lang="en-US" sz="1100" dirty="0"/>
+          </a:p>
+        </p:txBody>
+      </p:sp>
+      <p:sp>
+        <p:nvSpPr>
+          <p:cNvPr id="31" name="Text 28"/>
+          <p:cNvSpPr txBox="1"/>
+          <p:nvPr/>
+        </p:nvSpPr>
+        <p:spPr>
+          <a:xfrm>
+            <a:off x="777240" y="4581144"/>
+            <a:ext cx="1920240" cy="274320"/>
+          </a:xfrm>
+          <a:prstGeom prst="rect">
+            <a:avLst/>
+          </a:prstGeom>
+          <a:noFill/>
+          <a:ln/>
+        </p:spPr>
+        <p:txBody>
+          <a:bodyPr wrap="square" lIns="0" tIns="0" rIns="0" bIns="0" rtlCol="0" anchor="ctr"/>
+          <a:lstStyle/>
+          <a:p>
+            <a:pPr algn="r" indent="0" marL="0">
+              <a:buNone/>
+            </a:pPr>
+            <a:r>
+              <a:rPr lang="en-US" sz="1100" dirty="0">
+                <a:solidFill>
+                  <a:srgbClr val="2E2119"/>
+                </a:solidFill>
+                <a:latin typeface="Calibri" pitchFamily="34" charset="0"/>
+                <a:ea typeface="Calibri" pitchFamily="34" charset="-122"/>
+                <a:cs typeface="Calibri" pitchFamily="34" charset="-120"/>
+              </a:rPr>
+              <a:t>Grupo de WhatsApp</a:t>
+            </a:r>
+            <a:endParaRPr lang="en-US" sz="1100" dirty="0"/>
+          </a:p>
+        </p:txBody>
+      </p:sp>
+      <p:sp>
+        <p:nvSpPr>
+          <p:cNvPr id="32" name="Shape 29"/>
+          <p:cNvSpPr/>
+          <p:nvPr/>
+        </p:nvSpPr>
+        <p:spPr>
+          <a:xfrm>
+            <a:off x="2788920" y="4608576"/>
+            <a:ext cx="3566160" cy="219456"/>
+          </a:xfrm>
+          <a:prstGeom prst="roundRect">
+            <a:avLst>
+              <a:gd name="adj" fmla="val 16667"/>
+            </a:avLst>
+          </a:prstGeom>
+          <a:solidFill>
+            <a:srgbClr val="E7DCCB"/>
+          </a:solidFill>
+          <a:ln/>
+        </p:spPr>
+      </p:sp>
+      <p:sp>
+        <p:nvSpPr>
+          <p:cNvPr id="33" name="Shape 30"/>
+          <p:cNvSpPr/>
+          <p:nvPr/>
+        </p:nvSpPr>
+        <p:spPr>
+          <a:xfrm>
+            <a:off x="2788920" y="4608576"/>
+            <a:ext cx="713232" cy="219456"/>
+          </a:xfrm>
+          <a:prstGeom prst="roundRect">
+            <a:avLst>
+              <a:gd name="adj" fmla="val 16667"/>
+            </a:avLst>
+          </a:prstGeom>
+          <a:solidFill>
+            <a:srgbClr val="8A7A6D"/>
+          </a:solidFill>
+          <a:ln/>
+        </p:spPr>
+      </p:sp>
+      <p:sp>
+        <p:nvSpPr>
+          <p:cNvPr id="34" name="Text 31"/>
+          <p:cNvSpPr txBox="1"/>
+          <p:nvPr/>
+        </p:nvSpPr>
+        <p:spPr>
+          <a:xfrm>
+            <a:off x="6428232" y="4581144"/>
+            <a:ext cx="411480" cy="274320"/>
+          </a:xfrm>
+          <a:prstGeom prst="rect">
+            <a:avLst/>
+          </a:prstGeom>
+          <a:noFill/>
+          <a:ln/>
+        </p:spPr>
+        <p:txBody>
+          <a:bodyPr wrap="square" lIns="0" tIns="0" rIns="0" bIns="0" rtlCol="0" anchor="ctr"/>
+          <a:lstStyle/>
+          <a:p>
+            <a:pPr algn="l" indent="0" marL="0">
+              <a:buNone/>
+            </a:pPr>
+            <a:r>
+              <a:rPr lang="en-US" sz="1100" b="1" dirty="0">
+                <a:solidFill>
+                  <a:srgbClr val="2E2119"/>
+                </a:solidFill>
+                <a:latin typeface="Calibri" pitchFamily="34" charset="0"/>
+                <a:ea typeface="Calibri" pitchFamily="34" charset="-122"/>
+                <a:cs typeface="Calibri" pitchFamily="34" charset="-120"/>
+              </a:rPr>
+              <a:t>1</a:t>
+            </a:r>
+            <a:endParaRPr lang="en-US" sz="1100" dirty="0"/>
+          </a:p>
+        </p:txBody>
+      </p:sp>
+      <p:sp>
+        <p:nvSpPr>
+          <p:cNvPr id="35" name="Text 32"/>
+          <p:cNvSpPr txBox="1"/>
+          <p:nvPr/>
+        </p:nvSpPr>
+        <p:spPr>
+          <a:xfrm>
+            <a:off x="777240" y="4892040"/>
+            <a:ext cx="1920240" cy="274320"/>
+          </a:xfrm>
+          <a:prstGeom prst="rect">
+            <a:avLst/>
+          </a:prstGeom>
+          <a:noFill/>
+          <a:ln/>
+        </p:spPr>
+        <p:txBody>
+          <a:bodyPr wrap="square" lIns="0" tIns="0" rIns="0" bIns="0" rtlCol="0" anchor="ctr"/>
+          <a:lstStyle/>
+          <a:p>
+            <a:pPr algn="r" indent="0" marL="0">
+              <a:buNone/>
+            </a:pPr>
+            <a:r>
+              <a:rPr lang="en-US" sz="1100" b="1" dirty="0">
+                <a:solidFill>
+                  <a:srgbClr val="2E2119"/>
+                </a:solidFill>
+                <a:latin typeface="Calibri" pitchFamily="34" charset="0"/>
+                <a:ea typeface="Calibri" pitchFamily="34" charset="-122"/>
+                <a:cs typeface="Calibri" pitchFamily="34" charset="-120"/>
+              </a:rPr>
+              <a:t>Una app específica</a:t>
+            </a:r>
+            <a:endParaRPr lang="en-US" sz="1100" dirty="0"/>
+          </a:p>
+        </p:txBody>
+      </p:sp>
+      <p:sp>
+        <p:nvSpPr>
+          <p:cNvPr id="36" name="Shape 33"/>
+          <p:cNvSpPr/>
+          <p:nvPr/>
+        </p:nvSpPr>
+        <p:spPr>
+          <a:xfrm>
+            <a:off x="2788920" y="4919472"/>
+            <a:ext cx="3566160" cy="219456"/>
+          </a:xfrm>
+          <a:prstGeom prst="roundRect">
+            <a:avLst>
+              <a:gd name="adj" fmla="val 16667"/>
+            </a:avLst>
+          </a:prstGeom>
+          <a:solidFill>
+            <a:srgbClr val="E7DCCB"/>
+          </a:solidFill>
+          <a:ln/>
+        </p:spPr>
+      </p:sp>
+      <p:sp>
+        <p:nvSpPr>
+          <p:cNvPr id="37" name="Text 34"/>
+          <p:cNvSpPr txBox="1"/>
+          <p:nvPr/>
+        </p:nvSpPr>
+        <p:spPr>
+          <a:xfrm>
+            <a:off x="6428232" y="4892040"/>
+            <a:ext cx="411480" cy="274320"/>
+          </a:xfrm>
+          <a:prstGeom prst="rect">
+            <a:avLst/>
+          </a:prstGeom>
+          <a:noFill/>
+          <a:ln/>
+        </p:spPr>
+        <p:txBody>
+          <a:bodyPr wrap="square" lIns="0" tIns="0" rIns="0" bIns="0" rtlCol="0" anchor="ctr"/>
+          <a:lstStyle/>
+          <a:p>
+            <a:pPr algn="l" indent="0" marL="0">
+              <a:buNone/>
+            </a:pPr>
+            <a:r>
+              <a:rPr lang="en-US" sz="1100" b="1" dirty="0">
+                <a:solidFill>
+                  <a:srgbClr val="C9682B"/>
+                </a:solidFill>
+                <a:latin typeface="Calibri" pitchFamily="34" charset="0"/>
+                <a:ea typeface="Calibri" pitchFamily="34" charset="-122"/>
+                <a:cs typeface="Calibri" pitchFamily="34" charset="-120"/>
+              </a:rPr>
+              <a:t>0</a:t>
+            </a:r>
+            <a:endParaRPr lang="en-US" sz="1100" dirty="0"/>
+          </a:p>
+        </p:txBody>
+      </p:sp>
+      <p:sp>
+        <p:nvSpPr>
+          <p:cNvPr id="38" name="Text 35"/>
+          <p:cNvSpPr txBox="1"/>
+          <p:nvPr/>
+        </p:nvSpPr>
+        <p:spPr>
+          <a:xfrm>
+            <a:off x="777240" y="5248656"/>
+            <a:ext cx="6035040" cy="256032"/>
+          </a:xfrm>
+          <a:prstGeom prst="rect">
+            <a:avLst/>
+          </a:prstGeom>
+          <a:noFill/>
+          <a:ln/>
+        </p:spPr>
+        <p:txBody>
+          <a:bodyPr wrap="square" lIns="0" tIns="0" rIns="0" bIns="0" rtlCol="0" anchor="ctr"/>
+          <a:lstStyle/>
+          <a:p>
+            <a:pPr indent="0" marL="0">
+              <a:buNone/>
+            </a:pPr>
+            <a:r>
+              <a:rPr lang="en-US" sz="950" i="1" dirty="0">
+                <a:solidFill>
+                  <a:srgbClr val="C9682B"/>
+                </a:solidFill>
+                <a:latin typeface="Calibri" pitchFamily="34" charset="0"/>
+                <a:ea typeface="Calibri" pitchFamily="34" charset="-122"/>
+                <a:cs typeface="Calibri" pitchFamily="34" charset="-120"/>
+              </a:rPr>
+              <a:t>↑ opción disponible desde el primer momento — nadie la eligió</a:t>
+            </a:r>
+            <a:endParaRPr lang="en-US" sz="950" dirty="0"/>
+          </a:p>
+        </p:txBody>
+      </p:sp>
+      <p:sp>
+        <p:nvSpPr>
+          <p:cNvPr id="39" name="Shape 36"/>
+          <p:cNvSpPr/>
+          <p:nvPr/>
+        </p:nvSpPr>
+        <p:spPr>
+          <a:xfrm>
+            <a:off x="7223760" y="3108960"/>
+            <a:ext cx="4389120" cy="2148840"/>
+          </a:xfrm>
+          <a:prstGeom prst="roundRect">
+            <a:avLst>
+              <a:gd name="adj" fmla="val 5106"/>
             </a:avLst>
           </a:prstGeom>
           <a:solidFill>
@@ -5002,14 +7004,14 @@
       </p:sp>
       <p:sp>
         <p:nvSpPr>
-          <p:cNvPr id="19" name="Text 16"/>
-          <p:cNvSpPr txBox="1"/>
-          <p:nvPr/>
-        </p:nvSpPr>
-        <p:spPr>
-          <a:xfrm>
-            <a:off x="777240" y="4279392"/>
-            <a:ext cx="10607040" cy="1737360"/>
+          <p:cNvPr id="40" name="Text 37"/>
+          <p:cNvSpPr txBox="1"/>
+          <p:nvPr/>
+        </p:nvSpPr>
+        <p:spPr>
+          <a:xfrm>
+            <a:off x="7452360" y="3246120"/>
+            <a:ext cx="3931920" cy="1874520"/>
           </a:xfrm>
           <a:prstGeom prst="rect">
             <a:avLst/>
@@ -5020,23 +7022,6 @@
         <p:txBody>
           <a:bodyPr wrap="square" lIns="0" tIns="0" rIns="0" bIns="0" rtlCol="0" anchor="t"/>
           <a:lstStyle/>
-          <a:p>
-            <a:pPr indent="0" marL="0">
-              <a:buNone/>
-            </a:pPr>
-            <a:r>
-              <a:rPr lang="en-US" sz="1200" b="1" dirty="0">
-                <a:solidFill>
-                  <a:srgbClr val="C9682B"/>
-                </a:solidFill>
-                <a:latin typeface="Calibri" pitchFamily="34" charset="0"/>
-                <a:ea typeface="Calibri" pitchFamily="34" charset="-122"/>
-                <a:cs typeface="Calibri" pitchFamily="34" charset="-120"/>
-              </a:rPr>
-              <a:t>Nota honesta sobre la búsqueda:  </a:t>
-            </a:r>
-            <a:endParaRPr lang="en-US" sz="1200" dirty="0"/>
-          </a:p>
           <a:p>
             <a:pPr indent="0" marL="0">
               <a:spcAft>
@@ -5045,7 +7030,24 @@
               <a:buNone/>
             </a:pPr>
             <a:r>
-              <a:rPr lang="en-US" sz="1200" dirty="0">
+              <a:rPr lang="en-US" sz="1150" b="1" dirty="0">
+                <a:solidFill>
+                  <a:srgbClr val="C9682B"/>
+                </a:solidFill>
+                <a:latin typeface="Calibri" pitchFamily="34" charset="0"/>
+                <a:ea typeface="Calibri" pitchFamily="34" charset="-122"/>
+                <a:cs typeface="Calibri" pitchFamily="34" charset="-120"/>
+              </a:rPr>
+              <a:t>Las apps no son el problema — la adopción sí.  </a:t>
+            </a:r>
+            <a:endParaRPr lang="en-US" sz="1150" dirty="0"/>
+          </a:p>
+          <a:p>
+            <a:pPr indent="0" marL="0">
+              <a:buNone/>
+            </a:pPr>
+            <a:r>
+              <a:rPr lang="en-US" sz="1150" dirty="0">
                 <a:solidFill>
                   <a:srgbClr val="2E2119"/>
                 </a:solidFill>
@@ -5053,43 +7055,9 @@
                 <a:ea typeface="Calibri" pitchFamily="34" charset="-122"/>
                 <a:cs typeface="Calibri" pitchFamily="34" charset="-120"/>
               </a:rPr>
-              <a:t>no se encontró un desglose público fiable de "hogares no familiares/parejas sin hijos" a nivel de A Coruña — es un resultado válido en sí mismo, no un dato inventado.</a:t>
-            </a:r>
-            <a:endParaRPr lang="en-US" sz="1200" dirty="0"/>
-          </a:p>
-          <a:p>
-            <a:pPr indent="0" marL="0">
-              <a:buNone/>
-            </a:pPr>
-            <a:r>
-              <a:rPr lang="en-US" sz="1200" b="1" dirty="0">
-                <a:solidFill>
-                  <a:srgbClr val="C9682B"/>
-                </a:solidFill>
-                <a:latin typeface="Calibri" pitchFamily="34" charset="0"/>
-                <a:ea typeface="Calibri" pitchFamily="34" charset="-122"/>
-                <a:cs typeface="Calibri" pitchFamily="34" charset="-120"/>
-              </a:rPr>
-              <a:t>Suelo verificable:  </a:t>
-            </a:r>
-            <a:endParaRPr lang="en-US" sz="1200" dirty="0"/>
-          </a:p>
-          <a:p>
-            <a:pPr indent="0" marL="0">
-              <a:buNone/>
-            </a:pPr>
-            <a:r>
-              <a:rPr lang="en-US" sz="1200" dirty="0">
-                <a:solidFill>
-                  <a:srgbClr val="2E2119"/>
-                </a:solidFill>
-                <a:latin typeface="Calibri" pitchFamily="34" charset="0"/>
-                <a:ea typeface="Calibri" pitchFamily="34" charset="-122"/>
-                <a:cs typeface="Calibri" pitchFamily="34" charset="-120"/>
-              </a:rPr>
-              <a:t>≈ 650 pisos de estudiantes en A Coruña (UDC &gt;13.300 matriculados · 31% cambia de ciudad · 55% comparte piso — Fundación CYD).</a:t>
-            </a:r>
-            <a:endParaRPr lang="en-US" sz="1200" dirty="0"/>
+              <a:t>Bring! y AnyList llevan años disponibles y son razonablemente buenas (estado del arte, diapositiva anterior). Aun así, 0 de 12 personas las ha probado nunca, ni al escoger su método actual. El hueco no está en construir "una app más" — está en resolver por qué ninguna de las que ya existen consigue ni el primer uso.</a:t>
+            </a:r>
+            <a:endParaRPr lang="en-US" sz="1150" dirty="0"/>
           </a:p>
         </p:txBody>
       </p:sp>
@@ -5202,7 +7170,7 @@
                 <a:ea typeface="Calibri" pitchFamily="34" charset="-122"/>
                 <a:cs typeface="Calibri" pitchFamily="34" charset="-120"/>
               </a:rPr>
-              <a:t>PASO 4</a:t>
+              <a:t>PASO 2 — VALIDACIÓN</a:t>
             </a:r>
             <a:endParaRPr lang="en-US" sz="1200" dirty="0"/>
           </a:p>
@@ -5241,7 +7209,7 @@
                 <a:ea typeface="Cambria" pitchFamily="34" charset="-122"/>
                 <a:cs typeface="Cambria" pitchFamily="34" charset="-120"/>
               </a:rPr>
-              <a:t>La servilleta de 6 casillas</a:t>
+              <a:t>Las quejas espontáneas confirman el mismo patrón</a:t>
             </a:r>
             <a:endParaRPr lang="en-US" sz="2800" dirty="0"/>
           </a:p>
@@ -5249,18 +7217,57 @@
       </p:sp>
       <p:sp>
         <p:nvSpPr>
-          <p:cNvPr id="6" name="Shape 3"/>
+          <p:cNvPr id="6" name="Text 3"/>
+          <p:cNvSpPr txBox="1"/>
+          <p:nvPr/>
+        </p:nvSpPr>
+        <p:spPr>
+          <a:xfrm>
+            <a:off x="548640" y="1207008"/>
+            <a:ext cx="11094415" cy="274320"/>
+          </a:xfrm>
+          <a:prstGeom prst="rect">
+            <a:avLst/>
+          </a:prstGeom>
+          <a:noFill/>
+          <a:ln/>
+        </p:spPr>
+        <p:txBody>
+          <a:bodyPr wrap="square" lIns="0" tIns="0" rIns="0" bIns="0" rtlCol="0" anchor="ctr"/>
+          <a:lstStyle/>
+          <a:p>
+            <a:pPr indent="0" marL="0">
+              <a:buNone/>
+            </a:pPr>
+            <a:r>
+              <a:rPr lang="en-US" sz="1000" i="1" dirty="0">
+                <a:solidFill>
+                  <a:srgbClr val="8A7A6D"/>
+                </a:solidFill>
+                <a:latin typeface="Calibri" pitchFamily="34" charset="0"/>
+                <a:ea typeface="Calibri" pitchFamily="34" charset="-122"/>
+                <a:cs typeface="Calibri" pitchFamily="34" charset="-120"/>
+              </a:rPr>
+              <a:t>Pregunta 9 (abierta): "¿Qué es lo que más te frustra de gestionar la compra o la nevera?" — nadie vio el prototipo antes de responder.</a:t>
+            </a:r>
+            <a:endParaRPr lang="en-US" sz="1000" dirty="0"/>
+          </a:p>
+        </p:txBody>
+      </p:sp>
+      <p:sp>
+        <p:nvSpPr>
+          <p:cNvPr id="7" name="Shape 4"/>
           <p:cNvSpPr/>
           <p:nvPr/>
         </p:nvSpPr>
         <p:spPr>
           <a:xfrm>
-            <a:off x="548640" y="1417320"/>
-            <a:ext cx="3611880" cy="960120"/>
+            <a:off x="548640" y="1508760"/>
+            <a:ext cx="5532120" cy="4160520"/>
           </a:xfrm>
           <a:prstGeom prst="roundRect">
             <a:avLst>
-              <a:gd name="adj" fmla="val 11429"/>
+              <a:gd name="adj" fmla="val 2637"/>
             </a:avLst>
           </a:prstGeom>
           <a:solidFill>
@@ -5278,14 +7285,14 @@
       </p:sp>
       <p:sp>
         <p:nvSpPr>
-          <p:cNvPr id="7" name="Text 4"/>
-          <p:cNvSpPr txBox="1"/>
-          <p:nvPr/>
-        </p:nvSpPr>
-        <p:spPr>
-          <a:xfrm>
-            <a:off x="731520" y="1508760"/>
-            <a:ext cx="3246120" cy="256032"/>
+          <p:cNvPr id="8" name="Text 5"/>
+          <p:cNvSpPr txBox="1"/>
+          <p:nvPr/>
+        </p:nvSpPr>
+        <p:spPr>
+          <a:xfrm>
+            <a:off x="777240" y="1645920"/>
+            <a:ext cx="5074920" cy="274320"/>
           </a:xfrm>
           <a:prstGeom prst="rect">
             <a:avLst/>
@@ -5301,7 +7308,7 @@
               <a:buNone/>
             </a:pPr>
             <a:r>
-              <a:rPr lang="en-US" sz="1000" b="1" spc="100" kern="0" dirty="0">
+              <a:rPr lang="en-US" sz="1200" b="1" spc="150" kern="0" dirty="0">
                 <a:solidFill>
                   <a:srgbClr val="C9682B"/>
                 </a:solidFill>
@@ -5309,22 +7316,61 @@
                 <a:ea typeface="Calibri" pitchFamily="34" charset="-122"/>
                 <a:cs typeface="Calibri" pitchFamily="34" charset="-120"/>
               </a:rPr>
-              <a:t>QUÉ VENDEMOS</a:t>
-            </a:r>
-            <a:endParaRPr lang="en-US" sz="1000" dirty="0"/>
-          </a:p>
-        </p:txBody>
-      </p:sp>
-      <p:sp>
-        <p:nvSpPr>
-          <p:cNvPr id="8" name="Text 5"/>
-          <p:cNvSpPr txBox="1"/>
-          <p:nvPr/>
-        </p:nvSpPr>
-        <p:spPr>
-          <a:xfrm>
-            <a:off x="731520" y="1764792"/>
-            <a:ext cx="3246120" cy="566928"/>
+              <a:t>FALTA DE COOPERACIÓN</a:t>
+            </a:r>
+            <a:endParaRPr lang="en-US" sz="1200" dirty="0"/>
+          </a:p>
+        </p:txBody>
+      </p:sp>
+      <p:sp>
+        <p:nvSpPr>
+          <p:cNvPr id="9" name="Text 6"/>
+          <p:cNvSpPr txBox="1"/>
+          <p:nvPr/>
+        </p:nvSpPr>
+        <p:spPr>
+          <a:xfrm>
+            <a:off x="777240" y="1901952"/>
+            <a:ext cx="5074920" cy="274320"/>
+          </a:xfrm>
+          <a:prstGeom prst="rect">
+            <a:avLst/>
+          </a:prstGeom>
+          <a:noFill/>
+          <a:ln/>
+        </p:spPr>
+        <p:txBody>
+          <a:bodyPr wrap="square" lIns="0" tIns="0" rIns="0" bIns="0" rtlCol="0" anchor="ctr"/>
+          <a:lstStyle/>
+          <a:p>
+            <a:pPr indent="0" marL="0">
+              <a:buNone/>
+            </a:pPr>
+            <a:r>
+              <a:rPr lang="en-US" sz="1050" i="1" dirty="0">
+                <a:solidFill>
+                  <a:srgbClr val="8A7A6D"/>
+                </a:solidFill>
+                <a:latin typeface="Calibri" pitchFamily="34" charset="0"/>
+                <a:ea typeface="Calibri" pitchFamily="34" charset="-122"/>
+                <a:cs typeface="Calibri" pitchFamily="34" charset="-120"/>
+              </a:rPr>
+              <a:t>4 de 12 personas (33%) — sin que se les preguntara</a:t>
+            </a:r>
+            <a:endParaRPr lang="en-US" sz="1050" dirty="0"/>
+          </a:p>
+        </p:txBody>
+      </p:sp>
+      <p:sp>
+        <p:nvSpPr>
+          <p:cNvPr id="10" name="Text 7"/>
+          <p:cNvSpPr txBox="1"/>
+          <p:nvPr/>
+        </p:nvSpPr>
+        <p:spPr>
+          <a:xfrm>
+            <a:off x="822960" y="2286000"/>
+            <a:ext cx="5029200" cy="3200400"/>
           </a:xfrm>
           <a:prstGeom prst="rect">
             <a:avLst/>
@@ -5336,11 +7382,15 @@
           <a:bodyPr wrap="square" lIns="0" tIns="0" rIns="0" bIns="0" rtlCol="0" anchor="t"/>
           <a:lstStyle/>
           <a:p>
-            <a:pPr indent="0" marL="0">
-              <a:buNone/>
-            </a:pPr>
-            <a:r>
-              <a:rPr lang="en-US" sz="1150" dirty="0">
+            <a:pPr marL="342900" indent="-342900">
+              <a:spcAft>
+                <a:spcPts val="1000"/>
+              </a:spcAft>
+              <a:buSzPct val="100000"/>
+              <a:buChar char="•"/>
+            </a:pPr>
+            <a:r>
+              <a:rPr lang="en-US" sz="1200" i="1" dirty="0">
                 <a:solidFill>
                   <a:srgbClr val="2E2119"/>
                 </a:solidFill>
@@ -5348,30 +7398,93 @@
                 <a:ea typeface="Calibri" pitchFamily="34" charset="-122"/>
                 <a:cs typeface="Calibri" pitchFamily="34" charset="-120"/>
               </a:rPr>
-              <a:t>Suscripción mensual por hogar</a:t>
-            </a:r>
-            <a:endParaRPr lang="en-US" sz="1150" dirty="0"/>
-          </a:p>
-        </p:txBody>
-      </p:sp>
-      <p:sp>
-        <p:nvSpPr>
-          <p:cNvPr id="9" name="Shape 6"/>
+              <a:t>"I don’t know who bought what"</a:t>
+            </a:r>
+            <a:endParaRPr lang="en-US" sz="1200" dirty="0"/>
+          </a:p>
+          <a:p>
+            <a:pPr marL="342900" indent="-342900">
+              <a:spcAft>
+                <a:spcPts val="1000"/>
+              </a:spcAft>
+              <a:buSzPct val="100000"/>
+              <a:buChar char="•"/>
+            </a:pPr>
+            <a:r>
+              <a:rPr lang="en-US" sz="1200" i="1" dirty="0">
+                <a:solidFill>
+                  <a:srgbClr val="2E2119"/>
+                </a:solidFill>
+                <a:latin typeface="Calibri" pitchFamily="34" charset="0"/>
+                <a:ea typeface="Calibri" pitchFamily="34" charset="-122"/>
+                <a:cs typeface="Calibri" pitchFamily="34" charset="-120"/>
+              </a:rPr>
+              <a:t>"Not knowing what the others want, the others eating my stuff"</a:t>
+            </a:r>
+            <a:endParaRPr lang="en-US" sz="1200" dirty="0"/>
+          </a:p>
+          <a:p>
+            <a:pPr marL="342900" indent="-342900">
+              <a:spcAft>
+                <a:spcPts val="1000"/>
+              </a:spcAft>
+              <a:buSzPct val="100000"/>
+              <a:buChar char="•"/>
+            </a:pPr>
+            <a:r>
+              <a:rPr lang="en-US" sz="1200" i="1" dirty="0">
+                <a:solidFill>
+                  <a:srgbClr val="2E2119"/>
+                </a:solidFill>
+                <a:latin typeface="Calibri" pitchFamily="34" charset="0"/>
+                <a:ea typeface="Calibri" pitchFamily="34" charset="-122"/>
+                <a:cs typeface="Calibri" pitchFamily="34" charset="-120"/>
+              </a:rPr>
+              <a:t>"When people use the food I planned to use in a meal for myself... so I have to use something else"</a:t>
+            </a:r>
+            <a:endParaRPr lang="en-US" sz="1200" dirty="0"/>
+          </a:p>
+          <a:p>
+            <a:pPr marL="342900" indent="-342900">
+              <a:spcAft>
+                <a:spcPts val="1000"/>
+              </a:spcAft>
+              <a:buSzPct val="100000"/>
+              <a:buChar char="•"/>
+            </a:pPr>
+            <a:r>
+              <a:rPr lang="en-US" sz="1200" i="1" dirty="0">
+                <a:solidFill>
+                  <a:srgbClr val="2E2119"/>
+                </a:solidFill>
+                <a:latin typeface="Calibri" pitchFamily="34" charset="0"/>
+                <a:ea typeface="Calibri" pitchFamily="34" charset="-122"/>
+                <a:cs typeface="Calibri" pitchFamily="34" charset="-120"/>
+              </a:rPr>
+              <a:t>"Not knowing if someone bought something just for themself"</a:t>
+            </a:r>
+            <a:endParaRPr lang="en-US" sz="1200" dirty="0"/>
+          </a:p>
+        </p:txBody>
+      </p:sp>
+      <p:sp>
+        <p:nvSpPr>
+          <p:cNvPr id="11" name="Shape 8"/>
           <p:cNvSpPr/>
           <p:nvPr/>
         </p:nvSpPr>
         <p:spPr>
           <a:xfrm>
-            <a:off x="4297680" y="1417320"/>
-            <a:ext cx="3611880" cy="960120"/>
+            <a:off x="6263640" y="1508760"/>
+            <a:ext cx="5349240" cy="4160520"/>
           </a:xfrm>
           <a:prstGeom prst="roundRect">
             <a:avLst>
-              <a:gd name="adj" fmla="val 11429"/>
+              <a:gd name="adj" fmla="val 2637"/>
             </a:avLst>
           </a:prstGeom>
           <a:solidFill>
-            <a:srgbClr val="F4E9DA"/>
+            <a:srgbClr val="EDE6DC"/>
           </a:solidFill>
           <a:ln/>
           <a:effectLst>
@@ -5385,14 +7498,14 @@
       </p:sp>
       <p:sp>
         <p:nvSpPr>
-          <p:cNvPr id="10" name="Text 7"/>
-          <p:cNvSpPr txBox="1"/>
-          <p:nvPr/>
-        </p:nvSpPr>
-        <p:spPr>
-          <a:xfrm>
-            <a:off x="4480560" y="1508760"/>
-            <a:ext cx="3246120" cy="256032"/>
+          <p:cNvPr id="12" name="Text 9"/>
+          <p:cNvSpPr txBox="1"/>
+          <p:nvPr/>
+        </p:nvSpPr>
+        <p:spPr>
+          <a:xfrm>
+            <a:off x="6492240" y="1645920"/>
+            <a:ext cx="4892040" cy="274320"/>
           </a:xfrm>
           <a:prstGeom prst="rect">
             <a:avLst/>
@@ -5408,7 +7521,7 @@
               <a:buNone/>
             </a:pPr>
             <a:r>
-              <a:rPr lang="en-US" sz="1000" b="1" spc="100" kern="0" dirty="0">
+              <a:rPr lang="en-US" sz="1200" b="1" spc="150" kern="0" dirty="0">
                 <a:solidFill>
                   <a:srgbClr val="C9682B"/>
                 </a:solidFill>
@@ -5416,22 +7529,61 @@
                 <a:ea typeface="Calibri" pitchFamily="34" charset="-122"/>
                 <a:cs typeface="Calibri" pitchFamily="34" charset="-120"/>
               </a:rPr>
-              <a:t>A QUIÉN</a:t>
-            </a:r>
-            <a:endParaRPr lang="en-US" sz="1000" dirty="0"/>
-          </a:p>
-        </p:txBody>
-      </p:sp>
-      <p:sp>
-        <p:nvSpPr>
-          <p:cNvPr id="11" name="Text 8"/>
-          <p:cNvSpPr txBox="1"/>
-          <p:nvPr/>
-        </p:nvSpPr>
-        <p:spPr>
-          <a:xfrm>
-            <a:off x="4480560" y="1764792"/>
-            <a:ext cx="3246120" cy="566928"/>
+              <a:t>FALTA DE TRACKER DE GASTOS</a:t>
+            </a:r>
+            <a:endParaRPr lang="en-US" sz="1200" dirty="0"/>
+          </a:p>
+        </p:txBody>
+      </p:sp>
+      <p:sp>
+        <p:nvSpPr>
+          <p:cNvPr id="13" name="Text 10"/>
+          <p:cNvSpPr txBox="1"/>
+          <p:nvPr/>
+        </p:nvSpPr>
+        <p:spPr>
+          <a:xfrm>
+            <a:off x="6492240" y="1901952"/>
+            <a:ext cx="4892040" cy="384048"/>
+          </a:xfrm>
+          <a:prstGeom prst="rect">
+            <a:avLst/>
+          </a:prstGeom>
+          <a:noFill/>
+          <a:ln/>
+        </p:spPr>
+        <p:txBody>
+          <a:bodyPr wrap="square" lIns="0" tIns="0" rIns="0" bIns="0" rtlCol="0" anchor="ctr"/>
+          <a:lstStyle/>
+          <a:p>
+            <a:pPr indent="0" marL="0">
+              <a:buNone/>
+            </a:pPr>
+            <a:r>
+              <a:rPr lang="en-US" sz="1050" i="1" dirty="0">
+                <a:solidFill>
+                  <a:srgbClr val="8A7A6D"/>
+                </a:solidFill>
+                <a:latin typeface="Calibri" pitchFamily="34" charset="0"/>
+                <a:ea typeface="Calibri" pitchFamily="34" charset="-122"/>
+                <a:cs typeface="Calibri" pitchFamily="34" charset="-120"/>
+              </a:rPr>
+              <a:t>2 menciones espontáneas + 4/12 (33%) dice en la Pregunta 8 que no llevan cuenta</a:t>
+            </a:r>
+            <a:endParaRPr lang="en-US" sz="1050" dirty="0"/>
+          </a:p>
+        </p:txBody>
+      </p:sp>
+      <p:sp>
+        <p:nvSpPr>
+          <p:cNvPr id="14" name="Text 11"/>
+          <p:cNvSpPr txBox="1"/>
+          <p:nvPr/>
+        </p:nvSpPr>
+        <p:spPr>
+          <a:xfrm>
+            <a:off x="6537960" y="2331720"/>
+            <a:ext cx="4846320" cy="1554480"/>
           </a:xfrm>
           <a:prstGeom prst="rect">
             <a:avLst/>
@@ -5443,11 +7595,15 @@
           <a:bodyPr wrap="square" lIns="0" tIns="0" rIns="0" bIns="0" rtlCol="0" anchor="t"/>
           <a:lstStyle/>
           <a:p>
-            <a:pPr indent="0" marL="0">
-              <a:buNone/>
-            </a:pPr>
-            <a:r>
-              <a:rPr lang="en-US" sz="1150" dirty="0">
+            <a:pPr marL="342900" indent="-342900">
+              <a:spcAft>
+                <a:spcPts val="1000"/>
+              </a:spcAft>
+              <a:buSzPct val="100000"/>
+              <a:buChar char="•"/>
+            </a:pPr>
+            <a:r>
+              <a:rPr lang="en-US" sz="1200" i="1" dirty="0">
                 <a:solidFill>
                   <a:srgbClr val="2E2119"/>
                 </a:solidFill>
@@ -5455,454 +7611,47 @@
                 <a:ea typeface="Calibri" pitchFamily="34" charset="-122"/>
                 <a:cs typeface="Calibri" pitchFamily="34" charset="-120"/>
               </a:rPr>
-              <a:t>Quien organiza la compra en un hogar compartido de A Coruña</a:t>
-            </a:r>
-            <a:endParaRPr lang="en-US" sz="1150" dirty="0"/>
-          </a:p>
-        </p:txBody>
-      </p:sp>
-      <p:sp>
-        <p:nvSpPr>
-          <p:cNvPr id="12" name="Shape 9"/>
+              <a:t>"I don’t know who bought what" — también aquí: no saber quién pagó qué</a:t>
+            </a:r>
+            <a:endParaRPr lang="en-US" sz="1200" dirty="0"/>
+          </a:p>
+          <a:p>
+            <a:pPr marL="342900" indent="-342900">
+              <a:spcAft>
+                <a:spcPts val="1000"/>
+              </a:spcAft>
+              <a:buSzPct val="100000"/>
+              <a:buChar char="•"/>
+            </a:pPr>
+            <a:r>
+              <a:rPr lang="en-US" sz="1200" i="1" dirty="0">
+                <a:solidFill>
+                  <a:srgbClr val="2E2119"/>
+                </a:solidFill>
+                <a:latin typeface="Calibri" pitchFamily="34" charset="0"/>
+                <a:ea typeface="Calibri" pitchFamily="34" charset="-122"/>
+                <a:cs typeface="Calibri" pitchFamily="34" charset="-120"/>
+              </a:rPr>
+              <a:t>"Que la gente no participe a la hora de hacer la compra o que tarden en pagar cuando dividimos gastos"</a:t>
+            </a:r>
+            <a:endParaRPr lang="en-US" sz="1200" dirty="0"/>
+          </a:p>
+        </p:txBody>
+      </p:sp>
+      <p:sp>
+        <p:nvSpPr>
+          <p:cNvPr id="15" name="Shape 12"/>
           <p:cNvSpPr/>
           <p:nvPr/>
         </p:nvSpPr>
         <p:spPr>
           <a:xfrm>
-            <a:off x="8046720" y="1417320"/>
-            <a:ext cx="3611880" cy="960120"/>
+            <a:off x="6492240" y="3977640"/>
+            <a:ext cx="4892040" cy="1554480"/>
           </a:xfrm>
           <a:prstGeom prst="roundRect">
             <a:avLst>
-              <a:gd name="adj" fmla="val 11429"/>
-            </a:avLst>
-          </a:prstGeom>
-          <a:solidFill>
-            <a:srgbClr val="F4E9DA"/>
-          </a:solidFill>
-          <a:ln/>
-          <a:effectLst>
-            <a:outerShdw sx="100000" sy="100000" kx="0" ky="0" algn="bl" rotWithShape="0" blurRad="76200" dist="25400" dir="5400000">
-              <a:srgbClr val="000000">
-                <a:alpha val="12000"/>
-              </a:srgbClr>
-            </a:outerShdw>
-          </a:effectLst>
-        </p:spPr>
-      </p:sp>
-      <p:sp>
-        <p:nvSpPr>
-          <p:cNvPr id="13" name="Text 10"/>
-          <p:cNvSpPr txBox="1"/>
-          <p:nvPr/>
-        </p:nvSpPr>
-        <p:spPr>
-          <a:xfrm>
-            <a:off x="8229600" y="1508760"/>
-            <a:ext cx="3246120" cy="256032"/>
-          </a:xfrm>
-          <a:prstGeom prst="rect">
-            <a:avLst/>
-          </a:prstGeom>
-          <a:noFill/>
-          <a:ln/>
-        </p:spPr>
-        <p:txBody>
-          <a:bodyPr wrap="square" lIns="0" tIns="0" rIns="0" bIns="0" rtlCol="0" anchor="ctr"/>
-          <a:lstStyle/>
-          <a:p>
-            <a:pPr indent="0" marL="0">
-              <a:buNone/>
-            </a:pPr>
-            <a:r>
-              <a:rPr lang="en-US" sz="1000" b="1" spc="100" kern="0" dirty="0">
-                <a:solidFill>
-                  <a:srgbClr val="C9682B"/>
-                </a:solidFill>
-                <a:latin typeface="Calibri" pitchFamily="34" charset="0"/>
-                <a:ea typeface="Calibri" pitchFamily="34" charset="-122"/>
-                <a:cs typeface="Calibri" pitchFamily="34" charset="-120"/>
-              </a:rPr>
-              <a:t>A CUÁNTO</a:t>
-            </a:r>
-            <a:endParaRPr lang="en-US" sz="1000" dirty="0"/>
-          </a:p>
-        </p:txBody>
-      </p:sp>
-      <p:sp>
-        <p:nvSpPr>
-          <p:cNvPr id="14" name="Text 11"/>
-          <p:cNvSpPr txBox="1"/>
-          <p:nvPr/>
-        </p:nvSpPr>
-        <p:spPr>
-          <a:xfrm>
-            <a:off x="8229600" y="1764792"/>
-            <a:ext cx="3246120" cy="566928"/>
-          </a:xfrm>
-          <a:prstGeom prst="rect">
-            <a:avLst/>
-          </a:prstGeom>
-          <a:noFill/>
-          <a:ln/>
-        </p:spPr>
-        <p:txBody>
-          <a:bodyPr wrap="square" lIns="0" tIns="0" rIns="0" bIns="0" rtlCol="0" anchor="t"/>
-          <a:lstStyle/>
-          <a:p>
-            <a:pPr indent="0" marL="0">
-              <a:buNone/>
-            </a:pPr>
-            <a:r>
-              <a:rPr lang="en-US" sz="1150" dirty="0">
-                <a:solidFill>
-                  <a:srgbClr val="2E2119"/>
-                </a:solidFill>
-                <a:latin typeface="Calibri" pitchFamily="34" charset="0"/>
-                <a:ea typeface="Calibri" pitchFamily="34" charset="-122"/>
-                <a:cs typeface="Calibri" pitchFamily="34" charset="-120"/>
-              </a:rPr>
-              <a:t>0,99 €/mes por hogar</a:t>
-            </a:r>
-            <a:endParaRPr lang="en-US" sz="1150" dirty="0"/>
-          </a:p>
-        </p:txBody>
-      </p:sp>
-      <p:sp>
-        <p:nvSpPr>
-          <p:cNvPr id="15" name="Shape 12"/>
-          <p:cNvSpPr/>
-          <p:nvPr/>
-        </p:nvSpPr>
-        <p:spPr>
-          <a:xfrm>
-            <a:off x="548640" y="2514600"/>
-            <a:ext cx="3611880" cy="960120"/>
-          </a:xfrm>
-          <a:prstGeom prst="roundRect">
-            <a:avLst>
-              <a:gd name="adj" fmla="val 11429"/>
-            </a:avLst>
-          </a:prstGeom>
-          <a:solidFill>
-            <a:srgbClr val="F4E9DA"/>
-          </a:solidFill>
-          <a:ln/>
-          <a:effectLst>
-            <a:outerShdw sx="100000" sy="100000" kx="0" ky="0" algn="bl" rotWithShape="0" blurRad="76200" dist="25400" dir="5400000">
-              <a:srgbClr val="000000">
-                <a:alpha val="12000"/>
-              </a:srgbClr>
-            </a:outerShdw>
-          </a:effectLst>
-        </p:spPr>
-      </p:sp>
-      <p:sp>
-        <p:nvSpPr>
-          <p:cNvPr id="16" name="Text 13"/>
-          <p:cNvSpPr txBox="1"/>
-          <p:nvPr/>
-        </p:nvSpPr>
-        <p:spPr>
-          <a:xfrm>
-            <a:off x="731520" y="2606040"/>
-            <a:ext cx="3246120" cy="256032"/>
-          </a:xfrm>
-          <a:prstGeom prst="rect">
-            <a:avLst/>
-          </a:prstGeom>
-          <a:noFill/>
-          <a:ln/>
-        </p:spPr>
-        <p:txBody>
-          <a:bodyPr wrap="square" lIns="0" tIns="0" rIns="0" bIns="0" rtlCol="0" anchor="ctr"/>
-          <a:lstStyle/>
-          <a:p>
-            <a:pPr indent="0" marL="0">
-              <a:buNone/>
-            </a:pPr>
-            <a:r>
-              <a:rPr lang="en-US" sz="1000" b="1" spc="100" kern="0" dirty="0">
-                <a:solidFill>
-                  <a:srgbClr val="C9682B"/>
-                </a:solidFill>
-                <a:latin typeface="Calibri" pitchFamily="34" charset="0"/>
-                <a:ea typeface="Calibri" pitchFamily="34" charset="-122"/>
-                <a:cs typeface="Calibri" pitchFamily="34" charset="-120"/>
-              </a:rPr>
-              <a:t>QUÉ NOS CUESTA</a:t>
-            </a:r>
-            <a:endParaRPr lang="en-US" sz="1000" dirty="0"/>
-          </a:p>
-        </p:txBody>
-      </p:sp>
-      <p:sp>
-        <p:nvSpPr>
-          <p:cNvPr id="17" name="Text 14"/>
-          <p:cNvSpPr txBox="1"/>
-          <p:nvPr/>
-        </p:nvSpPr>
-        <p:spPr>
-          <a:xfrm>
-            <a:off x="731520" y="2862072"/>
-            <a:ext cx="3246120" cy="566928"/>
-          </a:xfrm>
-          <a:prstGeom prst="rect">
-            <a:avLst/>
-          </a:prstGeom>
-          <a:noFill/>
-          <a:ln/>
-        </p:spPr>
-        <p:txBody>
-          <a:bodyPr wrap="square" lIns="0" tIns="0" rIns="0" bIns="0" rtlCol="0" anchor="t"/>
-          <a:lstStyle/>
-          <a:p>
-            <a:pPr indent="0" marL="0">
-              <a:buNone/>
-            </a:pPr>
-            <a:r>
-              <a:rPr lang="en-US" sz="1150" dirty="0">
-                <a:solidFill>
-                  <a:srgbClr val="2E2119"/>
-                </a:solidFill>
-                <a:latin typeface="Calibri" pitchFamily="34" charset="0"/>
-                <a:ea typeface="Calibri" pitchFamily="34" charset="-122"/>
-                <a:cs typeface="Calibri" pitchFamily="34" charset="-120"/>
-              </a:rPr>
-              <a:t>Coste fijo: 0 € (hosting gratuito). Variable: 0 €</a:t>
-            </a:r>
-            <a:endParaRPr lang="en-US" sz="1150" dirty="0"/>
-          </a:p>
-        </p:txBody>
-      </p:sp>
-      <p:sp>
-        <p:nvSpPr>
-          <p:cNvPr id="18" name="Shape 15"/>
-          <p:cNvSpPr/>
-          <p:nvPr/>
-        </p:nvSpPr>
-        <p:spPr>
-          <a:xfrm>
-            <a:off x="4297680" y="2514600"/>
-            <a:ext cx="3611880" cy="960120"/>
-          </a:xfrm>
-          <a:prstGeom prst="roundRect">
-            <a:avLst>
-              <a:gd name="adj" fmla="val 11429"/>
-            </a:avLst>
-          </a:prstGeom>
-          <a:solidFill>
-            <a:srgbClr val="F4E9DA"/>
-          </a:solidFill>
-          <a:ln/>
-          <a:effectLst>
-            <a:outerShdw sx="100000" sy="100000" kx="0" ky="0" algn="bl" rotWithShape="0" blurRad="76200" dist="25400" dir="5400000">
-              <a:srgbClr val="000000">
-                <a:alpha val="12000"/>
-              </a:srgbClr>
-            </a:outerShdw>
-          </a:effectLst>
-        </p:spPr>
-      </p:sp>
-      <p:sp>
-        <p:nvSpPr>
-          <p:cNvPr id="19" name="Text 16"/>
-          <p:cNvSpPr txBox="1"/>
-          <p:nvPr/>
-        </p:nvSpPr>
-        <p:spPr>
-          <a:xfrm>
-            <a:off x="4480560" y="2606040"/>
-            <a:ext cx="3246120" cy="256032"/>
-          </a:xfrm>
-          <a:prstGeom prst="rect">
-            <a:avLst/>
-          </a:prstGeom>
-          <a:noFill/>
-          <a:ln/>
-        </p:spPr>
-        <p:txBody>
-          <a:bodyPr wrap="square" lIns="0" tIns="0" rIns="0" bIns="0" rtlCol="0" anchor="ctr"/>
-          <a:lstStyle/>
-          <a:p>
-            <a:pPr indent="0" marL="0">
-              <a:buNone/>
-            </a:pPr>
-            <a:r>
-              <a:rPr lang="en-US" sz="1000" b="1" spc="100" kern="0" dirty="0">
-                <a:solidFill>
-                  <a:srgbClr val="C9682B"/>
-                </a:solidFill>
-                <a:latin typeface="Calibri" pitchFamily="34" charset="0"/>
-                <a:ea typeface="Calibri" pitchFamily="34" charset="-122"/>
-                <a:cs typeface="Calibri" pitchFamily="34" charset="-120"/>
-              </a:rPr>
-              <a:t>CUÁNTOS HACEN FALTA</a:t>
-            </a:r>
-            <a:endParaRPr lang="en-US" sz="1000" dirty="0"/>
-          </a:p>
-        </p:txBody>
-      </p:sp>
-      <p:sp>
-        <p:nvSpPr>
-          <p:cNvPr id="20" name="Text 17"/>
-          <p:cNvSpPr txBox="1"/>
-          <p:nvPr/>
-        </p:nvSpPr>
-        <p:spPr>
-          <a:xfrm>
-            <a:off x="4480560" y="2862072"/>
-            <a:ext cx="3246120" cy="566928"/>
-          </a:xfrm>
-          <a:prstGeom prst="rect">
-            <a:avLst/>
-          </a:prstGeom>
-          <a:noFill/>
-          <a:ln/>
-        </p:spPr>
-        <p:txBody>
-          <a:bodyPr wrap="square" lIns="0" tIns="0" rIns="0" bIns="0" rtlCol="0" anchor="t"/>
-          <a:lstStyle/>
-          <a:p>
-            <a:pPr indent="0" marL="0">
-              <a:buNone/>
-            </a:pPr>
-            <a:r>
-              <a:rPr lang="en-US" sz="1150" dirty="0">
-                <a:solidFill>
-                  <a:srgbClr val="2E2119"/>
-                </a:solidFill>
-                <a:latin typeface="Calibri" pitchFamily="34" charset="0"/>
-                <a:ea typeface="Calibri" pitchFamily="34" charset="-122"/>
-                <a:cs typeface="Calibri" pitchFamily="34" charset="-120"/>
-              </a:rPr>
-              <a:t>Punto de equilibrio: 1 hogar</a:t>
-            </a:r>
-            <a:endParaRPr lang="en-US" sz="1150" dirty="0"/>
-          </a:p>
-        </p:txBody>
-      </p:sp>
-      <p:sp>
-        <p:nvSpPr>
-          <p:cNvPr id="21" name="Shape 18"/>
-          <p:cNvSpPr/>
-          <p:nvPr/>
-        </p:nvSpPr>
-        <p:spPr>
-          <a:xfrm>
-            <a:off x="8046720" y="2514600"/>
-            <a:ext cx="3611880" cy="960120"/>
-          </a:xfrm>
-          <a:prstGeom prst="roundRect">
-            <a:avLst>
-              <a:gd name="adj" fmla="val 11429"/>
-            </a:avLst>
-          </a:prstGeom>
-          <a:solidFill>
-            <a:srgbClr val="F4E9DA"/>
-          </a:solidFill>
-          <a:ln/>
-          <a:effectLst>
-            <a:outerShdw sx="100000" sy="100000" kx="0" ky="0" algn="bl" rotWithShape="0" blurRad="76200" dist="25400" dir="5400000">
-              <a:srgbClr val="000000">
-                <a:alpha val="12000"/>
-              </a:srgbClr>
-            </a:outerShdw>
-          </a:effectLst>
-        </p:spPr>
-      </p:sp>
-      <p:sp>
-        <p:nvSpPr>
-          <p:cNvPr id="22" name="Text 19"/>
-          <p:cNvSpPr txBox="1"/>
-          <p:nvPr/>
-        </p:nvSpPr>
-        <p:spPr>
-          <a:xfrm>
-            <a:off x="8229600" y="2606040"/>
-            <a:ext cx="3246120" cy="256032"/>
-          </a:xfrm>
-          <a:prstGeom prst="rect">
-            <a:avLst/>
-          </a:prstGeom>
-          <a:noFill/>
-          <a:ln/>
-        </p:spPr>
-        <p:txBody>
-          <a:bodyPr wrap="square" lIns="0" tIns="0" rIns="0" bIns="0" rtlCol="0" anchor="ctr"/>
-          <a:lstStyle/>
-          <a:p>
-            <a:pPr indent="0" marL="0">
-              <a:buNone/>
-            </a:pPr>
-            <a:r>
-              <a:rPr lang="en-US" sz="1000" b="1" spc="100" kern="0" dirty="0">
-                <a:solidFill>
-                  <a:srgbClr val="C9682B"/>
-                </a:solidFill>
-                <a:latin typeface="Calibri" pitchFamily="34" charset="0"/>
-                <a:ea typeface="Calibri" pitchFamily="34" charset="-122"/>
-                <a:cs typeface="Calibri" pitchFamily="34" charset="-120"/>
-              </a:rPr>
-              <a:t>CUÁNTOS HAY</a:t>
-            </a:r>
-            <a:endParaRPr lang="en-US" sz="1000" dirty="0"/>
-          </a:p>
-        </p:txBody>
-      </p:sp>
-      <p:sp>
-        <p:nvSpPr>
-          <p:cNvPr id="23" name="Text 20"/>
-          <p:cNvSpPr txBox="1"/>
-          <p:nvPr/>
-        </p:nvSpPr>
-        <p:spPr>
-          <a:xfrm>
-            <a:off x="8229600" y="2862072"/>
-            <a:ext cx="3246120" cy="566928"/>
-          </a:xfrm>
-          <a:prstGeom prst="rect">
-            <a:avLst/>
-          </a:prstGeom>
-          <a:noFill/>
-          <a:ln/>
-        </p:spPr>
-        <p:txBody>
-          <a:bodyPr wrap="square" lIns="0" tIns="0" rIns="0" bIns="0" rtlCol="0" anchor="t"/>
-          <a:lstStyle/>
-          <a:p>
-            <a:pPr indent="0" marL="0">
-              <a:buNone/>
-            </a:pPr>
-            <a:r>
-              <a:rPr lang="en-US" sz="1150" dirty="0">
-                <a:solidFill>
-                  <a:srgbClr val="2E2119"/>
-                </a:solidFill>
-                <a:latin typeface="Calibri" pitchFamily="34" charset="0"/>
-                <a:ea typeface="Calibri" pitchFamily="34" charset="-122"/>
-                <a:cs typeface="Calibri" pitchFamily="34" charset="-120"/>
-              </a:rPr>
-              <a:t>≈ 99.700 hogares accesibles</a:t>
-            </a:r>
-            <a:endParaRPr lang="en-US" sz="1150" dirty="0"/>
-          </a:p>
-        </p:txBody>
-      </p:sp>
-      <p:sp>
-        <p:nvSpPr>
-          <p:cNvPr id="24" name="Shape 21"/>
-          <p:cNvSpPr/>
-          <p:nvPr/>
-        </p:nvSpPr>
-        <p:spPr>
-          <a:xfrm>
-            <a:off x="548640" y="3657600"/>
-            <a:ext cx="5349240" cy="1417320"/>
-          </a:xfrm>
-          <a:prstGeom prst="roundRect">
-            <a:avLst>
-              <a:gd name="adj" fmla="val 7742"/>
+              <a:gd name="adj" fmla="val 5882"/>
             </a:avLst>
           </a:prstGeom>
           <a:solidFill>
@@ -5913,65 +7662,46 @@
       </p:sp>
       <p:sp>
         <p:nvSpPr>
-          <p:cNvPr id="25" name="Text 22"/>
-          <p:cNvSpPr txBox="1"/>
-          <p:nvPr/>
-        </p:nvSpPr>
-        <p:spPr>
-          <a:xfrm>
-            <a:off x="548640" y="3767328"/>
-            <a:ext cx="5349240" cy="685800"/>
-          </a:xfrm>
-          <a:prstGeom prst="rect">
-            <a:avLst/>
-          </a:prstGeom>
-          <a:noFill/>
-          <a:ln/>
-        </p:spPr>
-        <p:txBody>
-          <a:bodyPr wrap="square" lIns="0" tIns="0" rIns="0" bIns="0" rtlCol="0" anchor="ctr"/>
-          <a:lstStyle/>
-          <a:p>
-            <a:pPr algn="ctr" indent="0" marL="0">
-              <a:buNone/>
-            </a:pPr>
-            <a:r>
-              <a:rPr lang="en-US" sz="3400" b="1" dirty="0">
+          <p:cNvPr id="16" name="Text 13"/>
+          <p:cNvSpPr txBox="1"/>
+          <p:nvPr/>
+        </p:nvSpPr>
+        <p:spPr>
+          <a:xfrm>
+            <a:off x="6720840" y="4096512"/>
+            <a:ext cx="4480560" cy="1325880"/>
+          </a:xfrm>
+          <a:prstGeom prst="rect">
+            <a:avLst/>
+          </a:prstGeom>
+          <a:noFill/>
+          <a:ln/>
+        </p:spPr>
+        <p:txBody>
+          <a:bodyPr wrap="square" lIns="0" tIns="0" rIns="0" bIns="0" rtlCol="0" anchor="t"/>
+          <a:lstStyle/>
+          <a:p>
+            <a:pPr indent="0" marL="0">
+              <a:spcAft>
+                <a:spcPts val="400"/>
+              </a:spcAft>
+              <a:buNone/>
+            </a:pPr>
+            <a:r>
+              <a:rPr lang="en-US" sz="1150" b="1" dirty="0">
                 <a:solidFill>
                   <a:srgbClr val="D9A441"/>
                 </a:solidFill>
-                <a:latin typeface="Cambria" pitchFamily="34" charset="0"/>
-                <a:ea typeface="Cambria" pitchFamily="34" charset="-122"/>
-                <a:cs typeface="Cambria" pitchFamily="34" charset="-120"/>
-              </a:rPr>
-              <a:t>1 hogar</a:t>
-            </a:r>
-            <a:endParaRPr lang="en-US" sz="3400" dirty="0"/>
-          </a:p>
-        </p:txBody>
-      </p:sp>
-      <p:sp>
-        <p:nvSpPr>
-          <p:cNvPr id="26" name="Text 23"/>
-          <p:cNvSpPr txBox="1"/>
-          <p:nvPr/>
-        </p:nvSpPr>
-        <p:spPr>
-          <a:xfrm>
-            <a:off x="777240" y="4434840"/>
-            <a:ext cx="4892040" cy="502920"/>
-          </a:xfrm>
-          <a:prstGeom prst="rect">
-            <a:avLst/>
-          </a:prstGeom>
-          <a:noFill/>
-          <a:ln/>
-        </p:spPr>
-        <p:txBody>
-          <a:bodyPr wrap="square" lIns="0" tIns="0" rIns="0" bIns="0" rtlCol="0" anchor="ctr"/>
-          <a:lstStyle/>
-          <a:p>
-            <a:pPr algn="ctr" indent="0" marL="0">
+                <a:latin typeface="Calibri" pitchFamily="34" charset="0"/>
+                <a:ea typeface="Calibri" pitchFamily="34" charset="-122"/>
+                <a:cs typeface="Calibri" pitchFamily="34" charset="-120"/>
+              </a:rPr>
+              <a:t>Esto es exactamente History:  </a:t>
+            </a:r>
+            <a:endParaRPr lang="en-US" sz="1150" dirty="0"/>
+          </a:p>
+          <a:p>
+            <a:pPr indent="0" marL="0">
               <a:buNone/>
             </a:pPr>
             <a:r>
@@ -5983,7 +7713,7 @@
                 <a:ea typeface="Calibri" pitchFamily="34" charset="-122"/>
                 <a:cs typeface="Calibri" pitchFamily="34" charset="-120"/>
               </a:rPr>
-              <a:t>punto de equilibrio — coste fijo 0€ ÷ margen 0,99€</a:t>
+              <a:t>quién compró qué y quién debe a quién, resuelto sin depender de que alguien lo recuerde o lo apunte a mano.</a:t>
             </a:r>
             <a:endParaRPr lang="en-US" sz="1150" dirty="0"/>
           </a:p>
@@ -5991,18 +7721,18 @@
       </p:sp>
       <p:sp>
         <p:nvSpPr>
-          <p:cNvPr id="27" name="Shape 24"/>
+          <p:cNvPr id="17" name="Shape 14"/>
           <p:cNvSpPr/>
           <p:nvPr/>
         </p:nvSpPr>
         <p:spPr>
           <a:xfrm>
-            <a:off x="6035040" y="3657600"/>
-            <a:ext cx="5577840" cy="1417320"/>
+            <a:off x="548640" y="5806440"/>
+            <a:ext cx="11064240" cy="777240"/>
           </a:xfrm>
           <a:prstGeom prst="roundRect">
             <a:avLst>
-              <a:gd name="adj" fmla="val 6452"/>
+              <a:gd name="adj" fmla="val 11765"/>
             </a:avLst>
           </a:prstGeom>
           <a:solidFill>
@@ -6018,14 +7748,14 @@
       </p:sp>
       <p:sp>
         <p:nvSpPr>
-          <p:cNvPr id="28" name="Text 25"/>
-          <p:cNvSpPr txBox="1"/>
-          <p:nvPr/>
-        </p:nvSpPr>
-        <p:spPr>
-          <a:xfrm>
-            <a:off x="6263640" y="3767328"/>
-            <a:ext cx="5120640" cy="1188720"/>
+          <p:cNvPr id="18" name="Text 15"/>
+          <p:cNvSpPr txBox="1"/>
+          <p:nvPr/>
+        </p:nvSpPr>
+        <p:spPr>
+          <a:xfrm>
+            <a:off x="777240" y="5806440"/>
+            <a:ext cx="10607040" cy="777240"/>
           </a:xfrm>
           <a:prstGeom prst="rect">
             <a:avLst/>
@@ -6041,7 +7771,21 @@
               <a:buNone/>
             </a:pPr>
             <a:r>
-              <a:rPr lang="en-US" sz="1150" i="1" dirty="0">
+              <a:rPr lang="en-US" sz="1150" b="1" dirty="0">
+                <a:solidFill>
+                  <a:srgbClr val="C9682B"/>
+                </a:solidFill>
+                <a:latin typeface="Calibri" pitchFamily="34" charset="0"/>
+                <a:ea typeface="Calibri" pitchFamily="34" charset="-122"/>
+                <a:cs typeface="Calibri" pitchFamily="34" charset="-120"/>
+              </a:rPr>
+              <a:t>Señal nueva a vigilar (Fridge):  </a:t>
+            </a:r>
+            <a:pPr indent="0" marL="0">
+              <a:buNone/>
+            </a:pPr>
+            <a:r>
+              <a:rPr lang="en-US" sz="1150" dirty="0">
                 <a:solidFill>
                   <a:srgbClr val="2E2119"/>
                 </a:solidFill>
@@ -6049,48 +7793,9 @@
                 <a:ea typeface="Calibri" pitchFamily="34" charset="-122"/>
                 <a:cs typeface="Calibri" pitchFamily="34" charset="-120"/>
               </a:rPr>
-              <a:t>Lectura honesta: el nivel gratuito "duerme" sin uso y el disco es efímero (riesgo real para SQLite). El reto no son los números — es que alguien pague por algo que la competencia da gratis.</a:t>
+              <a:t>"Tener en cuenta qué productos quedan abiertos, cuáles se pierden antes, etc." — apunta a caducidad y frescura, no solo a stock o reparto de gasto.</a:t>
             </a:r>
             <a:endParaRPr lang="en-US" sz="1150" dirty="0"/>
-          </a:p>
-        </p:txBody>
-      </p:sp>
-      <p:sp>
-        <p:nvSpPr>
-          <p:cNvPr id="29" name="Text 26"/>
-          <p:cNvSpPr txBox="1"/>
-          <p:nvPr/>
-        </p:nvSpPr>
-        <p:spPr>
-          <a:xfrm>
-            <a:off x="548640" y="5349240"/>
-            <a:ext cx="11094415" cy="274320"/>
-          </a:xfrm>
-          <a:prstGeom prst="rect">
-            <a:avLst/>
-          </a:prstGeom>
-          <a:noFill/>
-          <a:ln/>
-        </p:spPr>
-        <p:txBody>
-          <a:bodyPr wrap="square" lIns="0" tIns="0" rIns="0" bIns="0" rtlCol="0" anchor="ctr"/>
-          <a:lstStyle/>
-          <a:p>
-            <a:pPr indent="0" marL="0">
-              <a:buNone/>
-            </a:pPr>
-            <a:r>
-              <a:rPr lang="en-US" sz="1000" i="1" dirty="0">
-                <a:solidFill>
-                  <a:srgbClr val="8A7A6D"/>
-                </a:solidFill>
-                <a:latin typeface="Calibri" pitchFamily="34" charset="0"/>
-                <a:ea typeface="Calibri" pitchFamily="34" charset="-122"/>
-                <a:cs typeface="Calibri" pitchFamily="34" charset="-120"/>
-              </a:rPr>
-              <a:t>Decisión explícita: no se adelanta dinero propio en hosting mientras el proyecto no genere ingresos.</a:t>
-            </a:r>
-            <a:endParaRPr lang="en-US" sz="1000" dirty="0"/>
           </a:p>
         </p:txBody>
       </p:sp>
@@ -6203,7 +7908,7 @@
                 <a:ea typeface="Calibri" pitchFamily="34" charset="-122"/>
                 <a:cs typeface="Calibri" pitchFamily="34" charset="-120"/>
               </a:rPr>
-              <a:t>PASO 5</a:t>
+              <a:t>PASO 3</a:t>
             </a:r>
             <a:endParaRPr lang="en-US" sz="1200" dirty="0"/>
           </a:p>
@@ -6242,7 +7947,7 @@
                 <a:ea typeface="Cambria" pitchFamily="34" charset="-122"/>
                 <a:cs typeface="Cambria" pitchFamily="34" charset="-120"/>
               </a:rPr>
-              <a:t>Las 3 columnas del alcance</a:t>
+              <a:t>Estudio de mercado — A Coruña</a:t>
             </a:r>
             <a:endParaRPr lang="en-US" sz="2800" dirty="0"/>
           </a:p>
@@ -6256,16 +7961,16 @@
         </p:nvSpPr>
         <p:spPr>
           <a:xfrm>
-            <a:off x="548640" y="1417320"/>
-            <a:ext cx="3611880" cy="3246120"/>
+            <a:off x="548640" y="1463040"/>
+            <a:ext cx="3566160" cy="2468880"/>
           </a:xfrm>
           <a:prstGeom prst="roundRect">
             <a:avLst>
-              <a:gd name="adj" fmla="val 3380"/>
+              <a:gd name="adj" fmla="val 4444"/>
             </a:avLst>
           </a:prstGeom>
           <a:solidFill>
-            <a:srgbClr val="F6E4D3"/>
+            <a:srgbClr val="F4E9DA"/>
           </a:solidFill>
           <a:ln/>
           <a:effectLst>
@@ -6279,25 +7984,42 @@
       </p:sp>
       <p:sp>
         <p:nvSpPr>
-          <p:cNvPr id="7" name="Shape 4"/>
-          <p:cNvSpPr/>
-          <p:nvPr/>
-        </p:nvSpPr>
-        <p:spPr>
-          <a:xfrm>
-            <a:off x="731520" y="1600200"/>
-            <a:ext cx="3246120" cy="411480"/>
-          </a:xfrm>
-          <a:prstGeom prst="roundRect">
-            <a:avLst>
-              <a:gd name="adj" fmla="val 17778"/>
-            </a:avLst>
-          </a:prstGeom>
-          <a:solidFill>
-            <a:srgbClr val="C9682B"/>
-          </a:solidFill>
-          <a:ln/>
-        </p:spPr>
+          <p:cNvPr id="7" name="Text 4"/>
+          <p:cNvSpPr txBox="1"/>
+          <p:nvPr/>
+        </p:nvSpPr>
+        <p:spPr>
+          <a:xfrm>
+            <a:off x="777240" y="1645920"/>
+            <a:ext cx="3108960" cy="320040"/>
+          </a:xfrm>
+          <a:prstGeom prst="rect">
+            <a:avLst/>
+          </a:prstGeom>
+          <a:noFill/>
+          <a:ln/>
+        </p:spPr>
+        <p:txBody>
+          <a:bodyPr wrap="square" lIns="0" tIns="0" rIns="0" bIns="0" rtlCol="0" anchor="ctr"/>
+          <a:lstStyle/>
+          <a:p>
+            <a:pPr indent="0" marL="0">
+              <a:buNone/>
+            </a:pPr>
+            <a:r>
+              <a:rPr lang="en-US" sz="1100" b="1" spc="100" kern="0" dirty="0">
+                <a:solidFill>
+                  <a:srgbClr val="C9682B"/>
+                </a:solidFill>
+                <a:latin typeface="Calibri" pitchFamily="34" charset="0"/>
+                <a:ea typeface="Calibri" pitchFamily="34" charset="-122"/>
+                <a:cs typeface="Calibri" pitchFamily="34" charset="-120"/>
+              </a:rPr>
+              <a:t>MERCADO TOTAL</a:t>
+            </a:r>
+            <a:endParaRPr lang="en-US" sz="1100" dirty="0"/>
+          </a:p>
+        </p:txBody>
       </p:sp>
       <p:sp>
         <p:nvSpPr>
@@ -6307,8 +8029,8 @@
         </p:nvSpPr>
         <p:spPr>
           <a:xfrm>
-            <a:off x="731520" y="1600200"/>
-            <a:ext cx="3246120" cy="411480"/>
+            <a:off x="777240" y="2011680"/>
+            <a:ext cx="3108960" cy="1005840"/>
           </a:xfrm>
           <a:prstGeom prst="rect">
             <a:avLst/>
@@ -6320,21 +8042,38 @@
           <a:bodyPr wrap="square" lIns="0" tIns="0" rIns="0" bIns="0" rtlCol="0" anchor="ctr"/>
           <a:lstStyle/>
           <a:p>
-            <a:pPr algn="ctr" indent="0" marL="0">
-              <a:buNone/>
-            </a:pPr>
-            <a:r>
-              <a:rPr lang="en-US" sz="1400" b="1" dirty="0">
-                <a:solidFill>
-                  <a:srgbClr val="FFFFFF"/>
+            <a:pPr indent="0" marL="0">
+              <a:buNone/>
+            </a:pPr>
+            <a:r>
+              <a:rPr lang="en-US" sz="2000" b="1" dirty="0">
+                <a:solidFill>
+                  <a:srgbClr val="2E2119"/>
                 </a:solidFill>
                 <a:latin typeface="Cambria" pitchFamily="34" charset="0"/>
                 <a:ea typeface="Cambria" pitchFamily="34" charset="-122"/>
                 <a:cs typeface="Cambria" pitchFamily="34" charset="-120"/>
               </a:rPr>
-              <a:t>Lo construimos</a:t>
-            </a:r>
-            <a:endParaRPr lang="en-US" sz="1400" dirty="0"/>
+              <a:t>Hogares de</a:t>
+            </a:r>
+            <a:endParaRPr lang="en-US" sz="2000" dirty="0"/>
+          </a:p>
+          <a:p>
+            <a:pPr indent="0" marL="0">
+              <a:buNone/>
+            </a:pPr>
+            <a:r>
+              <a:rPr lang="en-US" sz="2000" b="1" dirty="0">
+                <a:solidFill>
+                  <a:srgbClr val="2E2119"/>
+                </a:solidFill>
+                <a:latin typeface="Cambria" pitchFamily="34" charset="0"/>
+                <a:ea typeface="Cambria" pitchFamily="34" charset="-122"/>
+                <a:cs typeface="Cambria" pitchFamily="34" charset="-120"/>
+              </a:rPr>
+              <a:t>España 2+ pers.</a:t>
+            </a:r>
+            <a:endParaRPr lang="en-US" sz="2000" dirty="0"/>
           </a:p>
         </p:txBody>
       </p:sp>
@@ -6346,8 +8085,8 @@
         </p:nvSpPr>
         <p:spPr>
           <a:xfrm>
-            <a:off x="777240" y="2194560"/>
-            <a:ext cx="3154680" cy="2286000"/>
+            <a:off x="777240" y="3063240"/>
+            <a:ext cx="3108960" cy="777240"/>
           </a:xfrm>
           <a:prstGeom prst="rect">
             <a:avLst/>
@@ -6359,88 +8098,21 @@
           <a:bodyPr wrap="square" lIns="0" tIns="0" rIns="0" bIns="0" rtlCol="0" anchor="t"/>
           <a:lstStyle/>
           <a:p>
-            <a:pPr marL="342900" indent="-342900">
-              <a:spcAft>
-                <a:spcPts val="1000"/>
-              </a:spcAft>
-              <a:buSzPct val="100000"/>
-              <a:buChar char="•"/>
-            </a:pPr>
-            <a:r>
-              <a:rPr lang="en-US" sz="1150" dirty="0">
-                <a:solidFill>
-                  <a:srgbClr val="2E2119"/>
-                </a:solidFill>
-                <a:latin typeface="Calibri" pitchFamily="34" charset="0"/>
-                <a:ea typeface="Calibri" pitchFamily="34" charset="-122"/>
-                <a:cs typeface="Calibri" pitchFamily="34" charset="-120"/>
-              </a:rPr>
-              <a:t>Nevera: inventario + aviso de stock bajo</a:t>
-            </a:r>
-            <a:endParaRPr lang="en-US" sz="1150" dirty="0"/>
-          </a:p>
-          <a:p>
-            <a:pPr marL="342900" indent="-342900">
-              <a:spcAft>
-                <a:spcPts val="1000"/>
-              </a:spcAft>
-              <a:buSzPct val="100000"/>
-              <a:buChar char="•"/>
-            </a:pPr>
-            <a:r>
-              <a:rPr lang="en-US" sz="1150" dirty="0">
-                <a:solidFill>
-                  <a:srgbClr val="2E2119"/>
-                </a:solidFill>
-                <a:latin typeface="Calibri" pitchFamily="34" charset="0"/>
-                <a:ea typeface="Calibri" pitchFamily="34" charset="-122"/>
-                <a:cs typeface="Calibri" pitchFamily="34" charset="-120"/>
-              </a:rPr>
-              <a:t>Lista compartida con control de concurrencia</a:t>
-            </a:r>
-            <a:endParaRPr lang="en-US" sz="1150" dirty="0"/>
-          </a:p>
-          <a:p>
-            <a:pPr marL="342900" indent="-342900">
-              <a:spcAft>
-                <a:spcPts val="1000"/>
-              </a:spcAft>
-              <a:buSzPct val="100000"/>
-              <a:buChar char="•"/>
-            </a:pPr>
-            <a:r>
-              <a:rPr lang="en-US" sz="1150" dirty="0">
-                <a:solidFill>
-                  <a:srgbClr val="2E2119"/>
-                </a:solidFill>
-                <a:latin typeface="Calibri" pitchFamily="34" charset="0"/>
-                <a:ea typeface="Calibri" pitchFamily="34" charset="-122"/>
-                <a:cs typeface="Calibri" pitchFamily="34" charset="-120"/>
-              </a:rPr>
-              <a:t>Historial + cálculo de quién debe a quién</a:t>
-            </a:r>
-            <a:endParaRPr lang="en-US" sz="1150" dirty="0"/>
-          </a:p>
-          <a:p>
-            <a:pPr marL="342900" indent="-342900">
-              <a:spcAft>
-                <a:spcPts val="1000"/>
-              </a:spcAft>
-              <a:buSzPct val="100000"/>
-              <a:buChar char="•"/>
-            </a:pPr>
-            <a:r>
-              <a:rPr lang="en-US" sz="1150" dirty="0">
-                <a:solidFill>
-                  <a:srgbClr val="2E2119"/>
-                </a:solidFill>
-                <a:latin typeface="Calibri" pitchFamily="34" charset="0"/>
-                <a:ea typeface="Calibri" pitchFamily="34" charset="-122"/>
-                <a:cs typeface="Calibri" pitchFamily="34" charset="-120"/>
-              </a:rPr>
-              <a:t>Comparador de precios por tienda</a:t>
-            </a:r>
-            <a:endParaRPr lang="en-US" sz="1150" dirty="0"/>
+            <a:pPr indent="0" marL="0">
+              <a:buNone/>
+            </a:pPr>
+            <a:r>
+              <a:rPr lang="en-US" sz="1050" dirty="0">
+                <a:solidFill>
+                  <a:srgbClr val="8A7A6D"/>
+                </a:solidFill>
+                <a:latin typeface="Calibri" pitchFamily="34" charset="0"/>
+                <a:ea typeface="Calibri" pitchFamily="34" charset="-122"/>
+                <a:cs typeface="Calibri" pitchFamily="34" charset="-120"/>
+              </a:rPr>
+              <a:t>Tamaño medio 2,50 pers./hogar (INE 2023)</a:t>
+            </a:r>
+            <a:endParaRPr lang="en-US" sz="1050" dirty="0"/>
           </a:p>
         </p:txBody>
       </p:sp>
@@ -6452,16 +8124,16 @@
         </p:nvSpPr>
         <p:spPr>
           <a:xfrm>
-            <a:off x="4297680" y="1417320"/>
-            <a:ext cx="3611880" cy="3246120"/>
+            <a:off x="4297680" y="1463040"/>
+            <a:ext cx="3566160" cy="2468880"/>
           </a:xfrm>
           <a:prstGeom prst="roundRect">
             <a:avLst>
-              <a:gd name="adj" fmla="val 3380"/>
+              <a:gd name="adj" fmla="val 4444"/>
             </a:avLst>
           </a:prstGeom>
           <a:solidFill>
-            <a:srgbClr val="F4EFE8"/>
+            <a:srgbClr val="2E2119"/>
           </a:solidFill>
           <a:ln/>
           <a:effectLst>
@@ -6475,25 +8147,42 @@
       </p:sp>
       <p:sp>
         <p:nvSpPr>
-          <p:cNvPr id="11" name="Shape 8"/>
-          <p:cNvSpPr/>
-          <p:nvPr/>
-        </p:nvSpPr>
-        <p:spPr>
-          <a:xfrm>
-            <a:off x="4480560" y="1600200"/>
-            <a:ext cx="3246120" cy="411480"/>
-          </a:xfrm>
-          <a:prstGeom prst="roundRect">
-            <a:avLst>
-              <a:gd name="adj" fmla="val 17778"/>
-            </a:avLst>
-          </a:prstGeom>
-          <a:solidFill>
-            <a:srgbClr val="D9A441"/>
-          </a:solidFill>
-          <a:ln/>
-        </p:spPr>
+          <p:cNvPr id="11" name="Text 8"/>
+          <p:cNvSpPr txBox="1"/>
+          <p:nvPr/>
+        </p:nvSpPr>
+        <p:spPr>
+          <a:xfrm>
+            <a:off x="4526280" y="1645920"/>
+            <a:ext cx="3108960" cy="320040"/>
+          </a:xfrm>
+          <a:prstGeom prst="rect">
+            <a:avLst/>
+          </a:prstGeom>
+          <a:noFill/>
+          <a:ln/>
+        </p:spPr>
+        <p:txBody>
+          <a:bodyPr wrap="square" lIns="0" tIns="0" rIns="0" bIns="0" rtlCol="0" anchor="ctr"/>
+          <a:lstStyle/>
+          <a:p>
+            <a:pPr indent="0" marL="0">
+              <a:buNone/>
+            </a:pPr>
+            <a:r>
+              <a:rPr lang="en-US" sz="1100" b="1" spc="100" kern="0" dirty="0">
+                <a:solidFill>
+                  <a:srgbClr val="D9A441"/>
+                </a:solidFill>
+                <a:latin typeface="Calibri" pitchFamily="34" charset="0"/>
+                <a:ea typeface="Calibri" pitchFamily="34" charset="-122"/>
+                <a:cs typeface="Calibri" pitchFamily="34" charset="-120"/>
+              </a:rPr>
+              <a:t>MERCADO ACCESIBLE</a:t>
+            </a:r>
+            <a:endParaRPr lang="en-US" sz="1100" dirty="0"/>
+          </a:p>
+        </p:txBody>
       </p:sp>
       <p:sp>
         <p:nvSpPr>
@@ -6503,8 +8192,8 @@
         </p:nvSpPr>
         <p:spPr>
           <a:xfrm>
-            <a:off x="4480560" y="1600200"/>
-            <a:ext cx="3246120" cy="411480"/>
+            <a:off x="4526280" y="2011680"/>
+            <a:ext cx="3108960" cy="1005840"/>
           </a:xfrm>
           <a:prstGeom prst="rect">
             <a:avLst/>
@@ -6516,11 +8205,11 @@
           <a:bodyPr wrap="square" lIns="0" tIns="0" rIns="0" bIns="0" rtlCol="0" anchor="ctr"/>
           <a:lstStyle/>
           <a:p>
-            <a:pPr algn="ctr" indent="0" marL="0">
-              <a:buNone/>
-            </a:pPr>
-            <a:r>
-              <a:rPr lang="en-US" sz="1400" b="1" dirty="0">
+            <a:pPr indent="0" marL="0">
+              <a:buNone/>
+            </a:pPr>
+            <a:r>
+              <a:rPr lang="en-US" sz="3400" b="1" dirty="0">
                 <a:solidFill>
                   <a:srgbClr val="FFFFFF"/>
                 </a:solidFill>
@@ -6528,9 +8217,9 @@
                 <a:ea typeface="Cambria" pitchFamily="34" charset="-122"/>
                 <a:cs typeface="Cambria" pitchFamily="34" charset="-120"/>
               </a:rPr>
-              <a:t>Lo hace Odoo (ERP)</a:t>
-            </a:r>
-            <a:endParaRPr lang="en-US" sz="1400" dirty="0"/>
+              <a:t>≈ 99.700</a:t>
+            </a:r>
+            <a:endParaRPr lang="en-US" sz="3400" dirty="0"/>
           </a:p>
         </p:txBody>
       </p:sp>
@@ -6542,8 +8231,8 @@
         </p:nvSpPr>
         <p:spPr>
           <a:xfrm>
-            <a:off x="4526280" y="2194560"/>
-            <a:ext cx="3154680" cy="2286000"/>
+            <a:off x="4526280" y="3063240"/>
+            <a:ext cx="3108960" cy="777240"/>
           </a:xfrm>
           <a:prstGeom prst="rect">
             <a:avLst/>
@@ -6555,46 +8244,21 @@
           <a:bodyPr wrap="square" lIns="0" tIns="0" rIns="0" bIns="0" rtlCol="0" anchor="t"/>
           <a:lstStyle/>
           <a:p>
-            <a:pPr marL="342900" indent="-342900">
-              <a:spcAft>
-                <a:spcPts val="1000"/>
-              </a:spcAft>
-              <a:buSzPct val="100000"/>
-              <a:buChar char="•"/>
-            </a:pPr>
-            <a:r>
-              <a:rPr lang="en-US" sz="1150" dirty="0">
-                <a:solidFill>
-                  <a:srgbClr val="2E2119"/>
-                </a:solidFill>
-                <a:latin typeface="Calibri" pitchFamily="34" charset="0"/>
-                <a:ea typeface="Calibri" pitchFamily="34" charset="-122"/>
-                <a:cs typeface="Calibri" pitchFamily="34" charset="-120"/>
-              </a:rPr>
-              <a:t>Catálogo de productos y precios por tienda (Pricelists)</a:t>
-            </a:r>
-            <a:endParaRPr lang="en-US" sz="1150" dirty="0"/>
-          </a:p>
-          <a:p>
-            <a:pPr marL="342900" indent="-342900">
-              <a:spcAft>
-                <a:spcPts val="1000"/>
-              </a:spcAft>
-              <a:buSzPct val="100000"/>
-              <a:buChar char="•"/>
-            </a:pPr>
-            <a:r>
-              <a:rPr lang="en-US" sz="1150" dirty="0">
-                <a:solidFill>
-                  <a:srgbClr val="2E2119"/>
-                </a:solidFill>
-                <a:latin typeface="Calibri" pitchFamily="34" charset="0"/>
-                <a:ea typeface="Calibri" pitchFamily="34" charset="-122"/>
-                <a:cs typeface="Calibri" pitchFamily="34" charset="-120"/>
-              </a:rPr>
-              <a:t>Facturación real de la suscripción, si se cobrase algún día</a:t>
-            </a:r>
-            <a:endParaRPr lang="en-US" sz="1150" dirty="0"/>
+            <a:pPr indent="0" marL="0">
+              <a:buNone/>
+            </a:pPr>
+            <a:r>
+              <a:rPr lang="en-US" sz="1050" dirty="0">
+                <a:solidFill>
+                  <a:srgbClr val="D8CBBE"/>
+                </a:solidFill>
+                <a:latin typeface="Calibri" pitchFamily="34" charset="0"/>
+                <a:ea typeface="Calibri" pitchFamily="34" charset="-122"/>
+                <a:cs typeface="Calibri" pitchFamily="34" charset="-120"/>
+              </a:rPr>
+              <a:t>249.261 hab. ÷ 2,50 pers./hogar (INE/IGE 2024)</a:t>
+            </a:r>
+            <a:endParaRPr lang="en-US" sz="1050" dirty="0"/>
           </a:p>
         </p:txBody>
       </p:sp>
@@ -6606,16 +8270,16 @@
         </p:nvSpPr>
         <p:spPr>
           <a:xfrm>
-            <a:off x="8046720" y="1417320"/>
-            <a:ext cx="3611880" cy="3246120"/>
+            <a:off x="8046720" y="1463040"/>
+            <a:ext cx="3566160" cy="2468880"/>
           </a:xfrm>
           <a:prstGeom prst="roundRect">
             <a:avLst>
-              <a:gd name="adj" fmla="val 3380"/>
+              <a:gd name="adj" fmla="val 4444"/>
             </a:avLst>
           </a:prstGeom>
           <a:solidFill>
-            <a:srgbClr val="F4EFE8"/>
+            <a:srgbClr val="F4E9DA"/>
           </a:solidFill>
           <a:ln/>
           <a:effectLst>
@@ -6629,25 +8293,42 @@
       </p:sp>
       <p:sp>
         <p:nvSpPr>
-          <p:cNvPr id="15" name="Shape 12"/>
-          <p:cNvSpPr/>
-          <p:nvPr/>
-        </p:nvSpPr>
-        <p:spPr>
-          <a:xfrm>
-            <a:off x="8229600" y="1600200"/>
-            <a:ext cx="3246120" cy="411480"/>
-          </a:xfrm>
-          <a:prstGeom prst="roundRect">
-            <a:avLst>
-              <a:gd name="adj" fmla="val 17778"/>
-            </a:avLst>
-          </a:prstGeom>
-          <a:solidFill>
-            <a:srgbClr val="8A7A6D"/>
-          </a:solidFill>
-          <a:ln/>
-        </p:spPr>
+          <p:cNvPr id="15" name="Text 12"/>
+          <p:cNvSpPr txBox="1"/>
+          <p:nvPr/>
+        </p:nvSpPr>
+        <p:spPr>
+          <a:xfrm>
+            <a:off x="8275320" y="1645920"/>
+            <a:ext cx="3108960" cy="320040"/>
+          </a:xfrm>
+          <a:prstGeom prst="rect">
+            <a:avLst/>
+          </a:prstGeom>
+          <a:noFill/>
+          <a:ln/>
+        </p:spPr>
+        <p:txBody>
+          <a:bodyPr wrap="square" lIns="0" tIns="0" rIns="0" bIns="0" rtlCol="0" anchor="ctr"/>
+          <a:lstStyle/>
+          <a:p>
+            <a:pPr indent="0" marL="0">
+              <a:buNone/>
+            </a:pPr>
+            <a:r>
+              <a:rPr lang="en-US" sz="1100" b="1" spc="100" kern="0" dirty="0">
+                <a:solidFill>
+                  <a:srgbClr val="C9682B"/>
+                </a:solidFill>
+                <a:latin typeface="Calibri" pitchFamily="34" charset="0"/>
+                <a:ea typeface="Calibri" pitchFamily="34" charset="-122"/>
+                <a:cs typeface="Calibri" pitchFamily="34" charset="-120"/>
+              </a:rPr>
+              <a:t>MERCADO OBJETIVO</a:t>
+            </a:r>
+            <a:endParaRPr lang="en-US" sz="1100" dirty="0"/>
+          </a:p>
+        </p:txBody>
       </p:sp>
       <p:sp>
         <p:nvSpPr>
@@ -6657,8 +8338,8 @@
         </p:nvSpPr>
         <p:spPr>
           <a:xfrm>
-            <a:off x="8229600" y="1600200"/>
-            <a:ext cx="3246120" cy="411480"/>
+            <a:off x="8275320" y="2011680"/>
+            <a:ext cx="3108960" cy="1005840"/>
           </a:xfrm>
           <a:prstGeom prst="rect">
             <a:avLst/>
@@ -6670,21 +8351,21 @@
           <a:bodyPr wrap="square" lIns="0" tIns="0" rIns="0" bIns="0" rtlCol="0" anchor="ctr"/>
           <a:lstStyle/>
           <a:p>
-            <a:pPr algn="ctr" indent="0" marL="0">
-              <a:buNone/>
-            </a:pPr>
-            <a:r>
-              <a:rPr lang="en-US" sz="1400" b="1" dirty="0">
-                <a:solidFill>
-                  <a:srgbClr val="FFFFFF"/>
+            <a:pPr indent="0" marL="0">
+              <a:buNone/>
+            </a:pPr>
+            <a:r>
+              <a:rPr lang="en-US" sz="3400" b="1" dirty="0">
+                <a:solidFill>
+                  <a:srgbClr val="2E2119"/>
                 </a:solidFill>
                 <a:latin typeface="Cambria" pitchFamily="34" charset="0"/>
                 <a:ea typeface="Cambria" pitchFamily="34" charset="-122"/>
                 <a:cs typeface="Cambria" pitchFamily="34" charset="-120"/>
               </a:rPr>
-              <a:t>No se hace este curso</a:t>
-            </a:r>
-            <a:endParaRPr lang="en-US" sz="1400" dirty="0"/>
+              <a:t>≈ 99.700</a:t>
+            </a:r>
+            <a:endParaRPr lang="en-US" sz="3400" dirty="0"/>
           </a:p>
         </p:txBody>
       </p:sp>
@@ -6696,8 +8377,8 @@
         </p:nvSpPr>
         <p:spPr>
           <a:xfrm>
-            <a:off x="8275320" y="2194560"/>
-            <a:ext cx="3154680" cy="2286000"/>
+            <a:off x="8275320" y="3063240"/>
+            <a:ext cx="3108960" cy="777240"/>
           </a:xfrm>
           <a:prstGeom prst="rect">
             <a:avLst/>
@@ -6709,88 +8390,21 @@
           <a:bodyPr wrap="square" lIns="0" tIns="0" rIns="0" bIns="0" rtlCol="0" anchor="t"/>
           <a:lstStyle/>
           <a:p>
-            <a:pPr marL="342900" indent="-342900">
-              <a:spcAft>
-                <a:spcPts val="1000"/>
-              </a:spcAft>
-              <a:buSzPct val="100000"/>
-              <a:buChar char="•"/>
-            </a:pPr>
-            <a:r>
-              <a:rPr lang="en-US" sz="1150" dirty="0">
-                <a:solidFill>
-                  <a:srgbClr val="2E2119"/>
-                </a:solidFill>
-                <a:latin typeface="Calibri" pitchFamily="34" charset="0"/>
-                <a:ea typeface="Calibri" pitchFamily="34" charset="-122"/>
-                <a:cs typeface="Calibri" pitchFamily="34" charset="-120"/>
-              </a:rPr>
-              <a:t>Escaneo de código de barras</a:t>
-            </a:r>
-            <a:endParaRPr lang="en-US" sz="1150" dirty="0"/>
-          </a:p>
-          <a:p>
-            <a:pPr marL="342900" indent="-342900">
-              <a:spcAft>
-                <a:spcPts val="1000"/>
-              </a:spcAft>
-              <a:buSzPct val="100000"/>
-              <a:buChar char="•"/>
-            </a:pPr>
-            <a:r>
-              <a:rPr lang="en-US" sz="1150" dirty="0">
-                <a:solidFill>
-                  <a:srgbClr val="2E2119"/>
-                </a:solidFill>
-                <a:latin typeface="Calibri" pitchFamily="34" charset="0"/>
-                <a:ea typeface="Calibri" pitchFamily="34" charset="-122"/>
-                <a:cs typeface="Calibri" pitchFamily="34" charset="-120"/>
-              </a:rPr>
-              <a:t>Cobro real con tarjeta</a:t>
-            </a:r>
-            <a:endParaRPr lang="en-US" sz="1150" dirty="0"/>
-          </a:p>
-          <a:p>
-            <a:pPr marL="342900" indent="-342900">
-              <a:spcAft>
-                <a:spcPts val="1000"/>
-              </a:spcAft>
-              <a:buSzPct val="100000"/>
-              <a:buChar char="•"/>
-            </a:pPr>
-            <a:r>
-              <a:rPr lang="en-US" sz="1150" dirty="0">
-                <a:solidFill>
-                  <a:srgbClr val="2E2119"/>
-                </a:solidFill>
-                <a:latin typeface="Calibri" pitchFamily="34" charset="0"/>
-                <a:ea typeface="Calibri" pitchFamily="34" charset="-122"/>
-                <a:cs typeface="Calibri" pitchFamily="34" charset="-120"/>
-              </a:rPr>
-              <a:t>Notificaciones push</a:t>
-            </a:r>
-            <a:endParaRPr lang="en-US" sz="1150" dirty="0"/>
-          </a:p>
-          <a:p>
-            <a:pPr marL="342900" indent="-342900">
-              <a:spcAft>
-                <a:spcPts val="1000"/>
-              </a:spcAft>
-              <a:buSzPct val="100000"/>
-              <a:buChar char="•"/>
-            </a:pPr>
-            <a:r>
-              <a:rPr lang="en-US" sz="1150" dirty="0">
-                <a:solidFill>
-                  <a:srgbClr val="2E2119"/>
-                </a:solidFill>
-                <a:latin typeface="Calibri" pitchFamily="34" charset="0"/>
-                <a:ea typeface="Calibri" pitchFamily="34" charset="-122"/>
-                <a:cs typeface="Calibri" pitchFamily="34" charset="-120"/>
-              </a:rPr>
-              <a:t>Liquidar deudas de verdad</a:t>
-            </a:r>
-            <a:endParaRPr lang="en-US" sz="1150" dirty="0"/>
+            <a:pPr indent="0" marL="0">
+              <a:buNone/>
+            </a:pPr>
+            <a:r>
+              <a:rPr lang="en-US" sz="1050" dirty="0">
+                <a:solidFill>
+                  <a:srgbClr val="8A7A6D"/>
+                </a:solidFill>
+                <a:latin typeface="Calibri" pitchFamily="34" charset="0"/>
+                <a:ea typeface="Calibri" pitchFamily="34" charset="-122"/>
+                <a:cs typeface="Calibri" pitchFamily="34" charset="-120"/>
+              </a:rPr>
+              <a:t>Coincide con el accesible — ver nota abajo</a:t>
+            </a:r>
+            <a:endParaRPr lang="en-US" sz="1050" dirty="0"/>
           </a:p>
         </p:txBody>
       </p:sp>
@@ -6802,18 +8416,23 @@
         </p:nvSpPr>
         <p:spPr>
           <a:xfrm>
-            <a:off x="548640" y="4846320"/>
-            <a:ext cx="11064240" cy="1417320"/>
+            <a:off x="548640" y="4160520"/>
+            <a:ext cx="11064240" cy="1965960"/>
           </a:xfrm>
           <a:prstGeom prst="roundRect">
             <a:avLst>
-              <a:gd name="adj" fmla="val 7742"/>
+              <a:gd name="adj" fmla="val 4651"/>
             </a:avLst>
           </a:prstGeom>
           <a:solidFill>
-            <a:srgbClr val="2E2119"/>
+            <a:srgbClr val="F6E9D8"/>
           </a:solidFill>
-          <a:ln/>
+          <a:ln w="12700">
+            <a:solidFill>
+              <a:srgbClr val="C9682B"/>
+            </a:solidFill>
+            <a:prstDash val="solid"/>
+          </a:ln>
         </p:spPr>
       </p:sp>
       <p:sp>
@@ -6824,73 +8443,88 @@
         </p:nvSpPr>
         <p:spPr>
           <a:xfrm>
-            <a:off x="868680" y="4956048"/>
-            <a:ext cx="10424160" cy="914400"/>
-          </a:xfrm>
-          <a:prstGeom prst="rect">
-            <a:avLst/>
-          </a:prstGeom>
-          <a:noFill/>
-          <a:ln/>
-        </p:spPr>
-        <p:txBody>
-          <a:bodyPr wrap="square" lIns="0" tIns="0" rIns="0" bIns="0" rtlCol="0" anchor="ctr"/>
-          <a:lstStyle/>
-          <a:p>
-            <a:pPr indent="0" marL="0">
-              <a:buNone/>
-            </a:pPr>
-            <a:r>
-              <a:rPr lang="en-US" sz="1300" i="1" dirty="0">
-                <a:solidFill>
-                  <a:srgbClr val="D9A441"/>
-                </a:solidFill>
-                <a:latin typeface="Calibri" pitchFamily="34" charset="0"/>
-                <a:ea typeface="Calibri" pitchFamily="34" charset="-122"/>
-                <a:cs typeface="Calibri" pitchFamily="34" charset="-120"/>
-              </a:rPr>
-              <a:t>"En P1, un hogar de A Coruña controla su nevera y organiza la lista de la compra compartida sin usar el grupo de WhatsApp, y puede consultar su historial de gasto repartido y comparar precios entre tiendas."</a:t>
-            </a:r>
-            <a:endParaRPr lang="en-US" sz="1300" dirty="0"/>
-          </a:p>
-        </p:txBody>
-      </p:sp>
-      <p:sp>
-        <p:nvSpPr>
-          <p:cNvPr id="20" name="Text 17"/>
-          <p:cNvSpPr txBox="1"/>
-          <p:nvPr/>
-        </p:nvSpPr>
-        <p:spPr>
-          <a:xfrm>
-            <a:off x="868680" y="5852160"/>
-            <a:ext cx="10424160" cy="320040"/>
-          </a:xfrm>
-          <a:prstGeom prst="rect">
-            <a:avLst/>
-          </a:prstGeom>
-          <a:noFill/>
-          <a:ln/>
-        </p:spPr>
-        <p:txBody>
-          <a:bodyPr wrap="square" lIns="0" tIns="0" rIns="0" bIns="0" rtlCol="0" anchor="ctr"/>
-          <a:lstStyle/>
-          <a:p>
-            <a:pPr indent="0" marL="0">
-              <a:buNone/>
-            </a:pPr>
-            <a:r>
-              <a:rPr lang="en-US" sz="1100" dirty="0">
-                <a:solidFill>
-                  <a:srgbClr val="D8CBBE"/>
-                </a:solidFill>
-                <a:latin typeface="Calibri" pitchFamily="34" charset="0"/>
-                <a:ea typeface="Calibri" pitchFamily="34" charset="-122"/>
-                <a:cs typeface="Calibri" pitchFamily="34" charset="-120"/>
-              </a:rPr>
-              <a:t>Orden de construcción: Nevera → Lista (concurrencia) → Historial → Precios</a:t>
-            </a:r>
-            <a:endParaRPr lang="en-US" sz="1100" dirty="0"/>
+            <a:off x="777240" y="4279392"/>
+            <a:ext cx="10607040" cy="1737360"/>
+          </a:xfrm>
+          <a:prstGeom prst="rect">
+            <a:avLst/>
+          </a:prstGeom>
+          <a:noFill/>
+          <a:ln/>
+        </p:spPr>
+        <p:txBody>
+          <a:bodyPr wrap="square" lIns="0" tIns="0" rIns="0" bIns="0" rtlCol="0" anchor="t"/>
+          <a:lstStyle/>
+          <a:p>
+            <a:pPr indent="0" marL="0">
+              <a:buNone/>
+            </a:pPr>
+            <a:r>
+              <a:rPr lang="en-US" sz="1200" b="1" dirty="0">
+                <a:solidFill>
+                  <a:srgbClr val="C9682B"/>
+                </a:solidFill>
+                <a:latin typeface="Calibri" pitchFamily="34" charset="0"/>
+                <a:ea typeface="Calibri" pitchFamily="34" charset="-122"/>
+                <a:cs typeface="Calibri" pitchFamily="34" charset="-120"/>
+              </a:rPr>
+              <a:t>Nota honesta sobre la búsqueda:  </a:t>
+            </a:r>
+            <a:endParaRPr lang="en-US" sz="1200" dirty="0"/>
+          </a:p>
+          <a:p>
+            <a:pPr indent="0" marL="0">
+              <a:spcAft>
+                <a:spcPts val="600"/>
+              </a:spcAft>
+              <a:buNone/>
+            </a:pPr>
+            <a:r>
+              <a:rPr lang="en-US" sz="1200" dirty="0">
+                <a:solidFill>
+                  <a:srgbClr val="2E2119"/>
+                </a:solidFill>
+                <a:latin typeface="Calibri" pitchFamily="34" charset="0"/>
+                <a:ea typeface="Calibri" pitchFamily="34" charset="-122"/>
+                <a:cs typeface="Calibri" pitchFamily="34" charset="-120"/>
+              </a:rPr>
+              <a:t>no se encontró un desglose público fiable de "hogares no familiares/parejas sin hijos" a nivel de A Coruña — es un resultado válido en sí mismo, no un dato inventado.</a:t>
+            </a:r>
+            <a:endParaRPr lang="en-US" sz="1200" dirty="0"/>
+          </a:p>
+          <a:p>
+            <a:pPr indent="0" marL="0">
+              <a:buNone/>
+            </a:pPr>
+            <a:r>
+              <a:rPr lang="en-US" sz="1200" b="1" dirty="0">
+                <a:solidFill>
+                  <a:srgbClr val="C9682B"/>
+                </a:solidFill>
+                <a:latin typeface="Calibri" pitchFamily="34" charset="0"/>
+                <a:ea typeface="Calibri" pitchFamily="34" charset="-122"/>
+                <a:cs typeface="Calibri" pitchFamily="34" charset="-120"/>
+              </a:rPr>
+              <a:t>Suelo verificable:  </a:t>
+            </a:r>
+            <a:endParaRPr lang="en-US" sz="1200" dirty="0"/>
+          </a:p>
+          <a:p>
+            <a:pPr indent="0" marL="0">
+              <a:buNone/>
+            </a:pPr>
+            <a:r>
+              <a:rPr lang="en-US" sz="1200" dirty="0">
+                <a:solidFill>
+                  <a:srgbClr val="2E2119"/>
+                </a:solidFill>
+                <a:latin typeface="Calibri" pitchFamily="34" charset="0"/>
+                <a:ea typeface="Calibri" pitchFamily="34" charset="-122"/>
+                <a:cs typeface="Calibri" pitchFamily="34" charset="-120"/>
+              </a:rPr>
+              <a:t>≈ 650 pisos de estudiantes en A Coruña (UDC &gt;13.300 matriculados · 31% cambia de ciudad · 55% comparte piso — Fundación CYD).</a:t>
+            </a:r>
+            <a:endParaRPr lang="en-US" sz="1200" dirty="0"/>
           </a:p>
         </p:txBody>
       </p:sp>
@@ -7003,7 +8637,7 @@
                 <a:ea typeface="Calibri" pitchFamily="34" charset="-122"/>
                 <a:cs typeface="Calibri" pitchFamily="34" charset="-120"/>
               </a:rPr>
-              <a:t>PASO 6</a:t>
+              <a:t>PASO 4</a:t>
             </a:r>
             <a:endParaRPr lang="en-US" sz="1200" dirty="0"/>
           </a:p>
@@ -7042,7 +8676,7 @@
                 <a:ea typeface="Cambria" pitchFamily="34" charset="-122"/>
                 <a:cs typeface="Cambria" pitchFamily="34" charset="-120"/>
               </a:rPr>
-              <a:t>Documento de una página</a:t>
+              <a:t>La servilleta de 6 casillas</a:t>
             </a:r>
             <a:endParaRPr lang="en-US" sz="2800" dirty="0"/>
           </a:p>
@@ -7057,11 +8691,11 @@
         <p:spPr>
           <a:xfrm>
             <a:off x="548640" y="1417320"/>
-            <a:ext cx="5440680" cy="896112"/>
+            <a:ext cx="3611880" cy="960120"/>
           </a:xfrm>
           <a:prstGeom prst="roundRect">
             <a:avLst>
-              <a:gd name="adj" fmla="val 12245"/>
+              <a:gd name="adj" fmla="val 11429"/>
             </a:avLst>
           </a:prstGeom>
           <a:solidFill>
@@ -7085,8 +8719,8 @@
         </p:nvSpPr>
         <p:spPr>
           <a:xfrm>
-            <a:off x="731520" y="1490472"/>
-            <a:ext cx="5074920" cy="237744"/>
+            <a:off x="731520" y="1508760"/>
+            <a:ext cx="3246120" cy="256032"/>
           </a:xfrm>
           <a:prstGeom prst="rect">
             <a:avLst/>
@@ -7110,7 +8744,7 @@
                 <a:ea typeface="Calibri" pitchFamily="34" charset="-122"/>
                 <a:cs typeface="Calibri" pitchFamily="34" charset="-120"/>
               </a:rPr>
-              <a:t>NOMBRE Y MENSAJE</a:t>
+              <a:t>QUÉ VENDEMOS</a:t>
             </a:r>
             <a:endParaRPr lang="en-US" sz="1000" dirty="0"/>
           </a:p>
@@ -7124,8 +8758,8 @@
         </p:nvSpPr>
         <p:spPr>
           <a:xfrm>
-            <a:off x="731520" y="1728216"/>
-            <a:ext cx="5074920" cy="530352"/>
+            <a:off x="731520" y="1764792"/>
+            <a:ext cx="3246120" cy="566928"/>
           </a:xfrm>
           <a:prstGeom prst="rect">
             <a:avLst/>
@@ -7141,7 +8775,7 @@
               <a:buNone/>
             </a:pPr>
             <a:r>
-              <a:rPr lang="en-US" sz="1100" dirty="0">
+              <a:rPr lang="en-US" sz="1150" dirty="0">
                 <a:solidFill>
                   <a:srgbClr val="2E2119"/>
                 </a:solidFill>
@@ -7149,9 +8783,9 @@
                 <a:ea typeface="Calibri" pitchFamily="34" charset="-122"/>
                 <a:cs typeface="Calibri" pitchFamily="34" charset="-120"/>
               </a:rPr>
-              <a:t>Larder — controlar la nevera y la compra sin duplicados ni viajes extra, sin depender de un WhatsApp desordenado.</a:t>
-            </a:r>
-            <a:endParaRPr lang="en-US" sz="1100" dirty="0"/>
+              <a:t>Suscripción mensual por hogar</a:t>
+            </a:r>
+            <a:endParaRPr lang="en-US" sz="1150" dirty="0"/>
           </a:p>
         </p:txBody>
       </p:sp>
@@ -7163,16 +8797,16 @@
         </p:nvSpPr>
         <p:spPr>
           <a:xfrm>
-            <a:off x="6172200" y="1417320"/>
-            <a:ext cx="5440680" cy="896112"/>
+            <a:off x="4297680" y="1417320"/>
+            <a:ext cx="3611880" cy="960120"/>
           </a:xfrm>
           <a:prstGeom prst="roundRect">
             <a:avLst>
-              <a:gd name="adj" fmla="val 12245"/>
+              <a:gd name="adj" fmla="val 11429"/>
             </a:avLst>
           </a:prstGeom>
           <a:solidFill>
-            <a:srgbClr val="EDE6DC"/>
+            <a:srgbClr val="F4E9DA"/>
           </a:solidFill>
           <a:ln/>
           <a:effectLst>
@@ -7192,8 +8826,8 @@
         </p:nvSpPr>
         <p:spPr>
           <a:xfrm>
-            <a:off x="6355080" y="1490472"/>
-            <a:ext cx="5074920" cy="237744"/>
+            <a:off x="4480560" y="1508760"/>
+            <a:ext cx="3246120" cy="256032"/>
           </a:xfrm>
           <a:prstGeom prst="rect">
             <a:avLst/>
@@ -7217,7 +8851,7 @@
                 <a:ea typeface="Calibri" pitchFamily="34" charset="-122"/>
                 <a:cs typeface="Calibri" pitchFamily="34" charset="-120"/>
               </a:rPr>
-              <a:t>PÚBLICO</a:t>
+              <a:t>A QUIÉN</a:t>
             </a:r>
             <a:endParaRPr lang="en-US" sz="1000" dirty="0"/>
           </a:p>
@@ -7231,8 +8865,8 @@
         </p:nvSpPr>
         <p:spPr>
           <a:xfrm>
-            <a:off x="6355080" y="1728216"/>
-            <a:ext cx="5074920" cy="530352"/>
+            <a:off x="4480560" y="1764792"/>
+            <a:ext cx="3246120" cy="566928"/>
           </a:xfrm>
           <a:prstGeom prst="rect">
             <a:avLst/>
@@ -7248,7 +8882,7 @@
               <a:buNone/>
             </a:pPr>
             <a:r>
-              <a:rPr lang="en-US" sz="1100" dirty="0">
+              <a:rPr lang="en-US" sz="1150" dirty="0">
                 <a:solidFill>
                   <a:srgbClr val="2E2119"/>
                 </a:solidFill>
@@ -7256,9 +8890,9 @@
                 <a:ea typeface="Calibri" pitchFamily="34" charset="-122"/>
                 <a:cs typeface="Calibri" pitchFamily="34" charset="-120"/>
               </a:rPr>
-              <a:t>Quien organiza la compra en un hogar compartido de A Coruña. ≈99.700 hogares accesibles.</a:t>
-            </a:r>
-            <a:endParaRPr lang="en-US" sz="1100" dirty="0"/>
+              <a:t>Quien organiza la compra en un hogar compartido de A Coruña</a:t>
+            </a:r>
+            <a:endParaRPr lang="en-US" sz="1150" dirty="0"/>
           </a:p>
         </p:txBody>
       </p:sp>
@@ -7270,12 +8904,12 @@
         </p:nvSpPr>
         <p:spPr>
           <a:xfrm>
-            <a:off x="548640" y="2432304"/>
-            <a:ext cx="5440680" cy="896112"/>
+            <a:off x="8046720" y="1417320"/>
+            <a:ext cx="3611880" cy="960120"/>
           </a:xfrm>
           <a:prstGeom prst="roundRect">
             <a:avLst>
-              <a:gd name="adj" fmla="val 12245"/>
+              <a:gd name="adj" fmla="val 11429"/>
             </a:avLst>
           </a:prstGeom>
           <a:solidFill>
@@ -7299,8 +8933,8 @@
         </p:nvSpPr>
         <p:spPr>
           <a:xfrm>
-            <a:off x="731520" y="2505456"/>
-            <a:ext cx="5074920" cy="237744"/>
+            <a:off x="8229600" y="1508760"/>
+            <a:ext cx="3246120" cy="256032"/>
           </a:xfrm>
           <a:prstGeom prst="rect">
             <a:avLst/>
@@ -7324,7 +8958,7 @@
                 <a:ea typeface="Calibri" pitchFamily="34" charset="-122"/>
                 <a:cs typeface="Calibri" pitchFamily="34" charset="-120"/>
               </a:rPr>
-              <a:t>PROBLEMA</a:t>
+              <a:t>A CUÁNTO</a:t>
             </a:r>
             <a:endParaRPr lang="en-US" sz="1000" dirty="0"/>
           </a:p>
@@ -7338,8 +8972,8 @@
         </p:nvSpPr>
         <p:spPr>
           <a:xfrm>
-            <a:off x="731520" y="2743200"/>
-            <a:ext cx="5074920" cy="530352"/>
+            <a:off x="8229600" y="1764792"/>
+            <a:ext cx="3246120" cy="566928"/>
           </a:xfrm>
           <a:prstGeom prst="rect">
             <a:avLst/>
@@ -7355,7 +8989,7 @@
               <a:buNone/>
             </a:pPr>
             <a:r>
-              <a:rPr lang="en-US" sz="1100" dirty="0">
+              <a:rPr lang="en-US" sz="1150" dirty="0">
                 <a:solidFill>
                   <a:srgbClr val="2E2119"/>
                 </a:solidFill>
@@ -7363,9 +8997,9 @@
                 <a:ea typeface="Calibri" pitchFamily="34" charset="-122"/>
                 <a:cs typeface="Calibri" pitchFamily="34" charset="-120"/>
               </a:rPr>
-              <a:t>10-15 min/lista a ojo, 2 viajes/semana sin plan, ≈1.040€/año perdidos.</a:t>
-            </a:r>
-            <a:endParaRPr lang="en-US" sz="1100" dirty="0"/>
+              <a:t>0,99 €/mes por hogar</a:t>
+            </a:r>
+            <a:endParaRPr lang="en-US" sz="1150" dirty="0"/>
           </a:p>
         </p:txBody>
       </p:sp>
@@ -7377,16 +9011,16 @@
         </p:nvSpPr>
         <p:spPr>
           <a:xfrm>
-            <a:off x="6172200" y="2432304"/>
-            <a:ext cx="5440680" cy="896112"/>
+            <a:off x="548640" y="2514600"/>
+            <a:ext cx="3611880" cy="960120"/>
           </a:xfrm>
           <a:prstGeom prst="roundRect">
             <a:avLst>
-              <a:gd name="adj" fmla="val 12245"/>
+              <a:gd name="adj" fmla="val 11429"/>
             </a:avLst>
           </a:prstGeom>
           <a:solidFill>
-            <a:srgbClr val="EDE6DC"/>
+            <a:srgbClr val="F4E9DA"/>
           </a:solidFill>
           <a:ln/>
           <a:effectLst>
@@ -7406,8 +9040,8 @@
         </p:nvSpPr>
         <p:spPr>
           <a:xfrm>
-            <a:off x="6355080" y="2505456"/>
-            <a:ext cx="5074920" cy="237744"/>
+            <a:off x="731520" y="2606040"/>
+            <a:ext cx="3246120" cy="256032"/>
           </a:xfrm>
           <a:prstGeom prst="rect">
             <a:avLst/>
@@ -7431,7 +9065,7 @@
                 <a:ea typeface="Calibri" pitchFamily="34" charset="-122"/>
                 <a:cs typeface="Calibri" pitchFamily="34" charset="-120"/>
               </a:rPr>
-              <a:t>NÚMEROS</a:t>
+              <a:t>QUÉ NOS CUESTA</a:t>
             </a:r>
             <a:endParaRPr lang="en-US" sz="1000" dirty="0"/>
           </a:p>
@@ -7445,8 +9079,8 @@
         </p:nvSpPr>
         <p:spPr>
           <a:xfrm>
-            <a:off x="6355080" y="2743200"/>
-            <a:ext cx="5074920" cy="530352"/>
+            <a:off x="731520" y="2862072"/>
+            <a:ext cx="3246120" cy="566928"/>
           </a:xfrm>
           <a:prstGeom prst="rect">
             <a:avLst/>
@@ -7462,7 +9096,7 @@
               <a:buNone/>
             </a:pPr>
             <a:r>
-              <a:rPr lang="en-US" sz="1100" dirty="0">
+              <a:rPr lang="en-US" sz="1150" dirty="0">
                 <a:solidFill>
                   <a:srgbClr val="2E2119"/>
                 </a:solidFill>
@@ -7470,9 +9104,9 @@
                 <a:ea typeface="Calibri" pitchFamily="34" charset="-122"/>
                 <a:cs typeface="Calibri" pitchFamily="34" charset="-120"/>
               </a:rPr>
-              <a:t>0,99€/mes · coste fijo 0€ · equilibrio: 1 hogar.</a:t>
-            </a:r>
-            <a:endParaRPr lang="en-US" sz="1100" dirty="0"/>
+              <a:t>Coste fijo: 0 € (hosting gratuito). Variable: 0 €</a:t>
+            </a:r>
+            <a:endParaRPr lang="en-US" sz="1150" dirty="0"/>
           </a:p>
         </p:txBody>
       </p:sp>
@@ -7484,12 +9118,12 @@
         </p:nvSpPr>
         <p:spPr>
           <a:xfrm>
-            <a:off x="548640" y="3447288"/>
-            <a:ext cx="5440680" cy="896112"/>
+            <a:off x="4297680" y="2514600"/>
+            <a:ext cx="3611880" cy="960120"/>
           </a:xfrm>
           <a:prstGeom prst="roundRect">
             <a:avLst>
-              <a:gd name="adj" fmla="val 12245"/>
+              <a:gd name="adj" fmla="val 11429"/>
             </a:avLst>
           </a:prstGeom>
           <a:solidFill>
@@ -7513,8 +9147,8 @@
         </p:nvSpPr>
         <p:spPr>
           <a:xfrm>
-            <a:off x="731520" y="3520440"/>
-            <a:ext cx="5074920" cy="237744"/>
+            <a:off x="4480560" y="2606040"/>
+            <a:ext cx="3246120" cy="256032"/>
           </a:xfrm>
           <a:prstGeom prst="rect">
             <a:avLst/>
@@ -7538,7 +9172,7 @@
                 <a:ea typeface="Calibri" pitchFamily="34" charset="-122"/>
                 <a:cs typeface="Calibri" pitchFamily="34" charset="-120"/>
               </a:rPr>
-              <a:t>ALCANCE P1</a:t>
+              <a:t>CUÁNTOS HACEN FALTA</a:t>
             </a:r>
             <a:endParaRPr lang="en-US" sz="1000" dirty="0"/>
           </a:p>
@@ -7552,8 +9186,8 @@
         </p:nvSpPr>
         <p:spPr>
           <a:xfrm>
-            <a:off x="731520" y="3758184"/>
-            <a:ext cx="5074920" cy="530352"/>
+            <a:off x="4480560" y="2862072"/>
+            <a:ext cx="3246120" cy="566928"/>
           </a:xfrm>
           <a:prstGeom prst="rect">
             <a:avLst/>
@@ -7569,7 +9203,7 @@
               <a:buNone/>
             </a:pPr>
             <a:r>
-              <a:rPr lang="en-US" sz="1100" dirty="0">
+              <a:rPr lang="en-US" sz="1150" dirty="0">
                 <a:solidFill>
                   <a:srgbClr val="2E2119"/>
                 </a:solidFill>
@@ -7577,9 +9211,9 @@
                 <a:ea typeface="Calibri" pitchFamily="34" charset="-122"/>
                 <a:cs typeface="Calibri" pitchFamily="34" charset="-120"/>
               </a:rPr>
-              <a:t>Nevera + Lista + Historial + Precios. Cobro real, fuera de alcance.</a:t>
-            </a:r>
-            <a:endParaRPr lang="en-US" sz="1100" dirty="0"/>
+              <a:t>Punto de equilibrio: 1 hogar</a:t>
+            </a:r>
+            <a:endParaRPr lang="en-US" sz="1150" dirty="0"/>
           </a:p>
         </p:txBody>
       </p:sp>
@@ -7591,16 +9225,16 @@
         </p:nvSpPr>
         <p:spPr>
           <a:xfrm>
-            <a:off x="6172200" y="3447288"/>
-            <a:ext cx="5440680" cy="896112"/>
+            <a:off x="8046720" y="2514600"/>
+            <a:ext cx="3611880" cy="960120"/>
           </a:xfrm>
           <a:prstGeom prst="roundRect">
             <a:avLst>
-              <a:gd name="adj" fmla="val 12245"/>
+              <a:gd name="adj" fmla="val 11429"/>
             </a:avLst>
           </a:prstGeom>
           <a:solidFill>
-            <a:srgbClr val="EDE6DC"/>
+            <a:srgbClr val="F4E9DA"/>
           </a:solidFill>
           <a:ln/>
           <a:effectLst>
@@ -7620,8 +9254,8 @@
         </p:nvSpPr>
         <p:spPr>
           <a:xfrm>
-            <a:off x="6355080" y="3520440"/>
-            <a:ext cx="5074920" cy="237744"/>
+            <a:off x="8229600" y="2606040"/>
+            <a:ext cx="3246120" cy="256032"/>
           </a:xfrm>
           <a:prstGeom prst="rect">
             <a:avLst/>
@@ -7645,7 +9279,7 @@
                 <a:ea typeface="Calibri" pitchFamily="34" charset="-122"/>
                 <a:cs typeface="Calibri" pitchFamily="34" charset="-120"/>
               </a:rPr>
-              <a:t>CANAL</a:t>
+              <a:t>CUÁNTOS HAY</a:t>
             </a:r>
             <a:endParaRPr lang="en-US" sz="1000" dirty="0"/>
           </a:p>
@@ -7659,8 +9293,8 @@
         </p:nvSpPr>
         <p:spPr>
           <a:xfrm>
-            <a:off x="6355080" y="3758184"/>
-            <a:ext cx="5074920" cy="530352"/>
+            <a:off x="8229600" y="2862072"/>
+            <a:ext cx="3246120" cy="566928"/>
           </a:xfrm>
           <a:prstGeom prst="rect">
             <a:avLst/>
@@ -7676,7 +9310,7 @@
               <a:buNone/>
             </a:pPr>
             <a:r>
-              <a:rPr lang="en-US" sz="1100" dirty="0">
+              <a:rPr lang="en-US" sz="1150" dirty="0">
                 <a:solidFill>
                   <a:srgbClr val="2E2119"/>
                 </a:solidFill>
@@ -7684,9 +9318,9 @@
                 <a:ea typeface="Calibri" pitchFamily="34" charset="-122"/>
                 <a:cs typeface="Calibri" pitchFamily="34" charset="-120"/>
               </a:rPr>
-              <a:t>Directo: el propio hogar es el primer usuario real.</a:t>
-            </a:r>
-            <a:endParaRPr lang="en-US" sz="1100" dirty="0"/>
+              <a:t>≈ 99.700 hogares accesibles</a:t>
+            </a:r>
+            <a:endParaRPr lang="en-US" sz="1150" dirty="0"/>
           </a:p>
         </p:txBody>
       </p:sp>
@@ -7698,25 +9332,18 @@
         </p:nvSpPr>
         <p:spPr>
           <a:xfrm>
-            <a:off x="548640" y="4462272"/>
-            <a:ext cx="5440680" cy="896112"/>
+            <a:off x="548640" y="3657600"/>
+            <a:ext cx="5349240" cy="1417320"/>
           </a:xfrm>
           <a:prstGeom prst="roundRect">
             <a:avLst>
-              <a:gd name="adj" fmla="val 12245"/>
+              <a:gd name="adj" fmla="val 7742"/>
             </a:avLst>
           </a:prstGeom>
           <a:solidFill>
-            <a:srgbClr val="F4E9DA"/>
+            <a:srgbClr val="2E2119"/>
           </a:solidFill>
           <a:ln/>
-          <a:effectLst>
-            <a:outerShdw sx="100000" sy="100000" kx="0" ky="0" algn="bl" rotWithShape="0" blurRad="76200" dist="25400" dir="5400000">
-              <a:srgbClr val="000000">
-                <a:alpha val="12000"/>
-              </a:srgbClr>
-            </a:outerShdw>
-          </a:effectLst>
         </p:spPr>
       </p:sp>
       <p:sp>
@@ -7727,8 +9354,8 @@
         </p:nvSpPr>
         <p:spPr>
           <a:xfrm>
-            <a:off x="731520" y="4535424"/>
-            <a:ext cx="5074920" cy="237744"/>
+            <a:off x="548640" y="3767328"/>
+            <a:ext cx="5349240" cy="685800"/>
           </a:xfrm>
           <a:prstGeom prst="rect">
             <a:avLst/>
@@ -7740,60 +9367,165 @@
           <a:bodyPr wrap="square" lIns="0" tIns="0" rIns="0" bIns="0" rtlCol="0" anchor="ctr"/>
           <a:lstStyle/>
           <a:p>
-            <a:pPr indent="0" marL="0">
-              <a:buNone/>
-            </a:pPr>
-            <a:r>
-              <a:rPr lang="en-US" sz="1000" b="1" spc="100" kern="0" dirty="0">
-                <a:solidFill>
-                  <a:srgbClr val="C9682B"/>
-                </a:solidFill>
-                <a:latin typeface="Calibri" pitchFamily="34" charset="0"/>
-                <a:ea typeface="Calibri" pitchFamily="34" charset="-122"/>
-                <a:cs typeface="Calibri" pitchFamily="34" charset="-120"/>
-              </a:rPr>
-              <a:t>QUÉ NO HAREMOS</a:t>
+            <a:pPr algn="ctr" indent="0" marL="0">
+              <a:buNone/>
+            </a:pPr>
+            <a:r>
+              <a:rPr lang="en-US" sz="3400" b="1" dirty="0">
+                <a:solidFill>
+                  <a:srgbClr val="D9A441"/>
+                </a:solidFill>
+                <a:latin typeface="Cambria" pitchFamily="34" charset="0"/>
+                <a:ea typeface="Cambria" pitchFamily="34" charset="-122"/>
+                <a:cs typeface="Cambria" pitchFamily="34" charset="-120"/>
+              </a:rPr>
+              <a:t>1 hogar</a:t>
+            </a:r>
+            <a:endParaRPr lang="en-US" sz="3400" dirty="0"/>
+          </a:p>
+        </p:txBody>
+      </p:sp>
+      <p:sp>
+        <p:nvSpPr>
+          <p:cNvPr id="26" name="Text 23"/>
+          <p:cNvSpPr txBox="1"/>
+          <p:nvPr/>
+        </p:nvSpPr>
+        <p:spPr>
+          <a:xfrm>
+            <a:off x="777240" y="4434840"/>
+            <a:ext cx="4892040" cy="502920"/>
+          </a:xfrm>
+          <a:prstGeom prst="rect">
+            <a:avLst/>
+          </a:prstGeom>
+          <a:noFill/>
+          <a:ln/>
+        </p:spPr>
+        <p:txBody>
+          <a:bodyPr wrap="square" lIns="0" tIns="0" rIns="0" bIns="0" rtlCol="0" anchor="ctr"/>
+          <a:lstStyle/>
+          <a:p>
+            <a:pPr algn="ctr" indent="0" marL="0">
+              <a:buNone/>
+            </a:pPr>
+            <a:r>
+              <a:rPr lang="en-US" sz="1150" dirty="0">
+                <a:solidFill>
+                  <a:srgbClr val="FFFFFF"/>
+                </a:solidFill>
+                <a:latin typeface="Calibri" pitchFamily="34" charset="0"/>
+                <a:ea typeface="Calibri" pitchFamily="34" charset="-122"/>
+                <a:cs typeface="Calibri" pitchFamily="34" charset="-120"/>
+              </a:rPr>
+              <a:t>punto de equilibrio — coste fijo 0€ ÷ margen 0,99€</a:t>
+            </a:r>
+            <a:endParaRPr lang="en-US" sz="1150" dirty="0"/>
+          </a:p>
+        </p:txBody>
+      </p:sp>
+      <p:sp>
+        <p:nvSpPr>
+          <p:cNvPr id="27" name="Shape 24"/>
+          <p:cNvSpPr/>
+          <p:nvPr/>
+        </p:nvSpPr>
+        <p:spPr>
+          <a:xfrm>
+            <a:off x="6035040" y="3657600"/>
+            <a:ext cx="5577840" cy="1417320"/>
+          </a:xfrm>
+          <a:prstGeom prst="roundRect">
+            <a:avLst>
+              <a:gd name="adj" fmla="val 6452"/>
+            </a:avLst>
+          </a:prstGeom>
+          <a:solidFill>
+            <a:srgbClr val="F6E9D8"/>
+          </a:solidFill>
+          <a:ln w="12700">
+            <a:solidFill>
+              <a:srgbClr val="C9682B"/>
+            </a:solidFill>
+            <a:prstDash val="solid"/>
+          </a:ln>
+        </p:spPr>
+      </p:sp>
+      <p:sp>
+        <p:nvSpPr>
+          <p:cNvPr id="28" name="Text 25"/>
+          <p:cNvSpPr txBox="1"/>
+          <p:nvPr/>
+        </p:nvSpPr>
+        <p:spPr>
+          <a:xfrm>
+            <a:off x="6263640" y="3767328"/>
+            <a:ext cx="5120640" cy="1188720"/>
+          </a:xfrm>
+          <a:prstGeom prst="rect">
+            <a:avLst/>
+          </a:prstGeom>
+          <a:noFill/>
+          <a:ln/>
+        </p:spPr>
+        <p:txBody>
+          <a:bodyPr wrap="square" lIns="0" tIns="0" rIns="0" bIns="0" rtlCol="0" anchor="ctr"/>
+          <a:lstStyle/>
+          <a:p>
+            <a:pPr indent="0" marL="0">
+              <a:buNone/>
+            </a:pPr>
+            <a:r>
+              <a:rPr lang="en-US" sz="1150" i="1" dirty="0">
+                <a:solidFill>
+                  <a:srgbClr val="2E2119"/>
+                </a:solidFill>
+                <a:latin typeface="Calibri" pitchFamily="34" charset="0"/>
+                <a:ea typeface="Calibri" pitchFamily="34" charset="-122"/>
+                <a:cs typeface="Calibri" pitchFamily="34" charset="-120"/>
+              </a:rPr>
+              <a:t>Lectura honesta: el nivel gratuito "duerme" sin uso y el disco es efímero (riesgo real para SQLite). El reto no son los números — es que alguien pague por algo que la competencia da gratis.</a:t>
+            </a:r>
+            <a:endParaRPr lang="en-US" sz="1150" dirty="0"/>
+          </a:p>
+        </p:txBody>
+      </p:sp>
+      <p:sp>
+        <p:nvSpPr>
+          <p:cNvPr id="29" name="Text 26"/>
+          <p:cNvSpPr txBox="1"/>
+          <p:nvPr/>
+        </p:nvSpPr>
+        <p:spPr>
+          <a:xfrm>
+            <a:off x="548640" y="5349240"/>
+            <a:ext cx="11094415" cy="274320"/>
+          </a:xfrm>
+          <a:prstGeom prst="rect">
+            <a:avLst/>
+          </a:prstGeom>
+          <a:noFill/>
+          <a:ln/>
+        </p:spPr>
+        <p:txBody>
+          <a:bodyPr wrap="square" lIns="0" tIns="0" rIns="0" bIns="0" rtlCol="0" anchor="ctr"/>
+          <a:lstStyle/>
+          <a:p>
+            <a:pPr indent="0" marL="0">
+              <a:buNone/>
+            </a:pPr>
+            <a:r>
+              <a:rPr lang="en-US" sz="1000" i="1" dirty="0">
+                <a:solidFill>
+                  <a:srgbClr val="8A7A6D"/>
+                </a:solidFill>
+                <a:latin typeface="Calibri" pitchFamily="34" charset="0"/>
+                <a:ea typeface="Calibri" pitchFamily="34" charset="-122"/>
+                <a:cs typeface="Calibri" pitchFamily="34" charset="-120"/>
+              </a:rPr>
+              <a:t>Decisión explícita: no se adelanta dinero propio en hosting mientras el proyecto no genere ingresos.</a:t>
             </a:r>
             <a:endParaRPr lang="en-US" sz="1000" dirty="0"/>
-          </a:p>
-        </p:txBody>
-      </p:sp>
-      <p:sp>
-        <p:nvSpPr>
-          <p:cNvPr id="26" name="Text 23"/>
-          <p:cNvSpPr txBox="1"/>
-          <p:nvPr/>
-        </p:nvSpPr>
-        <p:spPr>
-          <a:xfrm>
-            <a:off x="731520" y="4773168"/>
-            <a:ext cx="5074920" cy="530352"/>
-          </a:xfrm>
-          <a:prstGeom prst="rect">
-            <a:avLst/>
-          </a:prstGeom>
-          <a:noFill/>
-          <a:ln/>
-        </p:spPr>
-        <p:txBody>
-          <a:bodyPr wrap="square" lIns="0" tIns="0" rIns="0" bIns="0" rtlCol="0" anchor="t"/>
-          <a:lstStyle/>
-          <a:p>
-            <a:pPr indent="0" marL="0">
-              <a:buNone/>
-            </a:pPr>
-            <a:r>
-              <a:rPr lang="en-US" sz="1100" dirty="0">
-                <a:solidFill>
-                  <a:srgbClr val="2E2119"/>
-                </a:solidFill>
-                <a:latin typeface="Calibri" pitchFamily="34" charset="0"/>
-                <a:ea typeface="Calibri" pitchFamily="34" charset="-122"/>
-                <a:cs typeface="Calibri" pitchFamily="34" charset="-120"/>
-              </a:rPr>
-              <a:t>Código de barras, cobro con tarjeta, notificaciones push, liquidar deudas de verdad.</a:t>
-            </a:r>
-            <a:endParaRPr lang="en-US" sz="1100" dirty="0"/>
           </a:p>
         </p:txBody>
       </p:sp>
@@ -7811,7 +9543,7 @@
     <p:bg>
       <p:bgPr>
         <a:solidFill>
-          <a:srgbClr val="2E2119"/>
+          <a:srgbClr val="FFFFFF"/>
         </a:solidFill>
       </p:bgPr>
     </p:bg>
@@ -7837,8 +9569,8 @@
         </p:nvSpPr>
         <p:spPr>
           <a:xfrm>
-            <a:off x="822960" y="731520"/>
-            <a:ext cx="777240" cy="777240"/>
+            <a:off x="548640" y="457200"/>
+            <a:ext cx="566928" cy="566928"/>
           </a:xfrm>
           <a:prstGeom prst="ellipse">
             <a:avLst/>
@@ -7865,8 +9597,8 @@
         </p:blipFill>
         <p:spPr>
           <a:xfrm>
-            <a:off x="1009498" y="918058"/>
-            <a:ext cx="404165" cy="404165"/>
+            <a:off x="684703" y="593263"/>
+            <a:ext cx="294803" cy="294803"/>
           </a:xfrm>
           <a:prstGeom prst="rect">
             <a:avLst/>
@@ -7881,8 +9613,8 @@
         </p:nvSpPr>
         <p:spPr>
           <a:xfrm>
-            <a:off x="777240" y="1737360"/>
-            <a:ext cx="8229600" cy="731520"/>
+            <a:off x="1280160" y="438912"/>
+            <a:ext cx="7315200" cy="274320"/>
           </a:xfrm>
           <a:prstGeom prst="rect">
             <a:avLst/>
@@ -7898,30 +9630,159 @@
               <a:buNone/>
             </a:pPr>
             <a:r>
-              <a:rPr lang="en-US" sz="3800" b="1" dirty="0">
-                <a:solidFill>
-                  <a:srgbClr val="FFFFFF"/>
+              <a:rPr lang="en-US" sz="1200" b="1" spc="200" kern="0" dirty="0">
+                <a:solidFill>
+                  <a:srgbClr val="C9682B"/>
+                </a:solidFill>
+                <a:latin typeface="Calibri" pitchFamily="34" charset="0"/>
+                <a:ea typeface="Calibri" pitchFamily="34" charset="-122"/>
+                <a:cs typeface="Calibri" pitchFamily="34" charset="-120"/>
+              </a:rPr>
+              <a:t>PASO 5</a:t>
+            </a:r>
+            <a:endParaRPr lang="en-US" sz="1200" dirty="0"/>
+          </a:p>
+        </p:txBody>
+      </p:sp>
+      <p:sp>
+        <p:nvSpPr>
+          <p:cNvPr id="5" name="Text 2"/>
+          <p:cNvSpPr txBox="1"/>
+          <p:nvPr/>
+        </p:nvSpPr>
+        <p:spPr>
+          <a:xfrm>
+            <a:off x="1280160" y="676656"/>
+            <a:ext cx="9601200" cy="502920"/>
+          </a:xfrm>
+          <a:prstGeom prst="rect">
+            <a:avLst/>
+          </a:prstGeom>
+          <a:noFill/>
+          <a:ln/>
+        </p:spPr>
+        <p:txBody>
+          <a:bodyPr wrap="square" lIns="0" tIns="0" rIns="0" bIns="0" rtlCol="0" anchor="ctr"/>
+          <a:lstStyle/>
+          <a:p>
+            <a:pPr indent="0" marL="0">
+              <a:buNone/>
+            </a:pPr>
+            <a:r>
+              <a:rPr lang="en-US" sz="2800" b="1" dirty="0">
+                <a:solidFill>
+                  <a:srgbClr val="2E2119"/>
                 </a:solidFill>
                 <a:latin typeface="Cambria" pitchFamily="34" charset="0"/>
                 <a:ea typeface="Cambria" pitchFamily="34" charset="-122"/>
                 <a:cs typeface="Cambria" pitchFamily="34" charset="-120"/>
               </a:rPr>
-              <a:t>Próximos pasos</a:t>
-            </a:r>
-            <a:endParaRPr lang="en-US" sz="3800" dirty="0"/>
-          </a:p>
-        </p:txBody>
-      </p:sp>
-      <p:sp>
-        <p:nvSpPr>
-          <p:cNvPr id="5" name="Text 2"/>
-          <p:cNvSpPr txBox="1"/>
-          <p:nvPr/>
-        </p:nvSpPr>
-        <p:spPr>
-          <a:xfrm>
-            <a:off x="822960" y="2697480"/>
-            <a:ext cx="9601200" cy="2926080"/>
+              <a:t>Las 3 columnas del alcance</a:t>
+            </a:r>
+            <a:endParaRPr lang="en-US" sz="2800" dirty="0"/>
+          </a:p>
+        </p:txBody>
+      </p:sp>
+      <p:sp>
+        <p:nvSpPr>
+          <p:cNvPr id="6" name="Shape 3"/>
+          <p:cNvSpPr/>
+          <p:nvPr/>
+        </p:nvSpPr>
+        <p:spPr>
+          <a:xfrm>
+            <a:off x="548640" y="1417320"/>
+            <a:ext cx="3611880" cy="3246120"/>
+          </a:xfrm>
+          <a:prstGeom prst="roundRect">
+            <a:avLst>
+              <a:gd name="adj" fmla="val 3380"/>
+            </a:avLst>
+          </a:prstGeom>
+          <a:solidFill>
+            <a:srgbClr val="F6E4D3"/>
+          </a:solidFill>
+          <a:ln/>
+          <a:effectLst>
+            <a:outerShdw sx="100000" sy="100000" kx="0" ky="0" algn="bl" rotWithShape="0" blurRad="76200" dist="25400" dir="5400000">
+              <a:srgbClr val="000000">
+                <a:alpha val="12000"/>
+              </a:srgbClr>
+            </a:outerShdw>
+          </a:effectLst>
+        </p:spPr>
+      </p:sp>
+      <p:sp>
+        <p:nvSpPr>
+          <p:cNvPr id="7" name="Shape 4"/>
+          <p:cNvSpPr/>
+          <p:nvPr/>
+        </p:nvSpPr>
+        <p:spPr>
+          <a:xfrm>
+            <a:off x="731520" y="1600200"/>
+            <a:ext cx="3246120" cy="411480"/>
+          </a:xfrm>
+          <a:prstGeom prst="roundRect">
+            <a:avLst>
+              <a:gd name="adj" fmla="val 17778"/>
+            </a:avLst>
+          </a:prstGeom>
+          <a:solidFill>
+            <a:srgbClr val="C9682B"/>
+          </a:solidFill>
+          <a:ln/>
+        </p:spPr>
+      </p:sp>
+      <p:sp>
+        <p:nvSpPr>
+          <p:cNvPr id="8" name="Text 5"/>
+          <p:cNvSpPr txBox="1"/>
+          <p:nvPr/>
+        </p:nvSpPr>
+        <p:spPr>
+          <a:xfrm>
+            <a:off x="731520" y="1600200"/>
+            <a:ext cx="3246120" cy="411480"/>
+          </a:xfrm>
+          <a:prstGeom prst="rect">
+            <a:avLst/>
+          </a:prstGeom>
+          <a:noFill/>
+          <a:ln/>
+        </p:spPr>
+        <p:txBody>
+          <a:bodyPr wrap="square" lIns="0" tIns="0" rIns="0" bIns="0" rtlCol="0" anchor="ctr"/>
+          <a:lstStyle/>
+          <a:p>
+            <a:pPr algn="ctr" indent="0" marL="0">
+              <a:buNone/>
+            </a:pPr>
+            <a:r>
+              <a:rPr lang="en-US" sz="1400" b="1" dirty="0">
+                <a:solidFill>
+                  <a:srgbClr val="FFFFFF"/>
+                </a:solidFill>
+                <a:latin typeface="Cambria" pitchFamily="34" charset="0"/>
+                <a:ea typeface="Cambria" pitchFamily="34" charset="-122"/>
+                <a:cs typeface="Cambria" pitchFamily="34" charset="-120"/>
+              </a:rPr>
+              <a:t>Lo construimos</a:t>
+            </a:r>
+            <a:endParaRPr lang="en-US" sz="1400" dirty="0"/>
+          </a:p>
+        </p:txBody>
+      </p:sp>
+      <p:sp>
+        <p:nvSpPr>
+          <p:cNvPr id="9" name="Text 6"/>
+          <p:cNvSpPr txBox="1"/>
+          <p:nvPr/>
+        </p:nvSpPr>
+        <p:spPr>
+          <a:xfrm>
+            <a:off x="777240" y="2194560"/>
+            <a:ext cx="3154680" cy="2286000"/>
           </a:xfrm>
           <a:prstGeom prst="rect">
             <a:avLst/>
@@ -7935,142 +9796,304 @@
           <a:p>
             <a:pPr marL="342900" indent="-342900">
               <a:spcAft>
-                <a:spcPts val="1200"/>
+                <a:spcPts val="1000"/>
               </a:spcAft>
               <a:buSzPct val="100000"/>
-              <a:buChar char="→"/>
-            </a:pPr>
-            <a:r>
-              <a:rPr lang="en-US" sz="1600" dirty="0">
-                <a:solidFill>
-                  <a:srgbClr val="EFE6DA"/>
-                </a:solidFill>
-                <a:latin typeface="Calibri" pitchFamily="34" charset="0"/>
-                <a:ea typeface="Calibri" pitchFamily="34" charset="-122"/>
-                <a:cs typeface="Calibri" pitchFamily="34" charset="-120"/>
-              </a:rPr>
-              <a:t>Terminar la pantalla de la Nevera (frontend con React + TypeScript)</a:t>
-            </a:r>
-            <a:endParaRPr lang="en-US" sz="1600" dirty="0"/>
+              <a:buChar char="•"/>
+            </a:pPr>
+            <a:r>
+              <a:rPr lang="en-US" sz="1150" dirty="0">
+                <a:solidFill>
+                  <a:srgbClr val="2E2119"/>
+                </a:solidFill>
+                <a:latin typeface="Calibri" pitchFamily="34" charset="0"/>
+                <a:ea typeface="Calibri" pitchFamily="34" charset="-122"/>
+                <a:cs typeface="Calibri" pitchFamily="34" charset="-120"/>
+              </a:rPr>
+              <a:t>Nevera: inventario + aviso de stock bajo</a:t>
+            </a:r>
+            <a:endParaRPr lang="en-US" sz="1150" dirty="0"/>
           </a:p>
           <a:p>
             <a:pPr marL="342900" indent="-342900">
               <a:spcAft>
-                <a:spcPts val="1200"/>
+                <a:spcPts val="1000"/>
               </a:spcAft>
               <a:buSzPct val="100000"/>
-              <a:buChar char="→"/>
-            </a:pPr>
-            <a:r>
-              <a:rPr lang="en-US" sz="1600" dirty="0">
-                <a:solidFill>
-                  <a:srgbClr val="EFE6DA"/>
-                </a:solidFill>
-                <a:latin typeface="Calibri" pitchFamily="34" charset="0"/>
-                <a:ea typeface="Calibri" pitchFamily="34" charset="-122"/>
-                <a:cs typeface="Calibri" pitchFamily="34" charset="-120"/>
-              </a:rPr>
-              <a:t>Lista de la compra con control de concurrencia real</a:t>
-            </a:r>
-            <a:endParaRPr lang="en-US" sz="1600" dirty="0"/>
+              <a:buChar char="•"/>
+            </a:pPr>
+            <a:r>
+              <a:rPr lang="en-US" sz="1150" dirty="0">
+                <a:solidFill>
+                  <a:srgbClr val="2E2119"/>
+                </a:solidFill>
+                <a:latin typeface="Calibri" pitchFamily="34" charset="0"/>
+                <a:ea typeface="Calibri" pitchFamily="34" charset="-122"/>
+                <a:cs typeface="Calibri" pitchFamily="34" charset="-120"/>
+              </a:rPr>
+              <a:t>Lista compartida con control de concurrencia</a:t>
+            </a:r>
+            <a:endParaRPr lang="en-US" sz="1150" dirty="0"/>
           </a:p>
           <a:p>
             <a:pPr marL="342900" indent="-342900">
               <a:spcAft>
-                <a:spcPts val="1200"/>
+                <a:spcPts val="1000"/>
               </a:spcAft>
               <a:buSzPct val="100000"/>
-              <a:buChar char="→"/>
-            </a:pPr>
-            <a:r>
-              <a:rPr lang="en-US" sz="1600" dirty="0">
-                <a:solidFill>
-                  <a:srgbClr val="EFE6DA"/>
-                </a:solidFill>
-                <a:latin typeface="Calibri" pitchFamily="34" charset="0"/>
-                <a:ea typeface="Calibri" pitchFamily="34" charset="-122"/>
-                <a:cs typeface="Calibri" pitchFamily="34" charset="-120"/>
-              </a:rPr>
-              <a:t>Instalar y parametrizar Odoo (catálogo + precios por tienda)</a:t>
-            </a:r>
-            <a:endParaRPr lang="en-US" sz="1600" dirty="0"/>
+              <a:buChar char="•"/>
+            </a:pPr>
+            <a:r>
+              <a:rPr lang="en-US" sz="1150" dirty="0">
+                <a:solidFill>
+                  <a:srgbClr val="2E2119"/>
+                </a:solidFill>
+                <a:latin typeface="Calibri" pitchFamily="34" charset="0"/>
+                <a:ea typeface="Calibri" pitchFamily="34" charset="-122"/>
+                <a:cs typeface="Calibri" pitchFamily="34" charset="-120"/>
+              </a:rPr>
+              <a:t>Historial + cálculo de quién debe a quién</a:t>
+            </a:r>
+            <a:endParaRPr lang="en-US" sz="1150" dirty="0"/>
           </a:p>
           <a:p>
             <a:pPr marL="342900" indent="-342900">
               <a:spcAft>
-                <a:spcPts val="1200"/>
+                <a:spcPts val="1000"/>
               </a:spcAft>
               <a:buSzPct val="100000"/>
-              <a:buChar char="→"/>
-            </a:pPr>
-            <a:r>
-              <a:rPr lang="en-US" sz="1600" dirty="0">
-                <a:solidFill>
-                  <a:srgbClr val="EFE6DA"/>
-                </a:solidFill>
-                <a:latin typeface="Calibri" pitchFamily="34" charset="0"/>
-                <a:ea typeface="Calibri" pitchFamily="34" charset="-122"/>
-                <a:cs typeface="Calibri" pitchFamily="34" charset="-120"/>
-              </a:rPr>
-              <a:t>Conectar el backend con la API de Odoo</a:t>
-            </a:r>
-            <a:endParaRPr lang="en-US" sz="1600" dirty="0"/>
-          </a:p>
+              <a:buChar char="•"/>
+            </a:pPr>
+            <a:r>
+              <a:rPr lang="en-US" sz="1150" dirty="0">
+                <a:solidFill>
+                  <a:srgbClr val="2E2119"/>
+                </a:solidFill>
+                <a:latin typeface="Calibri" pitchFamily="34" charset="0"/>
+                <a:ea typeface="Calibri" pitchFamily="34" charset="-122"/>
+                <a:cs typeface="Calibri" pitchFamily="34" charset="-120"/>
+              </a:rPr>
+              <a:t>Comparador de precios por tienda</a:t>
+            </a:r>
+            <a:endParaRPr lang="en-US" sz="1150" dirty="0"/>
+          </a:p>
+        </p:txBody>
+      </p:sp>
+      <p:sp>
+        <p:nvSpPr>
+          <p:cNvPr id="10" name="Shape 7"/>
+          <p:cNvSpPr/>
+          <p:nvPr/>
+        </p:nvSpPr>
+        <p:spPr>
+          <a:xfrm>
+            <a:off x="4297680" y="1417320"/>
+            <a:ext cx="3611880" cy="3246120"/>
+          </a:xfrm>
+          <a:prstGeom prst="roundRect">
+            <a:avLst>
+              <a:gd name="adj" fmla="val 3380"/>
+            </a:avLst>
+          </a:prstGeom>
+          <a:solidFill>
+            <a:srgbClr val="F4EFE8"/>
+          </a:solidFill>
+          <a:ln/>
+          <a:effectLst>
+            <a:outerShdw sx="100000" sy="100000" kx="0" ky="0" algn="bl" rotWithShape="0" blurRad="76200" dist="25400" dir="5400000">
+              <a:srgbClr val="000000">
+                <a:alpha val="12000"/>
+              </a:srgbClr>
+            </a:outerShdw>
+          </a:effectLst>
+        </p:spPr>
+      </p:sp>
+      <p:sp>
+        <p:nvSpPr>
+          <p:cNvPr id="11" name="Shape 8"/>
+          <p:cNvSpPr/>
+          <p:nvPr/>
+        </p:nvSpPr>
+        <p:spPr>
+          <a:xfrm>
+            <a:off x="4480560" y="1600200"/>
+            <a:ext cx="3246120" cy="411480"/>
+          </a:xfrm>
+          <a:prstGeom prst="roundRect">
+            <a:avLst>
+              <a:gd name="adj" fmla="val 17778"/>
+            </a:avLst>
+          </a:prstGeom>
+          <a:solidFill>
+            <a:srgbClr val="D9A441"/>
+          </a:solidFill>
+          <a:ln/>
+        </p:spPr>
+      </p:sp>
+      <p:sp>
+        <p:nvSpPr>
+          <p:cNvPr id="12" name="Text 9"/>
+          <p:cNvSpPr txBox="1"/>
+          <p:nvPr/>
+        </p:nvSpPr>
+        <p:spPr>
+          <a:xfrm>
+            <a:off x="4480560" y="1600200"/>
+            <a:ext cx="3246120" cy="411480"/>
+          </a:xfrm>
+          <a:prstGeom prst="rect">
+            <a:avLst/>
+          </a:prstGeom>
+          <a:noFill/>
+          <a:ln/>
+        </p:spPr>
+        <p:txBody>
+          <a:bodyPr wrap="square" lIns="0" tIns="0" rIns="0" bIns="0" rtlCol="0" anchor="ctr"/>
+          <a:lstStyle/>
+          <a:p>
+            <a:pPr algn="ctr" indent="0" marL="0">
+              <a:buNone/>
+            </a:pPr>
+            <a:r>
+              <a:rPr lang="en-US" sz="1400" b="1" dirty="0">
+                <a:solidFill>
+                  <a:srgbClr val="FFFFFF"/>
+                </a:solidFill>
+                <a:latin typeface="Cambria" pitchFamily="34" charset="0"/>
+                <a:ea typeface="Cambria" pitchFamily="34" charset="-122"/>
+                <a:cs typeface="Cambria" pitchFamily="34" charset="-120"/>
+              </a:rPr>
+              <a:t>Lo hace Odoo (ERP)</a:t>
+            </a:r>
+            <a:endParaRPr lang="en-US" sz="1400" dirty="0"/>
+          </a:p>
+        </p:txBody>
+      </p:sp>
+      <p:sp>
+        <p:nvSpPr>
+          <p:cNvPr id="13" name="Text 10"/>
+          <p:cNvSpPr txBox="1"/>
+          <p:nvPr/>
+        </p:nvSpPr>
+        <p:spPr>
+          <a:xfrm>
+            <a:off x="4526280" y="2194560"/>
+            <a:ext cx="3154680" cy="2286000"/>
+          </a:xfrm>
+          <a:prstGeom prst="rect">
+            <a:avLst/>
+          </a:prstGeom>
+          <a:noFill/>
+          <a:ln/>
+        </p:spPr>
+        <p:txBody>
+          <a:bodyPr wrap="square" lIns="0" tIns="0" rIns="0" bIns="0" rtlCol="0" anchor="t"/>
+          <a:lstStyle/>
           <a:p>
             <a:pPr marL="342900" indent="-342900">
               <a:spcAft>
-                <a:spcPts val="1200"/>
+                <a:spcPts val="1000"/>
               </a:spcAft>
               <a:buSzPct val="100000"/>
-              <a:buChar char="→"/>
-            </a:pPr>
-            <a:r>
-              <a:rPr lang="en-US" sz="1600" dirty="0">
-                <a:solidFill>
-                  <a:srgbClr val="EFE6DA"/>
-                </a:solidFill>
-                <a:latin typeface="Calibri" pitchFamily="34" charset="0"/>
-                <a:ea typeface="Calibri" pitchFamily="34" charset="-122"/>
-                <a:cs typeface="Calibri" pitchFamily="34" charset="-120"/>
-              </a:rPr>
-              <a:t>Historial de gasto y comparador de precios</a:t>
-            </a:r>
-            <a:endParaRPr lang="en-US" sz="1600" dirty="0"/>
-          </a:p>
-        </p:txBody>
-      </p:sp>
-      <p:sp>
-        <p:nvSpPr>
-          <p:cNvPr id="6" name="Shape 3"/>
+              <a:buChar char="•"/>
+            </a:pPr>
+            <a:r>
+              <a:rPr lang="en-US" sz="1150" dirty="0">
+                <a:solidFill>
+                  <a:srgbClr val="2E2119"/>
+                </a:solidFill>
+                <a:latin typeface="Calibri" pitchFamily="34" charset="0"/>
+                <a:ea typeface="Calibri" pitchFamily="34" charset="-122"/>
+                <a:cs typeface="Calibri" pitchFamily="34" charset="-120"/>
+              </a:rPr>
+              <a:t>Catálogo de productos y precios por tienda (Pricelists)</a:t>
+            </a:r>
+            <a:endParaRPr lang="en-US" sz="1150" dirty="0"/>
+          </a:p>
+          <a:p>
+            <a:pPr marL="342900" indent="-342900">
+              <a:spcAft>
+                <a:spcPts val="1000"/>
+              </a:spcAft>
+              <a:buSzPct val="100000"/>
+              <a:buChar char="•"/>
+            </a:pPr>
+            <a:r>
+              <a:rPr lang="en-US" sz="1150" dirty="0">
+                <a:solidFill>
+                  <a:srgbClr val="2E2119"/>
+                </a:solidFill>
+                <a:latin typeface="Calibri" pitchFamily="34" charset="0"/>
+                <a:ea typeface="Calibri" pitchFamily="34" charset="-122"/>
+                <a:cs typeface="Calibri" pitchFamily="34" charset="-120"/>
+              </a:rPr>
+              <a:t>Facturación real de la suscripción, si se cobrase algún día</a:t>
+            </a:r>
+            <a:endParaRPr lang="en-US" sz="1150" dirty="0"/>
+          </a:p>
+        </p:txBody>
+      </p:sp>
+      <p:sp>
+        <p:nvSpPr>
+          <p:cNvPr id="14" name="Shape 11"/>
           <p:cNvSpPr/>
           <p:nvPr/>
         </p:nvSpPr>
         <p:spPr>
           <a:xfrm>
-            <a:off x="822960" y="5806440"/>
-            <a:ext cx="7772400" cy="640080"/>
+            <a:off x="8046720" y="1417320"/>
+            <a:ext cx="3611880" cy="3246120"/>
           </a:xfrm>
           <a:prstGeom prst="roundRect">
             <a:avLst>
-              <a:gd name="adj" fmla="val 11429"/>
+              <a:gd name="adj" fmla="val 3380"/>
             </a:avLst>
           </a:prstGeom>
           <a:solidFill>
-            <a:srgbClr val="3D2E23"/>
+            <a:srgbClr val="F4EFE8"/>
           </a:solidFill>
           <a:ln/>
-        </p:spPr>
-      </p:sp>
-      <p:sp>
-        <p:nvSpPr>
-          <p:cNvPr id="7" name="Text 4"/>
-          <p:cNvSpPr txBox="1"/>
-          <p:nvPr/>
-        </p:nvSpPr>
-        <p:spPr>
-          <a:xfrm>
-            <a:off x="1051560" y="5806440"/>
-            <a:ext cx="7315200" cy="640080"/>
+          <a:effectLst>
+            <a:outerShdw sx="100000" sy="100000" kx="0" ky="0" algn="bl" rotWithShape="0" blurRad="76200" dist="25400" dir="5400000">
+              <a:srgbClr val="000000">
+                <a:alpha val="12000"/>
+              </a:srgbClr>
+            </a:outerShdw>
+          </a:effectLst>
+        </p:spPr>
+      </p:sp>
+      <p:sp>
+        <p:nvSpPr>
+          <p:cNvPr id="15" name="Shape 12"/>
+          <p:cNvSpPr/>
+          <p:nvPr/>
+        </p:nvSpPr>
+        <p:spPr>
+          <a:xfrm>
+            <a:off x="8229600" y="1600200"/>
+            <a:ext cx="3246120" cy="411480"/>
+          </a:xfrm>
+          <a:prstGeom prst="roundRect">
+            <a:avLst>
+              <a:gd name="adj" fmla="val 17778"/>
+            </a:avLst>
+          </a:prstGeom>
+          <a:solidFill>
+            <a:srgbClr val="8A7A6D"/>
+          </a:solidFill>
+          <a:ln/>
+        </p:spPr>
+      </p:sp>
+      <p:sp>
+        <p:nvSpPr>
+          <p:cNvPr id="16" name="Text 13"/>
+          <p:cNvSpPr txBox="1"/>
+          <p:nvPr/>
+        </p:nvSpPr>
+        <p:spPr>
+          <a:xfrm>
+            <a:off x="8229600" y="1600200"/>
+            <a:ext cx="3246120" cy="411480"/>
           </a:xfrm>
           <a:prstGeom prst="rect">
             <a:avLst/>
@@ -8082,11 +10105,178 @@
           <a:bodyPr wrap="square" lIns="0" tIns="0" rIns="0" bIns="0" rtlCol="0" anchor="ctr"/>
           <a:lstStyle/>
           <a:p>
-            <a:pPr indent="0" marL="0">
-              <a:buNone/>
-            </a:pPr>
-            <a:r>
-              <a:rPr lang="en-US" sz="1250" i="1" dirty="0">
+            <a:pPr algn="ctr" indent="0" marL="0">
+              <a:buNone/>
+            </a:pPr>
+            <a:r>
+              <a:rPr lang="en-US" sz="1400" b="1" dirty="0">
+                <a:solidFill>
+                  <a:srgbClr val="FFFFFF"/>
+                </a:solidFill>
+                <a:latin typeface="Cambria" pitchFamily="34" charset="0"/>
+                <a:ea typeface="Cambria" pitchFamily="34" charset="-122"/>
+                <a:cs typeface="Cambria" pitchFamily="34" charset="-120"/>
+              </a:rPr>
+              <a:t>No se hace este curso</a:t>
+            </a:r>
+            <a:endParaRPr lang="en-US" sz="1400" dirty="0"/>
+          </a:p>
+        </p:txBody>
+      </p:sp>
+      <p:sp>
+        <p:nvSpPr>
+          <p:cNvPr id="17" name="Text 14"/>
+          <p:cNvSpPr txBox="1"/>
+          <p:nvPr/>
+        </p:nvSpPr>
+        <p:spPr>
+          <a:xfrm>
+            <a:off x="8275320" y="2194560"/>
+            <a:ext cx="3154680" cy="2286000"/>
+          </a:xfrm>
+          <a:prstGeom prst="rect">
+            <a:avLst/>
+          </a:prstGeom>
+          <a:noFill/>
+          <a:ln/>
+        </p:spPr>
+        <p:txBody>
+          <a:bodyPr wrap="square" lIns="0" tIns="0" rIns="0" bIns="0" rtlCol="0" anchor="t"/>
+          <a:lstStyle/>
+          <a:p>
+            <a:pPr marL="342900" indent="-342900">
+              <a:spcAft>
+                <a:spcPts val="1000"/>
+              </a:spcAft>
+              <a:buSzPct val="100000"/>
+              <a:buChar char="•"/>
+            </a:pPr>
+            <a:r>
+              <a:rPr lang="en-US" sz="1150" dirty="0">
+                <a:solidFill>
+                  <a:srgbClr val="2E2119"/>
+                </a:solidFill>
+                <a:latin typeface="Calibri" pitchFamily="34" charset="0"/>
+                <a:ea typeface="Calibri" pitchFamily="34" charset="-122"/>
+                <a:cs typeface="Calibri" pitchFamily="34" charset="-120"/>
+              </a:rPr>
+              <a:t>Escaneo de código de barras</a:t>
+            </a:r>
+            <a:endParaRPr lang="en-US" sz="1150" dirty="0"/>
+          </a:p>
+          <a:p>
+            <a:pPr marL="342900" indent="-342900">
+              <a:spcAft>
+                <a:spcPts val="1000"/>
+              </a:spcAft>
+              <a:buSzPct val="100000"/>
+              <a:buChar char="•"/>
+            </a:pPr>
+            <a:r>
+              <a:rPr lang="en-US" sz="1150" dirty="0">
+                <a:solidFill>
+                  <a:srgbClr val="2E2119"/>
+                </a:solidFill>
+                <a:latin typeface="Calibri" pitchFamily="34" charset="0"/>
+                <a:ea typeface="Calibri" pitchFamily="34" charset="-122"/>
+                <a:cs typeface="Calibri" pitchFamily="34" charset="-120"/>
+              </a:rPr>
+              <a:t>Cobro real con tarjeta</a:t>
+            </a:r>
+            <a:endParaRPr lang="en-US" sz="1150" dirty="0"/>
+          </a:p>
+          <a:p>
+            <a:pPr marL="342900" indent="-342900">
+              <a:spcAft>
+                <a:spcPts val="1000"/>
+              </a:spcAft>
+              <a:buSzPct val="100000"/>
+              <a:buChar char="•"/>
+            </a:pPr>
+            <a:r>
+              <a:rPr lang="en-US" sz="1150" dirty="0">
+                <a:solidFill>
+                  <a:srgbClr val="2E2119"/>
+                </a:solidFill>
+                <a:latin typeface="Calibri" pitchFamily="34" charset="0"/>
+                <a:ea typeface="Calibri" pitchFamily="34" charset="-122"/>
+                <a:cs typeface="Calibri" pitchFamily="34" charset="-120"/>
+              </a:rPr>
+              <a:t>Notificaciones push</a:t>
+            </a:r>
+            <a:endParaRPr lang="en-US" sz="1150" dirty="0"/>
+          </a:p>
+          <a:p>
+            <a:pPr marL="342900" indent="-342900">
+              <a:spcAft>
+                <a:spcPts val="1000"/>
+              </a:spcAft>
+              <a:buSzPct val="100000"/>
+              <a:buChar char="•"/>
+            </a:pPr>
+            <a:r>
+              <a:rPr lang="en-US" sz="1150" dirty="0">
+                <a:solidFill>
+                  <a:srgbClr val="2E2119"/>
+                </a:solidFill>
+                <a:latin typeface="Calibri" pitchFamily="34" charset="0"/>
+                <a:ea typeface="Calibri" pitchFamily="34" charset="-122"/>
+                <a:cs typeface="Calibri" pitchFamily="34" charset="-120"/>
+              </a:rPr>
+              <a:t>Liquidar deudas de verdad</a:t>
+            </a:r>
+            <a:endParaRPr lang="en-US" sz="1150" dirty="0"/>
+          </a:p>
+        </p:txBody>
+      </p:sp>
+      <p:sp>
+        <p:nvSpPr>
+          <p:cNvPr id="18" name="Shape 15"/>
+          <p:cNvSpPr/>
+          <p:nvPr/>
+        </p:nvSpPr>
+        <p:spPr>
+          <a:xfrm>
+            <a:off x="548640" y="4846320"/>
+            <a:ext cx="11064240" cy="1417320"/>
+          </a:xfrm>
+          <a:prstGeom prst="roundRect">
+            <a:avLst>
+              <a:gd name="adj" fmla="val 7742"/>
+            </a:avLst>
+          </a:prstGeom>
+          <a:solidFill>
+            <a:srgbClr val="2E2119"/>
+          </a:solidFill>
+          <a:ln/>
+        </p:spPr>
+      </p:sp>
+      <p:sp>
+        <p:nvSpPr>
+          <p:cNvPr id="19" name="Text 16"/>
+          <p:cNvSpPr txBox="1"/>
+          <p:nvPr/>
+        </p:nvSpPr>
+        <p:spPr>
+          <a:xfrm>
+            <a:off x="868680" y="4956048"/>
+            <a:ext cx="10424160" cy="914400"/>
+          </a:xfrm>
+          <a:prstGeom prst="rect">
+            <a:avLst/>
+          </a:prstGeom>
+          <a:noFill/>
+          <a:ln/>
+        </p:spPr>
+        <p:txBody>
+          <a:bodyPr wrap="square" lIns="0" tIns="0" rIns="0" bIns="0" rtlCol="0" anchor="ctr"/>
+          <a:lstStyle/>
+          <a:p>
+            <a:pPr indent="0" marL="0">
+              <a:buNone/>
+            </a:pPr>
+            <a:r>
+              <a:rPr lang="en-US" sz="1300" i="1" dirty="0">
                 <a:solidFill>
                   <a:srgbClr val="D9A441"/>
                 </a:solidFill>
@@ -8094,9 +10284,48 @@
                 <a:ea typeface="Calibri" pitchFamily="34" charset="-122"/>
                 <a:cs typeface="Calibri" pitchFamily="34" charset="-120"/>
               </a:rPr>
-              <a:t>Entrega viernes: idea validada, con números y decisiones que se pueden defender.</a:t>
-            </a:r>
-            <a:endParaRPr lang="en-US" sz="1250" dirty="0"/>
+              <a:t>"En P1, un hogar de A Coruña controla su nevera y organiza la lista de la compra compartida sin usar el grupo de WhatsApp, y puede consultar su historial de gasto repartido y comparar precios entre tiendas."</a:t>
+            </a:r>
+            <a:endParaRPr lang="en-US" sz="1300" dirty="0"/>
+          </a:p>
+        </p:txBody>
+      </p:sp>
+      <p:sp>
+        <p:nvSpPr>
+          <p:cNvPr id="20" name="Text 17"/>
+          <p:cNvSpPr txBox="1"/>
+          <p:nvPr/>
+        </p:nvSpPr>
+        <p:spPr>
+          <a:xfrm>
+            <a:off x="868680" y="5852160"/>
+            <a:ext cx="10424160" cy="320040"/>
+          </a:xfrm>
+          <a:prstGeom prst="rect">
+            <a:avLst/>
+          </a:prstGeom>
+          <a:noFill/>
+          <a:ln/>
+        </p:spPr>
+        <p:txBody>
+          <a:bodyPr wrap="square" lIns="0" tIns="0" rIns="0" bIns="0" rtlCol="0" anchor="ctr"/>
+          <a:lstStyle/>
+          <a:p>
+            <a:pPr indent="0" marL="0">
+              <a:buNone/>
+            </a:pPr>
+            <a:r>
+              <a:rPr lang="en-US" sz="1100" dirty="0">
+                <a:solidFill>
+                  <a:srgbClr val="D8CBBE"/>
+                </a:solidFill>
+                <a:latin typeface="Calibri" pitchFamily="34" charset="0"/>
+                <a:ea typeface="Calibri" pitchFamily="34" charset="-122"/>
+                <a:cs typeface="Calibri" pitchFamily="34" charset="-120"/>
+              </a:rPr>
+              <a:t>Orden de construcción: Nevera → Lista (concurrencia) → Historial → Precios</a:t>
+            </a:r>
+            <a:endParaRPr lang="en-US" sz="1100" dirty="0"/>
           </a:p>
         </p:txBody>
       </p:sp>

--- a/docs/larder-presentacion.pptx
+++ b/docs/larder-presentacion.pptx
@@ -1040,7 +1040,7 @@
           <a:p>
             <a:r>
               <a:rPr lang="en-US" dirty="0"/>
-              <a:t>n=12. Punto clave que pidio Nadia remarcar: la gente no usa apps de listas (0/12), y eso a pesar de que Bring!/AnyList existen y de que "una app especifica" era una opcion de respuesta explicita en la propia pregunta 3 -- nadie la marco. Esto no invalida la idea: valida que el problema no es "falta una app", sino que las que hay no logran adopcion real. Los dos stats de dolor (75% duplico, 75% volvio a la tienda) bajaron un poco respecto a n=11 (82%/73%), como es esperable con muestra pequena -- se anade el dato conjunto (50% sufrio ambas cosas el mismo mes) como refuerzo.</a:t>
+              <a:t>n=19. Cambio importante respecto a la version anterior (n=12): hasta entonces nadie habia probado una app; con estas 7 respuestas nuevas aparecen 2 personas que si (Bring!, "Notas" -- esta ultima ambigua). Se actualizo el titular honestamente en vez de mantener el "0/12 nadie" que ya no era cierto. El dato que SI se mantiene y es mas fuerte que antes: 0/19 usa una app HOY como metodo (Pregunta 3) -- las 2 que la probaron la abandonaron. Quien probo Bring lo explica el mismo: fallo por falta de cooperacion de sus companeros de piso, lo cual refuerza en vez de contradecir la tesis central. Los stats de dolor bajaron una pizca (75%-&gt;74%) por la muestra mas grande, y se anade el dato conjunto (53%, 10/19) sufrio ambas cosas el mismo mes.</a:t>
             </a:r>
             <a:endParaRPr lang="en-US" dirty="0"/>
           </a:p>
@@ -1128,7 +1128,7 @@
           <a:p>
             <a:r>
               <a:rPr lang="en-US" dirty="0"/>
-              <a:t>Categorizacion pedida explicitamente: "no se quien compro que" cuenta para AMBAS columnas (coop + tracker de gastos), "no saber que quieren los otros"/"comen mis cosas" es coop puro, "no participan/tardan en pagar" es tracker de gastos puro. El 33% de coop y el 33% de "no llevamos cuenta" en la P8 son numeros independientes que apuntan al mismo sitio: History no es una funcion añadida sin motivo.</a:t>
+              <a:t>Actualizado a n=19. Categorizacion pedida explicitamente: "no se quien compro que" cuenta para AMBAS columnas (coop + tracker de gastos), "no saber que quieren los otros"/"comen mis cosas"/"compran cosas que no quiero" es coop puro, "no participan/tardan en pagar" es tracker de gastos puro. El 26% de coop y el 37% de "no llevamos cuenta" en la P8 son numeros independientes que apuntan al mismo sitio: History no es una funcion añadida sin motivo. (Dos menciones espontaneas al precio -- "esta todo carisimo", "comprar es caro" -- se documentaron en ideacion.md pero no entraron en esta diapositiva para no forzar el layout; son una senal a favor de Prices, no de Fridge/List/History.)</a:t>
             </a:r>
             <a:endParaRPr lang="en-US" dirty="0"/>
           </a:p>
@@ -5896,7 +5896,7 @@
                 <a:ea typeface="Cambria" pitchFamily="34" charset="-122"/>
                 <a:cs typeface="Cambria" pitchFamily="34" charset="-120"/>
               </a:rPr>
-              <a:t>La encuesta confirma el hueco (n=12)</a:t>
+              <a:t>La encuesta confirma el hueco (n=19)</a:t>
             </a:r>
             <a:endParaRPr lang="en-US" sz="2800" dirty="0"/>
           </a:p>
@@ -5935,7 +5935,7 @@
                 <a:ea typeface="Calibri" pitchFamily="34" charset="-122"/>
                 <a:cs typeface="Calibri" pitchFamily="34" charset="-120"/>
               </a:rPr>
-              <a:t>Encuesta bilingüe (ES/EN), 9 preguntas sobre hechos del último mes — no opiniones sobre una app futura. 12 respuestas reales recogidas.</a:t>
+              <a:t>Encuesta bilingüe (ES/EN), 9 preguntas sobre hechos del último mes — no opiniones sobre una app futura. 19 respuestas reales recogidas.</a:t>
             </a:r>
             <a:endParaRPr lang="en-US" sz="1000" dirty="0"/>
           </a:p>
@@ -5996,7 +5996,7 @@
                 <a:ea typeface="Cambria" pitchFamily="34" charset="-122"/>
                 <a:cs typeface="Cambria" pitchFamily="34" charset="-120"/>
               </a:rPr>
-              <a:t>0/12</a:t>
+              <a:t>0/19</a:t>
             </a:r>
             <a:endParaRPr lang="en-US" sz="3000" dirty="0"/>
           </a:p>
@@ -6035,7 +6035,7 @@
                 <a:ea typeface="Calibri" pitchFamily="34" charset="-122"/>
                 <a:cs typeface="Calibri" pitchFamily="34" charset="-120"/>
               </a:rPr>
-              <a:t>ha probado alguna app específica de listas — aunque podían elegirla como método (ver abajo)</a:t>
+              <a:t>usa hoy una app específica como método — aunque 2 personas SÍ la probaron alguna vez (ver abajo)</a:t>
             </a:r>
             <a:endParaRPr lang="en-US" sz="1000" dirty="0"/>
           </a:p>
@@ -6096,7 +6096,7 @@
                 <a:ea typeface="Cambria" pitchFamily="34" charset="-122"/>
                 <a:cs typeface="Cambria" pitchFamily="34" charset="-120"/>
               </a:rPr>
-              <a:t>75%</a:t>
+              <a:t>74%</a:t>
             </a:r>
             <a:endParaRPr lang="en-US" sz="3000" dirty="0"/>
           </a:p>
@@ -6196,7 +6196,7 @@
                 <a:ea typeface="Cambria" pitchFamily="34" charset="-122"/>
                 <a:cs typeface="Cambria" pitchFamily="34" charset="-120"/>
               </a:rPr>
-              <a:t>75%</a:t>
+              <a:t>74%</a:t>
             </a:r>
             <a:endParaRPr lang="en-US" sz="3000" dirty="0"/>
           </a:p>
@@ -6274,7 +6274,7 @@
                 <a:ea typeface="Calibri" pitchFamily="34" charset="-122"/>
                 <a:cs typeface="Calibri" pitchFamily="34" charset="-120"/>
               </a:rPr>
-              <a:t>El 50% (6 de 12 personas) sufrió ambas cosas — compró duplicado y volvió a la tienda — en el mismo mes.</a:t>
+              <a:t>El 53% (10 de 19 personas) sufrió ambas cosas — compró duplicado y volvió a la tienda — en el mismo mes.</a:t>
             </a:r>
             <a:endParaRPr lang="en-US" sz="1150" dirty="0"/>
           </a:p>
@@ -6464,7 +6464,7 @@
                 <a:ea typeface="Calibri" pitchFamily="34" charset="-122"/>
                 <a:cs typeface="Calibri" pitchFamily="34" charset="-120"/>
               </a:rPr>
-              <a:t>5</a:t>
+              <a:t>7</a:t>
             </a:r>
             <a:endParaRPr lang="en-US" sz="1100" dirty="0"/>
           </a:p>
@@ -6540,7 +6540,7 @@
         <p:spPr>
           <a:xfrm>
             <a:off x="2788920" y="3986784"/>
-            <a:ext cx="2852928" cy="219456"/>
+            <a:ext cx="3056709" cy="219456"/>
           </a:xfrm>
           <a:prstGeom prst="roundRect">
             <a:avLst>
@@ -6586,7 +6586,7 @@
                 <a:ea typeface="Calibri" pitchFamily="34" charset="-122"/>
                 <a:cs typeface="Calibri" pitchFamily="34" charset="-120"/>
               </a:rPr>
-              <a:t>4</a:t>
+              <a:t>6</a:t>
             </a:r>
             <a:endParaRPr lang="en-US" sz="1100" dirty="0"/>
           </a:p>
@@ -6662,7 +6662,7 @@
         <p:spPr>
           <a:xfrm>
             <a:off x="2788920" y="4297680"/>
-            <a:ext cx="1426464" cy="219456"/>
+            <a:ext cx="2547257" cy="219456"/>
           </a:xfrm>
           <a:prstGeom prst="roundRect">
             <a:avLst>
@@ -6708,7 +6708,7 @@
                 <a:ea typeface="Calibri" pitchFamily="34" charset="-122"/>
                 <a:cs typeface="Calibri" pitchFamily="34" charset="-120"/>
               </a:rPr>
-              <a:t>2</a:t>
+              <a:t>5</a:t>
             </a:r>
             <a:endParaRPr lang="en-US" sz="1100" dirty="0"/>
           </a:p>
@@ -6784,7 +6784,7 @@
         <p:spPr>
           <a:xfrm>
             <a:off x="2788920" y="4608576"/>
-            <a:ext cx="713232" cy="219456"/>
+            <a:ext cx="509451" cy="219456"/>
           </a:xfrm>
           <a:prstGeom prst="roundRect">
             <a:avLst>
@@ -6969,7 +6969,7 @@
                 <a:ea typeface="Calibri" pitchFamily="34" charset="-122"/>
                 <a:cs typeface="Calibri" pitchFamily="34" charset="-120"/>
               </a:rPr>
-              <a:t>↑ opción disponible desde el primer momento — nadie la eligió</a:t>
+              <a:t>↑ 2 personas la probaron alguna vez (Pregunta 7) — pero 0/19 la usa hoy: la abandonaron</a:t>
             </a:r>
             <a:endParaRPr lang="en-US" sz="950" dirty="0"/>
           </a:p>
@@ -7038,7 +7038,7 @@
                 <a:ea typeface="Calibri" pitchFamily="34" charset="-122"/>
                 <a:cs typeface="Calibri" pitchFamily="34" charset="-120"/>
               </a:rPr>
-              <a:t>Las apps no son el problema — la adopción sí.  </a:t>
+              <a:t>Las apps no son el problema — la retención sí.  </a:t>
             </a:r>
             <a:endParaRPr lang="en-US" sz="1150" dirty="0"/>
           </a:p>
@@ -7055,7 +7055,7 @@
                 <a:ea typeface="Calibri" pitchFamily="34" charset="-122"/>
                 <a:cs typeface="Calibri" pitchFamily="34" charset="-120"/>
               </a:rPr>
-              <a:t>Bring! y AnyList llevan años disponibles y son razonablemente buenas (estado del arte, diapositiva anterior). Aun así, 0 de 12 personas las ha probado nunca, ni al escoger su método actual. El hueco no está en construir "una app más" — está en resolver por qué ninguna de las que ya existen consigue ni el primer uso.</a:t>
+              <a:t>Bring! y AnyList llevan años disponibles y son razonablemente buenas (estado del arte, diapositiva anterior). 2 de 19 personas confirman haberlas probado — pero ninguna las usa hoy. Quien probó Bring! lo explica sin que se le pregunte: "porque si no colaboran los demás... pues mal vamos". El hueco no está en construir "una app más" — está en resolver por qué las que existen no retienen ni a quien sí las prueba.</a:t>
             </a:r>
             <a:endParaRPr lang="en-US" sz="1150" dirty="0"/>
           </a:p>
@@ -7355,7 +7355,7 @@
                 <a:ea typeface="Calibri" pitchFamily="34" charset="-122"/>
                 <a:cs typeface="Calibri" pitchFamily="34" charset="-120"/>
               </a:rPr>
-              <a:t>4 de 12 personas (33%) — sin que se les preguntara</a:t>
+              <a:t>5 de 19 personas (26%) — sin que se les preguntara</a:t>
             </a:r>
             <a:endParaRPr lang="en-US" sz="1050" dirty="0"/>
           </a:p>
@@ -7370,7 +7370,7 @@
         <p:spPr>
           <a:xfrm>
             <a:off x="822960" y="2286000"/>
-            <a:ext cx="5029200" cy="3200400"/>
+            <a:ext cx="5029200" cy="3291840"/>
           </a:xfrm>
           <a:prstGeom prst="rect">
             <a:avLst/>
@@ -7384,13 +7384,13 @@
           <a:p>
             <a:pPr marL="342900" indent="-342900">
               <a:spcAft>
-                <a:spcPts val="1000"/>
+                <a:spcPts val="800"/>
               </a:spcAft>
               <a:buSzPct val="100000"/>
               <a:buChar char="•"/>
             </a:pPr>
             <a:r>
-              <a:rPr lang="en-US" sz="1200" i="1" dirty="0">
+              <a:rPr lang="en-US" sz="1150" i="1" dirty="0">
                 <a:solidFill>
                   <a:srgbClr val="2E2119"/>
                 </a:solidFill>
@@ -7400,18 +7400,18 @@
               </a:rPr>
               <a:t>"I don’t know who bought what"</a:t>
             </a:r>
-            <a:endParaRPr lang="en-US" sz="1200" dirty="0"/>
+            <a:endParaRPr lang="en-US" sz="1150" dirty="0"/>
           </a:p>
           <a:p>
             <a:pPr marL="342900" indent="-342900">
               <a:spcAft>
-                <a:spcPts val="1000"/>
+                <a:spcPts val="800"/>
               </a:spcAft>
               <a:buSzPct val="100000"/>
               <a:buChar char="•"/>
             </a:pPr>
             <a:r>
-              <a:rPr lang="en-US" sz="1200" i="1" dirty="0">
+              <a:rPr lang="en-US" sz="1150" i="1" dirty="0">
                 <a:solidFill>
                   <a:srgbClr val="2E2119"/>
                 </a:solidFill>
@@ -7421,18 +7421,18 @@
               </a:rPr>
               <a:t>"Not knowing what the others want, the others eating my stuff"</a:t>
             </a:r>
-            <a:endParaRPr lang="en-US" sz="1200" dirty="0"/>
+            <a:endParaRPr lang="en-US" sz="1150" dirty="0"/>
           </a:p>
           <a:p>
             <a:pPr marL="342900" indent="-342900">
               <a:spcAft>
-                <a:spcPts val="1000"/>
+                <a:spcPts val="800"/>
               </a:spcAft>
               <a:buSzPct val="100000"/>
               <a:buChar char="•"/>
             </a:pPr>
             <a:r>
-              <a:rPr lang="en-US" sz="1200" i="1" dirty="0">
+              <a:rPr lang="en-US" sz="1150" i="1" dirty="0">
                 <a:solidFill>
                   <a:srgbClr val="2E2119"/>
                 </a:solidFill>
@@ -7442,18 +7442,18 @@
               </a:rPr>
               <a:t>"When people use the food I planned to use in a meal for myself... so I have to use something else"</a:t>
             </a:r>
-            <a:endParaRPr lang="en-US" sz="1200" dirty="0"/>
+            <a:endParaRPr lang="en-US" sz="1150" dirty="0"/>
           </a:p>
           <a:p>
             <a:pPr marL="342900" indent="-342900">
               <a:spcAft>
-                <a:spcPts val="1000"/>
+                <a:spcPts val="800"/>
               </a:spcAft>
               <a:buSzPct val="100000"/>
               <a:buChar char="•"/>
             </a:pPr>
             <a:r>
-              <a:rPr lang="en-US" sz="1200" i="1" dirty="0">
+              <a:rPr lang="en-US" sz="1150" i="1" dirty="0">
                 <a:solidFill>
                   <a:srgbClr val="2E2119"/>
                 </a:solidFill>
@@ -7463,7 +7463,28 @@
               </a:rPr>
               <a:t>"Not knowing if someone bought something just for themself"</a:t>
             </a:r>
-            <a:endParaRPr lang="en-US" sz="1200" dirty="0"/>
+            <a:endParaRPr lang="en-US" sz="1150" dirty="0"/>
+          </a:p>
+          <a:p>
+            <a:pPr marL="342900" indent="-342900">
+              <a:spcAft>
+                <a:spcPts val="800"/>
+              </a:spcAft>
+              <a:buSzPct val="100000"/>
+              <a:buChar char="•"/>
+            </a:pPr>
+            <a:r>
+              <a:rPr lang="en-US" sz="1150" i="1" dirty="0">
+                <a:solidFill>
+                  <a:srgbClr val="2E2119"/>
+                </a:solidFill>
+                <a:latin typeface="Calibri" pitchFamily="34" charset="0"/>
+                <a:ea typeface="Calibri" pitchFamily="34" charset="-122"/>
+                <a:cs typeface="Calibri" pitchFamily="34" charset="-120"/>
+              </a:rPr>
+              <a:t>"Que compran cosas que no quiero"</a:t>
+            </a:r>
+            <a:endParaRPr lang="en-US" sz="1150" dirty="0"/>
           </a:p>
         </p:txBody>
       </p:sp>
@@ -7568,7 +7589,7 @@
                 <a:ea typeface="Calibri" pitchFamily="34" charset="-122"/>
                 <a:cs typeface="Calibri" pitchFamily="34" charset="-120"/>
               </a:rPr>
-              <a:t>2 menciones espontáneas + 4/12 (33%) dice en la Pregunta 8 que no llevan cuenta</a:t>
+              <a:t>2 menciones espontáneas + 7/19 (37%) dice en la Pregunta 8 que no llevan cuenta</a:t>
             </a:r>
             <a:endParaRPr lang="en-US" sz="1050" dirty="0"/>
           </a:p>

--- a/docs/larder-presentacion.pptx
+++ b/docs/larder-presentacion.pptx
@@ -1040,7 +1040,7 @@
           <a:p>
             <a:r>
               <a:rPr lang="en-US" dirty="0"/>
-              <a:t>n=19. Cambio importante respecto a la version anterior (n=12): hasta entonces nadie habia probado una app; con estas 7 respuestas nuevas aparecen 2 personas que si (Bring!, "Notas" -- esta ultima ambigua). Se actualizo el titular honestamente en vez de mantener el "0/12 nadie" que ya no era cierto. El dato que SI se mantiene y es mas fuerte que antes: 0/19 usa una app HOY como metodo (Pregunta 3) -- las 2 que la probaron la abandonaron. Quien probo Bring lo explica el mismo: fallo por falta de cooperacion de sus companeros de piso, lo cual refuerza en vez de contradecir la tesis central. Los stats de dolor bajaron una pizca (75%-&gt;74%) por la muestra mas grande, y se anade el dato conjunto (53%, 10/19) sufrio ambas cosas el mismo mes.</a:t>
+              <a:t>n=26 (2 envios duplicados por accidente descartados: "las cantidades" y la broma "Amor y Paz", cada par contado una vez). El dato que se mantiene y es mas fuerte que antes: 0/26 usa una app HOY como metodo (Pregunta 3) -- las 2 que probaron una app (Bring!, "Notas") la abandonaron. Quien probo Bring lo explica el mismo: fallo por falta de cooperacion de sus companeros de piso. Con mas muestra, "duplico" (73%) y "olvido" (81%) ya no coinciden como antes -- es lo esperable, no una senal de manipulacion. El dato conjunto (58%, 15/26) sigue subiendo. Aparecen por primera vez 2 personas en el bucket "mas de 5 viajes olvidados".</a:t>
             </a:r>
             <a:endParaRPr lang="en-US" dirty="0"/>
           </a:p>
@@ -1128,7 +1128,7 @@
           <a:p>
             <a:r>
               <a:rPr lang="en-US" dirty="0"/>
-              <a:t>Actualizado a n=19. Categorizacion pedida explicitamente: "no se quien compro que" cuenta para AMBAS columnas (coop + tracker de gastos), "no saber que quieren los otros"/"comen mis cosas"/"compran cosas que no quiero" es coop puro, "no participan/tardan en pagar" es tracker de gastos puro. El 26% de coop y el 37% de "no llevamos cuenta" en la P8 son numeros independientes que apuntan al mismo sitio: History no es una funcion añadida sin motivo. (Dos menciones espontaneas al precio -- "esta todo carisimo", "comprar es caro" -- se documentaron en ideacion.md pero no entraron en esta diapositiva para no forzar el layout; son una senal a favor de Prices, no de Fridge/List/History.)</a:t>
+              <a:t>Actualizado a n=26 (2 duplicados por envio accidental descartados). Categorizacion: "no se quien compro que" y "llevar la cuenta de quien compro que antes" cuentan para AMBAS columnas (coop + tracker de gastos), "no saber que quieren los otros"/"comen mis cosas"/"compran cosas que no quiero" es coop puro, "no participan/tardan en pagar" es tracker de gastos puro. Cambio importante en esta tanda: la queja de caducidad/comida que se estropea paso de 1 mencion aislada a 4 menciones independientes -- ya es el segundo tema mas repetido despues de cooperacion, y una de ellas describe literalmente el "aviso de stock bajo" que ya estaba en el alcance de Fridge (documento de una pagina). Las menciones de precio (2, "esta todo carisimo"/"comprar es caro") siguen fuera de esta diapositiva por espacio -- estan en ideacion.md.</a:t>
             </a:r>
             <a:endParaRPr lang="en-US" dirty="0"/>
           </a:p>
@@ -5896,7 +5896,7 @@
                 <a:ea typeface="Cambria" pitchFamily="34" charset="-122"/>
                 <a:cs typeface="Cambria" pitchFamily="34" charset="-120"/>
               </a:rPr>
-              <a:t>La encuesta confirma el hueco (n=19)</a:t>
+              <a:t>La encuesta confirma el hueco (n=26)</a:t>
             </a:r>
             <a:endParaRPr lang="en-US" sz="2800" dirty="0"/>
           </a:p>
@@ -5935,7 +5935,7 @@
                 <a:ea typeface="Calibri" pitchFamily="34" charset="-122"/>
                 <a:cs typeface="Calibri" pitchFamily="34" charset="-120"/>
               </a:rPr>
-              <a:t>Encuesta bilingüe (ES/EN), 9 preguntas sobre hechos del último mes — no opiniones sobre una app futura. 19 respuestas reales recogidas.</a:t>
+              <a:t>Encuesta bilingüe (ES/EN), 9 preguntas sobre hechos del último mes — no opiniones sobre una app futura. 26 respuestas únicas (2 envíos duplicados por accidente, descartados).</a:t>
             </a:r>
             <a:endParaRPr lang="en-US" sz="1000" dirty="0"/>
           </a:p>
@@ -5996,7 +5996,7 @@
                 <a:ea typeface="Cambria" pitchFamily="34" charset="-122"/>
                 <a:cs typeface="Cambria" pitchFamily="34" charset="-120"/>
               </a:rPr>
-              <a:t>0/19</a:t>
+              <a:t>0/26</a:t>
             </a:r>
             <a:endParaRPr lang="en-US" sz="3000" dirty="0"/>
           </a:p>
@@ -6096,7 +6096,7 @@
                 <a:ea typeface="Cambria" pitchFamily="34" charset="-122"/>
                 <a:cs typeface="Cambria" pitchFamily="34" charset="-120"/>
               </a:rPr>
-              <a:t>74%</a:t>
+              <a:t>73%</a:t>
             </a:r>
             <a:endParaRPr lang="en-US" sz="3000" dirty="0"/>
           </a:p>
@@ -6196,7 +6196,7 @@
                 <a:ea typeface="Cambria" pitchFamily="34" charset="-122"/>
                 <a:cs typeface="Cambria" pitchFamily="34" charset="-120"/>
               </a:rPr>
-              <a:t>74%</a:t>
+              <a:t>81%</a:t>
             </a:r>
             <a:endParaRPr lang="en-US" sz="3000" dirty="0"/>
           </a:p>
@@ -6274,7 +6274,7 @@
                 <a:ea typeface="Calibri" pitchFamily="34" charset="-122"/>
                 <a:cs typeface="Calibri" pitchFamily="34" charset="-120"/>
               </a:rPr>
-              <a:t>El 53% (10 de 19 personas) sufrió ambas cosas — compró duplicado y volvió a la tienda — en el mismo mes.</a:t>
+              <a:t>El 58% (15 de 26 personas) sufrió ambas cosas — compró duplicado y volvió a la tienda — en el mismo mes.</a:t>
             </a:r>
             <a:endParaRPr lang="en-US" sz="1150" dirty="0"/>
           </a:p>
@@ -6464,7 +6464,7 @@
                 <a:ea typeface="Calibri" pitchFamily="34" charset="-122"/>
                 <a:cs typeface="Calibri" pitchFamily="34" charset="-120"/>
               </a:rPr>
-              <a:t>7</a:t>
+              <a:t>11</a:t>
             </a:r>
             <a:endParaRPr lang="en-US" sz="1100" dirty="0"/>
           </a:p>
@@ -6540,7 +6540,7 @@
         <p:spPr>
           <a:xfrm>
             <a:off x="2788920" y="3986784"/>
-            <a:ext cx="3056709" cy="219456"/>
+            <a:ext cx="2593571" cy="219456"/>
           </a:xfrm>
           <a:prstGeom prst="roundRect">
             <a:avLst>
@@ -6586,7 +6586,7 @@
                 <a:ea typeface="Calibri" pitchFamily="34" charset="-122"/>
                 <a:cs typeface="Calibri" pitchFamily="34" charset="-120"/>
               </a:rPr>
-              <a:t>6</a:t>
+              <a:t>8</a:t>
             </a:r>
             <a:endParaRPr lang="en-US" sz="1100" dirty="0"/>
           </a:p>
@@ -6662,7 +6662,7 @@
         <p:spPr>
           <a:xfrm>
             <a:off x="2788920" y="4297680"/>
-            <a:ext cx="2547257" cy="219456"/>
+            <a:ext cx="1945178" cy="219456"/>
           </a:xfrm>
           <a:prstGeom prst="roundRect">
             <a:avLst>
@@ -6708,7 +6708,7 @@
                 <a:ea typeface="Calibri" pitchFamily="34" charset="-122"/>
                 <a:cs typeface="Calibri" pitchFamily="34" charset="-120"/>
               </a:rPr>
-              <a:t>5</a:t>
+              <a:t>6</a:t>
             </a:r>
             <a:endParaRPr lang="en-US" sz="1100" dirty="0"/>
           </a:p>
@@ -6784,7 +6784,7 @@
         <p:spPr>
           <a:xfrm>
             <a:off x="2788920" y="4608576"/>
-            <a:ext cx="509451" cy="219456"/>
+            <a:ext cx="324196" cy="219456"/>
           </a:xfrm>
           <a:prstGeom prst="roundRect">
             <a:avLst>
@@ -6969,7 +6969,7 @@
                 <a:ea typeface="Calibri" pitchFamily="34" charset="-122"/>
                 <a:cs typeface="Calibri" pitchFamily="34" charset="-120"/>
               </a:rPr>
-              <a:t>↑ 2 personas la probaron alguna vez (Pregunta 7) — pero 0/19 la usa hoy: la abandonaron</a:t>
+              <a:t>↑ 2 personas la probaron alguna vez (Pregunta 7) — pero 0/26 la usa hoy: la abandonaron</a:t>
             </a:r>
             <a:endParaRPr lang="en-US" sz="950" dirty="0"/>
           </a:p>
@@ -7055,7 +7055,7 @@
                 <a:ea typeface="Calibri" pitchFamily="34" charset="-122"/>
                 <a:cs typeface="Calibri" pitchFamily="34" charset="-120"/>
               </a:rPr>
-              <a:t>Bring! y AnyList llevan años disponibles y son razonablemente buenas (estado del arte, diapositiva anterior). 2 de 19 personas confirman haberlas probado — pero ninguna las usa hoy. Quien probó Bring! lo explica sin que se le pregunte: "porque si no colaboran los demás... pues mal vamos". El hueco no está en construir "una app más" — está en resolver por qué las que existen no retienen ni a quien sí las prueba.</a:t>
+              <a:t>Bring! y AnyList llevan años disponibles y son razonablemente buenas (estado del arte, diapositiva anterior). 2 de 26 personas confirman haberlas probado — pero ninguna las usa hoy. Quien probó Bring! lo explica sin que se le pregunte: "porque si no colaboran los demás... pues mal vamos". El hueco no está en construir "una app más" — está en resolver por qué las que existen no retienen ni a quien sí las prueba.</a:t>
             </a:r>
             <a:endParaRPr lang="en-US" sz="1150" dirty="0"/>
           </a:p>
@@ -7355,7 +7355,7 @@
                 <a:ea typeface="Calibri" pitchFamily="34" charset="-122"/>
                 <a:cs typeface="Calibri" pitchFamily="34" charset="-120"/>
               </a:rPr>
-              <a:t>5 de 19 personas (26%) — sin que se les preguntara</a:t>
+              <a:t>6 de 26 personas (23%) — sin que se les preguntara</a:t>
             </a:r>
             <a:endParaRPr lang="en-US" sz="1050" dirty="0"/>
           </a:p>
@@ -7384,13 +7384,13 @@
           <a:p>
             <a:pPr marL="342900" indent="-342900">
               <a:spcAft>
-                <a:spcPts val="800"/>
+                <a:spcPts val="700"/>
               </a:spcAft>
               <a:buSzPct val="100000"/>
               <a:buChar char="•"/>
             </a:pPr>
             <a:r>
-              <a:rPr lang="en-US" sz="1150" i="1" dirty="0">
+              <a:rPr lang="en-US" sz="1050" i="1" dirty="0">
                 <a:solidFill>
                   <a:srgbClr val="2E2119"/>
                 </a:solidFill>
@@ -7400,18 +7400,18 @@
               </a:rPr>
               <a:t>"I don’t know who bought what"</a:t>
             </a:r>
-            <a:endParaRPr lang="en-US" sz="1150" dirty="0"/>
+            <a:endParaRPr lang="en-US" sz="1050" dirty="0"/>
           </a:p>
           <a:p>
             <a:pPr marL="342900" indent="-342900">
               <a:spcAft>
-                <a:spcPts val="800"/>
+                <a:spcPts val="700"/>
               </a:spcAft>
               <a:buSzPct val="100000"/>
               <a:buChar char="•"/>
             </a:pPr>
             <a:r>
-              <a:rPr lang="en-US" sz="1150" i="1" dirty="0">
+              <a:rPr lang="en-US" sz="1050" i="1" dirty="0">
                 <a:solidFill>
                   <a:srgbClr val="2E2119"/>
                 </a:solidFill>
@@ -7421,18 +7421,18 @@
               </a:rPr>
               <a:t>"Not knowing what the others want, the others eating my stuff"</a:t>
             </a:r>
-            <a:endParaRPr lang="en-US" sz="1150" dirty="0"/>
+            <a:endParaRPr lang="en-US" sz="1050" dirty="0"/>
           </a:p>
           <a:p>
             <a:pPr marL="342900" indent="-342900">
               <a:spcAft>
-                <a:spcPts val="800"/>
+                <a:spcPts val="700"/>
               </a:spcAft>
               <a:buSzPct val="100000"/>
               <a:buChar char="•"/>
             </a:pPr>
             <a:r>
-              <a:rPr lang="en-US" sz="1150" i="1" dirty="0">
+              <a:rPr lang="en-US" sz="1050" i="1" dirty="0">
                 <a:solidFill>
                   <a:srgbClr val="2E2119"/>
                 </a:solidFill>
@@ -7442,18 +7442,18 @@
               </a:rPr>
               <a:t>"When people use the food I planned to use in a meal for myself... so I have to use something else"</a:t>
             </a:r>
-            <a:endParaRPr lang="en-US" sz="1150" dirty="0"/>
+            <a:endParaRPr lang="en-US" sz="1050" dirty="0"/>
           </a:p>
           <a:p>
             <a:pPr marL="342900" indent="-342900">
               <a:spcAft>
-                <a:spcPts val="800"/>
+                <a:spcPts val="700"/>
               </a:spcAft>
               <a:buSzPct val="100000"/>
               <a:buChar char="•"/>
             </a:pPr>
             <a:r>
-              <a:rPr lang="en-US" sz="1150" i="1" dirty="0">
+              <a:rPr lang="en-US" sz="1050" i="1" dirty="0">
                 <a:solidFill>
                   <a:srgbClr val="2E2119"/>
                 </a:solidFill>
@@ -7463,18 +7463,18 @@
               </a:rPr>
               <a:t>"Not knowing if someone bought something just for themself"</a:t>
             </a:r>
-            <a:endParaRPr lang="en-US" sz="1150" dirty="0"/>
+            <a:endParaRPr lang="en-US" sz="1050" dirty="0"/>
           </a:p>
           <a:p>
             <a:pPr marL="342900" indent="-342900">
               <a:spcAft>
-                <a:spcPts val="800"/>
+                <a:spcPts val="700"/>
               </a:spcAft>
               <a:buSzPct val="100000"/>
               <a:buChar char="•"/>
             </a:pPr>
             <a:r>
-              <a:rPr lang="en-US" sz="1150" i="1" dirty="0">
+              <a:rPr lang="en-US" sz="1050" i="1" dirty="0">
                 <a:solidFill>
                   <a:srgbClr val="2E2119"/>
                 </a:solidFill>
@@ -7484,7 +7484,28 @@
               </a:rPr>
               <a:t>"Que compran cosas que no quiero"</a:t>
             </a:r>
-            <a:endParaRPr lang="en-US" sz="1150" dirty="0"/>
+            <a:endParaRPr lang="en-US" sz="1050" dirty="0"/>
+          </a:p>
+          <a:p>
+            <a:pPr marL="342900" indent="-342900">
+              <a:spcAft>
+                <a:spcPts val="700"/>
+              </a:spcAft>
+              <a:buSzPct val="100000"/>
+              <a:buChar char="•"/>
+            </a:pPr>
+            <a:r>
+              <a:rPr lang="en-US" sz="1050" i="1" dirty="0">
+                <a:solidFill>
+                  <a:srgbClr val="2E2119"/>
+                </a:solidFill>
+                <a:latin typeface="Calibri" pitchFamily="34" charset="0"/>
+                <a:ea typeface="Calibri" pitchFamily="34" charset="-122"/>
+                <a:cs typeface="Calibri" pitchFamily="34" charset="-120"/>
+              </a:rPr>
+              <a:t>"Cada vez una compra una cosa, lo complicado es llevar la cuenta de quién compró qué antes"</a:t>
+            </a:r>
+            <a:endParaRPr lang="en-US" sz="1050" dirty="0"/>
           </a:p>
         </p:txBody>
       </p:sp>
@@ -7589,7 +7610,7 @@
                 <a:ea typeface="Calibri" pitchFamily="34" charset="-122"/>
                 <a:cs typeface="Calibri" pitchFamily="34" charset="-120"/>
               </a:rPr>
-              <a:t>2 menciones espontáneas + 7/19 (37%) dice en la Pregunta 8 que no llevan cuenta</a:t>
+              <a:t>3 menciones espontáneas + 9/26 (35%) dice en la Pregunta 8 que no llevan cuenta</a:t>
             </a:r>
             <a:endParaRPr lang="en-US" sz="1050" dirty="0"/>
           </a:p>
@@ -7604,7 +7625,7 @@
         <p:spPr>
           <a:xfrm>
             <a:off x="6537960" y="2331720"/>
-            <a:ext cx="4846320" cy="1554480"/>
+            <a:ext cx="4846320" cy="1737360"/>
           </a:xfrm>
           <a:prstGeom prst="rect">
             <a:avLst/>
@@ -7618,13 +7639,13 @@
           <a:p>
             <a:pPr marL="342900" indent="-342900">
               <a:spcAft>
-                <a:spcPts val="1000"/>
+                <a:spcPts val="800"/>
               </a:spcAft>
               <a:buSzPct val="100000"/>
               <a:buChar char="•"/>
             </a:pPr>
             <a:r>
-              <a:rPr lang="en-US" sz="1200" i="1" dirty="0">
+              <a:rPr lang="en-US" sz="1100" i="1" dirty="0">
                 <a:solidFill>
                   <a:srgbClr val="2E2119"/>
                 </a:solidFill>
@@ -7634,18 +7655,18 @@
               </a:rPr>
               <a:t>"I don’t know who bought what" — también aquí: no saber quién pagó qué</a:t>
             </a:r>
-            <a:endParaRPr lang="en-US" sz="1200" dirty="0"/>
+            <a:endParaRPr lang="en-US" sz="1100" dirty="0"/>
           </a:p>
           <a:p>
             <a:pPr marL="342900" indent="-342900">
               <a:spcAft>
-                <a:spcPts val="1000"/>
+                <a:spcPts val="800"/>
               </a:spcAft>
               <a:buSzPct val="100000"/>
               <a:buChar char="•"/>
             </a:pPr>
             <a:r>
-              <a:rPr lang="en-US" sz="1200" i="1" dirty="0">
+              <a:rPr lang="en-US" sz="1100" i="1" dirty="0">
                 <a:solidFill>
                   <a:srgbClr val="2E2119"/>
                 </a:solidFill>
@@ -7655,7 +7676,28 @@
               </a:rPr>
               <a:t>"Que la gente no participe a la hora de hacer la compra o que tarden en pagar cuando dividimos gastos"</a:t>
             </a:r>
-            <a:endParaRPr lang="en-US" sz="1200" dirty="0"/>
+            <a:endParaRPr lang="en-US" sz="1100" dirty="0"/>
+          </a:p>
+          <a:p>
+            <a:pPr marL="342900" indent="-342900">
+              <a:spcAft>
+                <a:spcPts val="800"/>
+              </a:spcAft>
+              <a:buSzPct val="100000"/>
+              <a:buChar char="•"/>
+            </a:pPr>
+            <a:r>
+              <a:rPr lang="en-US" sz="1100" i="1" dirty="0">
+                <a:solidFill>
+                  <a:srgbClr val="2E2119"/>
+                </a:solidFill>
+                <a:latin typeface="Calibri" pitchFamily="34" charset="0"/>
+                <a:ea typeface="Calibri" pitchFamily="34" charset="-122"/>
+                <a:cs typeface="Calibri" pitchFamily="34" charset="-120"/>
+              </a:rPr>
+              <a:t>"Llevar la cuenta de quién compró qué antes" — también dual, coop + gasto</a:t>
+            </a:r>
+            <a:endParaRPr lang="en-US" sz="1100" dirty="0"/>
           </a:p>
         </p:txBody>
       </p:sp>
@@ -7667,12 +7709,12 @@
         </p:nvSpPr>
         <p:spPr>
           <a:xfrm>
-            <a:off x="6492240" y="3977640"/>
-            <a:ext cx="4892040" cy="1554480"/>
+            <a:off x="6492240" y="4160520"/>
+            <a:ext cx="4892040" cy="1371600"/>
           </a:xfrm>
           <a:prstGeom prst="roundRect">
             <a:avLst>
-              <a:gd name="adj" fmla="val 5882"/>
+              <a:gd name="adj" fmla="val 6667"/>
             </a:avLst>
           </a:prstGeom>
           <a:solidFill>
@@ -7689,8 +7731,8 @@
         </p:nvSpPr>
         <p:spPr>
           <a:xfrm>
-            <a:off x="6720840" y="4096512"/>
-            <a:ext cx="4480560" cy="1325880"/>
+            <a:off x="6720840" y="4279392"/>
+            <a:ext cx="4480560" cy="1143000"/>
           </a:xfrm>
           <a:prstGeom prst="rect">
             <a:avLst/>
@@ -7709,7 +7751,7 @@
               <a:buNone/>
             </a:pPr>
             <a:r>
-              <a:rPr lang="en-US" sz="1150" b="1" dirty="0">
+              <a:rPr lang="en-US" sz="1100" b="1" dirty="0">
                 <a:solidFill>
                   <a:srgbClr val="D9A441"/>
                 </a:solidFill>
@@ -7719,14 +7761,14 @@
               </a:rPr>
               <a:t>Esto es exactamente History:  </a:t>
             </a:r>
-            <a:endParaRPr lang="en-US" sz="1150" dirty="0"/>
-          </a:p>
-          <a:p>
-            <a:pPr indent="0" marL="0">
-              <a:buNone/>
-            </a:pPr>
-            <a:r>
-              <a:rPr lang="en-US" sz="1150" dirty="0">
+            <a:endParaRPr lang="en-US" sz="1100" dirty="0"/>
+          </a:p>
+          <a:p>
+            <a:pPr indent="0" marL="0">
+              <a:buNone/>
+            </a:pPr>
+            <a:r>
+              <a:rPr lang="en-US" sz="1100" dirty="0">
                 <a:solidFill>
                   <a:srgbClr val="FFFFFF"/>
                 </a:solidFill>
@@ -7736,7 +7778,7 @@
               </a:rPr>
               <a:t>quién compró qué y quién debe a quién, resuelto sin depender de que alguien lo recuerde o lo apunte a mano.</a:t>
             </a:r>
-            <a:endParaRPr lang="en-US" sz="1150" dirty="0"/>
+            <a:endParaRPr lang="en-US" sz="1100" dirty="0"/>
           </a:p>
         </p:txBody>
       </p:sp>
@@ -7792,7 +7834,7 @@
               <a:buNone/>
             </a:pPr>
             <a:r>
-              <a:rPr lang="en-US" sz="1150" b="1" dirty="0">
+              <a:rPr lang="en-US" sz="1100" b="1" dirty="0">
                 <a:solidFill>
                   <a:srgbClr val="C9682B"/>
                 </a:solidFill>
@@ -7800,13 +7842,13 @@
                 <a:ea typeface="Calibri" pitchFamily="34" charset="-122"/>
                 <a:cs typeface="Calibri" pitchFamily="34" charset="-120"/>
               </a:rPr>
-              <a:t>Señal nueva a vigilar (Fridge):  </a:t>
-            </a:r>
-            <a:pPr indent="0" marL="0">
-              <a:buNone/>
-            </a:pPr>
-            <a:r>
-              <a:rPr lang="en-US" sz="1150" dirty="0">
+              <a:t>Ya no es señal aislada — 4 menciones (Fridge):  </a:t>
+            </a:r>
+            <a:pPr indent="0" marL="0">
+              <a:buNone/>
+            </a:pPr>
+            <a:r>
+              <a:rPr lang="en-US" sz="1100" dirty="0">
                 <a:solidFill>
                   <a:srgbClr val="2E2119"/>
                 </a:solidFill>
@@ -7814,9 +7856,9 @@
                 <a:ea typeface="Calibri" pitchFamily="34" charset="-122"/>
                 <a:cs typeface="Calibri" pitchFamily="34" charset="-120"/>
               </a:rPr>
-              <a:t>"Tener en cuenta qué productos quedan abiertos, cuáles se pierden antes, etc." — apunta a caducidad y frescura, no solo a stock o reparto de gasto.</a:t>
-            </a:r>
-            <a:endParaRPr lang="en-US" sz="1150" dirty="0"/>
+              <a:t>"Pois supoño que cando algo se acabe ninguén avise" — describe el aviso de stock bajo que ya estaba en el alcance, sin que la persona lo supiera.</a:t>
+            </a:r>
+            <a:endParaRPr lang="en-US" sz="1100" dirty="0"/>
           </a:p>
         </p:txBody>
       </p:sp>

--- a/docs/larder-presentacion.pptx
+++ b/docs/larder-presentacion.pptx
@@ -1040,7 +1040,7 @@
           <a:p>
             <a:r>
               <a:rPr lang="en-US" dirty="0"/>
-              <a:t>n=26 (2 envios duplicados por accidente descartados: "las cantidades" y la broma "Amor y Paz", cada par contado una vez). El dato que se mantiene y es mas fuerte que antes: 0/26 usa una app HOY como metodo (Pregunta 3) -- las 2 que probaron una app (Bring!, "Notas") la abandonaron. Quien probo Bring lo explica el mismo: fallo por falta de cooperacion de sus companeros de piso. Con mas muestra, "duplico" (73%) y "olvido" (81%) ya no coinciden como antes -- es lo esperable, no una senal de manipulacion. El dato conjunto (58%, 15/26) sigue subiendo. Aparecen por primera vez 2 personas en el bucket "mas de 5 viajes olvidados".</a:t>
+              <a:t>n=31 (2 envios duplicados por accidente descartados: "las cantidades" y la broma "Amor y Paz", cada par contado una vez). El dato que se mantiene y es mas fuerte que antes: 0/31 usa una app HOY como metodo (Pregunta 3) -- las 2 que probaron una app (Bring!, "Notas") la abandonaron. El "metodo ganador" (Papel vs Notas) sigue cambiando de lider con cada tanda -- ahora Notas por 1 respuesta -- es deliberadamente inestable, no se afirma un ganador. "Duplico" y "olvido" han vuelto a coincidir en 74% -- es casualidad estadistica, ya paso antes y se deshizo. El dato conjunto (55%, 17/31) se mantiene claramente por encima de la mitad.</a:t>
             </a:r>
             <a:endParaRPr lang="en-US" dirty="0"/>
           </a:p>
@@ -1128,7 +1128,7 @@
           <a:p>
             <a:r>
               <a:rPr lang="en-US" dirty="0"/>
-              <a:t>Actualizado a n=26 (2 duplicados por envio accidental descartados). Categorizacion: "no se quien compro que" y "llevar la cuenta de quien compro que antes" cuentan para AMBAS columnas (coop + tracker de gastos), "no saber que quieren los otros"/"comen mis cosas"/"compran cosas que no quiero" es coop puro, "no participan/tardan en pagar" es tracker de gastos puro. Cambio importante en esta tanda: la queja de caducidad/comida que se estropea paso de 1 mencion aislada a 4 menciones independientes -- ya es el segundo tema mas repetido despues de cooperacion, y una de ellas describe literalmente el "aviso de stock bajo" que ya estaba en el alcance de Fridge (documento de una pagina). Las menciones de precio (2, "esta todo carisimo"/"comprar es caro") siguen fuera de esta diapositiva por espacio -- estan en ideacion.md.</a:t>
+              <a:t>Actualizado a n=31 (2 duplicados por envio accidental descartados). Categorizacion: "no se quien compro que" y "llevar la cuenta de quien compro que antes" cuentan para AMBAS columnas (coop + tracker de gastos), "no saber que quieren los otros"/"comen mis cosas"/"compran cosas que no quiero"/"people eating my food"/"dudar en comprar algo y que se lo coma otro" es coop puro, "no participan/tardan en pagar" es tracker de gastos puro. Cooperacion sigue siendo el tema mas repetido con diferencia (8/31, 26%) tras 2 menciones nuevas en esta tanda. La queja de caducidad/comida que se estropea se mantiene en 4 menciones independientes -- segundo tema mas repetido, una de ellas describe literalmente el "aviso de stock bajo" que ya estaba en el alcance de Fridge. Las menciones de precio (2) siguen fuera de esta diapositiva por espacio -- estan en ideacion.md.</a:t>
             </a:r>
             <a:endParaRPr lang="en-US" dirty="0"/>
           </a:p>
@@ -5896,7 +5896,7 @@
                 <a:ea typeface="Cambria" pitchFamily="34" charset="-122"/>
                 <a:cs typeface="Cambria" pitchFamily="34" charset="-120"/>
               </a:rPr>
-              <a:t>La encuesta confirma el hueco (n=26)</a:t>
+              <a:t>La encuesta confirma el hueco (n=31)</a:t>
             </a:r>
             <a:endParaRPr lang="en-US" sz="2800" dirty="0"/>
           </a:p>
@@ -5935,7 +5935,7 @@
                 <a:ea typeface="Calibri" pitchFamily="34" charset="-122"/>
                 <a:cs typeface="Calibri" pitchFamily="34" charset="-120"/>
               </a:rPr>
-              <a:t>Encuesta bilingüe (ES/EN), 9 preguntas sobre hechos del último mes — no opiniones sobre una app futura. 26 respuestas únicas (2 envíos duplicados por accidente, descartados).</a:t>
+              <a:t>Encuesta bilingüe (ES/EN), 9 preguntas sobre hechos del último mes — no opiniones sobre una app futura. 31 respuestas únicas (2 envíos duplicados por accidente, descartados).</a:t>
             </a:r>
             <a:endParaRPr lang="en-US" sz="1000" dirty="0"/>
           </a:p>
@@ -5996,7 +5996,7 @@
                 <a:ea typeface="Cambria" pitchFamily="34" charset="-122"/>
                 <a:cs typeface="Cambria" pitchFamily="34" charset="-120"/>
               </a:rPr>
-              <a:t>0/26</a:t>
+              <a:t>0/31</a:t>
             </a:r>
             <a:endParaRPr lang="en-US" sz="3000" dirty="0"/>
           </a:p>
@@ -6096,7 +6096,7 @@
                 <a:ea typeface="Cambria" pitchFamily="34" charset="-122"/>
                 <a:cs typeface="Cambria" pitchFamily="34" charset="-120"/>
               </a:rPr>
-              <a:t>73%</a:t>
+              <a:t>74%</a:t>
             </a:r>
             <a:endParaRPr lang="en-US" sz="3000" dirty="0"/>
           </a:p>
@@ -6196,7 +6196,7 @@
                 <a:ea typeface="Cambria" pitchFamily="34" charset="-122"/>
                 <a:cs typeface="Cambria" pitchFamily="34" charset="-120"/>
               </a:rPr>
-              <a:t>81%</a:t>
+              <a:t>74%</a:t>
             </a:r>
             <a:endParaRPr lang="en-US" sz="3000" dirty="0"/>
           </a:p>
@@ -6274,7 +6274,7 @@
                 <a:ea typeface="Calibri" pitchFamily="34" charset="-122"/>
                 <a:cs typeface="Calibri" pitchFamily="34" charset="-120"/>
               </a:rPr>
-              <a:t>El 58% (15 de 26 personas) sufrió ambas cosas — compró duplicado y volvió a la tienda — en el mismo mes.</a:t>
+              <a:t>El 55% (17 de 31 personas) sufrió ambas cosas — compró duplicado y volvió a la tienda — en el mismo mes.</a:t>
             </a:r>
             <a:endParaRPr lang="en-US" sz="1150" dirty="0"/>
           </a:p>
@@ -6381,7 +6381,7 @@
                 <a:ea typeface="Calibri" pitchFamily="34" charset="-122"/>
                 <a:cs typeface="Calibri" pitchFamily="34" charset="-120"/>
               </a:rPr>
-              <a:t>Papel y boli</a:t>
+              <a:t>Notas del móvil</a:t>
             </a:r>
             <a:endParaRPr lang="en-US" sz="1100" dirty="0"/>
           </a:p>
@@ -6426,7 +6426,7 @@
             </a:avLst>
           </a:prstGeom>
           <a:solidFill>
-            <a:srgbClr val="C9682B"/>
+            <a:srgbClr val="D9A441"/>
           </a:solidFill>
           <a:ln/>
         </p:spPr>
@@ -6464,7 +6464,7 @@
                 <a:ea typeface="Calibri" pitchFamily="34" charset="-122"/>
                 <a:cs typeface="Calibri" pitchFamily="34" charset="-120"/>
               </a:rPr>
-              <a:t>11</a:t>
+              <a:t>12</a:t>
             </a:r>
             <a:endParaRPr lang="en-US" sz="1100" dirty="0"/>
           </a:p>
@@ -6503,7 +6503,7 @@
                 <a:ea typeface="Calibri" pitchFamily="34" charset="-122"/>
                 <a:cs typeface="Calibri" pitchFamily="34" charset="-120"/>
               </a:rPr>
-              <a:t>Notas del móvil</a:t>
+              <a:t>Papel y boli</a:t>
             </a:r>
             <a:endParaRPr lang="en-US" sz="1100" dirty="0"/>
           </a:p>
@@ -6540,7 +6540,7 @@
         <p:spPr>
           <a:xfrm>
             <a:off x="2788920" y="3986784"/>
-            <a:ext cx="2593571" cy="219456"/>
+            <a:ext cx="3268980" cy="219456"/>
           </a:xfrm>
           <a:prstGeom prst="roundRect">
             <a:avLst>
@@ -6548,7 +6548,7 @@
             </a:avLst>
           </a:prstGeom>
           <a:solidFill>
-            <a:srgbClr val="D9A441"/>
+            <a:srgbClr val="C9682B"/>
           </a:solidFill>
           <a:ln/>
         </p:spPr>
@@ -6586,7 +6586,7 @@
                 <a:ea typeface="Calibri" pitchFamily="34" charset="-122"/>
                 <a:cs typeface="Calibri" pitchFamily="34" charset="-120"/>
               </a:rPr>
-              <a:t>8</a:t>
+              <a:t>11</a:t>
             </a:r>
             <a:endParaRPr lang="en-US" sz="1100" dirty="0"/>
           </a:p>
@@ -6662,7 +6662,7 @@
         <p:spPr>
           <a:xfrm>
             <a:off x="2788920" y="4297680"/>
-            <a:ext cx="1945178" cy="219456"/>
+            <a:ext cx="2080260" cy="219456"/>
           </a:xfrm>
           <a:prstGeom prst="roundRect">
             <a:avLst>
@@ -6708,7 +6708,7 @@
                 <a:ea typeface="Calibri" pitchFamily="34" charset="-122"/>
                 <a:cs typeface="Calibri" pitchFamily="34" charset="-120"/>
               </a:rPr>
-              <a:t>6</a:t>
+              <a:t>7</a:t>
             </a:r>
             <a:endParaRPr lang="en-US" sz="1100" dirty="0"/>
           </a:p>
@@ -6784,7 +6784,7 @@
         <p:spPr>
           <a:xfrm>
             <a:off x="2788920" y="4608576"/>
-            <a:ext cx="324196" cy="219456"/>
+            <a:ext cx="297180" cy="219456"/>
           </a:xfrm>
           <a:prstGeom prst="roundRect">
             <a:avLst>
@@ -6969,7 +6969,7 @@
                 <a:ea typeface="Calibri" pitchFamily="34" charset="-122"/>
                 <a:cs typeface="Calibri" pitchFamily="34" charset="-120"/>
               </a:rPr>
-              <a:t>↑ 2 personas la probaron alguna vez (Pregunta 7) — pero 0/26 la usa hoy: la abandonaron</a:t>
+              <a:t>↑ 2 personas la probaron alguna vez (Pregunta 7) — pero 0/31 la usa hoy: la abandonaron</a:t>
             </a:r>
             <a:endParaRPr lang="en-US" sz="950" dirty="0"/>
           </a:p>
@@ -7055,7 +7055,7 @@
                 <a:ea typeface="Calibri" pitchFamily="34" charset="-122"/>
                 <a:cs typeface="Calibri" pitchFamily="34" charset="-120"/>
               </a:rPr>
-              <a:t>Bring! y AnyList llevan años disponibles y son razonablemente buenas (estado del arte, diapositiva anterior). 2 de 26 personas confirman haberlas probado — pero ninguna las usa hoy. Quien probó Bring! lo explica sin que se le pregunte: "porque si no colaboran los demás... pues mal vamos". El hueco no está en construir "una app más" — está en resolver por qué las que existen no retienen ni a quien sí las prueba.</a:t>
+              <a:t>Bring! y AnyList llevan años disponibles y son razonablemente buenas (estado del arte, diapositiva anterior). 2 de 31 personas confirman haberlas probado — pero ninguna las usa hoy. Quien probó Bring! lo explica sin que se le pregunte: "porque si no colaboran los demás... pues mal vamos". El hueco no está en construir "una app más" — está en resolver por qué las que existen no retienen ni a quien sí las prueba.</a:t>
             </a:r>
             <a:endParaRPr lang="en-US" sz="1150" dirty="0"/>
           </a:p>
@@ -7355,7 +7355,7 @@
                 <a:ea typeface="Calibri" pitchFamily="34" charset="-122"/>
                 <a:cs typeface="Calibri" pitchFamily="34" charset="-120"/>
               </a:rPr>
-              <a:t>6 de 26 personas (23%) — sin que se les preguntara</a:t>
+              <a:t>8 de 31 personas (26%) — el tema más repetido, sin que se les preguntara</a:t>
             </a:r>
             <a:endParaRPr lang="en-US" sz="1050" dirty="0"/>
           </a:p>
@@ -7390,7 +7390,7 @@
               <a:buChar char="•"/>
             </a:pPr>
             <a:r>
-              <a:rPr lang="en-US" sz="1050" i="1" dirty="0">
+              <a:rPr lang="en-US" sz="1000" i="1" dirty="0">
                 <a:solidFill>
                   <a:srgbClr val="2E2119"/>
                 </a:solidFill>
@@ -7400,7 +7400,7 @@
               </a:rPr>
               <a:t>"I don’t know who bought what"</a:t>
             </a:r>
-            <a:endParaRPr lang="en-US" sz="1050" dirty="0"/>
+            <a:endParaRPr lang="en-US" sz="1000" dirty="0"/>
           </a:p>
           <a:p>
             <a:pPr marL="342900" indent="-342900">
@@ -7411,7 +7411,7 @@
               <a:buChar char="•"/>
             </a:pPr>
             <a:r>
-              <a:rPr lang="en-US" sz="1050" i="1" dirty="0">
+              <a:rPr lang="en-US" sz="1000" i="1" dirty="0">
                 <a:solidFill>
                   <a:srgbClr val="2E2119"/>
                 </a:solidFill>
@@ -7419,9 +7419,9 @@
                 <a:ea typeface="Calibri" pitchFamily="34" charset="-122"/>
                 <a:cs typeface="Calibri" pitchFamily="34" charset="-120"/>
               </a:rPr>
-              <a:t>"Not knowing what the others want, the others eating my stuff"</a:t>
-            </a:r>
-            <a:endParaRPr lang="en-US" sz="1050" dirty="0"/>
+              <a:t>"Not knowing what the others want, the others eating my stuff" / "People eating my food"</a:t>
+            </a:r>
+            <a:endParaRPr lang="en-US" sz="1000" dirty="0"/>
           </a:p>
           <a:p>
             <a:pPr marL="342900" indent="-342900">
@@ -7432,7 +7432,7 @@
               <a:buChar char="•"/>
             </a:pPr>
             <a:r>
-              <a:rPr lang="en-US" sz="1050" i="1" dirty="0">
+              <a:rPr lang="en-US" sz="1000" i="1" dirty="0">
                 <a:solidFill>
                   <a:srgbClr val="2E2119"/>
                 </a:solidFill>
@@ -7442,7 +7442,7 @@
               </a:rPr>
               <a:t>"When people use the food I planned to use in a meal for myself... so I have to use something else"</a:t>
             </a:r>
-            <a:endParaRPr lang="en-US" sz="1050" dirty="0"/>
+            <a:endParaRPr lang="en-US" sz="1000" dirty="0"/>
           </a:p>
           <a:p>
             <a:pPr marL="342900" indent="-342900">
@@ -7453,7 +7453,7 @@
               <a:buChar char="•"/>
             </a:pPr>
             <a:r>
-              <a:rPr lang="en-US" sz="1050" i="1" dirty="0">
+              <a:rPr lang="en-US" sz="1000" i="1" dirty="0">
                 <a:solidFill>
                   <a:srgbClr val="2E2119"/>
                 </a:solidFill>
@@ -7461,9 +7461,9 @@
                 <a:ea typeface="Calibri" pitchFamily="34" charset="-122"/>
                 <a:cs typeface="Calibri" pitchFamily="34" charset="-120"/>
               </a:rPr>
-              <a:t>"Not knowing if someone bought something just for themself"</a:t>
-            </a:r>
-            <a:endParaRPr lang="en-US" sz="1050" dirty="0"/>
+              <a:t>"Not knowing if someone bought something just for themself" / dudar en comprar algo "y que se lo coma otra persona"</a:t>
+            </a:r>
+            <a:endParaRPr lang="en-US" sz="1000" dirty="0"/>
           </a:p>
           <a:p>
             <a:pPr marL="342900" indent="-342900">
@@ -7474,7 +7474,7 @@
               <a:buChar char="•"/>
             </a:pPr>
             <a:r>
-              <a:rPr lang="en-US" sz="1050" i="1" dirty="0">
+              <a:rPr lang="en-US" sz="1000" i="1" dirty="0">
                 <a:solidFill>
                   <a:srgbClr val="2E2119"/>
                 </a:solidFill>
@@ -7484,7 +7484,7 @@
               </a:rPr>
               <a:t>"Que compran cosas que no quiero"</a:t>
             </a:r>
-            <a:endParaRPr lang="en-US" sz="1050" dirty="0"/>
+            <a:endParaRPr lang="en-US" sz="1000" dirty="0"/>
           </a:p>
           <a:p>
             <a:pPr marL="342900" indent="-342900">
@@ -7495,7 +7495,7 @@
               <a:buChar char="•"/>
             </a:pPr>
             <a:r>
-              <a:rPr lang="en-US" sz="1050" i="1" dirty="0">
+              <a:rPr lang="en-US" sz="1000" i="1" dirty="0">
                 <a:solidFill>
                   <a:srgbClr val="2E2119"/>
                 </a:solidFill>
@@ -7505,7 +7505,7 @@
               </a:rPr>
               <a:t>"Cada vez una compra una cosa, lo complicado es llevar la cuenta de quién compró qué antes"</a:t>
             </a:r>
-            <a:endParaRPr lang="en-US" sz="1050" dirty="0"/>
+            <a:endParaRPr lang="en-US" sz="1000" dirty="0"/>
           </a:p>
         </p:txBody>
       </p:sp>
@@ -7610,7 +7610,7 @@
                 <a:ea typeface="Calibri" pitchFamily="34" charset="-122"/>
                 <a:cs typeface="Calibri" pitchFamily="34" charset="-120"/>
               </a:rPr>
-              <a:t>3 menciones espontáneas + 9/26 (35%) dice en la Pregunta 8 que no llevan cuenta</a:t>
+              <a:t>3 menciones espontáneas + 12/31 (39%) dice en la Pregunta 8 que no llevan cuenta</a:t>
             </a:r>
             <a:endParaRPr lang="en-US" sz="1050" dirty="0"/>
           </a:p>

--- a/docs/larder-presentacion.pptx
+++ b/docs/larder-presentacion.pptx
@@ -1040,7 +1040,7 @@
           <a:p>
             <a:r>
               <a:rPr lang="en-US" dirty="0"/>
-              <a:t>n=31 (2 envios duplicados por accidente descartados: "las cantidades" y la broma "Amor y Paz", cada par contado una vez). El dato que se mantiene y es mas fuerte que antes: 0/31 usa una app HOY como metodo (Pregunta 3) -- las 2 que probaron una app (Bring!, "Notas") la abandonaron. El "metodo ganador" (Papel vs Notas) sigue cambiando de lider con cada tanda -- ahora Notas por 1 respuesta -- es deliberadamente inestable, no se afirma un ganador. "Duplico" y "olvido" han vuelto a coincidir en 74% -- es casualidad estadistica, ya paso antes y se deshizo. El dato conjunto (55%, 17/31) se mantiene claramente por encima de la mitad.</a:t>
+              <a:t>RESULTADOS FINALES -- encuesta cerrada el 17/09/2026, n=32 (2 envios duplicados por accidente descartados: "las cantidades" y la broma "Amor y Paz", cada par contado una vez). El dato mas fuerte de toda la encuesta: 0/32 usa una app HOY como metodo (Pregunta 3) -- las 2 que probaron una app (Bring!, "Notas") la abandonaron, sin excepcion, en las 4 tandas de la recogida. El "metodo ganador" (Papel vs Notas) nunca se asento -- cambio de lider en cada tanda por 1-2 respuestas -- es un empate tecnico, se documenta asi en vez de forzar un ganador. El dato conjunto (53%, 17/32) se mantuvo estable por encima de la mitad en las ultimas tres tandas (58%-&gt;55%-&gt;53%) -- la senal mas solida de toda la encuesta.</a:t>
             </a:r>
             <a:endParaRPr lang="en-US" dirty="0"/>
           </a:p>
@@ -1128,7 +1128,7 @@
           <a:p>
             <a:r>
               <a:rPr lang="en-US" dirty="0"/>
-              <a:t>Actualizado a n=31 (2 duplicados por envio accidental descartados). Categorizacion: "no se quien compro que" y "llevar la cuenta de quien compro que antes" cuentan para AMBAS columnas (coop + tracker de gastos), "no saber que quieren los otros"/"comen mis cosas"/"compran cosas que no quiero"/"people eating my food"/"dudar en comprar algo y que se lo coma otro" es coop puro, "no participan/tardan en pagar" es tracker de gastos puro. Cooperacion sigue siendo el tema mas repetido con diferencia (8/31, 26%) tras 2 menciones nuevas en esta tanda. La queja de caducidad/comida que se estropea se mantiene en 4 menciones independientes -- segundo tema mas repetido, una de ellas describe literalmente el "aviso de stock bajo" que ya estaba en el alcance de Fridge. Las menciones de precio (2) siguen fuera de esta diapositiva por espacio -- estan en ideacion.md.</a:t>
+              <a:t>RESULTADOS FINALES, n=32 (encuesta cerrada 17/09/2026; 2 duplicados por envio accidental descartados). Categorizacion: "no se quien compro que" y "llevar la cuenta de quien compro que antes" cuentan para AMBAS columnas (coop + tracker de gastos), "no saber que quieren los otros"/"comen mis cosas"/"compran cosas que no quiero"/"people eating my food"/"dudar en comprar algo y que se lo coma otro" es coop puro, "no participan/tardan en pagar" es tracker de gastos puro. Cooperacion termino como el tema mas repetido con diferencia (8/32, 25%) en toda la recogida. La queja de caducidad/comida que se estropea se mantiene en 4 menciones independientes -- segundo tema mas repetido, una de ellas describe literalmente el "aviso de stock bajo" que ya estaba en el alcance de Fridge. Las menciones de precio (2) siguen fuera de esta diapositiva por espacio -- estan en ideacion.md. La ultima respuesta (n=32) no aporto cita nueva (frustracion: "nada").</a:t>
             </a:r>
             <a:endParaRPr lang="en-US" dirty="0"/>
           </a:p>
@@ -5896,7 +5896,7 @@
                 <a:ea typeface="Cambria" pitchFamily="34" charset="-122"/>
                 <a:cs typeface="Cambria" pitchFamily="34" charset="-120"/>
               </a:rPr>
-              <a:t>La encuesta confirma el hueco (n=31)</a:t>
+              <a:t>La encuesta confirma el hueco (n=32, cerrada)</a:t>
             </a:r>
             <a:endParaRPr lang="en-US" sz="2800" dirty="0"/>
           </a:p>
@@ -5935,7 +5935,7 @@
                 <a:ea typeface="Calibri" pitchFamily="34" charset="-122"/>
                 <a:cs typeface="Calibri" pitchFamily="34" charset="-120"/>
               </a:rPr>
-              <a:t>Encuesta bilingüe (ES/EN), 9 preguntas sobre hechos del último mes — no opiniones sobre una app futura. 31 respuestas únicas (2 envíos duplicados por accidente, descartados).</a:t>
+              <a:t>Encuesta bilingüe (ES/EN), 9 preguntas sobre hechos del último mes — no opiniones sobre una app futura. Resultados finales: 32 respuestas únicas, cerrada el 17/09/2026.</a:t>
             </a:r>
             <a:endParaRPr lang="en-US" sz="1000" dirty="0"/>
           </a:p>
@@ -5996,7 +5996,7 @@
                 <a:ea typeface="Cambria" pitchFamily="34" charset="-122"/>
                 <a:cs typeface="Cambria" pitchFamily="34" charset="-120"/>
               </a:rPr>
-              <a:t>0/31</a:t>
+              <a:t>0/32</a:t>
             </a:r>
             <a:endParaRPr lang="en-US" sz="3000" dirty="0"/>
           </a:p>
@@ -6096,7 +6096,7 @@
                 <a:ea typeface="Cambria" pitchFamily="34" charset="-122"/>
                 <a:cs typeface="Cambria" pitchFamily="34" charset="-120"/>
               </a:rPr>
-              <a:t>74%</a:t>
+              <a:t>72%</a:t>
             </a:r>
             <a:endParaRPr lang="en-US" sz="3000" dirty="0"/>
           </a:p>
@@ -6196,7 +6196,7 @@
                 <a:ea typeface="Cambria" pitchFamily="34" charset="-122"/>
                 <a:cs typeface="Cambria" pitchFamily="34" charset="-120"/>
               </a:rPr>
-              <a:t>74%</a:t>
+              <a:t>75%</a:t>
             </a:r>
             <a:endParaRPr lang="en-US" sz="3000" dirty="0"/>
           </a:p>
@@ -6274,7 +6274,7 @@
                 <a:ea typeface="Calibri" pitchFamily="34" charset="-122"/>
                 <a:cs typeface="Calibri" pitchFamily="34" charset="-120"/>
               </a:rPr>
-              <a:t>El 55% (17 de 31 personas) sufrió ambas cosas — compró duplicado y volvió a la tienda — en el mismo mes.</a:t>
+              <a:t>El 53% (17 de 32 personas) sufrió ambas cosas — compró duplicado y volvió a la tienda — en el mismo mes.</a:t>
             </a:r>
             <a:endParaRPr lang="en-US" sz="1150" dirty="0"/>
           </a:p>
@@ -6662,7 +6662,7 @@
         <p:spPr>
           <a:xfrm>
             <a:off x="2788920" y="4297680"/>
-            <a:ext cx="2080260" cy="219456"/>
+            <a:ext cx="2377440" cy="219456"/>
           </a:xfrm>
           <a:prstGeom prst="roundRect">
             <a:avLst>
@@ -6708,7 +6708,7 @@
                 <a:ea typeface="Calibri" pitchFamily="34" charset="-122"/>
                 <a:cs typeface="Calibri" pitchFamily="34" charset="-120"/>
               </a:rPr>
-              <a:t>7</a:t>
+              <a:t>8</a:t>
             </a:r>
             <a:endParaRPr lang="en-US" sz="1100" dirty="0"/>
           </a:p>
@@ -6969,7 +6969,7 @@
                 <a:ea typeface="Calibri" pitchFamily="34" charset="-122"/>
                 <a:cs typeface="Calibri" pitchFamily="34" charset="-120"/>
               </a:rPr>
-              <a:t>↑ 2 personas la probaron alguna vez (Pregunta 7) — pero 0/31 la usa hoy: la abandonaron</a:t>
+              <a:t>↑ 2 personas la probaron alguna vez (Pregunta 7) — pero 0/32 la usa hoy: la abandonaron</a:t>
             </a:r>
             <a:endParaRPr lang="en-US" sz="950" dirty="0"/>
           </a:p>
@@ -7055,7 +7055,7 @@
                 <a:ea typeface="Calibri" pitchFamily="34" charset="-122"/>
                 <a:cs typeface="Calibri" pitchFamily="34" charset="-120"/>
               </a:rPr>
-              <a:t>Bring! y AnyList llevan años disponibles y son razonablemente buenas (estado del arte, diapositiva anterior). 2 de 31 personas confirman haberlas probado — pero ninguna las usa hoy. Quien probó Bring! lo explica sin que se le pregunte: "porque si no colaboran los demás... pues mal vamos". El hueco no está en construir "una app más" — está en resolver por qué las que existen no retienen ni a quien sí las prueba.</a:t>
+              <a:t>Bring! y AnyList llevan años disponibles y son razonablemente buenas (estado del arte, diapositiva anterior). 2 de 32 personas confirman haberlas probado — pero ninguna las usa hoy. Quien probó Bring! lo explica sin que se le pregunte: "porque si no colaboran los demás... pues mal vamos". El hueco no está en construir "una app más" — está en resolver por qué las que existen no retienen ni a quien sí las prueba.</a:t>
             </a:r>
             <a:endParaRPr lang="en-US" sz="1150" dirty="0"/>
           </a:p>
@@ -7355,7 +7355,7 @@
                 <a:ea typeface="Calibri" pitchFamily="34" charset="-122"/>
                 <a:cs typeface="Calibri" pitchFamily="34" charset="-120"/>
               </a:rPr>
-              <a:t>8 de 31 personas (26%) — el tema más repetido, sin que se les preguntara</a:t>
+              <a:t>8 de 32 personas (25%) — el tema más repetido, sin que se les preguntara</a:t>
             </a:r>
             <a:endParaRPr lang="en-US" sz="1050" dirty="0"/>
           </a:p>
@@ -7610,7 +7610,7 @@
                 <a:ea typeface="Calibri" pitchFamily="34" charset="-122"/>
                 <a:cs typeface="Calibri" pitchFamily="34" charset="-120"/>
               </a:rPr>
-              <a:t>3 menciones espontáneas + 12/31 (39%) dice en la Pregunta 8 que no llevan cuenta</a:t>
+              <a:t>3 menciones espontáneas + 12/32 (38%) dice en la Pregunta 8 que no llevan cuenta</a:t>
             </a:r>
             <a:endParaRPr lang="en-US" sz="1050" dirty="0"/>
           </a:p>

--- a/docs/larder-presentacion.pptx
+++ b/docs/larder-presentacion.pptx
@@ -952,7 +952,7 @@
           <a:p>
             <a:r>
               <a:rPr lang="en-US" dirty="0"/>
-              <a:t>Conclusion del estado del arte: el hueco no es "mas bonita", es rapidez de Notas + colaboracion de Bring + foco en ahorro/stock, que ninguna cubre. Tambien vale mencionar el testimonio propio: en casa se abandono una app similar tras 2 usos por pereza de abrir "otra app".</a:t>
+              <a:t>Conclusion del estado del arte: el hueco no es "mas bonita", es rapidez de Notas + colaboracion de Bring + atribucion (quien apunto que) + saber que hay en casa SIN pedir que nadie cuente unidades a mano -- esto ultimo se corrigio el 17/09 porque la version anterior ("ahorro y control de stock") caia en el mismo error que criticamos de AnyList. Tambien vale mencionar el testimonio propio: en casa se abandono una app similar tras 2 usos por pereza de abrir "otra app".</a:t>
             </a:r>
             <a:endParaRPr lang="en-US" dirty="0"/>
           </a:p>
@@ -1128,7 +1128,7 @@
           <a:p>
             <a:r>
               <a:rPr lang="en-US" dirty="0"/>
-              <a:t>RESULTADOS FINALES, n=32 (encuesta cerrada 17/09/2026; 2 duplicados por envio accidental descartados). Categorizacion: "no se quien compro que" y "llevar la cuenta de quien compro que antes" cuentan para AMBAS columnas (coop + tracker de gastos), "no saber que quieren los otros"/"comen mis cosas"/"compran cosas que no quiero"/"people eating my food"/"dudar en comprar algo y que se lo coma otro" es coop puro, "no participan/tardan en pagar" es tracker de gastos puro. Cooperacion termino como el tema mas repetido con diferencia (8/32, 25%) en toda la recogida. La queja de caducidad/comida que se estropea se mantiene en 4 menciones independientes -- segundo tema mas repetido, una de ellas describe literalmente el "aviso de stock bajo" que ya estaba en el alcance de Fridge. Las menciones de precio (2) siguen fuera de esta diapositiva por espacio -- estan en ideacion.md. La ultima respuesta (n=32) no aporto cita nueva (frustracion: "nada").</a:t>
+              <a:t>RESULTADOS FINALES, n=32 (encuesta cerrada 17/09/2026; 2 duplicados por envio accidental descartados). Categorizacion: "no se quien compro que" y "llevar la cuenta de quien compro que antes" cuentan para AMBAS columnas (coop + tracker de gastos), "no saber que quieren los otros"/"comen mis cosas"/"compran cosas que no quiero"/"people eating my food"/"dudar en comprar algo y que se lo coma otro" es coop puro, "no participan/tardan en pagar" es tracker de gastos puro. Cooperacion termino como el tema mas repetido con diferencia (8/32, 25%) en toda la recogida. Correccion 17/09: separamos "caducidad/comida que se estropea" (3 menciones, queda para P2+ porque exige ampliar Odoo) de "se acaba y nadie avisa" (1 mencion, esta SI se resuelve gratis en P1 solo con que Fridge sea compartida -- ya no dependemos de logica de "aviso de stock bajo"). Las menciones de precio (2) siguen fuera de esta diapositiva por espacio -- estan en ideacion.md.</a:t>
             </a:r>
             <a:endParaRPr lang="en-US" dirty="0"/>
           </a:p>
@@ -4930,7 +4930,7 @@
                           <a:ea typeface="Calibri" pitchFamily="34" charset="-122"/>
                           <a:cs typeface="Calibri" pitchFamily="34" charset="-120"/>
                         </a:rPr>
-                        <a:t>Todo el valor apunta a cocinar, no a ahorrar o controlar stock</a:t>
+                        <a:t>Todo el valor apunta a cocinar, no a compartir la lista ni saber qué hay en casa</a:t>
                       </a:r>
                       <a:endParaRPr lang="en-US" sz="1200" dirty="0">
                         <a:latin typeface="Calibri" charset="0"/>
@@ -5467,7 +5467,7 @@
                 <a:ea typeface="Calibri" pitchFamily="34" charset="-122"/>
                 <a:cs typeface="Calibri" pitchFamily="34" charset="-120"/>
               </a:rPr>
-              <a:t>Ni Bring! ni AnyList apuntan a ahorrar o controlar stock — las dos están construidas para cocinar y planificar recetas.</a:t>
+              <a:t>Ni Bring! ni AnyList apuntan al acto simple de apuntar y compartir la lista — las dos están construidas para cocinar y planificar recetas.</a:t>
             </a:r>
             <a:endParaRPr lang="en-US" sz="1300" dirty="0"/>
           </a:p>
@@ -5734,7 +5734,7 @@
               <a:buNone/>
             </a:pPr>
             <a:r>
-              <a:rPr lang="en-US" sz="1400" i="1" dirty="0">
+              <a:rPr lang="en-US" sz="1300" i="1" dirty="0">
                 <a:solidFill>
                   <a:srgbClr val="D9A441"/>
                 </a:solidFill>
@@ -5742,9 +5742,9 @@
                 <a:ea typeface="Calibri" pitchFamily="34" charset="-122"/>
                 <a:cs typeface="Calibri" pitchFamily="34" charset="-120"/>
               </a:rPr>
-              <a:t>El hueco real: una herramienta tan rápida de usar como Notas, tan colaborativa como Bring!, y centrada en ahorro y control de stock — el ángulo que nadie cubre.</a:t>
-            </a:r>
-            <a:endParaRPr lang="en-US" sz="1400" dirty="0"/>
+              <a:t>El hueco real: una herramienta tan rápida de usar como Notas, tan colaborativa como Bring!, que además dice quién apuntó cada cosa y muestra qué hay en casa sin pedir que nadie lleve la cuenta a mano — el ángulo que nadie cubre.</a:t>
+            </a:r>
+            <a:endParaRPr lang="en-US" sz="1300" dirty="0"/>
           </a:p>
         </p:txBody>
       </p:sp>
@@ -7842,7 +7842,7 @@
                 <a:ea typeface="Calibri" pitchFamily="34" charset="-122"/>
                 <a:cs typeface="Calibri" pitchFamily="34" charset="-120"/>
               </a:rPr>
-              <a:t>Ya no es señal aislada — 4 menciones (Fridge):  </a:t>
+              <a:t>Ya resuelto en P1, gratis:  </a:t>
             </a:r>
             <a:pPr indent="0" marL="0">
               <a:buNone/>
@@ -7856,7 +7856,7 @@
                 <a:ea typeface="Calibri" pitchFamily="34" charset="-122"/>
                 <a:cs typeface="Calibri" pitchFamily="34" charset="-120"/>
               </a:rPr>
-              <a:t>"Pois supoño que cando algo se acabe ninguén avise" — describe el aviso de stock bajo que ya estaba en el alcance, sin que la persona lo supiera.</a:t>
+              <a:t>"Pois supoño que cando algo se acabe ninguén avise" — se resuelve solo con que Fridge sea una vista compartida: marcar "se acabó" ya avisa a todo el piso, sin lógica extra ni contar unidades.</a:t>
             </a:r>
             <a:endParaRPr lang="en-US" sz="1100" dirty="0"/>
           </a:p>
@@ -9873,7 +9873,7 @@
                 <a:ea typeface="Calibri" pitchFamily="34" charset="-122"/>
                 <a:cs typeface="Calibri" pitchFamily="34" charset="-120"/>
               </a:rPr>
-              <a:t>Nevera: inventario + aviso de stock bajo</a:t>
+              <a:t>Nevera: qué hay en casa, sin cantidades — se rellena sola al comprar, se vacía con un toque "se acabó"</a:t>
             </a:r>
             <a:endParaRPr lang="en-US" sz="1150" dirty="0"/>
           </a:p>

--- a/docs/larder-presentacion.pptx
+++ b/docs/larder-presentacion.pptx
@@ -1128,7 +1128,7 @@
           <a:p>
             <a:r>
               <a:rPr lang="en-US" dirty="0"/>
-              <a:t>RESULTADOS FINALES, n=32 (encuesta cerrada 17/09/2026; 2 duplicados por envio accidental descartados). Categorizacion: "no se quien compro que" y "llevar la cuenta de quien compro que antes" cuentan para AMBAS columnas (coop + tracker de gastos), "no saber que quieren los otros"/"comen mis cosas"/"compran cosas que no quiero"/"people eating my food"/"dudar en comprar algo y que se lo coma otro" es coop puro, "no participan/tardan en pagar" es tracker de gastos puro. Cooperacion termino como el tema mas repetido con diferencia (8/32, 25%) en toda la recogida. Correccion 17/09: separamos "caducidad/comida que se estropea" (3 menciones, queda para P2+ porque exige ampliar Odoo) de "se acaba y nadie avisa" (1 mencion, esta SI se resuelve gratis en P1 solo con que Fridge sea compartida -- ya no dependemos de logica de "aviso de stock bajo"). Las menciones de precio (2) siguen fuera de esta diapositiva por espacio -- estan en ideacion.md.</a:t>
+              <a:t>RESULTADOS FINALES, n=32 (encuesta cerrada 17/09/2026; 2 duplicados por envio accidental descartados). Categorizacion: "no se quien compro que" y "llevar la cuenta de quien compro que antes" cuentan para AMBAS columnas (coop + tracker de gastos), "no saber que quieren los otros"/"comen mis cosas"/"compran cosas que no quiero"/"people eating my food"/"dudar en comprar algo y que se lo coma otro" es coop puro, "no participan/tardan en pagar" es tracker de gastos puro. Cooperacion termino como el tema mas repetido con diferencia (8/32, 25%) en toda la recogida. Correccion 17/09: separamos "caducidad/comida que se estropea" (3 menciones, entra en el plan de construccion con un campo de dias de frescura por categoria en nuestra propia base de datos, sin Odoo) de "se acaba y nadie avisa" (1 mencion, esta se resuelve gratis solo con que Fridge sea compartida -- ya no dependemos de logica de "aviso de stock bajo"). Las menciones de precio (2) siguen fuera de esta diapositiva por espacio -- estan en ideacion.md.</a:t>
             </a:r>
             <a:endParaRPr lang="en-US" dirty="0"/>
           </a:p>
@@ -1392,7 +1392,7 @@
           <a:p>
             <a:r>
               <a:rPr lang="en-US" dirty="0"/>
-              <a:t>Nadie nos elegiria por construir facturacion o cobro con tarjeta propios; si por como llevamos nevera y lista compartida. Orden de construccion: una pantalla completa antes de abrir la siguiente.</a:t>
+              <a:t>Actualizado 17/09 tras el giro de producto: se retira Odoo (Prices se calcula sobre nuestro propio historial de compras, no un catalogo externo que alguien tendria que mantener a mano). Se decide construir para esta entrega lo que antes era "P2 hipotetico" (lectura de tickets con Gemini, prediccion de consumo) -- la columna de la derecha se queda solo con lo que de verdad no compensa construir nunca en este proyecto. Nadie nos elegiria por construir facturacion o cobro con tarjeta propios; si por como llevamos nevera y lista compartida. Orden de construccion: una pantalla completa antes de abrir la siguiente -- eso no cambia aunque el alcance de cada pantalla haya crecido.</a:t>
             </a:r>
             <a:endParaRPr lang="en-US" dirty="0"/>
           </a:p>
@@ -2609,7 +2609,7 @@
                 <a:ea typeface="Calibri" pitchFamily="34" charset="-122"/>
                 <a:cs typeface="Calibri" pitchFamily="34" charset="-120"/>
               </a:rPr>
-              <a:t>ALCANCE P1</a:t>
+              <a:t>ALCANCE</a:t>
             </a:r>
             <a:endParaRPr lang="en-US" sz="1000" dirty="0"/>
           </a:p>
@@ -2648,7 +2648,7 @@
                 <a:ea typeface="Calibri" pitchFamily="34" charset="-122"/>
                 <a:cs typeface="Calibri" pitchFamily="34" charset="-120"/>
               </a:rPr>
-              <a:t>Nevera + Lista + Historial + Precios. Cobro real, fuera de alcance.</a:t>
+              <a:t>Nevera (sin cantidades) + Lista que se genera sola + Historial + Precios sobre nuestro propio historial + lectura de tickets y predicción. Cobro real, fuera de alcance.</a:t>
             </a:r>
             <a:endParaRPr lang="en-US" sz="1100" dirty="0"/>
           </a:p>
@@ -2862,7 +2862,7 @@
                 <a:ea typeface="Calibri" pitchFamily="34" charset="-122"/>
                 <a:cs typeface="Calibri" pitchFamily="34" charset="-120"/>
               </a:rPr>
-              <a:t>Código de barras, cobro con tarjeta, notificaciones push, liquidar deudas de verdad.</a:t>
+              <a:t>Código de barras, cobro con tarjeta, notificaciones push nativas (Telegram es la excepción), liquidar deudas de verdad.</a:t>
             </a:r>
             <a:endParaRPr lang="en-US" sz="1100" dirty="0"/>
           </a:p>
@@ -3020,7 +3020,7 @@
                 <a:ea typeface="Calibri" pitchFamily="34" charset="-122"/>
                 <a:cs typeface="Calibri" pitchFamily="34" charset="-120"/>
               </a:rPr>
-              <a:t>Terminar la pantalla de la Nevera (frontend con React + TypeScript)</a:t>
+              <a:t>Terminar la pantalla de la Nevera con el nuevo modelo (3 estados, sin cantidades)</a:t>
             </a:r>
             <a:endParaRPr lang="en-US" sz="1600" dirty="0"/>
           </a:p>
@@ -3041,7 +3041,7 @@
                 <a:ea typeface="Calibri" pitchFamily="34" charset="-122"/>
                 <a:cs typeface="Calibri" pitchFamily="34" charset="-120"/>
               </a:rPr>
-              <a:t>Lista de la compra con control de concurrencia real</a:t>
+              <a:t>Backend real: Supabase/Neon (Postgres) + Render, sustituyendo el estado local</a:t>
             </a:r>
             <a:endParaRPr lang="en-US" sz="1600" dirty="0"/>
           </a:p>
@@ -3062,7 +3062,7 @@
                 <a:ea typeface="Calibri" pitchFamily="34" charset="-122"/>
                 <a:cs typeface="Calibri" pitchFamily="34" charset="-120"/>
               </a:rPr>
-              <a:t>Instalar y parametrizar Odoo (catálogo + precios por tienda)</a:t>
+              <a:t>Lista de la compra que se genera sola, con concurrencia real</a:t>
             </a:r>
             <a:endParaRPr lang="en-US" sz="1600" dirty="0"/>
           </a:p>
@@ -3083,7 +3083,7 @@
                 <a:ea typeface="Calibri" pitchFamily="34" charset="-122"/>
                 <a:cs typeface="Calibri" pitchFamily="34" charset="-120"/>
               </a:rPr>
-              <a:t>Conectar el backend con la API de Odoo</a:t>
+              <a:t>Lectura de tickets (Gemini API) y aviso de turno de compra (bot de Telegram)</a:t>
             </a:r>
             <a:endParaRPr lang="en-US" sz="1600" dirty="0"/>
           </a:p>
@@ -3104,7 +3104,7 @@
                 <a:ea typeface="Calibri" pitchFamily="34" charset="-122"/>
                 <a:cs typeface="Calibri" pitchFamily="34" charset="-120"/>
               </a:rPr>
-              <a:t>Historial de gasto y comparador de precios</a:t>
+              <a:t>Historial de gasto y comparador de precios sobre el propio historial de compras</a:t>
             </a:r>
             <a:endParaRPr lang="en-US" sz="1600" dirty="0"/>
           </a:p>
@@ -9859,13 +9859,13 @@
           <a:p>
             <a:pPr marL="342900" indent="-342900">
               <a:spcAft>
-                <a:spcPts val="1000"/>
+                <a:spcPts val="700"/>
               </a:spcAft>
               <a:buSzPct val="100000"/>
               <a:buChar char="•"/>
             </a:pPr>
             <a:r>
-              <a:rPr lang="en-US" sz="1150" dirty="0">
+              <a:rPr lang="en-US" sz="1000" dirty="0">
                 <a:solidFill>
                   <a:srgbClr val="2E2119"/>
                 </a:solidFill>
@@ -9873,20 +9873,20 @@
                 <a:ea typeface="Calibri" pitchFamily="34" charset="-122"/>
                 <a:cs typeface="Calibri" pitchFamily="34" charset="-120"/>
               </a:rPr>
-              <a:t>Nevera: qué hay en casa, sin cantidades — se rellena sola al comprar, se vacía con un toque "se acabó"</a:t>
-            </a:r>
-            <a:endParaRPr lang="en-US" sz="1150" dirty="0"/>
+              <a:t>Nevera: 3 estados (bien/queda poco/se acabó), sin cantidades — se rellena sola al comprar</a:t>
+            </a:r>
+            <a:endParaRPr lang="en-US" sz="1000" dirty="0"/>
           </a:p>
           <a:p>
             <a:pPr marL="342900" indent="-342900">
               <a:spcAft>
-                <a:spcPts val="1000"/>
+                <a:spcPts val="700"/>
               </a:spcAft>
               <a:buSzPct val="100000"/>
               <a:buChar char="•"/>
             </a:pPr>
             <a:r>
-              <a:rPr lang="en-US" sz="1150" dirty="0">
+              <a:rPr lang="en-US" sz="1000" dirty="0">
                 <a:solidFill>
                   <a:srgbClr val="2E2119"/>
                 </a:solidFill>
@@ -9894,20 +9894,20 @@
                 <a:ea typeface="Calibri" pitchFamily="34" charset="-122"/>
                 <a:cs typeface="Calibri" pitchFamily="34" charset="-120"/>
               </a:rPr>
-              <a:t>Lista compartida con control de concurrencia</a:t>
-            </a:r>
-            <a:endParaRPr lang="en-US" sz="1150" dirty="0"/>
+              <a:t>Lista que se genera sola a partir de la nevera, con concurrencia</a:t>
+            </a:r>
+            <a:endParaRPr lang="en-US" sz="1000" dirty="0"/>
           </a:p>
           <a:p>
             <a:pPr marL="342900" indent="-342900">
               <a:spcAft>
-                <a:spcPts val="1000"/>
+                <a:spcPts val="700"/>
               </a:spcAft>
               <a:buSzPct val="100000"/>
               <a:buChar char="•"/>
             </a:pPr>
             <a:r>
-              <a:rPr lang="en-US" sz="1150" dirty="0">
+              <a:rPr lang="en-US" sz="1000" dirty="0">
                 <a:solidFill>
                   <a:srgbClr val="2E2119"/>
                 </a:solidFill>
@@ -9917,18 +9917,18 @@
               </a:rPr>
               <a:t>Historial + cálculo de quién debe a quién</a:t>
             </a:r>
-            <a:endParaRPr lang="en-US" sz="1150" dirty="0"/>
+            <a:endParaRPr lang="en-US" sz="1000" dirty="0"/>
           </a:p>
           <a:p>
             <a:pPr marL="342900" indent="-342900">
               <a:spcAft>
-                <a:spcPts val="1000"/>
+                <a:spcPts val="700"/>
               </a:spcAft>
               <a:buSzPct val="100000"/>
               <a:buChar char="•"/>
             </a:pPr>
             <a:r>
-              <a:rPr lang="en-US" sz="1150" dirty="0">
+              <a:rPr lang="en-US" sz="1000" dirty="0">
                 <a:solidFill>
                   <a:srgbClr val="2E2119"/>
                 </a:solidFill>
@@ -9936,9 +9936,30 @@
                 <a:ea typeface="Calibri" pitchFamily="34" charset="-122"/>
                 <a:cs typeface="Calibri" pitchFamily="34" charset="-120"/>
               </a:rPr>
-              <a:t>Comparador de precios por tienda</a:t>
-            </a:r>
-            <a:endParaRPr lang="en-US" sz="1150" dirty="0"/>
+              <a:t>Precios sobre nuestro propio historial de compras</a:t>
+            </a:r>
+            <a:endParaRPr lang="en-US" sz="1000" dirty="0"/>
+          </a:p>
+          <a:p>
+            <a:pPr marL="342900" indent="-342900">
+              <a:spcAft>
+                <a:spcPts val="700"/>
+              </a:spcAft>
+              <a:buSzPct val="100000"/>
+              <a:buChar char="•"/>
+            </a:pPr>
+            <a:r>
+              <a:rPr lang="en-US" sz="1000" dirty="0">
+                <a:solidFill>
+                  <a:srgbClr val="2E2119"/>
+                </a:solidFill>
+                <a:latin typeface="Calibri" pitchFamily="34" charset="0"/>
+                <a:ea typeface="Calibri" pitchFamily="34" charset="-122"/>
+                <a:cs typeface="Calibri" pitchFamily="34" charset="-120"/>
+              </a:rPr>
+              <a:t>Predicción de reposición (aritmética sobre eventos propios)</a:t>
+            </a:r>
+            <a:endParaRPr lang="en-US" sz="1000" dirty="0"/>
           </a:p>
         </p:txBody>
       </p:sp>
@@ -10026,7 +10047,7 @@
                 <a:ea typeface="Cambria" pitchFamily="34" charset="-122"/>
                 <a:cs typeface="Cambria" pitchFamily="34" charset="-120"/>
               </a:rPr>
-              <a:t>Lo hace Odoo (ERP)</a:t>
+              <a:t>Lo hace un servicio externo</a:t>
             </a:r>
             <a:endParaRPr lang="en-US" sz="1400" dirty="0"/>
           </a:p>
@@ -10055,13 +10076,13 @@
           <a:p>
             <a:pPr marL="342900" indent="-342900">
               <a:spcAft>
-                <a:spcPts val="1000"/>
+                <a:spcPts val="700"/>
               </a:spcAft>
               <a:buSzPct val="100000"/>
               <a:buChar char="•"/>
             </a:pPr>
             <a:r>
-              <a:rPr lang="en-US" sz="1150" dirty="0">
+              <a:rPr lang="en-US" sz="1000" dirty="0">
                 <a:solidFill>
                   <a:srgbClr val="2E2119"/>
                 </a:solidFill>
@@ -10069,20 +10090,20 @@
                 <a:ea typeface="Calibri" pitchFamily="34" charset="-122"/>
                 <a:cs typeface="Calibri" pitchFamily="34" charset="-120"/>
               </a:rPr>
-              <a:t>Catálogo de productos y precios por tienda (Pricelists)</a:t>
-            </a:r>
-            <a:endParaRPr lang="en-US" sz="1150" dirty="0"/>
+              <a:t>Diccionario de productos (Open Food Facts, gratis)</a:t>
+            </a:r>
+            <a:endParaRPr lang="en-US" sz="1000" dirty="0"/>
           </a:p>
           <a:p>
             <a:pPr marL="342900" indent="-342900">
               <a:spcAft>
-                <a:spcPts val="1000"/>
+                <a:spcPts val="700"/>
               </a:spcAft>
               <a:buSzPct val="100000"/>
               <a:buChar char="•"/>
             </a:pPr>
             <a:r>
-              <a:rPr lang="en-US" sz="1150" dirty="0">
+              <a:rPr lang="en-US" sz="1000" dirty="0">
                 <a:solidFill>
                   <a:srgbClr val="2E2119"/>
                 </a:solidFill>
@@ -10090,9 +10111,30 @@
                 <a:ea typeface="Calibri" pitchFamily="34" charset="-122"/>
                 <a:cs typeface="Calibri" pitchFamily="34" charset="-120"/>
               </a:rPr>
-              <a:t>Facturación real de la suscripción, si se cobrase algún día</a:t>
-            </a:r>
-            <a:endParaRPr lang="en-US" sz="1150" dirty="0"/>
+              <a:t>Lectura de tickets → items (Gemini API, free tier — la IA solo se usa aquí)</a:t>
+            </a:r>
+            <a:endParaRPr lang="en-US" sz="1000" dirty="0"/>
+          </a:p>
+          <a:p>
+            <a:pPr marL="342900" indent="-342900">
+              <a:spcAft>
+                <a:spcPts val="700"/>
+              </a:spcAft>
+              <a:buSzPct val="100000"/>
+              <a:buChar char="•"/>
+            </a:pPr>
+            <a:r>
+              <a:rPr lang="en-US" sz="1000" dirty="0">
+                <a:solidFill>
+                  <a:srgbClr val="2E2119"/>
+                </a:solidFill>
+                <a:latin typeface="Calibri" pitchFamily="34" charset="0"/>
+                <a:ea typeface="Calibri" pitchFamily="34" charset="-122"/>
+                <a:cs typeface="Calibri" pitchFamily="34" charset="-120"/>
+              </a:rPr>
+              <a:t>Aviso de turno de compra (bot de Telegram, gratis)</a:t>
+            </a:r>
+            <a:endParaRPr lang="en-US" sz="1000" dirty="0"/>
           </a:p>
         </p:txBody>
       </p:sp>
@@ -10209,13 +10251,13 @@
           <a:p>
             <a:pPr marL="342900" indent="-342900">
               <a:spcAft>
-                <a:spcPts val="1000"/>
+                <a:spcPts val="700"/>
               </a:spcAft>
               <a:buSzPct val="100000"/>
               <a:buChar char="•"/>
             </a:pPr>
             <a:r>
-              <a:rPr lang="en-US" sz="1150" dirty="0">
+              <a:rPr lang="en-US" sz="1000" dirty="0">
                 <a:solidFill>
                   <a:srgbClr val="2E2119"/>
                 </a:solidFill>
@@ -10225,18 +10267,18 @@
               </a:rPr>
               <a:t>Escaneo de código de barras</a:t>
             </a:r>
-            <a:endParaRPr lang="en-US" sz="1150" dirty="0"/>
+            <a:endParaRPr lang="en-US" sz="1000" dirty="0"/>
           </a:p>
           <a:p>
             <a:pPr marL="342900" indent="-342900">
               <a:spcAft>
-                <a:spcPts val="1000"/>
+                <a:spcPts val="700"/>
               </a:spcAft>
               <a:buSzPct val="100000"/>
               <a:buChar char="•"/>
             </a:pPr>
             <a:r>
-              <a:rPr lang="en-US" sz="1150" dirty="0">
+              <a:rPr lang="en-US" sz="1000" dirty="0">
                 <a:solidFill>
                   <a:srgbClr val="2E2119"/>
                 </a:solidFill>
@@ -10246,18 +10288,18 @@
               </a:rPr>
               <a:t>Cobro real con tarjeta</a:t>
             </a:r>
-            <a:endParaRPr lang="en-US" sz="1150" dirty="0"/>
+            <a:endParaRPr lang="en-US" sz="1000" dirty="0"/>
           </a:p>
           <a:p>
             <a:pPr marL="342900" indent="-342900">
               <a:spcAft>
-                <a:spcPts val="1000"/>
+                <a:spcPts val="700"/>
               </a:spcAft>
               <a:buSzPct val="100000"/>
               <a:buChar char="•"/>
             </a:pPr>
             <a:r>
-              <a:rPr lang="en-US" sz="1150" dirty="0">
+              <a:rPr lang="en-US" sz="1000" dirty="0">
                 <a:solidFill>
                   <a:srgbClr val="2E2119"/>
                 </a:solidFill>
@@ -10265,20 +10307,20 @@
                 <a:ea typeface="Calibri" pitchFamily="34" charset="-122"/>
                 <a:cs typeface="Calibri" pitchFamily="34" charset="-120"/>
               </a:rPr>
-              <a:t>Notificaciones push</a:t>
-            </a:r>
-            <a:endParaRPr lang="en-US" sz="1150" dirty="0"/>
+              <a:t>Notificaciones push nativas (Telegram es la excepción)</a:t>
+            </a:r>
+            <a:endParaRPr lang="en-US" sz="1000" dirty="0"/>
           </a:p>
           <a:p>
             <a:pPr marL="342900" indent="-342900">
               <a:spcAft>
-                <a:spcPts val="1000"/>
+                <a:spcPts val="700"/>
               </a:spcAft>
               <a:buSzPct val="100000"/>
               <a:buChar char="•"/>
             </a:pPr>
             <a:r>
-              <a:rPr lang="en-US" sz="1150" dirty="0">
+              <a:rPr lang="en-US" sz="1000" dirty="0">
                 <a:solidFill>
                   <a:srgbClr val="2E2119"/>
                 </a:solidFill>
@@ -10288,7 +10330,7 @@
               </a:rPr>
               <a:t>Liquidar deudas de verdad</a:t>
             </a:r>
-            <a:endParaRPr lang="en-US" sz="1150" dirty="0"/>
+            <a:endParaRPr lang="en-US" sz="1000" dirty="0"/>
           </a:p>
         </p:txBody>
       </p:sp>
@@ -10339,7 +10381,7 @@
               <a:buNone/>
             </a:pPr>
             <a:r>
-              <a:rPr lang="en-US" sz="1300" i="1" dirty="0">
+              <a:rPr lang="en-US" sz="1250" i="1" dirty="0">
                 <a:solidFill>
                   <a:srgbClr val="D9A441"/>
                 </a:solidFill>
@@ -10347,9 +10389,9 @@
                 <a:ea typeface="Calibri" pitchFamily="34" charset="-122"/>
                 <a:cs typeface="Calibri" pitchFamily="34" charset="-120"/>
               </a:rPr>
-              <a:t>"En P1, un hogar de A Coruña controla su nevera y organiza la lista de la compra compartida sin usar el grupo de WhatsApp, y puede consultar su historial de gasto repartido y comparar precios entre tiendas."</a:t>
-            </a:r>
-            <a:endParaRPr lang="en-US" sz="1300" dirty="0"/>
+              <a:t>"Un hogar de A Coruña deja de escribir la lista de la compra: la nevera se rellena sola al comprar, avisa cuando algo se acaba, y la lista sale de ahí. El grupo se entera por Telegram, marca la compra en tiempo real, y consulta después quién debe qué y dónde sale más barato cada cosa."</a:t>
+            </a:r>
+            <a:endParaRPr lang="en-US" sz="1250" dirty="0"/>
           </a:p>
         </p:txBody>
       </p:sp>

--- a/docs/larder-presentacion.pptx
+++ b/docs/larder-presentacion.pptx
@@ -16,9 +16,10 @@
     <p:sldId id="264" r:id="rId10"/>
     <p:sldId id="265" r:id="rId11"/>
     <p:sldId id="266" r:id="rId12"/>
+    <p:sldId id="267" r:id="rId13"/>
   </p:sldIdLst>
   <p:notesMasterIdLst>
-    <p:notesMasterId r:id="rId13"/>
+    <p:notesMasterId r:id="rId14"/>
   </p:notesMasterIdLst>
   <p:sldSz cx="12192000" cy="6858000"/>
   <p:notesSz cx="6858000" cy="12192000"/>
@@ -600,7 +601,7 @@
           <a:p>
             <a:r>
               <a:rPr lang="en-US" dirty="0"/>
-              <a:t>El nombre Larder es una palabra inglesa comun (despensa) — revisar en P5 si dificulta encontrarlo en buscadores. De momento se mantiene.</a:t>
+              <a:t>Actualizado 17/09 tras el giro de producto: se retira Odoo (Prices se calcula sobre nuestro propio historial de compras, no un catalogo externo que alguien tendria que mantener a mano). Se decide construir para esta entrega lo que antes era "P2 hipotetico" (lectura de tickets con Gemini, prediccion de consumo) -- la columna de la derecha se queda solo con lo que de verdad no compensa construir nunca en este proyecto. Nadie nos elegiria por construir facturacion o cobro con tarjeta propios; si por como llevamos nevera y lista compartida. Orden de construccion: una pantalla completa antes de abrir la siguiente -- eso no cambia aunque el alcance de cada pantalla haya crecido.</a:t>
             </a:r>
             <a:endParaRPr lang="en-US" dirty="0"/>
           </a:p>
@@ -688,7 +689,7 @@
           <a:p>
             <a:r>
               <a:rPr lang="en-US" dirty="0"/>
-              <a:t>Cierre. Recalcar que lo entregado el viernes es la ideacion completa (docs/ideacion.md), no codigo terminado — eso es correcto para P1 en esta fase.</a:t>
+              <a:t>El nombre Larder es una palabra inglesa comun (despensa) — revisar en P5 si dificulta encontrarlo en buscadores. De momento se mantiene.</a:t>
             </a:r>
             <a:endParaRPr lang="en-US" dirty="0"/>
           </a:p>
@@ -712,6 +713,94 @@
             <a:fld id="{F7021451-1387-4CA6-816F-3879F97B5CBC}" type="slidenum">
               <a:rPr lang="en-US"/>
               <a:t>11</a:t>
+            </a:fld>
+            <a:endParaRPr lang="en-US"/>
+          </a:p>
+        </p:txBody>
+      </p:sp>
+    </p:spTree>
+    <p:extLst>
+      <p:ext uri="{BB962C8B-B14F-4D97-AF65-F5344CB8AC3E}">
+        <p14:creationId xmlns:p14="http://schemas.microsoft.com/office/powerpoint/2010/main" val="1024086991"/>
+      </p:ext>
+    </p:extLst>
+  </p:cSld>
+  <p:clrMapOvr>
+    <a:masterClrMapping/>
+  </p:clrMapOvr>
+</p:notes>
+</file>
+
+<file path=ppt/notesSlides/notesSlide12.xml><?xml version="1.0" encoding="utf-8"?>
+<p:notes xmlns:a="http://schemas.openxmlformats.org/drawingml/2006/main" xmlns:r="http://schemas.openxmlformats.org/officeDocument/2006/relationships" xmlns:p="http://schemas.openxmlformats.org/presentationml/2006/main">
+  <p:cSld>
+    <p:spTree>
+      <p:nvGrpSpPr>
+        <p:cNvPr id="1" name=""/>
+        <p:cNvGrpSpPr/>
+        <p:nvPr/>
+      </p:nvGrpSpPr>
+      <p:grpSpPr>
+        <a:xfrm>
+          <a:off x="0" y="0"/>
+          <a:ext cx="0" cy="0"/>
+          <a:chOff x="0" y="0"/>
+          <a:chExt cx="0" cy="0"/>
+        </a:xfrm>
+      </p:grpSpPr>
+      <p:sp>
+        <p:nvSpPr>
+          <p:cNvPr id="2" name="Slide Image Placeholder 1"/>
+          <p:cNvSpPr>
+            <a:spLocks noGrp="1" noRot="1" noChangeAspect="1"/>
+          </p:cNvSpPr>
+          <p:nvPr>
+            <p:ph type="sldImg"/>
+          </p:nvPr>
+        </p:nvSpPr>
+        <p:spPr/>
+      </p:sp>
+      <p:sp>
+        <p:nvSpPr>
+          <p:cNvPr id="3" name="Notes Placeholder 2"/>
+          <p:cNvSpPr>
+            <a:spLocks noGrp="1"/>
+          </p:cNvSpPr>
+          <p:nvPr>
+            <p:ph type="body" idx="1"/>
+          </p:nvPr>
+        </p:nvSpPr>
+        <p:spPr/>
+        <p:txBody>
+          <a:bodyPr/>
+          <a:lstStyle/>
+          <a:p>
+            <a:r>
+              <a:rPr lang="en-US" dirty="0"/>
+              <a:t>Cierre. Recalcar que lo entregado el viernes es la ideacion completa (docs/ideacion.md), no codigo terminado — eso es correcto para P1 en esta fase.</a:t>
+            </a:r>
+            <a:endParaRPr lang="en-US" dirty="0"/>
+          </a:p>
+        </p:txBody>
+      </p:sp>
+      <p:sp>
+        <p:nvSpPr>
+          <p:cNvPr id="4" name="Slide Number Placeholder 3"/>
+          <p:cNvSpPr>
+            <a:spLocks noGrp="1"/>
+          </p:cNvSpPr>
+          <p:nvPr>
+            <p:ph type="sldNum" sz="quarter" idx="10"/>
+          </p:nvPr>
+        </p:nvSpPr>
+        <p:spPr/>
+        <p:txBody>
+          <a:bodyPr/>
+          <a:lstStyle/>
+          <a:p>
+            <a:fld id="{F7021451-1387-4CA6-816F-3879F97B5CBC}" type="slidenum">
+              <a:rPr lang="en-US"/>
+              <a:t>12</a:t>
             </a:fld>
             <a:endParaRPr lang="en-US"/>
           </a:p>
@@ -776,7 +865,7 @@
           <a:p>
             <a:r>
               <a:rPr lang="en-US" dirty="0"/>
-              <a:t>El dato de 1.040€/año sale de una estimacion propia (10€ de media perdidos por viaje), no de una fuente externa. Es honesto explicar que la primera cifra que se penso (120€/ano) no cuadraba con las cuentas reales, y se corrigio.</a:t>
+              <a:t>Actualizado 17/09: rango en vez de cifra fija, y 5€/viaje en vez de 10€ (Nadia considero la primera estimacion demasiado dramatizada). Un rango (260-520€/ano) es mas honesto que un unico numero porque la frecuencia real varia semana a semana. Es la segunda correccion de esta cifra: la primera version (120€/ano) tampoco cuadraba con las cuentas reales.</a:t>
             </a:r>
             <a:endParaRPr lang="en-US" dirty="0"/>
           </a:p>
@@ -952,7 +1041,7 @@
           <a:p>
             <a:r>
               <a:rPr lang="en-US" dirty="0"/>
-              <a:t>Conclusion del estado del arte: el hueco no es "mas bonita", es rapidez de Notas + colaboracion de Bring + atribucion (quien apunto que) + saber que hay en casa SIN pedir que nadie cuente unidades a mano -- esto ultimo se corrigio el 17/09 porque la version anterior ("ahorro y control de stock") caia en el mismo error que criticamos de AnyList. Tambien vale mencionar el testimonio propio: en casa se abandono una app similar tras 2 usos por pereza de abrir "otra app".</a:t>
+              <a:t>Diapositiva nueva (17/09) a peticion de Nadia: anticipar la objecion de un desarrollador de AnyList antes de que la haga alguien en la defensa. El argumento se vuelve en su contra -- si papel y boli tampoco tienen esas funciones y aun asi ganan en uso real, lo que anaden esas apps es complejidad, no lo que faltaba. Ademas el enfoque de recetas encaja con un publico mas asentado (ej. una madre de familia), no con el estudiante medio -- el meal prep de moda entre jovenes busca cocinar MENOS, no explorar recetas. Conclusion: ni siquiera cumplen bien la funcion de lista, porque el paso intermedio da pereza.</a:t>
             </a:r>
             <a:endParaRPr lang="en-US" dirty="0"/>
           </a:p>
@@ -1040,7 +1129,7 @@
           <a:p>
             <a:r>
               <a:rPr lang="en-US" dirty="0"/>
-              <a:t>RESULTADOS FINALES -- encuesta cerrada el 17/09/2026, n=32 (2 envios duplicados por accidente descartados: "las cantidades" y la broma "Amor y Paz", cada par contado una vez). El dato mas fuerte de toda la encuesta: 0/32 usa una app HOY como metodo (Pregunta 3) -- las 2 que probaron una app (Bring!, "Notas") la abandonaron, sin excepcion, en las 4 tandas de la recogida. El "metodo ganador" (Papel vs Notas) nunca se asento -- cambio de lider en cada tanda por 1-2 respuestas -- es un empate tecnico, se documenta asi en vez de forzar un ganador. El dato conjunto (53%, 17/32) se mantuvo estable por encima de la mitad en las ultimas tres tandas (58%-&gt;55%-&gt;53%) -- la senal mas solida de toda la encuesta.</a:t>
+              <a:t>Conclusion del estado del arte: el hueco no es "mas bonita", es rapidez de Notas + colaboracion de Bring + atribucion (quien apunto que) + saber que hay en casa SIN pedir que nadie cuente unidades a mano -- esto ultimo se corrigio el 17/09 porque la version anterior ("ahorro y control de stock") caia en el mismo error que criticamos de AnyList. Tambien vale mencionar el testimonio propio: en casa se abandono una app similar tras 2 usos por pereza de abrir "otra app".</a:t>
             </a:r>
             <a:endParaRPr lang="en-US" dirty="0"/>
           </a:p>
@@ -1128,7 +1217,7 @@
           <a:p>
             <a:r>
               <a:rPr lang="en-US" dirty="0"/>
-              <a:t>RESULTADOS FINALES, n=32 (encuesta cerrada 17/09/2026; 2 duplicados por envio accidental descartados). Categorizacion: "no se quien compro que" y "llevar la cuenta de quien compro que antes" cuentan para AMBAS columnas (coop + tracker de gastos), "no saber que quieren los otros"/"comen mis cosas"/"compran cosas que no quiero"/"people eating my food"/"dudar en comprar algo y que se lo coma otro" es coop puro, "no participan/tardan en pagar" es tracker de gastos puro. Cooperacion termino como el tema mas repetido con diferencia (8/32, 25%) en toda la recogida. Correccion 17/09: separamos "caducidad/comida que se estropea" (3 menciones, entra en el plan de construccion con un campo de dias de frescura por categoria en nuestra propia base de datos, sin Odoo) de "se acaba y nadie avisa" (1 mencion, esta se resuelve gratis solo con que Fridge sea compartida -- ya no dependemos de logica de "aviso de stock bajo"). Las menciones de precio (2) siguen fuera de esta diapositiva por espacio -- estan en ideacion.md.</a:t>
+              <a:t>RESULTADOS FINALES -- encuesta cerrada el 17/09/2026, n=32 (2 envios duplicados por accidente descartados: "las cantidades" y la broma "Amor y Paz", cada par contado una vez). El dato mas fuerte de toda la encuesta: 0/32 usa una app HOY como metodo (Pregunta 3) -- las 2 que probaron una app (Bring!, "Notas") la abandonaron, sin excepcion, en las 4 tandas de la recogida. El "metodo ganador" (Papel vs Notas) nunca se asento -- cambio de lider en cada tanda por 1-2 respuestas -- es un empate tecnico, se documenta asi en vez de forzar un ganador. El dato conjunto (53%, 17/32) se mantuvo estable por encima de la mitad en las ultimas tres tandas (58%-&gt;55%-&gt;53%) -- la senal mas solida de toda la encuesta. Correccion 17/09: la cita de Bring! no fue espontanea -- la Pregunta 7 tiene un seguimiento explicito ("¿cual, y por que la dejaste?") que se activa solo si contestas que si probaste una app; se corrigio el texto para no decir "sin que se le pregunte".</a:t>
             </a:r>
             <a:endParaRPr lang="en-US" dirty="0"/>
           </a:p>
@@ -1216,7 +1305,7 @@
           <a:p>
             <a:r>
               <a:rPr lang="en-US" dirty="0"/>
-              <a:t>Se amplio el segmento objetivo a estudiantes+parejas+cualquiera que comparta gastos. Al no encontrar un desglose fiable para ese cruce en A Coruña, el mercado objetivo se iguala al accesible, y se documenta honestamente la limitacion de la busqueda.</a:t>
+              <a:t>RESULTADOS FINALES, n=32 (encuesta cerrada 17/09/2026; 2 duplicados por envio accidental descartados). Categorizacion: "no se quien compro que" y "llevar la cuenta de quien compro que antes" cuentan para AMBAS columnas (coop + tracker de gastos), "no saber que quieren los otros"/"comen mis cosas"/"compran cosas que no quiero"/"people eating my food"/"dudar en comprar algo y que se lo coma otro" es coop puro, "no participan/tardan en pagar" es tracker de gastos puro. Cooperacion termino como el tema mas repetido con diferencia (8/32, 25%) en toda la recogida. Correccion 17/09: separamos "caducidad/comida que se estropea" (3 menciones, entra en el plan de construccion con un campo de dias de frescura por categoria en nuestra propia base de datos, sin Odoo) de "se acaba y nadie avisa" (1 mencion, esta se resuelve gratis solo con que Fridge sea compartida -- ya no dependemos de logica de "aviso de stock bajo"). Las menciones de precio (2) siguen fuera de esta diapositiva por espacio -- estan en ideacion.md.</a:t>
             </a:r>
             <a:endParaRPr lang="en-US" dirty="0"/>
           </a:p>
@@ -1304,7 +1393,7 @@
           <a:p>
             <a:r>
               <a:rPr lang="en-US" dirty="0"/>
-              <a:t>Coste fijo 0 porque se usa el tier gratuito de Render, sin dominio de pago. Eso hace el punto de equilibrio trivial (1 hogar), pero viene con un coste tecnico real: sleep del servicio y disco efimero para SQLite.</a:t>
+              <a:t>Se amplio el segmento objetivo a estudiantes+parejas+cualquiera que comparta gastos. Al no encontrar un desglose fiable para ese cruce en A Coruña, el mercado objetivo se iguala al accesible, y se documenta honestamente la limitacion de la busqueda.</a:t>
             </a:r>
             <a:endParaRPr lang="en-US" dirty="0"/>
           </a:p>
@@ -1392,7 +1481,7 @@
           <a:p>
             <a:r>
               <a:rPr lang="en-US" dirty="0"/>
-              <a:t>Actualizado 17/09 tras el giro de producto: se retira Odoo (Prices se calcula sobre nuestro propio historial de compras, no un catalogo externo que alguien tendria que mantener a mano). Se decide construir para esta entrega lo que antes era "P2 hipotetico" (lectura de tickets con Gemini, prediccion de consumo) -- la columna de la derecha se queda solo con lo que de verdad no compensa construir nunca en este proyecto. Nadie nos elegiria por construir facturacion o cobro con tarjeta propios; si por como llevamos nevera y lista compartida. Orden de construccion: una pantalla completa antes de abrir la siguiente -- eso no cambia aunque el alcance de cada pantalla haya crecido.</a:t>
+              <a:t>Actualizado 17/09: sin monetizacion. No hay punto de equilibrio que calcular porque no hay precio -- lo unico que tiene que cuadrar es que el coste fijo siga en 0. Publico acotado a estudiantes (antes decia "hogar compartido" en general); la cifra de "cuantos hay" pasa a la mas ajustada a ese publico (~650 pisos de estudiantes) en vez del mercado accesible completo (~99.700), que se mantiene documentado en la seccion de estudio de mercado como techo, no como objetivo de esta casilla.</a:t>
             </a:r>
             <a:endParaRPr lang="en-US" dirty="0"/>
           </a:p>
@@ -1873,7 +1962,7 @@
               <a:buNone/>
             </a:pPr>
             <a:r>
-              <a:rPr lang="en-US" sz="1800" i="1" dirty="0">
+              <a:rPr lang="en-US" sz="1700" i="1" dirty="0">
                 <a:solidFill>
                   <a:srgbClr val="D9A441"/>
                 </a:solidFill>
@@ -1881,9 +1970,9 @@
                 <a:ea typeface="Calibri" pitchFamily="34" charset="-122"/>
                 <a:cs typeface="Calibri" pitchFamily="34" charset="-120"/>
               </a:rPr>
-              <a:t>La nevera y la compra de un hogar compartido, sin líos ni WhatsApp</a:t>
-            </a:r>
-            <a:endParaRPr lang="en-US" sz="1800" dirty="0"/>
+              <a:t>La lista de la compra se genera sola a partir de lo que hay en la nevera de tu piso compartido</a:t>
+            </a:r>
+            <a:endParaRPr lang="en-US" sz="1700" dirty="0"/>
           </a:p>
         </p:txBody>
       </p:sp>
@@ -2074,7 +2163,7 @@
                 <a:ea typeface="Calibri" pitchFamily="34" charset="-122"/>
                 <a:cs typeface="Calibri" pitchFamily="34" charset="-120"/>
               </a:rPr>
-              <a:t>PASO 6</a:t>
+              <a:t>PASO 5</a:t>
             </a:r>
             <a:endParaRPr lang="en-US" sz="1200" dirty="0"/>
           </a:p>
@@ -2113,7 +2202,7 @@
                 <a:ea typeface="Cambria" pitchFamily="34" charset="-122"/>
                 <a:cs typeface="Cambria" pitchFamily="34" charset="-120"/>
               </a:rPr>
-              <a:t>Documento de una página</a:t>
+              <a:t>Las 3 columnas del alcance</a:t>
             </a:r>
             <a:endParaRPr lang="en-US" sz="2800" dirty="0"/>
           </a:p>
@@ -2128,15 +2217,15 @@
         <p:spPr>
           <a:xfrm>
             <a:off x="548640" y="1417320"/>
-            <a:ext cx="5440680" cy="896112"/>
+            <a:ext cx="3611880" cy="3246120"/>
           </a:xfrm>
           <a:prstGeom prst="roundRect">
             <a:avLst>
-              <a:gd name="adj" fmla="val 12245"/>
+              <a:gd name="adj" fmla="val 3380"/>
             </a:avLst>
           </a:prstGeom>
           <a:solidFill>
-            <a:srgbClr val="F4E9DA"/>
+            <a:srgbClr val="F6E4D3"/>
           </a:solidFill>
           <a:ln/>
           <a:effectLst>
@@ -2150,100 +2239,210 @@
       </p:sp>
       <p:sp>
         <p:nvSpPr>
-          <p:cNvPr id="7" name="Text 4"/>
-          <p:cNvSpPr txBox="1"/>
-          <p:nvPr/>
-        </p:nvSpPr>
-        <p:spPr>
-          <a:xfrm>
-            <a:off x="731520" y="1490472"/>
-            <a:ext cx="5074920" cy="237744"/>
-          </a:xfrm>
-          <a:prstGeom prst="rect">
-            <a:avLst/>
-          </a:prstGeom>
-          <a:noFill/>
-          <a:ln/>
-        </p:spPr>
-        <p:txBody>
-          <a:bodyPr wrap="square" lIns="0" tIns="0" rIns="0" bIns="0" rtlCol="0" anchor="ctr"/>
-          <a:lstStyle/>
-          <a:p>
-            <a:pPr indent="0" marL="0">
-              <a:buNone/>
-            </a:pPr>
-            <a:r>
-              <a:rPr lang="en-US" sz="1000" b="1" spc="100" kern="0" dirty="0">
-                <a:solidFill>
-                  <a:srgbClr val="C9682B"/>
-                </a:solidFill>
-                <a:latin typeface="Calibri" pitchFamily="34" charset="0"/>
-                <a:ea typeface="Calibri" pitchFamily="34" charset="-122"/>
-                <a:cs typeface="Calibri" pitchFamily="34" charset="-120"/>
-              </a:rPr>
-              <a:t>NOMBRE Y MENSAJE</a:t>
-            </a:r>
-            <a:endParaRPr lang="en-US" sz="1000" dirty="0"/>
-          </a:p>
-        </p:txBody>
-      </p:sp>
-      <p:sp>
-        <p:nvSpPr>
-          <p:cNvPr id="8" name="Text 5"/>
-          <p:cNvSpPr txBox="1"/>
-          <p:nvPr/>
-        </p:nvSpPr>
-        <p:spPr>
-          <a:xfrm>
-            <a:off x="731520" y="1728216"/>
-            <a:ext cx="5074920" cy="530352"/>
-          </a:xfrm>
-          <a:prstGeom prst="rect">
-            <a:avLst/>
-          </a:prstGeom>
-          <a:noFill/>
-          <a:ln/>
-        </p:spPr>
-        <p:txBody>
-          <a:bodyPr wrap="square" lIns="0" tIns="0" rIns="0" bIns="0" rtlCol="0" anchor="t"/>
-          <a:lstStyle/>
-          <a:p>
-            <a:pPr indent="0" marL="0">
-              <a:buNone/>
-            </a:pPr>
-            <a:r>
-              <a:rPr lang="en-US" sz="1100" dirty="0">
-                <a:solidFill>
-                  <a:srgbClr val="2E2119"/>
-                </a:solidFill>
-                <a:latin typeface="Calibri" pitchFamily="34" charset="0"/>
-                <a:ea typeface="Calibri" pitchFamily="34" charset="-122"/>
-                <a:cs typeface="Calibri" pitchFamily="34" charset="-120"/>
-              </a:rPr>
-              <a:t>Larder — controlar la nevera y la compra sin duplicados ni viajes extra, sin depender de un WhatsApp desordenado.</a:t>
-            </a:r>
-            <a:endParaRPr lang="en-US" sz="1100" dirty="0"/>
-          </a:p>
-        </p:txBody>
-      </p:sp>
-      <p:sp>
-        <p:nvSpPr>
-          <p:cNvPr id="9" name="Shape 6"/>
+          <p:cNvPr id="7" name="Shape 4"/>
           <p:cNvSpPr/>
           <p:nvPr/>
         </p:nvSpPr>
         <p:spPr>
           <a:xfrm>
-            <a:off x="6172200" y="1417320"/>
-            <a:ext cx="5440680" cy="896112"/>
+            <a:off x="731520" y="1600200"/>
+            <a:ext cx="3246120" cy="411480"/>
           </a:xfrm>
           <a:prstGeom prst="roundRect">
             <a:avLst>
-              <a:gd name="adj" fmla="val 12245"/>
+              <a:gd name="adj" fmla="val 17778"/>
             </a:avLst>
           </a:prstGeom>
           <a:solidFill>
-            <a:srgbClr val="EDE6DC"/>
+            <a:srgbClr val="C9682B"/>
+          </a:solidFill>
+          <a:ln/>
+        </p:spPr>
+      </p:sp>
+      <p:sp>
+        <p:nvSpPr>
+          <p:cNvPr id="8" name="Text 5"/>
+          <p:cNvSpPr txBox="1"/>
+          <p:nvPr/>
+        </p:nvSpPr>
+        <p:spPr>
+          <a:xfrm>
+            <a:off x="731520" y="1600200"/>
+            <a:ext cx="3246120" cy="411480"/>
+          </a:xfrm>
+          <a:prstGeom prst="rect">
+            <a:avLst/>
+          </a:prstGeom>
+          <a:noFill/>
+          <a:ln/>
+        </p:spPr>
+        <p:txBody>
+          <a:bodyPr wrap="square" lIns="0" tIns="0" rIns="0" bIns="0" rtlCol="0" anchor="ctr"/>
+          <a:lstStyle/>
+          <a:p>
+            <a:pPr algn="ctr" indent="0" marL="0">
+              <a:buNone/>
+            </a:pPr>
+            <a:r>
+              <a:rPr lang="en-US" sz="1400" b="1" dirty="0">
+                <a:solidFill>
+                  <a:srgbClr val="FFFFFF"/>
+                </a:solidFill>
+                <a:latin typeface="Cambria" pitchFamily="34" charset="0"/>
+                <a:ea typeface="Cambria" pitchFamily="34" charset="-122"/>
+                <a:cs typeface="Cambria" pitchFamily="34" charset="-120"/>
+              </a:rPr>
+              <a:t>Lo construimos</a:t>
+            </a:r>
+            <a:endParaRPr lang="en-US" sz="1400" dirty="0"/>
+          </a:p>
+        </p:txBody>
+      </p:sp>
+      <p:sp>
+        <p:nvSpPr>
+          <p:cNvPr id="9" name="Text 6"/>
+          <p:cNvSpPr txBox="1"/>
+          <p:nvPr/>
+        </p:nvSpPr>
+        <p:spPr>
+          <a:xfrm>
+            <a:off x="777240" y="2194560"/>
+            <a:ext cx="3154680" cy="2286000"/>
+          </a:xfrm>
+          <a:prstGeom prst="rect">
+            <a:avLst/>
+          </a:prstGeom>
+          <a:noFill/>
+          <a:ln/>
+        </p:spPr>
+        <p:txBody>
+          <a:bodyPr wrap="square" lIns="0" tIns="0" rIns="0" bIns="0" rtlCol="0" anchor="t"/>
+          <a:lstStyle/>
+          <a:p>
+            <a:pPr marL="342900" indent="-342900">
+              <a:spcAft>
+                <a:spcPts val="700"/>
+              </a:spcAft>
+              <a:buSzPct val="100000"/>
+              <a:buChar char="•"/>
+            </a:pPr>
+            <a:r>
+              <a:rPr lang="en-US" sz="1000" dirty="0">
+                <a:solidFill>
+                  <a:srgbClr val="2E2119"/>
+                </a:solidFill>
+                <a:latin typeface="Calibri" pitchFamily="34" charset="0"/>
+                <a:ea typeface="Calibri" pitchFamily="34" charset="-122"/>
+                <a:cs typeface="Calibri" pitchFamily="34" charset="-120"/>
+              </a:rPr>
+              <a:t>Nevera: 3 estados (bien/queda poco/se acabó), sin cantidades — se rellena sola al comprar</a:t>
+            </a:r>
+            <a:endParaRPr lang="en-US" sz="1000" dirty="0"/>
+          </a:p>
+          <a:p>
+            <a:pPr marL="342900" indent="-342900">
+              <a:spcAft>
+                <a:spcPts val="700"/>
+              </a:spcAft>
+              <a:buSzPct val="100000"/>
+              <a:buChar char="•"/>
+            </a:pPr>
+            <a:r>
+              <a:rPr lang="en-US" sz="1000" dirty="0">
+                <a:solidFill>
+                  <a:srgbClr val="2E2119"/>
+                </a:solidFill>
+                <a:latin typeface="Calibri" pitchFamily="34" charset="0"/>
+                <a:ea typeface="Calibri" pitchFamily="34" charset="-122"/>
+                <a:cs typeface="Calibri" pitchFamily="34" charset="-120"/>
+              </a:rPr>
+              <a:t>Lista que se genera sola a partir de la nevera, con concurrencia</a:t>
+            </a:r>
+            <a:endParaRPr lang="en-US" sz="1000" dirty="0"/>
+          </a:p>
+          <a:p>
+            <a:pPr marL="342900" indent="-342900">
+              <a:spcAft>
+                <a:spcPts val="700"/>
+              </a:spcAft>
+              <a:buSzPct val="100000"/>
+              <a:buChar char="•"/>
+            </a:pPr>
+            <a:r>
+              <a:rPr lang="en-US" sz="1000" dirty="0">
+                <a:solidFill>
+                  <a:srgbClr val="2E2119"/>
+                </a:solidFill>
+                <a:latin typeface="Calibri" pitchFamily="34" charset="0"/>
+                <a:ea typeface="Calibri" pitchFamily="34" charset="-122"/>
+                <a:cs typeface="Calibri" pitchFamily="34" charset="-120"/>
+              </a:rPr>
+              <a:t>Historial + cálculo de quién debe a quién</a:t>
+            </a:r>
+            <a:endParaRPr lang="en-US" sz="1000" dirty="0"/>
+          </a:p>
+          <a:p>
+            <a:pPr marL="342900" indent="-342900">
+              <a:spcAft>
+                <a:spcPts val="700"/>
+              </a:spcAft>
+              <a:buSzPct val="100000"/>
+              <a:buChar char="•"/>
+            </a:pPr>
+            <a:r>
+              <a:rPr lang="en-US" sz="1000" dirty="0">
+                <a:solidFill>
+                  <a:srgbClr val="2E2119"/>
+                </a:solidFill>
+                <a:latin typeface="Calibri" pitchFamily="34" charset="0"/>
+                <a:ea typeface="Calibri" pitchFamily="34" charset="-122"/>
+                <a:cs typeface="Calibri" pitchFamily="34" charset="-120"/>
+              </a:rPr>
+              <a:t>Precios sobre nuestro propio historial de compras</a:t>
+            </a:r>
+            <a:endParaRPr lang="en-US" sz="1000" dirty="0"/>
+          </a:p>
+          <a:p>
+            <a:pPr marL="342900" indent="-342900">
+              <a:spcAft>
+                <a:spcPts val="700"/>
+              </a:spcAft>
+              <a:buSzPct val="100000"/>
+              <a:buChar char="•"/>
+            </a:pPr>
+            <a:r>
+              <a:rPr lang="en-US" sz="1000" dirty="0">
+                <a:solidFill>
+                  <a:srgbClr val="2E2119"/>
+                </a:solidFill>
+                <a:latin typeface="Calibri" pitchFamily="34" charset="0"/>
+                <a:ea typeface="Calibri" pitchFamily="34" charset="-122"/>
+                <a:cs typeface="Calibri" pitchFamily="34" charset="-120"/>
+              </a:rPr>
+              <a:t>Predicción de reposición (aritmética sobre eventos propios)</a:t>
+            </a:r>
+            <a:endParaRPr lang="en-US" sz="1000" dirty="0"/>
+          </a:p>
+        </p:txBody>
+      </p:sp>
+      <p:sp>
+        <p:nvSpPr>
+          <p:cNvPr id="10" name="Shape 7"/>
+          <p:cNvSpPr/>
+          <p:nvPr/>
+        </p:nvSpPr>
+        <p:spPr>
+          <a:xfrm>
+            <a:off x="4297680" y="1417320"/>
+            <a:ext cx="3611880" cy="3246120"/>
+          </a:xfrm>
+          <a:prstGeom prst="roundRect">
+            <a:avLst>
+              <a:gd name="adj" fmla="val 3380"/>
+            </a:avLst>
+          </a:prstGeom>
+          <a:solidFill>
+            <a:srgbClr val="F4EFE8"/>
           </a:solidFill>
           <a:ln/>
           <a:effectLst>
@@ -2257,100 +2456,168 @@
       </p:sp>
       <p:sp>
         <p:nvSpPr>
-          <p:cNvPr id="10" name="Text 7"/>
-          <p:cNvSpPr txBox="1"/>
-          <p:nvPr/>
-        </p:nvSpPr>
-        <p:spPr>
-          <a:xfrm>
-            <a:off x="6355080" y="1490472"/>
-            <a:ext cx="5074920" cy="237744"/>
-          </a:xfrm>
-          <a:prstGeom prst="rect">
-            <a:avLst/>
-          </a:prstGeom>
-          <a:noFill/>
-          <a:ln/>
-        </p:spPr>
-        <p:txBody>
-          <a:bodyPr wrap="square" lIns="0" tIns="0" rIns="0" bIns="0" rtlCol="0" anchor="ctr"/>
-          <a:lstStyle/>
-          <a:p>
-            <a:pPr indent="0" marL="0">
-              <a:buNone/>
-            </a:pPr>
-            <a:r>
-              <a:rPr lang="en-US" sz="1000" b="1" spc="100" kern="0" dirty="0">
-                <a:solidFill>
-                  <a:srgbClr val="C9682B"/>
-                </a:solidFill>
-                <a:latin typeface="Calibri" pitchFamily="34" charset="0"/>
-                <a:ea typeface="Calibri" pitchFamily="34" charset="-122"/>
-                <a:cs typeface="Calibri" pitchFamily="34" charset="-120"/>
-              </a:rPr>
-              <a:t>PÚBLICO</a:t>
-            </a:r>
-            <a:endParaRPr lang="en-US" sz="1000" dirty="0"/>
-          </a:p>
-        </p:txBody>
-      </p:sp>
-      <p:sp>
-        <p:nvSpPr>
-          <p:cNvPr id="11" name="Text 8"/>
-          <p:cNvSpPr txBox="1"/>
-          <p:nvPr/>
-        </p:nvSpPr>
-        <p:spPr>
-          <a:xfrm>
-            <a:off x="6355080" y="1728216"/>
-            <a:ext cx="5074920" cy="530352"/>
-          </a:xfrm>
-          <a:prstGeom prst="rect">
-            <a:avLst/>
-          </a:prstGeom>
-          <a:noFill/>
-          <a:ln/>
-        </p:spPr>
-        <p:txBody>
-          <a:bodyPr wrap="square" lIns="0" tIns="0" rIns="0" bIns="0" rtlCol="0" anchor="t"/>
-          <a:lstStyle/>
-          <a:p>
-            <a:pPr indent="0" marL="0">
-              <a:buNone/>
-            </a:pPr>
-            <a:r>
-              <a:rPr lang="en-US" sz="1100" dirty="0">
-                <a:solidFill>
-                  <a:srgbClr val="2E2119"/>
-                </a:solidFill>
-                <a:latin typeface="Calibri" pitchFamily="34" charset="0"/>
-                <a:ea typeface="Calibri" pitchFamily="34" charset="-122"/>
-                <a:cs typeface="Calibri" pitchFamily="34" charset="-120"/>
-              </a:rPr>
-              <a:t>Quien organiza la compra en un hogar compartido de A Coruña. ≈99.700 hogares accesibles.</a:t>
-            </a:r>
-            <a:endParaRPr lang="en-US" sz="1100" dirty="0"/>
-          </a:p>
-        </p:txBody>
-      </p:sp>
-      <p:sp>
-        <p:nvSpPr>
-          <p:cNvPr id="12" name="Shape 9"/>
+          <p:cNvPr id="11" name="Shape 8"/>
           <p:cNvSpPr/>
           <p:nvPr/>
         </p:nvSpPr>
         <p:spPr>
           <a:xfrm>
-            <a:off x="548640" y="2432304"/>
-            <a:ext cx="5440680" cy="896112"/>
+            <a:off x="4480560" y="1600200"/>
+            <a:ext cx="3246120" cy="411480"/>
           </a:xfrm>
           <a:prstGeom prst="roundRect">
             <a:avLst>
-              <a:gd name="adj" fmla="val 12245"/>
+              <a:gd name="adj" fmla="val 17778"/>
             </a:avLst>
           </a:prstGeom>
           <a:solidFill>
-            <a:srgbClr val="F4E9DA"/>
+            <a:srgbClr val="D9A441"/>
+          </a:solidFill>
+          <a:ln/>
+        </p:spPr>
+      </p:sp>
+      <p:sp>
+        <p:nvSpPr>
+          <p:cNvPr id="12" name="Text 9"/>
+          <p:cNvSpPr txBox="1"/>
+          <p:nvPr/>
+        </p:nvSpPr>
+        <p:spPr>
+          <a:xfrm>
+            <a:off x="4480560" y="1600200"/>
+            <a:ext cx="3246120" cy="411480"/>
+          </a:xfrm>
+          <a:prstGeom prst="rect">
+            <a:avLst/>
+          </a:prstGeom>
+          <a:noFill/>
+          <a:ln/>
+        </p:spPr>
+        <p:txBody>
+          <a:bodyPr wrap="square" lIns="0" tIns="0" rIns="0" bIns="0" rtlCol="0" anchor="ctr"/>
+          <a:lstStyle/>
+          <a:p>
+            <a:pPr algn="ctr" indent="0" marL="0">
+              <a:buNone/>
+            </a:pPr>
+            <a:r>
+              <a:rPr lang="en-US" sz="1400" b="1" dirty="0">
+                <a:solidFill>
+                  <a:srgbClr val="FFFFFF"/>
+                </a:solidFill>
+                <a:latin typeface="Cambria" pitchFamily="34" charset="0"/>
+                <a:ea typeface="Cambria" pitchFamily="34" charset="-122"/>
+                <a:cs typeface="Cambria" pitchFamily="34" charset="-120"/>
+              </a:rPr>
+              <a:t>Lo hace un servicio externo</a:t>
+            </a:r>
+            <a:endParaRPr lang="en-US" sz="1400" dirty="0"/>
+          </a:p>
+        </p:txBody>
+      </p:sp>
+      <p:sp>
+        <p:nvSpPr>
+          <p:cNvPr id="13" name="Text 10"/>
+          <p:cNvSpPr txBox="1"/>
+          <p:nvPr/>
+        </p:nvSpPr>
+        <p:spPr>
+          <a:xfrm>
+            <a:off x="4526280" y="2194560"/>
+            <a:ext cx="3154680" cy="2286000"/>
+          </a:xfrm>
+          <a:prstGeom prst="rect">
+            <a:avLst/>
+          </a:prstGeom>
+          <a:noFill/>
+          <a:ln/>
+        </p:spPr>
+        <p:txBody>
+          <a:bodyPr wrap="square" lIns="0" tIns="0" rIns="0" bIns="0" rtlCol="0" anchor="t"/>
+          <a:lstStyle/>
+          <a:p>
+            <a:pPr marL="342900" indent="-342900">
+              <a:spcAft>
+                <a:spcPts val="700"/>
+              </a:spcAft>
+              <a:buSzPct val="100000"/>
+              <a:buChar char="•"/>
+            </a:pPr>
+            <a:r>
+              <a:rPr lang="en-US" sz="1000" dirty="0">
+                <a:solidFill>
+                  <a:srgbClr val="2E2119"/>
+                </a:solidFill>
+                <a:latin typeface="Calibri" pitchFamily="34" charset="0"/>
+                <a:ea typeface="Calibri" pitchFamily="34" charset="-122"/>
+                <a:cs typeface="Calibri" pitchFamily="34" charset="-120"/>
+              </a:rPr>
+              <a:t>Diccionario de productos (Open Food Facts, gratis)</a:t>
+            </a:r>
+            <a:endParaRPr lang="en-US" sz="1000" dirty="0"/>
+          </a:p>
+          <a:p>
+            <a:pPr marL="342900" indent="-342900">
+              <a:spcAft>
+                <a:spcPts val="700"/>
+              </a:spcAft>
+              <a:buSzPct val="100000"/>
+              <a:buChar char="•"/>
+            </a:pPr>
+            <a:r>
+              <a:rPr lang="en-US" sz="1000" dirty="0">
+                <a:solidFill>
+                  <a:srgbClr val="2E2119"/>
+                </a:solidFill>
+                <a:latin typeface="Calibri" pitchFamily="34" charset="0"/>
+                <a:ea typeface="Calibri" pitchFamily="34" charset="-122"/>
+                <a:cs typeface="Calibri" pitchFamily="34" charset="-120"/>
+              </a:rPr>
+              <a:t>Lectura de tickets → items (Gemini API, free tier — la IA solo se usa aquí)</a:t>
+            </a:r>
+            <a:endParaRPr lang="en-US" sz="1000" dirty="0"/>
+          </a:p>
+          <a:p>
+            <a:pPr marL="342900" indent="-342900">
+              <a:spcAft>
+                <a:spcPts val="700"/>
+              </a:spcAft>
+              <a:buSzPct val="100000"/>
+              <a:buChar char="•"/>
+            </a:pPr>
+            <a:r>
+              <a:rPr lang="en-US" sz="1000" dirty="0">
+                <a:solidFill>
+                  <a:srgbClr val="2E2119"/>
+                </a:solidFill>
+                <a:latin typeface="Calibri" pitchFamily="34" charset="0"/>
+                <a:ea typeface="Calibri" pitchFamily="34" charset="-122"/>
+                <a:cs typeface="Calibri" pitchFamily="34" charset="-120"/>
+              </a:rPr>
+              <a:t>Aviso de turno de compra (bot de Telegram, gratis)</a:t>
+            </a:r>
+            <a:endParaRPr lang="en-US" sz="1000" dirty="0"/>
+          </a:p>
+        </p:txBody>
+      </p:sp>
+      <p:sp>
+        <p:nvSpPr>
+          <p:cNvPr id="14" name="Shape 11"/>
+          <p:cNvSpPr/>
+          <p:nvPr/>
+        </p:nvSpPr>
+        <p:spPr>
+          <a:xfrm>
+            <a:off x="8046720" y="1417320"/>
+            <a:ext cx="3611880" cy="3246120"/>
+          </a:xfrm>
+          <a:prstGeom prst="roundRect">
+            <a:avLst>
+              <a:gd name="adj" fmla="val 3380"/>
+            </a:avLst>
+          </a:prstGeom>
+          <a:solidFill>
+            <a:srgbClr val="F4EFE8"/>
           </a:solidFill>
           <a:ln/>
           <a:effectLst>
@@ -2364,109 +2631,24 @@
       </p:sp>
       <p:sp>
         <p:nvSpPr>
-          <p:cNvPr id="13" name="Text 10"/>
-          <p:cNvSpPr txBox="1"/>
-          <p:nvPr/>
-        </p:nvSpPr>
-        <p:spPr>
-          <a:xfrm>
-            <a:off x="731520" y="2505456"/>
-            <a:ext cx="5074920" cy="237744"/>
-          </a:xfrm>
-          <a:prstGeom prst="rect">
-            <a:avLst/>
-          </a:prstGeom>
-          <a:noFill/>
-          <a:ln/>
-        </p:spPr>
-        <p:txBody>
-          <a:bodyPr wrap="square" lIns="0" tIns="0" rIns="0" bIns="0" rtlCol="0" anchor="ctr"/>
-          <a:lstStyle/>
-          <a:p>
-            <a:pPr indent="0" marL="0">
-              <a:buNone/>
-            </a:pPr>
-            <a:r>
-              <a:rPr lang="en-US" sz="1000" b="1" spc="100" kern="0" dirty="0">
-                <a:solidFill>
-                  <a:srgbClr val="C9682B"/>
-                </a:solidFill>
-                <a:latin typeface="Calibri" pitchFamily="34" charset="0"/>
-                <a:ea typeface="Calibri" pitchFamily="34" charset="-122"/>
-                <a:cs typeface="Calibri" pitchFamily="34" charset="-120"/>
-              </a:rPr>
-              <a:t>PROBLEMA</a:t>
-            </a:r>
-            <a:endParaRPr lang="en-US" sz="1000" dirty="0"/>
-          </a:p>
-        </p:txBody>
-      </p:sp>
-      <p:sp>
-        <p:nvSpPr>
-          <p:cNvPr id="14" name="Text 11"/>
-          <p:cNvSpPr txBox="1"/>
-          <p:nvPr/>
-        </p:nvSpPr>
-        <p:spPr>
-          <a:xfrm>
-            <a:off x="731520" y="2743200"/>
-            <a:ext cx="5074920" cy="530352"/>
-          </a:xfrm>
-          <a:prstGeom prst="rect">
-            <a:avLst/>
-          </a:prstGeom>
-          <a:noFill/>
-          <a:ln/>
-        </p:spPr>
-        <p:txBody>
-          <a:bodyPr wrap="square" lIns="0" tIns="0" rIns="0" bIns="0" rtlCol="0" anchor="t"/>
-          <a:lstStyle/>
-          <a:p>
-            <a:pPr indent="0" marL="0">
-              <a:buNone/>
-            </a:pPr>
-            <a:r>
-              <a:rPr lang="en-US" sz="1100" dirty="0">
-                <a:solidFill>
-                  <a:srgbClr val="2E2119"/>
-                </a:solidFill>
-                <a:latin typeface="Calibri" pitchFamily="34" charset="0"/>
-                <a:ea typeface="Calibri" pitchFamily="34" charset="-122"/>
-                <a:cs typeface="Calibri" pitchFamily="34" charset="-120"/>
-              </a:rPr>
-              <a:t>10-15 min/lista a ojo, 2 viajes/semana sin plan, ≈1.040€/año perdidos.</a:t>
-            </a:r>
-            <a:endParaRPr lang="en-US" sz="1100" dirty="0"/>
-          </a:p>
-        </p:txBody>
-      </p:sp>
-      <p:sp>
-        <p:nvSpPr>
           <p:cNvPr id="15" name="Shape 12"/>
           <p:cNvSpPr/>
           <p:nvPr/>
         </p:nvSpPr>
         <p:spPr>
           <a:xfrm>
-            <a:off x="6172200" y="2432304"/>
-            <a:ext cx="5440680" cy="896112"/>
+            <a:off x="8229600" y="1600200"/>
+            <a:ext cx="3246120" cy="411480"/>
           </a:xfrm>
           <a:prstGeom prst="roundRect">
             <a:avLst>
-              <a:gd name="adj" fmla="val 12245"/>
+              <a:gd name="adj" fmla="val 17778"/>
             </a:avLst>
           </a:prstGeom>
           <a:solidFill>
-            <a:srgbClr val="EDE6DC"/>
+            <a:srgbClr val="8A7A6D"/>
           </a:solidFill>
           <a:ln/>
-          <a:effectLst>
-            <a:outerShdw sx="100000" sy="100000" kx="0" ky="0" algn="bl" rotWithShape="0" blurRad="76200" dist="25400" dir="5400000">
-              <a:srgbClr val="000000">
-                <a:alpha val="12000"/>
-              </a:srgbClr>
-            </a:outerShdw>
-          </a:effectLst>
         </p:spPr>
       </p:sp>
       <p:sp>
@@ -2477,8 +2659,8 @@
         </p:nvSpPr>
         <p:spPr>
           <a:xfrm>
-            <a:off x="6355080" y="2505456"/>
-            <a:ext cx="5074920" cy="237744"/>
+            <a:off x="8229600" y="1600200"/>
+            <a:ext cx="3246120" cy="411480"/>
           </a:xfrm>
           <a:prstGeom prst="rect">
             <a:avLst/>
@@ -2490,50 +2672,75 @@
           <a:bodyPr wrap="square" lIns="0" tIns="0" rIns="0" bIns="0" rtlCol="0" anchor="ctr"/>
           <a:lstStyle/>
           <a:p>
-            <a:pPr indent="0" marL="0">
-              <a:buNone/>
-            </a:pPr>
-            <a:r>
-              <a:rPr lang="en-US" sz="1000" b="1" spc="100" kern="0" dirty="0">
-                <a:solidFill>
-                  <a:srgbClr val="C9682B"/>
-                </a:solidFill>
-                <a:latin typeface="Calibri" pitchFamily="34" charset="0"/>
-                <a:ea typeface="Calibri" pitchFamily="34" charset="-122"/>
-                <a:cs typeface="Calibri" pitchFamily="34" charset="-120"/>
-              </a:rPr>
-              <a:t>NÚMEROS</a:t>
+            <a:pPr algn="ctr" indent="0" marL="0">
+              <a:buNone/>
+            </a:pPr>
+            <a:r>
+              <a:rPr lang="en-US" sz="1400" b="1" dirty="0">
+                <a:solidFill>
+                  <a:srgbClr val="FFFFFF"/>
+                </a:solidFill>
+                <a:latin typeface="Cambria" pitchFamily="34" charset="0"/>
+                <a:ea typeface="Cambria" pitchFamily="34" charset="-122"/>
+                <a:cs typeface="Cambria" pitchFamily="34" charset="-120"/>
+              </a:rPr>
+              <a:t>No se hace este curso</a:t>
+            </a:r>
+            <a:endParaRPr lang="en-US" sz="1400" dirty="0"/>
+          </a:p>
+        </p:txBody>
+      </p:sp>
+      <p:sp>
+        <p:nvSpPr>
+          <p:cNvPr id="17" name="Text 14"/>
+          <p:cNvSpPr txBox="1"/>
+          <p:nvPr/>
+        </p:nvSpPr>
+        <p:spPr>
+          <a:xfrm>
+            <a:off x="8275320" y="2194560"/>
+            <a:ext cx="3154680" cy="2286000"/>
+          </a:xfrm>
+          <a:prstGeom prst="rect">
+            <a:avLst/>
+          </a:prstGeom>
+          <a:noFill/>
+          <a:ln/>
+        </p:spPr>
+        <p:txBody>
+          <a:bodyPr wrap="square" lIns="0" tIns="0" rIns="0" bIns="0" rtlCol="0" anchor="t"/>
+          <a:lstStyle/>
+          <a:p>
+            <a:pPr marL="342900" indent="-342900">
+              <a:spcAft>
+                <a:spcPts val="700"/>
+              </a:spcAft>
+              <a:buSzPct val="100000"/>
+              <a:buChar char="•"/>
+            </a:pPr>
+            <a:r>
+              <a:rPr lang="en-US" sz="1000" dirty="0">
+                <a:solidFill>
+                  <a:srgbClr val="2E2119"/>
+                </a:solidFill>
+                <a:latin typeface="Calibri" pitchFamily="34" charset="0"/>
+                <a:ea typeface="Calibri" pitchFamily="34" charset="-122"/>
+                <a:cs typeface="Calibri" pitchFamily="34" charset="-120"/>
+              </a:rPr>
+              <a:t>Escaneo de código de barras</a:t>
             </a:r>
             <a:endParaRPr lang="en-US" sz="1000" dirty="0"/>
           </a:p>
-        </p:txBody>
-      </p:sp>
-      <p:sp>
-        <p:nvSpPr>
-          <p:cNvPr id="17" name="Text 14"/>
-          <p:cNvSpPr txBox="1"/>
-          <p:nvPr/>
-        </p:nvSpPr>
-        <p:spPr>
-          <a:xfrm>
-            <a:off x="6355080" y="2743200"/>
-            <a:ext cx="5074920" cy="530352"/>
-          </a:xfrm>
-          <a:prstGeom prst="rect">
-            <a:avLst/>
-          </a:prstGeom>
-          <a:noFill/>
-          <a:ln/>
-        </p:spPr>
-        <p:txBody>
-          <a:bodyPr wrap="square" lIns="0" tIns="0" rIns="0" bIns="0" rtlCol="0" anchor="t"/>
-          <a:lstStyle/>
-          <a:p>
-            <a:pPr indent="0" marL="0">
-              <a:buNone/>
-            </a:pPr>
-            <a:r>
-              <a:rPr lang="en-US" sz="1100" dirty="0">
+          <a:p>
+            <a:pPr marL="342900" indent="-342900">
+              <a:spcAft>
+                <a:spcPts val="700"/>
+              </a:spcAft>
+              <a:buSzPct val="100000"/>
+              <a:buChar char="•"/>
+            </a:pPr>
+            <a:r>
+              <a:rPr lang="en-US" sz="1000" dirty="0">
                 <a:solidFill>
                   <a:srgbClr val="2E2119"/>
                 </a:solidFill>
@@ -2541,9 +2748,51 @@
                 <a:ea typeface="Calibri" pitchFamily="34" charset="-122"/>
                 <a:cs typeface="Calibri" pitchFamily="34" charset="-120"/>
               </a:rPr>
-              <a:t>0,99€/mes · coste fijo 0€ · equilibrio: 1 hogar.</a:t>
-            </a:r>
-            <a:endParaRPr lang="en-US" sz="1100" dirty="0"/>
+              <a:t>Cobro real con tarjeta</a:t>
+            </a:r>
+            <a:endParaRPr lang="en-US" sz="1000" dirty="0"/>
+          </a:p>
+          <a:p>
+            <a:pPr marL="342900" indent="-342900">
+              <a:spcAft>
+                <a:spcPts val="700"/>
+              </a:spcAft>
+              <a:buSzPct val="100000"/>
+              <a:buChar char="•"/>
+            </a:pPr>
+            <a:r>
+              <a:rPr lang="en-US" sz="1000" dirty="0">
+                <a:solidFill>
+                  <a:srgbClr val="2E2119"/>
+                </a:solidFill>
+                <a:latin typeface="Calibri" pitchFamily="34" charset="0"/>
+                <a:ea typeface="Calibri" pitchFamily="34" charset="-122"/>
+                <a:cs typeface="Calibri" pitchFamily="34" charset="-120"/>
+              </a:rPr>
+              <a:t>Notificaciones push nativas (Telegram es la excepción)</a:t>
+            </a:r>
+            <a:endParaRPr lang="en-US" sz="1000" dirty="0"/>
+          </a:p>
+          <a:p>
+            <a:pPr marL="342900" indent="-342900">
+              <a:spcAft>
+                <a:spcPts val="700"/>
+              </a:spcAft>
+              <a:buSzPct val="100000"/>
+              <a:buChar char="•"/>
+            </a:pPr>
+            <a:r>
+              <a:rPr lang="en-US" sz="1000" dirty="0">
+                <a:solidFill>
+                  <a:srgbClr val="2E2119"/>
+                </a:solidFill>
+                <a:latin typeface="Calibri" pitchFamily="34" charset="0"/>
+                <a:ea typeface="Calibri" pitchFamily="34" charset="-122"/>
+                <a:cs typeface="Calibri" pitchFamily="34" charset="-120"/>
+              </a:rPr>
+              <a:t>Liquidar deudas de verdad</a:t>
+            </a:r>
+            <a:endParaRPr lang="en-US" sz="1000" dirty="0"/>
           </a:p>
         </p:txBody>
       </p:sp>
@@ -2555,25 +2804,18 @@
         </p:nvSpPr>
         <p:spPr>
           <a:xfrm>
-            <a:off x="548640" y="3447288"/>
-            <a:ext cx="5440680" cy="896112"/>
+            <a:off x="548640" y="4846320"/>
+            <a:ext cx="11064240" cy="1417320"/>
           </a:xfrm>
           <a:prstGeom prst="roundRect">
             <a:avLst>
-              <a:gd name="adj" fmla="val 12245"/>
+              <a:gd name="adj" fmla="val 7742"/>
             </a:avLst>
           </a:prstGeom>
           <a:solidFill>
-            <a:srgbClr val="F4E9DA"/>
+            <a:srgbClr val="2E2119"/>
           </a:solidFill>
           <a:ln/>
-          <a:effectLst>
-            <a:outerShdw sx="100000" sy="100000" kx="0" ky="0" algn="bl" rotWithShape="0" blurRad="76200" dist="25400" dir="5400000">
-              <a:srgbClr val="000000">
-                <a:alpha val="12000"/>
-              </a:srgbClr>
-            </a:outerShdw>
-          </a:effectLst>
         </p:spPr>
       </p:sp>
       <p:sp>
@@ -2584,8 +2826,8 @@
         </p:nvSpPr>
         <p:spPr>
           <a:xfrm>
-            <a:off x="731520" y="3520440"/>
-            <a:ext cx="5074920" cy="237744"/>
+            <a:off x="868680" y="4956048"/>
+            <a:ext cx="10424160" cy="914400"/>
           </a:xfrm>
           <a:prstGeom prst="rect">
             <a:avLst/>
@@ -2601,17 +2843,17 @@
               <a:buNone/>
             </a:pPr>
             <a:r>
-              <a:rPr lang="en-US" sz="1000" b="1" spc="100" kern="0" dirty="0">
-                <a:solidFill>
-                  <a:srgbClr val="C9682B"/>
-                </a:solidFill>
-                <a:latin typeface="Calibri" pitchFamily="34" charset="0"/>
-                <a:ea typeface="Calibri" pitchFamily="34" charset="-122"/>
-                <a:cs typeface="Calibri" pitchFamily="34" charset="-120"/>
-              </a:rPr>
-              <a:t>ALCANCE</a:t>
-            </a:r>
-            <a:endParaRPr lang="en-US" sz="1000" dirty="0"/>
+              <a:rPr lang="en-US" sz="1250" i="1" dirty="0">
+                <a:solidFill>
+                  <a:srgbClr val="D9A441"/>
+                </a:solidFill>
+                <a:latin typeface="Calibri" pitchFamily="34" charset="0"/>
+                <a:ea typeface="Calibri" pitchFamily="34" charset="-122"/>
+                <a:cs typeface="Calibri" pitchFamily="34" charset="-120"/>
+              </a:rPr>
+              <a:t>"Un hogar de A Coruña deja de escribir la lista de la compra: la nevera se rellena sola al comprar, avisa cuando algo se acaba, y la lista sale de ahí. El grupo se entera por Telegram, marca la compra en tiempo real, y consulta después quién debe qué y dónde sale más barato cada cosa."</a:t>
+            </a:r>
+            <a:endParaRPr lang="en-US" sz="1250" dirty="0"/>
           </a:p>
         </p:txBody>
       </p:sp>
@@ -2623,17 +2865,17 @@
         </p:nvSpPr>
         <p:spPr>
           <a:xfrm>
-            <a:off x="731520" y="3758184"/>
-            <a:ext cx="5074920" cy="530352"/>
-          </a:xfrm>
-          <a:prstGeom prst="rect">
-            <a:avLst/>
-          </a:prstGeom>
-          <a:noFill/>
-          <a:ln/>
-        </p:spPr>
-        <p:txBody>
-          <a:bodyPr wrap="square" lIns="0" tIns="0" rIns="0" bIns="0" rtlCol="0" anchor="t"/>
+            <a:off x="868680" y="5852160"/>
+            <a:ext cx="10424160" cy="320040"/>
+          </a:xfrm>
+          <a:prstGeom prst="rect">
+            <a:avLst/>
+          </a:prstGeom>
+          <a:noFill/>
+          <a:ln/>
+        </p:spPr>
+        <p:txBody>
+          <a:bodyPr wrap="square" lIns="0" tIns="0" rIns="0" bIns="0" rtlCol="0" anchor="ctr"/>
           <a:lstStyle/>
           <a:p>
             <a:pPr indent="0" marL="0">
@@ -2642,227 +2884,13 @@
             <a:r>
               <a:rPr lang="en-US" sz="1100" dirty="0">
                 <a:solidFill>
-                  <a:srgbClr val="2E2119"/>
-                </a:solidFill>
-                <a:latin typeface="Calibri" pitchFamily="34" charset="0"/>
-                <a:ea typeface="Calibri" pitchFamily="34" charset="-122"/>
-                <a:cs typeface="Calibri" pitchFamily="34" charset="-120"/>
-              </a:rPr>
-              <a:t>Nevera (sin cantidades) + Lista que se genera sola + Historial + Precios sobre nuestro propio historial + lectura de tickets y predicción. Cobro real, fuera de alcance.</a:t>
-            </a:r>
-            <a:endParaRPr lang="en-US" sz="1100" dirty="0"/>
-          </a:p>
-        </p:txBody>
-      </p:sp>
-      <p:sp>
-        <p:nvSpPr>
-          <p:cNvPr id="21" name="Shape 18"/>
-          <p:cNvSpPr/>
-          <p:nvPr/>
-        </p:nvSpPr>
-        <p:spPr>
-          <a:xfrm>
-            <a:off x="6172200" y="3447288"/>
-            <a:ext cx="5440680" cy="896112"/>
-          </a:xfrm>
-          <a:prstGeom prst="roundRect">
-            <a:avLst>
-              <a:gd name="adj" fmla="val 12245"/>
-            </a:avLst>
-          </a:prstGeom>
-          <a:solidFill>
-            <a:srgbClr val="EDE6DC"/>
-          </a:solidFill>
-          <a:ln/>
-          <a:effectLst>
-            <a:outerShdw sx="100000" sy="100000" kx="0" ky="0" algn="bl" rotWithShape="0" blurRad="76200" dist="25400" dir="5400000">
-              <a:srgbClr val="000000">
-                <a:alpha val="12000"/>
-              </a:srgbClr>
-            </a:outerShdw>
-          </a:effectLst>
-        </p:spPr>
-      </p:sp>
-      <p:sp>
-        <p:nvSpPr>
-          <p:cNvPr id="22" name="Text 19"/>
-          <p:cNvSpPr txBox="1"/>
-          <p:nvPr/>
-        </p:nvSpPr>
-        <p:spPr>
-          <a:xfrm>
-            <a:off x="6355080" y="3520440"/>
-            <a:ext cx="5074920" cy="237744"/>
-          </a:xfrm>
-          <a:prstGeom prst="rect">
-            <a:avLst/>
-          </a:prstGeom>
-          <a:noFill/>
-          <a:ln/>
-        </p:spPr>
-        <p:txBody>
-          <a:bodyPr wrap="square" lIns="0" tIns="0" rIns="0" bIns="0" rtlCol="0" anchor="ctr"/>
-          <a:lstStyle/>
-          <a:p>
-            <a:pPr indent="0" marL="0">
-              <a:buNone/>
-            </a:pPr>
-            <a:r>
-              <a:rPr lang="en-US" sz="1000" b="1" spc="100" kern="0" dirty="0">
-                <a:solidFill>
-                  <a:srgbClr val="C9682B"/>
-                </a:solidFill>
-                <a:latin typeface="Calibri" pitchFamily="34" charset="0"/>
-                <a:ea typeface="Calibri" pitchFamily="34" charset="-122"/>
-                <a:cs typeface="Calibri" pitchFamily="34" charset="-120"/>
-              </a:rPr>
-              <a:t>CANAL</a:t>
-            </a:r>
-            <a:endParaRPr lang="en-US" sz="1000" dirty="0"/>
-          </a:p>
-        </p:txBody>
-      </p:sp>
-      <p:sp>
-        <p:nvSpPr>
-          <p:cNvPr id="23" name="Text 20"/>
-          <p:cNvSpPr txBox="1"/>
-          <p:nvPr/>
-        </p:nvSpPr>
-        <p:spPr>
-          <a:xfrm>
-            <a:off x="6355080" y="3758184"/>
-            <a:ext cx="5074920" cy="530352"/>
-          </a:xfrm>
-          <a:prstGeom prst="rect">
-            <a:avLst/>
-          </a:prstGeom>
-          <a:noFill/>
-          <a:ln/>
-        </p:spPr>
-        <p:txBody>
-          <a:bodyPr wrap="square" lIns="0" tIns="0" rIns="0" bIns="0" rtlCol="0" anchor="t"/>
-          <a:lstStyle/>
-          <a:p>
-            <a:pPr indent="0" marL="0">
-              <a:buNone/>
-            </a:pPr>
-            <a:r>
-              <a:rPr lang="en-US" sz="1100" dirty="0">
-                <a:solidFill>
-                  <a:srgbClr val="2E2119"/>
-                </a:solidFill>
-                <a:latin typeface="Calibri" pitchFamily="34" charset="0"/>
-                <a:ea typeface="Calibri" pitchFamily="34" charset="-122"/>
-                <a:cs typeface="Calibri" pitchFamily="34" charset="-120"/>
-              </a:rPr>
-              <a:t>Directo: el propio hogar es el primer usuario real.</a:t>
-            </a:r>
-            <a:endParaRPr lang="en-US" sz="1100" dirty="0"/>
-          </a:p>
-        </p:txBody>
-      </p:sp>
-      <p:sp>
-        <p:nvSpPr>
-          <p:cNvPr id="24" name="Shape 21"/>
-          <p:cNvSpPr/>
-          <p:nvPr/>
-        </p:nvSpPr>
-        <p:spPr>
-          <a:xfrm>
-            <a:off x="548640" y="4462272"/>
-            <a:ext cx="5440680" cy="896112"/>
-          </a:xfrm>
-          <a:prstGeom prst="roundRect">
-            <a:avLst>
-              <a:gd name="adj" fmla="val 12245"/>
-            </a:avLst>
-          </a:prstGeom>
-          <a:solidFill>
-            <a:srgbClr val="F4E9DA"/>
-          </a:solidFill>
-          <a:ln/>
-          <a:effectLst>
-            <a:outerShdw sx="100000" sy="100000" kx="0" ky="0" algn="bl" rotWithShape="0" blurRad="76200" dist="25400" dir="5400000">
-              <a:srgbClr val="000000">
-                <a:alpha val="12000"/>
-              </a:srgbClr>
-            </a:outerShdw>
-          </a:effectLst>
-        </p:spPr>
-      </p:sp>
-      <p:sp>
-        <p:nvSpPr>
-          <p:cNvPr id="25" name="Text 22"/>
-          <p:cNvSpPr txBox="1"/>
-          <p:nvPr/>
-        </p:nvSpPr>
-        <p:spPr>
-          <a:xfrm>
-            <a:off x="731520" y="4535424"/>
-            <a:ext cx="5074920" cy="237744"/>
-          </a:xfrm>
-          <a:prstGeom prst="rect">
-            <a:avLst/>
-          </a:prstGeom>
-          <a:noFill/>
-          <a:ln/>
-        </p:spPr>
-        <p:txBody>
-          <a:bodyPr wrap="square" lIns="0" tIns="0" rIns="0" bIns="0" rtlCol="0" anchor="ctr"/>
-          <a:lstStyle/>
-          <a:p>
-            <a:pPr indent="0" marL="0">
-              <a:buNone/>
-            </a:pPr>
-            <a:r>
-              <a:rPr lang="en-US" sz="1000" b="1" spc="100" kern="0" dirty="0">
-                <a:solidFill>
-                  <a:srgbClr val="C9682B"/>
-                </a:solidFill>
-                <a:latin typeface="Calibri" pitchFamily="34" charset="0"/>
-                <a:ea typeface="Calibri" pitchFamily="34" charset="-122"/>
-                <a:cs typeface="Calibri" pitchFamily="34" charset="-120"/>
-              </a:rPr>
-              <a:t>QUÉ NO HAREMOS</a:t>
-            </a:r>
-            <a:endParaRPr lang="en-US" sz="1000" dirty="0"/>
-          </a:p>
-        </p:txBody>
-      </p:sp>
-      <p:sp>
-        <p:nvSpPr>
-          <p:cNvPr id="26" name="Text 23"/>
-          <p:cNvSpPr txBox="1"/>
-          <p:nvPr/>
-        </p:nvSpPr>
-        <p:spPr>
-          <a:xfrm>
-            <a:off x="731520" y="4773168"/>
-            <a:ext cx="5074920" cy="530352"/>
-          </a:xfrm>
-          <a:prstGeom prst="rect">
-            <a:avLst/>
-          </a:prstGeom>
-          <a:noFill/>
-          <a:ln/>
-        </p:spPr>
-        <p:txBody>
-          <a:bodyPr wrap="square" lIns="0" tIns="0" rIns="0" bIns="0" rtlCol="0" anchor="t"/>
-          <a:lstStyle/>
-          <a:p>
-            <a:pPr indent="0" marL="0">
-              <a:buNone/>
-            </a:pPr>
-            <a:r>
-              <a:rPr lang="en-US" sz="1100" dirty="0">
-                <a:solidFill>
-                  <a:srgbClr val="2E2119"/>
-                </a:solidFill>
-                <a:latin typeface="Calibri" pitchFamily="34" charset="0"/>
-                <a:ea typeface="Calibri" pitchFamily="34" charset="-122"/>
-                <a:cs typeface="Calibri" pitchFamily="34" charset="-120"/>
-              </a:rPr>
-              <a:t>Código de barras, cobro con tarjeta, notificaciones push nativas (Telegram es la excepción), liquidar deudas de verdad.</a:t>
+                  <a:srgbClr val="D8CBBE"/>
+                </a:solidFill>
+                <a:latin typeface="Calibri" pitchFamily="34" charset="0"/>
+                <a:ea typeface="Calibri" pitchFamily="34" charset="-122"/>
+                <a:cs typeface="Calibri" pitchFamily="34" charset="-120"/>
+              </a:rPr>
+              <a:t>Orden de construcción: Nevera → Lista (concurrencia) → Historial → Precios</a:t>
             </a:r>
             <a:endParaRPr lang="en-US" sz="1100" dirty="0"/>
           </a:p>
@@ -2879,6 +2907,909 @@
 <file path=ppt/slides/slide11.xml><?xml version="1.0" encoding="utf-8"?>
 <p:sld xmlns:a="http://schemas.openxmlformats.org/drawingml/2006/main" xmlns:r="http://schemas.openxmlformats.org/officeDocument/2006/relationships" xmlns:p="http://schemas.openxmlformats.org/presentationml/2006/main">
   <p:cSld name="Slide 11">
+    <p:bg>
+      <p:bgPr>
+        <a:solidFill>
+          <a:srgbClr val="FFFFFF"/>
+        </a:solidFill>
+      </p:bgPr>
+    </p:bg>
+    <p:spTree>
+      <p:nvGrpSpPr>
+        <p:cNvPr id="1" name=""/>
+        <p:cNvGrpSpPr/>
+        <p:nvPr/>
+      </p:nvGrpSpPr>
+      <p:grpSpPr>
+        <a:xfrm>
+          <a:off x="0" y="0"/>
+          <a:ext cx="0" cy="0"/>
+          <a:chOff x="0" y="0"/>
+          <a:chExt cx="0" cy="0"/>
+        </a:xfrm>
+      </p:grpSpPr>
+      <p:sp>
+        <p:nvSpPr>
+          <p:cNvPr id="2" name="Shape 0"/>
+          <p:cNvSpPr/>
+          <p:nvPr/>
+        </p:nvSpPr>
+        <p:spPr>
+          <a:xfrm>
+            <a:off x="548640" y="457200"/>
+            <a:ext cx="566928" cy="566928"/>
+          </a:xfrm>
+          <a:prstGeom prst="ellipse">
+            <a:avLst/>
+          </a:prstGeom>
+          <a:solidFill>
+            <a:srgbClr val="C9682B"/>
+          </a:solidFill>
+          <a:ln/>
+        </p:spPr>
+      </p:sp>
+      <p:pic>
+        <p:nvPicPr>
+          <p:cNvPr id="3" name="Image 0" descr="preencoded.png">    </p:cNvPr>
+          <p:cNvPicPr>
+            <a:picLocks noChangeAspect="1"/>
+          </p:cNvPicPr>
+          <p:nvPr/>
+        </p:nvPicPr>
+        <p:blipFill>
+          <a:blip r:embed="rId1"/>
+          <a:stretch>
+            <a:fillRect/>
+          </a:stretch>
+        </p:blipFill>
+        <p:spPr>
+          <a:xfrm>
+            <a:off x="684703" y="593263"/>
+            <a:ext cx="294803" cy="294803"/>
+          </a:xfrm>
+          <a:prstGeom prst="rect">
+            <a:avLst/>
+          </a:prstGeom>
+        </p:spPr>
+      </p:pic>
+      <p:sp>
+        <p:nvSpPr>
+          <p:cNvPr id="4" name="Text 1"/>
+          <p:cNvSpPr txBox="1"/>
+          <p:nvPr/>
+        </p:nvSpPr>
+        <p:spPr>
+          <a:xfrm>
+            <a:off x="1280160" y="438912"/>
+            <a:ext cx="7315200" cy="274320"/>
+          </a:xfrm>
+          <a:prstGeom prst="rect">
+            <a:avLst/>
+          </a:prstGeom>
+          <a:noFill/>
+          <a:ln/>
+        </p:spPr>
+        <p:txBody>
+          <a:bodyPr wrap="square" lIns="0" tIns="0" rIns="0" bIns="0" rtlCol="0" anchor="ctr"/>
+          <a:lstStyle/>
+          <a:p>
+            <a:pPr indent="0" marL="0">
+              <a:buNone/>
+            </a:pPr>
+            <a:r>
+              <a:rPr lang="en-US" sz="1200" b="1" spc="200" kern="0" dirty="0">
+                <a:solidFill>
+                  <a:srgbClr val="C9682B"/>
+                </a:solidFill>
+                <a:latin typeface="Calibri" pitchFamily="34" charset="0"/>
+                <a:ea typeface="Calibri" pitchFamily="34" charset="-122"/>
+                <a:cs typeface="Calibri" pitchFamily="34" charset="-120"/>
+              </a:rPr>
+              <a:t>PASO 6</a:t>
+            </a:r>
+            <a:endParaRPr lang="en-US" sz="1200" dirty="0"/>
+          </a:p>
+        </p:txBody>
+      </p:sp>
+      <p:sp>
+        <p:nvSpPr>
+          <p:cNvPr id="5" name="Text 2"/>
+          <p:cNvSpPr txBox="1"/>
+          <p:nvPr/>
+        </p:nvSpPr>
+        <p:spPr>
+          <a:xfrm>
+            <a:off x="1280160" y="676656"/>
+            <a:ext cx="9601200" cy="502920"/>
+          </a:xfrm>
+          <a:prstGeom prst="rect">
+            <a:avLst/>
+          </a:prstGeom>
+          <a:noFill/>
+          <a:ln/>
+        </p:spPr>
+        <p:txBody>
+          <a:bodyPr wrap="square" lIns="0" tIns="0" rIns="0" bIns="0" rtlCol="0" anchor="ctr"/>
+          <a:lstStyle/>
+          <a:p>
+            <a:pPr indent="0" marL="0">
+              <a:buNone/>
+            </a:pPr>
+            <a:r>
+              <a:rPr lang="en-US" sz="2800" b="1" dirty="0">
+                <a:solidFill>
+                  <a:srgbClr val="2E2119"/>
+                </a:solidFill>
+                <a:latin typeface="Cambria" pitchFamily="34" charset="0"/>
+                <a:ea typeface="Cambria" pitchFamily="34" charset="-122"/>
+                <a:cs typeface="Cambria" pitchFamily="34" charset="-120"/>
+              </a:rPr>
+              <a:t>Documento de una página</a:t>
+            </a:r>
+            <a:endParaRPr lang="en-US" sz="2800" dirty="0"/>
+          </a:p>
+        </p:txBody>
+      </p:sp>
+      <p:sp>
+        <p:nvSpPr>
+          <p:cNvPr id="6" name="Shape 3"/>
+          <p:cNvSpPr/>
+          <p:nvPr/>
+        </p:nvSpPr>
+        <p:spPr>
+          <a:xfrm>
+            <a:off x="548640" y="1417320"/>
+            <a:ext cx="5440680" cy="896112"/>
+          </a:xfrm>
+          <a:prstGeom prst="roundRect">
+            <a:avLst>
+              <a:gd name="adj" fmla="val 12245"/>
+            </a:avLst>
+          </a:prstGeom>
+          <a:solidFill>
+            <a:srgbClr val="F4E9DA"/>
+          </a:solidFill>
+          <a:ln/>
+          <a:effectLst>
+            <a:outerShdw sx="100000" sy="100000" kx="0" ky="0" algn="bl" rotWithShape="0" blurRad="76200" dist="25400" dir="5400000">
+              <a:srgbClr val="000000">
+                <a:alpha val="12000"/>
+              </a:srgbClr>
+            </a:outerShdw>
+          </a:effectLst>
+        </p:spPr>
+      </p:sp>
+      <p:sp>
+        <p:nvSpPr>
+          <p:cNvPr id="7" name="Text 4"/>
+          <p:cNvSpPr txBox="1"/>
+          <p:nvPr/>
+        </p:nvSpPr>
+        <p:spPr>
+          <a:xfrm>
+            <a:off x="731520" y="1490472"/>
+            <a:ext cx="5074920" cy="237744"/>
+          </a:xfrm>
+          <a:prstGeom prst="rect">
+            <a:avLst/>
+          </a:prstGeom>
+          <a:noFill/>
+          <a:ln/>
+        </p:spPr>
+        <p:txBody>
+          <a:bodyPr wrap="square" lIns="0" tIns="0" rIns="0" bIns="0" rtlCol="0" anchor="ctr"/>
+          <a:lstStyle/>
+          <a:p>
+            <a:pPr indent="0" marL="0">
+              <a:buNone/>
+            </a:pPr>
+            <a:r>
+              <a:rPr lang="en-US" sz="1000" b="1" spc="100" kern="0" dirty="0">
+                <a:solidFill>
+                  <a:srgbClr val="C9682B"/>
+                </a:solidFill>
+                <a:latin typeface="Calibri" pitchFamily="34" charset="0"/>
+                <a:ea typeface="Calibri" pitchFamily="34" charset="-122"/>
+                <a:cs typeface="Calibri" pitchFamily="34" charset="-120"/>
+              </a:rPr>
+              <a:t>NOMBRE Y MENSAJE</a:t>
+            </a:r>
+            <a:endParaRPr lang="en-US" sz="1000" dirty="0"/>
+          </a:p>
+        </p:txBody>
+      </p:sp>
+      <p:sp>
+        <p:nvSpPr>
+          <p:cNvPr id="8" name="Text 5"/>
+          <p:cNvSpPr txBox="1"/>
+          <p:nvPr/>
+        </p:nvSpPr>
+        <p:spPr>
+          <a:xfrm>
+            <a:off x="731520" y="1728216"/>
+            <a:ext cx="5074920" cy="530352"/>
+          </a:xfrm>
+          <a:prstGeom prst="rect">
+            <a:avLst/>
+          </a:prstGeom>
+          <a:noFill/>
+          <a:ln/>
+        </p:spPr>
+        <p:txBody>
+          <a:bodyPr wrap="square" lIns="0" tIns="0" rIns="0" bIns="0" rtlCol="0" anchor="t"/>
+          <a:lstStyle/>
+          <a:p>
+            <a:pPr indent="0" marL="0">
+              <a:buNone/>
+            </a:pPr>
+            <a:r>
+              <a:rPr lang="en-US" sz="1100" dirty="0">
+                <a:solidFill>
+                  <a:srgbClr val="2E2119"/>
+                </a:solidFill>
+                <a:latin typeface="Calibri" pitchFamily="34" charset="0"/>
+                <a:ea typeface="Calibri" pitchFamily="34" charset="-122"/>
+                <a:cs typeface="Calibri" pitchFamily="34" charset="-120"/>
+              </a:rPr>
+              <a:t>Larder — la lista de la compra se genera sola a partir de lo que hay en la nevera de tu piso compartido.</a:t>
+            </a:r>
+            <a:endParaRPr lang="en-US" sz="1100" dirty="0"/>
+          </a:p>
+        </p:txBody>
+      </p:sp>
+      <p:sp>
+        <p:nvSpPr>
+          <p:cNvPr id="9" name="Shape 6"/>
+          <p:cNvSpPr/>
+          <p:nvPr/>
+        </p:nvSpPr>
+        <p:spPr>
+          <a:xfrm>
+            <a:off x="6172200" y="1417320"/>
+            <a:ext cx="5440680" cy="896112"/>
+          </a:xfrm>
+          <a:prstGeom prst="roundRect">
+            <a:avLst>
+              <a:gd name="adj" fmla="val 12245"/>
+            </a:avLst>
+          </a:prstGeom>
+          <a:solidFill>
+            <a:srgbClr val="EDE6DC"/>
+          </a:solidFill>
+          <a:ln/>
+          <a:effectLst>
+            <a:outerShdw sx="100000" sy="100000" kx="0" ky="0" algn="bl" rotWithShape="0" blurRad="76200" dist="25400" dir="5400000">
+              <a:srgbClr val="000000">
+                <a:alpha val="12000"/>
+              </a:srgbClr>
+            </a:outerShdw>
+          </a:effectLst>
+        </p:spPr>
+      </p:sp>
+      <p:sp>
+        <p:nvSpPr>
+          <p:cNvPr id="10" name="Text 7"/>
+          <p:cNvSpPr txBox="1"/>
+          <p:nvPr/>
+        </p:nvSpPr>
+        <p:spPr>
+          <a:xfrm>
+            <a:off x="6355080" y="1490472"/>
+            <a:ext cx="5074920" cy="237744"/>
+          </a:xfrm>
+          <a:prstGeom prst="rect">
+            <a:avLst/>
+          </a:prstGeom>
+          <a:noFill/>
+          <a:ln/>
+        </p:spPr>
+        <p:txBody>
+          <a:bodyPr wrap="square" lIns="0" tIns="0" rIns="0" bIns="0" rtlCol="0" anchor="ctr"/>
+          <a:lstStyle/>
+          <a:p>
+            <a:pPr indent="0" marL="0">
+              <a:buNone/>
+            </a:pPr>
+            <a:r>
+              <a:rPr lang="en-US" sz="1000" b="1" spc="100" kern="0" dirty="0">
+                <a:solidFill>
+                  <a:srgbClr val="C9682B"/>
+                </a:solidFill>
+                <a:latin typeface="Calibri" pitchFamily="34" charset="0"/>
+                <a:ea typeface="Calibri" pitchFamily="34" charset="-122"/>
+                <a:cs typeface="Calibri" pitchFamily="34" charset="-120"/>
+              </a:rPr>
+              <a:t>PÚBLICO</a:t>
+            </a:r>
+            <a:endParaRPr lang="en-US" sz="1000" dirty="0"/>
+          </a:p>
+        </p:txBody>
+      </p:sp>
+      <p:sp>
+        <p:nvSpPr>
+          <p:cNvPr id="11" name="Text 8"/>
+          <p:cNvSpPr txBox="1"/>
+          <p:nvPr/>
+        </p:nvSpPr>
+        <p:spPr>
+          <a:xfrm>
+            <a:off x="6355080" y="1728216"/>
+            <a:ext cx="5074920" cy="530352"/>
+          </a:xfrm>
+          <a:prstGeom prst="rect">
+            <a:avLst/>
+          </a:prstGeom>
+          <a:noFill/>
+          <a:ln/>
+        </p:spPr>
+        <p:txBody>
+          <a:bodyPr wrap="square" lIns="0" tIns="0" rIns="0" bIns="0" rtlCol="0" anchor="t"/>
+          <a:lstStyle/>
+          <a:p>
+            <a:pPr indent="0" marL="0">
+              <a:buNone/>
+            </a:pPr>
+            <a:r>
+              <a:rPr lang="en-US" sz="1100" dirty="0">
+                <a:solidFill>
+                  <a:srgbClr val="2E2119"/>
+                </a:solidFill>
+                <a:latin typeface="Calibri" pitchFamily="34" charset="0"/>
+                <a:ea typeface="Calibri" pitchFamily="34" charset="-122"/>
+                <a:cs typeface="Calibri" pitchFamily="34" charset="-120"/>
+              </a:rPr>
+              <a:t>Estudiantes que comparten piso en A Coruña. ≈650 pisos como suelo verificable.</a:t>
+            </a:r>
+            <a:endParaRPr lang="en-US" sz="1100" dirty="0"/>
+          </a:p>
+        </p:txBody>
+      </p:sp>
+      <p:sp>
+        <p:nvSpPr>
+          <p:cNvPr id="12" name="Shape 9"/>
+          <p:cNvSpPr/>
+          <p:nvPr/>
+        </p:nvSpPr>
+        <p:spPr>
+          <a:xfrm>
+            <a:off x="548640" y="2432304"/>
+            <a:ext cx="5440680" cy="896112"/>
+          </a:xfrm>
+          <a:prstGeom prst="roundRect">
+            <a:avLst>
+              <a:gd name="adj" fmla="val 12245"/>
+            </a:avLst>
+          </a:prstGeom>
+          <a:solidFill>
+            <a:srgbClr val="F4E9DA"/>
+          </a:solidFill>
+          <a:ln/>
+          <a:effectLst>
+            <a:outerShdw sx="100000" sy="100000" kx="0" ky="0" algn="bl" rotWithShape="0" blurRad="76200" dist="25400" dir="5400000">
+              <a:srgbClr val="000000">
+                <a:alpha val="12000"/>
+              </a:srgbClr>
+            </a:outerShdw>
+          </a:effectLst>
+        </p:spPr>
+      </p:sp>
+      <p:sp>
+        <p:nvSpPr>
+          <p:cNvPr id="13" name="Text 10"/>
+          <p:cNvSpPr txBox="1"/>
+          <p:nvPr/>
+        </p:nvSpPr>
+        <p:spPr>
+          <a:xfrm>
+            <a:off x="731520" y="2505456"/>
+            <a:ext cx="5074920" cy="237744"/>
+          </a:xfrm>
+          <a:prstGeom prst="rect">
+            <a:avLst/>
+          </a:prstGeom>
+          <a:noFill/>
+          <a:ln/>
+        </p:spPr>
+        <p:txBody>
+          <a:bodyPr wrap="square" lIns="0" tIns="0" rIns="0" bIns="0" rtlCol="0" anchor="ctr"/>
+          <a:lstStyle/>
+          <a:p>
+            <a:pPr indent="0" marL="0">
+              <a:buNone/>
+            </a:pPr>
+            <a:r>
+              <a:rPr lang="en-US" sz="1000" b="1" spc="100" kern="0" dirty="0">
+                <a:solidFill>
+                  <a:srgbClr val="C9682B"/>
+                </a:solidFill>
+                <a:latin typeface="Calibri" pitchFamily="34" charset="0"/>
+                <a:ea typeface="Calibri" pitchFamily="34" charset="-122"/>
+                <a:cs typeface="Calibri" pitchFamily="34" charset="-120"/>
+              </a:rPr>
+              <a:t>PROBLEMA</a:t>
+            </a:r>
+            <a:endParaRPr lang="en-US" sz="1000" dirty="0"/>
+          </a:p>
+        </p:txBody>
+      </p:sp>
+      <p:sp>
+        <p:nvSpPr>
+          <p:cNvPr id="14" name="Text 11"/>
+          <p:cNvSpPr txBox="1"/>
+          <p:nvPr/>
+        </p:nvSpPr>
+        <p:spPr>
+          <a:xfrm>
+            <a:off x="731520" y="2743200"/>
+            <a:ext cx="5074920" cy="530352"/>
+          </a:xfrm>
+          <a:prstGeom prst="rect">
+            <a:avLst/>
+          </a:prstGeom>
+          <a:noFill/>
+          <a:ln/>
+        </p:spPr>
+        <p:txBody>
+          <a:bodyPr wrap="square" lIns="0" tIns="0" rIns="0" bIns="0" rtlCol="0" anchor="t"/>
+          <a:lstStyle/>
+          <a:p>
+            <a:pPr indent="0" marL="0">
+              <a:buNone/>
+            </a:pPr>
+            <a:r>
+              <a:rPr lang="en-US" sz="1100" dirty="0">
+                <a:solidFill>
+                  <a:srgbClr val="2E2119"/>
+                </a:solidFill>
+                <a:latin typeface="Calibri" pitchFamily="34" charset="0"/>
+                <a:ea typeface="Calibri" pitchFamily="34" charset="-122"/>
+                <a:cs typeface="Calibri" pitchFamily="34" charset="-120"/>
+              </a:rPr>
+              <a:t>10-15 min/lista a ojo, 1-2 viajes/semana sin plan, 260-520€/año perdidos.</a:t>
+            </a:r>
+            <a:endParaRPr lang="en-US" sz="1100" dirty="0"/>
+          </a:p>
+        </p:txBody>
+      </p:sp>
+      <p:sp>
+        <p:nvSpPr>
+          <p:cNvPr id="15" name="Shape 12"/>
+          <p:cNvSpPr/>
+          <p:nvPr/>
+        </p:nvSpPr>
+        <p:spPr>
+          <a:xfrm>
+            <a:off x="6172200" y="2432304"/>
+            <a:ext cx="5440680" cy="896112"/>
+          </a:xfrm>
+          <a:prstGeom prst="roundRect">
+            <a:avLst>
+              <a:gd name="adj" fmla="val 12245"/>
+            </a:avLst>
+          </a:prstGeom>
+          <a:solidFill>
+            <a:srgbClr val="EDE6DC"/>
+          </a:solidFill>
+          <a:ln/>
+          <a:effectLst>
+            <a:outerShdw sx="100000" sy="100000" kx="0" ky="0" algn="bl" rotWithShape="0" blurRad="76200" dist="25400" dir="5400000">
+              <a:srgbClr val="000000">
+                <a:alpha val="12000"/>
+              </a:srgbClr>
+            </a:outerShdw>
+          </a:effectLst>
+        </p:spPr>
+      </p:sp>
+      <p:sp>
+        <p:nvSpPr>
+          <p:cNvPr id="16" name="Text 13"/>
+          <p:cNvSpPr txBox="1"/>
+          <p:nvPr/>
+        </p:nvSpPr>
+        <p:spPr>
+          <a:xfrm>
+            <a:off x="6355080" y="2505456"/>
+            <a:ext cx="5074920" cy="237744"/>
+          </a:xfrm>
+          <a:prstGeom prst="rect">
+            <a:avLst/>
+          </a:prstGeom>
+          <a:noFill/>
+          <a:ln/>
+        </p:spPr>
+        <p:txBody>
+          <a:bodyPr wrap="square" lIns="0" tIns="0" rIns="0" bIns="0" rtlCol="0" anchor="ctr"/>
+          <a:lstStyle/>
+          <a:p>
+            <a:pPr indent="0" marL="0">
+              <a:buNone/>
+            </a:pPr>
+            <a:r>
+              <a:rPr lang="en-US" sz="1000" b="1" spc="100" kern="0" dirty="0">
+                <a:solidFill>
+                  <a:srgbClr val="C9682B"/>
+                </a:solidFill>
+                <a:latin typeface="Calibri" pitchFamily="34" charset="0"/>
+                <a:ea typeface="Calibri" pitchFamily="34" charset="-122"/>
+                <a:cs typeface="Calibri" pitchFamily="34" charset="-120"/>
+              </a:rPr>
+              <a:t>NÚMEROS</a:t>
+            </a:r>
+            <a:endParaRPr lang="en-US" sz="1000" dirty="0"/>
+          </a:p>
+        </p:txBody>
+      </p:sp>
+      <p:sp>
+        <p:nvSpPr>
+          <p:cNvPr id="17" name="Text 14"/>
+          <p:cNvSpPr txBox="1"/>
+          <p:nvPr/>
+        </p:nvSpPr>
+        <p:spPr>
+          <a:xfrm>
+            <a:off x="6355080" y="2743200"/>
+            <a:ext cx="5074920" cy="530352"/>
+          </a:xfrm>
+          <a:prstGeom prst="rect">
+            <a:avLst/>
+          </a:prstGeom>
+          <a:noFill/>
+          <a:ln/>
+        </p:spPr>
+        <p:txBody>
+          <a:bodyPr wrap="square" lIns="0" tIns="0" rIns="0" bIns="0" rtlCol="0" anchor="t"/>
+          <a:lstStyle/>
+          <a:p>
+            <a:pPr indent="0" marL="0">
+              <a:buNone/>
+            </a:pPr>
+            <a:r>
+              <a:rPr lang="en-US" sz="1100" dirty="0">
+                <a:solidFill>
+                  <a:srgbClr val="2E2119"/>
+                </a:solidFill>
+                <a:latin typeface="Calibri" pitchFamily="34" charset="0"/>
+                <a:ea typeface="Calibri" pitchFamily="34" charset="-122"/>
+                <a:cs typeface="Calibri" pitchFamily="34" charset="-120"/>
+              </a:rPr>
+              <a:t>0€, sin monetización · coste fijo 0€ · éxito = adopción, no ingresos.</a:t>
+            </a:r>
+            <a:endParaRPr lang="en-US" sz="1100" dirty="0"/>
+          </a:p>
+        </p:txBody>
+      </p:sp>
+      <p:sp>
+        <p:nvSpPr>
+          <p:cNvPr id="18" name="Shape 15"/>
+          <p:cNvSpPr/>
+          <p:nvPr/>
+        </p:nvSpPr>
+        <p:spPr>
+          <a:xfrm>
+            <a:off x="548640" y="3447288"/>
+            <a:ext cx="5440680" cy="896112"/>
+          </a:xfrm>
+          <a:prstGeom prst="roundRect">
+            <a:avLst>
+              <a:gd name="adj" fmla="val 12245"/>
+            </a:avLst>
+          </a:prstGeom>
+          <a:solidFill>
+            <a:srgbClr val="F4E9DA"/>
+          </a:solidFill>
+          <a:ln/>
+          <a:effectLst>
+            <a:outerShdw sx="100000" sy="100000" kx="0" ky="0" algn="bl" rotWithShape="0" blurRad="76200" dist="25400" dir="5400000">
+              <a:srgbClr val="000000">
+                <a:alpha val="12000"/>
+              </a:srgbClr>
+            </a:outerShdw>
+          </a:effectLst>
+        </p:spPr>
+      </p:sp>
+      <p:sp>
+        <p:nvSpPr>
+          <p:cNvPr id="19" name="Text 16"/>
+          <p:cNvSpPr txBox="1"/>
+          <p:nvPr/>
+        </p:nvSpPr>
+        <p:spPr>
+          <a:xfrm>
+            <a:off x="731520" y="3520440"/>
+            <a:ext cx="5074920" cy="237744"/>
+          </a:xfrm>
+          <a:prstGeom prst="rect">
+            <a:avLst/>
+          </a:prstGeom>
+          <a:noFill/>
+          <a:ln/>
+        </p:spPr>
+        <p:txBody>
+          <a:bodyPr wrap="square" lIns="0" tIns="0" rIns="0" bIns="0" rtlCol="0" anchor="ctr"/>
+          <a:lstStyle/>
+          <a:p>
+            <a:pPr indent="0" marL="0">
+              <a:buNone/>
+            </a:pPr>
+            <a:r>
+              <a:rPr lang="en-US" sz="1000" b="1" spc="100" kern="0" dirty="0">
+                <a:solidFill>
+                  <a:srgbClr val="C9682B"/>
+                </a:solidFill>
+                <a:latin typeface="Calibri" pitchFamily="34" charset="0"/>
+                <a:ea typeface="Calibri" pitchFamily="34" charset="-122"/>
+                <a:cs typeface="Calibri" pitchFamily="34" charset="-120"/>
+              </a:rPr>
+              <a:t>ALCANCE</a:t>
+            </a:r>
+            <a:endParaRPr lang="en-US" sz="1000" dirty="0"/>
+          </a:p>
+        </p:txBody>
+      </p:sp>
+      <p:sp>
+        <p:nvSpPr>
+          <p:cNvPr id="20" name="Text 17"/>
+          <p:cNvSpPr txBox="1"/>
+          <p:nvPr/>
+        </p:nvSpPr>
+        <p:spPr>
+          <a:xfrm>
+            <a:off x="731520" y="3758184"/>
+            <a:ext cx="5074920" cy="530352"/>
+          </a:xfrm>
+          <a:prstGeom prst="rect">
+            <a:avLst/>
+          </a:prstGeom>
+          <a:noFill/>
+          <a:ln/>
+        </p:spPr>
+        <p:txBody>
+          <a:bodyPr wrap="square" lIns="0" tIns="0" rIns="0" bIns="0" rtlCol="0" anchor="t"/>
+          <a:lstStyle/>
+          <a:p>
+            <a:pPr indent="0" marL="0">
+              <a:buNone/>
+            </a:pPr>
+            <a:r>
+              <a:rPr lang="en-US" sz="1100" dirty="0">
+                <a:solidFill>
+                  <a:srgbClr val="2E2119"/>
+                </a:solidFill>
+                <a:latin typeface="Calibri" pitchFamily="34" charset="0"/>
+                <a:ea typeface="Calibri" pitchFamily="34" charset="-122"/>
+                <a:cs typeface="Calibri" pitchFamily="34" charset="-120"/>
+              </a:rPr>
+              <a:t>Nevera (sin cantidades) + Lista que se genera sola + Historial + Precios sobre nuestro propio historial + lectura de tickets y predicción. Cobro real, fuera de alcance.</a:t>
+            </a:r>
+            <a:endParaRPr lang="en-US" sz="1100" dirty="0"/>
+          </a:p>
+        </p:txBody>
+      </p:sp>
+      <p:sp>
+        <p:nvSpPr>
+          <p:cNvPr id="21" name="Shape 18"/>
+          <p:cNvSpPr/>
+          <p:nvPr/>
+        </p:nvSpPr>
+        <p:spPr>
+          <a:xfrm>
+            <a:off x="6172200" y="3447288"/>
+            <a:ext cx="5440680" cy="896112"/>
+          </a:xfrm>
+          <a:prstGeom prst="roundRect">
+            <a:avLst>
+              <a:gd name="adj" fmla="val 12245"/>
+            </a:avLst>
+          </a:prstGeom>
+          <a:solidFill>
+            <a:srgbClr val="EDE6DC"/>
+          </a:solidFill>
+          <a:ln/>
+          <a:effectLst>
+            <a:outerShdw sx="100000" sy="100000" kx="0" ky="0" algn="bl" rotWithShape="0" blurRad="76200" dist="25400" dir="5400000">
+              <a:srgbClr val="000000">
+                <a:alpha val="12000"/>
+              </a:srgbClr>
+            </a:outerShdw>
+          </a:effectLst>
+        </p:spPr>
+      </p:sp>
+      <p:sp>
+        <p:nvSpPr>
+          <p:cNvPr id="22" name="Text 19"/>
+          <p:cNvSpPr txBox="1"/>
+          <p:nvPr/>
+        </p:nvSpPr>
+        <p:spPr>
+          <a:xfrm>
+            <a:off x="6355080" y="3520440"/>
+            <a:ext cx="5074920" cy="237744"/>
+          </a:xfrm>
+          <a:prstGeom prst="rect">
+            <a:avLst/>
+          </a:prstGeom>
+          <a:noFill/>
+          <a:ln/>
+        </p:spPr>
+        <p:txBody>
+          <a:bodyPr wrap="square" lIns="0" tIns="0" rIns="0" bIns="0" rtlCol="0" anchor="ctr"/>
+          <a:lstStyle/>
+          <a:p>
+            <a:pPr indent="0" marL="0">
+              <a:buNone/>
+            </a:pPr>
+            <a:r>
+              <a:rPr lang="en-US" sz="1000" b="1" spc="100" kern="0" dirty="0">
+                <a:solidFill>
+                  <a:srgbClr val="C9682B"/>
+                </a:solidFill>
+                <a:latin typeface="Calibri" pitchFamily="34" charset="0"/>
+                <a:ea typeface="Calibri" pitchFamily="34" charset="-122"/>
+                <a:cs typeface="Calibri" pitchFamily="34" charset="-120"/>
+              </a:rPr>
+              <a:t>CANAL</a:t>
+            </a:r>
+            <a:endParaRPr lang="en-US" sz="1000" dirty="0"/>
+          </a:p>
+        </p:txBody>
+      </p:sp>
+      <p:sp>
+        <p:nvSpPr>
+          <p:cNvPr id="23" name="Text 20"/>
+          <p:cNvSpPr txBox="1"/>
+          <p:nvPr/>
+        </p:nvSpPr>
+        <p:spPr>
+          <a:xfrm>
+            <a:off x="6355080" y="3758184"/>
+            <a:ext cx="5074920" cy="530352"/>
+          </a:xfrm>
+          <a:prstGeom prst="rect">
+            <a:avLst/>
+          </a:prstGeom>
+          <a:noFill/>
+          <a:ln/>
+        </p:spPr>
+        <p:txBody>
+          <a:bodyPr wrap="square" lIns="0" tIns="0" rIns="0" bIns="0" rtlCol="0" anchor="t"/>
+          <a:lstStyle/>
+          <a:p>
+            <a:pPr indent="0" marL="0">
+              <a:buNone/>
+            </a:pPr>
+            <a:r>
+              <a:rPr lang="en-US" sz="1100" dirty="0">
+                <a:solidFill>
+                  <a:srgbClr val="2E2119"/>
+                </a:solidFill>
+                <a:latin typeface="Calibri" pitchFamily="34" charset="0"/>
+                <a:ea typeface="Calibri" pitchFamily="34" charset="-122"/>
+                <a:cs typeface="Calibri" pitchFamily="34" charset="-120"/>
+              </a:rPr>
+              <a:t>Directo: el propio hogar es el primer usuario real.</a:t>
+            </a:r>
+            <a:endParaRPr lang="en-US" sz="1100" dirty="0"/>
+          </a:p>
+        </p:txBody>
+      </p:sp>
+      <p:sp>
+        <p:nvSpPr>
+          <p:cNvPr id="24" name="Shape 21"/>
+          <p:cNvSpPr/>
+          <p:nvPr/>
+        </p:nvSpPr>
+        <p:spPr>
+          <a:xfrm>
+            <a:off x="548640" y="4462272"/>
+            <a:ext cx="5440680" cy="896112"/>
+          </a:xfrm>
+          <a:prstGeom prst="roundRect">
+            <a:avLst>
+              <a:gd name="adj" fmla="val 12245"/>
+            </a:avLst>
+          </a:prstGeom>
+          <a:solidFill>
+            <a:srgbClr val="F4E9DA"/>
+          </a:solidFill>
+          <a:ln/>
+          <a:effectLst>
+            <a:outerShdw sx="100000" sy="100000" kx="0" ky="0" algn="bl" rotWithShape="0" blurRad="76200" dist="25400" dir="5400000">
+              <a:srgbClr val="000000">
+                <a:alpha val="12000"/>
+              </a:srgbClr>
+            </a:outerShdw>
+          </a:effectLst>
+        </p:spPr>
+      </p:sp>
+      <p:sp>
+        <p:nvSpPr>
+          <p:cNvPr id="25" name="Text 22"/>
+          <p:cNvSpPr txBox="1"/>
+          <p:nvPr/>
+        </p:nvSpPr>
+        <p:spPr>
+          <a:xfrm>
+            <a:off x="731520" y="4535424"/>
+            <a:ext cx="5074920" cy="237744"/>
+          </a:xfrm>
+          <a:prstGeom prst="rect">
+            <a:avLst/>
+          </a:prstGeom>
+          <a:noFill/>
+          <a:ln/>
+        </p:spPr>
+        <p:txBody>
+          <a:bodyPr wrap="square" lIns="0" tIns="0" rIns="0" bIns="0" rtlCol="0" anchor="ctr"/>
+          <a:lstStyle/>
+          <a:p>
+            <a:pPr indent="0" marL="0">
+              <a:buNone/>
+            </a:pPr>
+            <a:r>
+              <a:rPr lang="en-US" sz="1000" b="1" spc="100" kern="0" dirty="0">
+                <a:solidFill>
+                  <a:srgbClr val="C9682B"/>
+                </a:solidFill>
+                <a:latin typeface="Calibri" pitchFamily="34" charset="0"/>
+                <a:ea typeface="Calibri" pitchFamily="34" charset="-122"/>
+                <a:cs typeface="Calibri" pitchFamily="34" charset="-120"/>
+              </a:rPr>
+              <a:t>QUÉ NO HAREMOS</a:t>
+            </a:r>
+            <a:endParaRPr lang="en-US" sz="1000" dirty="0"/>
+          </a:p>
+        </p:txBody>
+      </p:sp>
+      <p:sp>
+        <p:nvSpPr>
+          <p:cNvPr id="26" name="Text 23"/>
+          <p:cNvSpPr txBox="1"/>
+          <p:nvPr/>
+        </p:nvSpPr>
+        <p:spPr>
+          <a:xfrm>
+            <a:off x="731520" y="4773168"/>
+            <a:ext cx="5074920" cy="530352"/>
+          </a:xfrm>
+          <a:prstGeom prst="rect">
+            <a:avLst/>
+          </a:prstGeom>
+          <a:noFill/>
+          <a:ln/>
+        </p:spPr>
+        <p:txBody>
+          <a:bodyPr wrap="square" lIns="0" tIns="0" rIns="0" bIns="0" rtlCol="0" anchor="t"/>
+          <a:lstStyle/>
+          <a:p>
+            <a:pPr indent="0" marL="0">
+              <a:buNone/>
+            </a:pPr>
+            <a:r>
+              <a:rPr lang="en-US" sz="1100" dirty="0">
+                <a:solidFill>
+                  <a:srgbClr val="2E2119"/>
+                </a:solidFill>
+                <a:latin typeface="Calibri" pitchFamily="34" charset="0"/>
+                <a:ea typeface="Calibri" pitchFamily="34" charset="-122"/>
+                <a:cs typeface="Calibri" pitchFamily="34" charset="-120"/>
+              </a:rPr>
+              <a:t>Código de barras, cobro con tarjeta, notificaciones push nativas (Telegram es la excepción), liquidar deudas de verdad.</a:t>
+            </a:r>
+            <a:endParaRPr lang="en-US" sz="1100" dirty="0"/>
+          </a:p>
+        </p:txBody>
+      </p:sp>
+    </p:spTree>
+  </p:cSld>
+  <p:clrMapOvr>
+    <a:masterClrMapping/>
+  </p:clrMapOvr>
+</p:sld>
+</file>
+
+<file path=ppt/slides/slide12.xml><?xml version="1.0" encoding="utf-8"?>
+<p:sld xmlns:a="http://schemas.openxmlformats.org/drawingml/2006/main" xmlns:r="http://schemas.openxmlformats.org/officeDocument/2006/relationships" xmlns:p="http://schemas.openxmlformats.org/presentationml/2006/main">
+  <p:cSld name="Slide 12">
     <p:bg>
       <p:bgPr>
         <a:solidFill>
@@ -3533,7 +4464,7 @@
                 <a:ea typeface="Calibri" pitchFamily="34" charset="-122"/>
                 <a:cs typeface="Calibri" pitchFamily="34" charset="-120"/>
               </a:rPr>
-              <a:t>Iago y Nadia pierden 10-15 min cada vez que hacen la lista a ojo con papel y boli, van a la tienda 2 veces/semana sin planificar, y casi siempre acaban comprando algo duplicado o volviendo por algo olvidado.</a:t>
+              <a:t>Iago y Nadia pierden 10-15 min cada vez que hacen la lista a ojo con papel y boli, van a la tienda 1-2 veces/semana sin planificar, y a menudo acaban comprando algo duplicado o volviendo por algo olvidado.</a:t>
             </a:r>
             <a:endParaRPr lang="en-US" sz="1350" dirty="0"/>
           </a:p>
@@ -3586,7 +4517,7 @@
               <a:buNone/>
             </a:pPr>
             <a:r>
-              <a:rPr lang="en-US" sz="4400" b="1" dirty="0">
+              <a:rPr lang="en-US" sz="4000" b="1" dirty="0">
                 <a:solidFill>
                   <a:srgbClr val="D9A441"/>
                 </a:solidFill>
@@ -3594,9 +4525,9 @@
                 <a:ea typeface="Cambria" pitchFamily="34" charset="-122"/>
                 <a:cs typeface="Cambria" pitchFamily="34" charset="-120"/>
               </a:rPr>
-              <a:t>≈ 1.040 €</a:t>
-            </a:r>
-            <a:endParaRPr lang="en-US" sz="4400" dirty="0"/>
+              <a:t>260-520 €</a:t>
+            </a:r>
+            <a:endParaRPr lang="en-US" sz="4000" dirty="0"/>
           </a:p>
         </p:txBody>
       </p:sp>
@@ -3692,7 +4623,7 @@
                 <a:ea typeface="Calibri" pitchFamily="34" charset="-122"/>
                 <a:cs typeface="Calibri" pitchFamily="34" charset="-120"/>
               </a:rPr>
-              <a:t>10 €/viaje × 2 viajes/semana × 52 semanas ≈ 1.040 €/año</a:t>
+              <a:t>5 €/viaje × 1-2 viajes/semana × 52 semanas ≈ 260-520 €/año</a:t>
             </a:r>
             <a:endParaRPr lang="en-US" sz="1300" dirty="0"/>
           </a:p>
@@ -3726,7 +4657,7 @@
                 <a:ea typeface="Calibri" pitchFamily="34" charset="-122"/>
                 <a:cs typeface="Calibri" pitchFamily="34" charset="-120"/>
               </a:rPr>
-              <a:t>experiencia directa del hogar (Iago, Nadia, Muxia) — dato de primera mano, sin fuente externa.</a:t>
+              <a:t>experiencia directa del hogar (Iago y Nadia) — dato de primera mano, sin fuente externa.</a:t>
             </a:r>
             <a:endParaRPr lang="en-US" sz="1300" dirty="0"/>
           </a:p>
@@ -5360,7 +6291,7 @@
                 <a:ea typeface="Cambria" pitchFamily="34" charset="-122"/>
                 <a:cs typeface="Cambria" pitchFamily="34" charset="-120"/>
               </a:rPr>
-              <a:t>Estado del arte — el hueco detectado</a:t>
+              <a:t>¿Y si tu app no tiene nada "chulo"?</a:t>
             </a:r>
             <a:endParaRPr lang="en-US" sz="2800" dirty="0"/>
           </a:p>
@@ -5368,22 +6299,61 @@
       </p:sp>
       <p:sp>
         <p:nvSpPr>
-          <p:cNvPr id="6" name="Shape 3"/>
+          <p:cNvPr id="6" name="Text 3"/>
+          <p:cNvSpPr txBox="1"/>
+          <p:nvPr/>
+        </p:nvSpPr>
+        <p:spPr>
+          <a:xfrm>
+            <a:off x="548640" y="1207008"/>
+            <a:ext cx="11094415" cy="274320"/>
+          </a:xfrm>
+          <a:prstGeom prst="rect">
+            <a:avLst/>
+          </a:prstGeom>
+          <a:noFill/>
+          <a:ln/>
+        </p:spPr>
+        <p:txBody>
+          <a:bodyPr wrap="square" lIns="0" tIns="0" rIns="0" bIns="0" rtlCol="0" anchor="ctr"/>
+          <a:lstStyle/>
+          <a:p>
+            <a:pPr indent="0" marL="0">
+              <a:buNone/>
+            </a:pPr>
+            <a:r>
+              <a:rPr lang="en-US" sz="1000" i="1" dirty="0">
+                <a:solidFill>
+                  <a:srgbClr val="8A7A6D"/>
+                </a:solidFill>
+                <a:latin typeface="Calibri" pitchFamily="34" charset="0"/>
+                <a:ea typeface="Calibri" pitchFamily="34" charset="-122"/>
+                <a:cs typeface="Calibri" pitchFamily="34" charset="-120"/>
+              </a:rPr>
+              <a:t>La objeción que anticipamos antes de que nos la hagan — no una respuesta a la defensiva después.</a:t>
+            </a:r>
+            <a:endParaRPr lang="en-US" sz="1000" dirty="0"/>
+          </a:p>
+        </p:txBody>
+      </p:sp>
+      <p:sp>
+        <p:nvSpPr>
+          <p:cNvPr id="7" name="Shape 4"/>
           <p:cNvSpPr/>
           <p:nvPr/>
         </p:nvSpPr>
         <p:spPr>
           <a:xfrm>
-            <a:off x="548640" y="1508760"/>
-            <a:ext cx="11064240" cy="1051560"/>
+            <a:off x="548640" y="1463040"/>
+            <a:ext cx="11064240" cy="1097280"/>
           </a:xfrm>
           <a:prstGeom prst="roundRect">
             <a:avLst>
-              <a:gd name="adj" fmla="val 10435"/>
+              <a:gd name="adj" fmla="val 10000"/>
             </a:avLst>
           </a:prstGeom>
           <a:solidFill>
-            <a:srgbClr val="F4E9DA"/>
+            <a:srgbClr val="EDE6DC"/>
           </a:solidFill>
           <a:ln/>
           <a:effectLst>
@@ -5397,14 +6367,14 @@
       </p:sp>
       <p:sp>
         <p:nvSpPr>
-          <p:cNvPr id="7" name="Text 4"/>
-          <p:cNvSpPr txBox="1"/>
-          <p:nvPr/>
-        </p:nvSpPr>
-        <p:spPr>
-          <a:xfrm>
-            <a:off x="822960" y="1618488"/>
-            <a:ext cx="2743200" cy="822960"/>
+          <p:cNvPr id="8" name="Text 5"/>
+          <p:cNvSpPr txBox="1"/>
+          <p:nvPr/>
+        </p:nvSpPr>
+        <p:spPr>
+          <a:xfrm>
+            <a:off x="822960" y="1600200"/>
+            <a:ext cx="10515600" cy="822960"/>
           </a:xfrm>
           <a:prstGeom prst="rect">
             <a:avLst/>
@@ -5420,41 +6390,55 @@
               <a:buNone/>
             </a:pPr>
             <a:r>
-              <a:rPr lang="en-US" sz="1500" b="1" dirty="0">
+              <a:rPr lang="en-US" sz="1500" i="1" dirty="0">
+                <a:solidFill>
+                  <a:srgbClr val="2E2119"/>
+                </a:solidFill>
+                <a:latin typeface="Calibri" pitchFamily="34" charset="0"/>
+                <a:ea typeface="Calibri" pitchFamily="34" charset="-122"/>
+                <a:cs typeface="Calibri" pitchFamily="34" charset="-120"/>
+              </a:rPr>
+              <a:t>"Tu solución (Notas) no tiene nada como mis recetas, mi meal planning o mis agentes de IA."</a:t>
+            </a:r>
+            <a:endParaRPr lang="en-US" sz="1500" dirty="0"/>
+          </a:p>
+        </p:txBody>
+      </p:sp>
+      <p:sp>
+        <p:nvSpPr>
+          <p:cNvPr id="9" name="Text 6"/>
+          <p:cNvSpPr txBox="1"/>
+          <p:nvPr/>
+        </p:nvSpPr>
+        <p:spPr>
+          <a:xfrm>
+            <a:off x="548640" y="2697480"/>
+            <a:ext cx="11064240" cy="1005840"/>
+          </a:xfrm>
+          <a:prstGeom prst="rect">
+            <a:avLst/>
+          </a:prstGeom>
+          <a:noFill/>
+          <a:ln/>
+        </p:spPr>
+        <p:txBody>
+          <a:bodyPr wrap="square" lIns="0" tIns="0" rIns="0" bIns="0" rtlCol="0" anchor="t"/>
+          <a:lstStyle/>
+          <a:p>
+            <a:pPr indent="0" marL="0">
+              <a:buNone/>
+            </a:pPr>
+            <a:r>
+              <a:rPr lang="en-US" sz="1300" b="1" dirty="0">
                 <a:solidFill>
                   <a:srgbClr val="C9682B"/>
                 </a:solidFill>
-                <a:latin typeface="Cambria" pitchFamily="34" charset="0"/>
-                <a:ea typeface="Cambria" pitchFamily="34" charset="-122"/>
-                <a:cs typeface="Cambria" pitchFamily="34" charset="-120"/>
-              </a:rPr>
-              <a:t>De posicionamiento</a:t>
-            </a:r>
-            <a:endParaRPr lang="en-US" sz="1500" dirty="0"/>
-          </a:p>
-        </p:txBody>
-      </p:sp>
-      <p:sp>
-        <p:nvSpPr>
-          <p:cNvPr id="8" name="Text 5"/>
-          <p:cNvSpPr txBox="1"/>
-          <p:nvPr/>
-        </p:nvSpPr>
-        <p:spPr>
-          <a:xfrm>
-            <a:off x="3657600" y="1618488"/>
-            <a:ext cx="7772400" cy="822960"/>
-          </a:xfrm>
-          <a:prstGeom prst="rect">
-            <a:avLst/>
-          </a:prstGeom>
-          <a:noFill/>
-          <a:ln/>
-        </p:spPr>
-        <p:txBody>
-          <a:bodyPr wrap="square" lIns="0" tIns="0" rIns="0" bIns="0" rtlCol="0" anchor="ctr"/>
-          <a:lstStyle/>
-          <a:p>
+                <a:latin typeface="Calibri" pitchFamily="34" charset="0"/>
+                <a:ea typeface="Calibri" pitchFamily="34" charset="-122"/>
+                <a:cs typeface="Calibri" pitchFamily="34" charset="-120"/>
+              </a:rPr>
+              <a:t>Cierto. </a:t>
+            </a:r>
             <a:pPr indent="0" marL="0">
               <a:buNone/>
             </a:pPr>
@@ -5467,7 +6451,7 @@
                 <a:ea typeface="Calibri" pitchFamily="34" charset="-122"/>
                 <a:cs typeface="Calibri" pitchFamily="34" charset="-120"/>
               </a:rPr>
-              <a:t>Ni Bring! ni AnyList apuntan al acto simple de apuntar y compartir la lista — las dos están construidas para cocinar y planificar recetas.</a:t>
+              <a:t>Pero tampoco las tiene el papel y boli, que es el sistema que en realidad se está digitalizando. Si ni Notas ni Papel tienen esas funciones y aun así ganan en el uso real (diapositiva anterior), lo que esas funciones añaden no es "lo que faltaba" — es complejidad y ruido visual encima de un sistema que no los pedía.</a:t>
             </a:r>
             <a:endParaRPr lang="en-US" sz="1300" dirty="0"/>
           </a:p>
@@ -5475,22 +6459,22 @@
       </p:sp>
       <p:sp>
         <p:nvSpPr>
-          <p:cNvPr id="9" name="Shape 6"/>
+          <p:cNvPr id="10" name="Shape 7"/>
           <p:cNvSpPr/>
           <p:nvPr/>
         </p:nvSpPr>
         <p:spPr>
           <a:xfrm>
-            <a:off x="548640" y="2697480"/>
-            <a:ext cx="11064240" cy="1051560"/>
+            <a:off x="548640" y="3794760"/>
+            <a:ext cx="5440680" cy="1737360"/>
           </a:xfrm>
           <a:prstGeom prst="roundRect">
             <a:avLst>
-              <a:gd name="adj" fmla="val 10435"/>
+              <a:gd name="adj" fmla="val 6316"/>
             </a:avLst>
           </a:prstGeom>
           <a:solidFill>
-            <a:srgbClr val="EDE6DC"/>
+            <a:srgbClr val="F4E9DA"/>
           </a:solidFill>
           <a:ln/>
           <a:effectLst>
@@ -5504,14 +6488,14 @@
       </p:sp>
       <p:sp>
         <p:nvSpPr>
-          <p:cNvPr id="10" name="Text 7"/>
-          <p:cNvSpPr txBox="1"/>
-          <p:nvPr/>
-        </p:nvSpPr>
-        <p:spPr>
-          <a:xfrm>
-            <a:off x="822960" y="2807208"/>
-            <a:ext cx="2743200" cy="822960"/>
+          <p:cNvPr id="11" name="Text 8"/>
+          <p:cNvSpPr txBox="1"/>
+          <p:nvPr/>
+        </p:nvSpPr>
+        <p:spPr>
+          <a:xfrm>
+            <a:off x="777240" y="3931920"/>
+            <a:ext cx="4983480" cy="274320"/>
           </a:xfrm>
           <a:prstGeom prst="rect">
             <a:avLst/>
@@ -5527,46 +6511,46 @@
               <a:buNone/>
             </a:pPr>
             <a:r>
-              <a:rPr lang="en-US" sz="1500" b="1" dirty="0">
+              <a:rPr lang="en-US" sz="1150" b="1" spc="100" kern="0" dirty="0">
                 <a:solidFill>
                   <a:srgbClr val="C9682B"/>
                 </a:solidFill>
-                <a:latin typeface="Cambria" pitchFamily="34" charset="0"/>
-                <a:ea typeface="Cambria" pitchFamily="34" charset="-122"/>
-                <a:cs typeface="Cambria" pitchFamily="34" charset="-120"/>
-              </a:rPr>
-              <a:t>De fricción</a:t>
-            </a:r>
-            <a:endParaRPr lang="en-US" sz="1500" dirty="0"/>
-          </a:p>
-        </p:txBody>
-      </p:sp>
-      <p:sp>
-        <p:nvSpPr>
-          <p:cNvPr id="11" name="Text 8"/>
-          <p:cNvSpPr txBox="1"/>
-          <p:nvPr/>
-        </p:nvSpPr>
-        <p:spPr>
-          <a:xfrm>
-            <a:off x="3657600" y="2807208"/>
-            <a:ext cx="7772400" cy="822960"/>
-          </a:xfrm>
-          <a:prstGeom prst="rect">
-            <a:avLst/>
-          </a:prstGeom>
-          <a:noFill/>
-          <a:ln/>
-        </p:spPr>
-        <p:txBody>
-          <a:bodyPr wrap="square" lIns="0" tIns="0" rIns="0" bIns="0" rtlCol="0" anchor="ctr"/>
-          <a:lstStyle/>
-          <a:p>
-            <a:pPr indent="0" marL="0">
-              <a:buNone/>
-            </a:pPr>
-            <a:r>
-              <a:rPr lang="en-US" sz="1300" dirty="0">
+                <a:latin typeface="Calibri" pitchFamily="34" charset="0"/>
+                <a:ea typeface="Calibri" pitchFamily="34" charset="-122"/>
+                <a:cs typeface="Calibri" pitchFamily="34" charset="-120"/>
+              </a:rPr>
+              <a:t>Para quién SÍ tiene sentido</a:t>
+            </a:r>
+            <a:endParaRPr lang="en-US" sz="1150" dirty="0"/>
+          </a:p>
+        </p:txBody>
+      </p:sp>
+      <p:sp>
+        <p:nvSpPr>
+          <p:cNvPr id="12" name="Text 9"/>
+          <p:cNvSpPr txBox="1"/>
+          <p:nvPr/>
+        </p:nvSpPr>
+        <p:spPr>
+          <a:xfrm>
+            <a:off x="777240" y="4251960"/>
+            <a:ext cx="4983480" cy="1143000"/>
+          </a:xfrm>
+          <a:prstGeom prst="rect">
+            <a:avLst/>
+          </a:prstGeom>
+          <a:noFill/>
+          <a:ln/>
+        </p:spPr>
+        <p:txBody>
+          <a:bodyPr wrap="square" lIns="0" tIns="0" rIns="0" bIns="0" rtlCol="0" anchor="t"/>
+          <a:lstStyle/>
+          <a:p>
+            <a:pPr indent="0" marL="0">
+              <a:buNone/>
+            </a:pPr>
+            <a:r>
+              <a:rPr lang="en-US" sz="1250" dirty="0">
                 <a:solidFill>
                   <a:srgbClr val="2E2119"/>
                 </a:solidFill>
@@ -5574,30 +6558,30 @@
                 <a:ea typeface="Calibri" pitchFamily="34" charset="-122"/>
                 <a:cs typeface="Calibri" pitchFamily="34" charset="-120"/>
               </a:rPr>
-              <a:t>Cualquier paso extra sobre "simplemente escribir" hace que la gente vuelva a Notas, la solución más simple.</a:t>
-            </a:r>
-            <a:endParaRPr lang="en-US" sz="1300" dirty="0"/>
-          </a:p>
-        </p:txBody>
-      </p:sp>
-      <p:sp>
-        <p:nvSpPr>
-          <p:cNvPr id="12" name="Shape 9"/>
+              <a:t>Alguien a quien de verdad le guste cocinar y guardar recetas — un perfil más asentado, quizá de más edad (ej. una madre de familia).</a:t>
+            </a:r>
+            <a:endParaRPr lang="en-US" sz="1250" dirty="0"/>
+          </a:p>
+        </p:txBody>
+      </p:sp>
+      <p:sp>
+        <p:nvSpPr>
+          <p:cNvPr id="13" name="Shape 10"/>
           <p:cNvSpPr/>
           <p:nvPr/>
         </p:nvSpPr>
         <p:spPr>
           <a:xfrm>
-            <a:off x="548640" y="3886200"/>
-            <a:ext cx="11064240" cy="1051560"/>
+            <a:off x="6172200" y="3794760"/>
+            <a:ext cx="5440680" cy="1737360"/>
           </a:xfrm>
           <a:prstGeom prst="roundRect">
             <a:avLst>
-              <a:gd name="adj" fmla="val 10435"/>
+              <a:gd name="adj" fmla="val 6316"/>
             </a:avLst>
           </a:prstGeom>
           <a:solidFill>
-            <a:srgbClr val="F4E9DA"/>
+            <a:srgbClr val="F6E4D3"/>
           </a:solidFill>
           <a:ln/>
           <a:effectLst>
@@ -5611,14 +6595,14 @@
       </p:sp>
       <p:sp>
         <p:nvSpPr>
-          <p:cNvPr id="13" name="Text 10"/>
-          <p:cNvSpPr txBox="1"/>
-          <p:nvPr/>
-        </p:nvSpPr>
-        <p:spPr>
-          <a:xfrm>
-            <a:off x="822960" y="3995928"/>
-            <a:ext cx="2743200" cy="822960"/>
+          <p:cNvPr id="14" name="Text 11"/>
+          <p:cNvSpPr txBox="1"/>
+          <p:nvPr/>
+        </p:nvSpPr>
+        <p:spPr>
+          <a:xfrm>
+            <a:off x="6400800" y="3931920"/>
+            <a:ext cx="4983480" cy="274320"/>
           </a:xfrm>
           <a:prstGeom prst="rect">
             <a:avLst/>
@@ -5634,46 +6618,46 @@
               <a:buNone/>
             </a:pPr>
             <a:r>
-              <a:rPr lang="en-US" sz="1500" b="1" dirty="0">
+              <a:rPr lang="en-US" sz="1150" b="1" spc="100" kern="0" dirty="0">
                 <a:solidFill>
                   <a:srgbClr val="C9682B"/>
                 </a:solidFill>
-                <a:latin typeface="Cambria" pitchFamily="34" charset="0"/>
-                <a:ea typeface="Cambria" pitchFamily="34" charset="-122"/>
-                <a:cs typeface="Cambria" pitchFamily="34" charset="-120"/>
-              </a:rPr>
-              <a:t>De colaboración</a:t>
-            </a:r>
-            <a:endParaRPr lang="en-US" sz="1500" dirty="0"/>
-          </a:p>
-        </p:txBody>
-      </p:sp>
-      <p:sp>
-        <p:nvSpPr>
-          <p:cNvPr id="14" name="Text 11"/>
-          <p:cNvSpPr txBox="1"/>
-          <p:nvPr/>
-        </p:nvSpPr>
-        <p:spPr>
-          <a:xfrm>
-            <a:off x="3657600" y="3995928"/>
-            <a:ext cx="7772400" cy="822960"/>
-          </a:xfrm>
-          <a:prstGeom prst="rect">
-            <a:avLst/>
-          </a:prstGeom>
-          <a:noFill/>
-          <a:ln/>
-        </p:spPr>
-        <p:txBody>
-          <a:bodyPr wrap="square" lIns="0" tIns="0" rIns="0" bIns="0" rtlCol="0" anchor="ctr"/>
-          <a:lstStyle/>
-          <a:p>
-            <a:pPr indent="0" marL="0">
-              <a:buNone/>
-            </a:pPr>
-            <a:r>
-              <a:rPr lang="en-US" sz="1300" dirty="0">
+                <a:latin typeface="Calibri" pitchFamily="34" charset="0"/>
+                <a:ea typeface="Calibri" pitchFamily="34" charset="-122"/>
+                <a:cs typeface="Calibri" pitchFamily="34" charset="-120"/>
+              </a:rPr>
+              <a:t>Para nuestro público, NO</a:t>
+            </a:r>
+            <a:endParaRPr lang="en-US" sz="1150" dirty="0"/>
+          </a:p>
+        </p:txBody>
+      </p:sp>
+      <p:sp>
+        <p:nvSpPr>
+          <p:cNvPr id="15" name="Text 12"/>
+          <p:cNvSpPr txBox="1"/>
+          <p:nvPr/>
+        </p:nvSpPr>
+        <p:spPr>
+          <a:xfrm>
+            <a:off x="6400800" y="4251960"/>
+            <a:ext cx="4983480" cy="1143000"/>
+          </a:xfrm>
+          <a:prstGeom prst="rect">
+            <a:avLst/>
+          </a:prstGeom>
+          <a:noFill/>
+          <a:ln/>
+        </p:spPr>
+        <p:txBody>
+          <a:bodyPr wrap="square" lIns="0" tIns="0" rIns="0" bIns="0" rtlCol="0" anchor="t"/>
+          <a:lstStyle/>
+          <a:p>
+            <a:pPr indent="0" marL="0">
+              <a:buNone/>
+            </a:pPr>
+            <a:r>
+              <a:rPr lang="en-US" sz="1250" dirty="0">
                 <a:solidFill>
                   <a:srgbClr val="2E2119"/>
                 </a:solidFill>
@@ -5681,26 +6665,26 @@
                 <a:ea typeface="Calibri" pitchFamily="34" charset="-122"/>
                 <a:cs typeface="Calibri" pitchFamily="34" charset="-120"/>
               </a:rPr>
-              <a:t>La solución que mejor funciona en la práctica (Notas) no se puede compartir ni coeditar en tiempo real.</a:t>
-            </a:r>
-            <a:endParaRPr lang="en-US" sz="1300" dirty="0"/>
-          </a:p>
-        </p:txBody>
-      </p:sp>
-      <p:sp>
-        <p:nvSpPr>
-          <p:cNvPr id="15" name="Shape 12"/>
+              <a:t>El estudiante medio independizado no es un apasionado de la cocina. La tendencia joven (meal prep) va al revés: tuppers básicos para toda la semana, para cocinar lo MÍNIMO posible.</a:t>
+            </a:r>
+            <a:endParaRPr lang="en-US" sz="1250" dirty="0"/>
+          </a:p>
+        </p:txBody>
+      </p:sp>
+      <p:sp>
+        <p:nvSpPr>
+          <p:cNvPr id="16" name="Shape 13"/>
           <p:cNvSpPr/>
           <p:nvPr/>
         </p:nvSpPr>
         <p:spPr>
           <a:xfrm>
-            <a:off x="548640" y="5212080"/>
-            <a:ext cx="11064240" cy="1051560"/>
+            <a:off x="548640" y="5760720"/>
+            <a:ext cx="11064240" cy="822960"/>
           </a:xfrm>
           <a:prstGeom prst="roundRect">
             <a:avLst>
-              <a:gd name="adj" fmla="val 10435"/>
+              <a:gd name="adj" fmla="val 13333"/>
             </a:avLst>
           </a:prstGeom>
           <a:solidFill>
@@ -5711,14 +6695,14 @@
       </p:sp>
       <p:sp>
         <p:nvSpPr>
-          <p:cNvPr id="16" name="Text 13"/>
-          <p:cNvSpPr txBox="1"/>
-          <p:nvPr/>
-        </p:nvSpPr>
-        <p:spPr>
-          <a:xfrm>
-            <a:off x="868680" y="5330952"/>
-            <a:ext cx="10424160" cy="777240"/>
+          <p:cNvPr id="17" name="Text 14"/>
+          <p:cNvSpPr txBox="1"/>
+          <p:nvPr/>
+        </p:nvSpPr>
+        <p:spPr>
+          <a:xfrm>
+            <a:off x="868680" y="5870448"/>
+            <a:ext cx="10424160" cy="621792"/>
           </a:xfrm>
           <a:prstGeom prst="rect">
             <a:avLst/>
@@ -5734,7 +6718,7 @@
               <a:buNone/>
             </a:pPr>
             <a:r>
-              <a:rPr lang="en-US" sz="1300" i="1" dirty="0">
+              <a:rPr lang="en-US" sz="1250" i="1" dirty="0">
                 <a:solidFill>
                   <a:srgbClr val="D9A441"/>
                 </a:solidFill>
@@ -5742,9 +6726,9 @@
                 <a:ea typeface="Calibri" pitchFamily="34" charset="-122"/>
                 <a:cs typeface="Calibri" pitchFamily="34" charset="-120"/>
               </a:rPr>
-              <a:t>El hueco real: una herramienta tan rápida de usar como Notas, tan colaborativa como Bring!, que además dice quién apuntó cada cosa y muestra qué hay en casa sin pedir que nadie lleve la cuenta a mano — el ángulo que nadie cubre.</a:t>
-            </a:r>
-            <a:endParaRPr lang="en-US" sz="1300" dirty="0"/>
+              <a:t>Ni siquiera cumplen bien su función principal: el paso intermedio de recetas da pereza, así que la lista queda peor servida que en Notas — por bonita que parezca la sensación de estar "más organizado".</a:t>
+            </a:r>
+            <a:endParaRPr lang="en-US" sz="1250" dirty="0"/>
           </a:p>
         </p:txBody>
       </p:sp>
@@ -5857,7 +6841,7 @@
                 <a:ea typeface="Calibri" pitchFamily="34" charset="-122"/>
                 <a:cs typeface="Calibri" pitchFamily="34" charset="-120"/>
               </a:rPr>
-              <a:t>PASO 2 — VALIDACIÓN</a:t>
+              <a:t>PASO 2</a:t>
             </a:r>
             <a:endParaRPr lang="en-US" sz="1200" dirty="0"/>
           </a:p>
@@ -5896,7 +6880,7 @@
                 <a:ea typeface="Cambria" pitchFamily="34" charset="-122"/>
                 <a:cs typeface="Cambria" pitchFamily="34" charset="-120"/>
               </a:rPr>
-              <a:t>La encuesta confirma el hueco (n=32, cerrada)</a:t>
+              <a:t>Estado del arte — el hueco detectado</a:t>
             </a:r>
             <a:endParaRPr lang="en-US" sz="2800" dirty="0"/>
           </a:p>
@@ -5904,396 +6888,18 @@
       </p:sp>
       <p:sp>
         <p:nvSpPr>
-          <p:cNvPr id="6" name="Text 3"/>
-          <p:cNvSpPr txBox="1"/>
-          <p:nvPr/>
-        </p:nvSpPr>
-        <p:spPr>
-          <a:xfrm>
-            <a:off x="548640" y="1207008"/>
-            <a:ext cx="11094415" cy="274320"/>
-          </a:xfrm>
-          <a:prstGeom prst="rect">
-            <a:avLst/>
-          </a:prstGeom>
-          <a:noFill/>
-          <a:ln/>
-        </p:spPr>
-        <p:txBody>
-          <a:bodyPr wrap="square" lIns="0" tIns="0" rIns="0" bIns="0" rtlCol="0" anchor="ctr"/>
-          <a:lstStyle/>
-          <a:p>
-            <a:pPr indent="0" marL="0">
-              <a:buNone/>
-            </a:pPr>
-            <a:r>
-              <a:rPr lang="en-US" sz="1000" i="1" dirty="0">
-                <a:solidFill>
-                  <a:srgbClr val="8A7A6D"/>
-                </a:solidFill>
-                <a:latin typeface="Calibri" pitchFamily="34" charset="0"/>
-                <a:ea typeface="Calibri" pitchFamily="34" charset="-122"/>
-                <a:cs typeface="Calibri" pitchFamily="34" charset="-120"/>
-              </a:rPr>
-              <a:t>Encuesta bilingüe (ES/EN), 9 preguntas sobre hechos del último mes — no opiniones sobre una app futura. Resultados finales: 32 respuestas únicas, cerrada el 17/09/2026.</a:t>
-            </a:r>
-            <a:endParaRPr lang="en-US" sz="1000" dirty="0"/>
-          </a:p>
-        </p:txBody>
-      </p:sp>
-      <p:sp>
-        <p:nvSpPr>
-          <p:cNvPr id="7" name="Shape 4"/>
+          <p:cNvPr id="6" name="Shape 3"/>
           <p:cNvSpPr/>
           <p:nvPr/>
         </p:nvSpPr>
         <p:spPr>
           <a:xfrm>
             <a:off x="548640" y="1508760"/>
-            <a:ext cx="3611880" cy="1143000"/>
+            <a:ext cx="11064240" cy="1051560"/>
           </a:xfrm>
           <a:prstGeom prst="roundRect">
             <a:avLst>
-              <a:gd name="adj" fmla="val 9600"/>
-            </a:avLst>
-          </a:prstGeom>
-          <a:solidFill>
-            <a:srgbClr val="2E2119"/>
-          </a:solidFill>
-          <a:ln/>
-        </p:spPr>
-      </p:sp>
-      <p:sp>
-        <p:nvSpPr>
-          <p:cNvPr id="8" name="Text 5"/>
-          <p:cNvSpPr txBox="1"/>
-          <p:nvPr/>
-        </p:nvSpPr>
-        <p:spPr>
-          <a:xfrm>
-            <a:off x="731520" y="1600200"/>
-            <a:ext cx="3246120" cy="502920"/>
-          </a:xfrm>
-          <a:prstGeom prst="rect">
-            <a:avLst/>
-          </a:prstGeom>
-          <a:noFill/>
-          <a:ln/>
-        </p:spPr>
-        <p:txBody>
-          <a:bodyPr wrap="square" lIns="0" tIns="0" rIns="0" bIns="0" rtlCol="0" anchor="ctr"/>
-          <a:lstStyle/>
-          <a:p>
-            <a:pPr indent="0" marL="0">
-              <a:buNone/>
-            </a:pPr>
-            <a:r>
-              <a:rPr lang="en-US" sz="3000" b="1" dirty="0">
-                <a:solidFill>
-                  <a:srgbClr val="D9A441"/>
-                </a:solidFill>
-                <a:latin typeface="Cambria" pitchFamily="34" charset="0"/>
-                <a:ea typeface="Cambria" pitchFamily="34" charset="-122"/>
-                <a:cs typeface="Cambria" pitchFamily="34" charset="-120"/>
-              </a:rPr>
-              <a:t>0/32</a:t>
-            </a:r>
-            <a:endParaRPr lang="en-US" sz="3000" dirty="0"/>
-          </a:p>
-        </p:txBody>
-      </p:sp>
-      <p:sp>
-        <p:nvSpPr>
-          <p:cNvPr id="9" name="Text 6"/>
-          <p:cNvSpPr txBox="1"/>
-          <p:nvPr/>
-        </p:nvSpPr>
-        <p:spPr>
-          <a:xfrm>
-            <a:off x="731520" y="2130552"/>
-            <a:ext cx="3246120" cy="475488"/>
-          </a:xfrm>
-          <a:prstGeom prst="rect">
-            <a:avLst/>
-          </a:prstGeom>
-          <a:noFill/>
-          <a:ln/>
-        </p:spPr>
-        <p:txBody>
-          <a:bodyPr wrap="square" lIns="0" tIns="0" rIns="0" bIns="0" rtlCol="0" anchor="t"/>
-          <a:lstStyle/>
-          <a:p>
-            <a:pPr indent="0" marL="0">
-              <a:buNone/>
-            </a:pPr>
-            <a:r>
-              <a:rPr lang="en-US" sz="1000" dirty="0">
-                <a:solidFill>
-                  <a:srgbClr val="D8CBBE"/>
-                </a:solidFill>
-                <a:latin typeface="Calibri" pitchFamily="34" charset="0"/>
-                <a:ea typeface="Calibri" pitchFamily="34" charset="-122"/>
-                <a:cs typeface="Calibri" pitchFamily="34" charset="-120"/>
-              </a:rPr>
-              <a:t>usa hoy una app específica como método — aunque 2 personas SÍ la probaron alguna vez (ver abajo)</a:t>
-            </a:r>
-            <a:endParaRPr lang="en-US" sz="1000" dirty="0"/>
-          </a:p>
-        </p:txBody>
-      </p:sp>
-      <p:sp>
-        <p:nvSpPr>
-          <p:cNvPr id="10" name="Shape 7"/>
-          <p:cNvSpPr/>
-          <p:nvPr/>
-        </p:nvSpPr>
-        <p:spPr>
-          <a:xfrm>
-            <a:off x="4297680" y="1508760"/>
-            <a:ext cx="3611880" cy="1143000"/>
-          </a:xfrm>
-          <a:prstGeom prst="roundRect">
-            <a:avLst>
-              <a:gd name="adj" fmla="val 9600"/>
-            </a:avLst>
-          </a:prstGeom>
-          <a:solidFill>
-            <a:srgbClr val="2E2119"/>
-          </a:solidFill>
-          <a:ln/>
-        </p:spPr>
-      </p:sp>
-      <p:sp>
-        <p:nvSpPr>
-          <p:cNvPr id="11" name="Text 8"/>
-          <p:cNvSpPr txBox="1"/>
-          <p:nvPr/>
-        </p:nvSpPr>
-        <p:spPr>
-          <a:xfrm>
-            <a:off x="4480560" y="1600200"/>
-            <a:ext cx="3246120" cy="502920"/>
-          </a:xfrm>
-          <a:prstGeom prst="rect">
-            <a:avLst/>
-          </a:prstGeom>
-          <a:noFill/>
-          <a:ln/>
-        </p:spPr>
-        <p:txBody>
-          <a:bodyPr wrap="square" lIns="0" tIns="0" rIns="0" bIns="0" rtlCol="0" anchor="ctr"/>
-          <a:lstStyle/>
-          <a:p>
-            <a:pPr indent="0" marL="0">
-              <a:buNone/>
-            </a:pPr>
-            <a:r>
-              <a:rPr lang="en-US" sz="3000" b="1" dirty="0">
-                <a:solidFill>
-                  <a:srgbClr val="D9A441"/>
-                </a:solidFill>
-                <a:latin typeface="Cambria" pitchFamily="34" charset="0"/>
-                <a:ea typeface="Cambria" pitchFamily="34" charset="-122"/>
-                <a:cs typeface="Cambria" pitchFamily="34" charset="-120"/>
-              </a:rPr>
-              <a:t>72%</a:t>
-            </a:r>
-            <a:endParaRPr lang="en-US" sz="3000" dirty="0"/>
-          </a:p>
-        </p:txBody>
-      </p:sp>
-      <p:sp>
-        <p:nvSpPr>
-          <p:cNvPr id="12" name="Text 9"/>
-          <p:cNvSpPr txBox="1"/>
-          <p:nvPr/>
-        </p:nvSpPr>
-        <p:spPr>
-          <a:xfrm>
-            <a:off x="4480560" y="2130552"/>
-            <a:ext cx="3246120" cy="475488"/>
-          </a:xfrm>
-          <a:prstGeom prst="rect">
-            <a:avLst/>
-          </a:prstGeom>
-          <a:noFill/>
-          <a:ln/>
-        </p:spPr>
-        <p:txBody>
-          <a:bodyPr wrap="square" lIns="0" tIns="0" rIns="0" bIns="0" rtlCol="0" anchor="t"/>
-          <a:lstStyle/>
-          <a:p>
-            <a:pPr indent="0" marL="0">
-              <a:buNone/>
-            </a:pPr>
-            <a:r>
-              <a:rPr lang="en-US" sz="1000" dirty="0">
-                <a:solidFill>
-                  <a:srgbClr val="D8CBBE"/>
-                </a:solidFill>
-                <a:latin typeface="Calibri" pitchFamily="34" charset="0"/>
-                <a:ea typeface="Calibri" pitchFamily="34" charset="-122"/>
-                <a:cs typeface="Calibri" pitchFamily="34" charset="-120"/>
-              </a:rPr>
-              <a:t>compró algo duplicado el último mes</a:t>
-            </a:r>
-            <a:endParaRPr lang="en-US" sz="1000" dirty="0"/>
-          </a:p>
-        </p:txBody>
-      </p:sp>
-      <p:sp>
-        <p:nvSpPr>
-          <p:cNvPr id="13" name="Shape 10"/>
-          <p:cNvSpPr/>
-          <p:nvPr/>
-        </p:nvSpPr>
-        <p:spPr>
-          <a:xfrm>
-            <a:off x="8046720" y="1508760"/>
-            <a:ext cx="3611880" cy="1143000"/>
-          </a:xfrm>
-          <a:prstGeom prst="roundRect">
-            <a:avLst>
-              <a:gd name="adj" fmla="val 9600"/>
-            </a:avLst>
-          </a:prstGeom>
-          <a:solidFill>
-            <a:srgbClr val="2E2119"/>
-          </a:solidFill>
-          <a:ln/>
-        </p:spPr>
-      </p:sp>
-      <p:sp>
-        <p:nvSpPr>
-          <p:cNvPr id="14" name="Text 11"/>
-          <p:cNvSpPr txBox="1"/>
-          <p:nvPr/>
-        </p:nvSpPr>
-        <p:spPr>
-          <a:xfrm>
-            <a:off x="8229600" y="1600200"/>
-            <a:ext cx="3246120" cy="502920"/>
-          </a:xfrm>
-          <a:prstGeom prst="rect">
-            <a:avLst/>
-          </a:prstGeom>
-          <a:noFill/>
-          <a:ln/>
-        </p:spPr>
-        <p:txBody>
-          <a:bodyPr wrap="square" lIns="0" tIns="0" rIns="0" bIns="0" rtlCol="0" anchor="ctr"/>
-          <a:lstStyle/>
-          <a:p>
-            <a:pPr indent="0" marL="0">
-              <a:buNone/>
-            </a:pPr>
-            <a:r>
-              <a:rPr lang="en-US" sz="3000" b="1" dirty="0">
-                <a:solidFill>
-                  <a:srgbClr val="D9A441"/>
-                </a:solidFill>
-                <a:latin typeface="Cambria" pitchFamily="34" charset="0"/>
-                <a:ea typeface="Cambria" pitchFamily="34" charset="-122"/>
-                <a:cs typeface="Cambria" pitchFamily="34" charset="-120"/>
-              </a:rPr>
-              <a:t>75%</a:t>
-            </a:r>
-            <a:endParaRPr lang="en-US" sz="3000" dirty="0"/>
-          </a:p>
-        </p:txBody>
-      </p:sp>
-      <p:sp>
-        <p:nvSpPr>
-          <p:cNvPr id="15" name="Text 12"/>
-          <p:cNvSpPr txBox="1"/>
-          <p:nvPr/>
-        </p:nvSpPr>
-        <p:spPr>
-          <a:xfrm>
-            <a:off x="8229600" y="2130552"/>
-            <a:ext cx="3246120" cy="475488"/>
-          </a:xfrm>
-          <a:prstGeom prst="rect">
-            <a:avLst/>
-          </a:prstGeom>
-          <a:noFill/>
-          <a:ln/>
-        </p:spPr>
-        <p:txBody>
-          <a:bodyPr wrap="square" lIns="0" tIns="0" rIns="0" bIns="0" rtlCol="0" anchor="t"/>
-          <a:lstStyle/>
-          <a:p>
-            <a:pPr indent="0" marL="0">
-              <a:buNone/>
-            </a:pPr>
-            <a:r>
-              <a:rPr lang="en-US" sz="1000" dirty="0">
-                <a:solidFill>
-                  <a:srgbClr val="D8CBBE"/>
-                </a:solidFill>
-                <a:latin typeface="Calibri" pitchFamily="34" charset="0"/>
-                <a:ea typeface="Calibri" pitchFamily="34" charset="-122"/>
-                <a:cs typeface="Calibri" pitchFamily="34" charset="-120"/>
-              </a:rPr>
-              <a:t>tuvo que volver a la tienda por algo olvidado</a:t>
-            </a:r>
-            <a:endParaRPr lang="en-US" sz="1000" dirty="0"/>
-          </a:p>
-        </p:txBody>
-      </p:sp>
-      <p:sp>
-        <p:nvSpPr>
-          <p:cNvPr id="16" name="Text 13"/>
-          <p:cNvSpPr txBox="1"/>
-          <p:nvPr/>
-        </p:nvSpPr>
-        <p:spPr>
-          <a:xfrm>
-            <a:off x="548640" y="2724912"/>
-            <a:ext cx="11064240" cy="292608"/>
-          </a:xfrm>
-          <a:prstGeom prst="rect">
-            <a:avLst/>
-          </a:prstGeom>
-          <a:noFill/>
-          <a:ln/>
-        </p:spPr>
-        <p:txBody>
-          <a:bodyPr wrap="square" lIns="0" tIns="0" rIns="0" bIns="0" rtlCol="0" anchor="ctr"/>
-          <a:lstStyle/>
-          <a:p>
-            <a:pPr indent="0" marL="0">
-              <a:buNone/>
-            </a:pPr>
-            <a:r>
-              <a:rPr lang="en-US" sz="1150" i="1" dirty="0">
-                <a:solidFill>
-                  <a:srgbClr val="8A7A6D"/>
-                </a:solidFill>
-                <a:latin typeface="Calibri" pitchFamily="34" charset="0"/>
-                <a:ea typeface="Calibri" pitchFamily="34" charset="-122"/>
-                <a:cs typeface="Calibri" pitchFamily="34" charset="-120"/>
-              </a:rPr>
-              <a:t>El 53% (17 de 32 personas) sufrió ambas cosas — compró duplicado y volvió a la tienda — en el mismo mes.</a:t>
-            </a:r>
-            <a:endParaRPr lang="en-US" sz="1150" dirty="0"/>
-          </a:p>
-        </p:txBody>
-      </p:sp>
-      <p:sp>
-        <p:nvSpPr>
-          <p:cNvPr id="17" name="Shape 14"/>
-          <p:cNvSpPr/>
-          <p:nvPr/>
-        </p:nvSpPr>
-        <p:spPr>
-          <a:xfrm>
-            <a:off x="548640" y="3108960"/>
-            <a:ext cx="6492240" cy="2148840"/>
-          </a:xfrm>
-          <a:prstGeom prst="roundRect">
-            <a:avLst>
-              <a:gd name="adj" fmla="val 5106"/>
+              <a:gd name="adj" fmla="val 10435"/>
             </a:avLst>
           </a:prstGeom>
           <a:solidFill>
@@ -6311,14 +6917,14 @@
       </p:sp>
       <p:sp>
         <p:nvSpPr>
-          <p:cNvPr id="18" name="Text 15"/>
-          <p:cNvSpPr txBox="1"/>
-          <p:nvPr/>
-        </p:nvSpPr>
-        <p:spPr>
-          <a:xfrm>
-            <a:off x="777240" y="3246120"/>
-            <a:ext cx="6035040" cy="320040"/>
+          <p:cNvPr id="7" name="Text 4"/>
+          <p:cNvSpPr txBox="1"/>
+          <p:nvPr/>
+        </p:nvSpPr>
+        <p:spPr>
+          <a:xfrm>
+            <a:off x="822960" y="1618488"/>
+            <a:ext cx="2743200" cy="822960"/>
           </a:xfrm>
           <a:prstGeom prst="rect">
             <a:avLst/>
@@ -6334,30 +6940,30 @@
               <a:buNone/>
             </a:pPr>
             <a:r>
-              <a:rPr lang="en-US" sz="1150" b="1" dirty="0">
+              <a:rPr lang="en-US" sz="1500" b="1" dirty="0">
                 <a:solidFill>
                   <a:srgbClr val="C9682B"/>
                 </a:solidFill>
-                <a:latin typeface="Calibri" pitchFamily="34" charset="0"/>
-                <a:ea typeface="Calibri" pitchFamily="34" charset="-122"/>
-                <a:cs typeface="Calibri" pitchFamily="34" charset="-120"/>
-              </a:rPr>
-              <a:t>Pregunta 3 · ¿Cómo organizáis hoy la lista de la compra?</a:t>
-            </a:r>
-            <a:endParaRPr lang="en-US" sz="1150" dirty="0"/>
-          </a:p>
-        </p:txBody>
-      </p:sp>
-      <p:sp>
-        <p:nvSpPr>
-          <p:cNvPr id="19" name="Text 16"/>
-          <p:cNvSpPr txBox="1"/>
-          <p:nvPr/>
-        </p:nvSpPr>
-        <p:spPr>
-          <a:xfrm>
-            <a:off x="777240" y="3648456"/>
-            <a:ext cx="1920240" cy="274320"/>
+                <a:latin typeface="Cambria" pitchFamily="34" charset="0"/>
+                <a:ea typeface="Cambria" pitchFamily="34" charset="-122"/>
+                <a:cs typeface="Cambria" pitchFamily="34" charset="-120"/>
+              </a:rPr>
+              <a:t>De posicionamiento</a:t>
+            </a:r>
+            <a:endParaRPr lang="en-US" sz="1500" dirty="0"/>
+          </a:p>
+        </p:txBody>
+      </p:sp>
+      <p:sp>
+        <p:nvSpPr>
+          <p:cNvPr id="8" name="Text 5"/>
+          <p:cNvSpPr txBox="1"/>
+          <p:nvPr/>
+        </p:nvSpPr>
+        <p:spPr>
+          <a:xfrm>
+            <a:off x="3657600" y="1618488"/>
+            <a:ext cx="7772400" cy="822960"/>
           </a:xfrm>
           <a:prstGeom prst="rect">
             <a:avLst/>
@@ -6369,11 +6975,11 @@
           <a:bodyPr wrap="square" lIns="0" tIns="0" rIns="0" bIns="0" rtlCol="0" anchor="ctr"/>
           <a:lstStyle/>
           <a:p>
-            <a:pPr algn="r" indent="0" marL="0">
-              <a:buNone/>
-            </a:pPr>
-            <a:r>
-              <a:rPr lang="en-US" sz="1100" dirty="0">
+            <a:pPr indent="0" marL="0">
+              <a:buNone/>
+            </a:pPr>
+            <a:r>
+              <a:rPr lang="en-US" sz="1300" dirty="0">
                 <a:solidFill>
                   <a:srgbClr val="2E2119"/>
                 </a:solidFill>
@@ -6381,66 +6987,158 @@
                 <a:ea typeface="Calibri" pitchFamily="34" charset="-122"/>
                 <a:cs typeface="Calibri" pitchFamily="34" charset="-120"/>
               </a:rPr>
-              <a:t>Notas del móvil</a:t>
-            </a:r>
-            <a:endParaRPr lang="en-US" sz="1100" dirty="0"/>
-          </a:p>
-        </p:txBody>
-      </p:sp>
-      <p:sp>
-        <p:nvSpPr>
-          <p:cNvPr id="20" name="Shape 17"/>
+              <a:t>Ni Bring! ni AnyList apuntan al acto simple de apuntar y compartir la lista — las dos están construidas para cocinar y planificar recetas.</a:t>
+            </a:r>
+            <a:endParaRPr lang="en-US" sz="1300" dirty="0"/>
+          </a:p>
+        </p:txBody>
+      </p:sp>
+      <p:sp>
+        <p:nvSpPr>
+          <p:cNvPr id="9" name="Shape 6"/>
           <p:cNvSpPr/>
           <p:nvPr/>
         </p:nvSpPr>
         <p:spPr>
           <a:xfrm>
-            <a:off x="2788920" y="3675888"/>
-            <a:ext cx="3566160" cy="219456"/>
+            <a:off x="548640" y="2697480"/>
+            <a:ext cx="11064240" cy="1051560"/>
           </a:xfrm>
           <a:prstGeom prst="roundRect">
             <a:avLst>
-              <a:gd name="adj" fmla="val 16667"/>
+              <a:gd name="adj" fmla="val 10435"/>
             </a:avLst>
           </a:prstGeom>
           <a:solidFill>
-            <a:srgbClr val="E7DCCB"/>
+            <a:srgbClr val="EDE6DC"/>
           </a:solidFill>
           <a:ln/>
-        </p:spPr>
-      </p:sp>
-      <p:sp>
-        <p:nvSpPr>
-          <p:cNvPr id="21" name="Shape 18"/>
+          <a:effectLst>
+            <a:outerShdw sx="100000" sy="100000" kx="0" ky="0" algn="bl" rotWithShape="0" blurRad="76200" dist="25400" dir="5400000">
+              <a:srgbClr val="000000">
+                <a:alpha val="12000"/>
+              </a:srgbClr>
+            </a:outerShdw>
+          </a:effectLst>
+        </p:spPr>
+      </p:sp>
+      <p:sp>
+        <p:nvSpPr>
+          <p:cNvPr id="10" name="Text 7"/>
+          <p:cNvSpPr txBox="1"/>
+          <p:nvPr/>
+        </p:nvSpPr>
+        <p:spPr>
+          <a:xfrm>
+            <a:off x="822960" y="2807208"/>
+            <a:ext cx="2743200" cy="822960"/>
+          </a:xfrm>
+          <a:prstGeom prst="rect">
+            <a:avLst/>
+          </a:prstGeom>
+          <a:noFill/>
+          <a:ln/>
+        </p:spPr>
+        <p:txBody>
+          <a:bodyPr wrap="square" lIns="0" tIns="0" rIns="0" bIns="0" rtlCol="0" anchor="ctr"/>
+          <a:lstStyle/>
+          <a:p>
+            <a:pPr indent="0" marL="0">
+              <a:buNone/>
+            </a:pPr>
+            <a:r>
+              <a:rPr lang="en-US" sz="1500" b="1" dirty="0">
+                <a:solidFill>
+                  <a:srgbClr val="C9682B"/>
+                </a:solidFill>
+                <a:latin typeface="Cambria" pitchFamily="34" charset="0"/>
+                <a:ea typeface="Cambria" pitchFamily="34" charset="-122"/>
+                <a:cs typeface="Cambria" pitchFamily="34" charset="-120"/>
+              </a:rPr>
+              <a:t>De fricción</a:t>
+            </a:r>
+            <a:endParaRPr lang="en-US" sz="1500" dirty="0"/>
+          </a:p>
+        </p:txBody>
+      </p:sp>
+      <p:sp>
+        <p:nvSpPr>
+          <p:cNvPr id="11" name="Text 8"/>
+          <p:cNvSpPr txBox="1"/>
+          <p:nvPr/>
+        </p:nvSpPr>
+        <p:spPr>
+          <a:xfrm>
+            <a:off x="3657600" y="2807208"/>
+            <a:ext cx="7772400" cy="822960"/>
+          </a:xfrm>
+          <a:prstGeom prst="rect">
+            <a:avLst/>
+          </a:prstGeom>
+          <a:noFill/>
+          <a:ln/>
+        </p:spPr>
+        <p:txBody>
+          <a:bodyPr wrap="square" lIns="0" tIns="0" rIns="0" bIns="0" rtlCol="0" anchor="ctr"/>
+          <a:lstStyle/>
+          <a:p>
+            <a:pPr indent="0" marL="0">
+              <a:buNone/>
+            </a:pPr>
+            <a:r>
+              <a:rPr lang="en-US" sz="1300" dirty="0">
+                <a:solidFill>
+                  <a:srgbClr val="2E2119"/>
+                </a:solidFill>
+                <a:latin typeface="Calibri" pitchFamily="34" charset="0"/>
+                <a:ea typeface="Calibri" pitchFamily="34" charset="-122"/>
+                <a:cs typeface="Calibri" pitchFamily="34" charset="-120"/>
+              </a:rPr>
+              <a:t>Cualquier paso extra sobre "simplemente escribir" hace que la gente vuelva a Notas, la solución más simple.</a:t>
+            </a:r>
+            <a:endParaRPr lang="en-US" sz="1300" dirty="0"/>
+          </a:p>
+        </p:txBody>
+      </p:sp>
+      <p:sp>
+        <p:nvSpPr>
+          <p:cNvPr id="12" name="Shape 9"/>
           <p:cNvSpPr/>
           <p:nvPr/>
         </p:nvSpPr>
         <p:spPr>
           <a:xfrm>
-            <a:off x="2788920" y="3675888"/>
-            <a:ext cx="3566160" cy="219456"/>
+            <a:off x="548640" y="3886200"/>
+            <a:ext cx="11064240" cy="1051560"/>
           </a:xfrm>
           <a:prstGeom prst="roundRect">
             <a:avLst>
-              <a:gd name="adj" fmla="val 16667"/>
+              <a:gd name="adj" fmla="val 10435"/>
             </a:avLst>
           </a:prstGeom>
           <a:solidFill>
-            <a:srgbClr val="D9A441"/>
+            <a:srgbClr val="F4E9DA"/>
           </a:solidFill>
           <a:ln/>
-        </p:spPr>
-      </p:sp>
-      <p:sp>
-        <p:nvSpPr>
-          <p:cNvPr id="22" name="Text 19"/>
-          <p:cNvSpPr txBox="1"/>
-          <p:nvPr/>
-        </p:nvSpPr>
-        <p:spPr>
-          <a:xfrm>
-            <a:off x="6428232" y="3648456"/>
-            <a:ext cx="411480" cy="274320"/>
+          <a:effectLst>
+            <a:outerShdw sx="100000" sy="100000" kx="0" ky="0" algn="bl" rotWithShape="0" blurRad="76200" dist="25400" dir="5400000">
+              <a:srgbClr val="000000">
+                <a:alpha val="12000"/>
+              </a:srgbClr>
+            </a:outerShdw>
+          </a:effectLst>
+        </p:spPr>
+      </p:sp>
+      <p:sp>
+        <p:nvSpPr>
+          <p:cNvPr id="13" name="Text 10"/>
+          <p:cNvSpPr txBox="1"/>
+          <p:nvPr/>
+        </p:nvSpPr>
+        <p:spPr>
+          <a:xfrm>
+            <a:off x="822960" y="3995928"/>
+            <a:ext cx="2743200" cy="822960"/>
           </a:xfrm>
           <a:prstGeom prst="rect">
             <a:avLst/>
@@ -6452,11 +7150,50 @@
           <a:bodyPr wrap="square" lIns="0" tIns="0" rIns="0" bIns="0" rtlCol="0" anchor="ctr"/>
           <a:lstStyle/>
           <a:p>
-            <a:pPr algn="l" indent="0" marL="0">
-              <a:buNone/>
-            </a:pPr>
-            <a:r>
-              <a:rPr lang="en-US" sz="1100" b="1" dirty="0">
+            <a:pPr indent="0" marL="0">
+              <a:buNone/>
+            </a:pPr>
+            <a:r>
+              <a:rPr lang="en-US" sz="1500" b="1" dirty="0">
+                <a:solidFill>
+                  <a:srgbClr val="C9682B"/>
+                </a:solidFill>
+                <a:latin typeface="Cambria" pitchFamily="34" charset="0"/>
+                <a:ea typeface="Cambria" pitchFamily="34" charset="-122"/>
+                <a:cs typeface="Cambria" pitchFamily="34" charset="-120"/>
+              </a:rPr>
+              <a:t>De colaboración</a:t>
+            </a:r>
+            <a:endParaRPr lang="en-US" sz="1500" dirty="0"/>
+          </a:p>
+        </p:txBody>
+      </p:sp>
+      <p:sp>
+        <p:nvSpPr>
+          <p:cNvPr id="14" name="Text 11"/>
+          <p:cNvSpPr txBox="1"/>
+          <p:nvPr/>
+        </p:nvSpPr>
+        <p:spPr>
+          <a:xfrm>
+            <a:off x="3657600" y="3995928"/>
+            <a:ext cx="7772400" cy="822960"/>
+          </a:xfrm>
+          <a:prstGeom prst="rect">
+            <a:avLst/>
+          </a:prstGeom>
+          <a:noFill/>
+          <a:ln/>
+        </p:spPr>
+        <p:txBody>
+          <a:bodyPr wrap="square" lIns="0" tIns="0" rIns="0" bIns="0" rtlCol="0" anchor="ctr"/>
+          <a:lstStyle/>
+          <a:p>
+            <a:pPr indent="0" marL="0">
+              <a:buNone/>
+            </a:pPr>
+            <a:r>
+              <a:rPr lang="en-US" sz="1300" dirty="0">
                 <a:solidFill>
                   <a:srgbClr val="2E2119"/>
                 </a:solidFill>
@@ -6464,105 +7201,44 @@
                 <a:ea typeface="Calibri" pitchFamily="34" charset="-122"/>
                 <a:cs typeface="Calibri" pitchFamily="34" charset="-120"/>
               </a:rPr>
-              <a:t>12</a:t>
-            </a:r>
-            <a:endParaRPr lang="en-US" sz="1100" dirty="0"/>
-          </a:p>
-        </p:txBody>
-      </p:sp>
-      <p:sp>
-        <p:nvSpPr>
-          <p:cNvPr id="23" name="Text 20"/>
-          <p:cNvSpPr txBox="1"/>
-          <p:nvPr/>
-        </p:nvSpPr>
-        <p:spPr>
-          <a:xfrm>
-            <a:off x="777240" y="3959352"/>
-            <a:ext cx="1920240" cy="274320"/>
-          </a:xfrm>
-          <a:prstGeom prst="rect">
-            <a:avLst/>
-          </a:prstGeom>
-          <a:noFill/>
-          <a:ln/>
-        </p:spPr>
-        <p:txBody>
-          <a:bodyPr wrap="square" lIns="0" tIns="0" rIns="0" bIns="0" rtlCol="0" anchor="ctr"/>
-          <a:lstStyle/>
-          <a:p>
-            <a:pPr algn="r" indent="0" marL="0">
-              <a:buNone/>
-            </a:pPr>
-            <a:r>
-              <a:rPr lang="en-US" sz="1100" dirty="0">
-                <a:solidFill>
-                  <a:srgbClr val="2E2119"/>
-                </a:solidFill>
-                <a:latin typeface="Calibri" pitchFamily="34" charset="0"/>
-                <a:ea typeface="Calibri" pitchFamily="34" charset="-122"/>
-                <a:cs typeface="Calibri" pitchFamily="34" charset="-120"/>
-              </a:rPr>
-              <a:t>Papel y boli</a:t>
-            </a:r>
-            <a:endParaRPr lang="en-US" sz="1100" dirty="0"/>
-          </a:p>
-        </p:txBody>
-      </p:sp>
-      <p:sp>
-        <p:nvSpPr>
-          <p:cNvPr id="24" name="Shape 21"/>
+              <a:t>La solución que mejor funciona en la práctica (Notas) no se puede compartir ni coeditar en tiempo real.</a:t>
+            </a:r>
+            <a:endParaRPr lang="en-US" sz="1300" dirty="0"/>
+          </a:p>
+        </p:txBody>
+      </p:sp>
+      <p:sp>
+        <p:nvSpPr>
+          <p:cNvPr id="15" name="Shape 12"/>
           <p:cNvSpPr/>
           <p:nvPr/>
         </p:nvSpPr>
         <p:spPr>
           <a:xfrm>
-            <a:off x="2788920" y="3986784"/>
-            <a:ext cx="3566160" cy="219456"/>
+            <a:off x="548640" y="5212080"/>
+            <a:ext cx="11064240" cy="1051560"/>
           </a:xfrm>
           <a:prstGeom prst="roundRect">
             <a:avLst>
-              <a:gd name="adj" fmla="val 16667"/>
+              <a:gd name="adj" fmla="val 10435"/>
             </a:avLst>
           </a:prstGeom>
           <a:solidFill>
-            <a:srgbClr val="E7DCCB"/>
+            <a:srgbClr val="2E2119"/>
           </a:solidFill>
           <a:ln/>
         </p:spPr>
       </p:sp>
       <p:sp>
         <p:nvSpPr>
-          <p:cNvPr id="25" name="Shape 22"/>
-          <p:cNvSpPr/>
-          <p:nvPr/>
-        </p:nvSpPr>
-        <p:spPr>
-          <a:xfrm>
-            <a:off x="2788920" y="3986784"/>
-            <a:ext cx="3268980" cy="219456"/>
-          </a:xfrm>
-          <a:prstGeom prst="roundRect">
-            <a:avLst>
-              <a:gd name="adj" fmla="val 16667"/>
-            </a:avLst>
-          </a:prstGeom>
-          <a:solidFill>
-            <a:srgbClr val="C9682B"/>
-          </a:solidFill>
-          <a:ln/>
-        </p:spPr>
-      </p:sp>
-      <p:sp>
-        <p:nvSpPr>
-          <p:cNvPr id="26" name="Text 23"/>
-          <p:cNvSpPr txBox="1"/>
-          <p:nvPr/>
-        </p:nvSpPr>
-        <p:spPr>
-          <a:xfrm>
-            <a:off x="6428232" y="3959352"/>
-            <a:ext cx="411480" cy="274320"/>
+          <p:cNvPr id="16" name="Text 13"/>
+          <p:cNvSpPr txBox="1"/>
+          <p:nvPr/>
+        </p:nvSpPr>
+        <p:spPr>
+          <a:xfrm>
+            <a:off x="868680" y="5330952"/>
+            <a:ext cx="10424160" cy="777240"/>
           </a:xfrm>
           <a:prstGeom prst="rect">
             <a:avLst/>
@@ -6574,490 +7250,21 @@
           <a:bodyPr wrap="square" lIns="0" tIns="0" rIns="0" bIns="0" rtlCol="0" anchor="ctr"/>
           <a:lstStyle/>
           <a:p>
-            <a:pPr algn="l" indent="0" marL="0">
-              <a:buNone/>
-            </a:pPr>
-            <a:r>
-              <a:rPr lang="en-US" sz="1100" b="1" dirty="0">
-                <a:solidFill>
-                  <a:srgbClr val="2E2119"/>
-                </a:solidFill>
-                <a:latin typeface="Calibri" pitchFamily="34" charset="0"/>
-                <a:ea typeface="Calibri" pitchFamily="34" charset="-122"/>
-                <a:cs typeface="Calibri" pitchFamily="34" charset="-120"/>
-              </a:rPr>
-              <a:t>11</a:t>
-            </a:r>
-            <a:endParaRPr lang="en-US" sz="1100" dirty="0"/>
-          </a:p>
-        </p:txBody>
-      </p:sp>
-      <p:sp>
-        <p:nvSpPr>
-          <p:cNvPr id="27" name="Text 24"/>
-          <p:cNvSpPr txBox="1"/>
-          <p:nvPr/>
-        </p:nvSpPr>
-        <p:spPr>
-          <a:xfrm>
-            <a:off x="777240" y="4270248"/>
-            <a:ext cx="1920240" cy="274320"/>
-          </a:xfrm>
-          <a:prstGeom prst="rect">
-            <a:avLst/>
-          </a:prstGeom>
-          <a:noFill/>
-          <a:ln/>
-        </p:spPr>
-        <p:txBody>
-          <a:bodyPr wrap="square" lIns="0" tIns="0" rIns="0" bIns="0" rtlCol="0" anchor="ctr"/>
-          <a:lstStyle/>
-          <a:p>
-            <a:pPr algn="r" indent="0" marL="0">
-              <a:buNone/>
-            </a:pPr>
-            <a:r>
-              <a:rPr lang="en-US" sz="1100" dirty="0">
-                <a:solidFill>
-                  <a:srgbClr val="2E2119"/>
-                </a:solidFill>
-                <a:latin typeface="Calibri" pitchFamily="34" charset="0"/>
-                <a:ea typeface="Calibri" pitchFamily="34" charset="-122"/>
-                <a:cs typeface="Calibri" pitchFamily="34" charset="-120"/>
-              </a:rPr>
-              <a:t>Ninguno / a ojo</a:t>
-            </a:r>
-            <a:endParaRPr lang="en-US" sz="1100" dirty="0"/>
-          </a:p>
-        </p:txBody>
-      </p:sp>
-      <p:sp>
-        <p:nvSpPr>
-          <p:cNvPr id="28" name="Shape 25"/>
-          <p:cNvSpPr/>
-          <p:nvPr/>
-        </p:nvSpPr>
-        <p:spPr>
-          <a:xfrm>
-            <a:off x="2788920" y="4297680"/>
-            <a:ext cx="3566160" cy="219456"/>
-          </a:xfrm>
-          <a:prstGeom prst="roundRect">
-            <a:avLst>
-              <a:gd name="adj" fmla="val 16667"/>
-            </a:avLst>
-          </a:prstGeom>
-          <a:solidFill>
-            <a:srgbClr val="E7DCCB"/>
-          </a:solidFill>
-          <a:ln/>
-        </p:spPr>
-      </p:sp>
-      <p:sp>
-        <p:nvSpPr>
-          <p:cNvPr id="29" name="Shape 26"/>
-          <p:cNvSpPr/>
-          <p:nvPr/>
-        </p:nvSpPr>
-        <p:spPr>
-          <a:xfrm>
-            <a:off x="2788920" y="4297680"/>
-            <a:ext cx="2377440" cy="219456"/>
-          </a:xfrm>
-          <a:prstGeom prst="roundRect">
-            <a:avLst>
-              <a:gd name="adj" fmla="val 16667"/>
-            </a:avLst>
-          </a:prstGeom>
-          <a:solidFill>
-            <a:srgbClr val="8A7A6D"/>
-          </a:solidFill>
-          <a:ln/>
-        </p:spPr>
-      </p:sp>
-      <p:sp>
-        <p:nvSpPr>
-          <p:cNvPr id="30" name="Text 27"/>
-          <p:cNvSpPr txBox="1"/>
-          <p:nvPr/>
-        </p:nvSpPr>
-        <p:spPr>
-          <a:xfrm>
-            <a:off x="6428232" y="4270248"/>
-            <a:ext cx="411480" cy="274320"/>
-          </a:xfrm>
-          <a:prstGeom prst="rect">
-            <a:avLst/>
-          </a:prstGeom>
-          <a:noFill/>
-          <a:ln/>
-        </p:spPr>
-        <p:txBody>
-          <a:bodyPr wrap="square" lIns="0" tIns="0" rIns="0" bIns="0" rtlCol="0" anchor="ctr"/>
-          <a:lstStyle/>
-          <a:p>
-            <a:pPr algn="l" indent="0" marL="0">
-              <a:buNone/>
-            </a:pPr>
-            <a:r>
-              <a:rPr lang="en-US" sz="1100" b="1" dirty="0">
-                <a:solidFill>
-                  <a:srgbClr val="2E2119"/>
-                </a:solidFill>
-                <a:latin typeface="Calibri" pitchFamily="34" charset="0"/>
-                <a:ea typeface="Calibri" pitchFamily="34" charset="-122"/>
-                <a:cs typeface="Calibri" pitchFamily="34" charset="-120"/>
-              </a:rPr>
-              <a:t>8</a:t>
-            </a:r>
-            <a:endParaRPr lang="en-US" sz="1100" dirty="0"/>
-          </a:p>
-        </p:txBody>
-      </p:sp>
-      <p:sp>
-        <p:nvSpPr>
-          <p:cNvPr id="31" name="Text 28"/>
-          <p:cNvSpPr txBox="1"/>
-          <p:nvPr/>
-        </p:nvSpPr>
-        <p:spPr>
-          <a:xfrm>
-            <a:off x="777240" y="4581144"/>
-            <a:ext cx="1920240" cy="274320"/>
-          </a:xfrm>
-          <a:prstGeom prst="rect">
-            <a:avLst/>
-          </a:prstGeom>
-          <a:noFill/>
-          <a:ln/>
-        </p:spPr>
-        <p:txBody>
-          <a:bodyPr wrap="square" lIns="0" tIns="0" rIns="0" bIns="0" rtlCol="0" anchor="ctr"/>
-          <a:lstStyle/>
-          <a:p>
-            <a:pPr algn="r" indent="0" marL="0">
-              <a:buNone/>
-            </a:pPr>
-            <a:r>
-              <a:rPr lang="en-US" sz="1100" dirty="0">
-                <a:solidFill>
-                  <a:srgbClr val="2E2119"/>
-                </a:solidFill>
-                <a:latin typeface="Calibri" pitchFamily="34" charset="0"/>
-                <a:ea typeface="Calibri" pitchFamily="34" charset="-122"/>
-                <a:cs typeface="Calibri" pitchFamily="34" charset="-120"/>
-              </a:rPr>
-              <a:t>Grupo de WhatsApp</a:t>
-            </a:r>
-            <a:endParaRPr lang="en-US" sz="1100" dirty="0"/>
-          </a:p>
-        </p:txBody>
-      </p:sp>
-      <p:sp>
-        <p:nvSpPr>
-          <p:cNvPr id="32" name="Shape 29"/>
-          <p:cNvSpPr/>
-          <p:nvPr/>
-        </p:nvSpPr>
-        <p:spPr>
-          <a:xfrm>
-            <a:off x="2788920" y="4608576"/>
-            <a:ext cx="3566160" cy="219456"/>
-          </a:xfrm>
-          <a:prstGeom prst="roundRect">
-            <a:avLst>
-              <a:gd name="adj" fmla="val 16667"/>
-            </a:avLst>
-          </a:prstGeom>
-          <a:solidFill>
-            <a:srgbClr val="E7DCCB"/>
-          </a:solidFill>
-          <a:ln/>
-        </p:spPr>
-      </p:sp>
-      <p:sp>
-        <p:nvSpPr>
-          <p:cNvPr id="33" name="Shape 30"/>
-          <p:cNvSpPr/>
-          <p:nvPr/>
-        </p:nvSpPr>
-        <p:spPr>
-          <a:xfrm>
-            <a:off x="2788920" y="4608576"/>
-            <a:ext cx="297180" cy="219456"/>
-          </a:xfrm>
-          <a:prstGeom prst="roundRect">
-            <a:avLst>
-              <a:gd name="adj" fmla="val 16667"/>
-            </a:avLst>
-          </a:prstGeom>
-          <a:solidFill>
-            <a:srgbClr val="8A7A6D"/>
-          </a:solidFill>
-          <a:ln/>
-        </p:spPr>
-      </p:sp>
-      <p:sp>
-        <p:nvSpPr>
-          <p:cNvPr id="34" name="Text 31"/>
-          <p:cNvSpPr txBox="1"/>
-          <p:nvPr/>
-        </p:nvSpPr>
-        <p:spPr>
-          <a:xfrm>
-            <a:off x="6428232" y="4581144"/>
-            <a:ext cx="411480" cy="274320"/>
-          </a:xfrm>
-          <a:prstGeom prst="rect">
-            <a:avLst/>
-          </a:prstGeom>
-          <a:noFill/>
-          <a:ln/>
-        </p:spPr>
-        <p:txBody>
-          <a:bodyPr wrap="square" lIns="0" tIns="0" rIns="0" bIns="0" rtlCol="0" anchor="ctr"/>
-          <a:lstStyle/>
-          <a:p>
-            <a:pPr algn="l" indent="0" marL="0">
-              <a:buNone/>
-            </a:pPr>
-            <a:r>
-              <a:rPr lang="en-US" sz="1100" b="1" dirty="0">
-                <a:solidFill>
-                  <a:srgbClr val="2E2119"/>
-                </a:solidFill>
-                <a:latin typeface="Calibri" pitchFamily="34" charset="0"/>
-                <a:ea typeface="Calibri" pitchFamily="34" charset="-122"/>
-                <a:cs typeface="Calibri" pitchFamily="34" charset="-120"/>
-              </a:rPr>
-              <a:t>1</a:t>
-            </a:r>
-            <a:endParaRPr lang="en-US" sz="1100" dirty="0"/>
-          </a:p>
-        </p:txBody>
-      </p:sp>
-      <p:sp>
-        <p:nvSpPr>
-          <p:cNvPr id="35" name="Text 32"/>
-          <p:cNvSpPr txBox="1"/>
-          <p:nvPr/>
-        </p:nvSpPr>
-        <p:spPr>
-          <a:xfrm>
-            <a:off x="777240" y="4892040"/>
-            <a:ext cx="1920240" cy="274320"/>
-          </a:xfrm>
-          <a:prstGeom prst="rect">
-            <a:avLst/>
-          </a:prstGeom>
-          <a:noFill/>
-          <a:ln/>
-        </p:spPr>
-        <p:txBody>
-          <a:bodyPr wrap="square" lIns="0" tIns="0" rIns="0" bIns="0" rtlCol="0" anchor="ctr"/>
-          <a:lstStyle/>
-          <a:p>
-            <a:pPr algn="r" indent="0" marL="0">
-              <a:buNone/>
-            </a:pPr>
-            <a:r>
-              <a:rPr lang="en-US" sz="1100" b="1" dirty="0">
-                <a:solidFill>
-                  <a:srgbClr val="2E2119"/>
-                </a:solidFill>
-                <a:latin typeface="Calibri" pitchFamily="34" charset="0"/>
-                <a:ea typeface="Calibri" pitchFamily="34" charset="-122"/>
-                <a:cs typeface="Calibri" pitchFamily="34" charset="-120"/>
-              </a:rPr>
-              <a:t>Una app específica</a:t>
-            </a:r>
-            <a:endParaRPr lang="en-US" sz="1100" dirty="0"/>
-          </a:p>
-        </p:txBody>
-      </p:sp>
-      <p:sp>
-        <p:nvSpPr>
-          <p:cNvPr id="36" name="Shape 33"/>
-          <p:cNvSpPr/>
-          <p:nvPr/>
-        </p:nvSpPr>
-        <p:spPr>
-          <a:xfrm>
-            <a:off x="2788920" y="4919472"/>
-            <a:ext cx="3566160" cy="219456"/>
-          </a:xfrm>
-          <a:prstGeom prst="roundRect">
-            <a:avLst>
-              <a:gd name="adj" fmla="val 16667"/>
-            </a:avLst>
-          </a:prstGeom>
-          <a:solidFill>
-            <a:srgbClr val="E7DCCB"/>
-          </a:solidFill>
-          <a:ln/>
-        </p:spPr>
-      </p:sp>
-      <p:sp>
-        <p:nvSpPr>
-          <p:cNvPr id="37" name="Text 34"/>
-          <p:cNvSpPr txBox="1"/>
-          <p:nvPr/>
-        </p:nvSpPr>
-        <p:spPr>
-          <a:xfrm>
-            <a:off x="6428232" y="4892040"/>
-            <a:ext cx="411480" cy="274320"/>
-          </a:xfrm>
-          <a:prstGeom prst="rect">
-            <a:avLst/>
-          </a:prstGeom>
-          <a:noFill/>
-          <a:ln/>
-        </p:spPr>
-        <p:txBody>
-          <a:bodyPr wrap="square" lIns="0" tIns="0" rIns="0" bIns="0" rtlCol="0" anchor="ctr"/>
-          <a:lstStyle/>
-          <a:p>
-            <a:pPr algn="l" indent="0" marL="0">
-              <a:buNone/>
-            </a:pPr>
-            <a:r>
-              <a:rPr lang="en-US" sz="1100" b="1" dirty="0">
-                <a:solidFill>
-                  <a:srgbClr val="C9682B"/>
-                </a:solidFill>
-                <a:latin typeface="Calibri" pitchFamily="34" charset="0"/>
-                <a:ea typeface="Calibri" pitchFamily="34" charset="-122"/>
-                <a:cs typeface="Calibri" pitchFamily="34" charset="-120"/>
-              </a:rPr>
-              <a:t>0</a:t>
-            </a:r>
-            <a:endParaRPr lang="en-US" sz="1100" dirty="0"/>
-          </a:p>
-        </p:txBody>
-      </p:sp>
-      <p:sp>
-        <p:nvSpPr>
-          <p:cNvPr id="38" name="Text 35"/>
-          <p:cNvSpPr txBox="1"/>
-          <p:nvPr/>
-        </p:nvSpPr>
-        <p:spPr>
-          <a:xfrm>
-            <a:off x="777240" y="5248656"/>
-            <a:ext cx="6035040" cy="256032"/>
-          </a:xfrm>
-          <a:prstGeom prst="rect">
-            <a:avLst/>
-          </a:prstGeom>
-          <a:noFill/>
-          <a:ln/>
-        </p:spPr>
-        <p:txBody>
-          <a:bodyPr wrap="square" lIns="0" tIns="0" rIns="0" bIns="0" rtlCol="0" anchor="ctr"/>
-          <a:lstStyle/>
-          <a:p>
-            <a:pPr indent="0" marL="0">
-              <a:buNone/>
-            </a:pPr>
-            <a:r>
-              <a:rPr lang="en-US" sz="950" i="1" dirty="0">
-                <a:solidFill>
-                  <a:srgbClr val="C9682B"/>
-                </a:solidFill>
-                <a:latin typeface="Calibri" pitchFamily="34" charset="0"/>
-                <a:ea typeface="Calibri" pitchFamily="34" charset="-122"/>
-                <a:cs typeface="Calibri" pitchFamily="34" charset="-120"/>
-              </a:rPr>
-              <a:t>↑ 2 personas la probaron alguna vez (Pregunta 7) — pero 0/32 la usa hoy: la abandonaron</a:t>
-            </a:r>
-            <a:endParaRPr lang="en-US" sz="950" dirty="0"/>
-          </a:p>
-        </p:txBody>
-      </p:sp>
-      <p:sp>
-        <p:nvSpPr>
-          <p:cNvPr id="39" name="Shape 36"/>
-          <p:cNvSpPr/>
-          <p:nvPr/>
-        </p:nvSpPr>
-        <p:spPr>
-          <a:xfrm>
-            <a:off x="7223760" y="3108960"/>
-            <a:ext cx="4389120" cy="2148840"/>
-          </a:xfrm>
-          <a:prstGeom prst="roundRect">
-            <a:avLst>
-              <a:gd name="adj" fmla="val 5106"/>
-            </a:avLst>
-          </a:prstGeom>
-          <a:solidFill>
-            <a:srgbClr val="F6E9D8"/>
-          </a:solidFill>
-          <a:ln w="12700">
-            <a:solidFill>
-              <a:srgbClr val="C9682B"/>
-            </a:solidFill>
-            <a:prstDash val="solid"/>
-          </a:ln>
-        </p:spPr>
-      </p:sp>
-      <p:sp>
-        <p:nvSpPr>
-          <p:cNvPr id="40" name="Text 37"/>
-          <p:cNvSpPr txBox="1"/>
-          <p:nvPr/>
-        </p:nvSpPr>
-        <p:spPr>
-          <a:xfrm>
-            <a:off x="7452360" y="3246120"/>
-            <a:ext cx="3931920" cy="1874520"/>
-          </a:xfrm>
-          <a:prstGeom prst="rect">
-            <a:avLst/>
-          </a:prstGeom>
-          <a:noFill/>
-          <a:ln/>
-        </p:spPr>
-        <p:txBody>
-          <a:bodyPr wrap="square" lIns="0" tIns="0" rIns="0" bIns="0" rtlCol="0" anchor="t"/>
-          <a:lstStyle/>
-          <a:p>
-            <a:pPr indent="0" marL="0">
-              <a:spcAft>
-                <a:spcPts val="600"/>
-              </a:spcAft>
-              <a:buNone/>
-            </a:pPr>
-            <a:r>
-              <a:rPr lang="en-US" sz="1150" b="1" dirty="0">
-                <a:solidFill>
-                  <a:srgbClr val="C9682B"/>
-                </a:solidFill>
-                <a:latin typeface="Calibri" pitchFamily="34" charset="0"/>
-                <a:ea typeface="Calibri" pitchFamily="34" charset="-122"/>
-                <a:cs typeface="Calibri" pitchFamily="34" charset="-120"/>
-              </a:rPr>
-              <a:t>Las apps no son el problema — la retención sí.  </a:t>
-            </a:r>
-            <a:endParaRPr lang="en-US" sz="1150" dirty="0"/>
-          </a:p>
-          <a:p>
-            <a:pPr indent="0" marL="0">
-              <a:buNone/>
-            </a:pPr>
-            <a:r>
-              <a:rPr lang="en-US" sz="1150" dirty="0">
-                <a:solidFill>
-                  <a:srgbClr val="2E2119"/>
-                </a:solidFill>
-                <a:latin typeface="Calibri" pitchFamily="34" charset="0"/>
-                <a:ea typeface="Calibri" pitchFamily="34" charset="-122"/>
-                <a:cs typeface="Calibri" pitchFamily="34" charset="-120"/>
-              </a:rPr>
-              <a:t>Bring! y AnyList llevan años disponibles y son razonablemente buenas (estado del arte, diapositiva anterior). 2 de 32 personas confirman haberlas probado — pero ninguna las usa hoy. Quien probó Bring! lo explica sin que se le pregunte: "porque si no colaboran los demás... pues mal vamos". El hueco no está en construir "una app más" — está en resolver por qué las que existen no retienen ni a quien sí las prueba.</a:t>
-            </a:r>
-            <a:endParaRPr lang="en-US" sz="1150" dirty="0"/>
+            <a:pPr indent="0" marL="0">
+              <a:buNone/>
+            </a:pPr>
+            <a:r>
+              <a:rPr lang="en-US" sz="1300" i="1" dirty="0">
+                <a:solidFill>
+                  <a:srgbClr val="D9A441"/>
+                </a:solidFill>
+                <a:latin typeface="Calibri" pitchFamily="34" charset="0"/>
+                <a:ea typeface="Calibri" pitchFamily="34" charset="-122"/>
+                <a:cs typeface="Calibri" pitchFamily="34" charset="-120"/>
+              </a:rPr>
+              <a:t>El hueco real: una herramienta tan rápida de usar como Notas, tan colaborativa como Bring!, que además dice quién apuntó cada cosa y muestra qué hay en casa sin pedir que nadie lleve la cuenta a mano — el ángulo que nadie cubre.</a:t>
+            </a:r>
+            <a:endParaRPr lang="en-US" sz="1300" dirty="0"/>
           </a:p>
         </p:txBody>
       </p:sp>
@@ -7209,7 +7416,7 @@
                 <a:ea typeface="Cambria" pitchFamily="34" charset="-122"/>
                 <a:cs typeface="Cambria" pitchFamily="34" charset="-120"/>
               </a:rPr>
-              <a:t>Las quejas espontáneas confirman el mismo patrón</a:t>
+              <a:t>La encuesta confirma el hueco (n=32, cerrada)</a:t>
             </a:r>
             <a:endParaRPr lang="en-US" sz="2800" dirty="0"/>
           </a:p>
@@ -7248,7 +7455,7 @@
                 <a:ea typeface="Calibri" pitchFamily="34" charset="-122"/>
                 <a:cs typeface="Calibri" pitchFamily="34" charset="-120"/>
               </a:rPr>
-              <a:t>Pregunta 9 (abierta): "¿Qué es lo que más te frustra de gestionar la compra o la nevera?" — nadie vio el prototipo antes de responder.</a:t>
+              <a:t>Encuesta bilingüe (ES/EN), 9 preguntas sobre hechos del último mes — no opiniones sobre una app futura. Resultados finales: 32 respuestas únicas, cerrada el 17/09/2026.</a:t>
             </a:r>
             <a:endParaRPr lang="en-US" sz="1000" dirty="0"/>
           </a:p>
@@ -7263,11 +7470,350 @@
         <p:spPr>
           <a:xfrm>
             <a:off x="548640" y="1508760"/>
-            <a:ext cx="5532120" cy="4160520"/>
+            <a:ext cx="3611880" cy="1143000"/>
           </a:xfrm>
           <a:prstGeom prst="roundRect">
             <a:avLst>
-              <a:gd name="adj" fmla="val 2637"/>
+              <a:gd name="adj" fmla="val 9600"/>
+            </a:avLst>
+          </a:prstGeom>
+          <a:solidFill>
+            <a:srgbClr val="2E2119"/>
+          </a:solidFill>
+          <a:ln/>
+        </p:spPr>
+      </p:sp>
+      <p:sp>
+        <p:nvSpPr>
+          <p:cNvPr id="8" name="Text 5"/>
+          <p:cNvSpPr txBox="1"/>
+          <p:nvPr/>
+        </p:nvSpPr>
+        <p:spPr>
+          <a:xfrm>
+            <a:off x="731520" y="1600200"/>
+            <a:ext cx="3246120" cy="502920"/>
+          </a:xfrm>
+          <a:prstGeom prst="rect">
+            <a:avLst/>
+          </a:prstGeom>
+          <a:noFill/>
+          <a:ln/>
+        </p:spPr>
+        <p:txBody>
+          <a:bodyPr wrap="square" lIns="0" tIns="0" rIns="0" bIns="0" rtlCol="0" anchor="ctr"/>
+          <a:lstStyle/>
+          <a:p>
+            <a:pPr indent="0" marL="0">
+              <a:buNone/>
+            </a:pPr>
+            <a:r>
+              <a:rPr lang="en-US" sz="3000" b="1" dirty="0">
+                <a:solidFill>
+                  <a:srgbClr val="D9A441"/>
+                </a:solidFill>
+                <a:latin typeface="Cambria" pitchFamily="34" charset="0"/>
+                <a:ea typeface="Cambria" pitchFamily="34" charset="-122"/>
+                <a:cs typeface="Cambria" pitchFamily="34" charset="-120"/>
+              </a:rPr>
+              <a:t>0/32</a:t>
+            </a:r>
+            <a:endParaRPr lang="en-US" sz="3000" dirty="0"/>
+          </a:p>
+        </p:txBody>
+      </p:sp>
+      <p:sp>
+        <p:nvSpPr>
+          <p:cNvPr id="9" name="Text 6"/>
+          <p:cNvSpPr txBox="1"/>
+          <p:nvPr/>
+        </p:nvSpPr>
+        <p:spPr>
+          <a:xfrm>
+            <a:off x="731520" y="2130552"/>
+            <a:ext cx="3246120" cy="475488"/>
+          </a:xfrm>
+          <a:prstGeom prst="rect">
+            <a:avLst/>
+          </a:prstGeom>
+          <a:noFill/>
+          <a:ln/>
+        </p:spPr>
+        <p:txBody>
+          <a:bodyPr wrap="square" lIns="0" tIns="0" rIns="0" bIns="0" rtlCol="0" anchor="t"/>
+          <a:lstStyle/>
+          <a:p>
+            <a:pPr indent="0" marL="0">
+              <a:buNone/>
+            </a:pPr>
+            <a:r>
+              <a:rPr lang="en-US" sz="1000" dirty="0">
+                <a:solidFill>
+                  <a:srgbClr val="D8CBBE"/>
+                </a:solidFill>
+                <a:latin typeface="Calibri" pitchFamily="34" charset="0"/>
+                <a:ea typeface="Calibri" pitchFamily="34" charset="-122"/>
+                <a:cs typeface="Calibri" pitchFamily="34" charset="-120"/>
+              </a:rPr>
+              <a:t>usa hoy una app específica como método — aunque 2 personas SÍ la probaron alguna vez (ver abajo)</a:t>
+            </a:r>
+            <a:endParaRPr lang="en-US" sz="1000" dirty="0"/>
+          </a:p>
+        </p:txBody>
+      </p:sp>
+      <p:sp>
+        <p:nvSpPr>
+          <p:cNvPr id="10" name="Shape 7"/>
+          <p:cNvSpPr/>
+          <p:nvPr/>
+        </p:nvSpPr>
+        <p:spPr>
+          <a:xfrm>
+            <a:off x="4297680" y="1508760"/>
+            <a:ext cx="3611880" cy="1143000"/>
+          </a:xfrm>
+          <a:prstGeom prst="roundRect">
+            <a:avLst>
+              <a:gd name="adj" fmla="val 9600"/>
+            </a:avLst>
+          </a:prstGeom>
+          <a:solidFill>
+            <a:srgbClr val="2E2119"/>
+          </a:solidFill>
+          <a:ln/>
+        </p:spPr>
+      </p:sp>
+      <p:sp>
+        <p:nvSpPr>
+          <p:cNvPr id="11" name="Text 8"/>
+          <p:cNvSpPr txBox="1"/>
+          <p:nvPr/>
+        </p:nvSpPr>
+        <p:spPr>
+          <a:xfrm>
+            <a:off x="4480560" y="1600200"/>
+            <a:ext cx="3246120" cy="502920"/>
+          </a:xfrm>
+          <a:prstGeom prst="rect">
+            <a:avLst/>
+          </a:prstGeom>
+          <a:noFill/>
+          <a:ln/>
+        </p:spPr>
+        <p:txBody>
+          <a:bodyPr wrap="square" lIns="0" tIns="0" rIns="0" bIns="0" rtlCol="0" anchor="ctr"/>
+          <a:lstStyle/>
+          <a:p>
+            <a:pPr indent="0" marL="0">
+              <a:buNone/>
+            </a:pPr>
+            <a:r>
+              <a:rPr lang="en-US" sz="3000" b="1" dirty="0">
+                <a:solidFill>
+                  <a:srgbClr val="D9A441"/>
+                </a:solidFill>
+                <a:latin typeface="Cambria" pitchFamily="34" charset="0"/>
+                <a:ea typeface="Cambria" pitchFamily="34" charset="-122"/>
+                <a:cs typeface="Cambria" pitchFamily="34" charset="-120"/>
+              </a:rPr>
+              <a:t>72%</a:t>
+            </a:r>
+            <a:endParaRPr lang="en-US" sz="3000" dirty="0"/>
+          </a:p>
+        </p:txBody>
+      </p:sp>
+      <p:sp>
+        <p:nvSpPr>
+          <p:cNvPr id="12" name="Text 9"/>
+          <p:cNvSpPr txBox="1"/>
+          <p:nvPr/>
+        </p:nvSpPr>
+        <p:spPr>
+          <a:xfrm>
+            <a:off x="4480560" y="2130552"/>
+            <a:ext cx="3246120" cy="475488"/>
+          </a:xfrm>
+          <a:prstGeom prst="rect">
+            <a:avLst/>
+          </a:prstGeom>
+          <a:noFill/>
+          <a:ln/>
+        </p:spPr>
+        <p:txBody>
+          <a:bodyPr wrap="square" lIns="0" tIns="0" rIns="0" bIns="0" rtlCol="0" anchor="t"/>
+          <a:lstStyle/>
+          <a:p>
+            <a:pPr indent="0" marL="0">
+              <a:buNone/>
+            </a:pPr>
+            <a:r>
+              <a:rPr lang="en-US" sz="1000" dirty="0">
+                <a:solidFill>
+                  <a:srgbClr val="D8CBBE"/>
+                </a:solidFill>
+                <a:latin typeface="Calibri" pitchFamily="34" charset="0"/>
+                <a:ea typeface="Calibri" pitchFamily="34" charset="-122"/>
+                <a:cs typeface="Calibri" pitchFamily="34" charset="-120"/>
+              </a:rPr>
+              <a:t>compró algo duplicado el último mes</a:t>
+            </a:r>
+            <a:endParaRPr lang="en-US" sz="1000" dirty="0"/>
+          </a:p>
+        </p:txBody>
+      </p:sp>
+      <p:sp>
+        <p:nvSpPr>
+          <p:cNvPr id="13" name="Shape 10"/>
+          <p:cNvSpPr/>
+          <p:nvPr/>
+        </p:nvSpPr>
+        <p:spPr>
+          <a:xfrm>
+            <a:off x="8046720" y="1508760"/>
+            <a:ext cx="3611880" cy="1143000"/>
+          </a:xfrm>
+          <a:prstGeom prst="roundRect">
+            <a:avLst>
+              <a:gd name="adj" fmla="val 9600"/>
+            </a:avLst>
+          </a:prstGeom>
+          <a:solidFill>
+            <a:srgbClr val="2E2119"/>
+          </a:solidFill>
+          <a:ln/>
+        </p:spPr>
+      </p:sp>
+      <p:sp>
+        <p:nvSpPr>
+          <p:cNvPr id="14" name="Text 11"/>
+          <p:cNvSpPr txBox="1"/>
+          <p:nvPr/>
+        </p:nvSpPr>
+        <p:spPr>
+          <a:xfrm>
+            <a:off x="8229600" y="1600200"/>
+            <a:ext cx="3246120" cy="502920"/>
+          </a:xfrm>
+          <a:prstGeom prst="rect">
+            <a:avLst/>
+          </a:prstGeom>
+          <a:noFill/>
+          <a:ln/>
+        </p:spPr>
+        <p:txBody>
+          <a:bodyPr wrap="square" lIns="0" tIns="0" rIns="0" bIns="0" rtlCol="0" anchor="ctr"/>
+          <a:lstStyle/>
+          <a:p>
+            <a:pPr indent="0" marL="0">
+              <a:buNone/>
+            </a:pPr>
+            <a:r>
+              <a:rPr lang="en-US" sz="3000" b="1" dirty="0">
+                <a:solidFill>
+                  <a:srgbClr val="D9A441"/>
+                </a:solidFill>
+                <a:latin typeface="Cambria" pitchFamily="34" charset="0"/>
+                <a:ea typeface="Cambria" pitchFamily="34" charset="-122"/>
+                <a:cs typeface="Cambria" pitchFamily="34" charset="-120"/>
+              </a:rPr>
+              <a:t>75%</a:t>
+            </a:r>
+            <a:endParaRPr lang="en-US" sz="3000" dirty="0"/>
+          </a:p>
+        </p:txBody>
+      </p:sp>
+      <p:sp>
+        <p:nvSpPr>
+          <p:cNvPr id="15" name="Text 12"/>
+          <p:cNvSpPr txBox="1"/>
+          <p:nvPr/>
+        </p:nvSpPr>
+        <p:spPr>
+          <a:xfrm>
+            <a:off x="8229600" y="2130552"/>
+            <a:ext cx="3246120" cy="475488"/>
+          </a:xfrm>
+          <a:prstGeom prst="rect">
+            <a:avLst/>
+          </a:prstGeom>
+          <a:noFill/>
+          <a:ln/>
+        </p:spPr>
+        <p:txBody>
+          <a:bodyPr wrap="square" lIns="0" tIns="0" rIns="0" bIns="0" rtlCol="0" anchor="t"/>
+          <a:lstStyle/>
+          <a:p>
+            <a:pPr indent="0" marL="0">
+              <a:buNone/>
+            </a:pPr>
+            <a:r>
+              <a:rPr lang="en-US" sz="1000" dirty="0">
+                <a:solidFill>
+                  <a:srgbClr val="D8CBBE"/>
+                </a:solidFill>
+                <a:latin typeface="Calibri" pitchFamily="34" charset="0"/>
+                <a:ea typeface="Calibri" pitchFamily="34" charset="-122"/>
+                <a:cs typeface="Calibri" pitchFamily="34" charset="-120"/>
+              </a:rPr>
+              <a:t>tuvo que volver a la tienda por algo olvidado</a:t>
+            </a:r>
+            <a:endParaRPr lang="en-US" sz="1000" dirty="0"/>
+          </a:p>
+        </p:txBody>
+      </p:sp>
+      <p:sp>
+        <p:nvSpPr>
+          <p:cNvPr id="16" name="Text 13"/>
+          <p:cNvSpPr txBox="1"/>
+          <p:nvPr/>
+        </p:nvSpPr>
+        <p:spPr>
+          <a:xfrm>
+            <a:off x="548640" y="2724912"/>
+            <a:ext cx="11064240" cy="292608"/>
+          </a:xfrm>
+          <a:prstGeom prst="rect">
+            <a:avLst/>
+          </a:prstGeom>
+          <a:noFill/>
+          <a:ln/>
+        </p:spPr>
+        <p:txBody>
+          <a:bodyPr wrap="square" lIns="0" tIns="0" rIns="0" bIns="0" rtlCol="0" anchor="ctr"/>
+          <a:lstStyle/>
+          <a:p>
+            <a:pPr indent="0" marL="0">
+              <a:buNone/>
+            </a:pPr>
+            <a:r>
+              <a:rPr lang="en-US" sz="1100" i="1" dirty="0">
+                <a:solidFill>
+                  <a:srgbClr val="8A7A6D"/>
+                </a:solidFill>
+                <a:latin typeface="Calibri" pitchFamily="34" charset="0"/>
+                <a:ea typeface="Calibri" pitchFamily="34" charset="-122"/>
+                <a:cs typeface="Calibri" pitchFamily="34" charset="-120"/>
+              </a:rPr>
+              <a:t>El 53% (17 de 32) sufrió ambas cosas en el mismo mes — el mismo tiempo y dinero (260-520€/año) de la frase del dolor, confirmado con datos.</a:t>
+            </a:r>
+            <a:endParaRPr lang="en-US" sz="1100" dirty="0"/>
+          </a:p>
+        </p:txBody>
+      </p:sp>
+      <p:sp>
+        <p:nvSpPr>
+          <p:cNvPr id="17" name="Shape 14"/>
+          <p:cNvSpPr/>
+          <p:nvPr/>
+        </p:nvSpPr>
+        <p:spPr>
+          <a:xfrm>
+            <a:off x="548640" y="3108960"/>
+            <a:ext cx="6492240" cy="2148840"/>
+          </a:xfrm>
+          <a:prstGeom prst="roundRect">
+            <a:avLst>
+              <a:gd name="adj" fmla="val 5106"/>
             </a:avLst>
           </a:prstGeom>
           <a:solidFill>
@@ -7285,14 +7831,14 @@
       </p:sp>
       <p:sp>
         <p:nvSpPr>
-          <p:cNvPr id="8" name="Text 5"/>
-          <p:cNvSpPr txBox="1"/>
-          <p:nvPr/>
-        </p:nvSpPr>
-        <p:spPr>
-          <a:xfrm>
-            <a:off x="777240" y="1645920"/>
-            <a:ext cx="5074920" cy="274320"/>
+          <p:cNvPr id="18" name="Text 15"/>
+          <p:cNvSpPr txBox="1"/>
+          <p:nvPr/>
+        </p:nvSpPr>
+        <p:spPr>
+          <a:xfrm>
+            <a:off x="777240" y="3246120"/>
+            <a:ext cx="6035040" cy="320040"/>
           </a:xfrm>
           <a:prstGeom prst="rect">
             <a:avLst/>
@@ -7308,7 +7854,7 @@
               <a:buNone/>
             </a:pPr>
             <a:r>
-              <a:rPr lang="en-US" sz="1200" b="1" spc="150" kern="0" dirty="0">
+              <a:rPr lang="en-US" sz="1150" b="1" dirty="0">
                 <a:solidFill>
                   <a:srgbClr val="C9682B"/>
                 </a:solidFill>
@@ -7316,22 +7862,22 @@
                 <a:ea typeface="Calibri" pitchFamily="34" charset="-122"/>
                 <a:cs typeface="Calibri" pitchFamily="34" charset="-120"/>
               </a:rPr>
-              <a:t>FALTA DE COOPERACIÓN</a:t>
-            </a:r>
-            <a:endParaRPr lang="en-US" sz="1200" dirty="0"/>
-          </a:p>
-        </p:txBody>
-      </p:sp>
-      <p:sp>
-        <p:nvSpPr>
-          <p:cNvPr id="9" name="Text 6"/>
-          <p:cNvSpPr txBox="1"/>
-          <p:nvPr/>
-        </p:nvSpPr>
-        <p:spPr>
-          <a:xfrm>
-            <a:off x="777240" y="1901952"/>
-            <a:ext cx="5074920" cy="274320"/>
+              <a:t>Pregunta 3 · ¿Cómo organizáis hoy la lista de la compra?</a:t>
+            </a:r>
+            <a:endParaRPr lang="en-US" sz="1150" dirty="0"/>
+          </a:p>
+        </p:txBody>
+      </p:sp>
+      <p:sp>
+        <p:nvSpPr>
+          <p:cNvPr id="19" name="Text 16"/>
+          <p:cNvSpPr txBox="1"/>
+          <p:nvPr/>
+        </p:nvSpPr>
+        <p:spPr>
+          <a:xfrm>
+            <a:off x="777240" y="3648456"/>
+            <a:ext cx="1920240" cy="274320"/>
           </a:xfrm>
           <a:prstGeom prst="rect">
             <a:avLst/>
@@ -7343,54 +7889,11 @@
           <a:bodyPr wrap="square" lIns="0" tIns="0" rIns="0" bIns="0" rtlCol="0" anchor="ctr"/>
           <a:lstStyle/>
           <a:p>
-            <a:pPr indent="0" marL="0">
-              <a:buNone/>
-            </a:pPr>
-            <a:r>
-              <a:rPr lang="en-US" sz="1050" i="1" dirty="0">
-                <a:solidFill>
-                  <a:srgbClr val="8A7A6D"/>
-                </a:solidFill>
-                <a:latin typeface="Calibri" pitchFamily="34" charset="0"/>
-                <a:ea typeface="Calibri" pitchFamily="34" charset="-122"/>
-                <a:cs typeface="Calibri" pitchFamily="34" charset="-120"/>
-              </a:rPr>
-              <a:t>8 de 32 personas (25%) — el tema más repetido, sin que se les preguntara</a:t>
-            </a:r>
-            <a:endParaRPr lang="en-US" sz="1050" dirty="0"/>
-          </a:p>
-        </p:txBody>
-      </p:sp>
-      <p:sp>
-        <p:nvSpPr>
-          <p:cNvPr id="10" name="Text 7"/>
-          <p:cNvSpPr txBox="1"/>
-          <p:nvPr/>
-        </p:nvSpPr>
-        <p:spPr>
-          <a:xfrm>
-            <a:off x="822960" y="2286000"/>
-            <a:ext cx="5029200" cy="3291840"/>
-          </a:xfrm>
-          <a:prstGeom prst="rect">
-            <a:avLst/>
-          </a:prstGeom>
-          <a:noFill/>
-          <a:ln/>
-        </p:spPr>
-        <p:txBody>
-          <a:bodyPr wrap="square" lIns="0" tIns="0" rIns="0" bIns="0" rtlCol="0" anchor="t"/>
-          <a:lstStyle/>
-          <a:p>
-            <a:pPr marL="342900" indent="-342900">
-              <a:spcAft>
-                <a:spcPts val="700"/>
-              </a:spcAft>
-              <a:buSzPct val="100000"/>
-              <a:buChar char="•"/>
-            </a:pPr>
-            <a:r>
-              <a:rPr lang="en-US" sz="1000" i="1" dirty="0">
+            <a:pPr algn="r" indent="0" marL="0">
+              <a:buNone/>
+            </a:pPr>
+            <a:r>
+              <a:rPr lang="en-US" sz="1100" dirty="0">
                 <a:solidFill>
                   <a:srgbClr val="2E2119"/>
                 </a:solidFill>
@@ -7398,385 +7901,129 @@
                 <a:ea typeface="Calibri" pitchFamily="34" charset="-122"/>
                 <a:cs typeface="Calibri" pitchFamily="34" charset="-120"/>
               </a:rPr>
-              <a:t>"I don’t know who bought what"</a:t>
-            </a:r>
-            <a:endParaRPr lang="en-US" sz="1000" dirty="0"/>
-          </a:p>
-          <a:p>
-            <a:pPr marL="342900" indent="-342900">
-              <a:spcAft>
-                <a:spcPts val="700"/>
-              </a:spcAft>
-              <a:buSzPct val="100000"/>
-              <a:buChar char="•"/>
-            </a:pPr>
-            <a:r>
-              <a:rPr lang="en-US" sz="1000" i="1" dirty="0">
-                <a:solidFill>
-                  <a:srgbClr val="2E2119"/>
-                </a:solidFill>
-                <a:latin typeface="Calibri" pitchFamily="34" charset="0"/>
-                <a:ea typeface="Calibri" pitchFamily="34" charset="-122"/>
-                <a:cs typeface="Calibri" pitchFamily="34" charset="-120"/>
-              </a:rPr>
-              <a:t>"Not knowing what the others want, the others eating my stuff" / "People eating my food"</a:t>
-            </a:r>
-            <a:endParaRPr lang="en-US" sz="1000" dirty="0"/>
-          </a:p>
-          <a:p>
-            <a:pPr marL="342900" indent="-342900">
-              <a:spcAft>
-                <a:spcPts val="700"/>
-              </a:spcAft>
-              <a:buSzPct val="100000"/>
-              <a:buChar char="•"/>
-            </a:pPr>
-            <a:r>
-              <a:rPr lang="en-US" sz="1000" i="1" dirty="0">
-                <a:solidFill>
-                  <a:srgbClr val="2E2119"/>
-                </a:solidFill>
-                <a:latin typeface="Calibri" pitchFamily="34" charset="0"/>
-                <a:ea typeface="Calibri" pitchFamily="34" charset="-122"/>
-                <a:cs typeface="Calibri" pitchFamily="34" charset="-120"/>
-              </a:rPr>
-              <a:t>"When people use the food I planned to use in a meal for myself... so I have to use something else"</a:t>
-            </a:r>
-            <a:endParaRPr lang="en-US" sz="1000" dirty="0"/>
-          </a:p>
-          <a:p>
-            <a:pPr marL="342900" indent="-342900">
-              <a:spcAft>
-                <a:spcPts val="700"/>
-              </a:spcAft>
-              <a:buSzPct val="100000"/>
-              <a:buChar char="•"/>
-            </a:pPr>
-            <a:r>
-              <a:rPr lang="en-US" sz="1000" i="1" dirty="0">
-                <a:solidFill>
-                  <a:srgbClr val="2E2119"/>
-                </a:solidFill>
-                <a:latin typeface="Calibri" pitchFamily="34" charset="0"/>
-                <a:ea typeface="Calibri" pitchFamily="34" charset="-122"/>
-                <a:cs typeface="Calibri" pitchFamily="34" charset="-120"/>
-              </a:rPr>
-              <a:t>"Not knowing if someone bought something just for themself" / dudar en comprar algo "y que se lo coma otra persona"</a:t>
-            </a:r>
-            <a:endParaRPr lang="en-US" sz="1000" dirty="0"/>
-          </a:p>
-          <a:p>
-            <a:pPr marL="342900" indent="-342900">
-              <a:spcAft>
-                <a:spcPts val="700"/>
-              </a:spcAft>
-              <a:buSzPct val="100000"/>
-              <a:buChar char="•"/>
-            </a:pPr>
-            <a:r>
-              <a:rPr lang="en-US" sz="1000" i="1" dirty="0">
-                <a:solidFill>
-                  <a:srgbClr val="2E2119"/>
-                </a:solidFill>
-                <a:latin typeface="Calibri" pitchFamily="34" charset="0"/>
-                <a:ea typeface="Calibri" pitchFamily="34" charset="-122"/>
-                <a:cs typeface="Calibri" pitchFamily="34" charset="-120"/>
-              </a:rPr>
-              <a:t>"Que compran cosas que no quiero"</a:t>
-            </a:r>
-            <a:endParaRPr lang="en-US" sz="1000" dirty="0"/>
-          </a:p>
-          <a:p>
-            <a:pPr marL="342900" indent="-342900">
-              <a:spcAft>
-                <a:spcPts val="700"/>
-              </a:spcAft>
-              <a:buSzPct val="100000"/>
-              <a:buChar char="•"/>
-            </a:pPr>
-            <a:r>
-              <a:rPr lang="en-US" sz="1000" i="1" dirty="0">
-                <a:solidFill>
-                  <a:srgbClr val="2E2119"/>
-                </a:solidFill>
-                <a:latin typeface="Calibri" pitchFamily="34" charset="0"/>
-                <a:ea typeface="Calibri" pitchFamily="34" charset="-122"/>
-                <a:cs typeface="Calibri" pitchFamily="34" charset="-120"/>
-              </a:rPr>
-              <a:t>"Cada vez una compra una cosa, lo complicado es llevar la cuenta de quién compró qué antes"</a:t>
-            </a:r>
-            <a:endParaRPr lang="en-US" sz="1000" dirty="0"/>
-          </a:p>
-        </p:txBody>
-      </p:sp>
-      <p:sp>
-        <p:nvSpPr>
-          <p:cNvPr id="11" name="Shape 8"/>
+              <a:t>Notas del móvil</a:t>
+            </a:r>
+            <a:endParaRPr lang="en-US" sz="1100" dirty="0"/>
+          </a:p>
+        </p:txBody>
+      </p:sp>
+      <p:sp>
+        <p:nvSpPr>
+          <p:cNvPr id="20" name="Shape 17"/>
           <p:cNvSpPr/>
           <p:nvPr/>
         </p:nvSpPr>
         <p:spPr>
           <a:xfrm>
-            <a:off x="6263640" y="1508760"/>
-            <a:ext cx="5349240" cy="4160520"/>
+            <a:off x="2788920" y="3675888"/>
+            <a:ext cx="3566160" cy="219456"/>
           </a:xfrm>
           <a:prstGeom prst="roundRect">
             <a:avLst>
-              <a:gd name="adj" fmla="val 2637"/>
+              <a:gd name="adj" fmla="val 16667"/>
             </a:avLst>
           </a:prstGeom>
           <a:solidFill>
-            <a:srgbClr val="EDE6DC"/>
+            <a:srgbClr val="E7DCCB"/>
           </a:solidFill>
           <a:ln/>
-          <a:effectLst>
-            <a:outerShdw sx="100000" sy="100000" kx="0" ky="0" algn="bl" rotWithShape="0" blurRad="76200" dist="25400" dir="5400000">
-              <a:srgbClr val="000000">
-                <a:alpha val="12000"/>
-              </a:srgbClr>
-            </a:outerShdw>
-          </a:effectLst>
-        </p:spPr>
-      </p:sp>
-      <p:sp>
-        <p:nvSpPr>
-          <p:cNvPr id="12" name="Text 9"/>
-          <p:cNvSpPr txBox="1"/>
-          <p:nvPr/>
-        </p:nvSpPr>
-        <p:spPr>
-          <a:xfrm>
-            <a:off x="6492240" y="1645920"/>
-            <a:ext cx="4892040" cy="274320"/>
-          </a:xfrm>
-          <a:prstGeom prst="rect">
-            <a:avLst/>
-          </a:prstGeom>
-          <a:noFill/>
-          <a:ln/>
-        </p:spPr>
-        <p:txBody>
-          <a:bodyPr wrap="square" lIns="0" tIns="0" rIns="0" bIns="0" rtlCol="0" anchor="ctr"/>
-          <a:lstStyle/>
-          <a:p>
-            <a:pPr indent="0" marL="0">
-              <a:buNone/>
-            </a:pPr>
-            <a:r>
-              <a:rPr lang="en-US" sz="1200" b="1" spc="150" kern="0" dirty="0">
-                <a:solidFill>
-                  <a:srgbClr val="C9682B"/>
-                </a:solidFill>
-                <a:latin typeface="Calibri" pitchFamily="34" charset="0"/>
-                <a:ea typeface="Calibri" pitchFamily="34" charset="-122"/>
-                <a:cs typeface="Calibri" pitchFamily="34" charset="-120"/>
-              </a:rPr>
-              <a:t>FALTA DE TRACKER DE GASTOS</a:t>
-            </a:r>
-            <a:endParaRPr lang="en-US" sz="1200" dirty="0"/>
-          </a:p>
-        </p:txBody>
-      </p:sp>
-      <p:sp>
-        <p:nvSpPr>
-          <p:cNvPr id="13" name="Text 10"/>
-          <p:cNvSpPr txBox="1"/>
-          <p:nvPr/>
-        </p:nvSpPr>
-        <p:spPr>
-          <a:xfrm>
-            <a:off x="6492240" y="1901952"/>
-            <a:ext cx="4892040" cy="384048"/>
-          </a:xfrm>
-          <a:prstGeom prst="rect">
-            <a:avLst/>
-          </a:prstGeom>
-          <a:noFill/>
-          <a:ln/>
-        </p:spPr>
-        <p:txBody>
-          <a:bodyPr wrap="square" lIns="0" tIns="0" rIns="0" bIns="0" rtlCol="0" anchor="ctr"/>
-          <a:lstStyle/>
-          <a:p>
-            <a:pPr indent="0" marL="0">
-              <a:buNone/>
-            </a:pPr>
-            <a:r>
-              <a:rPr lang="en-US" sz="1050" i="1" dirty="0">
-                <a:solidFill>
-                  <a:srgbClr val="8A7A6D"/>
-                </a:solidFill>
-                <a:latin typeface="Calibri" pitchFamily="34" charset="0"/>
-                <a:ea typeface="Calibri" pitchFamily="34" charset="-122"/>
-                <a:cs typeface="Calibri" pitchFamily="34" charset="-120"/>
-              </a:rPr>
-              <a:t>3 menciones espontáneas + 12/32 (38%) dice en la Pregunta 8 que no llevan cuenta</a:t>
-            </a:r>
-            <a:endParaRPr lang="en-US" sz="1050" dirty="0"/>
-          </a:p>
-        </p:txBody>
-      </p:sp>
-      <p:sp>
-        <p:nvSpPr>
-          <p:cNvPr id="14" name="Text 11"/>
-          <p:cNvSpPr txBox="1"/>
-          <p:nvPr/>
-        </p:nvSpPr>
-        <p:spPr>
-          <a:xfrm>
-            <a:off x="6537960" y="2331720"/>
-            <a:ext cx="4846320" cy="1737360"/>
-          </a:xfrm>
-          <a:prstGeom prst="rect">
-            <a:avLst/>
-          </a:prstGeom>
-          <a:noFill/>
-          <a:ln/>
-        </p:spPr>
-        <p:txBody>
-          <a:bodyPr wrap="square" lIns="0" tIns="0" rIns="0" bIns="0" rtlCol="0" anchor="t"/>
-          <a:lstStyle/>
-          <a:p>
-            <a:pPr marL="342900" indent="-342900">
-              <a:spcAft>
-                <a:spcPts val="800"/>
-              </a:spcAft>
-              <a:buSzPct val="100000"/>
-              <a:buChar char="•"/>
-            </a:pPr>
-            <a:r>
-              <a:rPr lang="en-US" sz="1100" i="1" dirty="0">
-                <a:solidFill>
-                  <a:srgbClr val="2E2119"/>
-                </a:solidFill>
-                <a:latin typeface="Calibri" pitchFamily="34" charset="0"/>
-                <a:ea typeface="Calibri" pitchFamily="34" charset="-122"/>
-                <a:cs typeface="Calibri" pitchFamily="34" charset="-120"/>
-              </a:rPr>
-              <a:t>"I don’t know who bought what" — también aquí: no saber quién pagó qué</a:t>
-            </a:r>
-            <a:endParaRPr lang="en-US" sz="1100" dirty="0"/>
-          </a:p>
-          <a:p>
-            <a:pPr marL="342900" indent="-342900">
-              <a:spcAft>
-                <a:spcPts val="800"/>
-              </a:spcAft>
-              <a:buSzPct val="100000"/>
-              <a:buChar char="•"/>
-            </a:pPr>
-            <a:r>
-              <a:rPr lang="en-US" sz="1100" i="1" dirty="0">
-                <a:solidFill>
-                  <a:srgbClr val="2E2119"/>
-                </a:solidFill>
-                <a:latin typeface="Calibri" pitchFamily="34" charset="0"/>
-                <a:ea typeface="Calibri" pitchFamily="34" charset="-122"/>
-                <a:cs typeface="Calibri" pitchFamily="34" charset="-120"/>
-              </a:rPr>
-              <a:t>"Que la gente no participe a la hora de hacer la compra o que tarden en pagar cuando dividimos gastos"</a:t>
-            </a:r>
-            <a:endParaRPr lang="en-US" sz="1100" dirty="0"/>
-          </a:p>
-          <a:p>
-            <a:pPr marL="342900" indent="-342900">
-              <a:spcAft>
-                <a:spcPts val="800"/>
-              </a:spcAft>
-              <a:buSzPct val="100000"/>
-              <a:buChar char="•"/>
-            </a:pPr>
-            <a:r>
-              <a:rPr lang="en-US" sz="1100" i="1" dirty="0">
-                <a:solidFill>
-                  <a:srgbClr val="2E2119"/>
-                </a:solidFill>
-                <a:latin typeface="Calibri" pitchFamily="34" charset="0"/>
-                <a:ea typeface="Calibri" pitchFamily="34" charset="-122"/>
-                <a:cs typeface="Calibri" pitchFamily="34" charset="-120"/>
-              </a:rPr>
-              <a:t>"Llevar la cuenta de quién compró qué antes" — también dual, coop + gasto</a:t>
-            </a:r>
-            <a:endParaRPr lang="en-US" sz="1100" dirty="0"/>
-          </a:p>
-        </p:txBody>
-      </p:sp>
-      <p:sp>
-        <p:nvSpPr>
-          <p:cNvPr id="15" name="Shape 12"/>
+        </p:spPr>
+      </p:sp>
+      <p:sp>
+        <p:nvSpPr>
+          <p:cNvPr id="21" name="Shape 18"/>
           <p:cNvSpPr/>
           <p:nvPr/>
         </p:nvSpPr>
         <p:spPr>
           <a:xfrm>
-            <a:off x="6492240" y="4160520"/>
-            <a:ext cx="4892040" cy="1371600"/>
+            <a:off x="2788920" y="3675888"/>
+            <a:ext cx="3566160" cy="219456"/>
           </a:xfrm>
           <a:prstGeom prst="roundRect">
             <a:avLst>
-              <a:gd name="adj" fmla="val 6667"/>
+              <a:gd name="adj" fmla="val 16667"/>
             </a:avLst>
           </a:prstGeom>
           <a:solidFill>
-            <a:srgbClr val="2E2119"/>
+            <a:srgbClr val="D9A441"/>
           </a:solidFill>
           <a:ln/>
         </p:spPr>
       </p:sp>
       <p:sp>
         <p:nvSpPr>
-          <p:cNvPr id="16" name="Text 13"/>
-          <p:cNvSpPr txBox="1"/>
-          <p:nvPr/>
-        </p:nvSpPr>
-        <p:spPr>
-          <a:xfrm>
-            <a:off x="6720840" y="4279392"/>
-            <a:ext cx="4480560" cy="1143000"/>
-          </a:xfrm>
-          <a:prstGeom prst="rect">
-            <a:avLst/>
-          </a:prstGeom>
-          <a:noFill/>
-          <a:ln/>
-        </p:spPr>
-        <p:txBody>
-          <a:bodyPr wrap="square" lIns="0" tIns="0" rIns="0" bIns="0" rtlCol="0" anchor="t"/>
-          <a:lstStyle/>
-          <a:p>
-            <a:pPr indent="0" marL="0">
-              <a:spcAft>
-                <a:spcPts val="400"/>
-              </a:spcAft>
+          <p:cNvPr id="22" name="Text 19"/>
+          <p:cNvSpPr txBox="1"/>
+          <p:nvPr/>
+        </p:nvSpPr>
+        <p:spPr>
+          <a:xfrm>
+            <a:off x="6428232" y="3648456"/>
+            <a:ext cx="411480" cy="274320"/>
+          </a:xfrm>
+          <a:prstGeom prst="rect">
+            <a:avLst/>
+          </a:prstGeom>
+          <a:noFill/>
+          <a:ln/>
+        </p:spPr>
+        <p:txBody>
+          <a:bodyPr wrap="square" lIns="0" tIns="0" rIns="0" bIns="0" rtlCol="0" anchor="ctr"/>
+          <a:lstStyle/>
+          <a:p>
+            <a:pPr algn="l" indent="0" marL="0">
               <a:buNone/>
             </a:pPr>
             <a:r>
               <a:rPr lang="en-US" sz="1100" b="1" dirty="0">
                 <a:solidFill>
-                  <a:srgbClr val="D9A441"/>
-                </a:solidFill>
-                <a:latin typeface="Calibri" pitchFamily="34" charset="0"/>
-                <a:ea typeface="Calibri" pitchFamily="34" charset="-122"/>
-                <a:cs typeface="Calibri" pitchFamily="34" charset="-120"/>
-              </a:rPr>
-              <a:t>Esto es exactamente History:  </a:t>
+                  <a:srgbClr val="2E2119"/>
+                </a:solidFill>
+                <a:latin typeface="Calibri" pitchFamily="34" charset="0"/>
+                <a:ea typeface="Calibri" pitchFamily="34" charset="-122"/>
+                <a:cs typeface="Calibri" pitchFamily="34" charset="-120"/>
+              </a:rPr>
+              <a:t>12</a:t>
             </a:r>
             <a:endParaRPr lang="en-US" sz="1100" dirty="0"/>
           </a:p>
-          <a:p>
-            <a:pPr indent="0" marL="0">
+        </p:txBody>
+      </p:sp>
+      <p:sp>
+        <p:nvSpPr>
+          <p:cNvPr id="23" name="Text 20"/>
+          <p:cNvSpPr txBox="1"/>
+          <p:nvPr/>
+        </p:nvSpPr>
+        <p:spPr>
+          <a:xfrm>
+            <a:off x="777240" y="3959352"/>
+            <a:ext cx="1920240" cy="274320"/>
+          </a:xfrm>
+          <a:prstGeom prst="rect">
+            <a:avLst/>
+          </a:prstGeom>
+          <a:noFill/>
+          <a:ln/>
+        </p:spPr>
+        <p:txBody>
+          <a:bodyPr wrap="square" lIns="0" tIns="0" rIns="0" bIns="0" rtlCol="0" anchor="ctr"/>
+          <a:lstStyle/>
+          <a:p>
+            <a:pPr algn="r" indent="0" marL="0">
               <a:buNone/>
             </a:pPr>
             <a:r>
               <a:rPr lang="en-US" sz="1100" dirty="0">
                 <a:solidFill>
-                  <a:srgbClr val="FFFFFF"/>
-                </a:solidFill>
-                <a:latin typeface="Calibri" pitchFamily="34" charset="0"/>
-                <a:ea typeface="Calibri" pitchFamily="34" charset="-122"/>
-                <a:cs typeface="Calibri" pitchFamily="34" charset="-120"/>
-              </a:rPr>
-              <a:t>quién compró qué y quién debe a quién, resuelto sin depender de que alguien lo recuerde o lo apunte a mano.</a:t>
+                  <a:srgbClr val="2E2119"/>
+                </a:solidFill>
+                <a:latin typeface="Calibri" pitchFamily="34" charset="0"/>
+                <a:ea typeface="Calibri" pitchFamily="34" charset="-122"/>
+                <a:cs typeface="Calibri" pitchFamily="34" charset="-120"/>
+              </a:rPr>
+              <a:t>Papel y boli</a:t>
             </a:r>
             <a:endParaRPr lang="en-US" sz="1100" dirty="0"/>
           </a:p>
@@ -7784,18 +8031,484 @@
       </p:sp>
       <p:sp>
         <p:nvSpPr>
-          <p:cNvPr id="17" name="Shape 14"/>
+          <p:cNvPr id="24" name="Shape 21"/>
           <p:cNvSpPr/>
           <p:nvPr/>
         </p:nvSpPr>
         <p:spPr>
           <a:xfrm>
-            <a:off x="548640" y="5806440"/>
-            <a:ext cx="11064240" cy="777240"/>
+            <a:off x="2788920" y="3986784"/>
+            <a:ext cx="3566160" cy="219456"/>
           </a:xfrm>
           <a:prstGeom prst="roundRect">
             <a:avLst>
-              <a:gd name="adj" fmla="val 11765"/>
+              <a:gd name="adj" fmla="val 16667"/>
+            </a:avLst>
+          </a:prstGeom>
+          <a:solidFill>
+            <a:srgbClr val="E7DCCB"/>
+          </a:solidFill>
+          <a:ln/>
+        </p:spPr>
+      </p:sp>
+      <p:sp>
+        <p:nvSpPr>
+          <p:cNvPr id="25" name="Shape 22"/>
+          <p:cNvSpPr/>
+          <p:nvPr/>
+        </p:nvSpPr>
+        <p:spPr>
+          <a:xfrm>
+            <a:off x="2788920" y="3986784"/>
+            <a:ext cx="3268980" cy="219456"/>
+          </a:xfrm>
+          <a:prstGeom prst="roundRect">
+            <a:avLst>
+              <a:gd name="adj" fmla="val 16667"/>
+            </a:avLst>
+          </a:prstGeom>
+          <a:solidFill>
+            <a:srgbClr val="C9682B"/>
+          </a:solidFill>
+          <a:ln/>
+        </p:spPr>
+      </p:sp>
+      <p:sp>
+        <p:nvSpPr>
+          <p:cNvPr id="26" name="Text 23"/>
+          <p:cNvSpPr txBox="1"/>
+          <p:nvPr/>
+        </p:nvSpPr>
+        <p:spPr>
+          <a:xfrm>
+            <a:off x="6428232" y="3959352"/>
+            <a:ext cx="411480" cy="274320"/>
+          </a:xfrm>
+          <a:prstGeom prst="rect">
+            <a:avLst/>
+          </a:prstGeom>
+          <a:noFill/>
+          <a:ln/>
+        </p:spPr>
+        <p:txBody>
+          <a:bodyPr wrap="square" lIns="0" tIns="0" rIns="0" bIns="0" rtlCol="0" anchor="ctr"/>
+          <a:lstStyle/>
+          <a:p>
+            <a:pPr algn="l" indent="0" marL="0">
+              <a:buNone/>
+            </a:pPr>
+            <a:r>
+              <a:rPr lang="en-US" sz="1100" b="1" dirty="0">
+                <a:solidFill>
+                  <a:srgbClr val="2E2119"/>
+                </a:solidFill>
+                <a:latin typeface="Calibri" pitchFamily="34" charset="0"/>
+                <a:ea typeface="Calibri" pitchFamily="34" charset="-122"/>
+                <a:cs typeface="Calibri" pitchFamily="34" charset="-120"/>
+              </a:rPr>
+              <a:t>11</a:t>
+            </a:r>
+            <a:endParaRPr lang="en-US" sz="1100" dirty="0"/>
+          </a:p>
+        </p:txBody>
+      </p:sp>
+      <p:sp>
+        <p:nvSpPr>
+          <p:cNvPr id="27" name="Text 24"/>
+          <p:cNvSpPr txBox="1"/>
+          <p:nvPr/>
+        </p:nvSpPr>
+        <p:spPr>
+          <a:xfrm>
+            <a:off x="777240" y="4270248"/>
+            <a:ext cx="1920240" cy="274320"/>
+          </a:xfrm>
+          <a:prstGeom prst="rect">
+            <a:avLst/>
+          </a:prstGeom>
+          <a:noFill/>
+          <a:ln/>
+        </p:spPr>
+        <p:txBody>
+          <a:bodyPr wrap="square" lIns="0" tIns="0" rIns="0" bIns="0" rtlCol="0" anchor="ctr"/>
+          <a:lstStyle/>
+          <a:p>
+            <a:pPr algn="r" indent="0" marL="0">
+              <a:buNone/>
+            </a:pPr>
+            <a:r>
+              <a:rPr lang="en-US" sz="1100" dirty="0">
+                <a:solidFill>
+                  <a:srgbClr val="2E2119"/>
+                </a:solidFill>
+                <a:latin typeface="Calibri" pitchFamily="34" charset="0"/>
+                <a:ea typeface="Calibri" pitchFamily="34" charset="-122"/>
+                <a:cs typeface="Calibri" pitchFamily="34" charset="-120"/>
+              </a:rPr>
+              <a:t>Ninguno / a ojo</a:t>
+            </a:r>
+            <a:endParaRPr lang="en-US" sz="1100" dirty="0"/>
+          </a:p>
+        </p:txBody>
+      </p:sp>
+      <p:sp>
+        <p:nvSpPr>
+          <p:cNvPr id="28" name="Shape 25"/>
+          <p:cNvSpPr/>
+          <p:nvPr/>
+        </p:nvSpPr>
+        <p:spPr>
+          <a:xfrm>
+            <a:off x="2788920" y="4297680"/>
+            <a:ext cx="3566160" cy="219456"/>
+          </a:xfrm>
+          <a:prstGeom prst="roundRect">
+            <a:avLst>
+              <a:gd name="adj" fmla="val 16667"/>
+            </a:avLst>
+          </a:prstGeom>
+          <a:solidFill>
+            <a:srgbClr val="E7DCCB"/>
+          </a:solidFill>
+          <a:ln/>
+        </p:spPr>
+      </p:sp>
+      <p:sp>
+        <p:nvSpPr>
+          <p:cNvPr id="29" name="Shape 26"/>
+          <p:cNvSpPr/>
+          <p:nvPr/>
+        </p:nvSpPr>
+        <p:spPr>
+          <a:xfrm>
+            <a:off x="2788920" y="4297680"/>
+            <a:ext cx="2377440" cy="219456"/>
+          </a:xfrm>
+          <a:prstGeom prst="roundRect">
+            <a:avLst>
+              <a:gd name="adj" fmla="val 16667"/>
+            </a:avLst>
+          </a:prstGeom>
+          <a:solidFill>
+            <a:srgbClr val="8A7A6D"/>
+          </a:solidFill>
+          <a:ln/>
+        </p:spPr>
+      </p:sp>
+      <p:sp>
+        <p:nvSpPr>
+          <p:cNvPr id="30" name="Text 27"/>
+          <p:cNvSpPr txBox="1"/>
+          <p:nvPr/>
+        </p:nvSpPr>
+        <p:spPr>
+          <a:xfrm>
+            <a:off x="6428232" y="4270248"/>
+            <a:ext cx="411480" cy="274320"/>
+          </a:xfrm>
+          <a:prstGeom prst="rect">
+            <a:avLst/>
+          </a:prstGeom>
+          <a:noFill/>
+          <a:ln/>
+        </p:spPr>
+        <p:txBody>
+          <a:bodyPr wrap="square" lIns="0" tIns="0" rIns="0" bIns="0" rtlCol="0" anchor="ctr"/>
+          <a:lstStyle/>
+          <a:p>
+            <a:pPr algn="l" indent="0" marL="0">
+              <a:buNone/>
+            </a:pPr>
+            <a:r>
+              <a:rPr lang="en-US" sz="1100" b="1" dirty="0">
+                <a:solidFill>
+                  <a:srgbClr val="2E2119"/>
+                </a:solidFill>
+                <a:latin typeface="Calibri" pitchFamily="34" charset="0"/>
+                <a:ea typeface="Calibri" pitchFamily="34" charset="-122"/>
+                <a:cs typeface="Calibri" pitchFamily="34" charset="-120"/>
+              </a:rPr>
+              <a:t>8</a:t>
+            </a:r>
+            <a:endParaRPr lang="en-US" sz="1100" dirty="0"/>
+          </a:p>
+        </p:txBody>
+      </p:sp>
+      <p:sp>
+        <p:nvSpPr>
+          <p:cNvPr id="31" name="Text 28"/>
+          <p:cNvSpPr txBox="1"/>
+          <p:nvPr/>
+        </p:nvSpPr>
+        <p:spPr>
+          <a:xfrm>
+            <a:off x="777240" y="4581144"/>
+            <a:ext cx="1920240" cy="274320"/>
+          </a:xfrm>
+          <a:prstGeom prst="rect">
+            <a:avLst/>
+          </a:prstGeom>
+          <a:noFill/>
+          <a:ln/>
+        </p:spPr>
+        <p:txBody>
+          <a:bodyPr wrap="square" lIns="0" tIns="0" rIns="0" bIns="0" rtlCol="0" anchor="ctr"/>
+          <a:lstStyle/>
+          <a:p>
+            <a:pPr algn="r" indent="0" marL="0">
+              <a:buNone/>
+            </a:pPr>
+            <a:r>
+              <a:rPr lang="en-US" sz="1100" dirty="0">
+                <a:solidFill>
+                  <a:srgbClr val="2E2119"/>
+                </a:solidFill>
+                <a:latin typeface="Calibri" pitchFamily="34" charset="0"/>
+                <a:ea typeface="Calibri" pitchFamily="34" charset="-122"/>
+                <a:cs typeface="Calibri" pitchFamily="34" charset="-120"/>
+              </a:rPr>
+              <a:t>Grupo de WhatsApp</a:t>
+            </a:r>
+            <a:endParaRPr lang="en-US" sz="1100" dirty="0"/>
+          </a:p>
+        </p:txBody>
+      </p:sp>
+      <p:sp>
+        <p:nvSpPr>
+          <p:cNvPr id="32" name="Shape 29"/>
+          <p:cNvSpPr/>
+          <p:nvPr/>
+        </p:nvSpPr>
+        <p:spPr>
+          <a:xfrm>
+            <a:off x="2788920" y="4608576"/>
+            <a:ext cx="3566160" cy="219456"/>
+          </a:xfrm>
+          <a:prstGeom prst="roundRect">
+            <a:avLst>
+              <a:gd name="adj" fmla="val 16667"/>
+            </a:avLst>
+          </a:prstGeom>
+          <a:solidFill>
+            <a:srgbClr val="E7DCCB"/>
+          </a:solidFill>
+          <a:ln/>
+        </p:spPr>
+      </p:sp>
+      <p:sp>
+        <p:nvSpPr>
+          <p:cNvPr id="33" name="Shape 30"/>
+          <p:cNvSpPr/>
+          <p:nvPr/>
+        </p:nvSpPr>
+        <p:spPr>
+          <a:xfrm>
+            <a:off x="2788920" y="4608576"/>
+            <a:ext cx="297180" cy="219456"/>
+          </a:xfrm>
+          <a:prstGeom prst="roundRect">
+            <a:avLst>
+              <a:gd name="adj" fmla="val 16667"/>
+            </a:avLst>
+          </a:prstGeom>
+          <a:solidFill>
+            <a:srgbClr val="8A7A6D"/>
+          </a:solidFill>
+          <a:ln/>
+        </p:spPr>
+      </p:sp>
+      <p:sp>
+        <p:nvSpPr>
+          <p:cNvPr id="34" name="Text 31"/>
+          <p:cNvSpPr txBox="1"/>
+          <p:nvPr/>
+        </p:nvSpPr>
+        <p:spPr>
+          <a:xfrm>
+            <a:off x="6428232" y="4581144"/>
+            <a:ext cx="411480" cy="274320"/>
+          </a:xfrm>
+          <a:prstGeom prst="rect">
+            <a:avLst/>
+          </a:prstGeom>
+          <a:noFill/>
+          <a:ln/>
+        </p:spPr>
+        <p:txBody>
+          <a:bodyPr wrap="square" lIns="0" tIns="0" rIns="0" bIns="0" rtlCol="0" anchor="ctr"/>
+          <a:lstStyle/>
+          <a:p>
+            <a:pPr algn="l" indent="0" marL="0">
+              <a:buNone/>
+            </a:pPr>
+            <a:r>
+              <a:rPr lang="en-US" sz="1100" b="1" dirty="0">
+                <a:solidFill>
+                  <a:srgbClr val="2E2119"/>
+                </a:solidFill>
+                <a:latin typeface="Calibri" pitchFamily="34" charset="0"/>
+                <a:ea typeface="Calibri" pitchFamily="34" charset="-122"/>
+                <a:cs typeface="Calibri" pitchFamily="34" charset="-120"/>
+              </a:rPr>
+              <a:t>1</a:t>
+            </a:r>
+            <a:endParaRPr lang="en-US" sz="1100" dirty="0"/>
+          </a:p>
+        </p:txBody>
+      </p:sp>
+      <p:sp>
+        <p:nvSpPr>
+          <p:cNvPr id="35" name="Text 32"/>
+          <p:cNvSpPr txBox="1"/>
+          <p:nvPr/>
+        </p:nvSpPr>
+        <p:spPr>
+          <a:xfrm>
+            <a:off x="777240" y="4892040"/>
+            <a:ext cx="1920240" cy="274320"/>
+          </a:xfrm>
+          <a:prstGeom prst="rect">
+            <a:avLst/>
+          </a:prstGeom>
+          <a:noFill/>
+          <a:ln/>
+        </p:spPr>
+        <p:txBody>
+          <a:bodyPr wrap="square" lIns="0" tIns="0" rIns="0" bIns="0" rtlCol="0" anchor="ctr"/>
+          <a:lstStyle/>
+          <a:p>
+            <a:pPr algn="r" indent="0" marL="0">
+              <a:buNone/>
+            </a:pPr>
+            <a:r>
+              <a:rPr lang="en-US" sz="1100" b="1" dirty="0">
+                <a:solidFill>
+                  <a:srgbClr val="2E2119"/>
+                </a:solidFill>
+                <a:latin typeface="Calibri" pitchFamily="34" charset="0"/>
+                <a:ea typeface="Calibri" pitchFamily="34" charset="-122"/>
+                <a:cs typeface="Calibri" pitchFamily="34" charset="-120"/>
+              </a:rPr>
+              <a:t>Una app específica</a:t>
+            </a:r>
+            <a:endParaRPr lang="en-US" sz="1100" dirty="0"/>
+          </a:p>
+        </p:txBody>
+      </p:sp>
+      <p:sp>
+        <p:nvSpPr>
+          <p:cNvPr id="36" name="Shape 33"/>
+          <p:cNvSpPr/>
+          <p:nvPr/>
+        </p:nvSpPr>
+        <p:spPr>
+          <a:xfrm>
+            <a:off x="2788920" y="4919472"/>
+            <a:ext cx="3566160" cy="219456"/>
+          </a:xfrm>
+          <a:prstGeom prst="roundRect">
+            <a:avLst>
+              <a:gd name="adj" fmla="val 16667"/>
+            </a:avLst>
+          </a:prstGeom>
+          <a:solidFill>
+            <a:srgbClr val="E7DCCB"/>
+          </a:solidFill>
+          <a:ln/>
+        </p:spPr>
+      </p:sp>
+      <p:sp>
+        <p:nvSpPr>
+          <p:cNvPr id="37" name="Text 34"/>
+          <p:cNvSpPr txBox="1"/>
+          <p:nvPr/>
+        </p:nvSpPr>
+        <p:spPr>
+          <a:xfrm>
+            <a:off x="6428232" y="4892040"/>
+            <a:ext cx="411480" cy="274320"/>
+          </a:xfrm>
+          <a:prstGeom prst="rect">
+            <a:avLst/>
+          </a:prstGeom>
+          <a:noFill/>
+          <a:ln/>
+        </p:spPr>
+        <p:txBody>
+          <a:bodyPr wrap="square" lIns="0" tIns="0" rIns="0" bIns="0" rtlCol="0" anchor="ctr"/>
+          <a:lstStyle/>
+          <a:p>
+            <a:pPr algn="l" indent="0" marL="0">
+              <a:buNone/>
+            </a:pPr>
+            <a:r>
+              <a:rPr lang="en-US" sz="1100" b="1" dirty="0">
+                <a:solidFill>
+                  <a:srgbClr val="C9682B"/>
+                </a:solidFill>
+                <a:latin typeface="Calibri" pitchFamily="34" charset="0"/>
+                <a:ea typeface="Calibri" pitchFamily="34" charset="-122"/>
+                <a:cs typeface="Calibri" pitchFamily="34" charset="-120"/>
+              </a:rPr>
+              <a:t>0</a:t>
+            </a:r>
+            <a:endParaRPr lang="en-US" sz="1100" dirty="0"/>
+          </a:p>
+        </p:txBody>
+      </p:sp>
+      <p:sp>
+        <p:nvSpPr>
+          <p:cNvPr id="38" name="Text 35"/>
+          <p:cNvSpPr txBox="1"/>
+          <p:nvPr/>
+        </p:nvSpPr>
+        <p:spPr>
+          <a:xfrm>
+            <a:off x="777240" y="5248656"/>
+            <a:ext cx="6035040" cy="256032"/>
+          </a:xfrm>
+          <a:prstGeom prst="rect">
+            <a:avLst/>
+          </a:prstGeom>
+          <a:noFill/>
+          <a:ln/>
+        </p:spPr>
+        <p:txBody>
+          <a:bodyPr wrap="square" lIns="0" tIns="0" rIns="0" bIns="0" rtlCol="0" anchor="ctr"/>
+          <a:lstStyle/>
+          <a:p>
+            <a:pPr indent="0" marL="0">
+              <a:buNone/>
+            </a:pPr>
+            <a:r>
+              <a:rPr lang="en-US" sz="950" i="1" dirty="0">
+                <a:solidFill>
+                  <a:srgbClr val="C9682B"/>
+                </a:solidFill>
+                <a:latin typeface="Calibri" pitchFamily="34" charset="0"/>
+                <a:ea typeface="Calibri" pitchFamily="34" charset="-122"/>
+                <a:cs typeface="Calibri" pitchFamily="34" charset="-120"/>
+              </a:rPr>
+              <a:t>↑ 2 personas la probaron alguna vez (Pregunta 7) — pero 0/32 la usa hoy: la abandonaron</a:t>
+            </a:r>
+            <a:endParaRPr lang="en-US" sz="950" dirty="0"/>
+          </a:p>
+        </p:txBody>
+      </p:sp>
+      <p:sp>
+        <p:nvSpPr>
+          <p:cNvPr id="39" name="Shape 36"/>
+          <p:cNvSpPr/>
+          <p:nvPr/>
+        </p:nvSpPr>
+        <p:spPr>
+          <a:xfrm>
+            <a:off x="7223760" y="3108960"/>
+            <a:ext cx="4389120" cy="2148840"/>
+          </a:xfrm>
+          <a:prstGeom prst="roundRect">
+            <a:avLst>
+              <a:gd name="adj" fmla="val 5106"/>
             </a:avLst>
           </a:prstGeom>
           <a:solidFill>
@@ -7811,30 +8524,33 @@
       </p:sp>
       <p:sp>
         <p:nvSpPr>
-          <p:cNvPr id="18" name="Text 15"/>
-          <p:cNvSpPr txBox="1"/>
-          <p:nvPr/>
-        </p:nvSpPr>
-        <p:spPr>
-          <a:xfrm>
-            <a:off x="777240" y="5806440"/>
-            <a:ext cx="10607040" cy="777240"/>
-          </a:xfrm>
-          <a:prstGeom prst="rect">
-            <a:avLst/>
-          </a:prstGeom>
-          <a:noFill/>
-          <a:ln/>
-        </p:spPr>
-        <p:txBody>
-          <a:bodyPr wrap="square" lIns="0" tIns="0" rIns="0" bIns="0" rtlCol="0" anchor="ctr"/>
-          <a:lstStyle/>
-          <a:p>
-            <a:pPr indent="0" marL="0">
-              <a:buNone/>
-            </a:pPr>
-            <a:r>
-              <a:rPr lang="en-US" sz="1100" b="1" dirty="0">
+          <p:cNvPr id="40" name="Text 37"/>
+          <p:cNvSpPr txBox="1"/>
+          <p:nvPr/>
+        </p:nvSpPr>
+        <p:spPr>
+          <a:xfrm>
+            <a:off x="7452360" y="3246120"/>
+            <a:ext cx="3931920" cy="1874520"/>
+          </a:xfrm>
+          <a:prstGeom prst="rect">
+            <a:avLst/>
+          </a:prstGeom>
+          <a:noFill/>
+          <a:ln/>
+        </p:spPr>
+        <p:txBody>
+          <a:bodyPr wrap="square" lIns="0" tIns="0" rIns="0" bIns="0" rtlCol="0" anchor="t"/>
+          <a:lstStyle/>
+          <a:p>
+            <a:pPr indent="0" marL="0">
+              <a:spcAft>
+                <a:spcPts val="600"/>
+              </a:spcAft>
+              <a:buNone/>
+            </a:pPr>
+            <a:r>
+              <a:rPr lang="en-US" sz="1150" b="1" dirty="0">
                 <a:solidFill>
                   <a:srgbClr val="C9682B"/>
                 </a:solidFill>
@@ -7842,13 +8558,16 @@
                 <a:ea typeface="Calibri" pitchFamily="34" charset="-122"/>
                 <a:cs typeface="Calibri" pitchFamily="34" charset="-120"/>
               </a:rPr>
-              <a:t>Ya resuelto en P1, gratis:  </a:t>
-            </a:r>
-            <a:pPr indent="0" marL="0">
-              <a:buNone/>
-            </a:pPr>
-            <a:r>
-              <a:rPr lang="en-US" sz="1100" dirty="0">
+              <a:t>Las apps no son el problema — la retención sí.  </a:t>
+            </a:r>
+            <a:endParaRPr lang="en-US" sz="1150" dirty="0"/>
+          </a:p>
+          <a:p>
+            <a:pPr indent="0" marL="0">
+              <a:buNone/>
+            </a:pPr>
+            <a:r>
+              <a:rPr lang="en-US" sz="1150" dirty="0">
                 <a:solidFill>
                   <a:srgbClr val="2E2119"/>
                 </a:solidFill>
@@ -7856,9 +8575,9 @@
                 <a:ea typeface="Calibri" pitchFamily="34" charset="-122"/>
                 <a:cs typeface="Calibri" pitchFamily="34" charset="-120"/>
               </a:rPr>
-              <a:t>"Pois supoño que cando algo se acabe ninguén avise" — se resuelve solo con que Fridge sea una vista compartida: marcar "se acabó" ya avisa a todo el piso, sin lógica extra ni contar unidades.</a:t>
-            </a:r>
-            <a:endParaRPr lang="en-US" sz="1100" dirty="0"/>
+              <a:t>Bring! y AnyList llevan años disponibles y son razonablemente buenas (estado del arte). 2 de 32 personas confirman haberlas probado — pero ninguna las usa hoy. A quien probó Bring! se le preguntó por qué la dejó, y respondió: "porque si no colaboran los demás... pues mal vamos". El hueco no está en construir "una app más" — está en resolver por qué las que existen no retienen ni a quien sí las prueba.</a:t>
+            </a:r>
+            <a:endParaRPr lang="en-US" sz="1150" dirty="0"/>
           </a:p>
         </p:txBody>
       </p:sp>
@@ -7971,7 +8690,7 @@
                 <a:ea typeface="Calibri" pitchFamily="34" charset="-122"/>
                 <a:cs typeface="Calibri" pitchFamily="34" charset="-120"/>
               </a:rPr>
-              <a:t>PASO 3</a:t>
+              <a:t>PASO 2 — VALIDACIÓN</a:t>
             </a:r>
             <a:endParaRPr lang="en-US" sz="1200" dirty="0"/>
           </a:p>
@@ -8010,7 +8729,7 @@
                 <a:ea typeface="Cambria" pitchFamily="34" charset="-122"/>
                 <a:cs typeface="Cambria" pitchFamily="34" charset="-120"/>
               </a:rPr>
-              <a:t>Estudio de mercado — A Coruña</a:t>
+              <a:t>Las quejas espontáneas confirman el mismo patrón</a:t>
             </a:r>
             <a:endParaRPr lang="en-US" sz="2800" dirty="0"/>
           </a:p>
@@ -8018,18 +8737,57 @@
       </p:sp>
       <p:sp>
         <p:nvSpPr>
-          <p:cNvPr id="6" name="Shape 3"/>
+          <p:cNvPr id="6" name="Text 3"/>
+          <p:cNvSpPr txBox="1"/>
+          <p:nvPr/>
+        </p:nvSpPr>
+        <p:spPr>
+          <a:xfrm>
+            <a:off x="548640" y="1207008"/>
+            <a:ext cx="11094415" cy="274320"/>
+          </a:xfrm>
+          <a:prstGeom prst="rect">
+            <a:avLst/>
+          </a:prstGeom>
+          <a:noFill/>
+          <a:ln/>
+        </p:spPr>
+        <p:txBody>
+          <a:bodyPr wrap="square" lIns="0" tIns="0" rIns="0" bIns="0" rtlCol="0" anchor="ctr"/>
+          <a:lstStyle/>
+          <a:p>
+            <a:pPr indent="0" marL="0">
+              <a:buNone/>
+            </a:pPr>
+            <a:r>
+              <a:rPr lang="en-US" sz="1000" i="1" dirty="0">
+                <a:solidFill>
+                  <a:srgbClr val="8A7A6D"/>
+                </a:solidFill>
+                <a:latin typeface="Calibri" pitchFamily="34" charset="0"/>
+                <a:ea typeface="Calibri" pitchFamily="34" charset="-122"/>
+                <a:cs typeface="Calibri" pitchFamily="34" charset="-120"/>
+              </a:rPr>
+              <a:t>Pregunta 9 (abierta): "¿Qué es lo que más te frustra de gestionar la compra o la nevera?" — nadie vio el prototipo antes de responder.</a:t>
+            </a:r>
+            <a:endParaRPr lang="en-US" sz="1000" dirty="0"/>
+          </a:p>
+        </p:txBody>
+      </p:sp>
+      <p:sp>
+        <p:nvSpPr>
+          <p:cNvPr id="7" name="Shape 4"/>
           <p:cNvSpPr/>
           <p:nvPr/>
         </p:nvSpPr>
         <p:spPr>
           <a:xfrm>
-            <a:off x="548640" y="1463040"/>
-            <a:ext cx="3566160" cy="2468880"/>
+            <a:off x="548640" y="1508760"/>
+            <a:ext cx="5532120" cy="4160520"/>
           </a:xfrm>
           <a:prstGeom prst="roundRect">
             <a:avLst>
-              <a:gd name="adj" fmla="val 4444"/>
+              <a:gd name="adj" fmla="val 2637"/>
             </a:avLst>
           </a:prstGeom>
           <a:solidFill>
@@ -8047,14 +8805,14 @@
       </p:sp>
       <p:sp>
         <p:nvSpPr>
-          <p:cNvPr id="7" name="Text 4"/>
+          <p:cNvPr id="8" name="Text 5"/>
           <p:cNvSpPr txBox="1"/>
           <p:nvPr/>
         </p:nvSpPr>
         <p:spPr>
           <a:xfrm>
             <a:off x="777240" y="1645920"/>
-            <a:ext cx="3108960" cy="320040"/>
+            <a:ext cx="5074920" cy="274320"/>
           </a:xfrm>
           <a:prstGeom prst="rect">
             <a:avLst/>
@@ -8070,7 +8828,7 @@
               <a:buNone/>
             </a:pPr>
             <a:r>
-              <a:rPr lang="en-US" sz="1100" b="1" spc="100" kern="0" dirty="0">
+              <a:rPr lang="en-US" sz="1200" b="1" spc="150" kern="0" dirty="0">
                 <a:solidFill>
                   <a:srgbClr val="C9682B"/>
                 </a:solidFill>
@@ -8078,22 +8836,22 @@
                 <a:ea typeface="Calibri" pitchFamily="34" charset="-122"/>
                 <a:cs typeface="Calibri" pitchFamily="34" charset="-120"/>
               </a:rPr>
-              <a:t>MERCADO TOTAL</a:t>
-            </a:r>
-            <a:endParaRPr lang="en-US" sz="1100" dirty="0"/>
-          </a:p>
-        </p:txBody>
-      </p:sp>
-      <p:sp>
-        <p:nvSpPr>
-          <p:cNvPr id="8" name="Text 5"/>
-          <p:cNvSpPr txBox="1"/>
-          <p:nvPr/>
-        </p:nvSpPr>
-        <p:spPr>
-          <a:xfrm>
-            <a:off x="777240" y="2011680"/>
-            <a:ext cx="3108960" cy="1005840"/>
+              <a:t>FALTA DE COOPERACIÓN</a:t>
+            </a:r>
+            <a:endParaRPr lang="en-US" sz="1200" dirty="0"/>
+          </a:p>
+        </p:txBody>
+      </p:sp>
+      <p:sp>
+        <p:nvSpPr>
+          <p:cNvPr id="9" name="Text 6"/>
+          <p:cNvSpPr txBox="1"/>
+          <p:nvPr/>
+        </p:nvSpPr>
+        <p:spPr>
+          <a:xfrm>
+            <a:off x="777240" y="1901952"/>
+            <a:ext cx="5074920" cy="274320"/>
           </a:xfrm>
           <a:prstGeom prst="rect">
             <a:avLst/>
@@ -8109,94 +8867,186 @@
               <a:buNone/>
             </a:pPr>
             <a:r>
-              <a:rPr lang="en-US" sz="2000" b="1" dirty="0">
+              <a:rPr lang="en-US" sz="1050" i="1" dirty="0">
+                <a:solidFill>
+                  <a:srgbClr val="8A7A6D"/>
+                </a:solidFill>
+                <a:latin typeface="Calibri" pitchFamily="34" charset="0"/>
+                <a:ea typeface="Calibri" pitchFamily="34" charset="-122"/>
+                <a:cs typeface="Calibri" pitchFamily="34" charset="-120"/>
+              </a:rPr>
+              <a:t>8 de 32 personas (25%) — el tema más repetido, sin que se les preguntara</a:t>
+            </a:r>
+            <a:endParaRPr lang="en-US" sz="1050" dirty="0"/>
+          </a:p>
+        </p:txBody>
+      </p:sp>
+      <p:sp>
+        <p:nvSpPr>
+          <p:cNvPr id="10" name="Text 7"/>
+          <p:cNvSpPr txBox="1"/>
+          <p:nvPr/>
+        </p:nvSpPr>
+        <p:spPr>
+          <a:xfrm>
+            <a:off x="822960" y="2286000"/>
+            <a:ext cx="5029200" cy="3291840"/>
+          </a:xfrm>
+          <a:prstGeom prst="rect">
+            <a:avLst/>
+          </a:prstGeom>
+          <a:noFill/>
+          <a:ln/>
+        </p:spPr>
+        <p:txBody>
+          <a:bodyPr wrap="square" lIns="0" tIns="0" rIns="0" bIns="0" rtlCol="0" anchor="t"/>
+          <a:lstStyle/>
+          <a:p>
+            <a:pPr marL="342900" indent="-342900">
+              <a:spcAft>
+                <a:spcPts val="700"/>
+              </a:spcAft>
+              <a:buSzPct val="100000"/>
+              <a:buChar char="•"/>
+            </a:pPr>
+            <a:r>
+              <a:rPr lang="en-US" sz="1000" i="1" dirty="0">
                 <a:solidFill>
                   <a:srgbClr val="2E2119"/>
                 </a:solidFill>
-                <a:latin typeface="Cambria" pitchFamily="34" charset="0"/>
-                <a:ea typeface="Cambria" pitchFamily="34" charset="-122"/>
-                <a:cs typeface="Cambria" pitchFamily="34" charset="-120"/>
-              </a:rPr>
-              <a:t>Hogares de</a:t>
-            </a:r>
-            <a:endParaRPr lang="en-US" sz="2000" dirty="0"/>
-          </a:p>
-          <a:p>
-            <a:pPr indent="0" marL="0">
-              <a:buNone/>
-            </a:pPr>
-            <a:r>
-              <a:rPr lang="en-US" sz="2000" b="1" dirty="0">
+                <a:latin typeface="Calibri" pitchFamily="34" charset="0"/>
+                <a:ea typeface="Calibri" pitchFamily="34" charset="-122"/>
+                <a:cs typeface="Calibri" pitchFamily="34" charset="-120"/>
+              </a:rPr>
+              <a:t>"I don’t know who bought what"</a:t>
+            </a:r>
+            <a:endParaRPr lang="en-US" sz="1000" dirty="0"/>
+          </a:p>
+          <a:p>
+            <a:pPr marL="342900" indent="-342900">
+              <a:spcAft>
+                <a:spcPts val="700"/>
+              </a:spcAft>
+              <a:buSzPct val="100000"/>
+              <a:buChar char="•"/>
+            </a:pPr>
+            <a:r>
+              <a:rPr lang="en-US" sz="1000" i="1" dirty="0">
                 <a:solidFill>
                   <a:srgbClr val="2E2119"/>
                 </a:solidFill>
-                <a:latin typeface="Cambria" pitchFamily="34" charset="0"/>
-                <a:ea typeface="Cambria" pitchFamily="34" charset="-122"/>
-                <a:cs typeface="Cambria" pitchFamily="34" charset="-120"/>
-              </a:rPr>
-              <a:t>España 2+ pers.</a:t>
-            </a:r>
-            <a:endParaRPr lang="en-US" sz="2000" dirty="0"/>
-          </a:p>
-        </p:txBody>
-      </p:sp>
-      <p:sp>
-        <p:nvSpPr>
-          <p:cNvPr id="9" name="Text 6"/>
-          <p:cNvSpPr txBox="1"/>
-          <p:nvPr/>
-        </p:nvSpPr>
-        <p:spPr>
-          <a:xfrm>
-            <a:off x="777240" y="3063240"/>
-            <a:ext cx="3108960" cy="777240"/>
-          </a:xfrm>
-          <a:prstGeom prst="rect">
-            <a:avLst/>
-          </a:prstGeom>
-          <a:noFill/>
-          <a:ln/>
-        </p:spPr>
-        <p:txBody>
-          <a:bodyPr wrap="square" lIns="0" tIns="0" rIns="0" bIns="0" rtlCol="0" anchor="t"/>
-          <a:lstStyle/>
-          <a:p>
-            <a:pPr indent="0" marL="0">
-              <a:buNone/>
-            </a:pPr>
-            <a:r>
-              <a:rPr lang="en-US" sz="1050" dirty="0">
-                <a:solidFill>
-                  <a:srgbClr val="8A7A6D"/>
-                </a:solidFill>
-                <a:latin typeface="Calibri" pitchFamily="34" charset="0"/>
-                <a:ea typeface="Calibri" pitchFamily="34" charset="-122"/>
-                <a:cs typeface="Calibri" pitchFamily="34" charset="-120"/>
-              </a:rPr>
-              <a:t>Tamaño medio 2,50 pers./hogar (INE 2023)</a:t>
-            </a:r>
-            <a:endParaRPr lang="en-US" sz="1050" dirty="0"/>
-          </a:p>
-        </p:txBody>
-      </p:sp>
-      <p:sp>
-        <p:nvSpPr>
-          <p:cNvPr id="10" name="Shape 7"/>
+                <a:latin typeface="Calibri" pitchFamily="34" charset="0"/>
+                <a:ea typeface="Calibri" pitchFamily="34" charset="-122"/>
+                <a:cs typeface="Calibri" pitchFamily="34" charset="-120"/>
+              </a:rPr>
+              <a:t>"Not knowing what the others want, the others eating my stuff" / "People eating my food"</a:t>
+            </a:r>
+            <a:endParaRPr lang="en-US" sz="1000" dirty="0"/>
+          </a:p>
+          <a:p>
+            <a:pPr marL="342900" indent="-342900">
+              <a:spcAft>
+                <a:spcPts val="700"/>
+              </a:spcAft>
+              <a:buSzPct val="100000"/>
+              <a:buChar char="•"/>
+            </a:pPr>
+            <a:r>
+              <a:rPr lang="en-US" sz="1000" i="1" dirty="0">
+                <a:solidFill>
+                  <a:srgbClr val="2E2119"/>
+                </a:solidFill>
+                <a:latin typeface="Calibri" pitchFamily="34" charset="0"/>
+                <a:ea typeface="Calibri" pitchFamily="34" charset="-122"/>
+                <a:cs typeface="Calibri" pitchFamily="34" charset="-120"/>
+              </a:rPr>
+              <a:t>"When people use the food I planned to use in a meal for myself... so I have to use something else"</a:t>
+            </a:r>
+            <a:endParaRPr lang="en-US" sz="1000" dirty="0"/>
+          </a:p>
+          <a:p>
+            <a:pPr marL="342900" indent="-342900">
+              <a:spcAft>
+                <a:spcPts val="700"/>
+              </a:spcAft>
+              <a:buSzPct val="100000"/>
+              <a:buChar char="•"/>
+            </a:pPr>
+            <a:r>
+              <a:rPr lang="en-US" sz="1000" i="1" dirty="0">
+                <a:solidFill>
+                  <a:srgbClr val="2E2119"/>
+                </a:solidFill>
+                <a:latin typeface="Calibri" pitchFamily="34" charset="0"/>
+                <a:ea typeface="Calibri" pitchFamily="34" charset="-122"/>
+                <a:cs typeface="Calibri" pitchFamily="34" charset="-120"/>
+              </a:rPr>
+              <a:t>"Not knowing if someone bought something just for themself" / dudar en comprar algo "y que se lo coma otra persona"</a:t>
+            </a:r>
+            <a:endParaRPr lang="en-US" sz="1000" dirty="0"/>
+          </a:p>
+          <a:p>
+            <a:pPr marL="342900" indent="-342900">
+              <a:spcAft>
+                <a:spcPts val="700"/>
+              </a:spcAft>
+              <a:buSzPct val="100000"/>
+              <a:buChar char="•"/>
+            </a:pPr>
+            <a:r>
+              <a:rPr lang="en-US" sz="1000" i="1" dirty="0">
+                <a:solidFill>
+                  <a:srgbClr val="2E2119"/>
+                </a:solidFill>
+                <a:latin typeface="Calibri" pitchFamily="34" charset="0"/>
+                <a:ea typeface="Calibri" pitchFamily="34" charset="-122"/>
+                <a:cs typeface="Calibri" pitchFamily="34" charset="-120"/>
+              </a:rPr>
+              <a:t>"Que compran cosas que no quiero"</a:t>
+            </a:r>
+            <a:endParaRPr lang="en-US" sz="1000" dirty="0"/>
+          </a:p>
+          <a:p>
+            <a:pPr marL="342900" indent="-342900">
+              <a:spcAft>
+                <a:spcPts val="700"/>
+              </a:spcAft>
+              <a:buSzPct val="100000"/>
+              <a:buChar char="•"/>
+            </a:pPr>
+            <a:r>
+              <a:rPr lang="en-US" sz="1000" i="1" dirty="0">
+                <a:solidFill>
+                  <a:srgbClr val="2E2119"/>
+                </a:solidFill>
+                <a:latin typeface="Calibri" pitchFamily="34" charset="0"/>
+                <a:ea typeface="Calibri" pitchFamily="34" charset="-122"/>
+                <a:cs typeface="Calibri" pitchFamily="34" charset="-120"/>
+              </a:rPr>
+              <a:t>"Cada vez una compra una cosa, lo complicado es llevar la cuenta de quién compró qué antes"</a:t>
+            </a:r>
+            <a:endParaRPr lang="en-US" sz="1000" dirty="0"/>
+          </a:p>
+        </p:txBody>
+      </p:sp>
+      <p:sp>
+        <p:nvSpPr>
+          <p:cNvPr id="11" name="Shape 8"/>
           <p:cNvSpPr/>
           <p:nvPr/>
         </p:nvSpPr>
         <p:spPr>
           <a:xfrm>
-            <a:off x="4297680" y="1463040"/>
-            <a:ext cx="3566160" cy="2468880"/>
+            <a:off x="6263640" y="1508760"/>
+            <a:ext cx="5349240" cy="4160520"/>
           </a:xfrm>
           <a:prstGeom prst="roundRect">
             <a:avLst>
-              <a:gd name="adj" fmla="val 4444"/>
+              <a:gd name="adj" fmla="val 2637"/>
             </a:avLst>
           </a:prstGeom>
           <a:solidFill>
-            <a:srgbClr val="2E2119"/>
+            <a:srgbClr val="EDE6DC"/>
           </a:solidFill>
           <a:ln/>
           <a:effectLst>
@@ -8210,14 +9060,14 @@
       </p:sp>
       <p:sp>
         <p:nvSpPr>
-          <p:cNvPr id="11" name="Text 8"/>
-          <p:cNvSpPr txBox="1"/>
-          <p:nvPr/>
-        </p:nvSpPr>
-        <p:spPr>
-          <a:xfrm>
-            <a:off x="4526280" y="1645920"/>
-            <a:ext cx="3108960" cy="320040"/>
+          <p:cNvPr id="12" name="Text 9"/>
+          <p:cNvSpPr txBox="1"/>
+          <p:nvPr/>
+        </p:nvSpPr>
+        <p:spPr>
+          <a:xfrm>
+            <a:off x="6492240" y="1645920"/>
+            <a:ext cx="4892040" cy="274320"/>
           </a:xfrm>
           <a:prstGeom prst="rect">
             <a:avLst/>
@@ -8233,258 +9083,239 @@
               <a:buNone/>
             </a:pPr>
             <a:r>
-              <a:rPr lang="en-US" sz="1100" b="1" spc="100" kern="0" dirty="0">
-                <a:solidFill>
-                  <a:srgbClr val="D9A441"/>
-                </a:solidFill>
-                <a:latin typeface="Calibri" pitchFamily="34" charset="0"/>
-                <a:ea typeface="Calibri" pitchFamily="34" charset="-122"/>
-                <a:cs typeface="Calibri" pitchFamily="34" charset="-120"/>
-              </a:rPr>
-              <a:t>MERCADO ACCESIBLE</a:t>
+              <a:rPr lang="en-US" sz="1200" b="1" spc="150" kern="0" dirty="0">
+                <a:solidFill>
+                  <a:srgbClr val="C9682B"/>
+                </a:solidFill>
+                <a:latin typeface="Calibri" pitchFamily="34" charset="0"/>
+                <a:ea typeface="Calibri" pitchFamily="34" charset="-122"/>
+                <a:cs typeface="Calibri" pitchFamily="34" charset="-120"/>
+              </a:rPr>
+              <a:t>FALTA DE TRACKER DE GASTOS</a:t>
+            </a:r>
+            <a:endParaRPr lang="en-US" sz="1200" dirty="0"/>
+          </a:p>
+        </p:txBody>
+      </p:sp>
+      <p:sp>
+        <p:nvSpPr>
+          <p:cNvPr id="13" name="Text 10"/>
+          <p:cNvSpPr txBox="1"/>
+          <p:nvPr/>
+        </p:nvSpPr>
+        <p:spPr>
+          <a:xfrm>
+            <a:off x="6492240" y="1901952"/>
+            <a:ext cx="4892040" cy="384048"/>
+          </a:xfrm>
+          <a:prstGeom prst="rect">
+            <a:avLst/>
+          </a:prstGeom>
+          <a:noFill/>
+          <a:ln/>
+        </p:spPr>
+        <p:txBody>
+          <a:bodyPr wrap="square" lIns="0" tIns="0" rIns="0" bIns="0" rtlCol="0" anchor="ctr"/>
+          <a:lstStyle/>
+          <a:p>
+            <a:pPr indent="0" marL="0">
+              <a:buNone/>
+            </a:pPr>
+            <a:r>
+              <a:rPr lang="en-US" sz="1050" i="1" dirty="0">
+                <a:solidFill>
+                  <a:srgbClr val="8A7A6D"/>
+                </a:solidFill>
+                <a:latin typeface="Calibri" pitchFamily="34" charset="0"/>
+                <a:ea typeface="Calibri" pitchFamily="34" charset="-122"/>
+                <a:cs typeface="Calibri" pitchFamily="34" charset="-120"/>
+              </a:rPr>
+              <a:t>3 menciones espontáneas + 12/32 (38%) dice en la Pregunta 8 que no llevan cuenta</a:t>
+            </a:r>
+            <a:endParaRPr lang="en-US" sz="1050" dirty="0"/>
+          </a:p>
+        </p:txBody>
+      </p:sp>
+      <p:sp>
+        <p:nvSpPr>
+          <p:cNvPr id="14" name="Text 11"/>
+          <p:cNvSpPr txBox="1"/>
+          <p:nvPr/>
+        </p:nvSpPr>
+        <p:spPr>
+          <a:xfrm>
+            <a:off x="6537960" y="2331720"/>
+            <a:ext cx="4846320" cy="1737360"/>
+          </a:xfrm>
+          <a:prstGeom prst="rect">
+            <a:avLst/>
+          </a:prstGeom>
+          <a:noFill/>
+          <a:ln/>
+        </p:spPr>
+        <p:txBody>
+          <a:bodyPr wrap="square" lIns="0" tIns="0" rIns="0" bIns="0" rtlCol="0" anchor="t"/>
+          <a:lstStyle/>
+          <a:p>
+            <a:pPr marL="342900" indent="-342900">
+              <a:spcAft>
+                <a:spcPts val="800"/>
+              </a:spcAft>
+              <a:buSzPct val="100000"/>
+              <a:buChar char="•"/>
+            </a:pPr>
+            <a:r>
+              <a:rPr lang="en-US" sz="1100" i="1" dirty="0">
+                <a:solidFill>
+                  <a:srgbClr val="2E2119"/>
+                </a:solidFill>
+                <a:latin typeface="Calibri" pitchFamily="34" charset="0"/>
+                <a:ea typeface="Calibri" pitchFamily="34" charset="-122"/>
+                <a:cs typeface="Calibri" pitchFamily="34" charset="-120"/>
+              </a:rPr>
+              <a:t>"I don’t know who bought what" — también aquí: no saber quién pagó qué</a:t>
             </a:r>
             <a:endParaRPr lang="en-US" sz="1100" dirty="0"/>
           </a:p>
-        </p:txBody>
-      </p:sp>
-      <p:sp>
-        <p:nvSpPr>
-          <p:cNvPr id="12" name="Text 9"/>
-          <p:cNvSpPr txBox="1"/>
-          <p:nvPr/>
-        </p:nvSpPr>
-        <p:spPr>
-          <a:xfrm>
-            <a:off x="4526280" y="2011680"/>
-            <a:ext cx="3108960" cy="1005840"/>
-          </a:xfrm>
-          <a:prstGeom prst="rect">
-            <a:avLst/>
-          </a:prstGeom>
-          <a:noFill/>
-          <a:ln/>
-        </p:spPr>
-        <p:txBody>
-          <a:bodyPr wrap="square" lIns="0" tIns="0" rIns="0" bIns="0" rtlCol="0" anchor="ctr"/>
-          <a:lstStyle/>
-          <a:p>
-            <a:pPr indent="0" marL="0">
-              <a:buNone/>
-            </a:pPr>
-            <a:r>
-              <a:rPr lang="en-US" sz="3400" b="1" dirty="0">
-                <a:solidFill>
-                  <a:srgbClr val="FFFFFF"/>
-                </a:solidFill>
-                <a:latin typeface="Cambria" pitchFamily="34" charset="0"/>
-                <a:ea typeface="Cambria" pitchFamily="34" charset="-122"/>
-                <a:cs typeface="Cambria" pitchFamily="34" charset="-120"/>
-              </a:rPr>
-              <a:t>≈ 99.700</a:t>
-            </a:r>
-            <a:endParaRPr lang="en-US" sz="3400" dirty="0"/>
-          </a:p>
-        </p:txBody>
-      </p:sp>
-      <p:sp>
-        <p:nvSpPr>
-          <p:cNvPr id="13" name="Text 10"/>
-          <p:cNvSpPr txBox="1"/>
-          <p:nvPr/>
-        </p:nvSpPr>
-        <p:spPr>
-          <a:xfrm>
-            <a:off x="4526280" y="3063240"/>
-            <a:ext cx="3108960" cy="777240"/>
-          </a:xfrm>
-          <a:prstGeom prst="rect">
-            <a:avLst/>
-          </a:prstGeom>
-          <a:noFill/>
-          <a:ln/>
-        </p:spPr>
-        <p:txBody>
-          <a:bodyPr wrap="square" lIns="0" tIns="0" rIns="0" bIns="0" rtlCol="0" anchor="t"/>
-          <a:lstStyle/>
-          <a:p>
-            <a:pPr indent="0" marL="0">
-              <a:buNone/>
-            </a:pPr>
-            <a:r>
-              <a:rPr lang="en-US" sz="1050" dirty="0">
-                <a:solidFill>
-                  <a:srgbClr val="D8CBBE"/>
-                </a:solidFill>
-                <a:latin typeface="Calibri" pitchFamily="34" charset="0"/>
-                <a:ea typeface="Calibri" pitchFamily="34" charset="-122"/>
-                <a:cs typeface="Calibri" pitchFamily="34" charset="-120"/>
-              </a:rPr>
-              <a:t>249.261 hab. ÷ 2,50 pers./hogar (INE/IGE 2024)</a:t>
-            </a:r>
-            <a:endParaRPr lang="en-US" sz="1050" dirty="0"/>
-          </a:p>
-        </p:txBody>
-      </p:sp>
-      <p:sp>
-        <p:nvSpPr>
-          <p:cNvPr id="14" name="Shape 11"/>
+          <a:p>
+            <a:pPr marL="342900" indent="-342900">
+              <a:spcAft>
+                <a:spcPts val="800"/>
+              </a:spcAft>
+              <a:buSzPct val="100000"/>
+              <a:buChar char="•"/>
+            </a:pPr>
+            <a:r>
+              <a:rPr lang="en-US" sz="1100" i="1" dirty="0">
+                <a:solidFill>
+                  <a:srgbClr val="2E2119"/>
+                </a:solidFill>
+                <a:latin typeface="Calibri" pitchFamily="34" charset="0"/>
+                <a:ea typeface="Calibri" pitchFamily="34" charset="-122"/>
+                <a:cs typeface="Calibri" pitchFamily="34" charset="-120"/>
+              </a:rPr>
+              <a:t>"Que la gente no participe a la hora de hacer la compra o que tarden en pagar cuando dividimos gastos"</a:t>
+            </a:r>
+            <a:endParaRPr lang="en-US" sz="1100" dirty="0"/>
+          </a:p>
+          <a:p>
+            <a:pPr marL="342900" indent="-342900">
+              <a:spcAft>
+                <a:spcPts val="800"/>
+              </a:spcAft>
+              <a:buSzPct val="100000"/>
+              <a:buChar char="•"/>
+            </a:pPr>
+            <a:r>
+              <a:rPr lang="en-US" sz="1100" i="1" dirty="0">
+                <a:solidFill>
+                  <a:srgbClr val="2E2119"/>
+                </a:solidFill>
+                <a:latin typeface="Calibri" pitchFamily="34" charset="0"/>
+                <a:ea typeface="Calibri" pitchFamily="34" charset="-122"/>
+                <a:cs typeface="Calibri" pitchFamily="34" charset="-120"/>
+              </a:rPr>
+              <a:t>"Llevar la cuenta de quién compró qué antes" — también dual, coop + gasto</a:t>
+            </a:r>
+            <a:endParaRPr lang="en-US" sz="1100" dirty="0"/>
+          </a:p>
+        </p:txBody>
+      </p:sp>
+      <p:sp>
+        <p:nvSpPr>
+          <p:cNvPr id="15" name="Shape 12"/>
           <p:cNvSpPr/>
           <p:nvPr/>
         </p:nvSpPr>
         <p:spPr>
           <a:xfrm>
-            <a:off x="8046720" y="1463040"/>
-            <a:ext cx="3566160" cy="2468880"/>
+            <a:off x="6492240" y="4160520"/>
+            <a:ext cx="4892040" cy="1371600"/>
           </a:xfrm>
           <a:prstGeom prst="roundRect">
             <a:avLst>
-              <a:gd name="adj" fmla="val 4444"/>
+              <a:gd name="adj" fmla="val 6667"/>
             </a:avLst>
           </a:prstGeom>
           <a:solidFill>
-            <a:srgbClr val="F4E9DA"/>
+            <a:srgbClr val="2E2119"/>
           </a:solidFill>
           <a:ln/>
-          <a:effectLst>
-            <a:outerShdw sx="100000" sy="100000" kx="0" ky="0" algn="bl" rotWithShape="0" blurRad="76200" dist="25400" dir="5400000">
-              <a:srgbClr val="000000">
-                <a:alpha val="12000"/>
-              </a:srgbClr>
-            </a:outerShdw>
-          </a:effectLst>
-        </p:spPr>
-      </p:sp>
-      <p:sp>
-        <p:nvSpPr>
-          <p:cNvPr id="15" name="Text 12"/>
-          <p:cNvSpPr txBox="1"/>
-          <p:nvPr/>
-        </p:nvSpPr>
-        <p:spPr>
-          <a:xfrm>
-            <a:off x="8275320" y="1645920"/>
-            <a:ext cx="3108960" cy="320040"/>
-          </a:xfrm>
-          <a:prstGeom prst="rect">
-            <a:avLst/>
-          </a:prstGeom>
-          <a:noFill/>
-          <a:ln/>
-        </p:spPr>
-        <p:txBody>
-          <a:bodyPr wrap="square" lIns="0" tIns="0" rIns="0" bIns="0" rtlCol="0" anchor="ctr"/>
-          <a:lstStyle/>
-          <a:p>
-            <a:pPr indent="0" marL="0">
-              <a:buNone/>
-            </a:pPr>
-            <a:r>
-              <a:rPr lang="en-US" sz="1100" b="1" spc="100" kern="0" dirty="0">
-                <a:solidFill>
-                  <a:srgbClr val="C9682B"/>
-                </a:solidFill>
-                <a:latin typeface="Calibri" pitchFamily="34" charset="0"/>
-                <a:ea typeface="Calibri" pitchFamily="34" charset="-122"/>
-                <a:cs typeface="Calibri" pitchFamily="34" charset="-120"/>
-              </a:rPr>
-              <a:t>MERCADO OBJETIVO</a:t>
+        </p:spPr>
+      </p:sp>
+      <p:sp>
+        <p:nvSpPr>
+          <p:cNvPr id="16" name="Text 13"/>
+          <p:cNvSpPr txBox="1"/>
+          <p:nvPr/>
+        </p:nvSpPr>
+        <p:spPr>
+          <a:xfrm>
+            <a:off x="6720840" y="4279392"/>
+            <a:ext cx="4480560" cy="1143000"/>
+          </a:xfrm>
+          <a:prstGeom prst="rect">
+            <a:avLst/>
+          </a:prstGeom>
+          <a:noFill/>
+          <a:ln/>
+        </p:spPr>
+        <p:txBody>
+          <a:bodyPr wrap="square" lIns="0" tIns="0" rIns="0" bIns="0" rtlCol="0" anchor="t"/>
+          <a:lstStyle/>
+          <a:p>
+            <a:pPr indent="0" marL="0">
+              <a:spcAft>
+                <a:spcPts val="400"/>
+              </a:spcAft>
+              <a:buNone/>
+            </a:pPr>
+            <a:r>
+              <a:rPr lang="en-US" sz="1100" b="1" dirty="0">
+                <a:solidFill>
+                  <a:srgbClr val="D9A441"/>
+                </a:solidFill>
+                <a:latin typeface="Calibri" pitchFamily="34" charset="0"/>
+                <a:ea typeface="Calibri" pitchFamily="34" charset="-122"/>
+                <a:cs typeface="Calibri" pitchFamily="34" charset="-120"/>
+              </a:rPr>
+              <a:t>Esto es exactamente History:  </a:t>
             </a:r>
             <a:endParaRPr lang="en-US" sz="1100" dirty="0"/>
           </a:p>
-        </p:txBody>
-      </p:sp>
-      <p:sp>
-        <p:nvSpPr>
-          <p:cNvPr id="16" name="Text 13"/>
-          <p:cNvSpPr txBox="1"/>
-          <p:nvPr/>
-        </p:nvSpPr>
-        <p:spPr>
-          <a:xfrm>
-            <a:off x="8275320" y="2011680"/>
-            <a:ext cx="3108960" cy="1005840"/>
-          </a:xfrm>
-          <a:prstGeom prst="rect">
-            <a:avLst/>
-          </a:prstGeom>
-          <a:noFill/>
-          <a:ln/>
-        </p:spPr>
-        <p:txBody>
-          <a:bodyPr wrap="square" lIns="0" tIns="0" rIns="0" bIns="0" rtlCol="0" anchor="ctr"/>
-          <a:lstStyle/>
-          <a:p>
-            <a:pPr indent="0" marL="0">
-              <a:buNone/>
-            </a:pPr>
-            <a:r>
-              <a:rPr lang="en-US" sz="3400" b="1" dirty="0">
-                <a:solidFill>
-                  <a:srgbClr val="2E2119"/>
-                </a:solidFill>
-                <a:latin typeface="Cambria" pitchFamily="34" charset="0"/>
-                <a:ea typeface="Cambria" pitchFamily="34" charset="-122"/>
-                <a:cs typeface="Cambria" pitchFamily="34" charset="-120"/>
-              </a:rPr>
-              <a:t>≈ 99.700</a:t>
-            </a:r>
-            <a:endParaRPr lang="en-US" sz="3400" dirty="0"/>
-          </a:p>
-        </p:txBody>
-      </p:sp>
-      <p:sp>
-        <p:nvSpPr>
-          <p:cNvPr id="17" name="Text 14"/>
-          <p:cNvSpPr txBox="1"/>
-          <p:nvPr/>
-        </p:nvSpPr>
-        <p:spPr>
-          <a:xfrm>
-            <a:off x="8275320" y="3063240"/>
-            <a:ext cx="3108960" cy="777240"/>
-          </a:xfrm>
-          <a:prstGeom prst="rect">
-            <a:avLst/>
-          </a:prstGeom>
-          <a:noFill/>
-          <a:ln/>
-        </p:spPr>
-        <p:txBody>
-          <a:bodyPr wrap="square" lIns="0" tIns="0" rIns="0" bIns="0" rtlCol="0" anchor="t"/>
-          <a:lstStyle/>
-          <a:p>
-            <a:pPr indent="0" marL="0">
-              <a:buNone/>
-            </a:pPr>
-            <a:r>
-              <a:rPr lang="en-US" sz="1050" dirty="0">
-                <a:solidFill>
-                  <a:srgbClr val="8A7A6D"/>
-                </a:solidFill>
-                <a:latin typeface="Calibri" pitchFamily="34" charset="0"/>
-                <a:ea typeface="Calibri" pitchFamily="34" charset="-122"/>
-                <a:cs typeface="Calibri" pitchFamily="34" charset="-120"/>
-              </a:rPr>
-              <a:t>Coincide con el accesible — ver nota abajo</a:t>
-            </a:r>
-            <a:endParaRPr lang="en-US" sz="1050" dirty="0"/>
-          </a:p>
-        </p:txBody>
-      </p:sp>
-      <p:sp>
-        <p:nvSpPr>
-          <p:cNvPr id="18" name="Shape 15"/>
+          <a:p>
+            <a:pPr indent="0" marL="0">
+              <a:buNone/>
+            </a:pPr>
+            <a:r>
+              <a:rPr lang="en-US" sz="1100" dirty="0">
+                <a:solidFill>
+                  <a:srgbClr val="FFFFFF"/>
+                </a:solidFill>
+                <a:latin typeface="Calibri" pitchFamily="34" charset="0"/>
+                <a:ea typeface="Calibri" pitchFamily="34" charset="-122"/>
+                <a:cs typeface="Calibri" pitchFamily="34" charset="-120"/>
+              </a:rPr>
+              <a:t>quién compró qué y quién debe a quién, resuelto sin depender de que alguien lo recuerde o lo apunte a mano.</a:t>
+            </a:r>
+            <a:endParaRPr lang="en-US" sz="1100" dirty="0"/>
+          </a:p>
+        </p:txBody>
+      </p:sp>
+      <p:sp>
+        <p:nvSpPr>
+          <p:cNvPr id="17" name="Shape 14"/>
           <p:cNvSpPr/>
           <p:nvPr/>
         </p:nvSpPr>
         <p:spPr>
           <a:xfrm>
-            <a:off x="548640" y="4160520"/>
-            <a:ext cx="11064240" cy="1965960"/>
+            <a:off x="548640" y="5806440"/>
+            <a:ext cx="11064240" cy="777240"/>
           </a:xfrm>
           <a:prstGeom prst="roundRect">
             <a:avLst>
-              <a:gd name="adj" fmla="val 4651"/>
+              <a:gd name="adj" fmla="val 11765"/>
             </a:avLst>
           </a:prstGeom>
           <a:solidFill>
@@ -8500,30 +9331,30 @@
       </p:sp>
       <p:sp>
         <p:nvSpPr>
-          <p:cNvPr id="19" name="Text 16"/>
-          <p:cNvSpPr txBox="1"/>
-          <p:nvPr/>
-        </p:nvSpPr>
-        <p:spPr>
-          <a:xfrm>
-            <a:off x="777240" y="4279392"/>
-            <a:ext cx="10607040" cy="1737360"/>
-          </a:xfrm>
-          <a:prstGeom prst="rect">
-            <a:avLst/>
-          </a:prstGeom>
-          <a:noFill/>
-          <a:ln/>
-        </p:spPr>
-        <p:txBody>
-          <a:bodyPr wrap="square" lIns="0" tIns="0" rIns="0" bIns="0" rtlCol="0" anchor="t"/>
-          <a:lstStyle/>
-          <a:p>
-            <a:pPr indent="0" marL="0">
-              <a:buNone/>
-            </a:pPr>
-            <a:r>
-              <a:rPr lang="en-US" sz="1200" b="1" dirty="0">
+          <p:cNvPr id="18" name="Text 15"/>
+          <p:cNvSpPr txBox="1"/>
+          <p:nvPr/>
+        </p:nvSpPr>
+        <p:spPr>
+          <a:xfrm>
+            <a:off x="777240" y="5806440"/>
+            <a:ext cx="10607040" cy="777240"/>
+          </a:xfrm>
+          <a:prstGeom prst="rect">
+            <a:avLst/>
+          </a:prstGeom>
+          <a:noFill/>
+          <a:ln/>
+        </p:spPr>
+        <p:txBody>
+          <a:bodyPr wrap="square" lIns="0" tIns="0" rIns="0" bIns="0" rtlCol="0" anchor="ctr"/>
+          <a:lstStyle/>
+          <a:p>
+            <a:pPr indent="0" marL="0">
+              <a:buNone/>
+            </a:pPr>
+            <a:r>
+              <a:rPr lang="en-US" sz="1100" b="1" dirty="0">
                 <a:solidFill>
                   <a:srgbClr val="C9682B"/>
                 </a:solidFill>
@@ -8531,19 +9362,13 @@
                 <a:ea typeface="Calibri" pitchFamily="34" charset="-122"/>
                 <a:cs typeface="Calibri" pitchFamily="34" charset="-120"/>
               </a:rPr>
-              <a:t>Nota honesta sobre la búsqueda:  </a:t>
-            </a:r>
-            <a:endParaRPr lang="en-US" sz="1200" dirty="0"/>
-          </a:p>
-          <a:p>
-            <a:pPr indent="0" marL="0">
-              <a:spcAft>
-                <a:spcPts val="600"/>
-              </a:spcAft>
-              <a:buNone/>
-            </a:pPr>
-            <a:r>
-              <a:rPr lang="en-US" sz="1200" dirty="0">
+              <a:t>Ya resuelto en P1, gratis:  </a:t>
+            </a:r>
+            <a:pPr indent="0" marL="0">
+              <a:buNone/>
+            </a:pPr>
+            <a:r>
+              <a:rPr lang="en-US" sz="1100" dirty="0">
                 <a:solidFill>
                   <a:srgbClr val="2E2119"/>
                 </a:solidFill>
@@ -8551,43 +9376,9 @@
                 <a:ea typeface="Calibri" pitchFamily="34" charset="-122"/>
                 <a:cs typeface="Calibri" pitchFamily="34" charset="-120"/>
               </a:rPr>
-              <a:t>no se encontró un desglose público fiable de "hogares no familiares/parejas sin hijos" a nivel de A Coruña — es un resultado válido en sí mismo, no un dato inventado.</a:t>
-            </a:r>
-            <a:endParaRPr lang="en-US" sz="1200" dirty="0"/>
-          </a:p>
-          <a:p>
-            <a:pPr indent="0" marL="0">
-              <a:buNone/>
-            </a:pPr>
-            <a:r>
-              <a:rPr lang="en-US" sz="1200" b="1" dirty="0">
-                <a:solidFill>
-                  <a:srgbClr val="C9682B"/>
-                </a:solidFill>
-                <a:latin typeface="Calibri" pitchFamily="34" charset="0"/>
-                <a:ea typeface="Calibri" pitchFamily="34" charset="-122"/>
-                <a:cs typeface="Calibri" pitchFamily="34" charset="-120"/>
-              </a:rPr>
-              <a:t>Suelo verificable:  </a:t>
-            </a:r>
-            <a:endParaRPr lang="en-US" sz="1200" dirty="0"/>
-          </a:p>
-          <a:p>
-            <a:pPr indent="0" marL="0">
-              <a:buNone/>
-            </a:pPr>
-            <a:r>
-              <a:rPr lang="en-US" sz="1200" dirty="0">
-                <a:solidFill>
-                  <a:srgbClr val="2E2119"/>
-                </a:solidFill>
-                <a:latin typeface="Calibri" pitchFamily="34" charset="0"/>
-                <a:ea typeface="Calibri" pitchFamily="34" charset="-122"/>
-                <a:cs typeface="Calibri" pitchFamily="34" charset="-120"/>
-              </a:rPr>
-              <a:t>≈ 650 pisos de estudiantes en A Coruña (UDC &gt;13.300 matriculados · 31% cambia de ciudad · 55% comparte piso — Fundación CYD).</a:t>
-            </a:r>
-            <a:endParaRPr lang="en-US" sz="1200" dirty="0"/>
+              <a:t>"Pois supoño que cando algo se acabe ninguén avise" — se resuelve solo con que Fridge sea una vista compartida: marcar "se acabó" ya avisa a todo el piso, sin lógica extra ni contar unidades.</a:t>
+            </a:r>
+            <a:endParaRPr lang="en-US" sz="1100" dirty="0"/>
           </a:p>
         </p:txBody>
       </p:sp>
@@ -8700,7 +9491,7 @@
                 <a:ea typeface="Calibri" pitchFamily="34" charset="-122"/>
                 <a:cs typeface="Calibri" pitchFamily="34" charset="-120"/>
               </a:rPr>
-              <a:t>PASO 4</a:t>
+              <a:t>PASO 3</a:t>
             </a:r>
             <a:endParaRPr lang="en-US" sz="1200" dirty="0"/>
           </a:p>
@@ -8739,7 +9530,7 @@
                 <a:ea typeface="Cambria" pitchFamily="34" charset="-122"/>
                 <a:cs typeface="Cambria" pitchFamily="34" charset="-120"/>
               </a:rPr>
-              <a:t>La servilleta de 6 casillas</a:t>
+              <a:t>Estudio de mercado — A Coruña</a:t>
             </a:r>
             <a:endParaRPr lang="en-US" sz="2800" dirty="0"/>
           </a:p>
@@ -8753,12 +9544,12 @@
         </p:nvSpPr>
         <p:spPr>
           <a:xfrm>
-            <a:off x="548640" y="1417320"/>
-            <a:ext cx="3611880" cy="960120"/>
+            <a:off x="548640" y="1463040"/>
+            <a:ext cx="3566160" cy="2468880"/>
           </a:xfrm>
           <a:prstGeom prst="roundRect">
             <a:avLst>
-              <a:gd name="adj" fmla="val 11429"/>
+              <a:gd name="adj" fmla="val 4444"/>
             </a:avLst>
           </a:prstGeom>
           <a:solidFill>
@@ -8782,8 +9573,8 @@
         </p:nvSpPr>
         <p:spPr>
           <a:xfrm>
-            <a:off x="731520" y="1508760"/>
-            <a:ext cx="3246120" cy="256032"/>
+            <a:off x="777240" y="1645920"/>
+            <a:ext cx="3108960" cy="320040"/>
           </a:xfrm>
           <a:prstGeom prst="rect">
             <a:avLst/>
@@ -8799,7 +9590,7 @@
               <a:buNone/>
             </a:pPr>
             <a:r>
-              <a:rPr lang="en-US" sz="1000" b="1" spc="100" kern="0" dirty="0">
+              <a:rPr lang="en-US" sz="1100" b="1" spc="100" kern="0" dirty="0">
                 <a:solidFill>
                   <a:srgbClr val="C9682B"/>
                 </a:solidFill>
@@ -8807,9 +9598,9 @@
                 <a:ea typeface="Calibri" pitchFamily="34" charset="-122"/>
                 <a:cs typeface="Calibri" pitchFamily="34" charset="-120"/>
               </a:rPr>
-              <a:t>QUÉ VENDEMOS</a:t>
-            </a:r>
-            <a:endParaRPr lang="en-US" sz="1000" dirty="0"/>
+              <a:t>MERCADO TOTAL</a:t>
+            </a:r>
+            <a:endParaRPr lang="en-US" sz="1100" dirty="0"/>
           </a:p>
         </p:txBody>
       </p:sp>
@@ -8821,8 +9612,64 @@
         </p:nvSpPr>
         <p:spPr>
           <a:xfrm>
-            <a:off x="731520" y="1764792"/>
-            <a:ext cx="3246120" cy="566928"/>
+            <a:off x="777240" y="2011680"/>
+            <a:ext cx="3108960" cy="1005840"/>
+          </a:xfrm>
+          <a:prstGeom prst="rect">
+            <a:avLst/>
+          </a:prstGeom>
+          <a:noFill/>
+          <a:ln/>
+        </p:spPr>
+        <p:txBody>
+          <a:bodyPr wrap="square" lIns="0" tIns="0" rIns="0" bIns="0" rtlCol="0" anchor="ctr"/>
+          <a:lstStyle/>
+          <a:p>
+            <a:pPr indent="0" marL="0">
+              <a:buNone/>
+            </a:pPr>
+            <a:r>
+              <a:rPr lang="en-US" sz="2000" b="1" dirty="0">
+                <a:solidFill>
+                  <a:srgbClr val="2E2119"/>
+                </a:solidFill>
+                <a:latin typeface="Cambria" pitchFamily="34" charset="0"/>
+                <a:ea typeface="Cambria" pitchFamily="34" charset="-122"/>
+                <a:cs typeface="Cambria" pitchFamily="34" charset="-120"/>
+              </a:rPr>
+              <a:t>Hogares de</a:t>
+            </a:r>
+            <a:endParaRPr lang="en-US" sz="2000" dirty="0"/>
+          </a:p>
+          <a:p>
+            <a:pPr indent="0" marL="0">
+              <a:buNone/>
+            </a:pPr>
+            <a:r>
+              <a:rPr lang="en-US" sz="2000" b="1" dirty="0">
+                <a:solidFill>
+                  <a:srgbClr val="2E2119"/>
+                </a:solidFill>
+                <a:latin typeface="Cambria" pitchFamily="34" charset="0"/>
+                <a:ea typeface="Cambria" pitchFamily="34" charset="-122"/>
+                <a:cs typeface="Cambria" pitchFamily="34" charset="-120"/>
+              </a:rPr>
+              <a:t>España 2+ pers.</a:t>
+            </a:r>
+            <a:endParaRPr lang="en-US" sz="2000" dirty="0"/>
+          </a:p>
+        </p:txBody>
+      </p:sp>
+      <p:sp>
+        <p:nvSpPr>
+          <p:cNvPr id="9" name="Text 6"/>
+          <p:cNvSpPr txBox="1"/>
+          <p:nvPr/>
+        </p:nvSpPr>
+        <p:spPr>
+          <a:xfrm>
+            <a:off x="777240" y="3063240"/>
+            <a:ext cx="3108960" cy="777240"/>
           </a:xfrm>
           <a:prstGeom prst="rect">
             <a:avLst/>
@@ -8838,38 +9685,38 @@
               <a:buNone/>
             </a:pPr>
             <a:r>
-              <a:rPr lang="en-US" sz="1150" dirty="0">
-                <a:solidFill>
-                  <a:srgbClr val="2E2119"/>
-                </a:solidFill>
-                <a:latin typeface="Calibri" pitchFamily="34" charset="0"/>
-                <a:ea typeface="Calibri" pitchFamily="34" charset="-122"/>
-                <a:cs typeface="Calibri" pitchFamily="34" charset="-120"/>
-              </a:rPr>
-              <a:t>Suscripción mensual por hogar</a:t>
-            </a:r>
-            <a:endParaRPr lang="en-US" sz="1150" dirty="0"/>
-          </a:p>
-        </p:txBody>
-      </p:sp>
-      <p:sp>
-        <p:nvSpPr>
-          <p:cNvPr id="9" name="Shape 6"/>
+              <a:rPr lang="en-US" sz="1050" dirty="0">
+                <a:solidFill>
+                  <a:srgbClr val="8A7A6D"/>
+                </a:solidFill>
+                <a:latin typeface="Calibri" pitchFamily="34" charset="0"/>
+                <a:ea typeface="Calibri" pitchFamily="34" charset="-122"/>
+                <a:cs typeface="Calibri" pitchFamily="34" charset="-120"/>
+              </a:rPr>
+              <a:t>Tamaño medio 2,50 pers./hogar (INE 2023)</a:t>
+            </a:r>
+            <a:endParaRPr lang="en-US" sz="1050" dirty="0"/>
+          </a:p>
+        </p:txBody>
+      </p:sp>
+      <p:sp>
+        <p:nvSpPr>
+          <p:cNvPr id="10" name="Shape 7"/>
           <p:cNvSpPr/>
           <p:nvPr/>
         </p:nvSpPr>
         <p:spPr>
           <a:xfrm>
-            <a:off x="4297680" y="1417320"/>
-            <a:ext cx="3611880" cy="960120"/>
+            <a:off x="4297680" y="1463040"/>
+            <a:ext cx="3566160" cy="2468880"/>
           </a:xfrm>
           <a:prstGeom prst="roundRect">
             <a:avLst>
-              <a:gd name="adj" fmla="val 11429"/>
+              <a:gd name="adj" fmla="val 4444"/>
             </a:avLst>
           </a:prstGeom>
           <a:solidFill>
-            <a:srgbClr val="F4E9DA"/>
+            <a:srgbClr val="2E2119"/>
           </a:solidFill>
           <a:ln/>
           <a:effectLst>
@@ -8883,14 +9730,14 @@
       </p:sp>
       <p:sp>
         <p:nvSpPr>
-          <p:cNvPr id="10" name="Text 7"/>
-          <p:cNvSpPr txBox="1"/>
-          <p:nvPr/>
-        </p:nvSpPr>
-        <p:spPr>
-          <a:xfrm>
-            <a:off x="4480560" y="1508760"/>
-            <a:ext cx="3246120" cy="256032"/>
+          <p:cNvPr id="11" name="Text 8"/>
+          <p:cNvSpPr txBox="1"/>
+          <p:nvPr/>
+        </p:nvSpPr>
+        <p:spPr>
+          <a:xfrm>
+            <a:off x="4526280" y="1645920"/>
+            <a:ext cx="3108960" cy="320040"/>
           </a:xfrm>
           <a:prstGeom prst="rect">
             <a:avLst/>
@@ -8906,30 +9753,69 @@
               <a:buNone/>
             </a:pPr>
             <a:r>
-              <a:rPr lang="en-US" sz="1000" b="1" spc="100" kern="0" dirty="0">
-                <a:solidFill>
-                  <a:srgbClr val="C9682B"/>
-                </a:solidFill>
-                <a:latin typeface="Calibri" pitchFamily="34" charset="0"/>
-                <a:ea typeface="Calibri" pitchFamily="34" charset="-122"/>
-                <a:cs typeface="Calibri" pitchFamily="34" charset="-120"/>
-              </a:rPr>
-              <a:t>A QUIÉN</a:t>
-            </a:r>
-            <a:endParaRPr lang="en-US" sz="1000" dirty="0"/>
-          </a:p>
-        </p:txBody>
-      </p:sp>
-      <p:sp>
-        <p:nvSpPr>
-          <p:cNvPr id="11" name="Text 8"/>
-          <p:cNvSpPr txBox="1"/>
-          <p:nvPr/>
-        </p:nvSpPr>
-        <p:spPr>
-          <a:xfrm>
-            <a:off x="4480560" y="1764792"/>
-            <a:ext cx="3246120" cy="566928"/>
+              <a:rPr lang="en-US" sz="1100" b="1" spc="100" kern="0" dirty="0">
+                <a:solidFill>
+                  <a:srgbClr val="D9A441"/>
+                </a:solidFill>
+                <a:latin typeface="Calibri" pitchFamily="34" charset="0"/>
+                <a:ea typeface="Calibri" pitchFamily="34" charset="-122"/>
+                <a:cs typeface="Calibri" pitchFamily="34" charset="-120"/>
+              </a:rPr>
+              <a:t>MERCADO ACCESIBLE</a:t>
+            </a:r>
+            <a:endParaRPr lang="en-US" sz="1100" dirty="0"/>
+          </a:p>
+        </p:txBody>
+      </p:sp>
+      <p:sp>
+        <p:nvSpPr>
+          <p:cNvPr id="12" name="Text 9"/>
+          <p:cNvSpPr txBox="1"/>
+          <p:nvPr/>
+        </p:nvSpPr>
+        <p:spPr>
+          <a:xfrm>
+            <a:off x="4526280" y="2011680"/>
+            <a:ext cx="3108960" cy="1005840"/>
+          </a:xfrm>
+          <a:prstGeom prst="rect">
+            <a:avLst/>
+          </a:prstGeom>
+          <a:noFill/>
+          <a:ln/>
+        </p:spPr>
+        <p:txBody>
+          <a:bodyPr wrap="square" lIns="0" tIns="0" rIns="0" bIns="0" rtlCol="0" anchor="ctr"/>
+          <a:lstStyle/>
+          <a:p>
+            <a:pPr indent="0" marL="0">
+              <a:buNone/>
+            </a:pPr>
+            <a:r>
+              <a:rPr lang="en-US" sz="3400" b="1" dirty="0">
+                <a:solidFill>
+                  <a:srgbClr val="FFFFFF"/>
+                </a:solidFill>
+                <a:latin typeface="Cambria" pitchFamily="34" charset="0"/>
+                <a:ea typeface="Cambria" pitchFamily="34" charset="-122"/>
+                <a:cs typeface="Cambria" pitchFamily="34" charset="-120"/>
+              </a:rPr>
+              <a:t>≈ 99.700</a:t>
+            </a:r>
+            <a:endParaRPr lang="en-US" sz="3400" dirty="0"/>
+          </a:p>
+        </p:txBody>
+      </p:sp>
+      <p:sp>
+        <p:nvSpPr>
+          <p:cNvPr id="13" name="Text 10"/>
+          <p:cNvSpPr txBox="1"/>
+          <p:nvPr/>
+        </p:nvSpPr>
+        <p:spPr>
+          <a:xfrm>
+            <a:off x="4526280" y="3063240"/>
+            <a:ext cx="3108960" cy="777240"/>
           </a:xfrm>
           <a:prstGeom prst="rect">
             <a:avLst/>
@@ -8945,34 +9831,34 @@
               <a:buNone/>
             </a:pPr>
             <a:r>
-              <a:rPr lang="en-US" sz="1150" dirty="0">
-                <a:solidFill>
-                  <a:srgbClr val="2E2119"/>
-                </a:solidFill>
-                <a:latin typeface="Calibri" pitchFamily="34" charset="0"/>
-                <a:ea typeface="Calibri" pitchFamily="34" charset="-122"/>
-                <a:cs typeface="Calibri" pitchFamily="34" charset="-120"/>
-              </a:rPr>
-              <a:t>Quien organiza la compra en un hogar compartido de A Coruña</a:t>
-            </a:r>
-            <a:endParaRPr lang="en-US" sz="1150" dirty="0"/>
-          </a:p>
-        </p:txBody>
-      </p:sp>
-      <p:sp>
-        <p:nvSpPr>
-          <p:cNvPr id="12" name="Shape 9"/>
+              <a:rPr lang="en-US" sz="1050" dirty="0">
+                <a:solidFill>
+                  <a:srgbClr val="D8CBBE"/>
+                </a:solidFill>
+                <a:latin typeface="Calibri" pitchFamily="34" charset="0"/>
+                <a:ea typeface="Calibri" pitchFamily="34" charset="-122"/>
+                <a:cs typeface="Calibri" pitchFamily="34" charset="-120"/>
+              </a:rPr>
+              <a:t>249.261 hab. ÷ 2,50 pers./hogar (INE/IGE 2024)</a:t>
+            </a:r>
+            <a:endParaRPr lang="en-US" sz="1050" dirty="0"/>
+          </a:p>
+        </p:txBody>
+      </p:sp>
+      <p:sp>
+        <p:nvSpPr>
+          <p:cNvPr id="14" name="Shape 11"/>
           <p:cNvSpPr/>
           <p:nvPr/>
         </p:nvSpPr>
         <p:spPr>
           <a:xfrm>
-            <a:off x="8046720" y="1417320"/>
-            <a:ext cx="3611880" cy="960120"/>
+            <a:off x="8046720" y="1463040"/>
+            <a:ext cx="3566160" cy="2468880"/>
           </a:xfrm>
           <a:prstGeom prst="roundRect">
             <a:avLst>
-              <a:gd name="adj" fmla="val 11429"/>
+              <a:gd name="adj" fmla="val 4444"/>
             </a:avLst>
           </a:prstGeom>
           <a:solidFill>
@@ -8990,14 +9876,14 @@
       </p:sp>
       <p:sp>
         <p:nvSpPr>
-          <p:cNvPr id="13" name="Text 10"/>
-          <p:cNvSpPr txBox="1"/>
-          <p:nvPr/>
-        </p:nvSpPr>
-        <p:spPr>
-          <a:xfrm>
-            <a:off x="8229600" y="1508760"/>
-            <a:ext cx="3246120" cy="256032"/>
+          <p:cNvPr id="15" name="Text 12"/>
+          <p:cNvSpPr txBox="1"/>
+          <p:nvPr/>
+        </p:nvSpPr>
+        <p:spPr>
+          <a:xfrm>
+            <a:off x="8275320" y="1645920"/>
+            <a:ext cx="3108960" cy="320040"/>
           </a:xfrm>
           <a:prstGeom prst="rect">
             <a:avLst/>
@@ -9013,7 +9899,7 @@
               <a:buNone/>
             </a:pPr>
             <a:r>
-              <a:rPr lang="en-US" sz="1000" b="1" spc="100" kern="0" dirty="0">
+              <a:rPr lang="en-US" sz="1100" b="1" spc="100" kern="0" dirty="0">
                 <a:solidFill>
                   <a:srgbClr val="C9682B"/>
                 </a:solidFill>
@@ -9021,428 +9907,46 @@
                 <a:ea typeface="Calibri" pitchFamily="34" charset="-122"/>
                 <a:cs typeface="Calibri" pitchFamily="34" charset="-120"/>
               </a:rPr>
-              <a:t>A CUÁNTO</a:t>
-            </a:r>
-            <a:endParaRPr lang="en-US" sz="1000" dirty="0"/>
-          </a:p>
-        </p:txBody>
-      </p:sp>
-      <p:sp>
-        <p:nvSpPr>
-          <p:cNvPr id="14" name="Text 11"/>
-          <p:cNvSpPr txBox="1"/>
-          <p:nvPr/>
-        </p:nvSpPr>
-        <p:spPr>
-          <a:xfrm>
-            <a:off x="8229600" y="1764792"/>
-            <a:ext cx="3246120" cy="566928"/>
-          </a:xfrm>
-          <a:prstGeom prst="rect">
-            <a:avLst/>
-          </a:prstGeom>
-          <a:noFill/>
-          <a:ln/>
-        </p:spPr>
-        <p:txBody>
-          <a:bodyPr wrap="square" lIns="0" tIns="0" rIns="0" bIns="0" rtlCol="0" anchor="t"/>
-          <a:lstStyle/>
-          <a:p>
-            <a:pPr indent="0" marL="0">
-              <a:buNone/>
-            </a:pPr>
-            <a:r>
-              <a:rPr lang="en-US" sz="1150" dirty="0">
+              <a:t>MERCADO OBJETIVO</a:t>
+            </a:r>
+            <a:endParaRPr lang="en-US" sz="1100" dirty="0"/>
+          </a:p>
+        </p:txBody>
+      </p:sp>
+      <p:sp>
+        <p:nvSpPr>
+          <p:cNvPr id="16" name="Text 13"/>
+          <p:cNvSpPr txBox="1"/>
+          <p:nvPr/>
+        </p:nvSpPr>
+        <p:spPr>
+          <a:xfrm>
+            <a:off x="8275320" y="2011680"/>
+            <a:ext cx="3108960" cy="1005840"/>
+          </a:xfrm>
+          <a:prstGeom prst="rect">
+            <a:avLst/>
+          </a:prstGeom>
+          <a:noFill/>
+          <a:ln/>
+        </p:spPr>
+        <p:txBody>
+          <a:bodyPr wrap="square" lIns="0" tIns="0" rIns="0" bIns="0" rtlCol="0" anchor="ctr"/>
+          <a:lstStyle/>
+          <a:p>
+            <a:pPr indent="0" marL="0">
+              <a:buNone/>
+            </a:pPr>
+            <a:r>
+              <a:rPr lang="en-US" sz="3400" b="1" dirty="0">
                 <a:solidFill>
                   <a:srgbClr val="2E2119"/>
-                </a:solidFill>
-                <a:latin typeface="Calibri" pitchFamily="34" charset="0"/>
-                <a:ea typeface="Calibri" pitchFamily="34" charset="-122"/>
-                <a:cs typeface="Calibri" pitchFamily="34" charset="-120"/>
-              </a:rPr>
-              <a:t>0,99 €/mes por hogar</a:t>
-            </a:r>
-            <a:endParaRPr lang="en-US" sz="1150" dirty="0"/>
-          </a:p>
-        </p:txBody>
-      </p:sp>
-      <p:sp>
-        <p:nvSpPr>
-          <p:cNvPr id="15" name="Shape 12"/>
-          <p:cNvSpPr/>
-          <p:nvPr/>
-        </p:nvSpPr>
-        <p:spPr>
-          <a:xfrm>
-            <a:off x="548640" y="2514600"/>
-            <a:ext cx="3611880" cy="960120"/>
-          </a:xfrm>
-          <a:prstGeom prst="roundRect">
-            <a:avLst>
-              <a:gd name="adj" fmla="val 11429"/>
-            </a:avLst>
-          </a:prstGeom>
-          <a:solidFill>
-            <a:srgbClr val="F4E9DA"/>
-          </a:solidFill>
-          <a:ln/>
-          <a:effectLst>
-            <a:outerShdw sx="100000" sy="100000" kx="0" ky="0" algn="bl" rotWithShape="0" blurRad="76200" dist="25400" dir="5400000">
-              <a:srgbClr val="000000">
-                <a:alpha val="12000"/>
-              </a:srgbClr>
-            </a:outerShdw>
-          </a:effectLst>
-        </p:spPr>
-      </p:sp>
-      <p:sp>
-        <p:nvSpPr>
-          <p:cNvPr id="16" name="Text 13"/>
-          <p:cNvSpPr txBox="1"/>
-          <p:nvPr/>
-        </p:nvSpPr>
-        <p:spPr>
-          <a:xfrm>
-            <a:off x="731520" y="2606040"/>
-            <a:ext cx="3246120" cy="256032"/>
-          </a:xfrm>
-          <a:prstGeom prst="rect">
-            <a:avLst/>
-          </a:prstGeom>
-          <a:noFill/>
-          <a:ln/>
-        </p:spPr>
-        <p:txBody>
-          <a:bodyPr wrap="square" lIns="0" tIns="0" rIns="0" bIns="0" rtlCol="0" anchor="ctr"/>
-          <a:lstStyle/>
-          <a:p>
-            <a:pPr indent="0" marL="0">
-              <a:buNone/>
-            </a:pPr>
-            <a:r>
-              <a:rPr lang="en-US" sz="1000" b="1" spc="100" kern="0" dirty="0">
-                <a:solidFill>
-                  <a:srgbClr val="C9682B"/>
-                </a:solidFill>
-                <a:latin typeface="Calibri" pitchFamily="34" charset="0"/>
-                <a:ea typeface="Calibri" pitchFamily="34" charset="-122"/>
-                <a:cs typeface="Calibri" pitchFamily="34" charset="-120"/>
-              </a:rPr>
-              <a:t>QUÉ NOS CUESTA</a:t>
-            </a:r>
-            <a:endParaRPr lang="en-US" sz="1000" dirty="0"/>
-          </a:p>
-        </p:txBody>
-      </p:sp>
-      <p:sp>
-        <p:nvSpPr>
-          <p:cNvPr id="17" name="Text 14"/>
-          <p:cNvSpPr txBox="1"/>
-          <p:nvPr/>
-        </p:nvSpPr>
-        <p:spPr>
-          <a:xfrm>
-            <a:off x="731520" y="2862072"/>
-            <a:ext cx="3246120" cy="566928"/>
-          </a:xfrm>
-          <a:prstGeom prst="rect">
-            <a:avLst/>
-          </a:prstGeom>
-          <a:noFill/>
-          <a:ln/>
-        </p:spPr>
-        <p:txBody>
-          <a:bodyPr wrap="square" lIns="0" tIns="0" rIns="0" bIns="0" rtlCol="0" anchor="t"/>
-          <a:lstStyle/>
-          <a:p>
-            <a:pPr indent="0" marL="0">
-              <a:buNone/>
-            </a:pPr>
-            <a:r>
-              <a:rPr lang="en-US" sz="1150" dirty="0">
-                <a:solidFill>
-                  <a:srgbClr val="2E2119"/>
-                </a:solidFill>
-                <a:latin typeface="Calibri" pitchFamily="34" charset="0"/>
-                <a:ea typeface="Calibri" pitchFamily="34" charset="-122"/>
-                <a:cs typeface="Calibri" pitchFamily="34" charset="-120"/>
-              </a:rPr>
-              <a:t>Coste fijo: 0 € (hosting gratuito). Variable: 0 €</a:t>
-            </a:r>
-            <a:endParaRPr lang="en-US" sz="1150" dirty="0"/>
-          </a:p>
-        </p:txBody>
-      </p:sp>
-      <p:sp>
-        <p:nvSpPr>
-          <p:cNvPr id="18" name="Shape 15"/>
-          <p:cNvSpPr/>
-          <p:nvPr/>
-        </p:nvSpPr>
-        <p:spPr>
-          <a:xfrm>
-            <a:off x="4297680" y="2514600"/>
-            <a:ext cx="3611880" cy="960120"/>
-          </a:xfrm>
-          <a:prstGeom prst="roundRect">
-            <a:avLst>
-              <a:gd name="adj" fmla="val 11429"/>
-            </a:avLst>
-          </a:prstGeom>
-          <a:solidFill>
-            <a:srgbClr val="F4E9DA"/>
-          </a:solidFill>
-          <a:ln/>
-          <a:effectLst>
-            <a:outerShdw sx="100000" sy="100000" kx="0" ky="0" algn="bl" rotWithShape="0" blurRad="76200" dist="25400" dir="5400000">
-              <a:srgbClr val="000000">
-                <a:alpha val="12000"/>
-              </a:srgbClr>
-            </a:outerShdw>
-          </a:effectLst>
-        </p:spPr>
-      </p:sp>
-      <p:sp>
-        <p:nvSpPr>
-          <p:cNvPr id="19" name="Text 16"/>
-          <p:cNvSpPr txBox="1"/>
-          <p:nvPr/>
-        </p:nvSpPr>
-        <p:spPr>
-          <a:xfrm>
-            <a:off x="4480560" y="2606040"/>
-            <a:ext cx="3246120" cy="256032"/>
-          </a:xfrm>
-          <a:prstGeom prst="rect">
-            <a:avLst/>
-          </a:prstGeom>
-          <a:noFill/>
-          <a:ln/>
-        </p:spPr>
-        <p:txBody>
-          <a:bodyPr wrap="square" lIns="0" tIns="0" rIns="0" bIns="0" rtlCol="0" anchor="ctr"/>
-          <a:lstStyle/>
-          <a:p>
-            <a:pPr indent="0" marL="0">
-              <a:buNone/>
-            </a:pPr>
-            <a:r>
-              <a:rPr lang="en-US" sz="1000" b="1" spc="100" kern="0" dirty="0">
-                <a:solidFill>
-                  <a:srgbClr val="C9682B"/>
-                </a:solidFill>
-                <a:latin typeface="Calibri" pitchFamily="34" charset="0"/>
-                <a:ea typeface="Calibri" pitchFamily="34" charset="-122"/>
-                <a:cs typeface="Calibri" pitchFamily="34" charset="-120"/>
-              </a:rPr>
-              <a:t>CUÁNTOS HACEN FALTA</a:t>
-            </a:r>
-            <a:endParaRPr lang="en-US" sz="1000" dirty="0"/>
-          </a:p>
-        </p:txBody>
-      </p:sp>
-      <p:sp>
-        <p:nvSpPr>
-          <p:cNvPr id="20" name="Text 17"/>
-          <p:cNvSpPr txBox="1"/>
-          <p:nvPr/>
-        </p:nvSpPr>
-        <p:spPr>
-          <a:xfrm>
-            <a:off x="4480560" y="2862072"/>
-            <a:ext cx="3246120" cy="566928"/>
-          </a:xfrm>
-          <a:prstGeom prst="rect">
-            <a:avLst/>
-          </a:prstGeom>
-          <a:noFill/>
-          <a:ln/>
-        </p:spPr>
-        <p:txBody>
-          <a:bodyPr wrap="square" lIns="0" tIns="0" rIns="0" bIns="0" rtlCol="0" anchor="t"/>
-          <a:lstStyle/>
-          <a:p>
-            <a:pPr indent="0" marL="0">
-              <a:buNone/>
-            </a:pPr>
-            <a:r>
-              <a:rPr lang="en-US" sz="1150" dirty="0">
-                <a:solidFill>
-                  <a:srgbClr val="2E2119"/>
-                </a:solidFill>
-                <a:latin typeface="Calibri" pitchFamily="34" charset="0"/>
-                <a:ea typeface="Calibri" pitchFamily="34" charset="-122"/>
-                <a:cs typeface="Calibri" pitchFamily="34" charset="-120"/>
-              </a:rPr>
-              <a:t>Punto de equilibrio: 1 hogar</a:t>
-            </a:r>
-            <a:endParaRPr lang="en-US" sz="1150" dirty="0"/>
-          </a:p>
-        </p:txBody>
-      </p:sp>
-      <p:sp>
-        <p:nvSpPr>
-          <p:cNvPr id="21" name="Shape 18"/>
-          <p:cNvSpPr/>
-          <p:nvPr/>
-        </p:nvSpPr>
-        <p:spPr>
-          <a:xfrm>
-            <a:off x="8046720" y="2514600"/>
-            <a:ext cx="3611880" cy="960120"/>
-          </a:xfrm>
-          <a:prstGeom prst="roundRect">
-            <a:avLst>
-              <a:gd name="adj" fmla="val 11429"/>
-            </a:avLst>
-          </a:prstGeom>
-          <a:solidFill>
-            <a:srgbClr val="F4E9DA"/>
-          </a:solidFill>
-          <a:ln/>
-          <a:effectLst>
-            <a:outerShdw sx="100000" sy="100000" kx="0" ky="0" algn="bl" rotWithShape="0" blurRad="76200" dist="25400" dir="5400000">
-              <a:srgbClr val="000000">
-                <a:alpha val="12000"/>
-              </a:srgbClr>
-            </a:outerShdw>
-          </a:effectLst>
-        </p:spPr>
-      </p:sp>
-      <p:sp>
-        <p:nvSpPr>
-          <p:cNvPr id="22" name="Text 19"/>
-          <p:cNvSpPr txBox="1"/>
-          <p:nvPr/>
-        </p:nvSpPr>
-        <p:spPr>
-          <a:xfrm>
-            <a:off x="8229600" y="2606040"/>
-            <a:ext cx="3246120" cy="256032"/>
-          </a:xfrm>
-          <a:prstGeom prst="rect">
-            <a:avLst/>
-          </a:prstGeom>
-          <a:noFill/>
-          <a:ln/>
-        </p:spPr>
-        <p:txBody>
-          <a:bodyPr wrap="square" lIns="0" tIns="0" rIns="0" bIns="0" rtlCol="0" anchor="ctr"/>
-          <a:lstStyle/>
-          <a:p>
-            <a:pPr indent="0" marL="0">
-              <a:buNone/>
-            </a:pPr>
-            <a:r>
-              <a:rPr lang="en-US" sz="1000" b="1" spc="100" kern="0" dirty="0">
-                <a:solidFill>
-                  <a:srgbClr val="C9682B"/>
-                </a:solidFill>
-                <a:latin typeface="Calibri" pitchFamily="34" charset="0"/>
-                <a:ea typeface="Calibri" pitchFamily="34" charset="-122"/>
-                <a:cs typeface="Calibri" pitchFamily="34" charset="-120"/>
-              </a:rPr>
-              <a:t>CUÁNTOS HAY</a:t>
-            </a:r>
-            <a:endParaRPr lang="en-US" sz="1000" dirty="0"/>
-          </a:p>
-        </p:txBody>
-      </p:sp>
-      <p:sp>
-        <p:nvSpPr>
-          <p:cNvPr id="23" name="Text 20"/>
-          <p:cNvSpPr txBox="1"/>
-          <p:nvPr/>
-        </p:nvSpPr>
-        <p:spPr>
-          <a:xfrm>
-            <a:off x="8229600" y="2862072"/>
-            <a:ext cx="3246120" cy="566928"/>
-          </a:xfrm>
-          <a:prstGeom prst="rect">
-            <a:avLst/>
-          </a:prstGeom>
-          <a:noFill/>
-          <a:ln/>
-        </p:spPr>
-        <p:txBody>
-          <a:bodyPr wrap="square" lIns="0" tIns="0" rIns="0" bIns="0" rtlCol="0" anchor="t"/>
-          <a:lstStyle/>
-          <a:p>
-            <a:pPr indent="0" marL="0">
-              <a:buNone/>
-            </a:pPr>
-            <a:r>
-              <a:rPr lang="en-US" sz="1150" dirty="0">
-                <a:solidFill>
-                  <a:srgbClr val="2E2119"/>
-                </a:solidFill>
-                <a:latin typeface="Calibri" pitchFamily="34" charset="0"/>
-                <a:ea typeface="Calibri" pitchFamily="34" charset="-122"/>
-                <a:cs typeface="Calibri" pitchFamily="34" charset="-120"/>
-              </a:rPr>
-              <a:t>≈ 99.700 hogares accesibles</a:t>
-            </a:r>
-            <a:endParaRPr lang="en-US" sz="1150" dirty="0"/>
-          </a:p>
-        </p:txBody>
-      </p:sp>
-      <p:sp>
-        <p:nvSpPr>
-          <p:cNvPr id="24" name="Shape 21"/>
-          <p:cNvSpPr/>
-          <p:nvPr/>
-        </p:nvSpPr>
-        <p:spPr>
-          <a:xfrm>
-            <a:off x="548640" y="3657600"/>
-            <a:ext cx="5349240" cy="1417320"/>
-          </a:xfrm>
-          <a:prstGeom prst="roundRect">
-            <a:avLst>
-              <a:gd name="adj" fmla="val 7742"/>
-            </a:avLst>
-          </a:prstGeom>
-          <a:solidFill>
-            <a:srgbClr val="2E2119"/>
-          </a:solidFill>
-          <a:ln/>
-        </p:spPr>
-      </p:sp>
-      <p:sp>
-        <p:nvSpPr>
-          <p:cNvPr id="25" name="Text 22"/>
-          <p:cNvSpPr txBox="1"/>
-          <p:nvPr/>
-        </p:nvSpPr>
-        <p:spPr>
-          <a:xfrm>
-            <a:off x="548640" y="3767328"/>
-            <a:ext cx="5349240" cy="685800"/>
-          </a:xfrm>
-          <a:prstGeom prst="rect">
-            <a:avLst/>
-          </a:prstGeom>
-          <a:noFill/>
-          <a:ln/>
-        </p:spPr>
-        <p:txBody>
-          <a:bodyPr wrap="square" lIns="0" tIns="0" rIns="0" bIns="0" rtlCol="0" anchor="ctr"/>
-          <a:lstStyle/>
-          <a:p>
-            <a:pPr algn="ctr" indent="0" marL="0">
-              <a:buNone/>
-            </a:pPr>
-            <a:r>
-              <a:rPr lang="en-US" sz="3400" b="1" dirty="0">
-                <a:solidFill>
-                  <a:srgbClr val="D9A441"/>
                 </a:solidFill>
                 <a:latin typeface="Cambria" pitchFamily="34" charset="0"/>
                 <a:ea typeface="Cambria" pitchFamily="34" charset="-122"/>
                 <a:cs typeface="Cambria" pitchFamily="34" charset="-120"/>
               </a:rPr>
-              <a:t>1 hogar</a:t>
+              <a:t>≈ 99.700</a:t>
             </a:r>
             <a:endParaRPr lang="en-US" sz="3400" dirty="0"/>
           </a:p>
@@ -9450,57 +9954,57 @@
       </p:sp>
       <p:sp>
         <p:nvSpPr>
-          <p:cNvPr id="26" name="Text 23"/>
-          <p:cNvSpPr txBox="1"/>
-          <p:nvPr/>
-        </p:nvSpPr>
-        <p:spPr>
-          <a:xfrm>
-            <a:off x="777240" y="4434840"/>
-            <a:ext cx="4892040" cy="502920"/>
-          </a:xfrm>
-          <a:prstGeom prst="rect">
-            <a:avLst/>
-          </a:prstGeom>
-          <a:noFill/>
-          <a:ln/>
-        </p:spPr>
-        <p:txBody>
-          <a:bodyPr wrap="square" lIns="0" tIns="0" rIns="0" bIns="0" rtlCol="0" anchor="ctr"/>
-          <a:lstStyle/>
-          <a:p>
-            <a:pPr algn="ctr" indent="0" marL="0">
-              <a:buNone/>
-            </a:pPr>
-            <a:r>
-              <a:rPr lang="en-US" sz="1150" dirty="0">
-                <a:solidFill>
-                  <a:srgbClr val="FFFFFF"/>
-                </a:solidFill>
-                <a:latin typeface="Calibri" pitchFamily="34" charset="0"/>
-                <a:ea typeface="Calibri" pitchFamily="34" charset="-122"/>
-                <a:cs typeface="Calibri" pitchFamily="34" charset="-120"/>
-              </a:rPr>
-              <a:t>punto de equilibrio — coste fijo 0€ ÷ margen 0,99€</a:t>
-            </a:r>
-            <a:endParaRPr lang="en-US" sz="1150" dirty="0"/>
-          </a:p>
-        </p:txBody>
-      </p:sp>
-      <p:sp>
-        <p:nvSpPr>
-          <p:cNvPr id="27" name="Shape 24"/>
+          <p:cNvPr id="17" name="Text 14"/>
+          <p:cNvSpPr txBox="1"/>
+          <p:nvPr/>
+        </p:nvSpPr>
+        <p:spPr>
+          <a:xfrm>
+            <a:off x="8275320" y="3063240"/>
+            <a:ext cx="3108960" cy="777240"/>
+          </a:xfrm>
+          <a:prstGeom prst="rect">
+            <a:avLst/>
+          </a:prstGeom>
+          <a:noFill/>
+          <a:ln/>
+        </p:spPr>
+        <p:txBody>
+          <a:bodyPr wrap="square" lIns="0" tIns="0" rIns="0" bIns="0" rtlCol="0" anchor="t"/>
+          <a:lstStyle/>
+          <a:p>
+            <a:pPr indent="0" marL="0">
+              <a:buNone/>
+            </a:pPr>
+            <a:r>
+              <a:rPr lang="en-US" sz="1050" dirty="0">
+                <a:solidFill>
+                  <a:srgbClr val="8A7A6D"/>
+                </a:solidFill>
+                <a:latin typeface="Calibri" pitchFamily="34" charset="0"/>
+                <a:ea typeface="Calibri" pitchFamily="34" charset="-122"/>
+                <a:cs typeface="Calibri" pitchFamily="34" charset="-120"/>
+              </a:rPr>
+              <a:t>Coincide con el accesible — ver nota abajo</a:t>
+            </a:r>
+            <a:endParaRPr lang="en-US" sz="1050" dirty="0"/>
+          </a:p>
+        </p:txBody>
+      </p:sp>
+      <p:sp>
+        <p:nvSpPr>
+          <p:cNvPr id="18" name="Shape 15"/>
           <p:cNvSpPr/>
           <p:nvPr/>
         </p:nvSpPr>
         <p:spPr>
           <a:xfrm>
-            <a:off x="6035040" y="3657600"/>
-            <a:ext cx="5577840" cy="1417320"/>
+            <a:off x="548640" y="4160520"/>
+            <a:ext cx="11064240" cy="1965960"/>
           </a:xfrm>
           <a:prstGeom prst="roundRect">
             <a:avLst>
-              <a:gd name="adj" fmla="val 6452"/>
+              <a:gd name="adj" fmla="val 4651"/>
             </a:avLst>
           </a:prstGeom>
           <a:solidFill>
@@ -9516,30 +10020,50 @@
       </p:sp>
       <p:sp>
         <p:nvSpPr>
-          <p:cNvPr id="28" name="Text 25"/>
-          <p:cNvSpPr txBox="1"/>
-          <p:nvPr/>
-        </p:nvSpPr>
-        <p:spPr>
-          <a:xfrm>
-            <a:off x="6263640" y="3767328"/>
-            <a:ext cx="5120640" cy="1188720"/>
-          </a:xfrm>
-          <a:prstGeom prst="rect">
-            <a:avLst/>
-          </a:prstGeom>
-          <a:noFill/>
-          <a:ln/>
-        </p:spPr>
-        <p:txBody>
-          <a:bodyPr wrap="square" lIns="0" tIns="0" rIns="0" bIns="0" rtlCol="0" anchor="ctr"/>
-          <a:lstStyle/>
-          <a:p>
-            <a:pPr indent="0" marL="0">
-              <a:buNone/>
-            </a:pPr>
-            <a:r>
-              <a:rPr lang="en-US" sz="1150" i="1" dirty="0">
+          <p:cNvPr id="19" name="Text 16"/>
+          <p:cNvSpPr txBox="1"/>
+          <p:nvPr/>
+        </p:nvSpPr>
+        <p:spPr>
+          <a:xfrm>
+            <a:off x="777240" y="4279392"/>
+            <a:ext cx="10607040" cy="1737360"/>
+          </a:xfrm>
+          <a:prstGeom prst="rect">
+            <a:avLst/>
+          </a:prstGeom>
+          <a:noFill/>
+          <a:ln/>
+        </p:spPr>
+        <p:txBody>
+          <a:bodyPr wrap="square" lIns="0" tIns="0" rIns="0" bIns="0" rtlCol="0" anchor="t"/>
+          <a:lstStyle/>
+          <a:p>
+            <a:pPr indent="0" marL="0">
+              <a:buNone/>
+            </a:pPr>
+            <a:r>
+              <a:rPr lang="en-US" sz="1200" b="1" dirty="0">
+                <a:solidFill>
+                  <a:srgbClr val="C9682B"/>
+                </a:solidFill>
+                <a:latin typeface="Calibri" pitchFamily="34" charset="0"/>
+                <a:ea typeface="Calibri" pitchFamily="34" charset="-122"/>
+                <a:cs typeface="Calibri" pitchFamily="34" charset="-120"/>
+              </a:rPr>
+              <a:t>Nota honesta sobre la búsqueda:  </a:t>
+            </a:r>
+            <a:endParaRPr lang="en-US" sz="1200" dirty="0"/>
+          </a:p>
+          <a:p>
+            <a:pPr indent="0" marL="0">
+              <a:spcAft>
+                <a:spcPts val="600"/>
+              </a:spcAft>
+              <a:buNone/>
+            </a:pPr>
+            <a:r>
+              <a:rPr lang="en-US" sz="1200" dirty="0">
                 <a:solidFill>
                   <a:srgbClr val="2E2119"/>
                 </a:solidFill>
@@ -9547,48 +10071,43 @@
                 <a:ea typeface="Calibri" pitchFamily="34" charset="-122"/>
                 <a:cs typeface="Calibri" pitchFamily="34" charset="-120"/>
               </a:rPr>
-              <a:t>Lectura honesta: el nivel gratuito "duerme" sin uso y el disco es efímero (riesgo real para SQLite). El reto no son los números — es que alguien pague por algo que la competencia da gratis.</a:t>
-            </a:r>
-            <a:endParaRPr lang="en-US" sz="1150" dirty="0"/>
-          </a:p>
-        </p:txBody>
-      </p:sp>
-      <p:sp>
-        <p:nvSpPr>
-          <p:cNvPr id="29" name="Text 26"/>
-          <p:cNvSpPr txBox="1"/>
-          <p:nvPr/>
-        </p:nvSpPr>
-        <p:spPr>
-          <a:xfrm>
-            <a:off x="548640" y="5349240"/>
-            <a:ext cx="11094415" cy="274320"/>
-          </a:xfrm>
-          <a:prstGeom prst="rect">
-            <a:avLst/>
-          </a:prstGeom>
-          <a:noFill/>
-          <a:ln/>
-        </p:spPr>
-        <p:txBody>
-          <a:bodyPr wrap="square" lIns="0" tIns="0" rIns="0" bIns="0" rtlCol="0" anchor="ctr"/>
-          <a:lstStyle/>
-          <a:p>
-            <a:pPr indent="0" marL="0">
-              <a:buNone/>
-            </a:pPr>
-            <a:r>
-              <a:rPr lang="en-US" sz="1000" i="1" dirty="0">
-                <a:solidFill>
-                  <a:srgbClr val="8A7A6D"/>
-                </a:solidFill>
-                <a:latin typeface="Calibri" pitchFamily="34" charset="0"/>
-                <a:ea typeface="Calibri" pitchFamily="34" charset="-122"/>
-                <a:cs typeface="Calibri" pitchFamily="34" charset="-120"/>
-              </a:rPr>
-              <a:t>Decisión explícita: no se adelanta dinero propio en hosting mientras el proyecto no genere ingresos.</a:t>
-            </a:r>
-            <a:endParaRPr lang="en-US" sz="1000" dirty="0"/>
+              <a:t>no se encontró un desglose público fiable de "hogares no familiares/parejas sin hijos" a nivel de A Coruña — es un resultado válido en sí mismo, no un dato inventado.</a:t>
+            </a:r>
+            <a:endParaRPr lang="en-US" sz="1200" dirty="0"/>
+          </a:p>
+          <a:p>
+            <a:pPr indent="0" marL="0">
+              <a:buNone/>
+            </a:pPr>
+            <a:r>
+              <a:rPr lang="en-US" sz="1200" b="1" dirty="0">
+                <a:solidFill>
+                  <a:srgbClr val="C9682B"/>
+                </a:solidFill>
+                <a:latin typeface="Calibri" pitchFamily="34" charset="0"/>
+                <a:ea typeface="Calibri" pitchFamily="34" charset="-122"/>
+                <a:cs typeface="Calibri" pitchFamily="34" charset="-120"/>
+              </a:rPr>
+              <a:t>Suelo verificable:  </a:t>
+            </a:r>
+            <a:endParaRPr lang="en-US" sz="1200" dirty="0"/>
+          </a:p>
+          <a:p>
+            <a:pPr indent="0" marL="0">
+              <a:buNone/>
+            </a:pPr>
+            <a:r>
+              <a:rPr lang="en-US" sz="1200" dirty="0">
+                <a:solidFill>
+                  <a:srgbClr val="2E2119"/>
+                </a:solidFill>
+                <a:latin typeface="Calibri" pitchFamily="34" charset="0"/>
+                <a:ea typeface="Calibri" pitchFamily="34" charset="-122"/>
+                <a:cs typeface="Calibri" pitchFamily="34" charset="-120"/>
+              </a:rPr>
+              <a:t>≈ 650 pisos de estudiantes en A Coruña (UDC &gt;13.300 matriculados · 31% cambia de ciudad · 55% comparte piso — Fundación CYD).</a:t>
+            </a:r>
+            <a:endParaRPr lang="en-US" sz="1200" dirty="0"/>
           </a:p>
         </p:txBody>
       </p:sp>
@@ -9701,7 +10220,7 @@
                 <a:ea typeface="Calibri" pitchFamily="34" charset="-122"/>
                 <a:cs typeface="Calibri" pitchFamily="34" charset="-120"/>
               </a:rPr>
-              <a:t>PASO 5</a:t>
+              <a:t>PASO 4</a:t>
             </a:r>
             <a:endParaRPr lang="en-US" sz="1200" dirty="0"/>
           </a:p>
@@ -9740,7 +10259,7 @@
                 <a:ea typeface="Cambria" pitchFamily="34" charset="-122"/>
                 <a:cs typeface="Cambria" pitchFamily="34" charset="-120"/>
               </a:rPr>
-              <a:t>Las 3 columnas del alcance</a:t>
+              <a:t>La servilleta de 6 casillas</a:t>
             </a:r>
             <a:endParaRPr lang="en-US" sz="2800" dirty="0"/>
           </a:p>
@@ -9755,15 +10274,15 @@
         <p:spPr>
           <a:xfrm>
             <a:off x="548640" y="1417320"/>
-            <a:ext cx="3611880" cy="3246120"/>
+            <a:ext cx="3611880" cy="960120"/>
           </a:xfrm>
           <a:prstGeom prst="roundRect">
             <a:avLst>
-              <a:gd name="adj" fmla="val 3380"/>
+              <a:gd name="adj" fmla="val 11429"/>
             </a:avLst>
           </a:prstGeom>
           <a:solidFill>
-            <a:srgbClr val="F6E4D3"/>
+            <a:srgbClr val="F4E9DA"/>
           </a:solidFill>
           <a:ln/>
           <a:effectLst>
@@ -9777,210 +10296,100 @@
       </p:sp>
       <p:sp>
         <p:nvSpPr>
-          <p:cNvPr id="7" name="Shape 4"/>
+          <p:cNvPr id="7" name="Text 4"/>
+          <p:cNvSpPr txBox="1"/>
+          <p:nvPr/>
+        </p:nvSpPr>
+        <p:spPr>
+          <a:xfrm>
+            <a:off x="731520" y="1508760"/>
+            <a:ext cx="3246120" cy="256032"/>
+          </a:xfrm>
+          <a:prstGeom prst="rect">
+            <a:avLst/>
+          </a:prstGeom>
+          <a:noFill/>
+          <a:ln/>
+        </p:spPr>
+        <p:txBody>
+          <a:bodyPr wrap="square" lIns="0" tIns="0" rIns="0" bIns="0" rtlCol="0" anchor="ctr"/>
+          <a:lstStyle/>
+          <a:p>
+            <a:pPr indent="0" marL="0">
+              <a:buNone/>
+            </a:pPr>
+            <a:r>
+              <a:rPr lang="en-US" sz="1000" b="1" spc="100" kern="0" dirty="0">
+                <a:solidFill>
+                  <a:srgbClr val="C9682B"/>
+                </a:solidFill>
+                <a:latin typeface="Calibri" pitchFamily="34" charset="0"/>
+                <a:ea typeface="Calibri" pitchFamily="34" charset="-122"/>
+                <a:cs typeface="Calibri" pitchFamily="34" charset="-120"/>
+              </a:rPr>
+              <a:t>QUÉ VENDEMOS</a:t>
+            </a:r>
+            <a:endParaRPr lang="en-US" sz="1000" dirty="0"/>
+          </a:p>
+        </p:txBody>
+      </p:sp>
+      <p:sp>
+        <p:nvSpPr>
+          <p:cNvPr id="8" name="Text 5"/>
+          <p:cNvSpPr txBox="1"/>
+          <p:nvPr/>
+        </p:nvSpPr>
+        <p:spPr>
+          <a:xfrm>
+            <a:off x="731520" y="1764792"/>
+            <a:ext cx="3246120" cy="566928"/>
+          </a:xfrm>
+          <a:prstGeom prst="rect">
+            <a:avLst/>
+          </a:prstGeom>
+          <a:noFill/>
+          <a:ln/>
+        </p:spPr>
+        <p:txBody>
+          <a:bodyPr wrap="square" lIns="0" tIns="0" rIns="0" bIns="0" rtlCol="0" anchor="t"/>
+          <a:lstStyle/>
+          <a:p>
+            <a:pPr indent="0" marL="0">
+              <a:buNone/>
+            </a:pPr>
+            <a:r>
+              <a:rPr lang="en-US" sz="1150" dirty="0">
+                <a:solidFill>
+                  <a:srgbClr val="2E2119"/>
+                </a:solidFill>
+                <a:latin typeface="Calibri" pitchFamily="34" charset="0"/>
+                <a:ea typeface="Calibri" pitchFamily="34" charset="-122"/>
+                <a:cs typeface="Calibri" pitchFamily="34" charset="-120"/>
+              </a:rPr>
+              <a:t>Nada — no es un producto de pago, es una herramienta gratuita</a:t>
+            </a:r>
+            <a:endParaRPr lang="en-US" sz="1150" dirty="0"/>
+          </a:p>
+        </p:txBody>
+      </p:sp>
+      <p:sp>
+        <p:nvSpPr>
+          <p:cNvPr id="9" name="Shape 6"/>
           <p:cNvSpPr/>
           <p:nvPr/>
         </p:nvSpPr>
         <p:spPr>
           <a:xfrm>
-            <a:off x="731520" y="1600200"/>
-            <a:ext cx="3246120" cy="411480"/>
+            <a:off x="4297680" y="1417320"/>
+            <a:ext cx="3611880" cy="960120"/>
           </a:xfrm>
           <a:prstGeom prst="roundRect">
             <a:avLst>
-              <a:gd name="adj" fmla="val 17778"/>
+              <a:gd name="adj" fmla="val 11429"/>
             </a:avLst>
           </a:prstGeom>
           <a:solidFill>
-            <a:srgbClr val="C9682B"/>
-          </a:solidFill>
-          <a:ln/>
-        </p:spPr>
-      </p:sp>
-      <p:sp>
-        <p:nvSpPr>
-          <p:cNvPr id="8" name="Text 5"/>
-          <p:cNvSpPr txBox="1"/>
-          <p:nvPr/>
-        </p:nvSpPr>
-        <p:spPr>
-          <a:xfrm>
-            <a:off x="731520" y="1600200"/>
-            <a:ext cx="3246120" cy="411480"/>
-          </a:xfrm>
-          <a:prstGeom prst="rect">
-            <a:avLst/>
-          </a:prstGeom>
-          <a:noFill/>
-          <a:ln/>
-        </p:spPr>
-        <p:txBody>
-          <a:bodyPr wrap="square" lIns="0" tIns="0" rIns="0" bIns="0" rtlCol="0" anchor="ctr"/>
-          <a:lstStyle/>
-          <a:p>
-            <a:pPr algn="ctr" indent="0" marL="0">
-              <a:buNone/>
-            </a:pPr>
-            <a:r>
-              <a:rPr lang="en-US" sz="1400" b="1" dirty="0">
-                <a:solidFill>
-                  <a:srgbClr val="FFFFFF"/>
-                </a:solidFill>
-                <a:latin typeface="Cambria" pitchFamily="34" charset="0"/>
-                <a:ea typeface="Cambria" pitchFamily="34" charset="-122"/>
-                <a:cs typeface="Cambria" pitchFamily="34" charset="-120"/>
-              </a:rPr>
-              <a:t>Lo construimos</a:t>
-            </a:r>
-            <a:endParaRPr lang="en-US" sz="1400" dirty="0"/>
-          </a:p>
-        </p:txBody>
-      </p:sp>
-      <p:sp>
-        <p:nvSpPr>
-          <p:cNvPr id="9" name="Text 6"/>
-          <p:cNvSpPr txBox="1"/>
-          <p:nvPr/>
-        </p:nvSpPr>
-        <p:spPr>
-          <a:xfrm>
-            <a:off x="777240" y="2194560"/>
-            <a:ext cx="3154680" cy="2286000"/>
-          </a:xfrm>
-          <a:prstGeom prst="rect">
-            <a:avLst/>
-          </a:prstGeom>
-          <a:noFill/>
-          <a:ln/>
-        </p:spPr>
-        <p:txBody>
-          <a:bodyPr wrap="square" lIns="0" tIns="0" rIns="0" bIns="0" rtlCol="0" anchor="t"/>
-          <a:lstStyle/>
-          <a:p>
-            <a:pPr marL="342900" indent="-342900">
-              <a:spcAft>
-                <a:spcPts val="700"/>
-              </a:spcAft>
-              <a:buSzPct val="100000"/>
-              <a:buChar char="•"/>
-            </a:pPr>
-            <a:r>
-              <a:rPr lang="en-US" sz="1000" dirty="0">
-                <a:solidFill>
-                  <a:srgbClr val="2E2119"/>
-                </a:solidFill>
-                <a:latin typeface="Calibri" pitchFamily="34" charset="0"/>
-                <a:ea typeface="Calibri" pitchFamily="34" charset="-122"/>
-                <a:cs typeface="Calibri" pitchFamily="34" charset="-120"/>
-              </a:rPr>
-              <a:t>Nevera: 3 estados (bien/queda poco/se acabó), sin cantidades — se rellena sola al comprar</a:t>
-            </a:r>
-            <a:endParaRPr lang="en-US" sz="1000" dirty="0"/>
-          </a:p>
-          <a:p>
-            <a:pPr marL="342900" indent="-342900">
-              <a:spcAft>
-                <a:spcPts val="700"/>
-              </a:spcAft>
-              <a:buSzPct val="100000"/>
-              <a:buChar char="•"/>
-            </a:pPr>
-            <a:r>
-              <a:rPr lang="en-US" sz="1000" dirty="0">
-                <a:solidFill>
-                  <a:srgbClr val="2E2119"/>
-                </a:solidFill>
-                <a:latin typeface="Calibri" pitchFamily="34" charset="0"/>
-                <a:ea typeface="Calibri" pitchFamily="34" charset="-122"/>
-                <a:cs typeface="Calibri" pitchFamily="34" charset="-120"/>
-              </a:rPr>
-              <a:t>Lista que se genera sola a partir de la nevera, con concurrencia</a:t>
-            </a:r>
-            <a:endParaRPr lang="en-US" sz="1000" dirty="0"/>
-          </a:p>
-          <a:p>
-            <a:pPr marL="342900" indent="-342900">
-              <a:spcAft>
-                <a:spcPts val="700"/>
-              </a:spcAft>
-              <a:buSzPct val="100000"/>
-              <a:buChar char="•"/>
-            </a:pPr>
-            <a:r>
-              <a:rPr lang="en-US" sz="1000" dirty="0">
-                <a:solidFill>
-                  <a:srgbClr val="2E2119"/>
-                </a:solidFill>
-                <a:latin typeface="Calibri" pitchFamily="34" charset="0"/>
-                <a:ea typeface="Calibri" pitchFamily="34" charset="-122"/>
-                <a:cs typeface="Calibri" pitchFamily="34" charset="-120"/>
-              </a:rPr>
-              <a:t>Historial + cálculo de quién debe a quién</a:t>
-            </a:r>
-            <a:endParaRPr lang="en-US" sz="1000" dirty="0"/>
-          </a:p>
-          <a:p>
-            <a:pPr marL="342900" indent="-342900">
-              <a:spcAft>
-                <a:spcPts val="700"/>
-              </a:spcAft>
-              <a:buSzPct val="100000"/>
-              <a:buChar char="•"/>
-            </a:pPr>
-            <a:r>
-              <a:rPr lang="en-US" sz="1000" dirty="0">
-                <a:solidFill>
-                  <a:srgbClr val="2E2119"/>
-                </a:solidFill>
-                <a:latin typeface="Calibri" pitchFamily="34" charset="0"/>
-                <a:ea typeface="Calibri" pitchFamily="34" charset="-122"/>
-                <a:cs typeface="Calibri" pitchFamily="34" charset="-120"/>
-              </a:rPr>
-              <a:t>Precios sobre nuestro propio historial de compras</a:t>
-            </a:r>
-            <a:endParaRPr lang="en-US" sz="1000" dirty="0"/>
-          </a:p>
-          <a:p>
-            <a:pPr marL="342900" indent="-342900">
-              <a:spcAft>
-                <a:spcPts val="700"/>
-              </a:spcAft>
-              <a:buSzPct val="100000"/>
-              <a:buChar char="•"/>
-            </a:pPr>
-            <a:r>
-              <a:rPr lang="en-US" sz="1000" dirty="0">
-                <a:solidFill>
-                  <a:srgbClr val="2E2119"/>
-                </a:solidFill>
-                <a:latin typeface="Calibri" pitchFamily="34" charset="0"/>
-                <a:ea typeface="Calibri" pitchFamily="34" charset="-122"/>
-                <a:cs typeface="Calibri" pitchFamily="34" charset="-120"/>
-              </a:rPr>
-              <a:t>Predicción de reposición (aritmética sobre eventos propios)</a:t>
-            </a:r>
-            <a:endParaRPr lang="en-US" sz="1000" dirty="0"/>
-          </a:p>
-        </p:txBody>
-      </p:sp>
-      <p:sp>
-        <p:nvSpPr>
-          <p:cNvPr id="10" name="Shape 7"/>
-          <p:cNvSpPr/>
-          <p:nvPr/>
-        </p:nvSpPr>
-        <p:spPr>
-          <a:xfrm>
-            <a:off x="4297680" y="1417320"/>
-            <a:ext cx="3611880" cy="3246120"/>
-          </a:xfrm>
-          <a:prstGeom prst="roundRect">
-            <a:avLst>
-              <a:gd name="adj" fmla="val 3380"/>
-            </a:avLst>
-          </a:prstGeom>
-          <a:solidFill>
-            <a:srgbClr val="F4EFE8"/>
+            <a:srgbClr val="F4E9DA"/>
           </a:solidFill>
           <a:ln/>
           <a:effectLst>
@@ -9994,168 +10403,100 @@
       </p:sp>
       <p:sp>
         <p:nvSpPr>
-          <p:cNvPr id="11" name="Shape 8"/>
+          <p:cNvPr id="10" name="Text 7"/>
+          <p:cNvSpPr txBox="1"/>
+          <p:nvPr/>
+        </p:nvSpPr>
+        <p:spPr>
+          <a:xfrm>
+            <a:off x="4480560" y="1508760"/>
+            <a:ext cx="3246120" cy="256032"/>
+          </a:xfrm>
+          <a:prstGeom prst="rect">
+            <a:avLst/>
+          </a:prstGeom>
+          <a:noFill/>
+          <a:ln/>
+        </p:spPr>
+        <p:txBody>
+          <a:bodyPr wrap="square" lIns="0" tIns="0" rIns="0" bIns="0" rtlCol="0" anchor="ctr"/>
+          <a:lstStyle/>
+          <a:p>
+            <a:pPr indent="0" marL="0">
+              <a:buNone/>
+            </a:pPr>
+            <a:r>
+              <a:rPr lang="en-US" sz="1000" b="1" spc="100" kern="0" dirty="0">
+                <a:solidFill>
+                  <a:srgbClr val="C9682B"/>
+                </a:solidFill>
+                <a:latin typeface="Calibri" pitchFamily="34" charset="0"/>
+                <a:ea typeface="Calibri" pitchFamily="34" charset="-122"/>
+                <a:cs typeface="Calibri" pitchFamily="34" charset="-120"/>
+              </a:rPr>
+              <a:t>A QUIÉN</a:t>
+            </a:r>
+            <a:endParaRPr lang="en-US" sz="1000" dirty="0"/>
+          </a:p>
+        </p:txBody>
+      </p:sp>
+      <p:sp>
+        <p:nvSpPr>
+          <p:cNvPr id="11" name="Text 8"/>
+          <p:cNvSpPr txBox="1"/>
+          <p:nvPr/>
+        </p:nvSpPr>
+        <p:spPr>
+          <a:xfrm>
+            <a:off x="4480560" y="1764792"/>
+            <a:ext cx="3246120" cy="566928"/>
+          </a:xfrm>
+          <a:prstGeom prst="rect">
+            <a:avLst/>
+          </a:prstGeom>
+          <a:noFill/>
+          <a:ln/>
+        </p:spPr>
+        <p:txBody>
+          <a:bodyPr wrap="square" lIns="0" tIns="0" rIns="0" bIns="0" rtlCol="0" anchor="t"/>
+          <a:lstStyle/>
+          <a:p>
+            <a:pPr indent="0" marL="0">
+              <a:buNone/>
+            </a:pPr>
+            <a:r>
+              <a:rPr lang="en-US" sz="1150" dirty="0">
+                <a:solidFill>
+                  <a:srgbClr val="2E2119"/>
+                </a:solidFill>
+                <a:latin typeface="Calibri" pitchFamily="34" charset="0"/>
+                <a:ea typeface="Calibri" pitchFamily="34" charset="-122"/>
+                <a:cs typeface="Calibri" pitchFamily="34" charset="-120"/>
+              </a:rPr>
+              <a:t>Estudiantes que comparten piso en A Coruña</a:t>
+            </a:r>
+            <a:endParaRPr lang="en-US" sz="1150" dirty="0"/>
+          </a:p>
+        </p:txBody>
+      </p:sp>
+      <p:sp>
+        <p:nvSpPr>
+          <p:cNvPr id="12" name="Shape 9"/>
           <p:cNvSpPr/>
           <p:nvPr/>
         </p:nvSpPr>
         <p:spPr>
           <a:xfrm>
-            <a:off x="4480560" y="1600200"/>
-            <a:ext cx="3246120" cy="411480"/>
+            <a:off x="8046720" y="1417320"/>
+            <a:ext cx="3611880" cy="960120"/>
           </a:xfrm>
           <a:prstGeom prst="roundRect">
             <a:avLst>
-              <a:gd name="adj" fmla="val 17778"/>
+              <a:gd name="adj" fmla="val 11429"/>
             </a:avLst>
           </a:prstGeom>
           <a:solidFill>
-            <a:srgbClr val="D9A441"/>
-          </a:solidFill>
-          <a:ln/>
-        </p:spPr>
-      </p:sp>
-      <p:sp>
-        <p:nvSpPr>
-          <p:cNvPr id="12" name="Text 9"/>
-          <p:cNvSpPr txBox="1"/>
-          <p:nvPr/>
-        </p:nvSpPr>
-        <p:spPr>
-          <a:xfrm>
-            <a:off x="4480560" y="1600200"/>
-            <a:ext cx="3246120" cy="411480"/>
-          </a:xfrm>
-          <a:prstGeom prst="rect">
-            <a:avLst/>
-          </a:prstGeom>
-          <a:noFill/>
-          <a:ln/>
-        </p:spPr>
-        <p:txBody>
-          <a:bodyPr wrap="square" lIns="0" tIns="0" rIns="0" bIns="0" rtlCol="0" anchor="ctr"/>
-          <a:lstStyle/>
-          <a:p>
-            <a:pPr algn="ctr" indent="0" marL="0">
-              <a:buNone/>
-            </a:pPr>
-            <a:r>
-              <a:rPr lang="en-US" sz="1400" b="1" dirty="0">
-                <a:solidFill>
-                  <a:srgbClr val="FFFFFF"/>
-                </a:solidFill>
-                <a:latin typeface="Cambria" pitchFamily="34" charset="0"/>
-                <a:ea typeface="Cambria" pitchFamily="34" charset="-122"/>
-                <a:cs typeface="Cambria" pitchFamily="34" charset="-120"/>
-              </a:rPr>
-              <a:t>Lo hace un servicio externo</a:t>
-            </a:r>
-            <a:endParaRPr lang="en-US" sz="1400" dirty="0"/>
-          </a:p>
-        </p:txBody>
-      </p:sp>
-      <p:sp>
-        <p:nvSpPr>
-          <p:cNvPr id="13" name="Text 10"/>
-          <p:cNvSpPr txBox="1"/>
-          <p:nvPr/>
-        </p:nvSpPr>
-        <p:spPr>
-          <a:xfrm>
-            <a:off x="4526280" y="2194560"/>
-            <a:ext cx="3154680" cy="2286000"/>
-          </a:xfrm>
-          <a:prstGeom prst="rect">
-            <a:avLst/>
-          </a:prstGeom>
-          <a:noFill/>
-          <a:ln/>
-        </p:spPr>
-        <p:txBody>
-          <a:bodyPr wrap="square" lIns="0" tIns="0" rIns="0" bIns="0" rtlCol="0" anchor="t"/>
-          <a:lstStyle/>
-          <a:p>
-            <a:pPr marL="342900" indent="-342900">
-              <a:spcAft>
-                <a:spcPts val="700"/>
-              </a:spcAft>
-              <a:buSzPct val="100000"/>
-              <a:buChar char="•"/>
-            </a:pPr>
-            <a:r>
-              <a:rPr lang="en-US" sz="1000" dirty="0">
-                <a:solidFill>
-                  <a:srgbClr val="2E2119"/>
-                </a:solidFill>
-                <a:latin typeface="Calibri" pitchFamily="34" charset="0"/>
-                <a:ea typeface="Calibri" pitchFamily="34" charset="-122"/>
-                <a:cs typeface="Calibri" pitchFamily="34" charset="-120"/>
-              </a:rPr>
-              <a:t>Diccionario de productos (Open Food Facts, gratis)</a:t>
-            </a:r>
-            <a:endParaRPr lang="en-US" sz="1000" dirty="0"/>
-          </a:p>
-          <a:p>
-            <a:pPr marL="342900" indent="-342900">
-              <a:spcAft>
-                <a:spcPts val="700"/>
-              </a:spcAft>
-              <a:buSzPct val="100000"/>
-              <a:buChar char="•"/>
-            </a:pPr>
-            <a:r>
-              <a:rPr lang="en-US" sz="1000" dirty="0">
-                <a:solidFill>
-                  <a:srgbClr val="2E2119"/>
-                </a:solidFill>
-                <a:latin typeface="Calibri" pitchFamily="34" charset="0"/>
-                <a:ea typeface="Calibri" pitchFamily="34" charset="-122"/>
-                <a:cs typeface="Calibri" pitchFamily="34" charset="-120"/>
-              </a:rPr>
-              <a:t>Lectura de tickets → items (Gemini API, free tier — la IA solo se usa aquí)</a:t>
-            </a:r>
-            <a:endParaRPr lang="en-US" sz="1000" dirty="0"/>
-          </a:p>
-          <a:p>
-            <a:pPr marL="342900" indent="-342900">
-              <a:spcAft>
-                <a:spcPts val="700"/>
-              </a:spcAft>
-              <a:buSzPct val="100000"/>
-              <a:buChar char="•"/>
-            </a:pPr>
-            <a:r>
-              <a:rPr lang="en-US" sz="1000" dirty="0">
-                <a:solidFill>
-                  <a:srgbClr val="2E2119"/>
-                </a:solidFill>
-                <a:latin typeface="Calibri" pitchFamily="34" charset="0"/>
-                <a:ea typeface="Calibri" pitchFamily="34" charset="-122"/>
-                <a:cs typeface="Calibri" pitchFamily="34" charset="-120"/>
-              </a:rPr>
-              <a:t>Aviso de turno de compra (bot de Telegram, gratis)</a:t>
-            </a:r>
-            <a:endParaRPr lang="en-US" sz="1000" dirty="0"/>
-          </a:p>
-        </p:txBody>
-      </p:sp>
-      <p:sp>
-        <p:nvSpPr>
-          <p:cNvPr id="14" name="Shape 11"/>
-          <p:cNvSpPr/>
-          <p:nvPr/>
-        </p:nvSpPr>
-        <p:spPr>
-          <a:xfrm>
-            <a:off x="8046720" y="1417320"/>
-            <a:ext cx="3611880" cy="3246120"/>
-          </a:xfrm>
-          <a:prstGeom prst="roundRect">
-            <a:avLst>
-              <a:gd name="adj" fmla="val 3380"/>
-            </a:avLst>
-          </a:prstGeom>
-          <a:solidFill>
-            <a:srgbClr val="F4EFE8"/>
+            <a:srgbClr val="F4E9DA"/>
           </a:solidFill>
           <a:ln/>
           <a:effectLst>
@@ -10169,24 +10510,109 @@
       </p:sp>
       <p:sp>
         <p:nvSpPr>
+          <p:cNvPr id="13" name="Text 10"/>
+          <p:cNvSpPr txBox="1"/>
+          <p:nvPr/>
+        </p:nvSpPr>
+        <p:spPr>
+          <a:xfrm>
+            <a:off x="8229600" y="1508760"/>
+            <a:ext cx="3246120" cy="256032"/>
+          </a:xfrm>
+          <a:prstGeom prst="rect">
+            <a:avLst/>
+          </a:prstGeom>
+          <a:noFill/>
+          <a:ln/>
+        </p:spPr>
+        <p:txBody>
+          <a:bodyPr wrap="square" lIns="0" tIns="0" rIns="0" bIns="0" rtlCol="0" anchor="ctr"/>
+          <a:lstStyle/>
+          <a:p>
+            <a:pPr indent="0" marL="0">
+              <a:buNone/>
+            </a:pPr>
+            <a:r>
+              <a:rPr lang="en-US" sz="1000" b="1" spc="100" kern="0" dirty="0">
+                <a:solidFill>
+                  <a:srgbClr val="C9682B"/>
+                </a:solidFill>
+                <a:latin typeface="Calibri" pitchFamily="34" charset="0"/>
+                <a:ea typeface="Calibri" pitchFamily="34" charset="-122"/>
+                <a:cs typeface="Calibri" pitchFamily="34" charset="-120"/>
+              </a:rPr>
+              <a:t>A CUÁNTO</a:t>
+            </a:r>
+            <a:endParaRPr lang="en-US" sz="1000" dirty="0"/>
+          </a:p>
+        </p:txBody>
+      </p:sp>
+      <p:sp>
+        <p:nvSpPr>
+          <p:cNvPr id="14" name="Text 11"/>
+          <p:cNvSpPr txBox="1"/>
+          <p:nvPr/>
+        </p:nvSpPr>
+        <p:spPr>
+          <a:xfrm>
+            <a:off x="8229600" y="1764792"/>
+            <a:ext cx="3246120" cy="566928"/>
+          </a:xfrm>
+          <a:prstGeom prst="rect">
+            <a:avLst/>
+          </a:prstGeom>
+          <a:noFill/>
+          <a:ln/>
+        </p:spPr>
+        <p:txBody>
+          <a:bodyPr wrap="square" lIns="0" tIns="0" rIns="0" bIns="0" rtlCol="0" anchor="t"/>
+          <a:lstStyle/>
+          <a:p>
+            <a:pPr indent="0" marL="0">
+              <a:buNone/>
+            </a:pPr>
+            <a:r>
+              <a:rPr lang="en-US" sz="1150" dirty="0">
+                <a:solidFill>
+                  <a:srgbClr val="2E2119"/>
+                </a:solidFill>
+                <a:latin typeface="Calibri" pitchFamily="34" charset="0"/>
+                <a:ea typeface="Calibri" pitchFamily="34" charset="-122"/>
+                <a:cs typeface="Calibri" pitchFamily="34" charset="-120"/>
+              </a:rPr>
+              <a:t>0 € — no se cobra nada</a:t>
+            </a:r>
+            <a:endParaRPr lang="en-US" sz="1150" dirty="0"/>
+          </a:p>
+        </p:txBody>
+      </p:sp>
+      <p:sp>
+        <p:nvSpPr>
           <p:cNvPr id="15" name="Shape 12"/>
           <p:cNvSpPr/>
           <p:nvPr/>
         </p:nvSpPr>
         <p:spPr>
           <a:xfrm>
-            <a:off x="8229600" y="1600200"/>
-            <a:ext cx="3246120" cy="411480"/>
+            <a:off x="548640" y="2514600"/>
+            <a:ext cx="3611880" cy="960120"/>
           </a:xfrm>
           <a:prstGeom prst="roundRect">
             <a:avLst>
-              <a:gd name="adj" fmla="val 17778"/>
+              <a:gd name="adj" fmla="val 11429"/>
             </a:avLst>
           </a:prstGeom>
           <a:solidFill>
-            <a:srgbClr val="8A7A6D"/>
+            <a:srgbClr val="F4E9DA"/>
           </a:solidFill>
           <a:ln/>
+          <a:effectLst>
+            <a:outerShdw sx="100000" sy="100000" kx="0" ky="0" algn="bl" rotWithShape="0" blurRad="76200" dist="25400" dir="5400000">
+              <a:srgbClr val="000000">
+                <a:alpha val="12000"/>
+              </a:srgbClr>
+            </a:outerShdw>
+          </a:effectLst>
         </p:spPr>
       </p:sp>
       <p:sp>
@@ -10197,8 +10623,8 @@
         </p:nvSpPr>
         <p:spPr>
           <a:xfrm>
-            <a:off x="8229600" y="1600200"/>
-            <a:ext cx="3246120" cy="411480"/>
+            <a:off x="731520" y="2606040"/>
+            <a:ext cx="3246120" cy="256032"/>
           </a:xfrm>
           <a:prstGeom prst="rect">
             <a:avLst/>
@@ -10210,21 +10636,21 @@
           <a:bodyPr wrap="square" lIns="0" tIns="0" rIns="0" bIns="0" rtlCol="0" anchor="ctr"/>
           <a:lstStyle/>
           <a:p>
-            <a:pPr algn="ctr" indent="0" marL="0">
-              <a:buNone/>
-            </a:pPr>
-            <a:r>
-              <a:rPr lang="en-US" sz="1400" b="1" dirty="0">
-                <a:solidFill>
-                  <a:srgbClr val="FFFFFF"/>
-                </a:solidFill>
-                <a:latin typeface="Cambria" pitchFamily="34" charset="0"/>
-                <a:ea typeface="Cambria" pitchFamily="34" charset="-122"/>
-                <a:cs typeface="Cambria" pitchFamily="34" charset="-120"/>
-              </a:rPr>
-              <a:t>No se hace este curso</a:t>
-            </a:r>
-            <a:endParaRPr lang="en-US" sz="1400" dirty="0"/>
+            <a:pPr indent="0" marL="0">
+              <a:buNone/>
+            </a:pPr>
+            <a:r>
+              <a:rPr lang="en-US" sz="1000" b="1" spc="100" kern="0" dirty="0">
+                <a:solidFill>
+                  <a:srgbClr val="C9682B"/>
+                </a:solidFill>
+                <a:latin typeface="Calibri" pitchFamily="34" charset="0"/>
+                <a:ea typeface="Calibri" pitchFamily="34" charset="-122"/>
+                <a:cs typeface="Calibri" pitchFamily="34" charset="-120"/>
+              </a:rPr>
+              <a:t>QUÉ NOS CUESTA</a:t>
+            </a:r>
+            <a:endParaRPr lang="en-US" sz="1000" dirty="0"/>
           </a:p>
         </p:txBody>
       </p:sp>
@@ -10236,8 +10662,8 @@
         </p:nvSpPr>
         <p:spPr>
           <a:xfrm>
-            <a:off x="8275320" y="2194560"/>
-            <a:ext cx="3154680" cy="2286000"/>
+            <a:off x="731520" y="2862072"/>
+            <a:ext cx="3246120" cy="566928"/>
           </a:xfrm>
           <a:prstGeom prst="rect">
             <a:avLst/>
@@ -10249,15 +10675,11 @@
           <a:bodyPr wrap="square" lIns="0" tIns="0" rIns="0" bIns="0" rtlCol="0" anchor="t"/>
           <a:lstStyle/>
           <a:p>
-            <a:pPr marL="342900" indent="-342900">
-              <a:spcAft>
-                <a:spcPts val="700"/>
-              </a:spcAft>
-              <a:buSzPct val="100000"/>
-              <a:buChar char="•"/>
-            </a:pPr>
-            <a:r>
-              <a:rPr lang="en-US" sz="1000" dirty="0">
+            <a:pPr indent="0" marL="0">
+              <a:buNone/>
+            </a:pPr>
+            <a:r>
+              <a:rPr lang="en-US" sz="1150" dirty="0">
                 <a:solidFill>
                   <a:srgbClr val="2E2119"/>
                 </a:solidFill>
@@ -10265,72 +10687,9 @@
                 <a:ea typeface="Calibri" pitchFamily="34" charset="-122"/>
                 <a:cs typeface="Calibri" pitchFamily="34" charset="-120"/>
               </a:rPr>
-              <a:t>Escaneo de código de barras</a:t>
-            </a:r>
-            <a:endParaRPr lang="en-US" sz="1000" dirty="0"/>
-          </a:p>
-          <a:p>
-            <a:pPr marL="342900" indent="-342900">
-              <a:spcAft>
-                <a:spcPts val="700"/>
-              </a:spcAft>
-              <a:buSzPct val="100000"/>
-              <a:buChar char="•"/>
-            </a:pPr>
-            <a:r>
-              <a:rPr lang="en-US" sz="1000" dirty="0">
-                <a:solidFill>
-                  <a:srgbClr val="2E2119"/>
-                </a:solidFill>
-                <a:latin typeface="Calibri" pitchFamily="34" charset="0"/>
-                <a:ea typeface="Calibri" pitchFamily="34" charset="-122"/>
-                <a:cs typeface="Calibri" pitchFamily="34" charset="-120"/>
-              </a:rPr>
-              <a:t>Cobro real con tarjeta</a:t>
-            </a:r>
-            <a:endParaRPr lang="en-US" sz="1000" dirty="0"/>
-          </a:p>
-          <a:p>
-            <a:pPr marL="342900" indent="-342900">
-              <a:spcAft>
-                <a:spcPts val="700"/>
-              </a:spcAft>
-              <a:buSzPct val="100000"/>
-              <a:buChar char="•"/>
-            </a:pPr>
-            <a:r>
-              <a:rPr lang="en-US" sz="1000" dirty="0">
-                <a:solidFill>
-                  <a:srgbClr val="2E2119"/>
-                </a:solidFill>
-                <a:latin typeface="Calibri" pitchFamily="34" charset="0"/>
-                <a:ea typeface="Calibri" pitchFamily="34" charset="-122"/>
-                <a:cs typeface="Calibri" pitchFamily="34" charset="-120"/>
-              </a:rPr>
-              <a:t>Notificaciones push nativas (Telegram es la excepción)</a:t>
-            </a:r>
-            <a:endParaRPr lang="en-US" sz="1000" dirty="0"/>
-          </a:p>
-          <a:p>
-            <a:pPr marL="342900" indent="-342900">
-              <a:spcAft>
-                <a:spcPts val="700"/>
-              </a:spcAft>
-              <a:buSzPct val="100000"/>
-              <a:buChar char="•"/>
-            </a:pPr>
-            <a:r>
-              <a:rPr lang="en-US" sz="1000" dirty="0">
-                <a:solidFill>
-                  <a:srgbClr val="2E2119"/>
-                </a:solidFill>
-                <a:latin typeface="Calibri" pitchFamily="34" charset="0"/>
-                <a:ea typeface="Calibri" pitchFamily="34" charset="-122"/>
-                <a:cs typeface="Calibri" pitchFamily="34" charset="-120"/>
-              </a:rPr>
-              <a:t>Liquidar deudas de verdad</a:t>
-            </a:r>
-            <a:endParaRPr lang="en-US" sz="1000" dirty="0"/>
+              <a:t>Coste fijo: 0 € (niveles gratuitos de todo el stack). Variable: 0 €</a:t>
+            </a:r>
+            <a:endParaRPr lang="en-US" sz="1150" dirty="0"/>
           </a:p>
         </p:txBody>
       </p:sp>
@@ -10342,8 +10701,222 @@
         </p:nvSpPr>
         <p:spPr>
           <a:xfrm>
-            <a:off x="548640" y="4846320"/>
-            <a:ext cx="11064240" cy="1417320"/>
+            <a:off x="4297680" y="2514600"/>
+            <a:ext cx="3611880" cy="960120"/>
+          </a:xfrm>
+          <a:prstGeom prst="roundRect">
+            <a:avLst>
+              <a:gd name="adj" fmla="val 11429"/>
+            </a:avLst>
+          </a:prstGeom>
+          <a:solidFill>
+            <a:srgbClr val="F4E9DA"/>
+          </a:solidFill>
+          <a:ln/>
+          <a:effectLst>
+            <a:outerShdw sx="100000" sy="100000" kx="0" ky="0" algn="bl" rotWithShape="0" blurRad="76200" dist="25400" dir="5400000">
+              <a:srgbClr val="000000">
+                <a:alpha val="12000"/>
+              </a:srgbClr>
+            </a:outerShdw>
+          </a:effectLst>
+        </p:spPr>
+      </p:sp>
+      <p:sp>
+        <p:nvSpPr>
+          <p:cNvPr id="19" name="Text 16"/>
+          <p:cNvSpPr txBox="1"/>
+          <p:nvPr/>
+        </p:nvSpPr>
+        <p:spPr>
+          <a:xfrm>
+            <a:off x="4480560" y="2606040"/>
+            <a:ext cx="3246120" cy="256032"/>
+          </a:xfrm>
+          <a:prstGeom prst="rect">
+            <a:avLst/>
+          </a:prstGeom>
+          <a:noFill/>
+          <a:ln/>
+        </p:spPr>
+        <p:txBody>
+          <a:bodyPr wrap="square" lIns="0" tIns="0" rIns="0" bIns="0" rtlCol="0" anchor="ctr"/>
+          <a:lstStyle/>
+          <a:p>
+            <a:pPr indent="0" marL="0">
+              <a:buNone/>
+            </a:pPr>
+            <a:r>
+              <a:rPr lang="en-US" sz="1000" b="1" spc="100" kern="0" dirty="0">
+                <a:solidFill>
+                  <a:srgbClr val="C9682B"/>
+                </a:solidFill>
+                <a:latin typeface="Calibri" pitchFamily="34" charset="0"/>
+                <a:ea typeface="Calibri" pitchFamily="34" charset="-122"/>
+                <a:cs typeface="Calibri" pitchFamily="34" charset="-120"/>
+              </a:rPr>
+              <a:t>CUÁNTOS HACEN FALTA</a:t>
+            </a:r>
+            <a:endParaRPr lang="en-US" sz="1000" dirty="0"/>
+          </a:p>
+        </p:txBody>
+      </p:sp>
+      <p:sp>
+        <p:nvSpPr>
+          <p:cNvPr id="20" name="Text 17"/>
+          <p:cNvSpPr txBox="1"/>
+          <p:nvPr/>
+        </p:nvSpPr>
+        <p:spPr>
+          <a:xfrm>
+            <a:off x="4480560" y="2862072"/>
+            <a:ext cx="3246120" cy="566928"/>
+          </a:xfrm>
+          <a:prstGeom prst="rect">
+            <a:avLst/>
+          </a:prstGeom>
+          <a:noFill/>
+          <a:ln/>
+        </p:spPr>
+        <p:txBody>
+          <a:bodyPr wrap="square" lIns="0" tIns="0" rIns="0" bIns="0" rtlCol="0" anchor="t"/>
+          <a:lstStyle/>
+          <a:p>
+            <a:pPr indent="0" marL="0">
+              <a:buNone/>
+            </a:pPr>
+            <a:r>
+              <a:rPr lang="en-US" sz="1150" dirty="0">
+                <a:solidFill>
+                  <a:srgbClr val="2E2119"/>
+                </a:solidFill>
+                <a:latin typeface="Calibri" pitchFamily="34" charset="0"/>
+                <a:ea typeface="Calibri" pitchFamily="34" charset="-122"/>
+                <a:cs typeface="Calibri" pitchFamily="34" charset="-120"/>
+              </a:rPr>
+              <a:t>No aplica — no hay ingresos que equilibrar</a:t>
+            </a:r>
+            <a:endParaRPr lang="en-US" sz="1150" dirty="0"/>
+          </a:p>
+        </p:txBody>
+      </p:sp>
+      <p:sp>
+        <p:nvSpPr>
+          <p:cNvPr id="21" name="Shape 18"/>
+          <p:cNvSpPr/>
+          <p:nvPr/>
+        </p:nvSpPr>
+        <p:spPr>
+          <a:xfrm>
+            <a:off x="8046720" y="2514600"/>
+            <a:ext cx="3611880" cy="960120"/>
+          </a:xfrm>
+          <a:prstGeom prst="roundRect">
+            <a:avLst>
+              <a:gd name="adj" fmla="val 11429"/>
+            </a:avLst>
+          </a:prstGeom>
+          <a:solidFill>
+            <a:srgbClr val="F4E9DA"/>
+          </a:solidFill>
+          <a:ln/>
+          <a:effectLst>
+            <a:outerShdw sx="100000" sy="100000" kx="0" ky="0" algn="bl" rotWithShape="0" blurRad="76200" dist="25400" dir="5400000">
+              <a:srgbClr val="000000">
+                <a:alpha val="12000"/>
+              </a:srgbClr>
+            </a:outerShdw>
+          </a:effectLst>
+        </p:spPr>
+      </p:sp>
+      <p:sp>
+        <p:nvSpPr>
+          <p:cNvPr id="22" name="Text 19"/>
+          <p:cNvSpPr txBox="1"/>
+          <p:nvPr/>
+        </p:nvSpPr>
+        <p:spPr>
+          <a:xfrm>
+            <a:off x="8229600" y="2606040"/>
+            <a:ext cx="3246120" cy="256032"/>
+          </a:xfrm>
+          <a:prstGeom prst="rect">
+            <a:avLst/>
+          </a:prstGeom>
+          <a:noFill/>
+          <a:ln/>
+        </p:spPr>
+        <p:txBody>
+          <a:bodyPr wrap="square" lIns="0" tIns="0" rIns="0" bIns="0" rtlCol="0" anchor="ctr"/>
+          <a:lstStyle/>
+          <a:p>
+            <a:pPr indent="0" marL="0">
+              <a:buNone/>
+            </a:pPr>
+            <a:r>
+              <a:rPr lang="en-US" sz="1000" b="1" spc="100" kern="0" dirty="0">
+                <a:solidFill>
+                  <a:srgbClr val="C9682B"/>
+                </a:solidFill>
+                <a:latin typeface="Calibri" pitchFamily="34" charset="0"/>
+                <a:ea typeface="Calibri" pitchFamily="34" charset="-122"/>
+                <a:cs typeface="Calibri" pitchFamily="34" charset="-120"/>
+              </a:rPr>
+              <a:t>CUÁNTOS HAY</a:t>
+            </a:r>
+            <a:endParaRPr lang="en-US" sz="1000" dirty="0"/>
+          </a:p>
+        </p:txBody>
+      </p:sp>
+      <p:sp>
+        <p:nvSpPr>
+          <p:cNvPr id="23" name="Text 20"/>
+          <p:cNvSpPr txBox="1"/>
+          <p:nvPr/>
+        </p:nvSpPr>
+        <p:spPr>
+          <a:xfrm>
+            <a:off x="8229600" y="2862072"/>
+            <a:ext cx="3246120" cy="566928"/>
+          </a:xfrm>
+          <a:prstGeom prst="rect">
+            <a:avLst/>
+          </a:prstGeom>
+          <a:noFill/>
+          <a:ln/>
+        </p:spPr>
+        <p:txBody>
+          <a:bodyPr wrap="square" lIns="0" tIns="0" rIns="0" bIns="0" rtlCol="0" anchor="t"/>
+          <a:lstStyle/>
+          <a:p>
+            <a:pPr indent="0" marL="0">
+              <a:buNone/>
+            </a:pPr>
+            <a:r>
+              <a:rPr lang="en-US" sz="1150" dirty="0">
+                <a:solidFill>
+                  <a:srgbClr val="2E2119"/>
+                </a:solidFill>
+                <a:latin typeface="Calibri" pitchFamily="34" charset="0"/>
+                <a:ea typeface="Calibri" pitchFamily="34" charset="-122"/>
+                <a:cs typeface="Calibri" pitchFamily="34" charset="-120"/>
+              </a:rPr>
+              <a:t>≈ 650 pisos de estudiantes (suelo verificable)</a:t>
+            </a:r>
+            <a:endParaRPr lang="en-US" sz="1150" dirty="0"/>
+          </a:p>
+        </p:txBody>
+      </p:sp>
+      <p:sp>
+        <p:nvSpPr>
+          <p:cNvPr id="24" name="Shape 21"/>
+          <p:cNvSpPr/>
+          <p:nvPr/>
+        </p:nvSpPr>
+        <p:spPr>
+          <a:xfrm>
+            <a:off x="548640" y="3657600"/>
+            <a:ext cx="5349240" cy="1417320"/>
           </a:xfrm>
           <a:prstGeom prst="roundRect">
             <a:avLst>
@@ -10358,14 +10931,14 @@
       </p:sp>
       <p:sp>
         <p:nvSpPr>
-          <p:cNvPr id="19" name="Text 16"/>
-          <p:cNvSpPr txBox="1"/>
-          <p:nvPr/>
-        </p:nvSpPr>
-        <p:spPr>
-          <a:xfrm>
-            <a:off x="868680" y="4956048"/>
-            <a:ext cx="10424160" cy="914400"/>
+          <p:cNvPr id="25" name="Text 22"/>
+          <p:cNvSpPr txBox="1"/>
+          <p:nvPr/>
+        </p:nvSpPr>
+        <p:spPr>
+          <a:xfrm>
+            <a:off x="548640" y="3767328"/>
+            <a:ext cx="5349240" cy="685800"/>
           </a:xfrm>
           <a:prstGeom prst="rect">
             <a:avLst/>
@@ -10377,34 +10950,34 @@
           <a:bodyPr wrap="square" lIns="0" tIns="0" rIns="0" bIns="0" rtlCol="0" anchor="ctr"/>
           <a:lstStyle/>
           <a:p>
-            <a:pPr indent="0" marL="0">
-              <a:buNone/>
-            </a:pPr>
-            <a:r>
-              <a:rPr lang="en-US" sz="1250" i="1" dirty="0">
+            <a:pPr algn="ctr" indent="0" marL="0">
+              <a:buNone/>
+            </a:pPr>
+            <a:r>
+              <a:rPr lang="en-US" sz="3400" b="1" dirty="0">
                 <a:solidFill>
                   <a:srgbClr val="D9A441"/>
                 </a:solidFill>
-                <a:latin typeface="Calibri" pitchFamily="34" charset="0"/>
-                <a:ea typeface="Calibri" pitchFamily="34" charset="-122"/>
-                <a:cs typeface="Calibri" pitchFamily="34" charset="-120"/>
-              </a:rPr>
-              <a:t>"Un hogar de A Coruña deja de escribir la lista de la compra: la nevera se rellena sola al comprar, avisa cuando algo se acaba, y la lista sale de ahí. El grupo se entera por Telegram, marca la compra en tiempo real, y consulta después quién debe qué y dónde sale más barato cada cosa."</a:t>
-            </a:r>
-            <a:endParaRPr lang="en-US" sz="1250" dirty="0"/>
-          </a:p>
-        </p:txBody>
-      </p:sp>
-      <p:sp>
-        <p:nvSpPr>
-          <p:cNvPr id="20" name="Text 17"/>
-          <p:cNvSpPr txBox="1"/>
-          <p:nvPr/>
-        </p:nvSpPr>
-        <p:spPr>
-          <a:xfrm>
-            <a:off x="868680" y="5852160"/>
-            <a:ext cx="10424160" cy="320040"/>
+                <a:latin typeface="Cambria" pitchFamily="34" charset="0"/>
+                <a:ea typeface="Cambria" pitchFamily="34" charset="-122"/>
+                <a:cs typeface="Cambria" pitchFamily="34" charset="-120"/>
+              </a:rPr>
+              <a:t>0 €</a:t>
+            </a:r>
+            <a:endParaRPr lang="en-US" sz="3400" dirty="0"/>
+          </a:p>
+        </p:txBody>
+      </p:sp>
+      <p:sp>
+        <p:nvSpPr>
+          <p:cNvPr id="26" name="Text 23"/>
+          <p:cNvSpPr txBox="1"/>
+          <p:nvPr/>
+        </p:nvSpPr>
+        <p:spPr>
+          <a:xfrm>
+            <a:off x="777240" y="4434840"/>
+            <a:ext cx="4892040" cy="502920"/>
           </a:xfrm>
           <a:prstGeom prst="rect">
             <a:avLst/>
@@ -10416,21 +10989,126 @@
           <a:bodyPr wrap="square" lIns="0" tIns="0" rIns="0" bIns="0" rtlCol="0" anchor="ctr"/>
           <a:lstStyle/>
           <a:p>
-            <a:pPr indent="0" marL="0">
-              <a:buNone/>
-            </a:pPr>
-            <a:r>
-              <a:rPr lang="en-US" sz="1100" dirty="0">
-                <a:solidFill>
-                  <a:srgbClr val="D8CBBE"/>
-                </a:solidFill>
-                <a:latin typeface="Calibri" pitchFamily="34" charset="0"/>
-                <a:ea typeface="Calibri" pitchFamily="34" charset="-122"/>
-                <a:cs typeface="Calibri" pitchFamily="34" charset="-120"/>
-              </a:rPr>
-              <a:t>Orden de construcción: Nevera → Lista (concurrencia) → Historial → Precios</a:t>
-            </a:r>
-            <a:endParaRPr lang="en-US" sz="1100" dirty="0"/>
+            <a:pPr algn="ctr" indent="0" marL="0">
+              <a:buNone/>
+            </a:pPr>
+            <a:r>
+              <a:rPr lang="en-US" sz="1150" dirty="0">
+                <a:solidFill>
+                  <a:srgbClr val="FFFFFF"/>
+                </a:solidFill>
+                <a:latin typeface="Calibri" pitchFamily="34" charset="0"/>
+                <a:ea typeface="Calibri" pitchFamily="34" charset="-122"/>
+                <a:cs typeface="Calibri" pitchFamily="34" charset="-120"/>
+              </a:rPr>
+              <a:t>sin monetización — el objetivo es adopción real, no ingresos</a:t>
+            </a:r>
+            <a:endParaRPr lang="en-US" sz="1150" dirty="0"/>
+          </a:p>
+        </p:txBody>
+      </p:sp>
+      <p:sp>
+        <p:nvSpPr>
+          <p:cNvPr id="27" name="Shape 24"/>
+          <p:cNvSpPr/>
+          <p:nvPr/>
+        </p:nvSpPr>
+        <p:spPr>
+          <a:xfrm>
+            <a:off x="6035040" y="3657600"/>
+            <a:ext cx="5577840" cy="1417320"/>
+          </a:xfrm>
+          <a:prstGeom prst="roundRect">
+            <a:avLst>
+              <a:gd name="adj" fmla="val 6452"/>
+            </a:avLst>
+          </a:prstGeom>
+          <a:solidFill>
+            <a:srgbClr val="F6E9D8"/>
+          </a:solidFill>
+          <a:ln w="12700">
+            <a:solidFill>
+              <a:srgbClr val="C9682B"/>
+            </a:solidFill>
+            <a:prstDash val="solid"/>
+          </a:ln>
+        </p:spPr>
+      </p:sp>
+      <p:sp>
+        <p:nvSpPr>
+          <p:cNvPr id="28" name="Text 25"/>
+          <p:cNvSpPr txBox="1"/>
+          <p:nvPr/>
+        </p:nvSpPr>
+        <p:spPr>
+          <a:xfrm>
+            <a:off x="6263640" y="3767328"/>
+            <a:ext cx="5120640" cy="1188720"/>
+          </a:xfrm>
+          <a:prstGeom prst="rect">
+            <a:avLst/>
+          </a:prstGeom>
+          <a:noFill/>
+          <a:ln/>
+        </p:spPr>
+        <p:txBody>
+          <a:bodyPr wrap="square" lIns="0" tIns="0" rIns="0" bIns="0" rtlCol="0" anchor="ctr"/>
+          <a:lstStyle/>
+          <a:p>
+            <a:pPr indent="0" marL="0">
+              <a:buNone/>
+            </a:pPr>
+            <a:r>
+              <a:rPr lang="en-US" sz="1150" i="1" dirty="0">
+                <a:solidFill>
+                  <a:srgbClr val="2E2119"/>
+                </a:solidFill>
+                <a:latin typeface="Calibri" pitchFamily="34" charset="0"/>
+                <a:ea typeface="Calibri" pitchFamily="34" charset="-122"/>
+                <a:cs typeface="Calibri" pitchFamily="34" charset="-120"/>
+              </a:rPr>
+              <a:t>Lectura honesta: el backend en Render "duerme" sin uso. Sigue habiendo un reto, pero ya no es económico — es conseguir que la gente use algo nuevo en vez de seguir con WhatsApp o papel, que ya conocen.</a:t>
+            </a:r>
+            <a:endParaRPr lang="en-US" sz="1150" dirty="0"/>
+          </a:p>
+        </p:txBody>
+      </p:sp>
+      <p:sp>
+        <p:nvSpPr>
+          <p:cNvPr id="29" name="Text 26"/>
+          <p:cNvSpPr txBox="1"/>
+          <p:nvPr/>
+        </p:nvSpPr>
+        <p:spPr>
+          <a:xfrm>
+            <a:off x="548640" y="5349240"/>
+            <a:ext cx="11094415" cy="274320"/>
+          </a:xfrm>
+          <a:prstGeom prst="rect">
+            <a:avLst/>
+          </a:prstGeom>
+          <a:noFill/>
+          <a:ln/>
+        </p:spPr>
+        <p:txBody>
+          <a:bodyPr wrap="square" lIns="0" tIns="0" rIns="0" bIns="0" rtlCol="0" anchor="ctr"/>
+          <a:lstStyle/>
+          <a:p>
+            <a:pPr indent="0" marL="0">
+              <a:buNone/>
+            </a:pPr>
+            <a:r>
+              <a:rPr lang="en-US" sz="1000" i="1" dirty="0">
+                <a:solidFill>
+                  <a:srgbClr val="8A7A6D"/>
+                </a:solidFill>
+                <a:latin typeface="Calibri" pitchFamily="34" charset="0"/>
+                <a:ea typeface="Calibri" pitchFamily="34" charset="-122"/>
+                <a:cs typeface="Calibri" pitchFamily="34" charset="-120"/>
+              </a:rPr>
+              <a:t>Decisión explícita (17/09): no se cobra nada a quien use la app, ni se adelanta dinero propio en hosting — coste fijo 0€, siempre.</a:t>
+            </a:r>
+            <a:endParaRPr lang="en-US" sz="1000" dirty="0"/>
           </a:p>
         </p:txBody>
       </p:sp>

--- a/docs/larder-presentacion.pptx
+++ b/docs/larder-presentacion.pptx
@@ -953,7 +953,7 @@
           <a:p>
             <a:r>
               <a:rPr lang="en-US" dirty="0"/>
-              <a:t>La fuente principal ya no es busqueda por IA sino conversaciones reales con estudiantes/gente joven que comparten piso (mismo perfil que el mercado objetivo). AnyList tiene reconocimiento inteligente al escribir y codigo de barras -casi tan rapido como Notas-, pero todo su valor extra apunta a cocinar. La fila de Out of Milk se genero con IA (IA-2) y no se pudo verificar como app real: se documenta la retractacion en vez de ocultarla.</a:t>
+              <a:t>Diapositiva simplificada 17/09: se quito la cita de Bring! sobre el Apple Watch (real pero irrelevante para el argumento, quedaba "cringe") y la nota de correccion de "Out of Milk" (queda documentada en ideacion.md y en la bitacora de IA, no hacia falta duplicarla en la diapositiva). En su lugar, el razonamiento real de por que se paso de resenas a conversaciones directas: buenas resenas no sirven para encontrar el hueco, malas resenas eran solo compatibilidad tecnica, no quejas de producto.</a:t>
             </a:r>
             <a:endParaRPr lang="en-US" dirty="0"/>
           </a:p>
@@ -5926,11 +5926,11 @@
         <p:spPr>
           <a:xfrm>
             <a:off x="548640" y="3977640"/>
-            <a:ext cx="11064240" cy="1280160"/>
+            <a:ext cx="11064240" cy="2423160"/>
           </a:xfrm>
           <a:prstGeom prst="roundRect">
             <a:avLst>
-              <a:gd name="adj" fmla="val 8571"/>
+              <a:gd name="adj" fmla="val 4528"/>
             </a:avLst>
           </a:prstGeom>
           <a:solidFill>
@@ -5954,8 +5954,8 @@
         </p:nvSpPr>
         <p:spPr>
           <a:xfrm>
-            <a:off x="777240" y="4096512"/>
-            <a:ext cx="5486400" cy="274320"/>
+            <a:off x="777240" y="4160520"/>
+            <a:ext cx="10607040" cy="320040"/>
           </a:xfrm>
           <a:prstGeom prst="rect">
             <a:avLst/>
@@ -5971,7 +5971,7 @@
               <a:buNone/>
             </a:pPr>
             <a:r>
-              <a:rPr lang="en-US" sz="1100" b="1" spc="100" kern="0" dirty="0">
+              <a:rPr lang="en-US" sz="1300" b="1" dirty="0">
                 <a:solidFill>
                   <a:srgbClr val="C9682B"/>
                 </a:solidFill>
@@ -5979,9 +5979,9 @@
                 <a:ea typeface="Calibri" pitchFamily="34" charset="-122"/>
                 <a:cs typeface="Calibri" pitchFamily="34" charset="-120"/>
               </a:rPr>
-              <a:t>Cita literal verificada (fuente secundaria)</a:t>
-            </a:r>
-            <a:endParaRPr lang="en-US" sz="1100" dirty="0"/>
+              <a:t>Por qué no nos basamos en reseñas de las apps</a:t>
+            </a:r>
+            <a:endParaRPr lang="en-US" sz="1300" dirty="0"/>
           </a:p>
         </p:txBody>
       </p:sp>
@@ -5993,24 +5993,27 @@
         </p:nvSpPr>
         <p:spPr>
           <a:xfrm>
-            <a:off x="777240" y="4370832"/>
-            <a:ext cx="10607040" cy="502920"/>
-          </a:xfrm>
-          <a:prstGeom prst="rect">
-            <a:avLst/>
-          </a:prstGeom>
-          <a:noFill/>
-          <a:ln/>
-        </p:spPr>
-        <p:txBody>
-          <a:bodyPr wrap="square" lIns="0" tIns="0" rIns="0" bIns="0" rtlCol="0" anchor="ctr"/>
-          <a:lstStyle/>
-          <a:p>
-            <a:pPr indent="0" marL="0">
-              <a:buNone/>
-            </a:pPr>
-            <a:r>
-              <a:rPr lang="en-US" sz="1250" i="1" dirty="0">
+            <a:off x="777240" y="4526280"/>
+            <a:ext cx="10607040" cy="1783080"/>
+          </a:xfrm>
+          <a:prstGeom prst="rect">
+            <a:avLst/>
+          </a:prstGeom>
+          <a:noFill/>
+          <a:ln/>
+        </p:spPr>
+        <p:txBody>
+          <a:bodyPr wrap="square" lIns="0" tIns="0" rIns="0" bIns="0" rtlCol="0" anchor="t"/>
+          <a:lstStyle/>
+          <a:p>
+            <a:pPr indent="0" marL="0">
+              <a:spcAft>
+                <a:spcPts val="800"/>
+              </a:spcAft>
+              <a:buNone/>
+            </a:pPr>
+            <a:r>
+              <a:rPr lang="en-US" sz="1250" dirty="0">
                 <a:solidFill>
                   <a:srgbClr val="2E2119"/>
                 </a:solidFill>
@@ -6018,118 +6021,19 @@
                 <a:ea typeface="Calibri" pitchFamily="34" charset="-122"/>
                 <a:cs typeface="Calibri" pitchFamily="34" charset="-120"/>
               </a:rPr>
-              <a:t>"El icono de la aplicación aparece marcado como comprado en el Apple Watch pero no llega a descargarse ni a instalarse."</a:t>
+              <a:t>Las reseñas buenas no sirven para encontrar un hueco — obviamente no hablan de lo que falta. </a:t>
             </a:r>
             <a:endParaRPr lang="en-US" sz="1250" dirty="0"/>
           </a:p>
-        </p:txBody>
-      </p:sp>
-      <p:sp>
-        <p:nvSpPr>
-          <p:cNvPr id="11" name="Text 7"/>
-          <p:cNvSpPr txBox="1"/>
-          <p:nvPr/>
-        </p:nvSpPr>
-        <p:spPr>
-          <a:xfrm>
-            <a:off x="777240" y="4864608"/>
-            <a:ext cx="10607040" cy="320040"/>
-          </a:xfrm>
-          <a:prstGeom prst="rect">
-            <a:avLst/>
-          </a:prstGeom>
-          <a:noFill/>
-          <a:ln/>
-        </p:spPr>
-        <p:txBody>
-          <a:bodyPr wrap="square" lIns="0" tIns="0" rIns="0" bIns="0" rtlCol="0" anchor="ctr"/>
-          <a:lstStyle/>
-          <a:p>
-            <a:pPr indent="0" marL="0">
-              <a:buNone/>
-            </a:pPr>
-            <a:r>
-              <a:rPr lang="en-US" sz="1100" dirty="0">
-                <a:solidFill>
-                  <a:srgbClr val="8A7A6D"/>
-                </a:solidFill>
-                <a:latin typeface="Calibri" pitchFamily="34" charset="0"/>
-                <a:ea typeface="Calibri" pitchFamily="34" charset="-122"/>
-                <a:cs typeface="Calibri" pitchFamily="34" charset="-120"/>
-              </a:rPr>
-              <a:t>— Reseña real verificada de Bring! Grocery Shopping List, App Store</a:t>
-            </a:r>
-            <a:endParaRPr lang="en-US" sz="1100" dirty="0"/>
-          </a:p>
-        </p:txBody>
-      </p:sp>
-      <p:sp>
-        <p:nvSpPr>
-          <p:cNvPr id="12" name="Shape 8"/>
-          <p:cNvSpPr/>
-          <p:nvPr/>
-        </p:nvSpPr>
-        <p:spPr>
-          <a:xfrm>
-            <a:off x="548640" y="5440680"/>
-            <a:ext cx="11064240" cy="960120"/>
-          </a:xfrm>
-          <a:prstGeom prst="roundRect">
-            <a:avLst>
-              <a:gd name="adj" fmla="val 9524"/>
-            </a:avLst>
-          </a:prstGeom>
-          <a:solidFill>
-            <a:srgbClr val="F6E9D8"/>
-          </a:solidFill>
-          <a:ln w="12700">
-            <a:solidFill>
-              <a:srgbClr val="C9682B"/>
-            </a:solidFill>
-            <a:prstDash val="solid"/>
-          </a:ln>
-        </p:spPr>
-      </p:sp>
-      <p:sp>
-        <p:nvSpPr>
-          <p:cNvPr id="13" name="Text 9"/>
-          <p:cNvSpPr txBox="1"/>
-          <p:nvPr/>
-        </p:nvSpPr>
-        <p:spPr>
-          <a:xfrm>
-            <a:off x="777240" y="5532120"/>
-            <a:ext cx="10607040" cy="822960"/>
-          </a:xfrm>
-          <a:prstGeom prst="rect">
-            <a:avLst/>
-          </a:prstGeom>
-          <a:noFill/>
-          <a:ln/>
-        </p:spPr>
-        <p:txBody>
-          <a:bodyPr wrap="square" lIns="0" tIns="0" rIns="0" bIns="0" rtlCol="0" anchor="ctr"/>
-          <a:lstStyle/>
-          <a:p>
-            <a:pPr indent="0" marL="0">
-              <a:buNone/>
-            </a:pPr>
-            <a:r>
-              <a:rPr lang="en-US" sz="1200" b="1" dirty="0">
-                <a:solidFill>
-                  <a:srgbClr val="C9682B"/>
-                </a:solidFill>
-                <a:latin typeface="Calibri" pitchFamily="34" charset="0"/>
-                <a:ea typeface="Calibri" pitchFamily="34" charset="-122"/>
-                <a:cs typeface="Calibri" pitchFamily="34" charset="-120"/>
-              </a:rPr>
-              <a:t>Corrección honesta:  </a:t>
-            </a:r>
-            <a:pPr indent="0" marL="0">
-              <a:buNone/>
-            </a:pPr>
-            <a:r>
-              <a:rPr lang="en-US" sz="1200" dirty="0">
+          <a:p>
+            <a:pPr indent="0" marL="0">
+              <a:spcAft>
+                <a:spcPts val="800"/>
+              </a:spcAft>
+              <a:buNone/>
+            </a:pPr>
+            <a:r>
+              <a:rPr lang="en-US" sz="1250" dirty="0">
                 <a:solidFill>
                   <a:srgbClr val="2E2119"/>
                 </a:solidFill>
@@ -6137,9 +6041,26 @@
                 <a:ea typeface="Calibri" pitchFamily="34" charset="-122"/>
                 <a:cs typeface="Calibri" pitchFamily="34" charset="-120"/>
               </a:rPr>
-              <a:t>una tercera app ("Out of Milk") encontrada por búsqueda IA no superó la verificación real y se retiró del análisis, en vez de darse por buena.</a:t>
-            </a:r>
-            <a:endParaRPr lang="en-US" sz="1200" dirty="0"/>
+              <a:t>Las malas, casi todas, eran quejas de compatibilidad técnica (se cuelga, no sincroniza...), no gente pidiendo una función o diciendo que el enfoque no encajaba con su forma de comprar. </a:t>
+            </a:r>
+            <a:endParaRPr lang="en-US" sz="1250" dirty="0"/>
+          </a:p>
+          <a:p>
+            <a:pPr indent="0" marL="0">
+              <a:buNone/>
+            </a:pPr>
+            <a:r>
+              <a:rPr lang="en-US" sz="1250" dirty="0">
+                <a:solidFill>
+                  <a:srgbClr val="2E2119"/>
+                </a:solidFill>
+                <a:latin typeface="Calibri" pitchFamily="34" charset="0"/>
+                <a:ea typeface="Calibri" pitchFamily="34" charset="-122"/>
+                <a:cs typeface="Calibri" pitchFamily="34" charset="-120"/>
+              </a:rPr>
+              <a:t>Por eso se pasó a hablar directamente con quien vive el problema (estudiantes y gente joven) — la vía que el propio guion marca como "la más cara y la más fiable de las tres".</a:t>
+            </a:r>
+            <a:endParaRPr lang="en-US" sz="1250" dirty="0"/>
           </a:p>
         </p:txBody>
       </p:sp>

--- a/docs/larder-presentacion.pptx
+++ b/docs/larder-presentacion.pptx
@@ -1041,7 +1041,7 @@
           <a:p>
             <a:r>
               <a:rPr lang="en-US" dirty="0"/>
-              <a:t>Diapositiva nueva (17/09) a peticion de Nadia: anticipar la objecion de un desarrollador de AnyList antes de que la haga alguien en la defensa. El argumento se vuelve en su contra -- si papel y boli tampoco tienen esas funciones y aun asi ganan en uso real, lo que anaden esas apps es complejidad, no lo que faltaba. Ademas el enfoque de recetas encaja con un publico mas asentado (ej. una madre de familia), no con el estudiante medio -- el meal prep de moda entre jovenes busca cocinar MENOS, no explorar recetas. Conclusion: ni siquiera cumplen bien la funcion de lista, porque el paso intermedio da pereza.</a:t>
+              <a:t>Diapositiva nueva (17/09) a peticion de Nadia: anticipar la objecion de un desarrollador de AnyList antes de que la haga alguien en la defensa. El argumento se vuelve en su contra -- si papel y boli tampoco tienen esas funciones y aun asi ganan en uso real, lo que anaden esas apps es complejidad, no lo que faltaba. Ademas el enfoque de recetas encaja con un publico mas asentado (ej. una madre de familia), no con el estudiante medio -- el meal prep de moda entre jovenes busca cocinar MENOS, no explorar recetas. Actualizado con una respuesta real de la encuesta (llegada 17/09, ver n=35) que confirma esto sin que se preguntara: compra pensando en cocinar algo elaborado, nunca lo hace, la comida se pudre. Conclusion: ni siquiera cumplen bien la funcion de lista, porque el paso intermedio da pereza.</a:t>
             </a:r>
             <a:endParaRPr lang="en-US" dirty="0"/>
           </a:p>
@@ -1217,7 +1217,7 @@
           <a:p>
             <a:r>
               <a:rPr lang="en-US" dirty="0"/>
-              <a:t>RESULTADOS FINALES -- encuesta cerrada el 17/09/2026, n=32 (2 envios duplicados por accidente descartados: "las cantidades" y la broma "Amor y Paz", cada par contado una vez). El dato mas fuerte de toda la encuesta: 0/32 usa una app HOY como metodo (Pregunta 3) -- las 2 que probaron una app (Bring!, "Notas") la abandonaron, sin excepcion, en las 4 tandas de la recogida. El "metodo ganador" (Papel vs Notas) nunca se asento -- cambio de lider en cada tanda por 1-2 respuestas -- es un empate tecnico, se documenta asi en vez de forzar un ganador. El dato conjunto (53%, 17/32) se mantuvo estable por encima de la mitad en las ultimas tres tandas (58%-&gt;55%-&gt;53%) -- la senal mas solida de toda la encuesta. Correccion 17/09: la cita de Bring! no fue espontanea -- la Pregunta 7 tiene un seguimiento explicito ("¿cual, y por que la dejaste?") que se activa solo si contestas que si probaste una app; se corrigio el texto para no decir "sin que se le pregunte".</a:t>
+              <a:t>n=35 a fecha 17/09/2026 (el formulario sigue tecnicamente abierto en Vercel; "cerrada" en el documento significa "version usada para la entrega", no "imposible que llegue alguna mas"). El dato mas fuerte de toda la encuesta: 0/35 usa una app HOY como metodo (Pregunta 3) -- las 3 que probaron una app la abandonaron, sin excepcion. Novedad de esta tanda: una TERCERA persona probo Bring! y lo dejo, pero por un motivo nuevo (pereza/friccion, no cooperacion) -- dos motivos de abandono distintos apuntando al mismo sitio. El "metodo ganador" (Papel vs Notas) nunca se asento -- empate tecnico. El dato conjunto (54%, 19/35) se mantiene estable por encima de la mitad en toda la recogida.</a:t>
             </a:r>
             <a:endParaRPr lang="en-US" dirty="0"/>
           </a:p>
@@ -1305,7 +1305,7 @@
           <a:p>
             <a:r>
               <a:rPr lang="en-US" dirty="0"/>
-              <a:t>RESULTADOS FINALES, n=32 (encuesta cerrada 17/09/2026; 2 duplicados por envio accidental descartados). Categorizacion: "no se quien compro que" y "llevar la cuenta de quien compro que antes" cuentan para AMBAS columnas (coop + tracker de gastos), "no saber que quieren los otros"/"comen mis cosas"/"compran cosas que no quiero"/"people eating my food"/"dudar en comprar algo y que se lo coma otro" es coop puro, "no participan/tardan en pagar" es tracker de gastos puro. Cooperacion termino como el tema mas repetido con diferencia (8/32, 25%) en toda la recogida. Correccion 17/09: separamos "caducidad/comida que se estropea" (3 menciones, entra en el plan de construccion con un campo de dias de frescura por categoria en nuestra propia base de datos, sin Odoo) de "se acaba y nadie avisa" (1 mencion, esta se resuelve gratis solo con que Fridge sea compartida -- ya no dependemos de logica de "aviso de stock bajo"). Las menciones de precio (2) siguen fuera de esta diapositiva por espacio -- estan en ideacion.md.</a:t>
+              <a:t>n=35 a fecha 17/09/2026 (formulario sigue tecnicamente abierto). Categorizacion: "no se quien compro que" y "llevar la cuenta de quien compro que antes" cuentan para AMBAS columnas (coop + tracker de gastos), "no saber que quieren los otros"/"comen mis cosas"/"compran cosas que no quiero"/"people eating my food"/"dudar en comprar algo y que se lo coma otro" es coop puro, "no participan/tardan en pagar" es tracker de gastos puro. Cooperacion sigue como el tema mas repetido (8/35, 23%). Las 3 respuestas nuevas no anadieron menciones de coop/gasto -- dos son sobre comida que se pudre (movidas a la diapositiva de recetas, donde encajan mejor) y una sobre "tener que mirar que falta". "Caducidad/comida que se estropea" (3 menciones) entra en el plan de construccion; "se acaba y nadie avisa" (1 mencion) se resuelve gratis con Fridge compartida. Las menciones de precio (2) siguen fuera de esta diapositiva por espacio -- estan en ideacion.md.</a:t>
             </a:r>
             <a:endParaRPr lang="en-US" dirty="0"/>
           </a:p>
@@ -6575,10 +6575,13 @@
           <a:lstStyle/>
           <a:p>
             <a:pPr indent="0" marL="0">
-              <a:buNone/>
-            </a:pPr>
-            <a:r>
-              <a:rPr lang="en-US" sz="1250" dirty="0">
+              <a:spcAft>
+                <a:spcPts val="600"/>
+              </a:spcAft>
+              <a:buNone/>
+            </a:pPr>
+            <a:r>
+              <a:rPr lang="en-US" sz="1150" dirty="0">
                 <a:solidFill>
                   <a:srgbClr val="2E2119"/>
                 </a:solidFill>
@@ -6586,9 +6589,40 @@
                 <a:ea typeface="Calibri" pitchFamily="34" charset="-122"/>
                 <a:cs typeface="Calibri" pitchFamily="34" charset="-120"/>
               </a:rPr>
-              <a:t>El estudiante medio independizado no es un apasionado de la cocina. La tendencia joven (meal prep) va al revés: tuppers básicos para toda la semana, para cocinar lo MÍNIMO posible.</a:t>
-            </a:r>
-            <a:endParaRPr lang="en-US" sz="1250" dirty="0"/>
+              <a:t>El estudiante medio independizado no es un apasionado de la cocina. La tendencia joven (meal prep) va al revés: tuppers básicos para toda la semana, para cocinar lo MÍNIMO posible. </a:t>
+            </a:r>
+            <a:endParaRPr lang="en-US" sz="1150" dirty="0"/>
+          </a:p>
+          <a:p>
+            <a:pPr indent="0" marL="0">
+              <a:buNone/>
+            </a:pPr>
+            <a:r>
+              <a:rPr lang="en-US" sz="1150" b="1" dirty="0">
+                <a:solidFill>
+                  <a:srgbClr val="C9682B"/>
+                </a:solidFill>
+                <a:latin typeface="Calibri" pitchFamily="34" charset="0"/>
+                <a:ea typeface="Calibri" pitchFamily="34" charset="-122"/>
+                <a:cs typeface="Calibri" pitchFamily="34" charset="-120"/>
+              </a:rPr>
+              <a:t>Confirmado en la encuesta: </a:t>
+            </a:r>
+            <a:pPr indent="0" marL="0">
+              <a:buNone/>
+            </a:pPr>
+            <a:r>
+              <a:rPr lang="en-US" sz="1150" i="1" dirty="0">
+                <a:solidFill>
+                  <a:srgbClr val="2E2119"/>
+                </a:solidFill>
+                <a:latin typeface="Calibri" pitchFamily="34" charset="0"/>
+                <a:ea typeface="Calibri" pitchFamily="34" charset="-122"/>
+                <a:cs typeface="Calibri" pitchFamily="34" charset="-120"/>
+              </a:rPr>
+              <a:t>"compro cosas pensando en hacer comidas elaboradas pero nunca las llego a hacer, y acaban pudriéndose".</a:t>
+            </a:r>
+            <a:endParaRPr lang="en-US" sz="1150" dirty="0"/>
           </a:p>
         </p:txBody>
       </p:sp>
@@ -7337,7 +7371,7 @@
                 <a:ea typeface="Cambria" pitchFamily="34" charset="-122"/>
                 <a:cs typeface="Cambria" pitchFamily="34" charset="-120"/>
               </a:rPr>
-              <a:t>La encuesta confirma el hueco (n=32, cerrada)</a:t>
+              <a:t>La encuesta confirma el hueco (n=35)</a:t>
             </a:r>
             <a:endParaRPr lang="en-US" sz="2800" dirty="0"/>
           </a:p>
@@ -7376,7 +7410,7 @@
                 <a:ea typeface="Calibri" pitchFamily="34" charset="-122"/>
                 <a:cs typeface="Calibri" pitchFamily="34" charset="-120"/>
               </a:rPr>
-              <a:t>Encuesta bilingüe (ES/EN), 9 preguntas sobre hechos del último mes — no opiniones sobre una app futura. Resultados finales: 32 respuestas únicas, cerrada el 17/09/2026.</a:t>
+              <a:t>Encuesta bilingüe (ES/EN), 9 preguntas sobre hechos del último mes — no opiniones sobre una app futura. 35 respuestas únicas a fecha 17/09/2026.</a:t>
             </a:r>
             <a:endParaRPr lang="en-US" sz="1000" dirty="0"/>
           </a:p>
@@ -7437,7 +7471,7 @@
                 <a:ea typeface="Cambria" pitchFamily="34" charset="-122"/>
                 <a:cs typeface="Cambria" pitchFamily="34" charset="-120"/>
               </a:rPr>
-              <a:t>0/32</a:t>
+              <a:t>0/35</a:t>
             </a:r>
             <a:endParaRPr lang="en-US" sz="3000" dirty="0"/>
           </a:p>
@@ -7476,7 +7510,7 @@
                 <a:ea typeface="Calibri" pitchFamily="34" charset="-122"/>
                 <a:cs typeface="Calibri" pitchFamily="34" charset="-120"/>
               </a:rPr>
-              <a:t>usa hoy una app específica como método — aunque 2 personas SÍ la probaron alguna vez (ver abajo)</a:t>
+              <a:t>usa hoy una app específica como método — aunque 3 personas SÍ la probaron alguna vez (ver abajo)</a:t>
             </a:r>
             <a:endParaRPr lang="en-US" sz="1000" dirty="0"/>
           </a:p>
@@ -7537,7 +7571,7 @@
                 <a:ea typeface="Cambria" pitchFamily="34" charset="-122"/>
                 <a:cs typeface="Cambria" pitchFamily="34" charset="-120"/>
               </a:rPr>
-              <a:t>72%</a:t>
+              <a:t>74%</a:t>
             </a:r>
             <a:endParaRPr lang="en-US" sz="3000" dirty="0"/>
           </a:p>
@@ -7637,7 +7671,7 @@
                 <a:ea typeface="Cambria" pitchFamily="34" charset="-122"/>
                 <a:cs typeface="Cambria" pitchFamily="34" charset="-120"/>
               </a:rPr>
-              <a:t>75%</a:t>
+              <a:t>74%</a:t>
             </a:r>
             <a:endParaRPr lang="en-US" sz="3000" dirty="0"/>
           </a:p>
@@ -7715,7 +7749,7 @@
                 <a:ea typeface="Calibri" pitchFamily="34" charset="-122"/>
                 <a:cs typeface="Calibri" pitchFamily="34" charset="-120"/>
               </a:rPr>
-              <a:t>El 53% (17 de 32) sufrió ambas cosas en el mismo mes — el mismo tiempo y dinero (260-520€/año) de la frase del dolor, confirmado con datos.</a:t>
+              <a:t>El 54% (19 de 35) sufrió ambas cosas en el mismo mes — el mismo tiempo y dinero (260-520€/año) de la frase del dolor, confirmado con datos.</a:t>
             </a:r>
             <a:endParaRPr lang="en-US" sz="1100" dirty="0"/>
           </a:p>
@@ -7905,7 +7939,7 @@
                 <a:ea typeface="Calibri" pitchFamily="34" charset="-122"/>
                 <a:cs typeface="Calibri" pitchFamily="34" charset="-120"/>
               </a:rPr>
-              <a:t>12</a:t>
+              <a:t>13</a:t>
             </a:r>
             <a:endParaRPr lang="en-US" sz="1100" dirty="0"/>
           </a:p>
@@ -7981,7 +8015,7 @@
         <p:spPr>
           <a:xfrm>
             <a:off x="2788920" y="3986784"/>
-            <a:ext cx="3268980" cy="219456"/>
+            <a:ext cx="3291840" cy="219456"/>
           </a:xfrm>
           <a:prstGeom prst="roundRect">
             <a:avLst>
@@ -8027,7 +8061,7 @@
                 <a:ea typeface="Calibri" pitchFamily="34" charset="-122"/>
                 <a:cs typeface="Calibri" pitchFamily="34" charset="-120"/>
               </a:rPr>
-              <a:t>11</a:t>
+              <a:t>12</a:t>
             </a:r>
             <a:endParaRPr lang="en-US" sz="1100" dirty="0"/>
           </a:p>
@@ -8103,7 +8137,7 @@
         <p:spPr>
           <a:xfrm>
             <a:off x="2788920" y="4297680"/>
-            <a:ext cx="2377440" cy="219456"/>
+            <a:ext cx="2468880" cy="219456"/>
           </a:xfrm>
           <a:prstGeom prst="roundRect">
             <a:avLst>
@@ -8149,7 +8183,7 @@
                 <a:ea typeface="Calibri" pitchFamily="34" charset="-122"/>
                 <a:cs typeface="Calibri" pitchFamily="34" charset="-120"/>
               </a:rPr>
-              <a:t>8</a:t>
+              <a:t>9</a:t>
             </a:r>
             <a:endParaRPr lang="en-US" sz="1100" dirty="0"/>
           </a:p>
@@ -8225,7 +8259,7 @@
         <p:spPr>
           <a:xfrm>
             <a:off x="2788920" y="4608576"/>
-            <a:ext cx="297180" cy="219456"/>
+            <a:ext cx="274320" cy="219456"/>
           </a:xfrm>
           <a:prstGeom prst="roundRect">
             <a:avLst>
@@ -8410,7 +8444,7 @@
                 <a:ea typeface="Calibri" pitchFamily="34" charset="-122"/>
                 <a:cs typeface="Calibri" pitchFamily="34" charset="-120"/>
               </a:rPr>
-              <a:t>↑ 2 personas la probaron alguna vez (Pregunta 7) — pero 0/32 la usa hoy: la abandonaron</a:t>
+              <a:t>↑ 3 personas la probaron alguna vez (Pregunta 7) — pero 0/35 la usa hoy: la abandonaron</a:t>
             </a:r>
             <a:endParaRPr lang="en-US" sz="950" dirty="0"/>
           </a:p>
@@ -8471,7 +8505,7 @@
               <a:buNone/>
             </a:pPr>
             <a:r>
-              <a:rPr lang="en-US" sz="1150" b="1" dirty="0">
+              <a:rPr lang="en-US" sz="1100" b="1" dirty="0">
                 <a:solidFill>
                   <a:srgbClr val="C9682B"/>
                 </a:solidFill>
@@ -8481,14 +8515,14 @@
               </a:rPr>
               <a:t>Las apps no son el problema — la retención sí.  </a:t>
             </a:r>
-            <a:endParaRPr lang="en-US" sz="1150" dirty="0"/>
-          </a:p>
-          <a:p>
-            <a:pPr indent="0" marL="0">
-              <a:buNone/>
-            </a:pPr>
-            <a:r>
-              <a:rPr lang="en-US" sz="1150" dirty="0">
+            <a:endParaRPr lang="en-US" sz="1100" dirty="0"/>
+          </a:p>
+          <a:p>
+            <a:pPr indent="0" marL="0">
+              <a:buNone/>
+            </a:pPr>
+            <a:r>
+              <a:rPr lang="en-US" sz="1100" dirty="0">
                 <a:solidFill>
                   <a:srgbClr val="2E2119"/>
                 </a:solidFill>
@@ -8496,9 +8530,9 @@
                 <a:ea typeface="Calibri" pitchFamily="34" charset="-122"/>
                 <a:cs typeface="Calibri" pitchFamily="34" charset="-120"/>
               </a:rPr>
-              <a:t>Bring! y AnyList llevan años disponibles y son razonablemente buenas (estado del arte). 2 de 32 personas confirman haberlas probado — pero ninguna las usa hoy. A quien probó Bring! se le preguntó por qué la dejó, y respondió: "porque si no colaboran los demás... pues mal vamos". El hueco no está en construir "una app más" — está en resolver por qué las que existen no retienen ni a quien sí las prueba.</a:t>
-            </a:r>
-            <a:endParaRPr lang="en-US" sz="1150" dirty="0"/>
+              <a:t>Bring! y AnyList llevan años disponibles y son razonablemente buenas (estado del arte). 3 de 35 personas confirman haberlas probado — pero ninguna las usa hoy. Dos de ellas probaron Bring! y lo dejaron por motivos distintos: una por falta de cooperación de sus compañeros, otra "porque me acaba dando pereza usarla". El hueco no está en construir "una app más" — está en resolver por qué las que existen no retienen ni a quien sí las prueba.</a:t>
+            </a:r>
+            <a:endParaRPr lang="en-US" sz="1100" dirty="0"/>
           </a:p>
         </p:txBody>
       </p:sp>
@@ -8796,7 +8830,7 @@
                 <a:ea typeface="Calibri" pitchFamily="34" charset="-122"/>
                 <a:cs typeface="Calibri" pitchFamily="34" charset="-120"/>
               </a:rPr>
-              <a:t>8 de 32 personas (25%) — el tema más repetido, sin que se les preguntara</a:t>
+              <a:t>8 de 35 personas (23%) — el tema más repetido, sin que se les preguntara</a:t>
             </a:r>
             <a:endParaRPr lang="en-US" sz="1050" dirty="0"/>
           </a:p>
@@ -9051,7 +9085,7 @@
                 <a:ea typeface="Calibri" pitchFamily="34" charset="-122"/>
                 <a:cs typeface="Calibri" pitchFamily="34" charset="-120"/>
               </a:rPr>
-              <a:t>3 menciones espontáneas + 12/32 (38%) dice en la Pregunta 8 que no llevan cuenta</a:t>
+              <a:t>3 menciones espontáneas + 12/35 (34%) dice en la Pregunta 8 que no llevan cuenta</a:t>
             </a:r>
             <a:endParaRPr lang="en-US" sz="1050" dirty="0"/>
           </a:p>

--- a/docs/larder-presentacion.pptx
+++ b/docs/larder-presentacion.pptx
@@ -1393,7 +1393,7 @@
           <a:p>
             <a:r>
               <a:rPr lang="en-US" dirty="0"/>
-              <a:t>Se amplio el segmento objetivo a estudiantes+parejas+cualquiera que comparta gastos. Al no encontrar un desglose fiable para ese cruce en A Coruña, el mercado objetivo se iguala al accesible, y se documenta honestamente la limitacion de la busqueda.</a:t>
+              <a:t>Publico fijado como estudiantes (18/09): el embudo ahora parte de la UDC (&gt;13.300) en vez de hogares genericos. El mercado objetivo es directamente ~650 pisos, no "coincide con el accesible". Los ~99.700 hogares de A Coruna quedan solo como techo de contexto.</a:t>
             </a:r>
             <a:endParaRPr lang="en-US" dirty="0"/>
           </a:p>
@@ -9584,7 +9584,7 @@
               <a:buNone/>
             </a:pPr>
             <a:r>
-              <a:rPr lang="en-US" sz="2000" b="1" dirty="0">
+              <a:rPr lang="en-US" sz="3400" b="1" dirty="0">
                 <a:solidFill>
                   <a:srgbClr val="2E2119"/>
                 </a:solidFill>
@@ -9592,26 +9592,9 @@
                 <a:ea typeface="Cambria" pitchFamily="34" charset="-122"/>
                 <a:cs typeface="Cambria" pitchFamily="34" charset="-120"/>
               </a:rPr>
-              <a:t>Hogares de</a:t>
-            </a:r>
-            <a:endParaRPr lang="en-US" sz="2000" dirty="0"/>
-          </a:p>
-          <a:p>
-            <a:pPr indent="0" marL="0">
-              <a:buNone/>
-            </a:pPr>
-            <a:r>
-              <a:rPr lang="en-US" sz="2000" b="1" dirty="0">
-                <a:solidFill>
-                  <a:srgbClr val="2E2119"/>
-                </a:solidFill>
-                <a:latin typeface="Cambria" pitchFamily="34" charset="0"/>
-                <a:ea typeface="Cambria" pitchFamily="34" charset="-122"/>
-                <a:cs typeface="Cambria" pitchFamily="34" charset="-120"/>
-              </a:rPr>
-              <a:t>España 2+ pers.</a:t>
-            </a:r>
-            <a:endParaRPr lang="en-US" sz="2000" dirty="0"/>
+              <a:t>&gt; 13.300</a:t>
+            </a:r>
+            <a:endParaRPr lang="en-US" sz="3400" dirty="0"/>
           </a:p>
         </p:txBody>
       </p:sp>
@@ -9648,7 +9631,7 @@
                 <a:ea typeface="Calibri" pitchFamily="34" charset="-122"/>
                 <a:cs typeface="Calibri" pitchFamily="34" charset="-120"/>
               </a:rPr>
-              <a:t>Tamaño medio 2,50 pers./hogar (INE 2023)</a:t>
+              <a:t>Estudiantes matriculados en la UDC (curso 2025-26, ambos campus)</a:t>
             </a:r>
             <a:endParaRPr lang="en-US" sz="1050" dirty="0"/>
           </a:p>
@@ -9755,7 +9738,7 @@
                 <a:ea typeface="Cambria" pitchFamily="34" charset="-122"/>
                 <a:cs typeface="Cambria" pitchFamily="34" charset="-120"/>
               </a:rPr>
-              <a:t>≈ 99.700</a:t>
+              <a:t>≈ 4.123</a:t>
             </a:r>
             <a:endParaRPr lang="en-US" sz="3400" dirty="0"/>
           </a:p>
@@ -9794,7 +9777,7 @@
                 <a:ea typeface="Calibri" pitchFamily="34" charset="-122"/>
                 <a:cs typeface="Calibri" pitchFamily="34" charset="-120"/>
               </a:rPr>
-              <a:t>249.261 hab. ÷ 2,50 pers./hogar (INE/IGE 2024)</a:t>
+              <a:t>31% cambia de ciudad para estudiar — % nacional aplicado a la UDC (Fundación CYD)</a:t>
             </a:r>
             <a:endParaRPr lang="en-US" sz="1050" dirty="0"/>
           </a:p>
@@ -9901,7 +9884,7 @@
                 <a:ea typeface="Cambria" pitchFamily="34" charset="-122"/>
                 <a:cs typeface="Cambria" pitchFamily="34" charset="-120"/>
               </a:rPr>
-              <a:t>≈ 99.700</a:t>
+              <a:t>≈ 650 pisos</a:t>
             </a:r>
             <a:endParaRPr lang="en-US" sz="3400" dirty="0"/>
           </a:p>
@@ -9940,7 +9923,7 @@
                 <a:ea typeface="Calibri" pitchFamily="34" charset="-122"/>
                 <a:cs typeface="Calibri" pitchFamily="34" charset="-120"/>
               </a:rPr>
-              <a:t>Coincide con el accesible — ver nota abajo</a:t>
+              <a:t>55% de esos comparte piso ÷ 3,5 pers./piso de media</a:t>
             </a:r>
             <a:endParaRPr lang="en-US" sz="1050" dirty="0"/>
           </a:p>
@@ -10006,7 +9989,7 @@
                 <a:ea typeface="Calibri" pitchFamily="34" charset="-122"/>
                 <a:cs typeface="Calibri" pitchFamily="34" charset="-120"/>
               </a:rPr>
-              <a:t>Nota honesta sobre la búsqueda:  </a:t>
+              <a:t>Margen de error reconocido:  </a:t>
             </a:r>
             <a:endParaRPr lang="en-US" sz="1200" dirty="0"/>
           </a:p>
@@ -10026,7 +10009,7 @@
                 <a:ea typeface="Calibri" pitchFamily="34" charset="-122"/>
                 <a:cs typeface="Calibri" pitchFamily="34" charset="-120"/>
               </a:rPr>
-              <a:t>no se encontró un desglose público fiable de "hogares no familiares/parejas sin hijos" a nivel de A Coruña — es un resultado válido en sí mismo, no un dato inventado.</a:t>
+              <a:t>la cifra de ≈650 pisos encadena 3 supuestos (% que cambia de ciudad, % que comparte piso, tamaño medio del piso) — es una estimación gruesa, no un conteo exacto. Deja fuera a jóvenes trabajadores que comparten piso y sufren el mismo problema, pero no salen en estas estadísticas.</a:t>
             </a:r>
             <a:endParaRPr lang="en-US" sz="1200" dirty="0"/>
           </a:p>
@@ -10043,7 +10026,7 @@
                 <a:ea typeface="Calibri" pitchFamily="34" charset="-122"/>
                 <a:cs typeface="Calibri" pitchFamily="34" charset="-120"/>
               </a:rPr>
-              <a:t>Suelo verificable:  </a:t>
+              <a:t>Para contexto, no como objetivo:  </a:t>
             </a:r>
             <a:endParaRPr lang="en-US" sz="1200" dirty="0"/>
           </a:p>
@@ -10060,7 +10043,7 @@
                 <a:ea typeface="Calibri" pitchFamily="34" charset="-122"/>
                 <a:cs typeface="Calibri" pitchFamily="34" charset="-120"/>
               </a:rPr>
-              <a:t>≈ 650 pisos de estudiantes en A Coruña (UDC &gt;13.300 matriculados · 31% cambia de ciudad · 55% comparte piso — Fundación CYD).</a:t>
+              <a:t>A Coruña tiene ≈99.700 hogares de 2+ personas — el techo si algún día se sirviera a cualquier hogar, no solo a estudiantes.</a:t>
             </a:r>
             <a:endParaRPr lang="en-US" sz="1200" dirty="0"/>
           </a:p>

--- a/docs/larder-presentacion.pptx
+++ b/docs/larder-presentacion.pptx
@@ -601,7 +601,7 @@
           <a:p>
             <a:r>
               <a:rPr lang="en-US" dirty="0"/>
-              <a:t>Actualizado 17/09 tras el giro de producto: se retira Odoo (Prices se calcula sobre nuestro propio historial de compras, no un catalogo externo que alguien tendria que mantener a mano). Se decide construir para esta entrega lo que antes era "P2 hipotetico" (lectura de tickets con Gemini, prediccion de consumo) -- la columna de la derecha se queda solo con lo que de verdad no compensa construir nunca en este proyecto. Nadie nos elegiria por construir facturacion o cobro con tarjeta propios; si por como llevamos nevera y lista compartida. Orden de construccion: una pantalla completa antes de abrir la siguiente -- eso no cambia aunque el alcance de cada pantalla haya crecido.</a:t>
+              <a:t>Actualizado 17/09 tras el giro de producto: se retira Odoo (Prices se calcula sobre nuestro propio historial de compras, no un catalogo externo que alguien tendria que mantener a mano). Se decide construir para esta entrega lo que antes era "P2 hipotetico" (lectura de tickets con Groq, prediccion de consumo) -- la columna de la derecha se queda solo con lo que de verdad no compensa construir nunca en este proyecto. Nadie nos elegiria por construir facturacion o cobro con tarjeta propios; si por como llevamos nevera y lista compartida. Orden de construccion: una pantalla completa antes de abrir la siguiente -- eso no cambia aunque el alcance de cada pantalla haya crecido.</a:t>
             </a:r>
             <a:endParaRPr lang="en-US" dirty="0"/>
           </a:p>
@@ -865,7 +865,7 @@
           <a:p>
             <a:r>
               <a:rPr lang="en-US" dirty="0"/>
-              <a:t>Actualizado 17/09: rango en vez de cifra fija, y 5€/viaje en vez de 10€ (Nadia considero la primera estimacion demasiado dramatizada). Un rango (260-520€/ano) es mas honesto que un unico numero porque la frecuencia real varia semana a semana. Es la segunda correccion de esta cifra: la primera version (120€/ano) tampoco cuadraba con las cuentas reales.</a:t>
+              <a:t>Actualizado 18/09: 40 semanas activas en vez de 52 (se descuentan vacaciones/viajes en los que no se hace la compra habitual del piso). Un rango (200-400€/ano) sigue siendo mas honesto que un unico numero porque la frecuencia real varia semana a semana.</a:t>
             </a:r>
             <a:endParaRPr lang="en-US" dirty="0"/>
           </a:p>
@@ -2573,7 +2573,7 @@
                 <a:ea typeface="Calibri" pitchFamily="34" charset="-122"/>
                 <a:cs typeface="Calibri" pitchFamily="34" charset="-120"/>
               </a:rPr>
-              <a:t>Lectura de tickets → items (Gemini API, free tier — la IA solo se usa aquí)</a:t>
+              <a:t>Lectura de tickets → items (Groq API, free tier — la IA solo se usa aquí)</a:t>
             </a:r>
             <a:endParaRPr lang="en-US" sz="1000" dirty="0"/>
           </a:p>
@@ -3365,7 +3365,7 @@
                 <a:ea typeface="Calibri" pitchFamily="34" charset="-122"/>
                 <a:cs typeface="Calibri" pitchFamily="34" charset="-120"/>
               </a:rPr>
-              <a:t>10-15 min/lista a ojo, 1-2 viajes/semana sin plan, 260-520€/año perdidos.</a:t>
+              <a:t>10-15 min/lista a ojo, 1-2 viajes/semana sin plan, 200-400€/año perdidos.</a:t>
             </a:r>
             <a:endParaRPr lang="en-US" sz="1100" dirty="0"/>
           </a:p>
@@ -4014,7 +4014,7 @@
                 <a:ea typeface="Calibri" pitchFamily="34" charset="-122"/>
                 <a:cs typeface="Calibri" pitchFamily="34" charset="-120"/>
               </a:rPr>
-              <a:t>Lectura de tickets (Gemini API) y aviso de turno de compra (bot de Telegram)</a:t>
+              <a:t>Lectura de tickets (Groq API) y aviso de turno de compra (bot de Telegram)</a:t>
             </a:r>
             <a:endParaRPr lang="en-US" sz="1600" dirty="0"/>
           </a:p>
@@ -4525,7 +4525,7 @@
                 <a:ea typeface="Cambria" pitchFamily="34" charset="-122"/>
                 <a:cs typeface="Cambria" pitchFamily="34" charset="-120"/>
               </a:rPr>
-              <a:t>260-520 €</a:t>
+              <a:t>200-400 €</a:t>
             </a:r>
             <a:endParaRPr lang="en-US" sz="4000" dirty="0"/>
           </a:p>
@@ -4623,7 +4623,7 @@
                 <a:ea typeface="Calibri" pitchFamily="34" charset="-122"/>
                 <a:cs typeface="Calibri" pitchFamily="34" charset="-120"/>
               </a:rPr>
-              <a:t>5 €/viaje × 1-2 viajes/semana × 52 semanas ≈ 260-520 €/año</a:t>
+              <a:t>5 €/viaje × 1-2 viajes/semana × 40 semanas activas ≈ 200-400 €/año</a:t>
             </a:r>
             <a:endParaRPr lang="en-US" sz="1300" dirty="0"/>
           </a:p>
@@ -7749,7 +7749,7 @@
                 <a:ea typeface="Calibri" pitchFamily="34" charset="-122"/>
                 <a:cs typeface="Calibri" pitchFamily="34" charset="-120"/>
               </a:rPr>
-              <a:t>El 54% (19 de 35) sufrió ambas cosas en el mismo mes — el mismo tiempo y dinero (260-520€/año) de la frase del dolor, confirmado con datos.</a:t>
+              <a:t>El 54% (19 de 35) sufrió ambas cosas en el mismo mes — el mismo tiempo y dinero (200-400€/año) de la frase del dolor, confirmado con datos.</a:t>
             </a:r>
             <a:endParaRPr lang="en-US" sz="1100" dirty="0"/>
           </a:p>

--- a/docs/larder-presentacion.pptx
+++ b/docs/larder-presentacion.pptx
@@ -17,9 +17,11 @@
     <p:sldId id="265" r:id="rId11"/>
     <p:sldId id="266" r:id="rId12"/>
     <p:sldId id="267" r:id="rId13"/>
+    <p:sldId id="268" r:id="rId14"/>
+    <p:sldId id="269" r:id="rId15"/>
   </p:sldIdLst>
   <p:notesMasterIdLst>
-    <p:notesMasterId r:id="rId14"/>
+    <p:notesMasterId r:id="rId16"/>
   </p:notesMasterIdLst>
   <p:sldSz cx="12192000" cy="6858000"/>
   <p:notesSz cx="6858000" cy="12192000"/>
@@ -601,7 +603,7 @@
           <a:p>
             <a:r>
               <a:rPr lang="en-US" dirty="0"/>
-              <a:t>Actualizado 17/09 tras el giro de producto: se retira Odoo (Prices se calcula sobre nuestro propio historial de compras, no un catalogo externo que alguien tendria que mantener a mano). Se decide construir para esta entrega lo que antes era "P2 hipotetico" (lectura de tickets con Groq, prediccion de consumo) -- la columna de la derecha se queda solo con lo que de verdad no compensa construir nunca en este proyecto. Nadie nos elegiria por construir facturacion o cobro con tarjeta propios; si por como llevamos nevera y lista compartida. Orden de construccion: una pantalla completa antes de abrir la siguiente -- eso no cambia aunque el alcance de cada pantalla haya crecido.</a:t>
+              <a:t>Publico fijado como estudiantes (18/09): el embudo ahora parte de la UDC (&gt;13.300) en vez de hogares genericos. El mercado objetivo es directamente ~650 pisos, no "coincide con el accesible". Los ~99.700 hogares de A Coruna quedan solo como techo de contexto.</a:t>
             </a:r>
             <a:endParaRPr lang="en-US" dirty="0"/>
           </a:p>
@@ -689,7 +691,7 @@
           <a:p>
             <a:r>
               <a:rPr lang="en-US" dirty="0"/>
-              <a:t>El nombre Larder es una palabra inglesa comun (despensa) — revisar en P5 si dificulta encontrarlo en buscadores. De momento se mantiene.</a:t>
+              <a:t>Actualizado 17/09: sin monetizacion. No hay punto de equilibrio que calcular porque no hay precio -- lo unico que tiene que cuadrar es que el coste fijo siga en 0. Publico acotado a estudiantes (antes decia "hogar compartido" en general); la cifra de "cuantos hay" pasa a la mas ajustada a ese publico (~650 pisos de estudiantes) en vez del mercado accesible completo (~99.700), que se mantiene documentado en la seccion de estudio de mercado como techo, no como objetivo de esta casilla.</a:t>
             </a:r>
             <a:endParaRPr lang="en-US" dirty="0"/>
           </a:p>
@@ -777,7 +779,7 @@
           <a:p>
             <a:r>
               <a:rPr lang="en-US" dirty="0"/>
-              <a:t>Cierre. Recalcar que lo entregado el viernes es la ideacion completa (docs/ideacion.md), no codigo terminado — eso es correcto para P1 en esta fase.</a:t>
+              <a:t>Actualizado 17/09 tras el giro de producto: se retira Odoo (Prices se calcula sobre nuestro propio historial de compras, no un catalogo externo que alguien tendria que mantener a mano). Se decide construir para esta entrega lo que antes era "P2 hipotetico" (lectura de tickets con Groq, prediccion de consumo) -- la columna de la derecha se queda solo con lo que de verdad no compensa construir nunca en este proyecto. Nadie nos elegiria por construir facturacion o cobro con tarjeta propios; si por como llevamos nevera y lista compartida. Orden de construccion: una pantalla completa antes de abrir la siguiente -- eso no cambia aunque el alcance de cada pantalla haya crecido.</a:t>
             </a:r>
             <a:endParaRPr lang="en-US" dirty="0"/>
           </a:p>
@@ -801,6 +803,182 @@
             <a:fld id="{F7021451-1387-4CA6-816F-3879F97B5CBC}" type="slidenum">
               <a:rPr lang="en-US"/>
               <a:t>12</a:t>
+            </a:fld>
+            <a:endParaRPr lang="en-US"/>
+          </a:p>
+        </p:txBody>
+      </p:sp>
+    </p:spTree>
+    <p:extLst>
+      <p:ext uri="{BB962C8B-B14F-4D97-AF65-F5344CB8AC3E}">
+        <p14:creationId xmlns:p14="http://schemas.microsoft.com/office/powerpoint/2010/main" val="1024086991"/>
+      </p:ext>
+    </p:extLst>
+  </p:cSld>
+  <p:clrMapOvr>
+    <a:masterClrMapping/>
+  </p:clrMapOvr>
+</p:notes>
+</file>
+
+<file path=ppt/notesSlides/notesSlide13.xml><?xml version="1.0" encoding="utf-8"?>
+<p:notes xmlns:a="http://schemas.openxmlformats.org/drawingml/2006/main" xmlns:r="http://schemas.openxmlformats.org/officeDocument/2006/relationships" xmlns:p="http://schemas.openxmlformats.org/presentationml/2006/main">
+  <p:cSld>
+    <p:spTree>
+      <p:nvGrpSpPr>
+        <p:cNvPr id="1" name=""/>
+        <p:cNvGrpSpPr/>
+        <p:nvPr/>
+      </p:nvGrpSpPr>
+      <p:grpSpPr>
+        <a:xfrm>
+          <a:off x="0" y="0"/>
+          <a:ext cx="0" cy="0"/>
+          <a:chOff x="0" y="0"/>
+          <a:chExt cx="0" cy="0"/>
+        </a:xfrm>
+      </p:grpSpPr>
+      <p:sp>
+        <p:nvSpPr>
+          <p:cNvPr id="2" name="Slide Image Placeholder 1"/>
+          <p:cNvSpPr>
+            <a:spLocks noGrp="1" noRot="1" noChangeAspect="1"/>
+          </p:cNvSpPr>
+          <p:nvPr>
+            <p:ph type="sldImg"/>
+          </p:nvPr>
+        </p:nvSpPr>
+        <p:spPr/>
+      </p:sp>
+      <p:sp>
+        <p:nvSpPr>
+          <p:cNvPr id="3" name="Notes Placeholder 2"/>
+          <p:cNvSpPr>
+            <a:spLocks noGrp="1"/>
+          </p:cNvSpPr>
+          <p:nvPr>
+            <p:ph type="body" idx="1"/>
+          </p:nvPr>
+        </p:nvSpPr>
+        <p:spPr/>
+        <p:txBody>
+          <a:bodyPr/>
+          <a:lstStyle/>
+          <a:p>
+            <a:r>
+              <a:rPr lang="en-US" dirty="0"/>
+              <a:t>El nombre Larder es una palabra inglesa comun (despensa) — revisar en P5 si dificulta encontrarlo en buscadores. De momento se mantiene.</a:t>
+            </a:r>
+            <a:endParaRPr lang="en-US" dirty="0"/>
+          </a:p>
+        </p:txBody>
+      </p:sp>
+      <p:sp>
+        <p:nvSpPr>
+          <p:cNvPr id="4" name="Slide Number Placeholder 3"/>
+          <p:cNvSpPr>
+            <a:spLocks noGrp="1"/>
+          </p:cNvSpPr>
+          <p:nvPr>
+            <p:ph type="sldNum" sz="quarter" idx="10"/>
+          </p:nvPr>
+        </p:nvSpPr>
+        <p:spPr/>
+        <p:txBody>
+          <a:bodyPr/>
+          <a:lstStyle/>
+          <a:p>
+            <a:fld id="{F7021451-1387-4CA6-816F-3879F97B5CBC}" type="slidenum">
+              <a:rPr lang="en-US"/>
+              <a:t>13</a:t>
+            </a:fld>
+            <a:endParaRPr lang="en-US"/>
+          </a:p>
+        </p:txBody>
+      </p:sp>
+    </p:spTree>
+    <p:extLst>
+      <p:ext uri="{BB962C8B-B14F-4D97-AF65-F5344CB8AC3E}">
+        <p14:creationId xmlns:p14="http://schemas.microsoft.com/office/powerpoint/2010/main" val="1024086991"/>
+      </p:ext>
+    </p:extLst>
+  </p:cSld>
+  <p:clrMapOvr>
+    <a:masterClrMapping/>
+  </p:clrMapOvr>
+</p:notes>
+</file>
+
+<file path=ppt/notesSlides/notesSlide14.xml><?xml version="1.0" encoding="utf-8"?>
+<p:notes xmlns:a="http://schemas.openxmlformats.org/drawingml/2006/main" xmlns:r="http://schemas.openxmlformats.org/officeDocument/2006/relationships" xmlns:p="http://schemas.openxmlformats.org/presentationml/2006/main">
+  <p:cSld>
+    <p:spTree>
+      <p:nvGrpSpPr>
+        <p:cNvPr id="1" name=""/>
+        <p:cNvGrpSpPr/>
+        <p:nvPr/>
+      </p:nvGrpSpPr>
+      <p:grpSpPr>
+        <a:xfrm>
+          <a:off x="0" y="0"/>
+          <a:ext cx="0" cy="0"/>
+          <a:chOff x="0" y="0"/>
+          <a:chExt cx="0" cy="0"/>
+        </a:xfrm>
+      </p:grpSpPr>
+      <p:sp>
+        <p:nvSpPr>
+          <p:cNvPr id="2" name="Slide Image Placeholder 1"/>
+          <p:cNvSpPr>
+            <a:spLocks noGrp="1" noRot="1" noChangeAspect="1"/>
+          </p:cNvSpPr>
+          <p:nvPr>
+            <p:ph type="sldImg"/>
+          </p:nvPr>
+        </p:nvSpPr>
+        <p:spPr/>
+      </p:sp>
+      <p:sp>
+        <p:nvSpPr>
+          <p:cNvPr id="3" name="Notes Placeholder 2"/>
+          <p:cNvSpPr>
+            <a:spLocks noGrp="1"/>
+          </p:cNvSpPr>
+          <p:nvPr>
+            <p:ph type="body" idx="1"/>
+          </p:nvPr>
+        </p:nvSpPr>
+        <p:spPr/>
+        <p:txBody>
+          <a:bodyPr/>
+          <a:lstStyle/>
+          <a:p>
+            <a:r>
+              <a:rPr lang="en-US" dirty="0"/>
+              <a:t>Cierre. Recalcar que lo entregado el viernes es la ideacion completa (docs/ideacion.md), no codigo terminado — eso es correcto para P1 en esta fase.</a:t>
+            </a:r>
+            <a:endParaRPr lang="en-US" dirty="0"/>
+          </a:p>
+        </p:txBody>
+      </p:sp>
+      <p:sp>
+        <p:nvSpPr>
+          <p:cNvPr id="4" name="Slide Number Placeholder 3"/>
+          <p:cNvSpPr>
+            <a:spLocks noGrp="1"/>
+          </p:cNvSpPr>
+          <p:nvPr>
+            <p:ph type="sldNum" sz="quarter" idx="10"/>
+          </p:nvPr>
+        </p:nvSpPr>
+        <p:spPr/>
+        <p:txBody>
+          <a:bodyPr/>
+          <a:lstStyle/>
+          <a:p>
+            <a:fld id="{F7021451-1387-4CA6-816F-3879F97B5CBC}" type="slidenum">
+              <a:rPr lang="en-US"/>
+              <a:t>14</a:t>
             </a:fld>
             <a:endParaRPr lang="en-US"/>
           </a:p>
@@ -1041,7 +1219,7 @@
           <a:p>
             <a:r>
               <a:rPr lang="en-US" dirty="0"/>
-              <a:t>Diapositiva nueva (17/09) a peticion de Nadia: anticipar la objecion de un desarrollador de AnyList antes de que la haga alguien en la defensa. El argumento se vuelve en su contra -- si papel y boli tampoco tienen esas funciones y aun asi ganan en uso real, lo que anaden esas apps es complejidad, no lo que faltaba. Ademas el enfoque de recetas encaja con un publico mas asentado (ej. una madre de familia), no con el estudiante medio -- el meal prep de moda entre jovenes busca cocinar MENOS, no explorar recetas. Actualizado con una respuesta real de la encuesta (llegada 17/09, ver n=35) que confirma esto sin que se preguntara: compra pensando en cocinar algo elaborado, nunca lo hace, la comida se pudre. Conclusion: ni siquiera cumplen bien la funcion de lista, porque el paso intermedio da pereza.</a:t>
+              <a:t>Diapositiva nueva (18/09): capturas reales de Bring! extraidas directamente del PDF final de Nadia (estaban insertadas como imagenes individuales, no un collage). Cada una respalda visualmente una fila de la tabla de "Estado del arte -- la competencia": el paso extra al anadir un item, y que "Inspiracion" no resuelve el caso de uso real.</a:t>
             </a:r>
             <a:endParaRPr lang="en-US" dirty="0"/>
           </a:p>
@@ -1129,7 +1307,7 @@
           <a:p>
             <a:r>
               <a:rPr lang="en-US" dirty="0"/>
-              <a:t>Conclusion del estado del arte: el hueco no es "mas bonita", es rapidez de Notas + colaboracion de Bring + atribucion (quien apunto que) + saber que hay en casa SIN pedir que nadie cuente unidades a mano -- esto ultimo se corrigio el 17/09 porque la version anterior ("ahorro y control de stock") caia en el mismo error que criticamos de AnyList. Tambien vale mencionar el testimonio propio: en casa se abandono una app similar tras 2 usos por pereza de abrir "otra app".</a:t>
+              <a:t>Diapositiva nueva (18/09): capturas reales de AnyList (3 del PDF final + 1 nueva, el menu de Crear receta / Importar recetas web, anadida hoy por Nadia). Respaldan la fila de la tabla: "todo el valor apunta a cocinar, no a compartir la lista ni saber que hay en casa".</a:t>
             </a:r>
             <a:endParaRPr lang="en-US" dirty="0"/>
           </a:p>
@@ -1305,7 +1483,7 @@
           <a:p>
             <a:r>
               <a:rPr lang="en-US" dirty="0"/>
-              <a:t>n=35 a fecha 17/09/2026 (formulario sigue tecnicamente abierto). Categorizacion: "no se quien compro que" y "llevar la cuenta de quien compro que antes" cuentan para AMBAS columnas (coop + tracker de gastos), "no saber que quieren los otros"/"comen mis cosas"/"compran cosas que no quiero"/"people eating my food"/"dudar en comprar algo y que se lo coma otro" es coop puro, "no participan/tardan en pagar" es tracker de gastos puro. Cooperacion sigue como el tema mas repetido (8/35, 23%). Las 3 respuestas nuevas no anadieron menciones de coop/gasto -- dos son sobre comida que se pudre (movidas a la diapositiva de recetas, donde encajan mejor) y una sobre "tener que mirar que falta". "Caducidad/comida que se estropea" (3 menciones) entra en el plan de construccion; "se acaba y nadie avisa" (1 mencion) se resuelve gratis con Fridge compartida. Las menciones de precio (2) siguen fuera de esta diapositiva por espacio -- estan en ideacion.md.</a:t>
+              <a:t>Diapositiva nueva (17/09) a peticion de Nadia: anticipar la objecion de un desarrollador de AnyList antes de que la haga alguien en la defensa. El argumento se vuelve en su contra -- si papel y boli tampoco tienen esas funciones y aun asi ganan en uso real, lo que anaden esas apps es complejidad, no lo que faltaba. Ademas el enfoque de recetas encaja con un publico mas asentado (ej. una madre de familia), no con el estudiante medio -- el meal prep de moda entre jovenes busca cocinar MENOS, no explorar recetas. Actualizado con una respuesta real de la encuesta (llegada 17/09, ver n=35) que confirma esto sin que se preguntara: compra pensando en cocinar algo elaborado, nunca lo hace, la comida se pudre. Conclusion: ni siquiera cumplen bien la funcion de lista, porque el paso intermedio da pereza. Reordenada (18/09) para ir despues de la encuesta n=35, a peticion de Nadia.</a:t>
             </a:r>
             <a:endParaRPr lang="en-US" dirty="0"/>
           </a:p>
@@ -1393,7 +1571,7 @@
           <a:p>
             <a:r>
               <a:rPr lang="en-US" dirty="0"/>
-              <a:t>Publico fijado como estudiantes (18/09): el embudo ahora parte de la UDC (&gt;13.300) en vez de hogares genericos. El mercado objetivo es directamente ~650 pisos, no "coincide con el accesible". Los ~99.700 hogares de A Coruna quedan solo como techo de contexto.</a:t>
+              <a:t>Conclusion del estado del arte: el hueco no es "mas bonita", es rapidez de Notas + colaboracion de Bring + atribucion (quien apunto que) + saber que hay en casa SIN pedir que nadie cuente unidades a mano -- esto ultimo se corrigio el 17/09 porque la version anterior ("ahorro y control de stock") caia en el mismo error que criticamos de AnyList. Tambien vale mencionar el testimonio propio: en casa se abandono una app similar tras 2 usos por pereza de abrir "otra app".</a:t>
             </a:r>
             <a:endParaRPr lang="en-US" dirty="0"/>
           </a:p>
@@ -1481,7 +1659,7 @@
           <a:p>
             <a:r>
               <a:rPr lang="en-US" dirty="0"/>
-              <a:t>Actualizado 17/09: sin monetizacion. No hay punto de equilibrio que calcular porque no hay precio -- lo unico que tiene que cuadrar es que el coste fijo siga en 0. Publico acotado a estudiantes (antes decia "hogar compartido" en general); la cifra de "cuantos hay" pasa a la mas ajustada a ese publico (~650 pisos de estudiantes) en vez del mercado accesible completo (~99.700), que se mantiene documentado en la seccion de estudio de mercado como techo, no como objetivo de esta casilla.</a:t>
+              <a:t>n=35 a fecha 17/09/2026 (formulario sigue tecnicamente abierto). Categorizacion: "no se quien compro que" y "llevar la cuenta de quien compro que antes" cuentan para AMBAS columnas (coop + tracker de gastos), "no saber que quieren los otros"/"comen mis cosas"/"compran cosas que no quiero"/"people eating my food"/"dudar en comprar algo y que se lo coma otro" es coop puro, "no participan/tardan en pagar" es tracker de gastos puro. Cooperacion sigue como el tema mas repetido (8/35, 23%). Las 3 respuestas nuevas no anadieron menciones de coop/gasto -- dos son sobre comida que se pudre (movidas a la diapositiva de recetas, donde encajan mejor) y una sobre "tener que mirar que falta". "Caducidad/comida que se estropea" (3 menciones) entra en el plan de construccion; "se acaba y nadie avisa" (1 mencion) se resuelve gratis con Fridge compartida. Las menciones de precio (2) siguen fuera de esta diapositiva por espacio -- estan en ideacion.md.</a:t>
             </a:r>
             <a:endParaRPr lang="en-US" dirty="0"/>
           </a:p>
@@ -2163,7 +2341,7 @@
                 <a:ea typeface="Calibri" pitchFamily="34" charset="-122"/>
                 <a:cs typeface="Calibri" pitchFamily="34" charset="-120"/>
               </a:rPr>
-              <a:t>PASO 5</a:t>
+              <a:t>PASO 3</a:t>
             </a:r>
             <a:endParaRPr lang="en-US" sz="1200" dirty="0"/>
           </a:p>
@@ -2202,7 +2380,7 @@
                 <a:ea typeface="Cambria" pitchFamily="34" charset="-122"/>
                 <a:cs typeface="Cambria" pitchFamily="34" charset="-120"/>
               </a:rPr>
-              <a:t>Las 3 columnas del alcance</a:t>
+              <a:t>Estudio de mercado — A Coruña</a:t>
             </a:r>
             <a:endParaRPr lang="en-US" sz="2800" dirty="0"/>
           </a:p>
@@ -2216,16 +2394,16 @@
         </p:nvSpPr>
         <p:spPr>
           <a:xfrm>
-            <a:off x="548640" y="1417320"/>
-            <a:ext cx="3611880" cy="3246120"/>
+            <a:off x="548640" y="1463040"/>
+            <a:ext cx="3566160" cy="2468880"/>
           </a:xfrm>
           <a:prstGeom prst="roundRect">
             <a:avLst>
-              <a:gd name="adj" fmla="val 3380"/>
+              <a:gd name="adj" fmla="val 4444"/>
             </a:avLst>
           </a:prstGeom>
           <a:solidFill>
-            <a:srgbClr val="F6E4D3"/>
+            <a:srgbClr val="F4E9DA"/>
           </a:solidFill>
           <a:ln/>
           <a:effectLst>
@@ -2239,25 +2417,42 @@
       </p:sp>
       <p:sp>
         <p:nvSpPr>
-          <p:cNvPr id="7" name="Shape 4"/>
-          <p:cNvSpPr/>
-          <p:nvPr/>
-        </p:nvSpPr>
-        <p:spPr>
-          <a:xfrm>
-            <a:off x="731520" y="1600200"/>
-            <a:ext cx="3246120" cy="411480"/>
-          </a:xfrm>
-          <a:prstGeom prst="roundRect">
-            <a:avLst>
-              <a:gd name="adj" fmla="val 17778"/>
-            </a:avLst>
-          </a:prstGeom>
-          <a:solidFill>
-            <a:srgbClr val="C9682B"/>
-          </a:solidFill>
-          <a:ln/>
-        </p:spPr>
+          <p:cNvPr id="7" name="Text 4"/>
+          <p:cNvSpPr txBox="1"/>
+          <p:nvPr/>
+        </p:nvSpPr>
+        <p:spPr>
+          <a:xfrm>
+            <a:off x="777240" y="1645920"/>
+            <a:ext cx="3108960" cy="320040"/>
+          </a:xfrm>
+          <a:prstGeom prst="rect">
+            <a:avLst/>
+          </a:prstGeom>
+          <a:noFill/>
+          <a:ln/>
+        </p:spPr>
+        <p:txBody>
+          <a:bodyPr wrap="square" lIns="0" tIns="0" rIns="0" bIns="0" rtlCol="0" anchor="ctr"/>
+          <a:lstStyle/>
+          <a:p>
+            <a:pPr indent="0" marL="0">
+              <a:buNone/>
+            </a:pPr>
+            <a:r>
+              <a:rPr lang="en-US" sz="1100" b="1" spc="100" kern="0" dirty="0">
+                <a:solidFill>
+                  <a:srgbClr val="C9682B"/>
+                </a:solidFill>
+                <a:latin typeface="Calibri" pitchFamily="34" charset="0"/>
+                <a:ea typeface="Calibri" pitchFamily="34" charset="-122"/>
+                <a:cs typeface="Calibri" pitchFamily="34" charset="-120"/>
+              </a:rPr>
+              <a:t>MERCADO TOTAL</a:t>
+            </a:r>
+            <a:endParaRPr lang="en-US" sz="1100" dirty="0"/>
+          </a:p>
+        </p:txBody>
       </p:sp>
       <p:sp>
         <p:nvSpPr>
@@ -2267,8 +2462,8 @@
         </p:nvSpPr>
         <p:spPr>
           <a:xfrm>
-            <a:off x="731520" y="1600200"/>
-            <a:ext cx="3246120" cy="411480"/>
+            <a:off x="777240" y="2011680"/>
+            <a:ext cx="3108960" cy="1005840"/>
           </a:xfrm>
           <a:prstGeom prst="rect">
             <a:avLst/>
@@ -2280,21 +2475,21 @@
           <a:bodyPr wrap="square" lIns="0" tIns="0" rIns="0" bIns="0" rtlCol="0" anchor="ctr"/>
           <a:lstStyle/>
           <a:p>
-            <a:pPr algn="ctr" indent="0" marL="0">
-              <a:buNone/>
-            </a:pPr>
-            <a:r>
-              <a:rPr lang="en-US" sz="1400" b="1" dirty="0">
-                <a:solidFill>
-                  <a:srgbClr val="FFFFFF"/>
+            <a:pPr indent="0" marL="0">
+              <a:buNone/>
+            </a:pPr>
+            <a:r>
+              <a:rPr lang="en-US" sz="3400" b="1" dirty="0">
+                <a:solidFill>
+                  <a:srgbClr val="2E2119"/>
                 </a:solidFill>
                 <a:latin typeface="Cambria" pitchFamily="34" charset="0"/>
                 <a:ea typeface="Cambria" pitchFamily="34" charset="-122"/>
                 <a:cs typeface="Cambria" pitchFamily="34" charset="-120"/>
               </a:rPr>
-              <a:t>Lo construimos</a:t>
-            </a:r>
-            <a:endParaRPr lang="en-US" sz="1400" dirty="0"/>
+              <a:t>&gt; 13.300</a:t>
+            </a:r>
+            <a:endParaRPr lang="en-US" sz="3400" dirty="0"/>
           </a:p>
         </p:txBody>
       </p:sp>
@@ -2306,8 +2501,8 @@
         </p:nvSpPr>
         <p:spPr>
           <a:xfrm>
-            <a:off x="777240" y="2194560"/>
-            <a:ext cx="3154680" cy="2286000"/>
+            <a:off x="777240" y="3063240"/>
+            <a:ext cx="3108960" cy="777240"/>
           </a:xfrm>
           <a:prstGeom prst="rect">
             <a:avLst/>
@@ -2319,109 +2514,21 @@
           <a:bodyPr wrap="square" lIns="0" tIns="0" rIns="0" bIns="0" rtlCol="0" anchor="t"/>
           <a:lstStyle/>
           <a:p>
-            <a:pPr marL="342900" indent="-342900">
-              <a:spcAft>
-                <a:spcPts val="700"/>
-              </a:spcAft>
-              <a:buSzPct val="100000"/>
-              <a:buChar char="•"/>
-            </a:pPr>
-            <a:r>
-              <a:rPr lang="en-US" sz="1000" dirty="0">
-                <a:solidFill>
-                  <a:srgbClr val="2E2119"/>
-                </a:solidFill>
-                <a:latin typeface="Calibri" pitchFamily="34" charset="0"/>
-                <a:ea typeface="Calibri" pitchFamily="34" charset="-122"/>
-                <a:cs typeface="Calibri" pitchFamily="34" charset="-120"/>
-              </a:rPr>
-              <a:t>Nevera: 3 estados (bien/queda poco/se acabó), sin cantidades — se rellena sola al comprar</a:t>
-            </a:r>
-            <a:endParaRPr lang="en-US" sz="1000" dirty="0"/>
-          </a:p>
-          <a:p>
-            <a:pPr marL="342900" indent="-342900">
-              <a:spcAft>
-                <a:spcPts val="700"/>
-              </a:spcAft>
-              <a:buSzPct val="100000"/>
-              <a:buChar char="•"/>
-            </a:pPr>
-            <a:r>
-              <a:rPr lang="en-US" sz="1000" dirty="0">
-                <a:solidFill>
-                  <a:srgbClr val="2E2119"/>
-                </a:solidFill>
-                <a:latin typeface="Calibri" pitchFamily="34" charset="0"/>
-                <a:ea typeface="Calibri" pitchFamily="34" charset="-122"/>
-                <a:cs typeface="Calibri" pitchFamily="34" charset="-120"/>
-              </a:rPr>
-              <a:t>Lista que se genera sola a partir de la nevera, con concurrencia</a:t>
-            </a:r>
-            <a:endParaRPr lang="en-US" sz="1000" dirty="0"/>
-          </a:p>
-          <a:p>
-            <a:pPr marL="342900" indent="-342900">
-              <a:spcAft>
-                <a:spcPts val="700"/>
-              </a:spcAft>
-              <a:buSzPct val="100000"/>
-              <a:buChar char="•"/>
-            </a:pPr>
-            <a:r>
-              <a:rPr lang="en-US" sz="1000" dirty="0">
-                <a:solidFill>
-                  <a:srgbClr val="2E2119"/>
-                </a:solidFill>
-                <a:latin typeface="Calibri" pitchFamily="34" charset="0"/>
-                <a:ea typeface="Calibri" pitchFamily="34" charset="-122"/>
-                <a:cs typeface="Calibri" pitchFamily="34" charset="-120"/>
-              </a:rPr>
-              <a:t>Historial + cálculo de quién debe a quién</a:t>
-            </a:r>
-            <a:endParaRPr lang="en-US" sz="1000" dirty="0"/>
-          </a:p>
-          <a:p>
-            <a:pPr marL="342900" indent="-342900">
-              <a:spcAft>
-                <a:spcPts val="700"/>
-              </a:spcAft>
-              <a:buSzPct val="100000"/>
-              <a:buChar char="•"/>
-            </a:pPr>
-            <a:r>
-              <a:rPr lang="en-US" sz="1000" dirty="0">
-                <a:solidFill>
-                  <a:srgbClr val="2E2119"/>
-                </a:solidFill>
-                <a:latin typeface="Calibri" pitchFamily="34" charset="0"/>
-                <a:ea typeface="Calibri" pitchFamily="34" charset="-122"/>
-                <a:cs typeface="Calibri" pitchFamily="34" charset="-120"/>
-              </a:rPr>
-              <a:t>Precios sobre nuestro propio historial de compras</a:t>
-            </a:r>
-            <a:endParaRPr lang="en-US" sz="1000" dirty="0"/>
-          </a:p>
-          <a:p>
-            <a:pPr marL="342900" indent="-342900">
-              <a:spcAft>
-                <a:spcPts val="700"/>
-              </a:spcAft>
-              <a:buSzPct val="100000"/>
-              <a:buChar char="•"/>
-            </a:pPr>
-            <a:r>
-              <a:rPr lang="en-US" sz="1000" dirty="0">
-                <a:solidFill>
-                  <a:srgbClr val="2E2119"/>
-                </a:solidFill>
-                <a:latin typeface="Calibri" pitchFamily="34" charset="0"/>
-                <a:ea typeface="Calibri" pitchFamily="34" charset="-122"/>
-                <a:cs typeface="Calibri" pitchFamily="34" charset="-120"/>
-              </a:rPr>
-              <a:t>Predicción de reposición (aritmética sobre eventos propios)</a:t>
-            </a:r>
-            <a:endParaRPr lang="en-US" sz="1000" dirty="0"/>
+            <a:pPr indent="0" marL="0">
+              <a:buNone/>
+            </a:pPr>
+            <a:r>
+              <a:rPr lang="en-US" sz="1050" dirty="0">
+                <a:solidFill>
+                  <a:srgbClr val="8A7A6D"/>
+                </a:solidFill>
+                <a:latin typeface="Calibri" pitchFamily="34" charset="0"/>
+                <a:ea typeface="Calibri" pitchFamily="34" charset="-122"/>
+                <a:cs typeface="Calibri" pitchFamily="34" charset="-120"/>
+              </a:rPr>
+              <a:t>Estudiantes matriculados en la UDC (curso 2025-26, ambos campus)</a:t>
+            </a:r>
+            <a:endParaRPr lang="en-US" sz="1050" dirty="0"/>
           </a:p>
         </p:txBody>
       </p:sp>
@@ -2433,16 +2540,16 @@
         </p:nvSpPr>
         <p:spPr>
           <a:xfrm>
-            <a:off x="4297680" y="1417320"/>
-            <a:ext cx="3611880" cy="3246120"/>
+            <a:off x="4297680" y="1463040"/>
+            <a:ext cx="3566160" cy="2468880"/>
           </a:xfrm>
           <a:prstGeom prst="roundRect">
             <a:avLst>
-              <a:gd name="adj" fmla="val 3380"/>
+              <a:gd name="adj" fmla="val 4444"/>
             </a:avLst>
           </a:prstGeom>
           <a:solidFill>
-            <a:srgbClr val="F4EFE8"/>
+            <a:srgbClr val="2E2119"/>
           </a:solidFill>
           <a:ln/>
           <a:effectLst>
@@ -2456,25 +2563,42 @@
       </p:sp>
       <p:sp>
         <p:nvSpPr>
-          <p:cNvPr id="11" name="Shape 8"/>
-          <p:cNvSpPr/>
-          <p:nvPr/>
-        </p:nvSpPr>
-        <p:spPr>
-          <a:xfrm>
-            <a:off x="4480560" y="1600200"/>
-            <a:ext cx="3246120" cy="411480"/>
-          </a:xfrm>
-          <a:prstGeom prst="roundRect">
-            <a:avLst>
-              <a:gd name="adj" fmla="val 17778"/>
-            </a:avLst>
-          </a:prstGeom>
-          <a:solidFill>
-            <a:srgbClr val="D9A441"/>
-          </a:solidFill>
-          <a:ln/>
-        </p:spPr>
+          <p:cNvPr id="11" name="Text 8"/>
+          <p:cNvSpPr txBox="1"/>
+          <p:nvPr/>
+        </p:nvSpPr>
+        <p:spPr>
+          <a:xfrm>
+            <a:off x="4526280" y="1645920"/>
+            <a:ext cx="3108960" cy="320040"/>
+          </a:xfrm>
+          <a:prstGeom prst="rect">
+            <a:avLst/>
+          </a:prstGeom>
+          <a:noFill/>
+          <a:ln/>
+        </p:spPr>
+        <p:txBody>
+          <a:bodyPr wrap="square" lIns="0" tIns="0" rIns="0" bIns="0" rtlCol="0" anchor="ctr"/>
+          <a:lstStyle/>
+          <a:p>
+            <a:pPr indent="0" marL="0">
+              <a:buNone/>
+            </a:pPr>
+            <a:r>
+              <a:rPr lang="en-US" sz="1100" b="1" spc="100" kern="0" dirty="0">
+                <a:solidFill>
+                  <a:srgbClr val="D9A441"/>
+                </a:solidFill>
+                <a:latin typeface="Calibri" pitchFamily="34" charset="0"/>
+                <a:ea typeface="Calibri" pitchFamily="34" charset="-122"/>
+                <a:cs typeface="Calibri" pitchFamily="34" charset="-120"/>
+              </a:rPr>
+              <a:t>MERCADO ACCESIBLE</a:t>
+            </a:r>
+            <a:endParaRPr lang="en-US" sz="1100" dirty="0"/>
+          </a:p>
+        </p:txBody>
       </p:sp>
       <p:sp>
         <p:nvSpPr>
@@ -2484,8 +2608,8 @@
         </p:nvSpPr>
         <p:spPr>
           <a:xfrm>
-            <a:off x="4480560" y="1600200"/>
-            <a:ext cx="3246120" cy="411480"/>
+            <a:off x="4526280" y="2011680"/>
+            <a:ext cx="3108960" cy="1005840"/>
           </a:xfrm>
           <a:prstGeom prst="rect">
             <a:avLst/>
@@ -2497,11 +2621,11 @@
           <a:bodyPr wrap="square" lIns="0" tIns="0" rIns="0" bIns="0" rtlCol="0" anchor="ctr"/>
           <a:lstStyle/>
           <a:p>
-            <a:pPr algn="ctr" indent="0" marL="0">
-              <a:buNone/>
-            </a:pPr>
-            <a:r>
-              <a:rPr lang="en-US" sz="1400" b="1" dirty="0">
+            <a:pPr indent="0" marL="0">
+              <a:buNone/>
+            </a:pPr>
+            <a:r>
+              <a:rPr lang="en-US" sz="3400" b="1" dirty="0">
                 <a:solidFill>
                   <a:srgbClr val="FFFFFF"/>
                 </a:solidFill>
@@ -2509,9 +2633,9 @@
                 <a:ea typeface="Cambria" pitchFamily="34" charset="-122"/>
                 <a:cs typeface="Cambria" pitchFamily="34" charset="-120"/>
               </a:rPr>
-              <a:t>Lo hace un servicio externo</a:t>
-            </a:r>
-            <a:endParaRPr lang="en-US" sz="1400" dirty="0"/>
+              <a:t>≈ 4.123</a:t>
+            </a:r>
+            <a:endParaRPr lang="en-US" sz="3400" dirty="0"/>
           </a:p>
         </p:txBody>
       </p:sp>
@@ -2523,8 +2647,8 @@
         </p:nvSpPr>
         <p:spPr>
           <a:xfrm>
-            <a:off x="4526280" y="2194560"/>
-            <a:ext cx="3154680" cy="2286000"/>
+            <a:off x="4526280" y="3063240"/>
+            <a:ext cx="3108960" cy="777240"/>
           </a:xfrm>
           <a:prstGeom prst="rect">
             <a:avLst/>
@@ -2536,67 +2660,21 @@
           <a:bodyPr wrap="square" lIns="0" tIns="0" rIns="0" bIns="0" rtlCol="0" anchor="t"/>
           <a:lstStyle/>
           <a:p>
-            <a:pPr marL="342900" indent="-342900">
-              <a:spcAft>
-                <a:spcPts val="700"/>
-              </a:spcAft>
-              <a:buSzPct val="100000"/>
-              <a:buChar char="•"/>
-            </a:pPr>
-            <a:r>
-              <a:rPr lang="en-US" sz="1000" dirty="0">
-                <a:solidFill>
-                  <a:srgbClr val="2E2119"/>
-                </a:solidFill>
-                <a:latin typeface="Calibri" pitchFamily="34" charset="0"/>
-                <a:ea typeface="Calibri" pitchFamily="34" charset="-122"/>
-                <a:cs typeface="Calibri" pitchFamily="34" charset="-120"/>
-              </a:rPr>
-              <a:t>Diccionario de productos (Open Food Facts, gratis)</a:t>
-            </a:r>
-            <a:endParaRPr lang="en-US" sz="1000" dirty="0"/>
-          </a:p>
-          <a:p>
-            <a:pPr marL="342900" indent="-342900">
-              <a:spcAft>
-                <a:spcPts val="700"/>
-              </a:spcAft>
-              <a:buSzPct val="100000"/>
-              <a:buChar char="•"/>
-            </a:pPr>
-            <a:r>
-              <a:rPr lang="en-US" sz="1000" dirty="0">
-                <a:solidFill>
-                  <a:srgbClr val="2E2119"/>
-                </a:solidFill>
-                <a:latin typeface="Calibri" pitchFamily="34" charset="0"/>
-                <a:ea typeface="Calibri" pitchFamily="34" charset="-122"/>
-                <a:cs typeface="Calibri" pitchFamily="34" charset="-120"/>
-              </a:rPr>
-              <a:t>Lectura de tickets → items (Groq API, free tier — la IA solo se usa aquí)</a:t>
-            </a:r>
-            <a:endParaRPr lang="en-US" sz="1000" dirty="0"/>
-          </a:p>
-          <a:p>
-            <a:pPr marL="342900" indent="-342900">
-              <a:spcAft>
-                <a:spcPts val="700"/>
-              </a:spcAft>
-              <a:buSzPct val="100000"/>
-              <a:buChar char="•"/>
-            </a:pPr>
-            <a:r>
-              <a:rPr lang="en-US" sz="1000" dirty="0">
-                <a:solidFill>
-                  <a:srgbClr val="2E2119"/>
-                </a:solidFill>
-                <a:latin typeface="Calibri" pitchFamily="34" charset="0"/>
-                <a:ea typeface="Calibri" pitchFamily="34" charset="-122"/>
-                <a:cs typeface="Calibri" pitchFamily="34" charset="-120"/>
-              </a:rPr>
-              <a:t>Aviso de turno de compra (bot de Telegram, gratis)</a:t>
-            </a:r>
-            <a:endParaRPr lang="en-US" sz="1000" dirty="0"/>
+            <a:pPr indent="0" marL="0">
+              <a:buNone/>
+            </a:pPr>
+            <a:r>
+              <a:rPr lang="en-US" sz="1050" dirty="0">
+                <a:solidFill>
+                  <a:srgbClr val="D8CBBE"/>
+                </a:solidFill>
+                <a:latin typeface="Calibri" pitchFamily="34" charset="0"/>
+                <a:ea typeface="Calibri" pitchFamily="34" charset="-122"/>
+                <a:cs typeface="Calibri" pitchFamily="34" charset="-120"/>
+              </a:rPr>
+              <a:t>31% cambia de ciudad para estudiar — % nacional aplicado a la UDC (Fundación CYD)</a:t>
+            </a:r>
+            <a:endParaRPr lang="en-US" sz="1050" dirty="0"/>
           </a:p>
         </p:txBody>
       </p:sp>
@@ -2608,16 +2686,16 @@
         </p:nvSpPr>
         <p:spPr>
           <a:xfrm>
-            <a:off x="8046720" y="1417320"/>
-            <a:ext cx="3611880" cy="3246120"/>
+            <a:off x="8046720" y="1463040"/>
+            <a:ext cx="3566160" cy="2468880"/>
           </a:xfrm>
           <a:prstGeom prst="roundRect">
             <a:avLst>
-              <a:gd name="adj" fmla="val 3380"/>
+              <a:gd name="adj" fmla="val 4444"/>
             </a:avLst>
           </a:prstGeom>
           <a:solidFill>
-            <a:srgbClr val="F4EFE8"/>
+            <a:srgbClr val="F4E9DA"/>
           </a:solidFill>
           <a:ln/>
           <a:effectLst>
@@ -2631,25 +2709,42 @@
       </p:sp>
       <p:sp>
         <p:nvSpPr>
-          <p:cNvPr id="15" name="Shape 12"/>
-          <p:cNvSpPr/>
-          <p:nvPr/>
-        </p:nvSpPr>
-        <p:spPr>
-          <a:xfrm>
-            <a:off x="8229600" y="1600200"/>
-            <a:ext cx="3246120" cy="411480"/>
-          </a:xfrm>
-          <a:prstGeom prst="roundRect">
-            <a:avLst>
-              <a:gd name="adj" fmla="val 17778"/>
-            </a:avLst>
-          </a:prstGeom>
-          <a:solidFill>
-            <a:srgbClr val="8A7A6D"/>
-          </a:solidFill>
-          <a:ln/>
-        </p:spPr>
+          <p:cNvPr id="15" name="Text 12"/>
+          <p:cNvSpPr txBox="1"/>
+          <p:nvPr/>
+        </p:nvSpPr>
+        <p:spPr>
+          <a:xfrm>
+            <a:off x="8275320" y="1645920"/>
+            <a:ext cx="3108960" cy="320040"/>
+          </a:xfrm>
+          <a:prstGeom prst="rect">
+            <a:avLst/>
+          </a:prstGeom>
+          <a:noFill/>
+          <a:ln/>
+        </p:spPr>
+        <p:txBody>
+          <a:bodyPr wrap="square" lIns="0" tIns="0" rIns="0" bIns="0" rtlCol="0" anchor="ctr"/>
+          <a:lstStyle/>
+          <a:p>
+            <a:pPr indent="0" marL="0">
+              <a:buNone/>
+            </a:pPr>
+            <a:r>
+              <a:rPr lang="en-US" sz="1100" b="1" spc="100" kern="0" dirty="0">
+                <a:solidFill>
+                  <a:srgbClr val="C9682B"/>
+                </a:solidFill>
+                <a:latin typeface="Calibri" pitchFamily="34" charset="0"/>
+                <a:ea typeface="Calibri" pitchFamily="34" charset="-122"/>
+                <a:cs typeface="Calibri" pitchFamily="34" charset="-120"/>
+              </a:rPr>
+              <a:t>MERCADO OBJETIVO</a:t>
+            </a:r>
+            <a:endParaRPr lang="en-US" sz="1100" dirty="0"/>
+          </a:p>
+        </p:txBody>
       </p:sp>
       <p:sp>
         <p:nvSpPr>
@@ -2659,8 +2754,8 @@
         </p:nvSpPr>
         <p:spPr>
           <a:xfrm>
-            <a:off x="8229600" y="1600200"/>
-            <a:ext cx="3246120" cy="411480"/>
+            <a:off x="8275320" y="2011680"/>
+            <a:ext cx="3108960" cy="1005840"/>
           </a:xfrm>
           <a:prstGeom prst="rect">
             <a:avLst/>
@@ -2672,21 +2767,21 @@
           <a:bodyPr wrap="square" lIns="0" tIns="0" rIns="0" bIns="0" rtlCol="0" anchor="ctr"/>
           <a:lstStyle/>
           <a:p>
-            <a:pPr algn="ctr" indent="0" marL="0">
-              <a:buNone/>
-            </a:pPr>
-            <a:r>
-              <a:rPr lang="en-US" sz="1400" b="1" dirty="0">
-                <a:solidFill>
-                  <a:srgbClr val="FFFFFF"/>
+            <a:pPr indent="0" marL="0">
+              <a:buNone/>
+            </a:pPr>
+            <a:r>
+              <a:rPr lang="en-US" sz="3400" b="1" dirty="0">
+                <a:solidFill>
+                  <a:srgbClr val="2E2119"/>
                 </a:solidFill>
                 <a:latin typeface="Cambria" pitchFamily="34" charset="0"/>
                 <a:ea typeface="Cambria" pitchFamily="34" charset="-122"/>
                 <a:cs typeface="Cambria" pitchFamily="34" charset="-120"/>
               </a:rPr>
-              <a:t>No se hace este curso</a:t>
-            </a:r>
-            <a:endParaRPr lang="en-US" sz="1400" dirty="0"/>
+              <a:t>≈ 650 pisos</a:t>
+            </a:r>
+            <a:endParaRPr lang="en-US" sz="3400" dirty="0"/>
           </a:p>
         </p:txBody>
       </p:sp>
@@ -2698,8 +2793,8 @@
         </p:nvSpPr>
         <p:spPr>
           <a:xfrm>
-            <a:off x="8275320" y="2194560"/>
-            <a:ext cx="3154680" cy="2286000"/>
+            <a:off x="8275320" y="3063240"/>
+            <a:ext cx="3108960" cy="777240"/>
           </a:xfrm>
           <a:prstGeom prst="rect">
             <a:avLst/>
@@ -2711,88 +2806,21 @@
           <a:bodyPr wrap="square" lIns="0" tIns="0" rIns="0" bIns="0" rtlCol="0" anchor="t"/>
           <a:lstStyle/>
           <a:p>
-            <a:pPr marL="342900" indent="-342900">
-              <a:spcAft>
-                <a:spcPts val="700"/>
-              </a:spcAft>
-              <a:buSzPct val="100000"/>
-              <a:buChar char="•"/>
-            </a:pPr>
-            <a:r>
-              <a:rPr lang="en-US" sz="1000" dirty="0">
-                <a:solidFill>
-                  <a:srgbClr val="2E2119"/>
-                </a:solidFill>
-                <a:latin typeface="Calibri" pitchFamily="34" charset="0"/>
-                <a:ea typeface="Calibri" pitchFamily="34" charset="-122"/>
-                <a:cs typeface="Calibri" pitchFamily="34" charset="-120"/>
-              </a:rPr>
-              <a:t>Escaneo de código de barras</a:t>
-            </a:r>
-            <a:endParaRPr lang="en-US" sz="1000" dirty="0"/>
-          </a:p>
-          <a:p>
-            <a:pPr marL="342900" indent="-342900">
-              <a:spcAft>
-                <a:spcPts val="700"/>
-              </a:spcAft>
-              <a:buSzPct val="100000"/>
-              <a:buChar char="•"/>
-            </a:pPr>
-            <a:r>
-              <a:rPr lang="en-US" sz="1000" dirty="0">
-                <a:solidFill>
-                  <a:srgbClr val="2E2119"/>
-                </a:solidFill>
-                <a:latin typeface="Calibri" pitchFamily="34" charset="0"/>
-                <a:ea typeface="Calibri" pitchFamily="34" charset="-122"/>
-                <a:cs typeface="Calibri" pitchFamily="34" charset="-120"/>
-              </a:rPr>
-              <a:t>Cobro real con tarjeta</a:t>
-            </a:r>
-            <a:endParaRPr lang="en-US" sz="1000" dirty="0"/>
-          </a:p>
-          <a:p>
-            <a:pPr marL="342900" indent="-342900">
-              <a:spcAft>
-                <a:spcPts val="700"/>
-              </a:spcAft>
-              <a:buSzPct val="100000"/>
-              <a:buChar char="•"/>
-            </a:pPr>
-            <a:r>
-              <a:rPr lang="en-US" sz="1000" dirty="0">
-                <a:solidFill>
-                  <a:srgbClr val="2E2119"/>
-                </a:solidFill>
-                <a:latin typeface="Calibri" pitchFamily="34" charset="0"/>
-                <a:ea typeface="Calibri" pitchFamily="34" charset="-122"/>
-                <a:cs typeface="Calibri" pitchFamily="34" charset="-120"/>
-              </a:rPr>
-              <a:t>Notificaciones push nativas (Telegram es la excepción)</a:t>
-            </a:r>
-            <a:endParaRPr lang="en-US" sz="1000" dirty="0"/>
-          </a:p>
-          <a:p>
-            <a:pPr marL="342900" indent="-342900">
-              <a:spcAft>
-                <a:spcPts val="700"/>
-              </a:spcAft>
-              <a:buSzPct val="100000"/>
-              <a:buChar char="•"/>
-            </a:pPr>
-            <a:r>
-              <a:rPr lang="en-US" sz="1000" dirty="0">
-                <a:solidFill>
-                  <a:srgbClr val="2E2119"/>
-                </a:solidFill>
-                <a:latin typeface="Calibri" pitchFamily="34" charset="0"/>
-                <a:ea typeface="Calibri" pitchFamily="34" charset="-122"/>
-                <a:cs typeface="Calibri" pitchFamily="34" charset="-120"/>
-              </a:rPr>
-              <a:t>Liquidar deudas de verdad</a:t>
-            </a:r>
-            <a:endParaRPr lang="en-US" sz="1000" dirty="0"/>
+            <a:pPr indent="0" marL="0">
+              <a:buNone/>
+            </a:pPr>
+            <a:r>
+              <a:rPr lang="en-US" sz="1050" dirty="0">
+                <a:solidFill>
+                  <a:srgbClr val="8A7A6D"/>
+                </a:solidFill>
+                <a:latin typeface="Calibri" pitchFamily="34" charset="0"/>
+                <a:ea typeface="Calibri" pitchFamily="34" charset="-122"/>
+                <a:cs typeface="Calibri" pitchFamily="34" charset="-120"/>
+              </a:rPr>
+              <a:t>55% de esos comparte piso ÷ 3,5 pers./piso de media</a:t>
+            </a:r>
+            <a:endParaRPr lang="en-US" sz="1050" dirty="0"/>
           </a:p>
         </p:txBody>
       </p:sp>
@@ -2804,18 +2832,23 @@
         </p:nvSpPr>
         <p:spPr>
           <a:xfrm>
-            <a:off x="548640" y="4846320"/>
-            <a:ext cx="11064240" cy="1417320"/>
+            <a:off x="548640" y="4160520"/>
+            <a:ext cx="11064240" cy="1965960"/>
           </a:xfrm>
           <a:prstGeom prst="roundRect">
             <a:avLst>
-              <a:gd name="adj" fmla="val 7742"/>
+              <a:gd name="adj" fmla="val 4651"/>
             </a:avLst>
           </a:prstGeom>
           <a:solidFill>
-            <a:srgbClr val="2E2119"/>
+            <a:srgbClr val="F6E9D8"/>
           </a:solidFill>
-          <a:ln/>
+          <a:ln w="12700">
+            <a:solidFill>
+              <a:srgbClr val="C9682B"/>
+            </a:solidFill>
+            <a:prstDash val="solid"/>
+          </a:ln>
         </p:spPr>
       </p:sp>
       <p:sp>
@@ -2826,73 +2859,88 @@
         </p:nvSpPr>
         <p:spPr>
           <a:xfrm>
-            <a:off x="868680" y="4956048"/>
-            <a:ext cx="10424160" cy="914400"/>
-          </a:xfrm>
-          <a:prstGeom prst="rect">
-            <a:avLst/>
-          </a:prstGeom>
-          <a:noFill/>
-          <a:ln/>
-        </p:spPr>
-        <p:txBody>
-          <a:bodyPr wrap="square" lIns="0" tIns="0" rIns="0" bIns="0" rtlCol="0" anchor="ctr"/>
-          <a:lstStyle/>
-          <a:p>
-            <a:pPr indent="0" marL="0">
-              <a:buNone/>
-            </a:pPr>
-            <a:r>
-              <a:rPr lang="en-US" sz="1250" i="1" dirty="0">
-                <a:solidFill>
-                  <a:srgbClr val="D9A441"/>
-                </a:solidFill>
-                <a:latin typeface="Calibri" pitchFamily="34" charset="0"/>
-                <a:ea typeface="Calibri" pitchFamily="34" charset="-122"/>
-                <a:cs typeface="Calibri" pitchFamily="34" charset="-120"/>
-              </a:rPr>
-              <a:t>"Un hogar de A Coruña deja de escribir la lista de la compra: la nevera se rellena sola al comprar, avisa cuando algo se acaba, y la lista sale de ahí. El grupo se entera por Telegram, marca la compra en tiempo real, y consulta después quién debe qué y dónde sale más barato cada cosa."</a:t>
-            </a:r>
-            <a:endParaRPr lang="en-US" sz="1250" dirty="0"/>
-          </a:p>
-        </p:txBody>
-      </p:sp>
-      <p:sp>
-        <p:nvSpPr>
-          <p:cNvPr id="20" name="Text 17"/>
-          <p:cNvSpPr txBox="1"/>
-          <p:nvPr/>
-        </p:nvSpPr>
-        <p:spPr>
-          <a:xfrm>
-            <a:off x="868680" y="5852160"/>
-            <a:ext cx="10424160" cy="320040"/>
-          </a:xfrm>
-          <a:prstGeom prst="rect">
-            <a:avLst/>
-          </a:prstGeom>
-          <a:noFill/>
-          <a:ln/>
-        </p:spPr>
-        <p:txBody>
-          <a:bodyPr wrap="square" lIns="0" tIns="0" rIns="0" bIns="0" rtlCol="0" anchor="ctr"/>
-          <a:lstStyle/>
-          <a:p>
-            <a:pPr indent="0" marL="0">
-              <a:buNone/>
-            </a:pPr>
-            <a:r>
-              <a:rPr lang="en-US" sz="1100" dirty="0">
-                <a:solidFill>
-                  <a:srgbClr val="D8CBBE"/>
-                </a:solidFill>
-                <a:latin typeface="Calibri" pitchFamily="34" charset="0"/>
-                <a:ea typeface="Calibri" pitchFamily="34" charset="-122"/>
-                <a:cs typeface="Calibri" pitchFamily="34" charset="-120"/>
-              </a:rPr>
-              <a:t>Orden de construcción: Nevera → Lista (concurrencia) → Historial → Precios</a:t>
-            </a:r>
-            <a:endParaRPr lang="en-US" sz="1100" dirty="0"/>
+            <a:off x="777240" y="4279392"/>
+            <a:ext cx="10607040" cy="1737360"/>
+          </a:xfrm>
+          <a:prstGeom prst="rect">
+            <a:avLst/>
+          </a:prstGeom>
+          <a:noFill/>
+          <a:ln/>
+        </p:spPr>
+        <p:txBody>
+          <a:bodyPr wrap="square" lIns="0" tIns="0" rIns="0" bIns="0" rtlCol="0" anchor="t"/>
+          <a:lstStyle/>
+          <a:p>
+            <a:pPr indent="0" marL="0">
+              <a:buNone/>
+            </a:pPr>
+            <a:r>
+              <a:rPr lang="en-US" sz="1200" b="1" dirty="0">
+                <a:solidFill>
+                  <a:srgbClr val="C9682B"/>
+                </a:solidFill>
+                <a:latin typeface="Calibri" pitchFamily="34" charset="0"/>
+                <a:ea typeface="Calibri" pitchFamily="34" charset="-122"/>
+                <a:cs typeface="Calibri" pitchFamily="34" charset="-120"/>
+              </a:rPr>
+              <a:t>Margen de error reconocido:  </a:t>
+            </a:r>
+            <a:endParaRPr lang="en-US" sz="1200" dirty="0"/>
+          </a:p>
+          <a:p>
+            <a:pPr indent="0" marL="0">
+              <a:spcAft>
+                <a:spcPts val="600"/>
+              </a:spcAft>
+              <a:buNone/>
+            </a:pPr>
+            <a:r>
+              <a:rPr lang="en-US" sz="1200" dirty="0">
+                <a:solidFill>
+                  <a:srgbClr val="2E2119"/>
+                </a:solidFill>
+                <a:latin typeface="Calibri" pitchFamily="34" charset="0"/>
+                <a:ea typeface="Calibri" pitchFamily="34" charset="-122"/>
+                <a:cs typeface="Calibri" pitchFamily="34" charset="-120"/>
+              </a:rPr>
+              <a:t>la cifra de ≈650 pisos encadena 3 supuestos (% que cambia de ciudad, % que comparte piso, tamaño medio del piso) — es una estimación gruesa, no un conteo exacto. Deja fuera a jóvenes trabajadores que comparten piso y sufren el mismo problema, pero no salen en estas estadísticas.</a:t>
+            </a:r>
+            <a:endParaRPr lang="en-US" sz="1200" dirty="0"/>
+          </a:p>
+          <a:p>
+            <a:pPr indent="0" marL="0">
+              <a:buNone/>
+            </a:pPr>
+            <a:r>
+              <a:rPr lang="en-US" sz="1200" b="1" dirty="0">
+                <a:solidFill>
+                  <a:srgbClr val="C9682B"/>
+                </a:solidFill>
+                <a:latin typeface="Calibri" pitchFamily="34" charset="0"/>
+                <a:ea typeface="Calibri" pitchFamily="34" charset="-122"/>
+                <a:cs typeface="Calibri" pitchFamily="34" charset="-120"/>
+              </a:rPr>
+              <a:t>Para contexto, no como objetivo:  </a:t>
+            </a:r>
+            <a:endParaRPr lang="en-US" sz="1200" dirty="0"/>
+          </a:p>
+          <a:p>
+            <a:pPr indent="0" marL="0">
+              <a:buNone/>
+            </a:pPr>
+            <a:r>
+              <a:rPr lang="en-US" sz="1200" dirty="0">
+                <a:solidFill>
+                  <a:srgbClr val="2E2119"/>
+                </a:solidFill>
+                <a:latin typeface="Calibri" pitchFamily="34" charset="0"/>
+                <a:ea typeface="Calibri" pitchFamily="34" charset="-122"/>
+                <a:cs typeface="Calibri" pitchFamily="34" charset="-120"/>
+              </a:rPr>
+              <a:t>A Coruña tiene ≈99.700 hogares de 2+ personas — el techo si algún día se sirviera a cualquier hogar, no solo a estudiantes.</a:t>
+            </a:r>
+            <a:endParaRPr lang="en-US" sz="1200" dirty="0"/>
           </a:p>
         </p:txBody>
       </p:sp>
@@ -3005,7 +3053,7 @@
                 <a:ea typeface="Calibri" pitchFamily="34" charset="-122"/>
                 <a:cs typeface="Calibri" pitchFamily="34" charset="-120"/>
               </a:rPr>
-              <a:t>PASO 6</a:t>
+              <a:t>PASO 4</a:t>
             </a:r>
             <a:endParaRPr lang="en-US" sz="1200" dirty="0"/>
           </a:p>
@@ -3044,7 +3092,7 @@
                 <a:ea typeface="Cambria" pitchFamily="34" charset="-122"/>
                 <a:cs typeface="Cambria" pitchFamily="34" charset="-120"/>
               </a:rPr>
-              <a:t>Documento de una página</a:t>
+              <a:t>La servilleta de 6 casillas</a:t>
             </a:r>
             <a:endParaRPr lang="en-US" sz="2800" dirty="0"/>
           </a:p>
@@ -3059,11 +3107,11 @@
         <p:spPr>
           <a:xfrm>
             <a:off x="548640" y="1417320"/>
-            <a:ext cx="5440680" cy="896112"/>
+            <a:ext cx="3611880" cy="960120"/>
           </a:xfrm>
           <a:prstGeom prst="roundRect">
             <a:avLst>
-              <a:gd name="adj" fmla="val 12245"/>
+              <a:gd name="adj" fmla="val 11429"/>
             </a:avLst>
           </a:prstGeom>
           <a:solidFill>
@@ -3087,8 +3135,8 @@
         </p:nvSpPr>
         <p:spPr>
           <a:xfrm>
-            <a:off x="731520" y="1490472"/>
-            <a:ext cx="5074920" cy="237744"/>
+            <a:off x="731520" y="1508760"/>
+            <a:ext cx="3246120" cy="256032"/>
           </a:xfrm>
           <a:prstGeom prst="rect">
             <a:avLst/>
@@ -3112,7 +3160,7 @@
                 <a:ea typeface="Calibri" pitchFamily="34" charset="-122"/>
                 <a:cs typeface="Calibri" pitchFamily="34" charset="-120"/>
               </a:rPr>
-              <a:t>NOMBRE Y MENSAJE</a:t>
+              <a:t>QUÉ VENDEMOS</a:t>
             </a:r>
             <a:endParaRPr lang="en-US" sz="1000" dirty="0"/>
           </a:p>
@@ -3126,8 +3174,8 @@
         </p:nvSpPr>
         <p:spPr>
           <a:xfrm>
-            <a:off x="731520" y="1728216"/>
-            <a:ext cx="5074920" cy="530352"/>
+            <a:off x="731520" y="1764792"/>
+            <a:ext cx="3246120" cy="566928"/>
           </a:xfrm>
           <a:prstGeom prst="rect">
             <a:avLst/>
@@ -3143,7 +3191,7 @@
               <a:buNone/>
             </a:pPr>
             <a:r>
-              <a:rPr lang="en-US" sz="1100" dirty="0">
+              <a:rPr lang="en-US" sz="1150" dirty="0">
                 <a:solidFill>
                   <a:srgbClr val="2E2119"/>
                 </a:solidFill>
@@ -3151,9 +3199,9 @@
                 <a:ea typeface="Calibri" pitchFamily="34" charset="-122"/>
                 <a:cs typeface="Calibri" pitchFamily="34" charset="-120"/>
               </a:rPr>
-              <a:t>Larder — la lista de la compra se genera sola a partir de lo que hay en la nevera de tu piso compartido.</a:t>
-            </a:r>
-            <a:endParaRPr lang="en-US" sz="1100" dirty="0"/>
+              <a:t>Nada — no es un producto de pago, es una herramienta gratuita</a:t>
+            </a:r>
+            <a:endParaRPr lang="en-US" sz="1150" dirty="0"/>
           </a:p>
         </p:txBody>
       </p:sp>
@@ -3165,16 +3213,16 @@
         </p:nvSpPr>
         <p:spPr>
           <a:xfrm>
-            <a:off x="6172200" y="1417320"/>
-            <a:ext cx="5440680" cy="896112"/>
+            <a:off x="4297680" y="1417320"/>
+            <a:ext cx="3611880" cy="960120"/>
           </a:xfrm>
           <a:prstGeom prst="roundRect">
             <a:avLst>
-              <a:gd name="adj" fmla="val 12245"/>
+              <a:gd name="adj" fmla="val 11429"/>
             </a:avLst>
           </a:prstGeom>
           <a:solidFill>
-            <a:srgbClr val="EDE6DC"/>
+            <a:srgbClr val="F4E9DA"/>
           </a:solidFill>
           <a:ln/>
           <a:effectLst>
@@ -3194,8 +3242,8 @@
         </p:nvSpPr>
         <p:spPr>
           <a:xfrm>
-            <a:off x="6355080" y="1490472"/>
-            <a:ext cx="5074920" cy="237744"/>
+            <a:off x="4480560" y="1508760"/>
+            <a:ext cx="3246120" cy="256032"/>
           </a:xfrm>
           <a:prstGeom prst="rect">
             <a:avLst/>
@@ -3219,7 +3267,7 @@
                 <a:ea typeface="Calibri" pitchFamily="34" charset="-122"/>
                 <a:cs typeface="Calibri" pitchFamily="34" charset="-120"/>
               </a:rPr>
-              <a:t>PÚBLICO</a:t>
+              <a:t>A QUIÉN</a:t>
             </a:r>
             <a:endParaRPr lang="en-US" sz="1000" dirty="0"/>
           </a:p>
@@ -3233,8 +3281,8 @@
         </p:nvSpPr>
         <p:spPr>
           <a:xfrm>
-            <a:off x="6355080" y="1728216"/>
-            <a:ext cx="5074920" cy="530352"/>
+            <a:off x="4480560" y="1764792"/>
+            <a:ext cx="3246120" cy="566928"/>
           </a:xfrm>
           <a:prstGeom prst="rect">
             <a:avLst/>
@@ -3250,7 +3298,7 @@
               <a:buNone/>
             </a:pPr>
             <a:r>
-              <a:rPr lang="en-US" sz="1100" dirty="0">
+              <a:rPr lang="en-US" sz="1150" dirty="0">
                 <a:solidFill>
                   <a:srgbClr val="2E2119"/>
                 </a:solidFill>
@@ -3258,9 +3306,9 @@
                 <a:ea typeface="Calibri" pitchFamily="34" charset="-122"/>
                 <a:cs typeface="Calibri" pitchFamily="34" charset="-120"/>
               </a:rPr>
-              <a:t>Estudiantes que comparten piso en A Coruña. ≈650 pisos como suelo verificable.</a:t>
-            </a:r>
-            <a:endParaRPr lang="en-US" sz="1100" dirty="0"/>
+              <a:t>Estudiantes que comparten piso en A Coruña</a:t>
+            </a:r>
+            <a:endParaRPr lang="en-US" sz="1150" dirty="0"/>
           </a:p>
         </p:txBody>
       </p:sp>
@@ -3272,12 +3320,12 @@
         </p:nvSpPr>
         <p:spPr>
           <a:xfrm>
-            <a:off x="548640" y="2432304"/>
-            <a:ext cx="5440680" cy="896112"/>
+            <a:off x="8046720" y="1417320"/>
+            <a:ext cx="3611880" cy="960120"/>
           </a:xfrm>
           <a:prstGeom prst="roundRect">
             <a:avLst>
-              <a:gd name="adj" fmla="val 12245"/>
+              <a:gd name="adj" fmla="val 11429"/>
             </a:avLst>
           </a:prstGeom>
           <a:solidFill>
@@ -3301,8 +3349,8 @@
         </p:nvSpPr>
         <p:spPr>
           <a:xfrm>
-            <a:off x="731520" y="2505456"/>
-            <a:ext cx="5074920" cy="237744"/>
+            <a:off x="8229600" y="1508760"/>
+            <a:ext cx="3246120" cy="256032"/>
           </a:xfrm>
           <a:prstGeom prst="rect">
             <a:avLst/>
@@ -3326,7 +3374,7 @@
                 <a:ea typeface="Calibri" pitchFamily="34" charset="-122"/>
                 <a:cs typeface="Calibri" pitchFamily="34" charset="-120"/>
               </a:rPr>
-              <a:t>PROBLEMA</a:t>
+              <a:t>A CUÁNTO</a:t>
             </a:r>
             <a:endParaRPr lang="en-US" sz="1000" dirty="0"/>
           </a:p>
@@ -3340,8 +3388,8 @@
         </p:nvSpPr>
         <p:spPr>
           <a:xfrm>
-            <a:off x="731520" y="2743200"/>
-            <a:ext cx="5074920" cy="530352"/>
+            <a:off x="8229600" y="1764792"/>
+            <a:ext cx="3246120" cy="566928"/>
           </a:xfrm>
           <a:prstGeom prst="rect">
             <a:avLst/>
@@ -3357,7 +3405,7 @@
               <a:buNone/>
             </a:pPr>
             <a:r>
-              <a:rPr lang="en-US" sz="1100" dirty="0">
+              <a:rPr lang="en-US" sz="1150" dirty="0">
                 <a:solidFill>
                   <a:srgbClr val="2E2119"/>
                 </a:solidFill>
@@ -3365,9 +3413,9 @@
                 <a:ea typeface="Calibri" pitchFamily="34" charset="-122"/>
                 <a:cs typeface="Calibri" pitchFamily="34" charset="-120"/>
               </a:rPr>
-              <a:t>10-15 min/lista a ojo, 1-2 viajes/semana sin plan, 200-400€/año perdidos.</a:t>
-            </a:r>
-            <a:endParaRPr lang="en-US" sz="1100" dirty="0"/>
+              <a:t>0 € — no se cobra nada</a:t>
+            </a:r>
+            <a:endParaRPr lang="en-US" sz="1150" dirty="0"/>
           </a:p>
         </p:txBody>
       </p:sp>
@@ -3379,16 +3427,16 @@
         </p:nvSpPr>
         <p:spPr>
           <a:xfrm>
-            <a:off x="6172200" y="2432304"/>
-            <a:ext cx="5440680" cy="896112"/>
+            <a:off x="548640" y="2514600"/>
+            <a:ext cx="3611880" cy="960120"/>
           </a:xfrm>
           <a:prstGeom prst="roundRect">
             <a:avLst>
-              <a:gd name="adj" fmla="val 12245"/>
+              <a:gd name="adj" fmla="val 11429"/>
             </a:avLst>
           </a:prstGeom>
           <a:solidFill>
-            <a:srgbClr val="EDE6DC"/>
+            <a:srgbClr val="F4E9DA"/>
           </a:solidFill>
           <a:ln/>
           <a:effectLst>
@@ -3408,8 +3456,8 @@
         </p:nvSpPr>
         <p:spPr>
           <a:xfrm>
-            <a:off x="6355080" y="2505456"/>
-            <a:ext cx="5074920" cy="237744"/>
+            <a:off x="731520" y="2606040"/>
+            <a:ext cx="3246120" cy="256032"/>
           </a:xfrm>
           <a:prstGeom prst="rect">
             <a:avLst/>
@@ -3433,7 +3481,7 @@
                 <a:ea typeface="Calibri" pitchFamily="34" charset="-122"/>
                 <a:cs typeface="Calibri" pitchFamily="34" charset="-120"/>
               </a:rPr>
-              <a:t>NÚMEROS</a:t>
+              <a:t>QUÉ NOS CUESTA</a:t>
             </a:r>
             <a:endParaRPr lang="en-US" sz="1000" dirty="0"/>
           </a:p>
@@ -3447,8 +3495,8 @@
         </p:nvSpPr>
         <p:spPr>
           <a:xfrm>
-            <a:off x="6355080" y="2743200"/>
-            <a:ext cx="5074920" cy="530352"/>
+            <a:off x="731520" y="2862072"/>
+            <a:ext cx="3246120" cy="566928"/>
           </a:xfrm>
           <a:prstGeom prst="rect">
             <a:avLst/>
@@ -3464,7 +3512,7 @@
               <a:buNone/>
             </a:pPr>
             <a:r>
-              <a:rPr lang="en-US" sz="1100" dirty="0">
+              <a:rPr lang="en-US" sz="1150" dirty="0">
                 <a:solidFill>
                   <a:srgbClr val="2E2119"/>
                 </a:solidFill>
@@ -3472,9 +3520,9 @@
                 <a:ea typeface="Calibri" pitchFamily="34" charset="-122"/>
                 <a:cs typeface="Calibri" pitchFamily="34" charset="-120"/>
               </a:rPr>
-              <a:t>0€, sin monetización · coste fijo 0€ · éxito = adopción, no ingresos.</a:t>
-            </a:r>
-            <a:endParaRPr lang="en-US" sz="1100" dirty="0"/>
+              <a:t>Coste fijo: 0 € (niveles gratuitos de todo el stack). Variable: 0 €</a:t>
+            </a:r>
+            <a:endParaRPr lang="en-US" sz="1150" dirty="0"/>
           </a:p>
         </p:txBody>
       </p:sp>
@@ -3486,12 +3534,12 @@
         </p:nvSpPr>
         <p:spPr>
           <a:xfrm>
-            <a:off x="548640" y="3447288"/>
-            <a:ext cx="5440680" cy="896112"/>
+            <a:off x="4297680" y="2514600"/>
+            <a:ext cx="3611880" cy="960120"/>
           </a:xfrm>
           <a:prstGeom prst="roundRect">
             <a:avLst>
-              <a:gd name="adj" fmla="val 12245"/>
+              <a:gd name="adj" fmla="val 11429"/>
             </a:avLst>
           </a:prstGeom>
           <a:solidFill>
@@ -3515,8 +3563,8 @@
         </p:nvSpPr>
         <p:spPr>
           <a:xfrm>
-            <a:off x="731520" y="3520440"/>
-            <a:ext cx="5074920" cy="237744"/>
+            <a:off x="4480560" y="2606040"/>
+            <a:ext cx="3246120" cy="256032"/>
           </a:xfrm>
           <a:prstGeom prst="rect">
             <a:avLst/>
@@ -3540,7 +3588,7 @@
                 <a:ea typeface="Calibri" pitchFamily="34" charset="-122"/>
                 <a:cs typeface="Calibri" pitchFamily="34" charset="-120"/>
               </a:rPr>
-              <a:t>ALCANCE</a:t>
+              <a:t>CUÁNTOS HACEN FALTA</a:t>
             </a:r>
             <a:endParaRPr lang="en-US" sz="1000" dirty="0"/>
           </a:p>
@@ -3554,8 +3602,8 @@
         </p:nvSpPr>
         <p:spPr>
           <a:xfrm>
-            <a:off x="731520" y="3758184"/>
-            <a:ext cx="5074920" cy="530352"/>
+            <a:off x="4480560" y="2862072"/>
+            <a:ext cx="3246120" cy="566928"/>
           </a:xfrm>
           <a:prstGeom prst="rect">
             <a:avLst/>
@@ -3571,7 +3619,7 @@
               <a:buNone/>
             </a:pPr>
             <a:r>
-              <a:rPr lang="en-US" sz="1100" dirty="0">
+              <a:rPr lang="en-US" sz="1150" dirty="0">
                 <a:solidFill>
                   <a:srgbClr val="2E2119"/>
                 </a:solidFill>
@@ -3579,9 +3627,9 @@
                 <a:ea typeface="Calibri" pitchFamily="34" charset="-122"/>
                 <a:cs typeface="Calibri" pitchFamily="34" charset="-120"/>
               </a:rPr>
-              <a:t>Nevera (sin cantidades) + Lista que se genera sola + Historial + Precios sobre nuestro propio historial + lectura de tickets y predicción. Cobro real, fuera de alcance.</a:t>
-            </a:r>
-            <a:endParaRPr lang="en-US" sz="1100" dirty="0"/>
+              <a:t>No aplica — no hay ingresos que equilibrar</a:t>
+            </a:r>
+            <a:endParaRPr lang="en-US" sz="1150" dirty="0"/>
           </a:p>
         </p:txBody>
       </p:sp>
@@ -3593,16 +3641,16 @@
         </p:nvSpPr>
         <p:spPr>
           <a:xfrm>
-            <a:off x="6172200" y="3447288"/>
-            <a:ext cx="5440680" cy="896112"/>
+            <a:off x="8046720" y="2514600"/>
+            <a:ext cx="3611880" cy="960120"/>
           </a:xfrm>
           <a:prstGeom prst="roundRect">
             <a:avLst>
-              <a:gd name="adj" fmla="val 12245"/>
+              <a:gd name="adj" fmla="val 11429"/>
             </a:avLst>
           </a:prstGeom>
           <a:solidFill>
-            <a:srgbClr val="EDE6DC"/>
+            <a:srgbClr val="F4E9DA"/>
           </a:solidFill>
           <a:ln/>
           <a:effectLst>
@@ -3622,8 +3670,8 @@
         </p:nvSpPr>
         <p:spPr>
           <a:xfrm>
-            <a:off x="6355080" y="3520440"/>
-            <a:ext cx="5074920" cy="237744"/>
+            <a:off x="8229600" y="2606040"/>
+            <a:ext cx="3246120" cy="256032"/>
           </a:xfrm>
           <a:prstGeom prst="rect">
             <a:avLst/>
@@ -3647,7 +3695,7 @@
                 <a:ea typeface="Calibri" pitchFamily="34" charset="-122"/>
                 <a:cs typeface="Calibri" pitchFamily="34" charset="-120"/>
               </a:rPr>
-              <a:t>CANAL</a:t>
+              <a:t>CUÁNTOS HAY</a:t>
             </a:r>
             <a:endParaRPr lang="en-US" sz="1000" dirty="0"/>
           </a:p>
@@ -3661,8 +3709,8 @@
         </p:nvSpPr>
         <p:spPr>
           <a:xfrm>
-            <a:off x="6355080" y="3758184"/>
-            <a:ext cx="5074920" cy="530352"/>
+            <a:off x="8229600" y="2862072"/>
+            <a:ext cx="3246120" cy="566928"/>
           </a:xfrm>
           <a:prstGeom prst="rect">
             <a:avLst/>
@@ -3678,7 +3726,7 @@
               <a:buNone/>
             </a:pPr>
             <a:r>
-              <a:rPr lang="en-US" sz="1100" dirty="0">
+              <a:rPr lang="en-US" sz="1150" dirty="0">
                 <a:solidFill>
                   <a:srgbClr val="2E2119"/>
                 </a:solidFill>
@@ -3686,9 +3734,9 @@
                 <a:ea typeface="Calibri" pitchFamily="34" charset="-122"/>
                 <a:cs typeface="Calibri" pitchFamily="34" charset="-120"/>
               </a:rPr>
-              <a:t>Directo: el propio hogar es el primer usuario real.</a:t>
-            </a:r>
-            <a:endParaRPr lang="en-US" sz="1100" dirty="0"/>
+              <a:t>≈ 650 pisos de estudiantes (suelo verificable)</a:t>
+            </a:r>
+            <a:endParaRPr lang="en-US" sz="1150" dirty="0"/>
           </a:p>
         </p:txBody>
       </p:sp>
@@ -3700,25 +3748,18 @@
         </p:nvSpPr>
         <p:spPr>
           <a:xfrm>
-            <a:off x="548640" y="4462272"/>
-            <a:ext cx="5440680" cy="896112"/>
+            <a:off x="548640" y="3657600"/>
+            <a:ext cx="5349240" cy="1417320"/>
           </a:xfrm>
           <a:prstGeom prst="roundRect">
             <a:avLst>
-              <a:gd name="adj" fmla="val 12245"/>
+              <a:gd name="adj" fmla="val 7742"/>
             </a:avLst>
           </a:prstGeom>
           <a:solidFill>
-            <a:srgbClr val="F4E9DA"/>
+            <a:srgbClr val="2E2119"/>
           </a:solidFill>
           <a:ln/>
-          <a:effectLst>
-            <a:outerShdw sx="100000" sy="100000" kx="0" ky="0" algn="bl" rotWithShape="0" blurRad="76200" dist="25400" dir="5400000">
-              <a:srgbClr val="000000">
-                <a:alpha val="12000"/>
-              </a:srgbClr>
-            </a:outerShdw>
-          </a:effectLst>
         </p:spPr>
       </p:sp>
       <p:sp>
@@ -3729,8 +3770,8 @@
         </p:nvSpPr>
         <p:spPr>
           <a:xfrm>
-            <a:off x="731520" y="4535424"/>
-            <a:ext cx="5074920" cy="237744"/>
+            <a:off x="548640" y="3767328"/>
+            <a:ext cx="5349240" cy="685800"/>
           </a:xfrm>
           <a:prstGeom prst="rect">
             <a:avLst/>
@@ -3742,60 +3783,165 @@
           <a:bodyPr wrap="square" lIns="0" tIns="0" rIns="0" bIns="0" rtlCol="0" anchor="ctr"/>
           <a:lstStyle/>
           <a:p>
-            <a:pPr indent="0" marL="0">
-              <a:buNone/>
-            </a:pPr>
-            <a:r>
-              <a:rPr lang="en-US" sz="1000" b="1" spc="100" kern="0" dirty="0">
-                <a:solidFill>
-                  <a:srgbClr val="C9682B"/>
-                </a:solidFill>
-                <a:latin typeface="Calibri" pitchFamily="34" charset="0"/>
-                <a:ea typeface="Calibri" pitchFamily="34" charset="-122"/>
-                <a:cs typeface="Calibri" pitchFamily="34" charset="-120"/>
-              </a:rPr>
-              <a:t>QUÉ NO HAREMOS</a:t>
+            <a:pPr algn="ctr" indent="0" marL="0">
+              <a:buNone/>
+            </a:pPr>
+            <a:r>
+              <a:rPr lang="en-US" sz="3400" b="1" dirty="0">
+                <a:solidFill>
+                  <a:srgbClr val="D9A441"/>
+                </a:solidFill>
+                <a:latin typeface="Cambria" pitchFamily="34" charset="0"/>
+                <a:ea typeface="Cambria" pitchFamily="34" charset="-122"/>
+                <a:cs typeface="Cambria" pitchFamily="34" charset="-120"/>
+              </a:rPr>
+              <a:t>0 €</a:t>
+            </a:r>
+            <a:endParaRPr lang="en-US" sz="3400" dirty="0"/>
+          </a:p>
+        </p:txBody>
+      </p:sp>
+      <p:sp>
+        <p:nvSpPr>
+          <p:cNvPr id="26" name="Text 23"/>
+          <p:cNvSpPr txBox="1"/>
+          <p:nvPr/>
+        </p:nvSpPr>
+        <p:spPr>
+          <a:xfrm>
+            <a:off x="777240" y="4434840"/>
+            <a:ext cx="4892040" cy="502920"/>
+          </a:xfrm>
+          <a:prstGeom prst="rect">
+            <a:avLst/>
+          </a:prstGeom>
+          <a:noFill/>
+          <a:ln/>
+        </p:spPr>
+        <p:txBody>
+          <a:bodyPr wrap="square" lIns="0" tIns="0" rIns="0" bIns="0" rtlCol="0" anchor="ctr"/>
+          <a:lstStyle/>
+          <a:p>
+            <a:pPr algn="ctr" indent="0" marL="0">
+              <a:buNone/>
+            </a:pPr>
+            <a:r>
+              <a:rPr lang="en-US" sz="1150" dirty="0">
+                <a:solidFill>
+                  <a:srgbClr val="FFFFFF"/>
+                </a:solidFill>
+                <a:latin typeface="Calibri" pitchFamily="34" charset="0"/>
+                <a:ea typeface="Calibri" pitchFamily="34" charset="-122"/>
+                <a:cs typeface="Calibri" pitchFamily="34" charset="-120"/>
+              </a:rPr>
+              <a:t>sin monetización — el objetivo es adopción real, no ingresos</a:t>
+            </a:r>
+            <a:endParaRPr lang="en-US" sz="1150" dirty="0"/>
+          </a:p>
+        </p:txBody>
+      </p:sp>
+      <p:sp>
+        <p:nvSpPr>
+          <p:cNvPr id="27" name="Shape 24"/>
+          <p:cNvSpPr/>
+          <p:nvPr/>
+        </p:nvSpPr>
+        <p:spPr>
+          <a:xfrm>
+            <a:off x="6035040" y="3657600"/>
+            <a:ext cx="5577840" cy="1417320"/>
+          </a:xfrm>
+          <a:prstGeom prst="roundRect">
+            <a:avLst>
+              <a:gd name="adj" fmla="val 6452"/>
+            </a:avLst>
+          </a:prstGeom>
+          <a:solidFill>
+            <a:srgbClr val="F6E9D8"/>
+          </a:solidFill>
+          <a:ln w="12700">
+            <a:solidFill>
+              <a:srgbClr val="C9682B"/>
+            </a:solidFill>
+            <a:prstDash val="solid"/>
+          </a:ln>
+        </p:spPr>
+      </p:sp>
+      <p:sp>
+        <p:nvSpPr>
+          <p:cNvPr id="28" name="Text 25"/>
+          <p:cNvSpPr txBox="1"/>
+          <p:nvPr/>
+        </p:nvSpPr>
+        <p:spPr>
+          <a:xfrm>
+            <a:off x="6263640" y="3767328"/>
+            <a:ext cx="5120640" cy="1188720"/>
+          </a:xfrm>
+          <a:prstGeom prst="rect">
+            <a:avLst/>
+          </a:prstGeom>
+          <a:noFill/>
+          <a:ln/>
+        </p:spPr>
+        <p:txBody>
+          <a:bodyPr wrap="square" lIns="0" tIns="0" rIns="0" bIns="0" rtlCol="0" anchor="ctr"/>
+          <a:lstStyle/>
+          <a:p>
+            <a:pPr indent="0" marL="0">
+              <a:buNone/>
+            </a:pPr>
+            <a:r>
+              <a:rPr lang="en-US" sz="1150" i="1" dirty="0">
+                <a:solidFill>
+                  <a:srgbClr val="2E2119"/>
+                </a:solidFill>
+                <a:latin typeface="Calibri" pitchFamily="34" charset="0"/>
+                <a:ea typeface="Calibri" pitchFamily="34" charset="-122"/>
+                <a:cs typeface="Calibri" pitchFamily="34" charset="-120"/>
+              </a:rPr>
+              <a:t>Lectura honesta: el backend en Render "duerme" sin uso. Sigue habiendo un reto, pero ya no es económico — es conseguir que la gente use algo nuevo en vez de seguir con WhatsApp o papel, que ya conocen.</a:t>
+            </a:r>
+            <a:endParaRPr lang="en-US" sz="1150" dirty="0"/>
+          </a:p>
+        </p:txBody>
+      </p:sp>
+      <p:sp>
+        <p:nvSpPr>
+          <p:cNvPr id="29" name="Text 26"/>
+          <p:cNvSpPr txBox="1"/>
+          <p:nvPr/>
+        </p:nvSpPr>
+        <p:spPr>
+          <a:xfrm>
+            <a:off x="548640" y="5349240"/>
+            <a:ext cx="11094415" cy="274320"/>
+          </a:xfrm>
+          <a:prstGeom prst="rect">
+            <a:avLst/>
+          </a:prstGeom>
+          <a:noFill/>
+          <a:ln/>
+        </p:spPr>
+        <p:txBody>
+          <a:bodyPr wrap="square" lIns="0" tIns="0" rIns="0" bIns="0" rtlCol="0" anchor="ctr"/>
+          <a:lstStyle/>
+          <a:p>
+            <a:pPr indent="0" marL="0">
+              <a:buNone/>
+            </a:pPr>
+            <a:r>
+              <a:rPr lang="en-US" sz="1000" i="1" dirty="0">
+                <a:solidFill>
+                  <a:srgbClr val="8A7A6D"/>
+                </a:solidFill>
+                <a:latin typeface="Calibri" pitchFamily="34" charset="0"/>
+                <a:ea typeface="Calibri" pitchFamily="34" charset="-122"/>
+                <a:cs typeface="Calibri" pitchFamily="34" charset="-120"/>
+              </a:rPr>
+              <a:t>Decisión explícita (17/09): no se cobra nada a quien use la app, ni se adelanta dinero propio en hosting — coste fijo 0€, siempre.</a:t>
             </a:r>
             <a:endParaRPr lang="en-US" sz="1000" dirty="0"/>
-          </a:p>
-        </p:txBody>
-      </p:sp>
-      <p:sp>
-        <p:nvSpPr>
-          <p:cNvPr id="26" name="Text 23"/>
-          <p:cNvSpPr txBox="1"/>
-          <p:nvPr/>
-        </p:nvSpPr>
-        <p:spPr>
-          <a:xfrm>
-            <a:off x="731520" y="4773168"/>
-            <a:ext cx="5074920" cy="530352"/>
-          </a:xfrm>
-          <a:prstGeom prst="rect">
-            <a:avLst/>
-          </a:prstGeom>
-          <a:noFill/>
-          <a:ln/>
-        </p:spPr>
-        <p:txBody>
-          <a:bodyPr wrap="square" lIns="0" tIns="0" rIns="0" bIns="0" rtlCol="0" anchor="t"/>
-          <a:lstStyle/>
-          <a:p>
-            <a:pPr indent="0" marL="0">
-              <a:buNone/>
-            </a:pPr>
-            <a:r>
-              <a:rPr lang="en-US" sz="1100" dirty="0">
-                <a:solidFill>
-                  <a:srgbClr val="2E2119"/>
-                </a:solidFill>
-                <a:latin typeface="Calibri" pitchFamily="34" charset="0"/>
-                <a:ea typeface="Calibri" pitchFamily="34" charset="-122"/>
-                <a:cs typeface="Calibri" pitchFamily="34" charset="-120"/>
-              </a:rPr>
-              <a:t>Código de barras, cobro con tarjeta, notificaciones push nativas (Telegram es la excepción), liquidar deudas de verdad.</a:t>
-            </a:r>
-            <a:endParaRPr lang="en-US" sz="1100" dirty="0"/>
           </a:p>
         </p:txBody>
       </p:sp>
@@ -3810,6 +3956,1751 @@
 <file path=ppt/slides/slide12.xml><?xml version="1.0" encoding="utf-8"?>
 <p:sld xmlns:a="http://schemas.openxmlformats.org/drawingml/2006/main" xmlns:r="http://schemas.openxmlformats.org/officeDocument/2006/relationships" xmlns:p="http://schemas.openxmlformats.org/presentationml/2006/main">
   <p:cSld name="Slide 12">
+    <p:bg>
+      <p:bgPr>
+        <a:solidFill>
+          <a:srgbClr val="FFFFFF"/>
+        </a:solidFill>
+      </p:bgPr>
+    </p:bg>
+    <p:spTree>
+      <p:nvGrpSpPr>
+        <p:cNvPr id="1" name=""/>
+        <p:cNvGrpSpPr/>
+        <p:nvPr/>
+      </p:nvGrpSpPr>
+      <p:grpSpPr>
+        <a:xfrm>
+          <a:off x="0" y="0"/>
+          <a:ext cx="0" cy="0"/>
+          <a:chOff x="0" y="0"/>
+          <a:chExt cx="0" cy="0"/>
+        </a:xfrm>
+      </p:grpSpPr>
+      <p:sp>
+        <p:nvSpPr>
+          <p:cNvPr id="2" name="Shape 0"/>
+          <p:cNvSpPr/>
+          <p:nvPr/>
+        </p:nvSpPr>
+        <p:spPr>
+          <a:xfrm>
+            <a:off x="548640" y="457200"/>
+            <a:ext cx="566928" cy="566928"/>
+          </a:xfrm>
+          <a:prstGeom prst="ellipse">
+            <a:avLst/>
+          </a:prstGeom>
+          <a:solidFill>
+            <a:srgbClr val="C9682B"/>
+          </a:solidFill>
+          <a:ln/>
+        </p:spPr>
+      </p:sp>
+      <p:pic>
+        <p:nvPicPr>
+          <p:cNvPr id="3" name="Image 0" descr="preencoded.png">    </p:cNvPr>
+          <p:cNvPicPr>
+            <a:picLocks noChangeAspect="1"/>
+          </p:cNvPicPr>
+          <p:nvPr/>
+        </p:nvPicPr>
+        <p:blipFill>
+          <a:blip r:embed="rId1"/>
+          <a:stretch>
+            <a:fillRect/>
+          </a:stretch>
+        </p:blipFill>
+        <p:spPr>
+          <a:xfrm>
+            <a:off x="684703" y="593263"/>
+            <a:ext cx="294803" cy="294803"/>
+          </a:xfrm>
+          <a:prstGeom prst="rect">
+            <a:avLst/>
+          </a:prstGeom>
+        </p:spPr>
+      </p:pic>
+      <p:sp>
+        <p:nvSpPr>
+          <p:cNvPr id="4" name="Text 1"/>
+          <p:cNvSpPr txBox="1"/>
+          <p:nvPr/>
+        </p:nvSpPr>
+        <p:spPr>
+          <a:xfrm>
+            <a:off x="1280160" y="438912"/>
+            <a:ext cx="7315200" cy="274320"/>
+          </a:xfrm>
+          <a:prstGeom prst="rect">
+            <a:avLst/>
+          </a:prstGeom>
+          <a:noFill/>
+          <a:ln/>
+        </p:spPr>
+        <p:txBody>
+          <a:bodyPr wrap="square" lIns="0" tIns="0" rIns="0" bIns="0" rtlCol="0" anchor="ctr"/>
+          <a:lstStyle/>
+          <a:p>
+            <a:pPr indent="0" marL="0">
+              <a:buNone/>
+            </a:pPr>
+            <a:r>
+              <a:rPr lang="en-US" sz="1200" b="1" spc="200" kern="0" dirty="0">
+                <a:solidFill>
+                  <a:srgbClr val="C9682B"/>
+                </a:solidFill>
+                <a:latin typeface="Calibri" pitchFamily="34" charset="0"/>
+                <a:ea typeface="Calibri" pitchFamily="34" charset="-122"/>
+                <a:cs typeface="Calibri" pitchFamily="34" charset="-120"/>
+              </a:rPr>
+              <a:t>PASO 5</a:t>
+            </a:r>
+            <a:endParaRPr lang="en-US" sz="1200" dirty="0"/>
+          </a:p>
+        </p:txBody>
+      </p:sp>
+      <p:sp>
+        <p:nvSpPr>
+          <p:cNvPr id="5" name="Text 2"/>
+          <p:cNvSpPr txBox="1"/>
+          <p:nvPr/>
+        </p:nvSpPr>
+        <p:spPr>
+          <a:xfrm>
+            <a:off x="1280160" y="676656"/>
+            <a:ext cx="9601200" cy="502920"/>
+          </a:xfrm>
+          <a:prstGeom prst="rect">
+            <a:avLst/>
+          </a:prstGeom>
+          <a:noFill/>
+          <a:ln/>
+        </p:spPr>
+        <p:txBody>
+          <a:bodyPr wrap="square" lIns="0" tIns="0" rIns="0" bIns="0" rtlCol="0" anchor="ctr"/>
+          <a:lstStyle/>
+          <a:p>
+            <a:pPr indent="0" marL="0">
+              <a:buNone/>
+            </a:pPr>
+            <a:r>
+              <a:rPr lang="en-US" sz="2800" b="1" dirty="0">
+                <a:solidFill>
+                  <a:srgbClr val="2E2119"/>
+                </a:solidFill>
+                <a:latin typeface="Cambria" pitchFamily="34" charset="0"/>
+                <a:ea typeface="Cambria" pitchFamily="34" charset="-122"/>
+                <a:cs typeface="Cambria" pitchFamily="34" charset="-120"/>
+              </a:rPr>
+              <a:t>Las 3 columnas del alcance</a:t>
+            </a:r>
+            <a:endParaRPr lang="en-US" sz="2800" dirty="0"/>
+          </a:p>
+        </p:txBody>
+      </p:sp>
+      <p:sp>
+        <p:nvSpPr>
+          <p:cNvPr id="6" name="Shape 3"/>
+          <p:cNvSpPr/>
+          <p:nvPr/>
+        </p:nvSpPr>
+        <p:spPr>
+          <a:xfrm>
+            <a:off x="548640" y="1417320"/>
+            <a:ext cx="3611880" cy="3246120"/>
+          </a:xfrm>
+          <a:prstGeom prst="roundRect">
+            <a:avLst>
+              <a:gd name="adj" fmla="val 3380"/>
+            </a:avLst>
+          </a:prstGeom>
+          <a:solidFill>
+            <a:srgbClr val="F6E4D3"/>
+          </a:solidFill>
+          <a:ln/>
+          <a:effectLst>
+            <a:outerShdw sx="100000" sy="100000" kx="0" ky="0" algn="bl" rotWithShape="0" blurRad="76200" dist="25400" dir="5400000">
+              <a:srgbClr val="000000">
+                <a:alpha val="12000"/>
+              </a:srgbClr>
+            </a:outerShdw>
+          </a:effectLst>
+        </p:spPr>
+      </p:sp>
+      <p:sp>
+        <p:nvSpPr>
+          <p:cNvPr id="7" name="Shape 4"/>
+          <p:cNvSpPr/>
+          <p:nvPr/>
+        </p:nvSpPr>
+        <p:spPr>
+          <a:xfrm>
+            <a:off x="731520" y="1600200"/>
+            <a:ext cx="3246120" cy="411480"/>
+          </a:xfrm>
+          <a:prstGeom prst="roundRect">
+            <a:avLst>
+              <a:gd name="adj" fmla="val 17778"/>
+            </a:avLst>
+          </a:prstGeom>
+          <a:solidFill>
+            <a:srgbClr val="C9682B"/>
+          </a:solidFill>
+          <a:ln/>
+        </p:spPr>
+      </p:sp>
+      <p:sp>
+        <p:nvSpPr>
+          <p:cNvPr id="8" name="Text 5"/>
+          <p:cNvSpPr txBox="1"/>
+          <p:nvPr/>
+        </p:nvSpPr>
+        <p:spPr>
+          <a:xfrm>
+            <a:off x="731520" y="1600200"/>
+            <a:ext cx="3246120" cy="411480"/>
+          </a:xfrm>
+          <a:prstGeom prst="rect">
+            <a:avLst/>
+          </a:prstGeom>
+          <a:noFill/>
+          <a:ln/>
+        </p:spPr>
+        <p:txBody>
+          <a:bodyPr wrap="square" lIns="0" tIns="0" rIns="0" bIns="0" rtlCol="0" anchor="ctr"/>
+          <a:lstStyle/>
+          <a:p>
+            <a:pPr algn="ctr" indent="0" marL="0">
+              <a:buNone/>
+            </a:pPr>
+            <a:r>
+              <a:rPr lang="en-US" sz="1400" b="1" dirty="0">
+                <a:solidFill>
+                  <a:srgbClr val="FFFFFF"/>
+                </a:solidFill>
+                <a:latin typeface="Cambria" pitchFamily="34" charset="0"/>
+                <a:ea typeface="Cambria" pitchFamily="34" charset="-122"/>
+                <a:cs typeface="Cambria" pitchFamily="34" charset="-120"/>
+              </a:rPr>
+              <a:t>Lo construimos</a:t>
+            </a:r>
+            <a:endParaRPr lang="en-US" sz="1400" dirty="0"/>
+          </a:p>
+        </p:txBody>
+      </p:sp>
+      <p:sp>
+        <p:nvSpPr>
+          <p:cNvPr id="9" name="Text 6"/>
+          <p:cNvSpPr txBox="1"/>
+          <p:nvPr/>
+        </p:nvSpPr>
+        <p:spPr>
+          <a:xfrm>
+            <a:off x="777240" y="2194560"/>
+            <a:ext cx="3154680" cy="2286000"/>
+          </a:xfrm>
+          <a:prstGeom prst="rect">
+            <a:avLst/>
+          </a:prstGeom>
+          <a:noFill/>
+          <a:ln/>
+        </p:spPr>
+        <p:txBody>
+          <a:bodyPr wrap="square" lIns="0" tIns="0" rIns="0" bIns="0" rtlCol="0" anchor="t"/>
+          <a:lstStyle/>
+          <a:p>
+            <a:pPr marL="342900" indent="-342900">
+              <a:spcAft>
+                <a:spcPts val="700"/>
+              </a:spcAft>
+              <a:buSzPct val="100000"/>
+              <a:buChar char="•"/>
+            </a:pPr>
+            <a:r>
+              <a:rPr lang="en-US" sz="1000" dirty="0">
+                <a:solidFill>
+                  <a:srgbClr val="2E2119"/>
+                </a:solidFill>
+                <a:latin typeface="Calibri" pitchFamily="34" charset="0"/>
+                <a:ea typeface="Calibri" pitchFamily="34" charset="-122"/>
+                <a:cs typeface="Calibri" pitchFamily="34" charset="-120"/>
+              </a:rPr>
+              <a:t>Nevera: 3 estados (bien/queda poco/se acabó), sin cantidades — se rellena sola al comprar</a:t>
+            </a:r>
+            <a:endParaRPr lang="en-US" sz="1000" dirty="0"/>
+          </a:p>
+          <a:p>
+            <a:pPr marL="342900" indent="-342900">
+              <a:spcAft>
+                <a:spcPts val="700"/>
+              </a:spcAft>
+              <a:buSzPct val="100000"/>
+              <a:buChar char="•"/>
+            </a:pPr>
+            <a:r>
+              <a:rPr lang="en-US" sz="1000" dirty="0">
+                <a:solidFill>
+                  <a:srgbClr val="2E2119"/>
+                </a:solidFill>
+                <a:latin typeface="Calibri" pitchFamily="34" charset="0"/>
+                <a:ea typeface="Calibri" pitchFamily="34" charset="-122"/>
+                <a:cs typeface="Calibri" pitchFamily="34" charset="-120"/>
+              </a:rPr>
+              <a:t>Lista que se genera sola a partir de la nevera, con concurrencia</a:t>
+            </a:r>
+            <a:endParaRPr lang="en-US" sz="1000" dirty="0"/>
+          </a:p>
+          <a:p>
+            <a:pPr marL="342900" indent="-342900">
+              <a:spcAft>
+                <a:spcPts val="700"/>
+              </a:spcAft>
+              <a:buSzPct val="100000"/>
+              <a:buChar char="•"/>
+            </a:pPr>
+            <a:r>
+              <a:rPr lang="en-US" sz="1000" dirty="0">
+                <a:solidFill>
+                  <a:srgbClr val="2E2119"/>
+                </a:solidFill>
+                <a:latin typeface="Calibri" pitchFamily="34" charset="0"/>
+                <a:ea typeface="Calibri" pitchFamily="34" charset="-122"/>
+                <a:cs typeface="Calibri" pitchFamily="34" charset="-120"/>
+              </a:rPr>
+              <a:t>Historial + cálculo de quién debe a quién</a:t>
+            </a:r>
+            <a:endParaRPr lang="en-US" sz="1000" dirty="0"/>
+          </a:p>
+          <a:p>
+            <a:pPr marL="342900" indent="-342900">
+              <a:spcAft>
+                <a:spcPts val="700"/>
+              </a:spcAft>
+              <a:buSzPct val="100000"/>
+              <a:buChar char="•"/>
+            </a:pPr>
+            <a:r>
+              <a:rPr lang="en-US" sz="1000" dirty="0">
+                <a:solidFill>
+                  <a:srgbClr val="2E2119"/>
+                </a:solidFill>
+                <a:latin typeface="Calibri" pitchFamily="34" charset="0"/>
+                <a:ea typeface="Calibri" pitchFamily="34" charset="-122"/>
+                <a:cs typeface="Calibri" pitchFamily="34" charset="-120"/>
+              </a:rPr>
+              <a:t>Precios sobre nuestro propio historial de compras</a:t>
+            </a:r>
+            <a:endParaRPr lang="en-US" sz="1000" dirty="0"/>
+          </a:p>
+          <a:p>
+            <a:pPr marL="342900" indent="-342900">
+              <a:spcAft>
+                <a:spcPts val="700"/>
+              </a:spcAft>
+              <a:buSzPct val="100000"/>
+              <a:buChar char="•"/>
+            </a:pPr>
+            <a:r>
+              <a:rPr lang="en-US" sz="1000" dirty="0">
+                <a:solidFill>
+                  <a:srgbClr val="2E2119"/>
+                </a:solidFill>
+                <a:latin typeface="Calibri" pitchFamily="34" charset="0"/>
+                <a:ea typeface="Calibri" pitchFamily="34" charset="-122"/>
+                <a:cs typeface="Calibri" pitchFamily="34" charset="-120"/>
+              </a:rPr>
+              <a:t>Predicción de reposición (aritmética sobre eventos propios)</a:t>
+            </a:r>
+            <a:endParaRPr lang="en-US" sz="1000" dirty="0"/>
+          </a:p>
+        </p:txBody>
+      </p:sp>
+      <p:sp>
+        <p:nvSpPr>
+          <p:cNvPr id="10" name="Shape 7"/>
+          <p:cNvSpPr/>
+          <p:nvPr/>
+        </p:nvSpPr>
+        <p:spPr>
+          <a:xfrm>
+            <a:off x="4297680" y="1417320"/>
+            <a:ext cx="3611880" cy="3246120"/>
+          </a:xfrm>
+          <a:prstGeom prst="roundRect">
+            <a:avLst>
+              <a:gd name="adj" fmla="val 3380"/>
+            </a:avLst>
+          </a:prstGeom>
+          <a:solidFill>
+            <a:srgbClr val="F4EFE8"/>
+          </a:solidFill>
+          <a:ln/>
+          <a:effectLst>
+            <a:outerShdw sx="100000" sy="100000" kx="0" ky="0" algn="bl" rotWithShape="0" blurRad="76200" dist="25400" dir="5400000">
+              <a:srgbClr val="000000">
+                <a:alpha val="12000"/>
+              </a:srgbClr>
+            </a:outerShdw>
+          </a:effectLst>
+        </p:spPr>
+      </p:sp>
+      <p:sp>
+        <p:nvSpPr>
+          <p:cNvPr id="11" name="Shape 8"/>
+          <p:cNvSpPr/>
+          <p:nvPr/>
+        </p:nvSpPr>
+        <p:spPr>
+          <a:xfrm>
+            <a:off x="4480560" y="1600200"/>
+            <a:ext cx="3246120" cy="411480"/>
+          </a:xfrm>
+          <a:prstGeom prst="roundRect">
+            <a:avLst>
+              <a:gd name="adj" fmla="val 17778"/>
+            </a:avLst>
+          </a:prstGeom>
+          <a:solidFill>
+            <a:srgbClr val="D9A441"/>
+          </a:solidFill>
+          <a:ln/>
+        </p:spPr>
+      </p:sp>
+      <p:sp>
+        <p:nvSpPr>
+          <p:cNvPr id="12" name="Text 9"/>
+          <p:cNvSpPr txBox="1"/>
+          <p:nvPr/>
+        </p:nvSpPr>
+        <p:spPr>
+          <a:xfrm>
+            <a:off x="4480560" y="1600200"/>
+            <a:ext cx="3246120" cy="411480"/>
+          </a:xfrm>
+          <a:prstGeom prst="rect">
+            <a:avLst/>
+          </a:prstGeom>
+          <a:noFill/>
+          <a:ln/>
+        </p:spPr>
+        <p:txBody>
+          <a:bodyPr wrap="square" lIns="0" tIns="0" rIns="0" bIns="0" rtlCol="0" anchor="ctr"/>
+          <a:lstStyle/>
+          <a:p>
+            <a:pPr algn="ctr" indent="0" marL="0">
+              <a:buNone/>
+            </a:pPr>
+            <a:r>
+              <a:rPr lang="en-US" sz="1400" b="1" dirty="0">
+                <a:solidFill>
+                  <a:srgbClr val="FFFFFF"/>
+                </a:solidFill>
+                <a:latin typeface="Cambria" pitchFamily="34" charset="0"/>
+                <a:ea typeface="Cambria" pitchFamily="34" charset="-122"/>
+                <a:cs typeface="Cambria" pitchFamily="34" charset="-120"/>
+              </a:rPr>
+              <a:t>Lo hace un servicio externo</a:t>
+            </a:r>
+            <a:endParaRPr lang="en-US" sz="1400" dirty="0"/>
+          </a:p>
+        </p:txBody>
+      </p:sp>
+      <p:sp>
+        <p:nvSpPr>
+          <p:cNvPr id="13" name="Text 10"/>
+          <p:cNvSpPr txBox="1"/>
+          <p:nvPr/>
+        </p:nvSpPr>
+        <p:spPr>
+          <a:xfrm>
+            <a:off x="4526280" y="2194560"/>
+            <a:ext cx="3154680" cy="2286000"/>
+          </a:xfrm>
+          <a:prstGeom prst="rect">
+            <a:avLst/>
+          </a:prstGeom>
+          <a:noFill/>
+          <a:ln/>
+        </p:spPr>
+        <p:txBody>
+          <a:bodyPr wrap="square" lIns="0" tIns="0" rIns="0" bIns="0" rtlCol="0" anchor="t"/>
+          <a:lstStyle/>
+          <a:p>
+            <a:pPr marL="342900" indent="-342900">
+              <a:spcAft>
+                <a:spcPts val="700"/>
+              </a:spcAft>
+              <a:buSzPct val="100000"/>
+              <a:buChar char="•"/>
+            </a:pPr>
+            <a:r>
+              <a:rPr lang="en-US" sz="1000" dirty="0">
+                <a:solidFill>
+                  <a:srgbClr val="2E2119"/>
+                </a:solidFill>
+                <a:latin typeface="Calibri" pitchFamily="34" charset="0"/>
+                <a:ea typeface="Calibri" pitchFamily="34" charset="-122"/>
+                <a:cs typeface="Calibri" pitchFamily="34" charset="-120"/>
+              </a:rPr>
+              <a:t>Diccionario de productos (Open Food Facts, gratis)</a:t>
+            </a:r>
+            <a:endParaRPr lang="en-US" sz="1000" dirty="0"/>
+          </a:p>
+          <a:p>
+            <a:pPr marL="342900" indent="-342900">
+              <a:spcAft>
+                <a:spcPts val="700"/>
+              </a:spcAft>
+              <a:buSzPct val="100000"/>
+              <a:buChar char="•"/>
+            </a:pPr>
+            <a:r>
+              <a:rPr lang="en-US" sz="1000" dirty="0">
+                <a:solidFill>
+                  <a:srgbClr val="2E2119"/>
+                </a:solidFill>
+                <a:latin typeface="Calibri" pitchFamily="34" charset="0"/>
+                <a:ea typeface="Calibri" pitchFamily="34" charset="-122"/>
+                <a:cs typeface="Calibri" pitchFamily="34" charset="-120"/>
+              </a:rPr>
+              <a:t>Lectura de tickets → items (Groq API, free tier — la IA solo se usa aquí)</a:t>
+            </a:r>
+            <a:endParaRPr lang="en-US" sz="1000" dirty="0"/>
+          </a:p>
+          <a:p>
+            <a:pPr marL="342900" indent="-342900">
+              <a:spcAft>
+                <a:spcPts val="700"/>
+              </a:spcAft>
+              <a:buSzPct val="100000"/>
+              <a:buChar char="•"/>
+            </a:pPr>
+            <a:r>
+              <a:rPr lang="en-US" sz="1000" dirty="0">
+                <a:solidFill>
+                  <a:srgbClr val="2E2119"/>
+                </a:solidFill>
+                <a:latin typeface="Calibri" pitchFamily="34" charset="0"/>
+                <a:ea typeface="Calibri" pitchFamily="34" charset="-122"/>
+                <a:cs typeface="Calibri" pitchFamily="34" charset="-120"/>
+              </a:rPr>
+              <a:t>Aviso de turno de compra (bot de Telegram, gratis)</a:t>
+            </a:r>
+            <a:endParaRPr lang="en-US" sz="1000" dirty="0"/>
+          </a:p>
+        </p:txBody>
+      </p:sp>
+      <p:sp>
+        <p:nvSpPr>
+          <p:cNvPr id="14" name="Shape 11"/>
+          <p:cNvSpPr/>
+          <p:nvPr/>
+        </p:nvSpPr>
+        <p:spPr>
+          <a:xfrm>
+            <a:off x="8046720" y="1417320"/>
+            <a:ext cx="3611880" cy="3246120"/>
+          </a:xfrm>
+          <a:prstGeom prst="roundRect">
+            <a:avLst>
+              <a:gd name="adj" fmla="val 3380"/>
+            </a:avLst>
+          </a:prstGeom>
+          <a:solidFill>
+            <a:srgbClr val="F4EFE8"/>
+          </a:solidFill>
+          <a:ln/>
+          <a:effectLst>
+            <a:outerShdw sx="100000" sy="100000" kx="0" ky="0" algn="bl" rotWithShape="0" blurRad="76200" dist="25400" dir="5400000">
+              <a:srgbClr val="000000">
+                <a:alpha val="12000"/>
+              </a:srgbClr>
+            </a:outerShdw>
+          </a:effectLst>
+        </p:spPr>
+      </p:sp>
+      <p:sp>
+        <p:nvSpPr>
+          <p:cNvPr id="15" name="Shape 12"/>
+          <p:cNvSpPr/>
+          <p:nvPr/>
+        </p:nvSpPr>
+        <p:spPr>
+          <a:xfrm>
+            <a:off x="8229600" y="1600200"/>
+            <a:ext cx="3246120" cy="411480"/>
+          </a:xfrm>
+          <a:prstGeom prst="roundRect">
+            <a:avLst>
+              <a:gd name="adj" fmla="val 17778"/>
+            </a:avLst>
+          </a:prstGeom>
+          <a:solidFill>
+            <a:srgbClr val="8A7A6D"/>
+          </a:solidFill>
+          <a:ln/>
+        </p:spPr>
+      </p:sp>
+      <p:sp>
+        <p:nvSpPr>
+          <p:cNvPr id="16" name="Text 13"/>
+          <p:cNvSpPr txBox="1"/>
+          <p:nvPr/>
+        </p:nvSpPr>
+        <p:spPr>
+          <a:xfrm>
+            <a:off x="8229600" y="1600200"/>
+            <a:ext cx="3246120" cy="411480"/>
+          </a:xfrm>
+          <a:prstGeom prst="rect">
+            <a:avLst/>
+          </a:prstGeom>
+          <a:noFill/>
+          <a:ln/>
+        </p:spPr>
+        <p:txBody>
+          <a:bodyPr wrap="square" lIns="0" tIns="0" rIns="0" bIns="0" rtlCol="0" anchor="ctr"/>
+          <a:lstStyle/>
+          <a:p>
+            <a:pPr algn="ctr" indent="0" marL="0">
+              <a:buNone/>
+            </a:pPr>
+            <a:r>
+              <a:rPr lang="en-US" sz="1400" b="1" dirty="0">
+                <a:solidFill>
+                  <a:srgbClr val="FFFFFF"/>
+                </a:solidFill>
+                <a:latin typeface="Cambria" pitchFamily="34" charset="0"/>
+                <a:ea typeface="Cambria" pitchFamily="34" charset="-122"/>
+                <a:cs typeface="Cambria" pitchFamily="34" charset="-120"/>
+              </a:rPr>
+              <a:t>No se hace este curso</a:t>
+            </a:r>
+            <a:endParaRPr lang="en-US" sz="1400" dirty="0"/>
+          </a:p>
+        </p:txBody>
+      </p:sp>
+      <p:sp>
+        <p:nvSpPr>
+          <p:cNvPr id="17" name="Text 14"/>
+          <p:cNvSpPr txBox="1"/>
+          <p:nvPr/>
+        </p:nvSpPr>
+        <p:spPr>
+          <a:xfrm>
+            <a:off x="8275320" y="2194560"/>
+            <a:ext cx="3154680" cy="2286000"/>
+          </a:xfrm>
+          <a:prstGeom prst="rect">
+            <a:avLst/>
+          </a:prstGeom>
+          <a:noFill/>
+          <a:ln/>
+        </p:spPr>
+        <p:txBody>
+          <a:bodyPr wrap="square" lIns="0" tIns="0" rIns="0" bIns="0" rtlCol="0" anchor="t"/>
+          <a:lstStyle/>
+          <a:p>
+            <a:pPr marL="342900" indent="-342900">
+              <a:spcAft>
+                <a:spcPts val="700"/>
+              </a:spcAft>
+              <a:buSzPct val="100000"/>
+              <a:buChar char="•"/>
+            </a:pPr>
+            <a:r>
+              <a:rPr lang="en-US" sz="1000" dirty="0">
+                <a:solidFill>
+                  <a:srgbClr val="2E2119"/>
+                </a:solidFill>
+                <a:latin typeface="Calibri" pitchFamily="34" charset="0"/>
+                <a:ea typeface="Calibri" pitchFamily="34" charset="-122"/>
+                <a:cs typeface="Calibri" pitchFamily="34" charset="-120"/>
+              </a:rPr>
+              <a:t>Escaneo de código de barras</a:t>
+            </a:r>
+            <a:endParaRPr lang="en-US" sz="1000" dirty="0"/>
+          </a:p>
+          <a:p>
+            <a:pPr marL="342900" indent="-342900">
+              <a:spcAft>
+                <a:spcPts val="700"/>
+              </a:spcAft>
+              <a:buSzPct val="100000"/>
+              <a:buChar char="•"/>
+            </a:pPr>
+            <a:r>
+              <a:rPr lang="en-US" sz="1000" dirty="0">
+                <a:solidFill>
+                  <a:srgbClr val="2E2119"/>
+                </a:solidFill>
+                <a:latin typeface="Calibri" pitchFamily="34" charset="0"/>
+                <a:ea typeface="Calibri" pitchFamily="34" charset="-122"/>
+                <a:cs typeface="Calibri" pitchFamily="34" charset="-120"/>
+              </a:rPr>
+              <a:t>Cobro real con tarjeta</a:t>
+            </a:r>
+            <a:endParaRPr lang="en-US" sz="1000" dirty="0"/>
+          </a:p>
+          <a:p>
+            <a:pPr marL="342900" indent="-342900">
+              <a:spcAft>
+                <a:spcPts val="700"/>
+              </a:spcAft>
+              <a:buSzPct val="100000"/>
+              <a:buChar char="•"/>
+            </a:pPr>
+            <a:r>
+              <a:rPr lang="en-US" sz="1000" dirty="0">
+                <a:solidFill>
+                  <a:srgbClr val="2E2119"/>
+                </a:solidFill>
+                <a:latin typeface="Calibri" pitchFamily="34" charset="0"/>
+                <a:ea typeface="Calibri" pitchFamily="34" charset="-122"/>
+                <a:cs typeface="Calibri" pitchFamily="34" charset="-120"/>
+              </a:rPr>
+              <a:t>Notificaciones push nativas (Telegram es la excepción)</a:t>
+            </a:r>
+            <a:endParaRPr lang="en-US" sz="1000" dirty="0"/>
+          </a:p>
+          <a:p>
+            <a:pPr marL="342900" indent="-342900">
+              <a:spcAft>
+                <a:spcPts val="700"/>
+              </a:spcAft>
+              <a:buSzPct val="100000"/>
+              <a:buChar char="•"/>
+            </a:pPr>
+            <a:r>
+              <a:rPr lang="en-US" sz="1000" dirty="0">
+                <a:solidFill>
+                  <a:srgbClr val="2E2119"/>
+                </a:solidFill>
+                <a:latin typeface="Calibri" pitchFamily="34" charset="0"/>
+                <a:ea typeface="Calibri" pitchFamily="34" charset="-122"/>
+                <a:cs typeface="Calibri" pitchFamily="34" charset="-120"/>
+              </a:rPr>
+              <a:t>Liquidar deudas de verdad</a:t>
+            </a:r>
+            <a:endParaRPr lang="en-US" sz="1000" dirty="0"/>
+          </a:p>
+        </p:txBody>
+      </p:sp>
+      <p:sp>
+        <p:nvSpPr>
+          <p:cNvPr id="18" name="Shape 15"/>
+          <p:cNvSpPr/>
+          <p:nvPr/>
+        </p:nvSpPr>
+        <p:spPr>
+          <a:xfrm>
+            <a:off x="548640" y="4846320"/>
+            <a:ext cx="11064240" cy="1417320"/>
+          </a:xfrm>
+          <a:prstGeom prst="roundRect">
+            <a:avLst>
+              <a:gd name="adj" fmla="val 7742"/>
+            </a:avLst>
+          </a:prstGeom>
+          <a:solidFill>
+            <a:srgbClr val="2E2119"/>
+          </a:solidFill>
+          <a:ln/>
+        </p:spPr>
+      </p:sp>
+      <p:sp>
+        <p:nvSpPr>
+          <p:cNvPr id="19" name="Text 16"/>
+          <p:cNvSpPr txBox="1"/>
+          <p:nvPr/>
+        </p:nvSpPr>
+        <p:spPr>
+          <a:xfrm>
+            <a:off x="868680" y="4956048"/>
+            <a:ext cx="10424160" cy="914400"/>
+          </a:xfrm>
+          <a:prstGeom prst="rect">
+            <a:avLst/>
+          </a:prstGeom>
+          <a:noFill/>
+          <a:ln/>
+        </p:spPr>
+        <p:txBody>
+          <a:bodyPr wrap="square" lIns="0" tIns="0" rIns="0" bIns="0" rtlCol="0" anchor="ctr"/>
+          <a:lstStyle/>
+          <a:p>
+            <a:pPr indent="0" marL="0">
+              <a:buNone/>
+            </a:pPr>
+            <a:r>
+              <a:rPr lang="en-US" sz="1250" i="1" dirty="0">
+                <a:solidFill>
+                  <a:srgbClr val="D9A441"/>
+                </a:solidFill>
+                <a:latin typeface="Calibri" pitchFamily="34" charset="0"/>
+                <a:ea typeface="Calibri" pitchFamily="34" charset="-122"/>
+                <a:cs typeface="Calibri" pitchFamily="34" charset="-120"/>
+              </a:rPr>
+              <a:t>"Un hogar de A Coruña deja de escribir la lista de la compra: la nevera se rellena sola al comprar, avisa cuando algo se acaba, y la lista sale de ahí. El grupo se entera por Telegram, marca la compra en tiempo real, y consulta después quién debe qué y dónde sale más barato cada cosa."</a:t>
+            </a:r>
+            <a:endParaRPr lang="en-US" sz="1250" dirty="0"/>
+          </a:p>
+        </p:txBody>
+      </p:sp>
+      <p:sp>
+        <p:nvSpPr>
+          <p:cNvPr id="20" name="Text 17"/>
+          <p:cNvSpPr txBox="1"/>
+          <p:nvPr/>
+        </p:nvSpPr>
+        <p:spPr>
+          <a:xfrm>
+            <a:off x="868680" y="5852160"/>
+            <a:ext cx="10424160" cy="320040"/>
+          </a:xfrm>
+          <a:prstGeom prst="rect">
+            <a:avLst/>
+          </a:prstGeom>
+          <a:noFill/>
+          <a:ln/>
+        </p:spPr>
+        <p:txBody>
+          <a:bodyPr wrap="square" lIns="0" tIns="0" rIns="0" bIns="0" rtlCol="0" anchor="ctr"/>
+          <a:lstStyle/>
+          <a:p>
+            <a:pPr indent="0" marL="0">
+              <a:buNone/>
+            </a:pPr>
+            <a:r>
+              <a:rPr lang="en-US" sz="1100" dirty="0">
+                <a:solidFill>
+                  <a:srgbClr val="D8CBBE"/>
+                </a:solidFill>
+                <a:latin typeface="Calibri" pitchFamily="34" charset="0"/>
+                <a:ea typeface="Calibri" pitchFamily="34" charset="-122"/>
+                <a:cs typeface="Calibri" pitchFamily="34" charset="-120"/>
+              </a:rPr>
+              <a:t>Orden de construcción: Nevera → Lista (concurrencia) → Historial → Precios</a:t>
+            </a:r>
+            <a:endParaRPr lang="en-US" sz="1100" dirty="0"/>
+          </a:p>
+        </p:txBody>
+      </p:sp>
+    </p:spTree>
+  </p:cSld>
+  <p:clrMapOvr>
+    <a:masterClrMapping/>
+  </p:clrMapOvr>
+</p:sld>
+</file>
+
+<file path=ppt/slides/slide13.xml><?xml version="1.0" encoding="utf-8"?>
+<p:sld xmlns:a="http://schemas.openxmlformats.org/drawingml/2006/main" xmlns:r="http://schemas.openxmlformats.org/officeDocument/2006/relationships" xmlns:p="http://schemas.openxmlformats.org/presentationml/2006/main">
+  <p:cSld name="Slide 13">
+    <p:bg>
+      <p:bgPr>
+        <a:solidFill>
+          <a:srgbClr val="FFFFFF"/>
+        </a:solidFill>
+      </p:bgPr>
+    </p:bg>
+    <p:spTree>
+      <p:nvGrpSpPr>
+        <p:cNvPr id="1" name=""/>
+        <p:cNvGrpSpPr/>
+        <p:nvPr/>
+      </p:nvGrpSpPr>
+      <p:grpSpPr>
+        <a:xfrm>
+          <a:off x="0" y="0"/>
+          <a:ext cx="0" cy="0"/>
+          <a:chOff x="0" y="0"/>
+          <a:chExt cx="0" cy="0"/>
+        </a:xfrm>
+      </p:grpSpPr>
+      <p:sp>
+        <p:nvSpPr>
+          <p:cNvPr id="2" name="Shape 0"/>
+          <p:cNvSpPr/>
+          <p:nvPr/>
+        </p:nvSpPr>
+        <p:spPr>
+          <a:xfrm>
+            <a:off x="548640" y="457200"/>
+            <a:ext cx="566928" cy="566928"/>
+          </a:xfrm>
+          <a:prstGeom prst="ellipse">
+            <a:avLst/>
+          </a:prstGeom>
+          <a:solidFill>
+            <a:srgbClr val="C9682B"/>
+          </a:solidFill>
+          <a:ln/>
+        </p:spPr>
+      </p:sp>
+      <p:pic>
+        <p:nvPicPr>
+          <p:cNvPr id="3" name="Image 0" descr="preencoded.png">    </p:cNvPr>
+          <p:cNvPicPr>
+            <a:picLocks noChangeAspect="1"/>
+          </p:cNvPicPr>
+          <p:nvPr/>
+        </p:nvPicPr>
+        <p:blipFill>
+          <a:blip r:embed="rId1"/>
+          <a:stretch>
+            <a:fillRect/>
+          </a:stretch>
+        </p:blipFill>
+        <p:spPr>
+          <a:xfrm>
+            <a:off x="684703" y="593263"/>
+            <a:ext cx="294803" cy="294803"/>
+          </a:xfrm>
+          <a:prstGeom prst="rect">
+            <a:avLst/>
+          </a:prstGeom>
+        </p:spPr>
+      </p:pic>
+      <p:sp>
+        <p:nvSpPr>
+          <p:cNvPr id="4" name="Text 1"/>
+          <p:cNvSpPr txBox="1"/>
+          <p:nvPr/>
+        </p:nvSpPr>
+        <p:spPr>
+          <a:xfrm>
+            <a:off x="1280160" y="438912"/>
+            <a:ext cx="7315200" cy="274320"/>
+          </a:xfrm>
+          <a:prstGeom prst="rect">
+            <a:avLst/>
+          </a:prstGeom>
+          <a:noFill/>
+          <a:ln/>
+        </p:spPr>
+        <p:txBody>
+          <a:bodyPr wrap="square" lIns="0" tIns="0" rIns="0" bIns="0" rtlCol="0" anchor="ctr"/>
+          <a:lstStyle/>
+          <a:p>
+            <a:pPr indent="0" marL="0">
+              <a:buNone/>
+            </a:pPr>
+            <a:r>
+              <a:rPr lang="en-US" sz="1200" b="1" spc="200" kern="0" dirty="0">
+                <a:solidFill>
+                  <a:srgbClr val="C9682B"/>
+                </a:solidFill>
+                <a:latin typeface="Calibri" pitchFamily="34" charset="0"/>
+                <a:ea typeface="Calibri" pitchFamily="34" charset="-122"/>
+                <a:cs typeface="Calibri" pitchFamily="34" charset="-120"/>
+              </a:rPr>
+              <a:t>PASO 6</a:t>
+            </a:r>
+            <a:endParaRPr lang="en-US" sz="1200" dirty="0"/>
+          </a:p>
+        </p:txBody>
+      </p:sp>
+      <p:sp>
+        <p:nvSpPr>
+          <p:cNvPr id="5" name="Text 2"/>
+          <p:cNvSpPr txBox="1"/>
+          <p:nvPr/>
+        </p:nvSpPr>
+        <p:spPr>
+          <a:xfrm>
+            <a:off x="1280160" y="676656"/>
+            <a:ext cx="9601200" cy="502920"/>
+          </a:xfrm>
+          <a:prstGeom prst="rect">
+            <a:avLst/>
+          </a:prstGeom>
+          <a:noFill/>
+          <a:ln/>
+        </p:spPr>
+        <p:txBody>
+          <a:bodyPr wrap="square" lIns="0" tIns="0" rIns="0" bIns="0" rtlCol="0" anchor="ctr"/>
+          <a:lstStyle/>
+          <a:p>
+            <a:pPr indent="0" marL="0">
+              <a:buNone/>
+            </a:pPr>
+            <a:r>
+              <a:rPr lang="en-US" sz="2800" b="1" dirty="0">
+                <a:solidFill>
+                  <a:srgbClr val="2E2119"/>
+                </a:solidFill>
+                <a:latin typeface="Cambria" pitchFamily="34" charset="0"/>
+                <a:ea typeface="Cambria" pitchFamily="34" charset="-122"/>
+                <a:cs typeface="Cambria" pitchFamily="34" charset="-120"/>
+              </a:rPr>
+              <a:t>Documento de una página</a:t>
+            </a:r>
+            <a:endParaRPr lang="en-US" sz="2800" dirty="0"/>
+          </a:p>
+        </p:txBody>
+      </p:sp>
+      <p:sp>
+        <p:nvSpPr>
+          <p:cNvPr id="6" name="Shape 3"/>
+          <p:cNvSpPr/>
+          <p:nvPr/>
+        </p:nvSpPr>
+        <p:spPr>
+          <a:xfrm>
+            <a:off x="548640" y="1417320"/>
+            <a:ext cx="5440680" cy="896112"/>
+          </a:xfrm>
+          <a:prstGeom prst="roundRect">
+            <a:avLst>
+              <a:gd name="adj" fmla="val 12245"/>
+            </a:avLst>
+          </a:prstGeom>
+          <a:solidFill>
+            <a:srgbClr val="F4E9DA"/>
+          </a:solidFill>
+          <a:ln/>
+          <a:effectLst>
+            <a:outerShdw sx="100000" sy="100000" kx="0" ky="0" algn="bl" rotWithShape="0" blurRad="76200" dist="25400" dir="5400000">
+              <a:srgbClr val="000000">
+                <a:alpha val="12000"/>
+              </a:srgbClr>
+            </a:outerShdw>
+          </a:effectLst>
+        </p:spPr>
+      </p:sp>
+      <p:sp>
+        <p:nvSpPr>
+          <p:cNvPr id="7" name="Text 4"/>
+          <p:cNvSpPr txBox="1"/>
+          <p:nvPr/>
+        </p:nvSpPr>
+        <p:spPr>
+          <a:xfrm>
+            <a:off x="731520" y="1490472"/>
+            <a:ext cx="5074920" cy="237744"/>
+          </a:xfrm>
+          <a:prstGeom prst="rect">
+            <a:avLst/>
+          </a:prstGeom>
+          <a:noFill/>
+          <a:ln/>
+        </p:spPr>
+        <p:txBody>
+          <a:bodyPr wrap="square" lIns="0" tIns="0" rIns="0" bIns="0" rtlCol="0" anchor="ctr"/>
+          <a:lstStyle/>
+          <a:p>
+            <a:pPr indent="0" marL="0">
+              <a:buNone/>
+            </a:pPr>
+            <a:r>
+              <a:rPr lang="en-US" sz="1000" b="1" spc="100" kern="0" dirty="0">
+                <a:solidFill>
+                  <a:srgbClr val="C9682B"/>
+                </a:solidFill>
+                <a:latin typeface="Calibri" pitchFamily="34" charset="0"/>
+                <a:ea typeface="Calibri" pitchFamily="34" charset="-122"/>
+                <a:cs typeface="Calibri" pitchFamily="34" charset="-120"/>
+              </a:rPr>
+              <a:t>NOMBRE Y MENSAJE</a:t>
+            </a:r>
+            <a:endParaRPr lang="en-US" sz="1000" dirty="0"/>
+          </a:p>
+        </p:txBody>
+      </p:sp>
+      <p:sp>
+        <p:nvSpPr>
+          <p:cNvPr id="8" name="Text 5"/>
+          <p:cNvSpPr txBox="1"/>
+          <p:nvPr/>
+        </p:nvSpPr>
+        <p:spPr>
+          <a:xfrm>
+            <a:off x="731520" y="1728216"/>
+            <a:ext cx="5074920" cy="530352"/>
+          </a:xfrm>
+          <a:prstGeom prst="rect">
+            <a:avLst/>
+          </a:prstGeom>
+          <a:noFill/>
+          <a:ln/>
+        </p:spPr>
+        <p:txBody>
+          <a:bodyPr wrap="square" lIns="0" tIns="0" rIns="0" bIns="0" rtlCol="0" anchor="t"/>
+          <a:lstStyle/>
+          <a:p>
+            <a:pPr indent="0" marL="0">
+              <a:buNone/>
+            </a:pPr>
+            <a:r>
+              <a:rPr lang="en-US" sz="1100" dirty="0">
+                <a:solidFill>
+                  <a:srgbClr val="2E2119"/>
+                </a:solidFill>
+                <a:latin typeface="Calibri" pitchFamily="34" charset="0"/>
+                <a:ea typeface="Calibri" pitchFamily="34" charset="-122"/>
+                <a:cs typeface="Calibri" pitchFamily="34" charset="-120"/>
+              </a:rPr>
+              <a:t>Larder — la lista de la compra se genera sola a partir de lo que hay en la nevera de tu piso compartido.</a:t>
+            </a:r>
+            <a:endParaRPr lang="en-US" sz="1100" dirty="0"/>
+          </a:p>
+        </p:txBody>
+      </p:sp>
+      <p:sp>
+        <p:nvSpPr>
+          <p:cNvPr id="9" name="Shape 6"/>
+          <p:cNvSpPr/>
+          <p:nvPr/>
+        </p:nvSpPr>
+        <p:spPr>
+          <a:xfrm>
+            <a:off x="6172200" y="1417320"/>
+            <a:ext cx="5440680" cy="896112"/>
+          </a:xfrm>
+          <a:prstGeom prst="roundRect">
+            <a:avLst>
+              <a:gd name="adj" fmla="val 12245"/>
+            </a:avLst>
+          </a:prstGeom>
+          <a:solidFill>
+            <a:srgbClr val="EDE6DC"/>
+          </a:solidFill>
+          <a:ln/>
+          <a:effectLst>
+            <a:outerShdw sx="100000" sy="100000" kx="0" ky="0" algn="bl" rotWithShape="0" blurRad="76200" dist="25400" dir="5400000">
+              <a:srgbClr val="000000">
+                <a:alpha val="12000"/>
+              </a:srgbClr>
+            </a:outerShdw>
+          </a:effectLst>
+        </p:spPr>
+      </p:sp>
+      <p:sp>
+        <p:nvSpPr>
+          <p:cNvPr id="10" name="Text 7"/>
+          <p:cNvSpPr txBox="1"/>
+          <p:nvPr/>
+        </p:nvSpPr>
+        <p:spPr>
+          <a:xfrm>
+            <a:off x="6355080" y="1490472"/>
+            <a:ext cx="5074920" cy="237744"/>
+          </a:xfrm>
+          <a:prstGeom prst="rect">
+            <a:avLst/>
+          </a:prstGeom>
+          <a:noFill/>
+          <a:ln/>
+        </p:spPr>
+        <p:txBody>
+          <a:bodyPr wrap="square" lIns="0" tIns="0" rIns="0" bIns="0" rtlCol="0" anchor="ctr"/>
+          <a:lstStyle/>
+          <a:p>
+            <a:pPr indent="0" marL="0">
+              <a:buNone/>
+            </a:pPr>
+            <a:r>
+              <a:rPr lang="en-US" sz="1000" b="1" spc="100" kern="0" dirty="0">
+                <a:solidFill>
+                  <a:srgbClr val="C9682B"/>
+                </a:solidFill>
+                <a:latin typeface="Calibri" pitchFamily="34" charset="0"/>
+                <a:ea typeface="Calibri" pitchFamily="34" charset="-122"/>
+                <a:cs typeface="Calibri" pitchFamily="34" charset="-120"/>
+              </a:rPr>
+              <a:t>PÚBLICO</a:t>
+            </a:r>
+            <a:endParaRPr lang="en-US" sz="1000" dirty="0"/>
+          </a:p>
+        </p:txBody>
+      </p:sp>
+      <p:sp>
+        <p:nvSpPr>
+          <p:cNvPr id="11" name="Text 8"/>
+          <p:cNvSpPr txBox="1"/>
+          <p:nvPr/>
+        </p:nvSpPr>
+        <p:spPr>
+          <a:xfrm>
+            <a:off x="6355080" y="1728216"/>
+            <a:ext cx="5074920" cy="530352"/>
+          </a:xfrm>
+          <a:prstGeom prst="rect">
+            <a:avLst/>
+          </a:prstGeom>
+          <a:noFill/>
+          <a:ln/>
+        </p:spPr>
+        <p:txBody>
+          <a:bodyPr wrap="square" lIns="0" tIns="0" rIns="0" bIns="0" rtlCol="0" anchor="t"/>
+          <a:lstStyle/>
+          <a:p>
+            <a:pPr indent="0" marL="0">
+              <a:buNone/>
+            </a:pPr>
+            <a:r>
+              <a:rPr lang="en-US" sz="1100" dirty="0">
+                <a:solidFill>
+                  <a:srgbClr val="2E2119"/>
+                </a:solidFill>
+                <a:latin typeface="Calibri" pitchFamily="34" charset="0"/>
+                <a:ea typeface="Calibri" pitchFamily="34" charset="-122"/>
+                <a:cs typeface="Calibri" pitchFamily="34" charset="-120"/>
+              </a:rPr>
+              <a:t>Estudiantes que comparten piso en A Coruña. ≈650 pisos como suelo verificable.</a:t>
+            </a:r>
+            <a:endParaRPr lang="en-US" sz="1100" dirty="0"/>
+          </a:p>
+        </p:txBody>
+      </p:sp>
+      <p:sp>
+        <p:nvSpPr>
+          <p:cNvPr id="12" name="Shape 9"/>
+          <p:cNvSpPr/>
+          <p:nvPr/>
+        </p:nvSpPr>
+        <p:spPr>
+          <a:xfrm>
+            <a:off x="548640" y="2432304"/>
+            <a:ext cx="5440680" cy="896112"/>
+          </a:xfrm>
+          <a:prstGeom prst="roundRect">
+            <a:avLst>
+              <a:gd name="adj" fmla="val 12245"/>
+            </a:avLst>
+          </a:prstGeom>
+          <a:solidFill>
+            <a:srgbClr val="F4E9DA"/>
+          </a:solidFill>
+          <a:ln/>
+          <a:effectLst>
+            <a:outerShdw sx="100000" sy="100000" kx="0" ky="0" algn="bl" rotWithShape="0" blurRad="76200" dist="25400" dir="5400000">
+              <a:srgbClr val="000000">
+                <a:alpha val="12000"/>
+              </a:srgbClr>
+            </a:outerShdw>
+          </a:effectLst>
+        </p:spPr>
+      </p:sp>
+      <p:sp>
+        <p:nvSpPr>
+          <p:cNvPr id="13" name="Text 10"/>
+          <p:cNvSpPr txBox="1"/>
+          <p:nvPr/>
+        </p:nvSpPr>
+        <p:spPr>
+          <a:xfrm>
+            <a:off x="731520" y="2505456"/>
+            <a:ext cx="5074920" cy="237744"/>
+          </a:xfrm>
+          <a:prstGeom prst="rect">
+            <a:avLst/>
+          </a:prstGeom>
+          <a:noFill/>
+          <a:ln/>
+        </p:spPr>
+        <p:txBody>
+          <a:bodyPr wrap="square" lIns="0" tIns="0" rIns="0" bIns="0" rtlCol="0" anchor="ctr"/>
+          <a:lstStyle/>
+          <a:p>
+            <a:pPr indent="0" marL="0">
+              <a:buNone/>
+            </a:pPr>
+            <a:r>
+              <a:rPr lang="en-US" sz="1000" b="1" spc="100" kern="0" dirty="0">
+                <a:solidFill>
+                  <a:srgbClr val="C9682B"/>
+                </a:solidFill>
+                <a:latin typeface="Calibri" pitchFamily="34" charset="0"/>
+                <a:ea typeface="Calibri" pitchFamily="34" charset="-122"/>
+                <a:cs typeface="Calibri" pitchFamily="34" charset="-120"/>
+              </a:rPr>
+              <a:t>PROBLEMA</a:t>
+            </a:r>
+            <a:endParaRPr lang="en-US" sz="1000" dirty="0"/>
+          </a:p>
+        </p:txBody>
+      </p:sp>
+      <p:sp>
+        <p:nvSpPr>
+          <p:cNvPr id="14" name="Text 11"/>
+          <p:cNvSpPr txBox="1"/>
+          <p:nvPr/>
+        </p:nvSpPr>
+        <p:spPr>
+          <a:xfrm>
+            <a:off x="731520" y="2743200"/>
+            <a:ext cx="5074920" cy="530352"/>
+          </a:xfrm>
+          <a:prstGeom prst="rect">
+            <a:avLst/>
+          </a:prstGeom>
+          <a:noFill/>
+          <a:ln/>
+        </p:spPr>
+        <p:txBody>
+          <a:bodyPr wrap="square" lIns="0" tIns="0" rIns="0" bIns="0" rtlCol="0" anchor="t"/>
+          <a:lstStyle/>
+          <a:p>
+            <a:pPr indent="0" marL="0">
+              <a:buNone/>
+            </a:pPr>
+            <a:r>
+              <a:rPr lang="en-US" sz="1100" dirty="0">
+                <a:solidFill>
+                  <a:srgbClr val="2E2119"/>
+                </a:solidFill>
+                <a:latin typeface="Calibri" pitchFamily="34" charset="0"/>
+                <a:ea typeface="Calibri" pitchFamily="34" charset="-122"/>
+                <a:cs typeface="Calibri" pitchFamily="34" charset="-120"/>
+              </a:rPr>
+              <a:t>10-15 min/lista a ojo, 1-2 viajes/semana sin plan, 200-400€/año perdidos.</a:t>
+            </a:r>
+            <a:endParaRPr lang="en-US" sz="1100" dirty="0"/>
+          </a:p>
+        </p:txBody>
+      </p:sp>
+      <p:sp>
+        <p:nvSpPr>
+          <p:cNvPr id="15" name="Shape 12"/>
+          <p:cNvSpPr/>
+          <p:nvPr/>
+        </p:nvSpPr>
+        <p:spPr>
+          <a:xfrm>
+            <a:off x="6172200" y="2432304"/>
+            <a:ext cx="5440680" cy="896112"/>
+          </a:xfrm>
+          <a:prstGeom prst="roundRect">
+            <a:avLst>
+              <a:gd name="adj" fmla="val 12245"/>
+            </a:avLst>
+          </a:prstGeom>
+          <a:solidFill>
+            <a:srgbClr val="EDE6DC"/>
+          </a:solidFill>
+          <a:ln/>
+          <a:effectLst>
+            <a:outerShdw sx="100000" sy="100000" kx="0" ky="0" algn="bl" rotWithShape="0" blurRad="76200" dist="25400" dir="5400000">
+              <a:srgbClr val="000000">
+                <a:alpha val="12000"/>
+              </a:srgbClr>
+            </a:outerShdw>
+          </a:effectLst>
+        </p:spPr>
+      </p:sp>
+      <p:sp>
+        <p:nvSpPr>
+          <p:cNvPr id="16" name="Text 13"/>
+          <p:cNvSpPr txBox="1"/>
+          <p:nvPr/>
+        </p:nvSpPr>
+        <p:spPr>
+          <a:xfrm>
+            <a:off x="6355080" y="2505456"/>
+            <a:ext cx="5074920" cy="237744"/>
+          </a:xfrm>
+          <a:prstGeom prst="rect">
+            <a:avLst/>
+          </a:prstGeom>
+          <a:noFill/>
+          <a:ln/>
+        </p:spPr>
+        <p:txBody>
+          <a:bodyPr wrap="square" lIns="0" tIns="0" rIns="0" bIns="0" rtlCol="0" anchor="ctr"/>
+          <a:lstStyle/>
+          <a:p>
+            <a:pPr indent="0" marL="0">
+              <a:buNone/>
+            </a:pPr>
+            <a:r>
+              <a:rPr lang="en-US" sz="1000" b="1" spc="100" kern="0" dirty="0">
+                <a:solidFill>
+                  <a:srgbClr val="C9682B"/>
+                </a:solidFill>
+                <a:latin typeface="Calibri" pitchFamily="34" charset="0"/>
+                <a:ea typeface="Calibri" pitchFamily="34" charset="-122"/>
+                <a:cs typeface="Calibri" pitchFamily="34" charset="-120"/>
+              </a:rPr>
+              <a:t>NÚMEROS</a:t>
+            </a:r>
+            <a:endParaRPr lang="en-US" sz="1000" dirty="0"/>
+          </a:p>
+        </p:txBody>
+      </p:sp>
+      <p:sp>
+        <p:nvSpPr>
+          <p:cNvPr id="17" name="Text 14"/>
+          <p:cNvSpPr txBox="1"/>
+          <p:nvPr/>
+        </p:nvSpPr>
+        <p:spPr>
+          <a:xfrm>
+            <a:off x="6355080" y="2743200"/>
+            <a:ext cx="5074920" cy="530352"/>
+          </a:xfrm>
+          <a:prstGeom prst="rect">
+            <a:avLst/>
+          </a:prstGeom>
+          <a:noFill/>
+          <a:ln/>
+        </p:spPr>
+        <p:txBody>
+          <a:bodyPr wrap="square" lIns="0" tIns="0" rIns="0" bIns="0" rtlCol="0" anchor="t"/>
+          <a:lstStyle/>
+          <a:p>
+            <a:pPr indent="0" marL="0">
+              <a:buNone/>
+            </a:pPr>
+            <a:r>
+              <a:rPr lang="en-US" sz="1100" dirty="0">
+                <a:solidFill>
+                  <a:srgbClr val="2E2119"/>
+                </a:solidFill>
+                <a:latin typeface="Calibri" pitchFamily="34" charset="0"/>
+                <a:ea typeface="Calibri" pitchFamily="34" charset="-122"/>
+                <a:cs typeface="Calibri" pitchFamily="34" charset="-120"/>
+              </a:rPr>
+              <a:t>0€, sin monetización · coste fijo 0€ · éxito = adopción, no ingresos.</a:t>
+            </a:r>
+            <a:endParaRPr lang="en-US" sz="1100" dirty="0"/>
+          </a:p>
+        </p:txBody>
+      </p:sp>
+      <p:sp>
+        <p:nvSpPr>
+          <p:cNvPr id="18" name="Shape 15"/>
+          <p:cNvSpPr/>
+          <p:nvPr/>
+        </p:nvSpPr>
+        <p:spPr>
+          <a:xfrm>
+            <a:off x="548640" y="3447288"/>
+            <a:ext cx="5440680" cy="896112"/>
+          </a:xfrm>
+          <a:prstGeom prst="roundRect">
+            <a:avLst>
+              <a:gd name="adj" fmla="val 12245"/>
+            </a:avLst>
+          </a:prstGeom>
+          <a:solidFill>
+            <a:srgbClr val="F4E9DA"/>
+          </a:solidFill>
+          <a:ln/>
+          <a:effectLst>
+            <a:outerShdw sx="100000" sy="100000" kx="0" ky="0" algn="bl" rotWithShape="0" blurRad="76200" dist="25400" dir="5400000">
+              <a:srgbClr val="000000">
+                <a:alpha val="12000"/>
+              </a:srgbClr>
+            </a:outerShdw>
+          </a:effectLst>
+        </p:spPr>
+      </p:sp>
+      <p:sp>
+        <p:nvSpPr>
+          <p:cNvPr id="19" name="Text 16"/>
+          <p:cNvSpPr txBox="1"/>
+          <p:nvPr/>
+        </p:nvSpPr>
+        <p:spPr>
+          <a:xfrm>
+            <a:off x="731520" y="3520440"/>
+            <a:ext cx="5074920" cy="237744"/>
+          </a:xfrm>
+          <a:prstGeom prst="rect">
+            <a:avLst/>
+          </a:prstGeom>
+          <a:noFill/>
+          <a:ln/>
+        </p:spPr>
+        <p:txBody>
+          <a:bodyPr wrap="square" lIns="0" tIns="0" rIns="0" bIns="0" rtlCol="0" anchor="ctr"/>
+          <a:lstStyle/>
+          <a:p>
+            <a:pPr indent="0" marL="0">
+              <a:buNone/>
+            </a:pPr>
+            <a:r>
+              <a:rPr lang="en-US" sz="1000" b="1" spc="100" kern="0" dirty="0">
+                <a:solidFill>
+                  <a:srgbClr val="C9682B"/>
+                </a:solidFill>
+                <a:latin typeface="Calibri" pitchFamily="34" charset="0"/>
+                <a:ea typeface="Calibri" pitchFamily="34" charset="-122"/>
+                <a:cs typeface="Calibri" pitchFamily="34" charset="-120"/>
+              </a:rPr>
+              <a:t>ALCANCE</a:t>
+            </a:r>
+            <a:endParaRPr lang="en-US" sz="1000" dirty="0"/>
+          </a:p>
+        </p:txBody>
+      </p:sp>
+      <p:sp>
+        <p:nvSpPr>
+          <p:cNvPr id="20" name="Text 17"/>
+          <p:cNvSpPr txBox="1"/>
+          <p:nvPr/>
+        </p:nvSpPr>
+        <p:spPr>
+          <a:xfrm>
+            <a:off x="731520" y="3758184"/>
+            <a:ext cx="5074920" cy="530352"/>
+          </a:xfrm>
+          <a:prstGeom prst="rect">
+            <a:avLst/>
+          </a:prstGeom>
+          <a:noFill/>
+          <a:ln/>
+        </p:spPr>
+        <p:txBody>
+          <a:bodyPr wrap="square" lIns="0" tIns="0" rIns="0" bIns="0" rtlCol="0" anchor="t"/>
+          <a:lstStyle/>
+          <a:p>
+            <a:pPr indent="0" marL="0">
+              <a:buNone/>
+            </a:pPr>
+            <a:r>
+              <a:rPr lang="en-US" sz="1100" dirty="0">
+                <a:solidFill>
+                  <a:srgbClr val="2E2119"/>
+                </a:solidFill>
+                <a:latin typeface="Calibri" pitchFamily="34" charset="0"/>
+                <a:ea typeface="Calibri" pitchFamily="34" charset="-122"/>
+                <a:cs typeface="Calibri" pitchFamily="34" charset="-120"/>
+              </a:rPr>
+              <a:t>Nevera (sin cantidades) + Lista que se genera sola + Historial + Precios sobre nuestro propio historial + lectura de tickets y predicción. Cobro real, fuera de alcance.</a:t>
+            </a:r>
+            <a:endParaRPr lang="en-US" sz="1100" dirty="0"/>
+          </a:p>
+        </p:txBody>
+      </p:sp>
+      <p:sp>
+        <p:nvSpPr>
+          <p:cNvPr id="21" name="Shape 18"/>
+          <p:cNvSpPr/>
+          <p:nvPr/>
+        </p:nvSpPr>
+        <p:spPr>
+          <a:xfrm>
+            <a:off x="6172200" y="3447288"/>
+            <a:ext cx="5440680" cy="896112"/>
+          </a:xfrm>
+          <a:prstGeom prst="roundRect">
+            <a:avLst>
+              <a:gd name="adj" fmla="val 12245"/>
+            </a:avLst>
+          </a:prstGeom>
+          <a:solidFill>
+            <a:srgbClr val="EDE6DC"/>
+          </a:solidFill>
+          <a:ln/>
+          <a:effectLst>
+            <a:outerShdw sx="100000" sy="100000" kx="0" ky="0" algn="bl" rotWithShape="0" blurRad="76200" dist="25400" dir="5400000">
+              <a:srgbClr val="000000">
+                <a:alpha val="12000"/>
+              </a:srgbClr>
+            </a:outerShdw>
+          </a:effectLst>
+        </p:spPr>
+      </p:sp>
+      <p:sp>
+        <p:nvSpPr>
+          <p:cNvPr id="22" name="Text 19"/>
+          <p:cNvSpPr txBox="1"/>
+          <p:nvPr/>
+        </p:nvSpPr>
+        <p:spPr>
+          <a:xfrm>
+            <a:off x="6355080" y="3520440"/>
+            <a:ext cx="5074920" cy="237744"/>
+          </a:xfrm>
+          <a:prstGeom prst="rect">
+            <a:avLst/>
+          </a:prstGeom>
+          <a:noFill/>
+          <a:ln/>
+        </p:spPr>
+        <p:txBody>
+          <a:bodyPr wrap="square" lIns="0" tIns="0" rIns="0" bIns="0" rtlCol="0" anchor="ctr"/>
+          <a:lstStyle/>
+          <a:p>
+            <a:pPr indent="0" marL="0">
+              <a:buNone/>
+            </a:pPr>
+            <a:r>
+              <a:rPr lang="en-US" sz="1000" b="1" spc="100" kern="0" dirty="0">
+                <a:solidFill>
+                  <a:srgbClr val="C9682B"/>
+                </a:solidFill>
+                <a:latin typeface="Calibri" pitchFamily="34" charset="0"/>
+                <a:ea typeface="Calibri" pitchFamily="34" charset="-122"/>
+                <a:cs typeface="Calibri" pitchFamily="34" charset="-120"/>
+              </a:rPr>
+              <a:t>CANAL</a:t>
+            </a:r>
+            <a:endParaRPr lang="en-US" sz="1000" dirty="0"/>
+          </a:p>
+        </p:txBody>
+      </p:sp>
+      <p:sp>
+        <p:nvSpPr>
+          <p:cNvPr id="23" name="Text 20"/>
+          <p:cNvSpPr txBox="1"/>
+          <p:nvPr/>
+        </p:nvSpPr>
+        <p:spPr>
+          <a:xfrm>
+            <a:off x="6355080" y="3758184"/>
+            <a:ext cx="5074920" cy="530352"/>
+          </a:xfrm>
+          <a:prstGeom prst="rect">
+            <a:avLst/>
+          </a:prstGeom>
+          <a:noFill/>
+          <a:ln/>
+        </p:spPr>
+        <p:txBody>
+          <a:bodyPr wrap="square" lIns="0" tIns="0" rIns="0" bIns="0" rtlCol="0" anchor="t"/>
+          <a:lstStyle/>
+          <a:p>
+            <a:pPr indent="0" marL="0">
+              <a:buNone/>
+            </a:pPr>
+            <a:r>
+              <a:rPr lang="en-US" sz="1100" dirty="0">
+                <a:solidFill>
+                  <a:srgbClr val="2E2119"/>
+                </a:solidFill>
+                <a:latin typeface="Calibri" pitchFamily="34" charset="0"/>
+                <a:ea typeface="Calibri" pitchFamily="34" charset="-122"/>
+                <a:cs typeface="Calibri" pitchFamily="34" charset="-120"/>
+              </a:rPr>
+              <a:t>Directo: el propio hogar es el primer usuario real.</a:t>
+            </a:r>
+            <a:endParaRPr lang="en-US" sz="1100" dirty="0"/>
+          </a:p>
+        </p:txBody>
+      </p:sp>
+      <p:sp>
+        <p:nvSpPr>
+          <p:cNvPr id="24" name="Shape 21"/>
+          <p:cNvSpPr/>
+          <p:nvPr/>
+        </p:nvSpPr>
+        <p:spPr>
+          <a:xfrm>
+            <a:off x="548640" y="4462272"/>
+            <a:ext cx="5440680" cy="896112"/>
+          </a:xfrm>
+          <a:prstGeom prst="roundRect">
+            <a:avLst>
+              <a:gd name="adj" fmla="val 12245"/>
+            </a:avLst>
+          </a:prstGeom>
+          <a:solidFill>
+            <a:srgbClr val="F4E9DA"/>
+          </a:solidFill>
+          <a:ln/>
+          <a:effectLst>
+            <a:outerShdw sx="100000" sy="100000" kx="0" ky="0" algn="bl" rotWithShape="0" blurRad="76200" dist="25400" dir="5400000">
+              <a:srgbClr val="000000">
+                <a:alpha val="12000"/>
+              </a:srgbClr>
+            </a:outerShdw>
+          </a:effectLst>
+        </p:spPr>
+      </p:sp>
+      <p:sp>
+        <p:nvSpPr>
+          <p:cNvPr id="25" name="Text 22"/>
+          <p:cNvSpPr txBox="1"/>
+          <p:nvPr/>
+        </p:nvSpPr>
+        <p:spPr>
+          <a:xfrm>
+            <a:off x="731520" y="4535424"/>
+            <a:ext cx="5074920" cy="237744"/>
+          </a:xfrm>
+          <a:prstGeom prst="rect">
+            <a:avLst/>
+          </a:prstGeom>
+          <a:noFill/>
+          <a:ln/>
+        </p:spPr>
+        <p:txBody>
+          <a:bodyPr wrap="square" lIns="0" tIns="0" rIns="0" bIns="0" rtlCol="0" anchor="ctr"/>
+          <a:lstStyle/>
+          <a:p>
+            <a:pPr indent="0" marL="0">
+              <a:buNone/>
+            </a:pPr>
+            <a:r>
+              <a:rPr lang="en-US" sz="1000" b="1" spc="100" kern="0" dirty="0">
+                <a:solidFill>
+                  <a:srgbClr val="C9682B"/>
+                </a:solidFill>
+                <a:latin typeface="Calibri" pitchFamily="34" charset="0"/>
+                <a:ea typeface="Calibri" pitchFamily="34" charset="-122"/>
+                <a:cs typeface="Calibri" pitchFamily="34" charset="-120"/>
+              </a:rPr>
+              <a:t>QUÉ NO HAREMOS</a:t>
+            </a:r>
+            <a:endParaRPr lang="en-US" sz="1000" dirty="0"/>
+          </a:p>
+        </p:txBody>
+      </p:sp>
+      <p:sp>
+        <p:nvSpPr>
+          <p:cNvPr id="26" name="Text 23"/>
+          <p:cNvSpPr txBox="1"/>
+          <p:nvPr/>
+        </p:nvSpPr>
+        <p:spPr>
+          <a:xfrm>
+            <a:off x="731520" y="4773168"/>
+            <a:ext cx="5074920" cy="530352"/>
+          </a:xfrm>
+          <a:prstGeom prst="rect">
+            <a:avLst/>
+          </a:prstGeom>
+          <a:noFill/>
+          <a:ln/>
+        </p:spPr>
+        <p:txBody>
+          <a:bodyPr wrap="square" lIns="0" tIns="0" rIns="0" bIns="0" rtlCol="0" anchor="t"/>
+          <a:lstStyle/>
+          <a:p>
+            <a:pPr indent="0" marL="0">
+              <a:buNone/>
+            </a:pPr>
+            <a:r>
+              <a:rPr lang="en-US" sz="1100" dirty="0">
+                <a:solidFill>
+                  <a:srgbClr val="2E2119"/>
+                </a:solidFill>
+                <a:latin typeface="Calibri" pitchFamily="34" charset="0"/>
+                <a:ea typeface="Calibri" pitchFamily="34" charset="-122"/>
+                <a:cs typeface="Calibri" pitchFamily="34" charset="-120"/>
+              </a:rPr>
+              <a:t>Código de barras, cobro con tarjeta, notificaciones push nativas (Telegram es la excepción), liquidar deudas de verdad.</a:t>
+            </a:r>
+            <a:endParaRPr lang="en-US" sz="1100" dirty="0"/>
+          </a:p>
+        </p:txBody>
+      </p:sp>
+    </p:spTree>
+  </p:cSld>
+  <p:clrMapOvr>
+    <a:masterClrMapping/>
+  </p:clrMapOvr>
+</p:sld>
+</file>
+
+<file path=ppt/slides/slide14.xml><?xml version="1.0" encoding="utf-8"?>
+<p:sld xmlns:a="http://schemas.openxmlformats.org/drawingml/2006/main" xmlns:r="http://schemas.openxmlformats.org/officeDocument/2006/relationships" xmlns:p="http://schemas.openxmlformats.org/presentationml/2006/main">
+  <p:cSld name="Slide 14">
     <p:bg>
       <p:bgPr>
         <a:solidFill>
@@ -6212,7 +8103,7 @@
                 <a:ea typeface="Cambria" pitchFamily="34" charset="-122"/>
                 <a:cs typeface="Cambria" pitchFamily="34" charset="-120"/>
               </a:rPr>
-              <a:t>¿Y si tu app no tiene nada "chulo"?</a:t>
+              <a:t>Bring! por dentro</a:t>
             </a:r>
             <a:endParaRPr lang="en-US" sz="2800" dirty="0"/>
           </a:p>
@@ -6251,7 +8142,7 @@
                 <a:ea typeface="Calibri" pitchFamily="34" charset="-122"/>
                 <a:cs typeface="Calibri" pitchFamily="34" charset="-120"/>
               </a:rPr>
-              <a:t>La objeción que anticipamos antes de que nos la hagan — no una respuesta a la defensiva después.</a:t>
+              <a:t>Capturas propias de la app (17/09/2026) — el paso extra de la tabla anterior, visto de cerca.</a:t>
             </a:r>
             <a:endParaRPr lang="en-US" sz="1000" dirty="0"/>
           </a:p>
@@ -6265,381 +8156,12 @@
         </p:nvSpPr>
         <p:spPr>
           <a:xfrm>
-            <a:off x="548640" y="1463040"/>
-            <a:ext cx="11064240" cy="1097280"/>
+            <a:off x="512064" y="1655064"/>
+            <a:ext cx="2139696" cy="4553712"/>
           </a:xfrm>
           <a:prstGeom prst="roundRect">
             <a:avLst>
-              <a:gd name="adj" fmla="val 10000"/>
-            </a:avLst>
-          </a:prstGeom>
-          <a:solidFill>
-            <a:srgbClr val="EDE6DC"/>
-          </a:solidFill>
-          <a:ln/>
-          <a:effectLst>
-            <a:outerShdw sx="100000" sy="100000" kx="0" ky="0" algn="bl" rotWithShape="0" blurRad="76200" dist="25400" dir="5400000">
-              <a:srgbClr val="000000">
-                <a:alpha val="12000"/>
-              </a:srgbClr>
-            </a:outerShdw>
-          </a:effectLst>
-        </p:spPr>
-      </p:sp>
-      <p:sp>
-        <p:nvSpPr>
-          <p:cNvPr id="8" name="Text 5"/>
-          <p:cNvSpPr txBox="1"/>
-          <p:nvPr/>
-        </p:nvSpPr>
-        <p:spPr>
-          <a:xfrm>
-            <a:off x="822960" y="1600200"/>
-            <a:ext cx="10515600" cy="822960"/>
-          </a:xfrm>
-          <a:prstGeom prst="rect">
-            <a:avLst/>
-          </a:prstGeom>
-          <a:noFill/>
-          <a:ln/>
-        </p:spPr>
-        <p:txBody>
-          <a:bodyPr wrap="square" lIns="0" tIns="0" rIns="0" bIns="0" rtlCol="0" anchor="ctr"/>
-          <a:lstStyle/>
-          <a:p>
-            <a:pPr indent="0" marL="0">
-              <a:buNone/>
-            </a:pPr>
-            <a:r>
-              <a:rPr lang="en-US" sz="1500" i="1" dirty="0">
-                <a:solidFill>
-                  <a:srgbClr val="2E2119"/>
-                </a:solidFill>
-                <a:latin typeface="Calibri" pitchFamily="34" charset="0"/>
-                <a:ea typeface="Calibri" pitchFamily="34" charset="-122"/>
-                <a:cs typeface="Calibri" pitchFamily="34" charset="-120"/>
-              </a:rPr>
-              <a:t>"Tu solución (Notas) no tiene nada como mis recetas, mi meal planning o mis agentes de IA."</a:t>
-            </a:r>
-            <a:endParaRPr lang="en-US" sz="1500" dirty="0"/>
-          </a:p>
-        </p:txBody>
-      </p:sp>
-      <p:sp>
-        <p:nvSpPr>
-          <p:cNvPr id="9" name="Text 6"/>
-          <p:cNvSpPr txBox="1"/>
-          <p:nvPr/>
-        </p:nvSpPr>
-        <p:spPr>
-          <a:xfrm>
-            <a:off x="548640" y="2697480"/>
-            <a:ext cx="11064240" cy="1005840"/>
-          </a:xfrm>
-          <a:prstGeom prst="rect">
-            <a:avLst/>
-          </a:prstGeom>
-          <a:noFill/>
-          <a:ln/>
-        </p:spPr>
-        <p:txBody>
-          <a:bodyPr wrap="square" lIns="0" tIns="0" rIns="0" bIns="0" rtlCol="0" anchor="t"/>
-          <a:lstStyle/>
-          <a:p>
-            <a:pPr indent="0" marL="0">
-              <a:buNone/>
-            </a:pPr>
-            <a:r>
-              <a:rPr lang="en-US" sz="1300" b="1" dirty="0">
-                <a:solidFill>
-                  <a:srgbClr val="C9682B"/>
-                </a:solidFill>
-                <a:latin typeface="Calibri" pitchFamily="34" charset="0"/>
-                <a:ea typeface="Calibri" pitchFamily="34" charset="-122"/>
-                <a:cs typeface="Calibri" pitchFamily="34" charset="-120"/>
-              </a:rPr>
-              <a:t>Cierto. </a:t>
-            </a:r>
-            <a:pPr indent="0" marL="0">
-              <a:buNone/>
-            </a:pPr>
-            <a:r>
-              <a:rPr lang="en-US" sz="1300" dirty="0">
-                <a:solidFill>
-                  <a:srgbClr val="2E2119"/>
-                </a:solidFill>
-                <a:latin typeface="Calibri" pitchFamily="34" charset="0"/>
-                <a:ea typeface="Calibri" pitchFamily="34" charset="-122"/>
-                <a:cs typeface="Calibri" pitchFamily="34" charset="-120"/>
-              </a:rPr>
-              <a:t>Pero tampoco las tiene el papel y boli, que es el sistema que en realidad se está digitalizando. Si ni Notas ni Papel tienen esas funciones y aun así ganan en el uso real (diapositiva anterior), lo que esas funciones añaden no es "lo que faltaba" — es complejidad y ruido visual encima de un sistema que no los pedía.</a:t>
-            </a:r>
-            <a:endParaRPr lang="en-US" sz="1300" dirty="0"/>
-          </a:p>
-        </p:txBody>
-      </p:sp>
-      <p:sp>
-        <p:nvSpPr>
-          <p:cNvPr id="10" name="Shape 7"/>
-          <p:cNvSpPr/>
-          <p:nvPr/>
-        </p:nvSpPr>
-        <p:spPr>
-          <a:xfrm>
-            <a:off x="548640" y="3794760"/>
-            <a:ext cx="5440680" cy="1737360"/>
-          </a:xfrm>
-          <a:prstGeom prst="roundRect">
-            <a:avLst>
-              <a:gd name="adj" fmla="val 6316"/>
-            </a:avLst>
-          </a:prstGeom>
-          <a:solidFill>
-            <a:srgbClr val="F4E9DA"/>
-          </a:solidFill>
-          <a:ln/>
-          <a:effectLst>
-            <a:outerShdw sx="100000" sy="100000" kx="0" ky="0" algn="bl" rotWithShape="0" blurRad="76200" dist="25400" dir="5400000">
-              <a:srgbClr val="000000">
-                <a:alpha val="12000"/>
-              </a:srgbClr>
-            </a:outerShdw>
-          </a:effectLst>
-        </p:spPr>
-      </p:sp>
-      <p:sp>
-        <p:nvSpPr>
-          <p:cNvPr id="11" name="Text 8"/>
-          <p:cNvSpPr txBox="1"/>
-          <p:nvPr/>
-        </p:nvSpPr>
-        <p:spPr>
-          <a:xfrm>
-            <a:off x="777240" y="3931920"/>
-            <a:ext cx="4983480" cy="274320"/>
-          </a:xfrm>
-          <a:prstGeom prst="rect">
-            <a:avLst/>
-          </a:prstGeom>
-          <a:noFill/>
-          <a:ln/>
-        </p:spPr>
-        <p:txBody>
-          <a:bodyPr wrap="square" lIns="0" tIns="0" rIns="0" bIns="0" rtlCol="0" anchor="ctr"/>
-          <a:lstStyle/>
-          <a:p>
-            <a:pPr indent="0" marL="0">
-              <a:buNone/>
-            </a:pPr>
-            <a:r>
-              <a:rPr lang="en-US" sz="1150" b="1" spc="100" kern="0" dirty="0">
-                <a:solidFill>
-                  <a:srgbClr val="C9682B"/>
-                </a:solidFill>
-                <a:latin typeface="Calibri" pitchFamily="34" charset="0"/>
-                <a:ea typeface="Calibri" pitchFamily="34" charset="-122"/>
-                <a:cs typeface="Calibri" pitchFamily="34" charset="-120"/>
-              </a:rPr>
-              <a:t>Para quién SÍ tiene sentido</a:t>
-            </a:r>
-            <a:endParaRPr lang="en-US" sz="1150" dirty="0"/>
-          </a:p>
-        </p:txBody>
-      </p:sp>
-      <p:sp>
-        <p:nvSpPr>
-          <p:cNvPr id="12" name="Text 9"/>
-          <p:cNvSpPr txBox="1"/>
-          <p:nvPr/>
-        </p:nvSpPr>
-        <p:spPr>
-          <a:xfrm>
-            <a:off x="777240" y="4251960"/>
-            <a:ext cx="4983480" cy="1143000"/>
-          </a:xfrm>
-          <a:prstGeom prst="rect">
-            <a:avLst/>
-          </a:prstGeom>
-          <a:noFill/>
-          <a:ln/>
-        </p:spPr>
-        <p:txBody>
-          <a:bodyPr wrap="square" lIns="0" tIns="0" rIns="0" bIns="0" rtlCol="0" anchor="t"/>
-          <a:lstStyle/>
-          <a:p>
-            <a:pPr indent="0" marL="0">
-              <a:buNone/>
-            </a:pPr>
-            <a:r>
-              <a:rPr lang="en-US" sz="1250" dirty="0">
-                <a:solidFill>
-                  <a:srgbClr val="2E2119"/>
-                </a:solidFill>
-                <a:latin typeface="Calibri" pitchFamily="34" charset="0"/>
-                <a:ea typeface="Calibri" pitchFamily="34" charset="-122"/>
-                <a:cs typeface="Calibri" pitchFamily="34" charset="-120"/>
-              </a:rPr>
-              <a:t>Alguien a quien de verdad le guste cocinar y guardar recetas — un perfil más asentado, quizá de más edad (ej. una madre de familia).</a:t>
-            </a:r>
-            <a:endParaRPr lang="en-US" sz="1250" dirty="0"/>
-          </a:p>
-        </p:txBody>
-      </p:sp>
-      <p:sp>
-        <p:nvSpPr>
-          <p:cNvPr id="13" name="Shape 10"/>
-          <p:cNvSpPr/>
-          <p:nvPr/>
-        </p:nvSpPr>
-        <p:spPr>
-          <a:xfrm>
-            <a:off x="6172200" y="3794760"/>
-            <a:ext cx="5440680" cy="1737360"/>
-          </a:xfrm>
-          <a:prstGeom prst="roundRect">
-            <a:avLst>
-              <a:gd name="adj" fmla="val 6316"/>
-            </a:avLst>
-          </a:prstGeom>
-          <a:solidFill>
-            <a:srgbClr val="F6E4D3"/>
-          </a:solidFill>
-          <a:ln/>
-          <a:effectLst>
-            <a:outerShdw sx="100000" sy="100000" kx="0" ky="0" algn="bl" rotWithShape="0" blurRad="76200" dist="25400" dir="5400000">
-              <a:srgbClr val="000000">
-                <a:alpha val="12000"/>
-              </a:srgbClr>
-            </a:outerShdw>
-          </a:effectLst>
-        </p:spPr>
-      </p:sp>
-      <p:sp>
-        <p:nvSpPr>
-          <p:cNvPr id="14" name="Text 11"/>
-          <p:cNvSpPr txBox="1"/>
-          <p:nvPr/>
-        </p:nvSpPr>
-        <p:spPr>
-          <a:xfrm>
-            <a:off x="6400800" y="3931920"/>
-            <a:ext cx="4983480" cy="274320"/>
-          </a:xfrm>
-          <a:prstGeom prst="rect">
-            <a:avLst/>
-          </a:prstGeom>
-          <a:noFill/>
-          <a:ln/>
-        </p:spPr>
-        <p:txBody>
-          <a:bodyPr wrap="square" lIns="0" tIns="0" rIns="0" bIns="0" rtlCol="0" anchor="ctr"/>
-          <a:lstStyle/>
-          <a:p>
-            <a:pPr indent="0" marL="0">
-              <a:buNone/>
-            </a:pPr>
-            <a:r>
-              <a:rPr lang="en-US" sz="1150" b="1" spc="100" kern="0" dirty="0">
-                <a:solidFill>
-                  <a:srgbClr val="C9682B"/>
-                </a:solidFill>
-                <a:latin typeface="Calibri" pitchFamily="34" charset="0"/>
-                <a:ea typeface="Calibri" pitchFamily="34" charset="-122"/>
-                <a:cs typeface="Calibri" pitchFamily="34" charset="-120"/>
-              </a:rPr>
-              <a:t>Para nuestro público, NO</a:t>
-            </a:r>
-            <a:endParaRPr lang="en-US" sz="1150" dirty="0"/>
-          </a:p>
-        </p:txBody>
-      </p:sp>
-      <p:sp>
-        <p:nvSpPr>
-          <p:cNvPr id="15" name="Text 12"/>
-          <p:cNvSpPr txBox="1"/>
-          <p:nvPr/>
-        </p:nvSpPr>
-        <p:spPr>
-          <a:xfrm>
-            <a:off x="6400800" y="4251960"/>
-            <a:ext cx="4983480" cy="1143000"/>
-          </a:xfrm>
-          <a:prstGeom prst="rect">
-            <a:avLst/>
-          </a:prstGeom>
-          <a:noFill/>
-          <a:ln/>
-        </p:spPr>
-        <p:txBody>
-          <a:bodyPr wrap="square" lIns="0" tIns="0" rIns="0" bIns="0" rtlCol="0" anchor="t"/>
-          <a:lstStyle/>
-          <a:p>
-            <a:pPr indent="0" marL="0">
-              <a:spcAft>
-                <a:spcPts val="600"/>
-              </a:spcAft>
-              <a:buNone/>
-            </a:pPr>
-            <a:r>
-              <a:rPr lang="en-US" sz="1150" dirty="0">
-                <a:solidFill>
-                  <a:srgbClr val="2E2119"/>
-                </a:solidFill>
-                <a:latin typeface="Calibri" pitchFamily="34" charset="0"/>
-                <a:ea typeface="Calibri" pitchFamily="34" charset="-122"/>
-                <a:cs typeface="Calibri" pitchFamily="34" charset="-120"/>
-              </a:rPr>
-              <a:t>El estudiante medio independizado no es un apasionado de la cocina. La tendencia joven (meal prep) va al revés: tuppers básicos para toda la semana, para cocinar lo MÍNIMO posible. </a:t>
-            </a:r>
-            <a:endParaRPr lang="en-US" sz="1150" dirty="0"/>
-          </a:p>
-          <a:p>
-            <a:pPr indent="0" marL="0">
-              <a:buNone/>
-            </a:pPr>
-            <a:r>
-              <a:rPr lang="en-US" sz="1150" b="1" dirty="0">
-                <a:solidFill>
-                  <a:srgbClr val="C9682B"/>
-                </a:solidFill>
-                <a:latin typeface="Calibri" pitchFamily="34" charset="0"/>
-                <a:ea typeface="Calibri" pitchFamily="34" charset="-122"/>
-                <a:cs typeface="Calibri" pitchFamily="34" charset="-120"/>
-              </a:rPr>
-              <a:t>Confirmado en la encuesta: </a:t>
-            </a:r>
-            <a:pPr indent="0" marL="0">
-              <a:buNone/>
-            </a:pPr>
-            <a:r>
-              <a:rPr lang="en-US" sz="1150" i="1" dirty="0">
-                <a:solidFill>
-                  <a:srgbClr val="2E2119"/>
-                </a:solidFill>
-                <a:latin typeface="Calibri" pitchFamily="34" charset="0"/>
-                <a:ea typeface="Calibri" pitchFamily="34" charset="-122"/>
-                <a:cs typeface="Calibri" pitchFamily="34" charset="-120"/>
-              </a:rPr>
-              <a:t>"compro cosas pensando en hacer comidas elaboradas pero nunca las llego a hacer, y acaban pudriéndose".</a:t>
-            </a:r>
-            <a:endParaRPr lang="en-US" sz="1150" dirty="0"/>
-          </a:p>
-        </p:txBody>
-      </p:sp>
-      <p:sp>
-        <p:nvSpPr>
-          <p:cNvPr id="16" name="Shape 13"/>
-          <p:cNvSpPr/>
-          <p:nvPr/>
-        </p:nvSpPr>
-        <p:spPr>
-          <a:xfrm>
-            <a:off x="548640" y="5760720"/>
-            <a:ext cx="11064240" cy="822960"/>
-          </a:xfrm>
-          <a:prstGeom prst="roundRect">
-            <a:avLst>
-              <a:gd name="adj" fmla="val 13333"/>
+              <a:gd name="adj" fmla="val 3419"/>
             </a:avLst>
           </a:prstGeom>
           <a:solidFill>
@@ -6648,42 +8170,317 @@
           <a:ln/>
         </p:spPr>
       </p:sp>
-      <p:sp>
-        <p:nvSpPr>
-          <p:cNvPr id="17" name="Text 14"/>
-          <p:cNvSpPr txBox="1"/>
-          <p:nvPr/>
-        </p:nvSpPr>
-        <p:spPr>
-          <a:xfrm>
-            <a:off x="868680" y="5870448"/>
-            <a:ext cx="10424160" cy="621792"/>
-          </a:xfrm>
-          <a:prstGeom prst="rect">
-            <a:avLst/>
-          </a:prstGeom>
-          <a:noFill/>
-          <a:ln/>
-        </p:spPr>
-        <p:txBody>
-          <a:bodyPr wrap="square" lIns="0" tIns="0" rIns="0" bIns="0" rtlCol="0" anchor="ctr"/>
-          <a:lstStyle/>
-          <a:p>
-            <a:pPr indent="0" marL="0">
-              <a:buNone/>
-            </a:pPr>
-            <a:r>
-              <a:rPr lang="en-US" sz="1250" i="1" dirty="0">
-                <a:solidFill>
-                  <a:srgbClr val="D9A441"/>
-                </a:solidFill>
-                <a:latin typeface="Calibri" pitchFamily="34" charset="0"/>
-                <a:ea typeface="Calibri" pitchFamily="34" charset="-122"/>
-                <a:cs typeface="Calibri" pitchFamily="34" charset="-120"/>
-              </a:rPr>
-              <a:t>Ni siquiera cumplen bien su función principal: el paso intermedio de recetas da pereza, así que la lista queda peor servida que en Notas — por bonita que parezca la sensación de estar "más organizado".</a:t>
-            </a:r>
-            <a:endParaRPr lang="en-US" sz="1250" dirty="0"/>
+      <p:pic>
+        <p:nvPicPr>
+          <p:cNvPr id="8" name="Image 1" descr="/tmp/claude-0/-home-user-Larder/7e643651-6dd6-5b59-8da1-0d3b37b8e2cc/scratchpad/pptx-build/screenshots/bring-1-item-details.jpg">    </p:cNvPr>
+          <p:cNvPicPr>
+            <a:picLocks noChangeAspect="1"/>
+          </p:cNvPicPr>
+          <p:nvPr/>
+        </p:nvPicPr>
+        <p:blipFill>
+          <a:blip r:embed="rId2"/>
+          <a:srcRect l="0" r="0" t="0" b="0"/>
+          <a:stretch/>
+        </p:blipFill>
+        <p:spPr>
+          <a:xfrm>
+            <a:off x="548640" y="1691640"/>
+            <a:ext cx="2066544" cy="4480560"/>
+          </a:xfrm>
+          <a:prstGeom prst="rect">
+            <a:avLst/>
+          </a:prstGeom>
+        </p:spPr>
+      </p:pic>
+      <p:sp>
+        <p:nvSpPr>
+          <p:cNvPr id="9" name="Text 5"/>
+          <p:cNvSpPr txBox="1"/>
+          <p:nvPr/>
+        </p:nvSpPr>
+        <p:spPr>
+          <a:xfrm>
+            <a:off x="502920" y="6245352"/>
+            <a:ext cx="2157984" cy="502920"/>
+          </a:xfrm>
+          <a:prstGeom prst="rect">
+            <a:avLst/>
+          </a:prstGeom>
+          <a:noFill/>
+          <a:ln/>
+        </p:spPr>
+        <p:txBody>
+          <a:bodyPr wrap="square" lIns="0" tIns="0" rIns="0" bIns="0" rtlCol="0" anchor="t"/>
+          <a:lstStyle/>
+          <a:p>
+            <a:pPr indent="0" marL="0">
+              <a:buNone/>
+            </a:pPr>
+            <a:r>
+              <a:rPr lang="en-US" sz="950" i="1" dirty="0">
+                <a:solidFill>
+                  <a:srgbClr val="2E2119"/>
+                </a:solidFill>
+                <a:latin typeface="Calibri" pitchFamily="34" charset="0"/>
+                <a:ea typeface="Calibri" pitchFamily="34" charset="-122"/>
+                <a:cs typeface="Calibri" pitchFamily="34" charset="-120"/>
+              </a:rPr>
+              <a:t>Añadir "Avocado" abre "Item Details": cantidad, bolsa, aceite, prioridad — antes de poder seguir escribiendo.</a:t>
+            </a:r>
+            <a:endParaRPr lang="en-US" sz="950" dirty="0"/>
+          </a:p>
+        </p:txBody>
+      </p:sp>
+      <p:sp>
+        <p:nvSpPr>
+          <p:cNvPr id="10" name="Shape 6"/>
+          <p:cNvSpPr/>
+          <p:nvPr/>
+        </p:nvSpPr>
+        <p:spPr>
+          <a:xfrm>
+            <a:off x="3521354" y="1655064"/>
+            <a:ext cx="2139696" cy="4553712"/>
+          </a:xfrm>
+          <a:prstGeom prst="roundRect">
+            <a:avLst>
+              <a:gd name="adj" fmla="val 3419"/>
+            </a:avLst>
+          </a:prstGeom>
+          <a:solidFill>
+            <a:srgbClr val="2E2119"/>
+          </a:solidFill>
+          <a:ln/>
+        </p:spPr>
+      </p:sp>
+      <p:pic>
+        <p:nvPicPr>
+          <p:cNvPr id="11" name="Image 2" descr="/tmp/claude-0/-home-user-Larder/7e643651-6dd6-5b59-8da1-0d3b37b8e2cc/scratchpad/pptx-build/screenshots/bring-2-inspiration.jpg">    </p:cNvPr>
+          <p:cNvPicPr>
+            <a:picLocks noChangeAspect="1"/>
+          </p:cNvPicPr>
+          <p:nvPr/>
+        </p:nvPicPr>
+        <p:blipFill>
+          <a:blip r:embed="rId3"/>
+          <a:srcRect l="0" r="0" t="0" b="0"/>
+          <a:stretch/>
+        </p:blipFill>
+        <p:spPr>
+          <a:xfrm>
+            <a:off x="3557930" y="1691640"/>
+            <a:ext cx="2066544" cy="4480560"/>
+          </a:xfrm>
+          <a:prstGeom prst="rect">
+            <a:avLst/>
+          </a:prstGeom>
+        </p:spPr>
+      </p:pic>
+      <p:sp>
+        <p:nvSpPr>
+          <p:cNvPr id="12" name="Text 7"/>
+          <p:cNvSpPr txBox="1"/>
+          <p:nvPr/>
+        </p:nvSpPr>
+        <p:spPr>
+          <a:xfrm>
+            <a:off x="3512210" y="6245352"/>
+            <a:ext cx="2157984" cy="502920"/>
+          </a:xfrm>
+          <a:prstGeom prst="rect">
+            <a:avLst/>
+          </a:prstGeom>
+          <a:noFill/>
+          <a:ln/>
+        </p:spPr>
+        <p:txBody>
+          <a:bodyPr wrap="square" lIns="0" tIns="0" rIns="0" bIns="0" rtlCol="0" anchor="t"/>
+          <a:lstStyle/>
+          <a:p>
+            <a:pPr indent="0" marL="0">
+              <a:buNone/>
+            </a:pPr>
+            <a:r>
+              <a:rPr lang="en-US" sz="950" i="1" dirty="0">
+                <a:solidFill>
+                  <a:srgbClr val="2E2119"/>
+                </a:solidFill>
+                <a:latin typeface="Calibri" pitchFamily="34" charset="0"/>
+                <a:ea typeface="Calibri" pitchFamily="34" charset="-122"/>
+                <a:cs typeface="Calibri" pitchFamily="34" charset="-120"/>
+              </a:rPr>
+              <a:t>"Inspiration" son recetas externas (Jamie Oliver, BBC) — no ayuda a compartir la lista ni a saber qué hay en casa.</a:t>
+            </a:r>
+            <a:endParaRPr lang="en-US" sz="950" dirty="0"/>
+          </a:p>
+        </p:txBody>
+      </p:sp>
+      <p:sp>
+        <p:nvSpPr>
+          <p:cNvPr id="13" name="Shape 8"/>
+          <p:cNvSpPr/>
+          <p:nvPr/>
+        </p:nvSpPr>
+        <p:spPr>
+          <a:xfrm>
+            <a:off x="6530645" y="1655064"/>
+            <a:ext cx="2139696" cy="4553712"/>
+          </a:xfrm>
+          <a:prstGeom prst="roundRect">
+            <a:avLst>
+              <a:gd name="adj" fmla="val 3419"/>
+            </a:avLst>
+          </a:prstGeom>
+          <a:solidFill>
+            <a:srgbClr val="2E2119"/>
+          </a:solidFill>
+          <a:ln/>
+        </p:spPr>
+      </p:sp>
+      <p:pic>
+        <p:nvPicPr>
+          <p:cNvPr id="14" name="Image 3" descr="/tmp/claude-0/-home-user-Larder/7e643651-6dd6-5b59-8da1-0d3b37b8e2cc/scratchpad/pptx-build/screenshots/bring-3-search.jpg">    </p:cNvPr>
+          <p:cNvPicPr>
+            <a:picLocks noChangeAspect="1"/>
+          </p:cNvPicPr>
+          <p:nvPr/>
+        </p:nvPicPr>
+        <p:blipFill>
+          <a:blip r:embed="rId4"/>
+          <a:srcRect l="0" r="0" t="0" b="0"/>
+          <a:stretch/>
+        </p:blipFill>
+        <p:spPr>
+          <a:xfrm>
+            <a:off x="6567221" y="1691640"/>
+            <a:ext cx="2066544" cy="4480560"/>
+          </a:xfrm>
+          <a:prstGeom prst="rect">
+            <a:avLst/>
+          </a:prstGeom>
+        </p:spPr>
+      </p:pic>
+      <p:sp>
+        <p:nvSpPr>
+          <p:cNvPr id="15" name="Text 9"/>
+          <p:cNvSpPr txBox="1"/>
+          <p:nvPr/>
+        </p:nvSpPr>
+        <p:spPr>
+          <a:xfrm>
+            <a:off x="6521501" y="6245352"/>
+            <a:ext cx="2157984" cy="502920"/>
+          </a:xfrm>
+          <a:prstGeom prst="rect">
+            <a:avLst/>
+          </a:prstGeom>
+          <a:noFill/>
+          <a:ln/>
+        </p:spPr>
+        <p:txBody>
+          <a:bodyPr wrap="square" lIns="0" tIns="0" rIns="0" bIns="0" rtlCol="0" anchor="t"/>
+          <a:lstStyle/>
+          <a:p>
+            <a:pPr indent="0" marL="0">
+              <a:buNone/>
+            </a:pPr>
+            <a:r>
+              <a:rPr lang="en-US" sz="950" i="1" dirty="0">
+                <a:solidFill>
+                  <a:srgbClr val="2E2119"/>
+                </a:solidFill>
+                <a:latin typeface="Calibri" pitchFamily="34" charset="0"/>
+                <a:ea typeface="Calibri" pitchFamily="34" charset="-122"/>
+                <a:cs typeface="Calibri" pitchFamily="34" charset="-120"/>
+              </a:rPr>
+              <a:t>Cada producto se busca en su propio catálogo con icono — un paso más que abrir Notas y escribir "avocado".</a:t>
+            </a:r>
+            <a:endParaRPr lang="en-US" sz="950" dirty="0"/>
+          </a:p>
+        </p:txBody>
+      </p:sp>
+      <p:sp>
+        <p:nvSpPr>
+          <p:cNvPr id="16" name="Shape 10"/>
+          <p:cNvSpPr/>
+          <p:nvPr/>
+        </p:nvSpPr>
+        <p:spPr>
+          <a:xfrm>
+            <a:off x="9539935" y="1655064"/>
+            <a:ext cx="2139696" cy="4553712"/>
+          </a:xfrm>
+          <a:prstGeom prst="roundRect">
+            <a:avLst>
+              <a:gd name="adj" fmla="val 3419"/>
+            </a:avLst>
+          </a:prstGeom>
+          <a:solidFill>
+            <a:srgbClr val="2E2119"/>
+          </a:solidFill>
+          <a:ln/>
+        </p:spPr>
+      </p:sp>
+      <p:pic>
+        <p:nvPicPr>
+          <p:cNvPr id="17" name="Image 4" descr="/tmp/claude-0/-home-user-Larder/7e643651-6dd6-5b59-8da1-0d3b37b8e2cc/scratchpad/pptx-build/screenshots/bring-4-onboarding.jpg">    </p:cNvPr>
+          <p:cNvPicPr>
+            <a:picLocks noChangeAspect="1"/>
+          </p:cNvPicPr>
+          <p:nvPr/>
+        </p:nvPicPr>
+        <p:blipFill>
+          <a:blip r:embed="rId5"/>
+          <a:srcRect l="0" r="0" t="0" b="0"/>
+          <a:stretch/>
+        </p:blipFill>
+        <p:spPr>
+          <a:xfrm>
+            <a:off x="9576511" y="1691640"/>
+            <a:ext cx="2066544" cy="4480560"/>
+          </a:xfrm>
+          <a:prstGeom prst="rect">
+            <a:avLst/>
+          </a:prstGeom>
+        </p:spPr>
+      </p:pic>
+      <p:sp>
+        <p:nvSpPr>
+          <p:cNvPr id="18" name="Text 11"/>
+          <p:cNvSpPr txBox="1"/>
+          <p:nvPr/>
+        </p:nvSpPr>
+        <p:spPr>
+          <a:xfrm>
+            <a:off x="9530791" y="6245352"/>
+            <a:ext cx="2157984" cy="502920"/>
+          </a:xfrm>
+          <a:prstGeom prst="rect">
+            <a:avLst/>
+          </a:prstGeom>
+          <a:noFill/>
+          <a:ln/>
+        </p:spPr>
+        <p:txBody>
+          <a:bodyPr wrap="square" lIns="0" tIns="0" rIns="0" bIns="0" rtlCol="0" anchor="t"/>
+          <a:lstStyle/>
+          <a:p>
+            <a:pPr indent="0" marL="0">
+              <a:buNone/>
+            </a:pPr>
+            <a:r>
+              <a:rPr lang="en-US" sz="950" i="1" dirty="0">
+                <a:solidFill>
+                  <a:srgbClr val="2E2119"/>
+                </a:solidFill>
+                <a:latin typeface="Calibri" pitchFamily="34" charset="0"/>
+                <a:ea typeface="Calibri" pitchFamily="34" charset="-122"/>
+                <a:cs typeface="Calibri" pitchFamily="34" charset="-120"/>
+              </a:rPr>
+              <a:t>Hasta el primer uso empuja a elegir de una lista predefinida (Milk, Soy Milk...) en vez de escribir libremente.</a:t>
+            </a:r>
+            <a:endParaRPr lang="en-US" sz="950" dirty="0"/>
           </a:p>
         </p:txBody>
       </p:sp>
@@ -6835,7 +8632,7 @@
                 <a:ea typeface="Cambria" pitchFamily="34" charset="-122"/>
                 <a:cs typeface="Cambria" pitchFamily="34" charset="-120"/>
               </a:rPr>
-              <a:t>Estado del arte — el hueco detectado</a:t>
+              <a:t>AnyList por dentro</a:t>
             </a:r>
             <a:endParaRPr lang="en-US" sz="2800" dirty="0"/>
           </a:p>
@@ -6843,339 +8640,57 @@
       </p:sp>
       <p:sp>
         <p:nvSpPr>
-          <p:cNvPr id="6" name="Shape 3"/>
+          <p:cNvPr id="6" name="Text 3"/>
+          <p:cNvSpPr txBox="1"/>
+          <p:nvPr/>
+        </p:nvSpPr>
+        <p:spPr>
+          <a:xfrm>
+            <a:off x="548640" y="1207008"/>
+            <a:ext cx="11094415" cy="274320"/>
+          </a:xfrm>
+          <a:prstGeom prst="rect">
+            <a:avLst/>
+          </a:prstGeom>
+          <a:noFill/>
+          <a:ln/>
+        </p:spPr>
+        <p:txBody>
+          <a:bodyPr wrap="square" lIns="0" tIns="0" rIns="0" bIns="0" rtlCol="0" anchor="ctr"/>
+          <a:lstStyle/>
+          <a:p>
+            <a:pPr indent="0" marL="0">
+              <a:buNone/>
+            </a:pPr>
+            <a:r>
+              <a:rPr lang="en-US" sz="1000" i="1" dirty="0">
+                <a:solidFill>
+                  <a:srgbClr val="8A7A6D"/>
+                </a:solidFill>
+                <a:latin typeface="Calibri" pitchFamily="34" charset="0"/>
+                <a:ea typeface="Calibri" pitchFamily="34" charset="-122"/>
+                <a:cs typeface="Calibri" pitchFamily="34" charset="-120"/>
+              </a:rPr>
+              <a:t>Capturas propias de la app (17/09/2026) — la parte que funciona bien, y hacia dónde apunta el resto.</a:t>
+            </a:r>
+            <a:endParaRPr lang="en-US" sz="1000" dirty="0"/>
+          </a:p>
+        </p:txBody>
+      </p:sp>
+      <p:sp>
+        <p:nvSpPr>
+          <p:cNvPr id="7" name="Shape 4"/>
           <p:cNvSpPr/>
           <p:nvPr/>
         </p:nvSpPr>
         <p:spPr>
           <a:xfrm>
-            <a:off x="548640" y="1508760"/>
-            <a:ext cx="11064240" cy="1051560"/>
+            <a:off x="512064" y="1655064"/>
+            <a:ext cx="2139696" cy="4553712"/>
           </a:xfrm>
           <a:prstGeom prst="roundRect">
             <a:avLst>
-              <a:gd name="adj" fmla="val 10435"/>
-            </a:avLst>
-          </a:prstGeom>
-          <a:solidFill>
-            <a:srgbClr val="F4E9DA"/>
-          </a:solidFill>
-          <a:ln/>
-          <a:effectLst>
-            <a:outerShdw sx="100000" sy="100000" kx="0" ky="0" algn="bl" rotWithShape="0" blurRad="76200" dist="25400" dir="5400000">
-              <a:srgbClr val="000000">
-                <a:alpha val="12000"/>
-              </a:srgbClr>
-            </a:outerShdw>
-          </a:effectLst>
-        </p:spPr>
-      </p:sp>
-      <p:sp>
-        <p:nvSpPr>
-          <p:cNvPr id="7" name="Text 4"/>
-          <p:cNvSpPr txBox="1"/>
-          <p:nvPr/>
-        </p:nvSpPr>
-        <p:spPr>
-          <a:xfrm>
-            <a:off x="822960" y="1618488"/>
-            <a:ext cx="2743200" cy="822960"/>
-          </a:xfrm>
-          <a:prstGeom prst="rect">
-            <a:avLst/>
-          </a:prstGeom>
-          <a:noFill/>
-          <a:ln/>
-        </p:spPr>
-        <p:txBody>
-          <a:bodyPr wrap="square" lIns="0" tIns="0" rIns="0" bIns="0" rtlCol="0" anchor="ctr"/>
-          <a:lstStyle/>
-          <a:p>
-            <a:pPr indent="0" marL="0">
-              <a:buNone/>
-            </a:pPr>
-            <a:r>
-              <a:rPr lang="en-US" sz="1500" b="1" dirty="0">
-                <a:solidFill>
-                  <a:srgbClr val="C9682B"/>
-                </a:solidFill>
-                <a:latin typeface="Cambria" pitchFamily="34" charset="0"/>
-                <a:ea typeface="Cambria" pitchFamily="34" charset="-122"/>
-                <a:cs typeface="Cambria" pitchFamily="34" charset="-120"/>
-              </a:rPr>
-              <a:t>De posicionamiento</a:t>
-            </a:r>
-            <a:endParaRPr lang="en-US" sz="1500" dirty="0"/>
-          </a:p>
-        </p:txBody>
-      </p:sp>
-      <p:sp>
-        <p:nvSpPr>
-          <p:cNvPr id="8" name="Text 5"/>
-          <p:cNvSpPr txBox="1"/>
-          <p:nvPr/>
-        </p:nvSpPr>
-        <p:spPr>
-          <a:xfrm>
-            <a:off x="3657600" y="1618488"/>
-            <a:ext cx="7772400" cy="822960"/>
-          </a:xfrm>
-          <a:prstGeom prst="rect">
-            <a:avLst/>
-          </a:prstGeom>
-          <a:noFill/>
-          <a:ln/>
-        </p:spPr>
-        <p:txBody>
-          <a:bodyPr wrap="square" lIns="0" tIns="0" rIns="0" bIns="0" rtlCol="0" anchor="ctr"/>
-          <a:lstStyle/>
-          <a:p>
-            <a:pPr indent="0" marL="0">
-              <a:buNone/>
-            </a:pPr>
-            <a:r>
-              <a:rPr lang="en-US" sz="1300" dirty="0">
-                <a:solidFill>
-                  <a:srgbClr val="2E2119"/>
-                </a:solidFill>
-                <a:latin typeface="Calibri" pitchFamily="34" charset="0"/>
-                <a:ea typeface="Calibri" pitchFamily="34" charset="-122"/>
-                <a:cs typeface="Calibri" pitchFamily="34" charset="-120"/>
-              </a:rPr>
-              <a:t>Ni Bring! ni AnyList apuntan al acto simple de apuntar y compartir la lista — las dos están construidas para cocinar y planificar recetas.</a:t>
-            </a:r>
-            <a:endParaRPr lang="en-US" sz="1300" dirty="0"/>
-          </a:p>
-        </p:txBody>
-      </p:sp>
-      <p:sp>
-        <p:nvSpPr>
-          <p:cNvPr id="9" name="Shape 6"/>
-          <p:cNvSpPr/>
-          <p:nvPr/>
-        </p:nvSpPr>
-        <p:spPr>
-          <a:xfrm>
-            <a:off x="548640" y="2697480"/>
-            <a:ext cx="11064240" cy="1051560"/>
-          </a:xfrm>
-          <a:prstGeom prst="roundRect">
-            <a:avLst>
-              <a:gd name="adj" fmla="val 10435"/>
-            </a:avLst>
-          </a:prstGeom>
-          <a:solidFill>
-            <a:srgbClr val="EDE6DC"/>
-          </a:solidFill>
-          <a:ln/>
-          <a:effectLst>
-            <a:outerShdw sx="100000" sy="100000" kx="0" ky="0" algn="bl" rotWithShape="0" blurRad="76200" dist="25400" dir="5400000">
-              <a:srgbClr val="000000">
-                <a:alpha val="12000"/>
-              </a:srgbClr>
-            </a:outerShdw>
-          </a:effectLst>
-        </p:spPr>
-      </p:sp>
-      <p:sp>
-        <p:nvSpPr>
-          <p:cNvPr id="10" name="Text 7"/>
-          <p:cNvSpPr txBox="1"/>
-          <p:nvPr/>
-        </p:nvSpPr>
-        <p:spPr>
-          <a:xfrm>
-            <a:off x="822960" y="2807208"/>
-            <a:ext cx="2743200" cy="822960"/>
-          </a:xfrm>
-          <a:prstGeom prst="rect">
-            <a:avLst/>
-          </a:prstGeom>
-          <a:noFill/>
-          <a:ln/>
-        </p:spPr>
-        <p:txBody>
-          <a:bodyPr wrap="square" lIns="0" tIns="0" rIns="0" bIns="0" rtlCol="0" anchor="ctr"/>
-          <a:lstStyle/>
-          <a:p>
-            <a:pPr indent="0" marL="0">
-              <a:buNone/>
-            </a:pPr>
-            <a:r>
-              <a:rPr lang="en-US" sz="1500" b="1" dirty="0">
-                <a:solidFill>
-                  <a:srgbClr val="C9682B"/>
-                </a:solidFill>
-                <a:latin typeface="Cambria" pitchFamily="34" charset="0"/>
-                <a:ea typeface="Cambria" pitchFamily="34" charset="-122"/>
-                <a:cs typeface="Cambria" pitchFamily="34" charset="-120"/>
-              </a:rPr>
-              <a:t>De fricción</a:t>
-            </a:r>
-            <a:endParaRPr lang="en-US" sz="1500" dirty="0"/>
-          </a:p>
-        </p:txBody>
-      </p:sp>
-      <p:sp>
-        <p:nvSpPr>
-          <p:cNvPr id="11" name="Text 8"/>
-          <p:cNvSpPr txBox="1"/>
-          <p:nvPr/>
-        </p:nvSpPr>
-        <p:spPr>
-          <a:xfrm>
-            <a:off x="3657600" y="2807208"/>
-            <a:ext cx="7772400" cy="822960"/>
-          </a:xfrm>
-          <a:prstGeom prst="rect">
-            <a:avLst/>
-          </a:prstGeom>
-          <a:noFill/>
-          <a:ln/>
-        </p:spPr>
-        <p:txBody>
-          <a:bodyPr wrap="square" lIns="0" tIns="0" rIns="0" bIns="0" rtlCol="0" anchor="ctr"/>
-          <a:lstStyle/>
-          <a:p>
-            <a:pPr indent="0" marL="0">
-              <a:buNone/>
-            </a:pPr>
-            <a:r>
-              <a:rPr lang="en-US" sz="1300" dirty="0">
-                <a:solidFill>
-                  <a:srgbClr val="2E2119"/>
-                </a:solidFill>
-                <a:latin typeface="Calibri" pitchFamily="34" charset="0"/>
-                <a:ea typeface="Calibri" pitchFamily="34" charset="-122"/>
-                <a:cs typeface="Calibri" pitchFamily="34" charset="-120"/>
-              </a:rPr>
-              <a:t>Cualquier paso extra sobre "simplemente escribir" hace que la gente vuelva a Notas, la solución más simple.</a:t>
-            </a:r>
-            <a:endParaRPr lang="en-US" sz="1300" dirty="0"/>
-          </a:p>
-        </p:txBody>
-      </p:sp>
-      <p:sp>
-        <p:nvSpPr>
-          <p:cNvPr id="12" name="Shape 9"/>
-          <p:cNvSpPr/>
-          <p:nvPr/>
-        </p:nvSpPr>
-        <p:spPr>
-          <a:xfrm>
-            <a:off x="548640" y="3886200"/>
-            <a:ext cx="11064240" cy="1051560"/>
-          </a:xfrm>
-          <a:prstGeom prst="roundRect">
-            <a:avLst>
-              <a:gd name="adj" fmla="val 10435"/>
-            </a:avLst>
-          </a:prstGeom>
-          <a:solidFill>
-            <a:srgbClr val="F4E9DA"/>
-          </a:solidFill>
-          <a:ln/>
-          <a:effectLst>
-            <a:outerShdw sx="100000" sy="100000" kx="0" ky="0" algn="bl" rotWithShape="0" blurRad="76200" dist="25400" dir="5400000">
-              <a:srgbClr val="000000">
-                <a:alpha val="12000"/>
-              </a:srgbClr>
-            </a:outerShdw>
-          </a:effectLst>
-        </p:spPr>
-      </p:sp>
-      <p:sp>
-        <p:nvSpPr>
-          <p:cNvPr id="13" name="Text 10"/>
-          <p:cNvSpPr txBox="1"/>
-          <p:nvPr/>
-        </p:nvSpPr>
-        <p:spPr>
-          <a:xfrm>
-            <a:off x="822960" y="3995928"/>
-            <a:ext cx="2743200" cy="822960"/>
-          </a:xfrm>
-          <a:prstGeom prst="rect">
-            <a:avLst/>
-          </a:prstGeom>
-          <a:noFill/>
-          <a:ln/>
-        </p:spPr>
-        <p:txBody>
-          <a:bodyPr wrap="square" lIns="0" tIns="0" rIns="0" bIns="0" rtlCol="0" anchor="ctr"/>
-          <a:lstStyle/>
-          <a:p>
-            <a:pPr indent="0" marL="0">
-              <a:buNone/>
-            </a:pPr>
-            <a:r>
-              <a:rPr lang="en-US" sz="1500" b="1" dirty="0">
-                <a:solidFill>
-                  <a:srgbClr val="C9682B"/>
-                </a:solidFill>
-                <a:latin typeface="Cambria" pitchFamily="34" charset="0"/>
-                <a:ea typeface="Cambria" pitchFamily="34" charset="-122"/>
-                <a:cs typeface="Cambria" pitchFamily="34" charset="-120"/>
-              </a:rPr>
-              <a:t>De colaboración</a:t>
-            </a:r>
-            <a:endParaRPr lang="en-US" sz="1500" dirty="0"/>
-          </a:p>
-        </p:txBody>
-      </p:sp>
-      <p:sp>
-        <p:nvSpPr>
-          <p:cNvPr id="14" name="Text 11"/>
-          <p:cNvSpPr txBox="1"/>
-          <p:nvPr/>
-        </p:nvSpPr>
-        <p:spPr>
-          <a:xfrm>
-            <a:off x="3657600" y="3995928"/>
-            <a:ext cx="7772400" cy="822960"/>
-          </a:xfrm>
-          <a:prstGeom prst="rect">
-            <a:avLst/>
-          </a:prstGeom>
-          <a:noFill/>
-          <a:ln/>
-        </p:spPr>
-        <p:txBody>
-          <a:bodyPr wrap="square" lIns="0" tIns="0" rIns="0" bIns="0" rtlCol="0" anchor="ctr"/>
-          <a:lstStyle/>
-          <a:p>
-            <a:pPr indent="0" marL="0">
-              <a:buNone/>
-            </a:pPr>
-            <a:r>
-              <a:rPr lang="en-US" sz="1300" dirty="0">
-                <a:solidFill>
-                  <a:srgbClr val="2E2119"/>
-                </a:solidFill>
-                <a:latin typeface="Calibri" pitchFamily="34" charset="0"/>
-                <a:ea typeface="Calibri" pitchFamily="34" charset="-122"/>
-                <a:cs typeface="Calibri" pitchFamily="34" charset="-120"/>
-              </a:rPr>
-              <a:t>La solución que mejor funciona en la práctica (Notas) no se puede compartir ni coeditar en tiempo real.</a:t>
-            </a:r>
-            <a:endParaRPr lang="en-US" sz="1300" dirty="0"/>
-          </a:p>
-        </p:txBody>
-      </p:sp>
-      <p:sp>
-        <p:nvSpPr>
-          <p:cNvPr id="15" name="Shape 12"/>
-          <p:cNvSpPr/>
-          <p:nvPr/>
-        </p:nvSpPr>
-        <p:spPr>
-          <a:xfrm>
-            <a:off x="548640" y="5212080"/>
-            <a:ext cx="11064240" cy="1051560"/>
-          </a:xfrm>
-          <a:prstGeom prst="roundRect">
-            <a:avLst>
-              <a:gd name="adj" fmla="val 10435"/>
+              <a:gd name="adj" fmla="val 3419"/>
             </a:avLst>
           </a:prstGeom>
           <a:solidFill>
@@ -7184,42 +8699,317 @@
           <a:ln/>
         </p:spPr>
       </p:sp>
-      <p:sp>
-        <p:nvSpPr>
-          <p:cNvPr id="16" name="Text 13"/>
-          <p:cNvSpPr txBox="1"/>
-          <p:nvPr/>
-        </p:nvSpPr>
-        <p:spPr>
-          <a:xfrm>
-            <a:off x="868680" y="5330952"/>
-            <a:ext cx="10424160" cy="777240"/>
-          </a:xfrm>
-          <a:prstGeom prst="rect">
-            <a:avLst/>
-          </a:prstGeom>
-          <a:noFill/>
-          <a:ln/>
-        </p:spPr>
-        <p:txBody>
-          <a:bodyPr wrap="square" lIns="0" tIns="0" rIns="0" bIns="0" rtlCol="0" anchor="ctr"/>
-          <a:lstStyle/>
-          <a:p>
-            <a:pPr indent="0" marL="0">
-              <a:buNone/>
-            </a:pPr>
-            <a:r>
-              <a:rPr lang="en-US" sz="1300" i="1" dirty="0">
-                <a:solidFill>
-                  <a:srgbClr val="D9A441"/>
-                </a:solidFill>
-                <a:latin typeface="Calibri" pitchFamily="34" charset="0"/>
-                <a:ea typeface="Calibri" pitchFamily="34" charset="-122"/>
-                <a:cs typeface="Calibri" pitchFamily="34" charset="-120"/>
-              </a:rPr>
-              <a:t>El hueco real: una herramienta tan rápida de usar como Notas, tan colaborativa como Bring!, que además dice quién apuntó cada cosa y muestra qué hay en casa sin pedir que nadie lleve la cuenta a mano — el ángulo que nadie cubre.</a:t>
-            </a:r>
-            <a:endParaRPr lang="en-US" sz="1300" dirty="0"/>
+      <p:pic>
+        <p:nvPicPr>
+          <p:cNvPr id="8" name="Image 1" descr="/tmp/claude-0/-home-user-Larder/7e643651-6dd6-5b59-8da1-0d3b37b8e2cc/scratchpad/pptx-build/screenshots/anylist-1-autocomplete.jpg">    </p:cNvPr>
+          <p:cNvPicPr>
+            <a:picLocks noChangeAspect="1"/>
+          </p:cNvPicPr>
+          <p:nvPr/>
+        </p:nvPicPr>
+        <p:blipFill>
+          <a:blip r:embed="rId2"/>
+          <a:srcRect l="0" r="0" t="0" b="0"/>
+          <a:stretch/>
+        </p:blipFill>
+        <p:spPr>
+          <a:xfrm>
+            <a:off x="548640" y="1691640"/>
+            <a:ext cx="2066544" cy="4480560"/>
+          </a:xfrm>
+          <a:prstGeom prst="rect">
+            <a:avLst/>
+          </a:prstGeom>
+        </p:spPr>
+      </p:pic>
+      <p:sp>
+        <p:nvSpPr>
+          <p:cNvPr id="9" name="Text 5"/>
+          <p:cNvSpPr txBox="1"/>
+          <p:nvPr/>
+        </p:nvSpPr>
+        <p:spPr>
+          <a:xfrm>
+            <a:off x="502920" y="6245352"/>
+            <a:ext cx="2157984" cy="502920"/>
+          </a:xfrm>
+          <a:prstGeom prst="rect">
+            <a:avLst/>
+          </a:prstGeom>
+          <a:noFill/>
+          <a:ln/>
+        </p:spPr>
+        <p:txBody>
+          <a:bodyPr wrap="square" lIns="0" tIns="0" rIns="0" bIns="0" rtlCol="0" anchor="t"/>
+          <a:lstStyle/>
+          <a:p>
+            <a:pPr indent="0" marL="0">
+              <a:buNone/>
+            </a:pPr>
+            <a:r>
+              <a:rPr lang="en-US" sz="950" i="1" dirty="0">
+                <a:solidFill>
+                  <a:srgbClr val="2E2119"/>
+                </a:solidFill>
+                <a:latin typeface="Calibri" pitchFamily="34" charset="0"/>
+                <a:ea typeface="Calibri" pitchFamily="34" charset="-122"/>
+                <a:cs typeface="Calibri" pitchFamily="34" charset="-120"/>
+              </a:rPr>
+              <a:t>Autocompletado real al escribir ("Strawberries") — la parte que sí funciona bien.</a:t>
+            </a:r>
+            <a:endParaRPr lang="en-US" sz="950" dirty="0"/>
+          </a:p>
+        </p:txBody>
+      </p:sp>
+      <p:sp>
+        <p:nvSpPr>
+          <p:cNvPr id="10" name="Shape 6"/>
+          <p:cNvSpPr/>
+          <p:nvPr/>
+        </p:nvSpPr>
+        <p:spPr>
+          <a:xfrm>
+            <a:off x="3521354" y="1655064"/>
+            <a:ext cx="2139696" cy="4553712"/>
+          </a:xfrm>
+          <a:prstGeom prst="roundRect">
+            <a:avLst>
+              <a:gd name="adj" fmla="val 3419"/>
+            </a:avLst>
+          </a:prstGeom>
+          <a:solidFill>
+            <a:srgbClr val="2E2119"/>
+          </a:solidFill>
+          <a:ln/>
+        </p:spPr>
+      </p:sp>
+      <p:pic>
+        <p:nvPicPr>
+          <p:cNvPr id="11" name="Image 2" descr="/tmp/claude-0/-home-user-Larder/7e643651-6dd6-5b59-8da1-0d3b37b8e2cc/scratchpad/pptx-build/screenshots/anylist-2-categories.jpg">    </p:cNvPr>
+          <p:cNvPicPr>
+            <a:picLocks noChangeAspect="1"/>
+          </p:cNvPicPr>
+          <p:nvPr/>
+        </p:nvPicPr>
+        <p:blipFill>
+          <a:blip r:embed="rId3"/>
+          <a:srcRect l="0" r="0" t="0" b="0"/>
+          <a:stretch/>
+        </p:blipFill>
+        <p:spPr>
+          <a:xfrm>
+            <a:off x="3557930" y="1691640"/>
+            <a:ext cx="2066544" cy="4480560"/>
+          </a:xfrm>
+          <a:prstGeom prst="rect">
+            <a:avLst/>
+          </a:prstGeom>
+        </p:spPr>
+      </p:pic>
+      <p:sp>
+        <p:nvSpPr>
+          <p:cNvPr id="12" name="Text 7"/>
+          <p:cNvSpPr txBox="1"/>
+          <p:nvPr/>
+        </p:nvSpPr>
+        <p:spPr>
+          <a:xfrm>
+            <a:off x="3512210" y="6245352"/>
+            <a:ext cx="2157984" cy="502920"/>
+          </a:xfrm>
+          <a:prstGeom prst="rect">
+            <a:avLst/>
+          </a:prstGeom>
+          <a:noFill/>
+          <a:ln/>
+        </p:spPr>
+        <p:txBody>
+          <a:bodyPr wrap="square" lIns="0" tIns="0" rIns="0" bIns="0" rtlCol="0" anchor="t"/>
+          <a:lstStyle/>
+          <a:p>
+            <a:pPr indent="0" marL="0">
+              <a:buNone/>
+            </a:pPr>
+            <a:r>
+              <a:rPr lang="en-US" sz="950" i="1" dirty="0">
+                <a:solidFill>
+                  <a:srgbClr val="2E2119"/>
+                </a:solidFill>
+                <a:latin typeface="Calibri" pitchFamily="34" charset="0"/>
+                <a:ea typeface="Calibri" pitchFamily="34" charset="-122"/>
+                <a:cs typeface="Calibri" pitchFamily="34" charset="-120"/>
+              </a:rPr>
+              <a:t>Organiza por categorías (Dairy, Produce) — más ordenado, pero sigue siendo tecleo manual, item a item.</a:t>
+            </a:r>
+            <a:endParaRPr lang="en-US" sz="950" dirty="0"/>
+          </a:p>
+        </p:txBody>
+      </p:sp>
+      <p:sp>
+        <p:nvSpPr>
+          <p:cNvPr id="13" name="Shape 8"/>
+          <p:cNvSpPr/>
+          <p:nvPr/>
+        </p:nvSpPr>
+        <p:spPr>
+          <a:xfrm>
+            <a:off x="6530645" y="1655064"/>
+            <a:ext cx="2139696" cy="4553712"/>
+          </a:xfrm>
+          <a:prstGeom prst="roundRect">
+            <a:avLst>
+              <a:gd name="adj" fmla="val 3419"/>
+            </a:avLst>
+          </a:prstGeom>
+          <a:solidFill>
+            <a:srgbClr val="2E2119"/>
+          </a:solidFill>
+          <a:ln/>
+        </p:spPr>
+      </p:sp>
+      <p:pic>
+        <p:nvPicPr>
+          <p:cNvPr id="14" name="Image 3" descr="/tmp/claude-0/-home-user-Larder/7e643651-6dd6-5b59-8da1-0d3b37b8e2cc/scratchpad/pptx-build/screenshots/anylist-3-recipes.jpg">    </p:cNvPr>
+          <p:cNvPicPr>
+            <a:picLocks noChangeAspect="1"/>
+          </p:cNvPicPr>
+          <p:nvPr/>
+        </p:nvPicPr>
+        <p:blipFill>
+          <a:blip r:embed="rId4"/>
+          <a:srcRect l="0" r="0" t="0" b="0"/>
+          <a:stretch/>
+        </p:blipFill>
+        <p:spPr>
+          <a:xfrm>
+            <a:off x="6567221" y="1691640"/>
+            <a:ext cx="2066544" cy="4480560"/>
+          </a:xfrm>
+          <a:prstGeom prst="rect">
+            <a:avLst/>
+          </a:prstGeom>
+        </p:spPr>
+      </p:pic>
+      <p:sp>
+        <p:nvSpPr>
+          <p:cNvPr id="15" name="Text 9"/>
+          <p:cNvSpPr txBox="1"/>
+          <p:nvPr/>
+        </p:nvSpPr>
+        <p:spPr>
+          <a:xfrm>
+            <a:off x="6521501" y="6245352"/>
+            <a:ext cx="2157984" cy="502920"/>
+          </a:xfrm>
+          <a:prstGeom prst="rect">
+            <a:avLst/>
+          </a:prstGeom>
+          <a:noFill/>
+          <a:ln/>
+        </p:spPr>
+        <p:txBody>
+          <a:bodyPr wrap="square" lIns="0" tIns="0" rIns="0" bIns="0" rtlCol="0" anchor="t"/>
+          <a:lstStyle/>
+          <a:p>
+            <a:pPr indent="0" marL="0">
+              <a:buNone/>
+            </a:pPr>
+            <a:r>
+              <a:rPr lang="en-US" sz="950" i="1" dirty="0">
+                <a:solidFill>
+                  <a:srgbClr val="2E2119"/>
+                </a:solidFill>
+                <a:latin typeface="Calibri" pitchFamily="34" charset="0"/>
+                <a:ea typeface="Calibri" pitchFamily="34" charset="-122"/>
+                <a:cs typeface="Calibri" pitchFamily="34" charset="-120"/>
+              </a:rPr>
+              <a:t>Recetas tiene pestaña propia, con fecha e imagen — la mitad de la identidad de la app es cocinar.</a:t>
+            </a:r>
+            <a:endParaRPr lang="en-US" sz="950" dirty="0"/>
+          </a:p>
+        </p:txBody>
+      </p:sp>
+      <p:sp>
+        <p:nvSpPr>
+          <p:cNvPr id="16" name="Shape 10"/>
+          <p:cNvSpPr/>
+          <p:nvPr/>
+        </p:nvSpPr>
+        <p:spPr>
+          <a:xfrm>
+            <a:off x="9539935" y="1655064"/>
+            <a:ext cx="2139696" cy="4553712"/>
+          </a:xfrm>
+          <a:prstGeom prst="roundRect">
+            <a:avLst>
+              <a:gd name="adj" fmla="val 3419"/>
+            </a:avLst>
+          </a:prstGeom>
+          <a:solidFill>
+            <a:srgbClr val="2E2119"/>
+          </a:solidFill>
+          <a:ln/>
+        </p:spPr>
+      </p:sp>
+      <p:pic>
+        <p:nvPicPr>
+          <p:cNvPr id="17" name="Image 4" descr="/tmp/claude-0/-home-user-Larder/7e643651-6dd6-5b59-8da1-0d3b37b8e2cc/scratchpad/pptx-build/screenshots/anylist-4-import-recipes.jpg">    </p:cNvPr>
+          <p:cNvPicPr>
+            <a:picLocks noChangeAspect="1"/>
+          </p:cNvPicPr>
+          <p:nvPr/>
+        </p:nvPicPr>
+        <p:blipFill>
+          <a:blip r:embed="rId5"/>
+          <a:srcRect l="0" r="0" t="0" b="0"/>
+          <a:stretch/>
+        </p:blipFill>
+        <p:spPr>
+          <a:xfrm>
+            <a:off x="9576511" y="1691640"/>
+            <a:ext cx="2066544" cy="4480560"/>
+          </a:xfrm>
+          <a:prstGeom prst="rect">
+            <a:avLst/>
+          </a:prstGeom>
+        </p:spPr>
+      </p:pic>
+      <p:sp>
+        <p:nvSpPr>
+          <p:cNvPr id="18" name="Text 11"/>
+          <p:cNvSpPr txBox="1"/>
+          <p:nvPr/>
+        </p:nvSpPr>
+        <p:spPr>
+          <a:xfrm>
+            <a:off x="9530791" y="6245352"/>
+            <a:ext cx="2157984" cy="502920"/>
+          </a:xfrm>
+          <a:prstGeom prst="rect">
+            <a:avLst/>
+          </a:prstGeom>
+          <a:noFill/>
+          <a:ln/>
+        </p:spPr>
+        <p:txBody>
+          <a:bodyPr wrap="square" lIns="0" tIns="0" rIns="0" bIns="0" rtlCol="0" anchor="t"/>
+          <a:lstStyle/>
+          <a:p>
+            <a:pPr indent="0" marL="0">
+              <a:buNone/>
+            </a:pPr>
+            <a:r>
+              <a:rPr lang="en-US" sz="950" i="1" dirty="0">
+                <a:solidFill>
+                  <a:srgbClr val="2E2119"/>
+                </a:solidFill>
+                <a:latin typeface="Calibri" pitchFamily="34" charset="0"/>
+                <a:ea typeface="Calibri" pitchFamily="34" charset="-122"/>
+                <a:cs typeface="Calibri" pitchFamily="34" charset="-120"/>
+              </a:rPr>
+              <a:t>Hasta importar recetas de la web tiene su propio menú — más funciones sobre cocinar, ninguna sobre compartir en tiempo real.</a:t>
+            </a:r>
+            <a:endParaRPr lang="en-US" sz="950" dirty="0"/>
           </a:p>
         </p:txBody>
       </p:sp>
@@ -8645,7 +10435,7 @@
                 <a:ea typeface="Calibri" pitchFamily="34" charset="-122"/>
                 <a:cs typeface="Calibri" pitchFamily="34" charset="-120"/>
               </a:rPr>
-              <a:t>PASO 2 — VALIDACIÓN</a:t>
+              <a:t>PASO 2</a:t>
             </a:r>
             <a:endParaRPr lang="en-US" sz="1200" dirty="0"/>
           </a:p>
@@ -8684,7 +10474,7 @@
                 <a:ea typeface="Cambria" pitchFamily="34" charset="-122"/>
                 <a:cs typeface="Cambria" pitchFamily="34" charset="-120"/>
               </a:rPr>
-              <a:t>Las quejas espontáneas confirman el mismo patrón</a:t>
+              <a:t>¿Y si tu app no tiene nada "chulo"?</a:t>
             </a:r>
             <a:endParaRPr lang="en-US" sz="2800" dirty="0"/>
           </a:p>
@@ -8723,7 +10513,7 @@
                 <a:ea typeface="Calibri" pitchFamily="34" charset="-122"/>
                 <a:cs typeface="Calibri" pitchFamily="34" charset="-120"/>
               </a:rPr>
-              <a:t>Pregunta 9 (abierta): "¿Qué es lo que más te frustra de gestionar la compra o la nevera?" — nadie vio el prototipo antes de responder.</a:t>
+              <a:t>La objeción que anticipamos antes de que nos la hagan — no una respuesta a la defensiva después.</a:t>
             </a:r>
             <a:endParaRPr lang="en-US" sz="1000" dirty="0"/>
           </a:p>
@@ -8737,16 +10527,16 @@
         </p:nvSpPr>
         <p:spPr>
           <a:xfrm>
-            <a:off x="548640" y="1508760"/>
-            <a:ext cx="5532120" cy="4160520"/>
+            <a:off x="548640" y="1463040"/>
+            <a:ext cx="11064240" cy="1097280"/>
           </a:xfrm>
           <a:prstGeom prst="roundRect">
             <a:avLst>
-              <a:gd name="adj" fmla="val 2637"/>
+              <a:gd name="adj" fmla="val 10000"/>
             </a:avLst>
           </a:prstGeom>
           <a:solidFill>
-            <a:srgbClr val="F4E9DA"/>
+            <a:srgbClr val="EDE6DC"/>
           </a:solidFill>
           <a:ln/>
           <a:effectLst>
@@ -8766,8 +10556,8 @@
         </p:nvSpPr>
         <p:spPr>
           <a:xfrm>
-            <a:off x="777240" y="1645920"/>
-            <a:ext cx="5074920" cy="274320"/>
+            <a:off x="822960" y="1600200"/>
+            <a:ext cx="10515600" cy="822960"/>
           </a:xfrm>
           <a:prstGeom prst="rect">
             <a:avLst/>
@@ -8783,7 +10573,46 @@
               <a:buNone/>
             </a:pPr>
             <a:r>
-              <a:rPr lang="en-US" sz="1200" b="1" spc="150" kern="0" dirty="0">
+              <a:rPr lang="en-US" sz="1500" i="1" dirty="0">
+                <a:solidFill>
+                  <a:srgbClr val="2E2119"/>
+                </a:solidFill>
+                <a:latin typeface="Calibri" pitchFamily="34" charset="0"/>
+                <a:ea typeface="Calibri" pitchFamily="34" charset="-122"/>
+                <a:cs typeface="Calibri" pitchFamily="34" charset="-120"/>
+              </a:rPr>
+              <a:t>"Tu solución (Notas) no tiene nada como mis recetas, mi meal planning o mis agentes de IA."</a:t>
+            </a:r>
+            <a:endParaRPr lang="en-US" sz="1500" dirty="0"/>
+          </a:p>
+        </p:txBody>
+      </p:sp>
+      <p:sp>
+        <p:nvSpPr>
+          <p:cNvPr id="9" name="Text 6"/>
+          <p:cNvSpPr txBox="1"/>
+          <p:nvPr/>
+        </p:nvSpPr>
+        <p:spPr>
+          <a:xfrm>
+            <a:off x="548640" y="2697480"/>
+            <a:ext cx="11064240" cy="1005840"/>
+          </a:xfrm>
+          <a:prstGeom prst="rect">
+            <a:avLst/>
+          </a:prstGeom>
+          <a:noFill/>
+          <a:ln/>
+        </p:spPr>
+        <p:txBody>
+          <a:bodyPr wrap="square" lIns="0" tIns="0" rIns="0" bIns="0" rtlCol="0" anchor="t"/>
+          <a:lstStyle/>
+          <a:p>
+            <a:pPr indent="0" marL="0">
+              <a:buNone/>
+            </a:pPr>
+            <a:r>
+              <a:rPr lang="en-US" sz="1300" b="1" dirty="0">
                 <a:solidFill>
                   <a:srgbClr val="C9682B"/>
                 </a:solidFill>
@@ -8791,81 +10620,13 @@
                 <a:ea typeface="Calibri" pitchFamily="34" charset="-122"/>
                 <a:cs typeface="Calibri" pitchFamily="34" charset="-120"/>
               </a:rPr>
-              <a:t>FALTA DE COOPERACIÓN</a:t>
-            </a:r>
-            <a:endParaRPr lang="en-US" sz="1200" dirty="0"/>
-          </a:p>
-        </p:txBody>
-      </p:sp>
-      <p:sp>
-        <p:nvSpPr>
-          <p:cNvPr id="9" name="Text 6"/>
-          <p:cNvSpPr txBox="1"/>
-          <p:nvPr/>
-        </p:nvSpPr>
-        <p:spPr>
-          <a:xfrm>
-            <a:off x="777240" y="1901952"/>
-            <a:ext cx="5074920" cy="274320"/>
-          </a:xfrm>
-          <a:prstGeom prst="rect">
-            <a:avLst/>
-          </a:prstGeom>
-          <a:noFill/>
-          <a:ln/>
-        </p:spPr>
-        <p:txBody>
-          <a:bodyPr wrap="square" lIns="0" tIns="0" rIns="0" bIns="0" rtlCol="0" anchor="ctr"/>
-          <a:lstStyle/>
-          <a:p>
-            <a:pPr indent="0" marL="0">
-              <a:buNone/>
-            </a:pPr>
-            <a:r>
-              <a:rPr lang="en-US" sz="1050" i="1" dirty="0">
-                <a:solidFill>
-                  <a:srgbClr val="8A7A6D"/>
-                </a:solidFill>
-                <a:latin typeface="Calibri" pitchFamily="34" charset="0"/>
-                <a:ea typeface="Calibri" pitchFamily="34" charset="-122"/>
-                <a:cs typeface="Calibri" pitchFamily="34" charset="-120"/>
-              </a:rPr>
-              <a:t>8 de 35 personas (23%) — el tema más repetido, sin que se les preguntara</a:t>
-            </a:r>
-            <a:endParaRPr lang="en-US" sz="1050" dirty="0"/>
-          </a:p>
-        </p:txBody>
-      </p:sp>
-      <p:sp>
-        <p:nvSpPr>
-          <p:cNvPr id="10" name="Text 7"/>
-          <p:cNvSpPr txBox="1"/>
-          <p:nvPr/>
-        </p:nvSpPr>
-        <p:spPr>
-          <a:xfrm>
-            <a:off x="822960" y="2286000"/>
-            <a:ext cx="5029200" cy="3291840"/>
-          </a:xfrm>
-          <a:prstGeom prst="rect">
-            <a:avLst/>
-          </a:prstGeom>
-          <a:noFill/>
-          <a:ln/>
-        </p:spPr>
-        <p:txBody>
-          <a:bodyPr wrap="square" lIns="0" tIns="0" rIns="0" bIns="0" rtlCol="0" anchor="t"/>
-          <a:lstStyle/>
-          <a:p>
-            <a:pPr marL="342900" indent="-342900">
-              <a:spcAft>
-                <a:spcPts val="700"/>
-              </a:spcAft>
-              <a:buSzPct val="100000"/>
-              <a:buChar char="•"/>
-            </a:pPr>
-            <a:r>
-              <a:rPr lang="en-US" sz="1000" i="1" dirty="0">
+              <a:t>Cierto. </a:t>
+            </a:r>
+            <a:pPr indent="0" marL="0">
+              <a:buNone/>
+            </a:pPr>
+            <a:r>
+              <a:rPr lang="en-US" sz="1300" dirty="0">
                 <a:solidFill>
                   <a:srgbClr val="2E2119"/>
                 </a:solidFill>
@@ -8873,135 +10634,30 @@
                 <a:ea typeface="Calibri" pitchFamily="34" charset="-122"/>
                 <a:cs typeface="Calibri" pitchFamily="34" charset="-120"/>
               </a:rPr>
-              <a:t>"I don’t know who bought what"</a:t>
-            </a:r>
-            <a:endParaRPr lang="en-US" sz="1000" dirty="0"/>
-          </a:p>
-          <a:p>
-            <a:pPr marL="342900" indent="-342900">
-              <a:spcAft>
-                <a:spcPts val="700"/>
-              </a:spcAft>
-              <a:buSzPct val="100000"/>
-              <a:buChar char="•"/>
-            </a:pPr>
-            <a:r>
-              <a:rPr lang="en-US" sz="1000" i="1" dirty="0">
-                <a:solidFill>
-                  <a:srgbClr val="2E2119"/>
-                </a:solidFill>
-                <a:latin typeface="Calibri" pitchFamily="34" charset="0"/>
-                <a:ea typeface="Calibri" pitchFamily="34" charset="-122"/>
-                <a:cs typeface="Calibri" pitchFamily="34" charset="-120"/>
-              </a:rPr>
-              <a:t>"Not knowing what the others want, the others eating my stuff" / "People eating my food"</a:t>
-            </a:r>
-            <a:endParaRPr lang="en-US" sz="1000" dirty="0"/>
-          </a:p>
-          <a:p>
-            <a:pPr marL="342900" indent="-342900">
-              <a:spcAft>
-                <a:spcPts val="700"/>
-              </a:spcAft>
-              <a:buSzPct val="100000"/>
-              <a:buChar char="•"/>
-            </a:pPr>
-            <a:r>
-              <a:rPr lang="en-US" sz="1000" i="1" dirty="0">
-                <a:solidFill>
-                  <a:srgbClr val="2E2119"/>
-                </a:solidFill>
-                <a:latin typeface="Calibri" pitchFamily="34" charset="0"/>
-                <a:ea typeface="Calibri" pitchFamily="34" charset="-122"/>
-                <a:cs typeface="Calibri" pitchFamily="34" charset="-120"/>
-              </a:rPr>
-              <a:t>"When people use the food I planned to use in a meal for myself... so I have to use something else"</a:t>
-            </a:r>
-            <a:endParaRPr lang="en-US" sz="1000" dirty="0"/>
-          </a:p>
-          <a:p>
-            <a:pPr marL="342900" indent="-342900">
-              <a:spcAft>
-                <a:spcPts val="700"/>
-              </a:spcAft>
-              <a:buSzPct val="100000"/>
-              <a:buChar char="•"/>
-            </a:pPr>
-            <a:r>
-              <a:rPr lang="en-US" sz="1000" i="1" dirty="0">
-                <a:solidFill>
-                  <a:srgbClr val="2E2119"/>
-                </a:solidFill>
-                <a:latin typeface="Calibri" pitchFamily="34" charset="0"/>
-                <a:ea typeface="Calibri" pitchFamily="34" charset="-122"/>
-                <a:cs typeface="Calibri" pitchFamily="34" charset="-120"/>
-              </a:rPr>
-              <a:t>"Not knowing if someone bought something just for themself" / dudar en comprar algo "y que se lo coma otra persona"</a:t>
-            </a:r>
-            <a:endParaRPr lang="en-US" sz="1000" dirty="0"/>
-          </a:p>
-          <a:p>
-            <a:pPr marL="342900" indent="-342900">
-              <a:spcAft>
-                <a:spcPts val="700"/>
-              </a:spcAft>
-              <a:buSzPct val="100000"/>
-              <a:buChar char="•"/>
-            </a:pPr>
-            <a:r>
-              <a:rPr lang="en-US" sz="1000" i="1" dirty="0">
-                <a:solidFill>
-                  <a:srgbClr val="2E2119"/>
-                </a:solidFill>
-                <a:latin typeface="Calibri" pitchFamily="34" charset="0"/>
-                <a:ea typeface="Calibri" pitchFamily="34" charset="-122"/>
-                <a:cs typeface="Calibri" pitchFamily="34" charset="-120"/>
-              </a:rPr>
-              <a:t>"Que compran cosas que no quiero"</a:t>
-            </a:r>
-            <a:endParaRPr lang="en-US" sz="1000" dirty="0"/>
-          </a:p>
-          <a:p>
-            <a:pPr marL="342900" indent="-342900">
-              <a:spcAft>
-                <a:spcPts val="700"/>
-              </a:spcAft>
-              <a:buSzPct val="100000"/>
-              <a:buChar char="•"/>
-            </a:pPr>
-            <a:r>
-              <a:rPr lang="en-US" sz="1000" i="1" dirty="0">
-                <a:solidFill>
-                  <a:srgbClr val="2E2119"/>
-                </a:solidFill>
-                <a:latin typeface="Calibri" pitchFamily="34" charset="0"/>
-                <a:ea typeface="Calibri" pitchFamily="34" charset="-122"/>
-                <a:cs typeface="Calibri" pitchFamily="34" charset="-120"/>
-              </a:rPr>
-              <a:t>"Cada vez una compra una cosa, lo complicado es llevar la cuenta de quién compró qué antes"</a:t>
-            </a:r>
-            <a:endParaRPr lang="en-US" sz="1000" dirty="0"/>
-          </a:p>
-        </p:txBody>
-      </p:sp>
-      <p:sp>
-        <p:nvSpPr>
-          <p:cNvPr id="11" name="Shape 8"/>
+              <a:t>Pero tampoco las tiene el papel y boli, que es el sistema que en realidad se está digitalizando. Si ni Notas ni Papel tienen esas funciones y aun así ganan en el uso real (diapositiva anterior), lo que esas funciones añaden no es "lo que faltaba" — es complejidad y ruido visual encima de un sistema que no los pedía.</a:t>
+            </a:r>
+            <a:endParaRPr lang="en-US" sz="1300" dirty="0"/>
+          </a:p>
+        </p:txBody>
+      </p:sp>
+      <p:sp>
+        <p:nvSpPr>
+          <p:cNvPr id="10" name="Shape 7"/>
           <p:cNvSpPr/>
           <p:nvPr/>
         </p:nvSpPr>
         <p:spPr>
           <a:xfrm>
-            <a:off x="6263640" y="1508760"/>
-            <a:ext cx="5349240" cy="4160520"/>
+            <a:off x="548640" y="3794760"/>
+            <a:ext cx="5440680" cy="1737360"/>
           </a:xfrm>
           <a:prstGeom prst="roundRect">
             <a:avLst>
-              <a:gd name="adj" fmla="val 2637"/>
+              <a:gd name="adj" fmla="val 6316"/>
             </a:avLst>
           </a:prstGeom>
           <a:solidFill>
-            <a:srgbClr val="EDE6DC"/>
+            <a:srgbClr val="F4E9DA"/>
           </a:solidFill>
           <a:ln/>
           <a:effectLst>
@@ -9015,92 +10671,53 @@
       </p:sp>
       <p:sp>
         <p:nvSpPr>
+          <p:cNvPr id="11" name="Text 8"/>
+          <p:cNvSpPr txBox="1"/>
+          <p:nvPr/>
+        </p:nvSpPr>
+        <p:spPr>
+          <a:xfrm>
+            <a:off x="777240" y="3931920"/>
+            <a:ext cx="4983480" cy="274320"/>
+          </a:xfrm>
+          <a:prstGeom prst="rect">
+            <a:avLst/>
+          </a:prstGeom>
+          <a:noFill/>
+          <a:ln/>
+        </p:spPr>
+        <p:txBody>
+          <a:bodyPr wrap="square" lIns="0" tIns="0" rIns="0" bIns="0" rtlCol="0" anchor="ctr"/>
+          <a:lstStyle/>
+          <a:p>
+            <a:pPr indent="0" marL="0">
+              <a:buNone/>
+            </a:pPr>
+            <a:r>
+              <a:rPr lang="en-US" sz="1150" b="1" spc="100" kern="0" dirty="0">
+                <a:solidFill>
+                  <a:srgbClr val="C9682B"/>
+                </a:solidFill>
+                <a:latin typeface="Calibri" pitchFamily="34" charset="0"/>
+                <a:ea typeface="Calibri" pitchFamily="34" charset="-122"/>
+                <a:cs typeface="Calibri" pitchFamily="34" charset="-120"/>
+              </a:rPr>
+              <a:t>Para quién SÍ tiene sentido</a:t>
+            </a:r>
+            <a:endParaRPr lang="en-US" sz="1150" dirty="0"/>
+          </a:p>
+        </p:txBody>
+      </p:sp>
+      <p:sp>
+        <p:nvSpPr>
           <p:cNvPr id="12" name="Text 9"/>
           <p:cNvSpPr txBox="1"/>
           <p:nvPr/>
         </p:nvSpPr>
         <p:spPr>
           <a:xfrm>
-            <a:off x="6492240" y="1645920"/>
-            <a:ext cx="4892040" cy="274320"/>
-          </a:xfrm>
-          <a:prstGeom prst="rect">
-            <a:avLst/>
-          </a:prstGeom>
-          <a:noFill/>
-          <a:ln/>
-        </p:spPr>
-        <p:txBody>
-          <a:bodyPr wrap="square" lIns="0" tIns="0" rIns="0" bIns="0" rtlCol="0" anchor="ctr"/>
-          <a:lstStyle/>
-          <a:p>
-            <a:pPr indent="0" marL="0">
-              <a:buNone/>
-            </a:pPr>
-            <a:r>
-              <a:rPr lang="en-US" sz="1200" b="1" spc="150" kern="0" dirty="0">
-                <a:solidFill>
-                  <a:srgbClr val="C9682B"/>
-                </a:solidFill>
-                <a:latin typeface="Calibri" pitchFamily="34" charset="0"/>
-                <a:ea typeface="Calibri" pitchFamily="34" charset="-122"/>
-                <a:cs typeface="Calibri" pitchFamily="34" charset="-120"/>
-              </a:rPr>
-              <a:t>FALTA DE TRACKER DE GASTOS</a:t>
-            </a:r>
-            <a:endParaRPr lang="en-US" sz="1200" dirty="0"/>
-          </a:p>
-        </p:txBody>
-      </p:sp>
-      <p:sp>
-        <p:nvSpPr>
-          <p:cNvPr id="13" name="Text 10"/>
-          <p:cNvSpPr txBox="1"/>
-          <p:nvPr/>
-        </p:nvSpPr>
-        <p:spPr>
-          <a:xfrm>
-            <a:off x="6492240" y="1901952"/>
-            <a:ext cx="4892040" cy="384048"/>
-          </a:xfrm>
-          <a:prstGeom prst="rect">
-            <a:avLst/>
-          </a:prstGeom>
-          <a:noFill/>
-          <a:ln/>
-        </p:spPr>
-        <p:txBody>
-          <a:bodyPr wrap="square" lIns="0" tIns="0" rIns="0" bIns="0" rtlCol="0" anchor="ctr"/>
-          <a:lstStyle/>
-          <a:p>
-            <a:pPr indent="0" marL="0">
-              <a:buNone/>
-            </a:pPr>
-            <a:r>
-              <a:rPr lang="en-US" sz="1050" i="1" dirty="0">
-                <a:solidFill>
-                  <a:srgbClr val="8A7A6D"/>
-                </a:solidFill>
-                <a:latin typeface="Calibri" pitchFamily="34" charset="0"/>
-                <a:ea typeface="Calibri" pitchFamily="34" charset="-122"/>
-                <a:cs typeface="Calibri" pitchFamily="34" charset="-120"/>
-              </a:rPr>
-              <a:t>3 menciones espontáneas + 12/35 (34%) dice en la Pregunta 8 que no llevan cuenta</a:t>
-            </a:r>
-            <a:endParaRPr lang="en-US" sz="1050" dirty="0"/>
-          </a:p>
-        </p:txBody>
-      </p:sp>
-      <p:sp>
-        <p:nvSpPr>
-          <p:cNvPr id="14" name="Text 11"/>
-          <p:cNvSpPr txBox="1"/>
-          <p:nvPr/>
-        </p:nvSpPr>
-        <p:spPr>
-          <a:xfrm>
-            <a:off x="6537960" y="2331720"/>
-            <a:ext cx="4846320" cy="1737360"/>
+            <a:off x="777240" y="4251960"/>
+            <a:ext cx="4983480" cy="1143000"/>
           </a:xfrm>
           <a:prstGeom prst="rect">
             <a:avLst/>
@@ -9112,15 +10729,11 @@
           <a:bodyPr wrap="square" lIns="0" tIns="0" rIns="0" bIns="0" rtlCol="0" anchor="t"/>
           <a:lstStyle/>
           <a:p>
-            <a:pPr marL="342900" indent="-342900">
-              <a:spcAft>
-                <a:spcPts val="800"/>
-              </a:spcAft>
-              <a:buSzPct val="100000"/>
-              <a:buChar char="•"/>
-            </a:pPr>
-            <a:r>
-              <a:rPr lang="en-US" sz="1100" i="1" dirty="0">
+            <a:pPr indent="0" marL="0">
+              <a:buNone/>
+            </a:pPr>
+            <a:r>
+              <a:rPr lang="en-US" sz="1250" dirty="0">
                 <a:solidFill>
                   <a:srgbClr val="2E2119"/>
                 </a:solidFill>
@@ -9128,68 +10741,167 @@
                 <a:ea typeface="Calibri" pitchFamily="34" charset="-122"/>
                 <a:cs typeface="Calibri" pitchFamily="34" charset="-120"/>
               </a:rPr>
-              <a:t>"I don’t know who bought what" — también aquí: no saber quién pagó qué</a:t>
-            </a:r>
-            <a:endParaRPr lang="en-US" sz="1100" dirty="0"/>
-          </a:p>
-          <a:p>
-            <a:pPr marL="342900" indent="-342900">
-              <a:spcAft>
-                <a:spcPts val="800"/>
-              </a:spcAft>
-              <a:buSzPct val="100000"/>
-              <a:buChar char="•"/>
-            </a:pPr>
-            <a:r>
-              <a:rPr lang="en-US" sz="1100" i="1" dirty="0">
-                <a:solidFill>
-                  <a:srgbClr val="2E2119"/>
-                </a:solidFill>
-                <a:latin typeface="Calibri" pitchFamily="34" charset="0"/>
-                <a:ea typeface="Calibri" pitchFamily="34" charset="-122"/>
-                <a:cs typeface="Calibri" pitchFamily="34" charset="-120"/>
-              </a:rPr>
-              <a:t>"Que la gente no participe a la hora de hacer la compra o que tarden en pagar cuando dividimos gastos"</a:t>
-            </a:r>
-            <a:endParaRPr lang="en-US" sz="1100" dirty="0"/>
-          </a:p>
-          <a:p>
-            <a:pPr marL="342900" indent="-342900">
-              <a:spcAft>
-                <a:spcPts val="800"/>
-              </a:spcAft>
-              <a:buSzPct val="100000"/>
-              <a:buChar char="•"/>
-            </a:pPr>
-            <a:r>
-              <a:rPr lang="en-US" sz="1100" i="1" dirty="0">
-                <a:solidFill>
-                  <a:srgbClr val="2E2119"/>
-                </a:solidFill>
-                <a:latin typeface="Calibri" pitchFamily="34" charset="0"/>
-                <a:ea typeface="Calibri" pitchFamily="34" charset="-122"/>
-                <a:cs typeface="Calibri" pitchFamily="34" charset="-120"/>
-              </a:rPr>
-              <a:t>"Llevar la cuenta de quién compró qué antes" — también dual, coop + gasto</a:t>
-            </a:r>
-            <a:endParaRPr lang="en-US" sz="1100" dirty="0"/>
-          </a:p>
-        </p:txBody>
-      </p:sp>
-      <p:sp>
-        <p:nvSpPr>
-          <p:cNvPr id="15" name="Shape 12"/>
+              <a:t>Alguien a quien de verdad le guste cocinar y guardar recetas — un perfil más asentado, quizá de más edad (ej. una madre de familia).</a:t>
+            </a:r>
+            <a:endParaRPr lang="en-US" sz="1250" dirty="0"/>
+          </a:p>
+        </p:txBody>
+      </p:sp>
+      <p:sp>
+        <p:nvSpPr>
+          <p:cNvPr id="13" name="Shape 10"/>
           <p:cNvSpPr/>
           <p:nvPr/>
         </p:nvSpPr>
         <p:spPr>
           <a:xfrm>
-            <a:off x="6492240" y="4160520"/>
-            <a:ext cx="4892040" cy="1371600"/>
+            <a:off x="6172200" y="3794760"/>
+            <a:ext cx="5440680" cy="1737360"/>
           </a:xfrm>
           <a:prstGeom prst="roundRect">
             <a:avLst>
-              <a:gd name="adj" fmla="val 6667"/>
+              <a:gd name="adj" fmla="val 6316"/>
+            </a:avLst>
+          </a:prstGeom>
+          <a:solidFill>
+            <a:srgbClr val="F6E4D3"/>
+          </a:solidFill>
+          <a:ln/>
+          <a:effectLst>
+            <a:outerShdw sx="100000" sy="100000" kx="0" ky="0" algn="bl" rotWithShape="0" blurRad="76200" dist="25400" dir="5400000">
+              <a:srgbClr val="000000">
+                <a:alpha val="12000"/>
+              </a:srgbClr>
+            </a:outerShdw>
+          </a:effectLst>
+        </p:spPr>
+      </p:sp>
+      <p:sp>
+        <p:nvSpPr>
+          <p:cNvPr id="14" name="Text 11"/>
+          <p:cNvSpPr txBox="1"/>
+          <p:nvPr/>
+        </p:nvSpPr>
+        <p:spPr>
+          <a:xfrm>
+            <a:off x="6400800" y="3931920"/>
+            <a:ext cx="4983480" cy="274320"/>
+          </a:xfrm>
+          <a:prstGeom prst="rect">
+            <a:avLst/>
+          </a:prstGeom>
+          <a:noFill/>
+          <a:ln/>
+        </p:spPr>
+        <p:txBody>
+          <a:bodyPr wrap="square" lIns="0" tIns="0" rIns="0" bIns="0" rtlCol="0" anchor="ctr"/>
+          <a:lstStyle/>
+          <a:p>
+            <a:pPr indent="0" marL="0">
+              <a:buNone/>
+            </a:pPr>
+            <a:r>
+              <a:rPr lang="en-US" sz="1150" b="1" spc="100" kern="0" dirty="0">
+                <a:solidFill>
+                  <a:srgbClr val="C9682B"/>
+                </a:solidFill>
+                <a:latin typeface="Calibri" pitchFamily="34" charset="0"/>
+                <a:ea typeface="Calibri" pitchFamily="34" charset="-122"/>
+                <a:cs typeface="Calibri" pitchFamily="34" charset="-120"/>
+              </a:rPr>
+              <a:t>Para nuestro público, NO</a:t>
+            </a:r>
+            <a:endParaRPr lang="en-US" sz="1150" dirty="0"/>
+          </a:p>
+        </p:txBody>
+      </p:sp>
+      <p:sp>
+        <p:nvSpPr>
+          <p:cNvPr id="15" name="Text 12"/>
+          <p:cNvSpPr txBox="1"/>
+          <p:nvPr/>
+        </p:nvSpPr>
+        <p:spPr>
+          <a:xfrm>
+            <a:off x="6400800" y="4251960"/>
+            <a:ext cx="4983480" cy="1143000"/>
+          </a:xfrm>
+          <a:prstGeom prst="rect">
+            <a:avLst/>
+          </a:prstGeom>
+          <a:noFill/>
+          <a:ln/>
+        </p:spPr>
+        <p:txBody>
+          <a:bodyPr wrap="square" lIns="0" tIns="0" rIns="0" bIns="0" rtlCol="0" anchor="t"/>
+          <a:lstStyle/>
+          <a:p>
+            <a:pPr indent="0" marL="0">
+              <a:spcAft>
+                <a:spcPts val="600"/>
+              </a:spcAft>
+              <a:buNone/>
+            </a:pPr>
+            <a:r>
+              <a:rPr lang="en-US" sz="1150" dirty="0">
+                <a:solidFill>
+                  <a:srgbClr val="2E2119"/>
+                </a:solidFill>
+                <a:latin typeface="Calibri" pitchFamily="34" charset="0"/>
+                <a:ea typeface="Calibri" pitchFamily="34" charset="-122"/>
+                <a:cs typeface="Calibri" pitchFamily="34" charset="-120"/>
+              </a:rPr>
+              <a:t>El estudiante medio independizado no es un apasionado de la cocina. La tendencia joven (meal prep) va al revés: tuppers básicos para toda la semana, para cocinar lo MÍNIMO posible. </a:t>
+            </a:r>
+            <a:endParaRPr lang="en-US" sz="1150" dirty="0"/>
+          </a:p>
+          <a:p>
+            <a:pPr indent="0" marL="0">
+              <a:buNone/>
+            </a:pPr>
+            <a:r>
+              <a:rPr lang="en-US" sz="1150" b="1" dirty="0">
+                <a:solidFill>
+                  <a:srgbClr val="C9682B"/>
+                </a:solidFill>
+                <a:latin typeface="Calibri" pitchFamily="34" charset="0"/>
+                <a:ea typeface="Calibri" pitchFamily="34" charset="-122"/>
+                <a:cs typeface="Calibri" pitchFamily="34" charset="-120"/>
+              </a:rPr>
+              <a:t>Confirmado en la encuesta: </a:t>
+            </a:r>
+            <a:pPr indent="0" marL="0">
+              <a:buNone/>
+            </a:pPr>
+            <a:r>
+              <a:rPr lang="en-US" sz="1150" i="1" dirty="0">
+                <a:solidFill>
+                  <a:srgbClr val="2E2119"/>
+                </a:solidFill>
+                <a:latin typeface="Calibri" pitchFamily="34" charset="0"/>
+                <a:ea typeface="Calibri" pitchFamily="34" charset="-122"/>
+                <a:cs typeface="Calibri" pitchFamily="34" charset="-120"/>
+              </a:rPr>
+              <a:t>"compro cosas pensando en hacer comidas elaboradas pero nunca las llego a hacer, y acaban pudriéndose".</a:t>
+            </a:r>
+            <a:endParaRPr lang="en-US" sz="1150" dirty="0"/>
+          </a:p>
+        </p:txBody>
+      </p:sp>
+      <p:sp>
+        <p:nvSpPr>
+          <p:cNvPr id="16" name="Shape 13"/>
+          <p:cNvSpPr/>
+          <p:nvPr/>
+        </p:nvSpPr>
+        <p:spPr>
+          <a:xfrm>
+            <a:off x="548640" y="5760720"/>
+            <a:ext cx="11064240" cy="822960"/>
+          </a:xfrm>
+          <a:prstGeom prst="roundRect">
+            <a:avLst>
+              <a:gd name="adj" fmla="val 13333"/>
             </a:avLst>
           </a:prstGeom>
           <a:solidFill>
@@ -9200,33 +10912,30 @@
       </p:sp>
       <p:sp>
         <p:nvSpPr>
-          <p:cNvPr id="16" name="Text 13"/>
-          <p:cNvSpPr txBox="1"/>
-          <p:nvPr/>
-        </p:nvSpPr>
-        <p:spPr>
-          <a:xfrm>
-            <a:off x="6720840" y="4279392"/>
-            <a:ext cx="4480560" cy="1143000"/>
-          </a:xfrm>
-          <a:prstGeom prst="rect">
-            <a:avLst/>
-          </a:prstGeom>
-          <a:noFill/>
-          <a:ln/>
-        </p:spPr>
-        <p:txBody>
-          <a:bodyPr wrap="square" lIns="0" tIns="0" rIns="0" bIns="0" rtlCol="0" anchor="t"/>
-          <a:lstStyle/>
-          <a:p>
-            <a:pPr indent="0" marL="0">
-              <a:spcAft>
-                <a:spcPts val="400"/>
-              </a:spcAft>
-              <a:buNone/>
-            </a:pPr>
-            <a:r>
-              <a:rPr lang="en-US" sz="1100" b="1" dirty="0">
+          <p:cNvPr id="17" name="Text 14"/>
+          <p:cNvSpPr txBox="1"/>
+          <p:nvPr/>
+        </p:nvSpPr>
+        <p:spPr>
+          <a:xfrm>
+            <a:off x="868680" y="5870448"/>
+            <a:ext cx="10424160" cy="621792"/>
+          </a:xfrm>
+          <a:prstGeom prst="rect">
+            <a:avLst/>
+          </a:prstGeom>
+          <a:noFill/>
+          <a:ln/>
+        </p:spPr>
+        <p:txBody>
+          <a:bodyPr wrap="square" lIns="0" tIns="0" rIns="0" bIns="0" rtlCol="0" anchor="ctr"/>
+          <a:lstStyle/>
+          <a:p>
+            <a:pPr indent="0" marL="0">
+              <a:buNone/>
+            </a:pPr>
+            <a:r>
+              <a:rPr lang="en-US" sz="1250" i="1" dirty="0">
                 <a:solidFill>
                   <a:srgbClr val="D9A441"/>
                 </a:solidFill>
@@ -9234,106 +10943,9 @@
                 <a:ea typeface="Calibri" pitchFamily="34" charset="-122"/>
                 <a:cs typeface="Calibri" pitchFamily="34" charset="-120"/>
               </a:rPr>
-              <a:t>Esto es exactamente History:  </a:t>
-            </a:r>
-            <a:endParaRPr lang="en-US" sz="1100" dirty="0"/>
-          </a:p>
-          <a:p>
-            <a:pPr indent="0" marL="0">
-              <a:buNone/>
-            </a:pPr>
-            <a:r>
-              <a:rPr lang="en-US" sz="1100" dirty="0">
-                <a:solidFill>
-                  <a:srgbClr val="FFFFFF"/>
-                </a:solidFill>
-                <a:latin typeface="Calibri" pitchFamily="34" charset="0"/>
-                <a:ea typeface="Calibri" pitchFamily="34" charset="-122"/>
-                <a:cs typeface="Calibri" pitchFamily="34" charset="-120"/>
-              </a:rPr>
-              <a:t>quién compró qué y quién debe a quién, resuelto sin depender de que alguien lo recuerde o lo apunte a mano.</a:t>
-            </a:r>
-            <a:endParaRPr lang="en-US" sz="1100" dirty="0"/>
-          </a:p>
-        </p:txBody>
-      </p:sp>
-      <p:sp>
-        <p:nvSpPr>
-          <p:cNvPr id="17" name="Shape 14"/>
-          <p:cNvSpPr/>
-          <p:nvPr/>
-        </p:nvSpPr>
-        <p:spPr>
-          <a:xfrm>
-            <a:off x="548640" y="5806440"/>
-            <a:ext cx="11064240" cy="777240"/>
-          </a:xfrm>
-          <a:prstGeom prst="roundRect">
-            <a:avLst>
-              <a:gd name="adj" fmla="val 11765"/>
-            </a:avLst>
-          </a:prstGeom>
-          <a:solidFill>
-            <a:srgbClr val="F6E9D8"/>
-          </a:solidFill>
-          <a:ln w="12700">
-            <a:solidFill>
-              <a:srgbClr val="C9682B"/>
-            </a:solidFill>
-            <a:prstDash val="solid"/>
-          </a:ln>
-        </p:spPr>
-      </p:sp>
-      <p:sp>
-        <p:nvSpPr>
-          <p:cNvPr id="18" name="Text 15"/>
-          <p:cNvSpPr txBox="1"/>
-          <p:nvPr/>
-        </p:nvSpPr>
-        <p:spPr>
-          <a:xfrm>
-            <a:off x="777240" y="5806440"/>
-            <a:ext cx="10607040" cy="777240"/>
-          </a:xfrm>
-          <a:prstGeom prst="rect">
-            <a:avLst/>
-          </a:prstGeom>
-          <a:noFill/>
-          <a:ln/>
-        </p:spPr>
-        <p:txBody>
-          <a:bodyPr wrap="square" lIns="0" tIns="0" rIns="0" bIns="0" rtlCol="0" anchor="ctr"/>
-          <a:lstStyle/>
-          <a:p>
-            <a:pPr indent="0" marL="0">
-              <a:buNone/>
-            </a:pPr>
-            <a:r>
-              <a:rPr lang="en-US" sz="1100" b="1" dirty="0">
-                <a:solidFill>
-                  <a:srgbClr val="C9682B"/>
-                </a:solidFill>
-                <a:latin typeface="Calibri" pitchFamily="34" charset="0"/>
-                <a:ea typeface="Calibri" pitchFamily="34" charset="-122"/>
-                <a:cs typeface="Calibri" pitchFamily="34" charset="-120"/>
-              </a:rPr>
-              <a:t>Ya resuelto en P1, gratis:  </a:t>
-            </a:r>
-            <a:pPr indent="0" marL="0">
-              <a:buNone/>
-            </a:pPr>
-            <a:r>
-              <a:rPr lang="en-US" sz="1100" dirty="0">
-                <a:solidFill>
-                  <a:srgbClr val="2E2119"/>
-                </a:solidFill>
-                <a:latin typeface="Calibri" pitchFamily="34" charset="0"/>
-                <a:ea typeface="Calibri" pitchFamily="34" charset="-122"/>
-                <a:cs typeface="Calibri" pitchFamily="34" charset="-120"/>
-              </a:rPr>
-              <a:t>"Pois supoño que cando algo se acabe ninguén avise" — se resuelve solo con que Fridge sea una vista compartida: marcar "se acabó" ya avisa a todo el piso, sin lógica extra ni contar unidades.</a:t>
-            </a:r>
-            <a:endParaRPr lang="en-US" sz="1100" dirty="0"/>
+              <a:t>Ni siquiera cumplen bien su función principal: el paso intermedio de recetas da pereza, así que la lista queda peor servida que en Notas — por bonita que parezca la sensación de estar "más organizado".</a:t>
+            </a:r>
+            <a:endParaRPr lang="en-US" sz="1250" dirty="0"/>
           </a:p>
         </p:txBody>
       </p:sp>
@@ -9446,7 +11058,7 @@
                 <a:ea typeface="Calibri" pitchFamily="34" charset="-122"/>
                 <a:cs typeface="Calibri" pitchFamily="34" charset="-120"/>
               </a:rPr>
-              <a:t>PASO 3</a:t>
+              <a:t>PASO 2</a:t>
             </a:r>
             <a:endParaRPr lang="en-US" sz="1200" dirty="0"/>
           </a:p>
@@ -9485,7 +11097,7 @@
                 <a:ea typeface="Cambria" pitchFamily="34" charset="-122"/>
                 <a:cs typeface="Cambria" pitchFamily="34" charset="-120"/>
               </a:rPr>
-              <a:t>Estudio de mercado — A Coruña</a:t>
+              <a:t>Estado del arte — el hueco detectado</a:t>
             </a:r>
             <a:endParaRPr lang="en-US" sz="2800" dirty="0"/>
           </a:p>
@@ -9499,12 +11111,12 @@
         </p:nvSpPr>
         <p:spPr>
           <a:xfrm>
-            <a:off x="548640" y="1463040"/>
-            <a:ext cx="3566160" cy="2468880"/>
+            <a:off x="548640" y="1508760"/>
+            <a:ext cx="11064240" cy="1051560"/>
           </a:xfrm>
           <a:prstGeom prst="roundRect">
             <a:avLst>
-              <a:gd name="adj" fmla="val 4444"/>
+              <a:gd name="adj" fmla="val 10435"/>
             </a:avLst>
           </a:prstGeom>
           <a:solidFill>
@@ -9528,8 +11140,8 @@
         </p:nvSpPr>
         <p:spPr>
           <a:xfrm>
-            <a:off x="777240" y="1645920"/>
-            <a:ext cx="3108960" cy="320040"/>
+            <a:off x="822960" y="1618488"/>
+            <a:ext cx="2743200" cy="822960"/>
           </a:xfrm>
           <a:prstGeom prst="rect">
             <a:avLst/>
@@ -9545,116 +11157,77 @@
               <a:buNone/>
             </a:pPr>
             <a:r>
-              <a:rPr lang="en-US" sz="1100" b="1" spc="100" kern="0" dirty="0">
+              <a:rPr lang="en-US" sz="1500" b="1" dirty="0">
                 <a:solidFill>
                   <a:srgbClr val="C9682B"/>
-                </a:solidFill>
-                <a:latin typeface="Calibri" pitchFamily="34" charset="0"/>
-                <a:ea typeface="Calibri" pitchFamily="34" charset="-122"/>
-                <a:cs typeface="Calibri" pitchFamily="34" charset="-120"/>
-              </a:rPr>
-              <a:t>MERCADO TOTAL</a:t>
-            </a:r>
-            <a:endParaRPr lang="en-US" sz="1100" dirty="0"/>
-          </a:p>
-        </p:txBody>
-      </p:sp>
-      <p:sp>
-        <p:nvSpPr>
-          <p:cNvPr id="8" name="Text 5"/>
-          <p:cNvSpPr txBox="1"/>
-          <p:nvPr/>
-        </p:nvSpPr>
-        <p:spPr>
-          <a:xfrm>
-            <a:off x="777240" y="2011680"/>
-            <a:ext cx="3108960" cy="1005840"/>
-          </a:xfrm>
-          <a:prstGeom prst="rect">
-            <a:avLst/>
-          </a:prstGeom>
-          <a:noFill/>
-          <a:ln/>
-        </p:spPr>
-        <p:txBody>
-          <a:bodyPr wrap="square" lIns="0" tIns="0" rIns="0" bIns="0" rtlCol="0" anchor="ctr"/>
-          <a:lstStyle/>
-          <a:p>
-            <a:pPr indent="0" marL="0">
-              <a:buNone/>
-            </a:pPr>
-            <a:r>
-              <a:rPr lang="en-US" sz="3400" b="1" dirty="0">
-                <a:solidFill>
-                  <a:srgbClr val="2E2119"/>
                 </a:solidFill>
                 <a:latin typeface="Cambria" pitchFamily="34" charset="0"/>
                 <a:ea typeface="Cambria" pitchFamily="34" charset="-122"/>
                 <a:cs typeface="Cambria" pitchFamily="34" charset="-120"/>
               </a:rPr>
-              <a:t>&gt; 13.300</a:t>
-            </a:r>
-            <a:endParaRPr lang="en-US" sz="3400" dirty="0"/>
-          </a:p>
-        </p:txBody>
-      </p:sp>
-      <p:sp>
-        <p:nvSpPr>
-          <p:cNvPr id="9" name="Text 6"/>
-          <p:cNvSpPr txBox="1"/>
-          <p:nvPr/>
-        </p:nvSpPr>
-        <p:spPr>
-          <a:xfrm>
-            <a:off x="777240" y="3063240"/>
-            <a:ext cx="3108960" cy="777240"/>
-          </a:xfrm>
-          <a:prstGeom prst="rect">
-            <a:avLst/>
-          </a:prstGeom>
-          <a:noFill/>
-          <a:ln/>
-        </p:spPr>
-        <p:txBody>
-          <a:bodyPr wrap="square" lIns="0" tIns="0" rIns="0" bIns="0" rtlCol="0" anchor="t"/>
-          <a:lstStyle/>
-          <a:p>
-            <a:pPr indent="0" marL="0">
-              <a:buNone/>
-            </a:pPr>
-            <a:r>
-              <a:rPr lang="en-US" sz="1050" dirty="0">
-                <a:solidFill>
-                  <a:srgbClr val="8A7A6D"/>
-                </a:solidFill>
-                <a:latin typeface="Calibri" pitchFamily="34" charset="0"/>
-                <a:ea typeface="Calibri" pitchFamily="34" charset="-122"/>
-                <a:cs typeface="Calibri" pitchFamily="34" charset="-120"/>
-              </a:rPr>
-              <a:t>Estudiantes matriculados en la UDC (curso 2025-26, ambos campus)</a:t>
-            </a:r>
-            <a:endParaRPr lang="en-US" sz="1050" dirty="0"/>
-          </a:p>
-        </p:txBody>
-      </p:sp>
-      <p:sp>
-        <p:nvSpPr>
-          <p:cNvPr id="10" name="Shape 7"/>
+              <a:t>De posicionamiento</a:t>
+            </a:r>
+            <a:endParaRPr lang="en-US" sz="1500" dirty="0"/>
+          </a:p>
+        </p:txBody>
+      </p:sp>
+      <p:sp>
+        <p:nvSpPr>
+          <p:cNvPr id="8" name="Text 5"/>
+          <p:cNvSpPr txBox="1"/>
+          <p:nvPr/>
+        </p:nvSpPr>
+        <p:spPr>
+          <a:xfrm>
+            <a:off x="3657600" y="1618488"/>
+            <a:ext cx="7772400" cy="822960"/>
+          </a:xfrm>
+          <a:prstGeom prst="rect">
+            <a:avLst/>
+          </a:prstGeom>
+          <a:noFill/>
+          <a:ln/>
+        </p:spPr>
+        <p:txBody>
+          <a:bodyPr wrap="square" lIns="0" tIns="0" rIns="0" bIns="0" rtlCol="0" anchor="ctr"/>
+          <a:lstStyle/>
+          <a:p>
+            <a:pPr indent="0" marL="0">
+              <a:buNone/>
+            </a:pPr>
+            <a:r>
+              <a:rPr lang="en-US" sz="1300" dirty="0">
+                <a:solidFill>
+                  <a:srgbClr val="2E2119"/>
+                </a:solidFill>
+                <a:latin typeface="Calibri" pitchFamily="34" charset="0"/>
+                <a:ea typeface="Calibri" pitchFamily="34" charset="-122"/>
+                <a:cs typeface="Calibri" pitchFamily="34" charset="-120"/>
+              </a:rPr>
+              <a:t>Ni Bring! ni AnyList apuntan al acto simple de apuntar y compartir la lista — las dos están construidas para cocinar y planificar recetas.</a:t>
+            </a:r>
+            <a:endParaRPr lang="en-US" sz="1300" dirty="0"/>
+          </a:p>
+        </p:txBody>
+      </p:sp>
+      <p:sp>
+        <p:nvSpPr>
+          <p:cNvPr id="9" name="Shape 6"/>
           <p:cNvSpPr/>
           <p:nvPr/>
         </p:nvSpPr>
         <p:spPr>
           <a:xfrm>
-            <a:off x="4297680" y="1463040"/>
-            <a:ext cx="3566160" cy="2468880"/>
+            <a:off x="548640" y="2697480"/>
+            <a:ext cx="11064240" cy="1051560"/>
           </a:xfrm>
           <a:prstGeom prst="roundRect">
             <a:avLst>
-              <a:gd name="adj" fmla="val 4444"/>
+              <a:gd name="adj" fmla="val 10435"/>
             </a:avLst>
           </a:prstGeom>
           <a:solidFill>
-            <a:srgbClr val="2E2119"/>
+            <a:srgbClr val="EDE6DC"/>
           </a:solidFill>
           <a:ln/>
           <a:effectLst>
@@ -9668,14 +11241,14 @@
       </p:sp>
       <p:sp>
         <p:nvSpPr>
-          <p:cNvPr id="11" name="Text 8"/>
-          <p:cNvSpPr txBox="1"/>
-          <p:nvPr/>
-        </p:nvSpPr>
-        <p:spPr>
-          <a:xfrm>
-            <a:off x="4526280" y="1645920"/>
-            <a:ext cx="3108960" cy="320040"/>
+          <p:cNvPr id="10" name="Text 7"/>
+          <p:cNvSpPr txBox="1"/>
+          <p:nvPr/>
+        </p:nvSpPr>
+        <p:spPr>
+          <a:xfrm>
+            <a:off x="822960" y="2807208"/>
+            <a:ext cx="2743200" cy="822960"/>
           </a:xfrm>
           <a:prstGeom prst="rect">
             <a:avLst/>
@@ -9691,112 +11264,73 @@
               <a:buNone/>
             </a:pPr>
             <a:r>
-              <a:rPr lang="en-US" sz="1100" b="1" spc="100" kern="0" dirty="0">
-                <a:solidFill>
-                  <a:srgbClr val="D9A441"/>
-                </a:solidFill>
-                <a:latin typeface="Calibri" pitchFamily="34" charset="0"/>
-                <a:ea typeface="Calibri" pitchFamily="34" charset="-122"/>
-                <a:cs typeface="Calibri" pitchFamily="34" charset="-120"/>
-              </a:rPr>
-              <a:t>MERCADO ACCESIBLE</a:t>
-            </a:r>
-            <a:endParaRPr lang="en-US" sz="1100" dirty="0"/>
-          </a:p>
-        </p:txBody>
-      </p:sp>
-      <p:sp>
-        <p:nvSpPr>
-          <p:cNvPr id="12" name="Text 9"/>
-          <p:cNvSpPr txBox="1"/>
-          <p:nvPr/>
-        </p:nvSpPr>
-        <p:spPr>
-          <a:xfrm>
-            <a:off x="4526280" y="2011680"/>
-            <a:ext cx="3108960" cy="1005840"/>
-          </a:xfrm>
-          <a:prstGeom prst="rect">
-            <a:avLst/>
-          </a:prstGeom>
-          <a:noFill/>
-          <a:ln/>
-        </p:spPr>
-        <p:txBody>
-          <a:bodyPr wrap="square" lIns="0" tIns="0" rIns="0" bIns="0" rtlCol="0" anchor="ctr"/>
-          <a:lstStyle/>
-          <a:p>
-            <a:pPr indent="0" marL="0">
-              <a:buNone/>
-            </a:pPr>
-            <a:r>
-              <a:rPr lang="en-US" sz="3400" b="1" dirty="0">
-                <a:solidFill>
-                  <a:srgbClr val="FFFFFF"/>
+              <a:rPr lang="en-US" sz="1500" b="1" dirty="0">
+                <a:solidFill>
+                  <a:srgbClr val="C9682B"/>
                 </a:solidFill>
                 <a:latin typeface="Cambria" pitchFamily="34" charset="0"/>
                 <a:ea typeface="Cambria" pitchFamily="34" charset="-122"/>
                 <a:cs typeface="Cambria" pitchFamily="34" charset="-120"/>
               </a:rPr>
-              <a:t>≈ 4.123</a:t>
-            </a:r>
-            <a:endParaRPr lang="en-US" sz="3400" dirty="0"/>
-          </a:p>
-        </p:txBody>
-      </p:sp>
-      <p:sp>
-        <p:nvSpPr>
-          <p:cNvPr id="13" name="Text 10"/>
-          <p:cNvSpPr txBox="1"/>
-          <p:nvPr/>
-        </p:nvSpPr>
-        <p:spPr>
-          <a:xfrm>
-            <a:off x="4526280" y="3063240"/>
-            <a:ext cx="3108960" cy="777240"/>
-          </a:xfrm>
-          <a:prstGeom prst="rect">
-            <a:avLst/>
-          </a:prstGeom>
-          <a:noFill/>
-          <a:ln/>
-        </p:spPr>
-        <p:txBody>
-          <a:bodyPr wrap="square" lIns="0" tIns="0" rIns="0" bIns="0" rtlCol="0" anchor="t"/>
-          <a:lstStyle/>
-          <a:p>
-            <a:pPr indent="0" marL="0">
-              <a:buNone/>
-            </a:pPr>
-            <a:r>
-              <a:rPr lang="en-US" sz="1050" dirty="0">
-                <a:solidFill>
-                  <a:srgbClr val="D8CBBE"/>
-                </a:solidFill>
-                <a:latin typeface="Calibri" pitchFamily="34" charset="0"/>
-                <a:ea typeface="Calibri" pitchFamily="34" charset="-122"/>
-                <a:cs typeface="Calibri" pitchFamily="34" charset="-120"/>
-              </a:rPr>
-              <a:t>31% cambia de ciudad para estudiar — % nacional aplicado a la UDC (Fundación CYD)</a:t>
-            </a:r>
-            <a:endParaRPr lang="en-US" sz="1050" dirty="0"/>
-          </a:p>
-        </p:txBody>
-      </p:sp>
-      <p:sp>
-        <p:nvSpPr>
-          <p:cNvPr id="14" name="Shape 11"/>
+              <a:t>De fricción</a:t>
+            </a:r>
+            <a:endParaRPr lang="en-US" sz="1500" dirty="0"/>
+          </a:p>
+        </p:txBody>
+      </p:sp>
+      <p:sp>
+        <p:nvSpPr>
+          <p:cNvPr id="11" name="Text 8"/>
+          <p:cNvSpPr txBox="1"/>
+          <p:nvPr/>
+        </p:nvSpPr>
+        <p:spPr>
+          <a:xfrm>
+            <a:off x="3657600" y="2807208"/>
+            <a:ext cx="7772400" cy="822960"/>
+          </a:xfrm>
+          <a:prstGeom prst="rect">
+            <a:avLst/>
+          </a:prstGeom>
+          <a:noFill/>
+          <a:ln/>
+        </p:spPr>
+        <p:txBody>
+          <a:bodyPr wrap="square" lIns="0" tIns="0" rIns="0" bIns="0" rtlCol="0" anchor="ctr"/>
+          <a:lstStyle/>
+          <a:p>
+            <a:pPr indent="0" marL="0">
+              <a:buNone/>
+            </a:pPr>
+            <a:r>
+              <a:rPr lang="en-US" sz="1300" dirty="0">
+                <a:solidFill>
+                  <a:srgbClr val="2E2119"/>
+                </a:solidFill>
+                <a:latin typeface="Calibri" pitchFamily="34" charset="0"/>
+                <a:ea typeface="Calibri" pitchFamily="34" charset="-122"/>
+                <a:cs typeface="Calibri" pitchFamily="34" charset="-120"/>
+              </a:rPr>
+              <a:t>Cualquier paso extra sobre "simplemente escribir" hace que la gente vuelva a Notas, la solución más simple.</a:t>
+            </a:r>
+            <a:endParaRPr lang="en-US" sz="1300" dirty="0"/>
+          </a:p>
+        </p:txBody>
+      </p:sp>
+      <p:sp>
+        <p:nvSpPr>
+          <p:cNvPr id="12" name="Shape 9"/>
           <p:cNvSpPr/>
           <p:nvPr/>
         </p:nvSpPr>
         <p:spPr>
           <a:xfrm>
-            <a:off x="8046720" y="1463040"/>
-            <a:ext cx="3566160" cy="2468880"/>
+            <a:off x="548640" y="3886200"/>
+            <a:ext cx="11064240" cy="1051560"/>
           </a:xfrm>
           <a:prstGeom prst="roundRect">
             <a:avLst>
-              <a:gd name="adj" fmla="val 4444"/>
+              <a:gd name="adj" fmla="val 10435"/>
             </a:avLst>
           </a:prstGeom>
           <a:solidFill>
@@ -9814,14 +11348,14 @@
       </p:sp>
       <p:sp>
         <p:nvSpPr>
-          <p:cNvPr id="15" name="Text 12"/>
-          <p:cNvSpPr txBox="1"/>
-          <p:nvPr/>
-        </p:nvSpPr>
-        <p:spPr>
-          <a:xfrm>
-            <a:off x="8275320" y="1645920"/>
-            <a:ext cx="3108960" cy="320040"/>
+          <p:cNvPr id="13" name="Text 10"/>
+          <p:cNvSpPr txBox="1"/>
+          <p:nvPr/>
+        </p:nvSpPr>
+        <p:spPr>
+          <a:xfrm>
+            <a:off x="822960" y="3995928"/>
+            <a:ext cx="2743200" cy="822960"/>
           </a:xfrm>
           <a:prstGeom prst="rect">
             <a:avLst/>
@@ -9837,215 +11371,117 @@
               <a:buNone/>
             </a:pPr>
             <a:r>
-              <a:rPr lang="en-US" sz="1100" b="1" spc="100" kern="0" dirty="0">
+              <a:rPr lang="en-US" sz="1500" b="1" dirty="0">
                 <a:solidFill>
                   <a:srgbClr val="C9682B"/>
-                </a:solidFill>
-                <a:latin typeface="Calibri" pitchFamily="34" charset="0"/>
-                <a:ea typeface="Calibri" pitchFamily="34" charset="-122"/>
-                <a:cs typeface="Calibri" pitchFamily="34" charset="-120"/>
-              </a:rPr>
-              <a:t>MERCADO OBJETIVO</a:t>
-            </a:r>
-            <a:endParaRPr lang="en-US" sz="1100" dirty="0"/>
-          </a:p>
-        </p:txBody>
-      </p:sp>
-      <p:sp>
-        <p:nvSpPr>
-          <p:cNvPr id="16" name="Text 13"/>
-          <p:cNvSpPr txBox="1"/>
-          <p:nvPr/>
-        </p:nvSpPr>
-        <p:spPr>
-          <a:xfrm>
-            <a:off x="8275320" y="2011680"/>
-            <a:ext cx="3108960" cy="1005840"/>
-          </a:xfrm>
-          <a:prstGeom prst="rect">
-            <a:avLst/>
-          </a:prstGeom>
-          <a:noFill/>
-          <a:ln/>
-        </p:spPr>
-        <p:txBody>
-          <a:bodyPr wrap="square" lIns="0" tIns="0" rIns="0" bIns="0" rtlCol="0" anchor="ctr"/>
-          <a:lstStyle/>
-          <a:p>
-            <a:pPr indent="0" marL="0">
-              <a:buNone/>
-            </a:pPr>
-            <a:r>
-              <a:rPr lang="en-US" sz="3400" b="1" dirty="0">
-                <a:solidFill>
-                  <a:srgbClr val="2E2119"/>
                 </a:solidFill>
                 <a:latin typeface="Cambria" pitchFamily="34" charset="0"/>
                 <a:ea typeface="Cambria" pitchFamily="34" charset="-122"/>
                 <a:cs typeface="Cambria" pitchFamily="34" charset="-120"/>
               </a:rPr>
-              <a:t>≈ 650 pisos</a:t>
-            </a:r>
-            <a:endParaRPr lang="en-US" sz="3400" dirty="0"/>
-          </a:p>
-        </p:txBody>
-      </p:sp>
-      <p:sp>
-        <p:nvSpPr>
-          <p:cNvPr id="17" name="Text 14"/>
-          <p:cNvSpPr txBox="1"/>
-          <p:nvPr/>
-        </p:nvSpPr>
-        <p:spPr>
-          <a:xfrm>
-            <a:off x="8275320" y="3063240"/>
-            <a:ext cx="3108960" cy="777240"/>
-          </a:xfrm>
-          <a:prstGeom prst="rect">
-            <a:avLst/>
-          </a:prstGeom>
-          <a:noFill/>
-          <a:ln/>
-        </p:spPr>
-        <p:txBody>
-          <a:bodyPr wrap="square" lIns="0" tIns="0" rIns="0" bIns="0" rtlCol="0" anchor="t"/>
-          <a:lstStyle/>
-          <a:p>
-            <a:pPr indent="0" marL="0">
-              <a:buNone/>
-            </a:pPr>
-            <a:r>
-              <a:rPr lang="en-US" sz="1050" dirty="0">
-                <a:solidFill>
-                  <a:srgbClr val="8A7A6D"/>
-                </a:solidFill>
-                <a:latin typeface="Calibri" pitchFamily="34" charset="0"/>
-                <a:ea typeface="Calibri" pitchFamily="34" charset="-122"/>
-                <a:cs typeface="Calibri" pitchFamily="34" charset="-120"/>
-              </a:rPr>
-              <a:t>55% de esos comparte piso ÷ 3,5 pers./piso de media</a:t>
-            </a:r>
-            <a:endParaRPr lang="en-US" sz="1050" dirty="0"/>
-          </a:p>
-        </p:txBody>
-      </p:sp>
-      <p:sp>
-        <p:nvSpPr>
-          <p:cNvPr id="18" name="Shape 15"/>
+              <a:t>De colaboración</a:t>
+            </a:r>
+            <a:endParaRPr lang="en-US" sz="1500" dirty="0"/>
+          </a:p>
+        </p:txBody>
+      </p:sp>
+      <p:sp>
+        <p:nvSpPr>
+          <p:cNvPr id="14" name="Text 11"/>
+          <p:cNvSpPr txBox="1"/>
+          <p:nvPr/>
+        </p:nvSpPr>
+        <p:spPr>
+          <a:xfrm>
+            <a:off x="3657600" y="3995928"/>
+            <a:ext cx="7772400" cy="822960"/>
+          </a:xfrm>
+          <a:prstGeom prst="rect">
+            <a:avLst/>
+          </a:prstGeom>
+          <a:noFill/>
+          <a:ln/>
+        </p:spPr>
+        <p:txBody>
+          <a:bodyPr wrap="square" lIns="0" tIns="0" rIns="0" bIns="0" rtlCol="0" anchor="ctr"/>
+          <a:lstStyle/>
+          <a:p>
+            <a:pPr indent="0" marL="0">
+              <a:buNone/>
+            </a:pPr>
+            <a:r>
+              <a:rPr lang="en-US" sz="1300" dirty="0">
+                <a:solidFill>
+                  <a:srgbClr val="2E2119"/>
+                </a:solidFill>
+                <a:latin typeface="Calibri" pitchFamily="34" charset="0"/>
+                <a:ea typeface="Calibri" pitchFamily="34" charset="-122"/>
+                <a:cs typeface="Calibri" pitchFamily="34" charset="-120"/>
+              </a:rPr>
+              <a:t>La solución que mejor funciona en la práctica (Notas) no se puede compartir ni coeditar en tiempo real.</a:t>
+            </a:r>
+            <a:endParaRPr lang="en-US" sz="1300" dirty="0"/>
+          </a:p>
+        </p:txBody>
+      </p:sp>
+      <p:sp>
+        <p:nvSpPr>
+          <p:cNvPr id="15" name="Shape 12"/>
           <p:cNvSpPr/>
           <p:nvPr/>
         </p:nvSpPr>
         <p:spPr>
           <a:xfrm>
-            <a:off x="548640" y="4160520"/>
-            <a:ext cx="11064240" cy="1965960"/>
+            <a:off x="548640" y="5212080"/>
+            <a:ext cx="11064240" cy="1051560"/>
           </a:xfrm>
           <a:prstGeom prst="roundRect">
             <a:avLst>
-              <a:gd name="adj" fmla="val 4651"/>
+              <a:gd name="adj" fmla="val 10435"/>
             </a:avLst>
           </a:prstGeom>
           <a:solidFill>
-            <a:srgbClr val="F6E9D8"/>
+            <a:srgbClr val="2E2119"/>
           </a:solidFill>
-          <a:ln w="12700">
-            <a:solidFill>
-              <a:srgbClr val="C9682B"/>
-            </a:solidFill>
-            <a:prstDash val="solid"/>
-          </a:ln>
-        </p:spPr>
-      </p:sp>
-      <p:sp>
-        <p:nvSpPr>
-          <p:cNvPr id="19" name="Text 16"/>
-          <p:cNvSpPr txBox="1"/>
-          <p:nvPr/>
-        </p:nvSpPr>
-        <p:spPr>
-          <a:xfrm>
-            <a:off x="777240" y="4279392"/>
-            <a:ext cx="10607040" cy="1737360"/>
-          </a:xfrm>
-          <a:prstGeom prst="rect">
-            <a:avLst/>
-          </a:prstGeom>
-          <a:noFill/>
-          <a:ln/>
-        </p:spPr>
-        <p:txBody>
-          <a:bodyPr wrap="square" lIns="0" tIns="0" rIns="0" bIns="0" rtlCol="0" anchor="t"/>
-          <a:lstStyle/>
-          <a:p>
-            <a:pPr indent="0" marL="0">
-              <a:buNone/>
-            </a:pPr>
-            <a:r>
-              <a:rPr lang="en-US" sz="1200" b="1" dirty="0">
-                <a:solidFill>
-                  <a:srgbClr val="C9682B"/>
-                </a:solidFill>
-                <a:latin typeface="Calibri" pitchFamily="34" charset="0"/>
-                <a:ea typeface="Calibri" pitchFamily="34" charset="-122"/>
-                <a:cs typeface="Calibri" pitchFamily="34" charset="-120"/>
-              </a:rPr>
-              <a:t>Margen de error reconocido:  </a:t>
-            </a:r>
-            <a:endParaRPr lang="en-US" sz="1200" dirty="0"/>
-          </a:p>
-          <a:p>
-            <a:pPr indent="0" marL="0">
-              <a:spcAft>
-                <a:spcPts val="600"/>
-              </a:spcAft>
-              <a:buNone/>
-            </a:pPr>
-            <a:r>
-              <a:rPr lang="en-US" sz="1200" dirty="0">
-                <a:solidFill>
-                  <a:srgbClr val="2E2119"/>
-                </a:solidFill>
-                <a:latin typeface="Calibri" pitchFamily="34" charset="0"/>
-                <a:ea typeface="Calibri" pitchFamily="34" charset="-122"/>
-                <a:cs typeface="Calibri" pitchFamily="34" charset="-120"/>
-              </a:rPr>
-              <a:t>la cifra de ≈650 pisos encadena 3 supuestos (% que cambia de ciudad, % que comparte piso, tamaño medio del piso) — es una estimación gruesa, no un conteo exacto. Deja fuera a jóvenes trabajadores que comparten piso y sufren el mismo problema, pero no salen en estas estadísticas.</a:t>
-            </a:r>
-            <a:endParaRPr lang="en-US" sz="1200" dirty="0"/>
-          </a:p>
-          <a:p>
-            <a:pPr indent="0" marL="0">
-              <a:buNone/>
-            </a:pPr>
-            <a:r>
-              <a:rPr lang="en-US" sz="1200" b="1" dirty="0">
-                <a:solidFill>
-                  <a:srgbClr val="C9682B"/>
-                </a:solidFill>
-                <a:latin typeface="Calibri" pitchFamily="34" charset="0"/>
-                <a:ea typeface="Calibri" pitchFamily="34" charset="-122"/>
-                <a:cs typeface="Calibri" pitchFamily="34" charset="-120"/>
-              </a:rPr>
-              <a:t>Para contexto, no como objetivo:  </a:t>
-            </a:r>
-            <a:endParaRPr lang="en-US" sz="1200" dirty="0"/>
-          </a:p>
-          <a:p>
-            <a:pPr indent="0" marL="0">
-              <a:buNone/>
-            </a:pPr>
-            <a:r>
-              <a:rPr lang="en-US" sz="1200" dirty="0">
-                <a:solidFill>
-                  <a:srgbClr val="2E2119"/>
-                </a:solidFill>
-                <a:latin typeface="Calibri" pitchFamily="34" charset="0"/>
-                <a:ea typeface="Calibri" pitchFamily="34" charset="-122"/>
-                <a:cs typeface="Calibri" pitchFamily="34" charset="-120"/>
-              </a:rPr>
-              <a:t>A Coruña tiene ≈99.700 hogares de 2+ personas — el techo si algún día se sirviera a cualquier hogar, no solo a estudiantes.</a:t>
-            </a:r>
-            <a:endParaRPr lang="en-US" sz="1200" dirty="0"/>
+          <a:ln/>
+        </p:spPr>
+      </p:sp>
+      <p:sp>
+        <p:nvSpPr>
+          <p:cNvPr id="16" name="Text 13"/>
+          <p:cNvSpPr txBox="1"/>
+          <p:nvPr/>
+        </p:nvSpPr>
+        <p:spPr>
+          <a:xfrm>
+            <a:off x="868680" y="5330952"/>
+            <a:ext cx="10424160" cy="777240"/>
+          </a:xfrm>
+          <a:prstGeom prst="rect">
+            <a:avLst/>
+          </a:prstGeom>
+          <a:noFill/>
+          <a:ln/>
+        </p:spPr>
+        <p:txBody>
+          <a:bodyPr wrap="square" lIns="0" tIns="0" rIns="0" bIns="0" rtlCol="0" anchor="ctr"/>
+          <a:lstStyle/>
+          <a:p>
+            <a:pPr indent="0" marL="0">
+              <a:buNone/>
+            </a:pPr>
+            <a:r>
+              <a:rPr lang="en-US" sz="1300" i="1" dirty="0">
+                <a:solidFill>
+                  <a:srgbClr val="D9A441"/>
+                </a:solidFill>
+                <a:latin typeface="Calibri" pitchFamily="34" charset="0"/>
+                <a:ea typeface="Calibri" pitchFamily="34" charset="-122"/>
+                <a:cs typeface="Calibri" pitchFamily="34" charset="-120"/>
+              </a:rPr>
+              <a:t>El hueco real: una herramienta tan rápida de usar como Notas, tan colaborativa como Bring!, que además dice quién apuntó cada cosa y muestra qué hay en casa sin pedir que nadie lleve la cuenta a mano — el ángulo que nadie cubre.</a:t>
+            </a:r>
+            <a:endParaRPr lang="en-US" sz="1300" dirty="0"/>
           </a:p>
         </p:txBody>
       </p:sp>
@@ -10158,7 +11594,7 @@
                 <a:ea typeface="Calibri" pitchFamily="34" charset="-122"/>
                 <a:cs typeface="Calibri" pitchFamily="34" charset="-120"/>
               </a:rPr>
-              <a:t>PASO 4</a:t>
+              <a:t>PASO 2 — VALIDACIÓN</a:t>
             </a:r>
             <a:endParaRPr lang="en-US" sz="1200" dirty="0"/>
           </a:p>
@@ -10197,7 +11633,7 @@
                 <a:ea typeface="Cambria" pitchFamily="34" charset="-122"/>
                 <a:cs typeface="Cambria" pitchFamily="34" charset="-120"/>
               </a:rPr>
-              <a:t>La servilleta de 6 casillas</a:t>
+              <a:t>Las quejas espontáneas confirman el mismo patrón</a:t>
             </a:r>
             <a:endParaRPr lang="en-US" sz="2800" dirty="0"/>
           </a:p>
@@ -10205,18 +11641,57 @@
       </p:sp>
       <p:sp>
         <p:nvSpPr>
-          <p:cNvPr id="6" name="Shape 3"/>
+          <p:cNvPr id="6" name="Text 3"/>
+          <p:cNvSpPr txBox="1"/>
+          <p:nvPr/>
+        </p:nvSpPr>
+        <p:spPr>
+          <a:xfrm>
+            <a:off x="548640" y="1207008"/>
+            <a:ext cx="11094415" cy="274320"/>
+          </a:xfrm>
+          <a:prstGeom prst="rect">
+            <a:avLst/>
+          </a:prstGeom>
+          <a:noFill/>
+          <a:ln/>
+        </p:spPr>
+        <p:txBody>
+          <a:bodyPr wrap="square" lIns="0" tIns="0" rIns="0" bIns="0" rtlCol="0" anchor="ctr"/>
+          <a:lstStyle/>
+          <a:p>
+            <a:pPr indent="0" marL="0">
+              <a:buNone/>
+            </a:pPr>
+            <a:r>
+              <a:rPr lang="en-US" sz="1000" i="1" dirty="0">
+                <a:solidFill>
+                  <a:srgbClr val="8A7A6D"/>
+                </a:solidFill>
+                <a:latin typeface="Calibri" pitchFamily="34" charset="0"/>
+                <a:ea typeface="Calibri" pitchFamily="34" charset="-122"/>
+                <a:cs typeface="Calibri" pitchFamily="34" charset="-120"/>
+              </a:rPr>
+              <a:t>Pregunta 9 (abierta): "¿Qué es lo que más te frustra de gestionar la compra o la nevera?" — nadie vio el prototipo antes de responder.</a:t>
+            </a:r>
+            <a:endParaRPr lang="en-US" sz="1000" dirty="0"/>
+          </a:p>
+        </p:txBody>
+      </p:sp>
+      <p:sp>
+        <p:nvSpPr>
+          <p:cNvPr id="7" name="Shape 4"/>
           <p:cNvSpPr/>
           <p:nvPr/>
         </p:nvSpPr>
         <p:spPr>
           <a:xfrm>
-            <a:off x="548640" y="1417320"/>
-            <a:ext cx="3611880" cy="960120"/>
+            <a:off x="548640" y="1508760"/>
+            <a:ext cx="5532120" cy="4160520"/>
           </a:xfrm>
           <a:prstGeom prst="roundRect">
             <a:avLst>
-              <a:gd name="adj" fmla="val 11429"/>
+              <a:gd name="adj" fmla="val 2637"/>
             </a:avLst>
           </a:prstGeom>
           <a:solidFill>
@@ -10234,14 +11709,14 @@
       </p:sp>
       <p:sp>
         <p:nvSpPr>
-          <p:cNvPr id="7" name="Text 4"/>
-          <p:cNvSpPr txBox="1"/>
-          <p:nvPr/>
-        </p:nvSpPr>
-        <p:spPr>
-          <a:xfrm>
-            <a:off x="731520" y="1508760"/>
-            <a:ext cx="3246120" cy="256032"/>
+          <p:cNvPr id="8" name="Text 5"/>
+          <p:cNvSpPr txBox="1"/>
+          <p:nvPr/>
+        </p:nvSpPr>
+        <p:spPr>
+          <a:xfrm>
+            <a:off x="777240" y="1645920"/>
+            <a:ext cx="5074920" cy="274320"/>
           </a:xfrm>
           <a:prstGeom prst="rect">
             <a:avLst/>
@@ -10257,7 +11732,7 @@
               <a:buNone/>
             </a:pPr>
             <a:r>
-              <a:rPr lang="en-US" sz="1000" b="1" spc="100" kern="0" dirty="0">
+              <a:rPr lang="en-US" sz="1200" b="1" spc="150" kern="0" dirty="0">
                 <a:solidFill>
                   <a:srgbClr val="C9682B"/>
                 </a:solidFill>
@@ -10265,38 +11740,102 @@
                 <a:ea typeface="Calibri" pitchFamily="34" charset="-122"/>
                 <a:cs typeface="Calibri" pitchFamily="34" charset="-120"/>
               </a:rPr>
-              <a:t>QUÉ VENDEMOS</a:t>
+              <a:t>FALTA DE COOPERACIÓN</a:t>
+            </a:r>
+            <a:endParaRPr lang="en-US" sz="1200" dirty="0"/>
+          </a:p>
+        </p:txBody>
+      </p:sp>
+      <p:sp>
+        <p:nvSpPr>
+          <p:cNvPr id="9" name="Text 6"/>
+          <p:cNvSpPr txBox="1"/>
+          <p:nvPr/>
+        </p:nvSpPr>
+        <p:spPr>
+          <a:xfrm>
+            <a:off x="777240" y="1901952"/>
+            <a:ext cx="5074920" cy="274320"/>
+          </a:xfrm>
+          <a:prstGeom prst="rect">
+            <a:avLst/>
+          </a:prstGeom>
+          <a:noFill/>
+          <a:ln/>
+        </p:spPr>
+        <p:txBody>
+          <a:bodyPr wrap="square" lIns="0" tIns="0" rIns="0" bIns="0" rtlCol="0" anchor="ctr"/>
+          <a:lstStyle/>
+          <a:p>
+            <a:pPr indent="0" marL="0">
+              <a:buNone/>
+            </a:pPr>
+            <a:r>
+              <a:rPr lang="en-US" sz="1050" i="1" dirty="0">
+                <a:solidFill>
+                  <a:srgbClr val="8A7A6D"/>
+                </a:solidFill>
+                <a:latin typeface="Calibri" pitchFamily="34" charset="0"/>
+                <a:ea typeface="Calibri" pitchFamily="34" charset="-122"/>
+                <a:cs typeface="Calibri" pitchFamily="34" charset="-120"/>
+              </a:rPr>
+              <a:t>8 de 35 personas (23%) — el tema más repetido, sin que se les preguntara</a:t>
+            </a:r>
+            <a:endParaRPr lang="en-US" sz="1050" dirty="0"/>
+          </a:p>
+        </p:txBody>
+      </p:sp>
+      <p:sp>
+        <p:nvSpPr>
+          <p:cNvPr id="10" name="Text 7"/>
+          <p:cNvSpPr txBox="1"/>
+          <p:nvPr/>
+        </p:nvSpPr>
+        <p:spPr>
+          <a:xfrm>
+            <a:off x="822960" y="2286000"/>
+            <a:ext cx="5029200" cy="3291840"/>
+          </a:xfrm>
+          <a:prstGeom prst="rect">
+            <a:avLst/>
+          </a:prstGeom>
+          <a:noFill/>
+          <a:ln/>
+        </p:spPr>
+        <p:txBody>
+          <a:bodyPr wrap="square" lIns="0" tIns="0" rIns="0" bIns="0" rtlCol="0" anchor="t"/>
+          <a:lstStyle/>
+          <a:p>
+            <a:pPr marL="342900" indent="-342900">
+              <a:spcAft>
+                <a:spcPts val="700"/>
+              </a:spcAft>
+              <a:buSzPct val="100000"/>
+              <a:buChar char="•"/>
+            </a:pPr>
+            <a:r>
+              <a:rPr lang="en-US" sz="1000" i="1" dirty="0">
+                <a:solidFill>
+                  <a:srgbClr val="2E2119"/>
+                </a:solidFill>
+                <a:latin typeface="Calibri" pitchFamily="34" charset="0"/>
+                <a:ea typeface="Calibri" pitchFamily="34" charset="-122"/>
+                <a:cs typeface="Calibri" pitchFamily="34" charset="-120"/>
+              </a:rPr>
+              <a:t>"I don’t know who bought what"</a:t>
             </a:r>
             <a:endParaRPr lang="en-US" sz="1000" dirty="0"/>
           </a:p>
-        </p:txBody>
-      </p:sp>
-      <p:sp>
-        <p:nvSpPr>
-          <p:cNvPr id="8" name="Text 5"/>
-          <p:cNvSpPr txBox="1"/>
-          <p:nvPr/>
-        </p:nvSpPr>
-        <p:spPr>
-          <a:xfrm>
-            <a:off x="731520" y="1764792"/>
-            <a:ext cx="3246120" cy="566928"/>
-          </a:xfrm>
-          <a:prstGeom prst="rect">
-            <a:avLst/>
-          </a:prstGeom>
-          <a:noFill/>
-          <a:ln/>
-        </p:spPr>
-        <p:txBody>
-          <a:bodyPr wrap="square" lIns="0" tIns="0" rIns="0" bIns="0" rtlCol="0" anchor="t"/>
-          <a:lstStyle/>
-          <a:p>
-            <a:pPr indent="0" marL="0">
-              <a:buNone/>
-            </a:pPr>
-            <a:r>
-              <a:rPr lang="en-US" sz="1150" dirty="0">
+          <a:p>
+            <a:pPr marL="342900" indent="-342900">
+              <a:spcAft>
+                <a:spcPts val="700"/>
+              </a:spcAft>
+              <a:buSzPct val="100000"/>
+              <a:buChar char="•"/>
+            </a:pPr>
+            <a:r>
+              <a:rPr lang="en-US" sz="1000" i="1" dirty="0">
                 <a:solidFill>
                   <a:srgbClr val="2E2119"/>
                 </a:solidFill>
@@ -10304,30 +11843,114 @@
                 <a:ea typeface="Calibri" pitchFamily="34" charset="-122"/>
                 <a:cs typeface="Calibri" pitchFamily="34" charset="-120"/>
               </a:rPr>
-              <a:t>Nada — no es un producto de pago, es una herramienta gratuita</a:t>
-            </a:r>
-            <a:endParaRPr lang="en-US" sz="1150" dirty="0"/>
-          </a:p>
-        </p:txBody>
-      </p:sp>
-      <p:sp>
-        <p:nvSpPr>
-          <p:cNvPr id="9" name="Shape 6"/>
+              <a:t>"Not knowing what the others want, the others eating my stuff" / "People eating my food"</a:t>
+            </a:r>
+            <a:endParaRPr lang="en-US" sz="1000" dirty="0"/>
+          </a:p>
+          <a:p>
+            <a:pPr marL="342900" indent="-342900">
+              <a:spcAft>
+                <a:spcPts val="700"/>
+              </a:spcAft>
+              <a:buSzPct val="100000"/>
+              <a:buChar char="•"/>
+            </a:pPr>
+            <a:r>
+              <a:rPr lang="en-US" sz="1000" i="1" dirty="0">
+                <a:solidFill>
+                  <a:srgbClr val="2E2119"/>
+                </a:solidFill>
+                <a:latin typeface="Calibri" pitchFamily="34" charset="0"/>
+                <a:ea typeface="Calibri" pitchFamily="34" charset="-122"/>
+                <a:cs typeface="Calibri" pitchFamily="34" charset="-120"/>
+              </a:rPr>
+              <a:t>"When people use the food I planned to use in a meal for myself... so I have to use something else"</a:t>
+            </a:r>
+            <a:endParaRPr lang="en-US" sz="1000" dirty="0"/>
+          </a:p>
+          <a:p>
+            <a:pPr marL="342900" indent="-342900">
+              <a:spcAft>
+                <a:spcPts val="700"/>
+              </a:spcAft>
+              <a:buSzPct val="100000"/>
+              <a:buChar char="•"/>
+            </a:pPr>
+            <a:r>
+              <a:rPr lang="en-US" sz="1000" i="1" dirty="0">
+                <a:solidFill>
+                  <a:srgbClr val="2E2119"/>
+                </a:solidFill>
+                <a:latin typeface="Calibri" pitchFamily="34" charset="0"/>
+                <a:ea typeface="Calibri" pitchFamily="34" charset="-122"/>
+                <a:cs typeface="Calibri" pitchFamily="34" charset="-120"/>
+              </a:rPr>
+              <a:t>"Not knowing if someone bought something just for themself" / dudar en comprar algo "y que se lo coma otra persona"</a:t>
+            </a:r>
+            <a:endParaRPr lang="en-US" sz="1000" dirty="0"/>
+          </a:p>
+          <a:p>
+            <a:pPr marL="342900" indent="-342900">
+              <a:spcAft>
+                <a:spcPts val="700"/>
+              </a:spcAft>
+              <a:buSzPct val="100000"/>
+              <a:buChar char="•"/>
+            </a:pPr>
+            <a:r>
+              <a:rPr lang="en-US" sz="1000" i="1" dirty="0">
+                <a:solidFill>
+                  <a:srgbClr val="2E2119"/>
+                </a:solidFill>
+                <a:latin typeface="Calibri" pitchFamily="34" charset="0"/>
+                <a:ea typeface="Calibri" pitchFamily="34" charset="-122"/>
+                <a:cs typeface="Calibri" pitchFamily="34" charset="-120"/>
+              </a:rPr>
+              <a:t>"Que compran cosas que no quiero"</a:t>
+            </a:r>
+            <a:endParaRPr lang="en-US" sz="1000" dirty="0"/>
+          </a:p>
+          <a:p>
+            <a:pPr marL="342900" indent="-342900">
+              <a:spcAft>
+                <a:spcPts val="700"/>
+              </a:spcAft>
+              <a:buSzPct val="100000"/>
+              <a:buChar char="•"/>
+            </a:pPr>
+            <a:r>
+              <a:rPr lang="en-US" sz="1000" i="1" dirty="0">
+                <a:solidFill>
+                  <a:srgbClr val="2E2119"/>
+                </a:solidFill>
+                <a:latin typeface="Calibri" pitchFamily="34" charset="0"/>
+                <a:ea typeface="Calibri" pitchFamily="34" charset="-122"/>
+                <a:cs typeface="Calibri" pitchFamily="34" charset="-120"/>
+              </a:rPr>
+              <a:t>"Cada vez una compra una cosa, lo complicado es llevar la cuenta de quién compró qué antes"</a:t>
+            </a:r>
+            <a:endParaRPr lang="en-US" sz="1000" dirty="0"/>
+          </a:p>
+        </p:txBody>
+      </p:sp>
+      <p:sp>
+        <p:nvSpPr>
+          <p:cNvPr id="11" name="Shape 8"/>
           <p:cNvSpPr/>
           <p:nvPr/>
         </p:nvSpPr>
         <p:spPr>
           <a:xfrm>
-            <a:off x="4297680" y="1417320"/>
-            <a:ext cx="3611880" cy="960120"/>
+            <a:off x="6263640" y="1508760"/>
+            <a:ext cx="5349240" cy="4160520"/>
           </a:xfrm>
           <a:prstGeom prst="roundRect">
             <a:avLst>
-              <a:gd name="adj" fmla="val 11429"/>
+              <a:gd name="adj" fmla="val 2637"/>
             </a:avLst>
           </a:prstGeom>
           <a:solidFill>
-            <a:srgbClr val="F4E9DA"/>
+            <a:srgbClr val="EDE6DC"/>
           </a:solidFill>
           <a:ln/>
           <a:effectLst>
@@ -10341,14 +11964,14 @@
       </p:sp>
       <p:sp>
         <p:nvSpPr>
-          <p:cNvPr id="10" name="Text 7"/>
-          <p:cNvSpPr txBox="1"/>
-          <p:nvPr/>
-        </p:nvSpPr>
-        <p:spPr>
-          <a:xfrm>
-            <a:off x="4480560" y="1508760"/>
-            <a:ext cx="3246120" cy="256032"/>
+          <p:cNvPr id="12" name="Text 9"/>
+          <p:cNvSpPr txBox="1"/>
+          <p:nvPr/>
+        </p:nvSpPr>
+        <p:spPr>
+          <a:xfrm>
+            <a:off x="6492240" y="1645920"/>
+            <a:ext cx="4892040" cy="274320"/>
           </a:xfrm>
           <a:prstGeom prst="rect">
             <a:avLst/>
@@ -10364,7 +11987,7 @@
               <a:buNone/>
             </a:pPr>
             <a:r>
-              <a:rPr lang="en-US" sz="1000" b="1" spc="100" kern="0" dirty="0">
+              <a:rPr lang="en-US" sz="1200" b="1" spc="150" kern="0" dirty="0">
                 <a:solidFill>
                   <a:srgbClr val="C9682B"/>
                 </a:solidFill>
@@ -10372,22 +11995,61 @@
                 <a:ea typeface="Calibri" pitchFamily="34" charset="-122"/>
                 <a:cs typeface="Calibri" pitchFamily="34" charset="-120"/>
               </a:rPr>
-              <a:t>A QUIÉN</a:t>
-            </a:r>
-            <a:endParaRPr lang="en-US" sz="1000" dirty="0"/>
-          </a:p>
-        </p:txBody>
-      </p:sp>
-      <p:sp>
-        <p:nvSpPr>
-          <p:cNvPr id="11" name="Text 8"/>
-          <p:cNvSpPr txBox="1"/>
-          <p:nvPr/>
-        </p:nvSpPr>
-        <p:spPr>
-          <a:xfrm>
-            <a:off x="4480560" y="1764792"/>
-            <a:ext cx="3246120" cy="566928"/>
+              <a:t>FALTA DE TRACKER DE GASTOS</a:t>
+            </a:r>
+            <a:endParaRPr lang="en-US" sz="1200" dirty="0"/>
+          </a:p>
+        </p:txBody>
+      </p:sp>
+      <p:sp>
+        <p:nvSpPr>
+          <p:cNvPr id="13" name="Text 10"/>
+          <p:cNvSpPr txBox="1"/>
+          <p:nvPr/>
+        </p:nvSpPr>
+        <p:spPr>
+          <a:xfrm>
+            <a:off x="6492240" y="1901952"/>
+            <a:ext cx="4892040" cy="384048"/>
+          </a:xfrm>
+          <a:prstGeom prst="rect">
+            <a:avLst/>
+          </a:prstGeom>
+          <a:noFill/>
+          <a:ln/>
+        </p:spPr>
+        <p:txBody>
+          <a:bodyPr wrap="square" lIns="0" tIns="0" rIns="0" bIns="0" rtlCol="0" anchor="ctr"/>
+          <a:lstStyle/>
+          <a:p>
+            <a:pPr indent="0" marL="0">
+              <a:buNone/>
+            </a:pPr>
+            <a:r>
+              <a:rPr lang="en-US" sz="1050" i="1" dirty="0">
+                <a:solidFill>
+                  <a:srgbClr val="8A7A6D"/>
+                </a:solidFill>
+                <a:latin typeface="Calibri" pitchFamily="34" charset="0"/>
+                <a:ea typeface="Calibri" pitchFamily="34" charset="-122"/>
+                <a:cs typeface="Calibri" pitchFamily="34" charset="-120"/>
+              </a:rPr>
+              <a:t>3 menciones espontáneas + 12/35 (34%) dice en la Pregunta 8 que no llevan cuenta</a:t>
+            </a:r>
+            <a:endParaRPr lang="en-US" sz="1050" dirty="0"/>
+          </a:p>
+        </p:txBody>
+      </p:sp>
+      <p:sp>
+        <p:nvSpPr>
+          <p:cNvPr id="14" name="Text 11"/>
+          <p:cNvSpPr txBox="1"/>
+          <p:nvPr/>
+        </p:nvSpPr>
+        <p:spPr>
+          <a:xfrm>
+            <a:off x="6537960" y="2331720"/>
+            <a:ext cx="4846320" cy="1737360"/>
           </a:xfrm>
           <a:prstGeom prst="rect">
             <a:avLst/>
@@ -10399,11 +12061,15 @@
           <a:bodyPr wrap="square" lIns="0" tIns="0" rIns="0" bIns="0" rtlCol="0" anchor="t"/>
           <a:lstStyle/>
           <a:p>
-            <a:pPr indent="0" marL="0">
-              <a:buNone/>
-            </a:pPr>
-            <a:r>
-              <a:rPr lang="en-US" sz="1150" dirty="0">
+            <a:pPr marL="342900" indent="-342900">
+              <a:spcAft>
+                <a:spcPts val="800"/>
+              </a:spcAft>
+              <a:buSzPct val="100000"/>
+              <a:buChar char="•"/>
+            </a:pPr>
+            <a:r>
+              <a:rPr lang="en-US" sz="1100" i="1" dirty="0">
                 <a:solidFill>
                   <a:srgbClr val="2E2119"/>
                 </a:solidFill>
@@ -10411,454 +12077,68 @@
                 <a:ea typeface="Calibri" pitchFamily="34" charset="-122"/>
                 <a:cs typeface="Calibri" pitchFamily="34" charset="-120"/>
               </a:rPr>
-              <a:t>Estudiantes que comparten piso en A Coruña</a:t>
-            </a:r>
-            <a:endParaRPr lang="en-US" sz="1150" dirty="0"/>
-          </a:p>
-        </p:txBody>
-      </p:sp>
-      <p:sp>
-        <p:nvSpPr>
-          <p:cNvPr id="12" name="Shape 9"/>
+              <a:t>"I don’t know who bought what" — también aquí: no saber quién pagó qué</a:t>
+            </a:r>
+            <a:endParaRPr lang="en-US" sz="1100" dirty="0"/>
+          </a:p>
+          <a:p>
+            <a:pPr marL="342900" indent="-342900">
+              <a:spcAft>
+                <a:spcPts val="800"/>
+              </a:spcAft>
+              <a:buSzPct val="100000"/>
+              <a:buChar char="•"/>
+            </a:pPr>
+            <a:r>
+              <a:rPr lang="en-US" sz="1100" i="1" dirty="0">
+                <a:solidFill>
+                  <a:srgbClr val="2E2119"/>
+                </a:solidFill>
+                <a:latin typeface="Calibri" pitchFamily="34" charset="0"/>
+                <a:ea typeface="Calibri" pitchFamily="34" charset="-122"/>
+                <a:cs typeface="Calibri" pitchFamily="34" charset="-120"/>
+              </a:rPr>
+              <a:t>"Que la gente no participe a la hora de hacer la compra o que tarden en pagar cuando dividimos gastos"</a:t>
+            </a:r>
+            <a:endParaRPr lang="en-US" sz="1100" dirty="0"/>
+          </a:p>
+          <a:p>
+            <a:pPr marL="342900" indent="-342900">
+              <a:spcAft>
+                <a:spcPts val="800"/>
+              </a:spcAft>
+              <a:buSzPct val="100000"/>
+              <a:buChar char="•"/>
+            </a:pPr>
+            <a:r>
+              <a:rPr lang="en-US" sz="1100" i="1" dirty="0">
+                <a:solidFill>
+                  <a:srgbClr val="2E2119"/>
+                </a:solidFill>
+                <a:latin typeface="Calibri" pitchFamily="34" charset="0"/>
+                <a:ea typeface="Calibri" pitchFamily="34" charset="-122"/>
+                <a:cs typeface="Calibri" pitchFamily="34" charset="-120"/>
+              </a:rPr>
+              <a:t>"Llevar la cuenta de quién compró qué antes" — también dual, coop + gasto</a:t>
+            </a:r>
+            <a:endParaRPr lang="en-US" sz="1100" dirty="0"/>
+          </a:p>
+        </p:txBody>
+      </p:sp>
+      <p:sp>
+        <p:nvSpPr>
+          <p:cNvPr id="15" name="Shape 12"/>
           <p:cNvSpPr/>
           <p:nvPr/>
         </p:nvSpPr>
         <p:spPr>
           <a:xfrm>
-            <a:off x="8046720" y="1417320"/>
-            <a:ext cx="3611880" cy="960120"/>
+            <a:off x="6492240" y="4160520"/>
+            <a:ext cx="4892040" cy="1371600"/>
           </a:xfrm>
           <a:prstGeom prst="roundRect">
             <a:avLst>
-              <a:gd name="adj" fmla="val 11429"/>
-            </a:avLst>
-          </a:prstGeom>
-          <a:solidFill>
-            <a:srgbClr val="F4E9DA"/>
-          </a:solidFill>
-          <a:ln/>
-          <a:effectLst>
-            <a:outerShdw sx="100000" sy="100000" kx="0" ky="0" algn="bl" rotWithShape="0" blurRad="76200" dist="25400" dir="5400000">
-              <a:srgbClr val="000000">
-                <a:alpha val="12000"/>
-              </a:srgbClr>
-            </a:outerShdw>
-          </a:effectLst>
-        </p:spPr>
-      </p:sp>
-      <p:sp>
-        <p:nvSpPr>
-          <p:cNvPr id="13" name="Text 10"/>
-          <p:cNvSpPr txBox="1"/>
-          <p:nvPr/>
-        </p:nvSpPr>
-        <p:spPr>
-          <a:xfrm>
-            <a:off x="8229600" y="1508760"/>
-            <a:ext cx="3246120" cy="256032"/>
-          </a:xfrm>
-          <a:prstGeom prst="rect">
-            <a:avLst/>
-          </a:prstGeom>
-          <a:noFill/>
-          <a:ln/>
-        </p:spPr>
-        <p:txBody>
-          <a:bodyPr wrap="square" lIns="0" tIns="0" rIns="0" bIns="0" rtlCol="0" anchor="ctr"/>
-          <a:lstStyle/>
-          <a:p>
-            <a:pPr indent="0" marL="0">
-              <a:buNone/>
-            </a:pPr>
-            <a:r>
-              <a:rPr lang="en-US" sz="1000" b="1" spc="100" kern="0" dirty="0">
-                <a:solidFill>
-                  <a:srgbClr val="C9682B"/>
-                </a:solidFill>
-                <a:latin typeface="Calibri" pitchFamily="34" charset="0"/>
-                <a:ea typeface="Calibri" pitchFamily="34" charset="-122"/>
-                <a:cs typeface="Calibri" pitchFamily="34" charset="-120"/>
-              </a:rPr>
-              <a:t>A CUÁNTO</a:t>
-            </a:r>
-            <a:endParaRPr lang="en-US" sz="1000" dirty="0"/>
-          </a:p>
-        </p:txBody>
-      </p:sp>
-      <p:sp>
-        <p:nvSpPr>
-          <p:cNvPr id="14" name="Text 11"/>
-          <p:cNvSpPr txBox="1"/>
-          <p:nvPr/>
-        </p:nvSpPr>
-        <p:spPr>
-          <a:xfrm>
-            <a:off x="8229600" y="1764792"/>
-            <a:ext cx="3246120" cy="566928"/>
-          </a:xfrm>
-          <a:prstGeom prst="rect">
-            <a:avLst/>
-          </a:prstGeom>
-          <a:noFill/>
-          <a:ln/>
-        </p:spPr>
-        <p:txBody>
-          <a:bodyPr wrap="square" lIns="0" tIns="0" rIns="0" bIns="0" rtlCol="0" anchor="t"/>
-          <a:lstStyle/>
-          <a:p>
-            <a:pPr indent="0" marL="0">
-              <a:buNone/>
-            </a:pPr>
-            <a:r>
-              <a:rPr lang="en-US" sz="1150" dirty="0">
-                <a:solidFill>
-                  <a:srgbClr val="2E2119"/>
-                </a:solidFill>
-                <a:latin typeface="Calibri" pitchFamily="34" charset="0"/>
-                <a:ea typeface="Calibri" pitchFamily="34" charset="-122"/>
-                <a:cs typeface="Calibri" pitchFamily="34" charset="-120"/>
-              </a:rPr>
-              <a:t>0 € — no se cobra nada</a:t>
-            </a:r>
-            <a:endParaRPr lang="en-US" sz="1150" dirty="0"/>
-          </a:p>
-        </p:txBody>
-      </p:sp>
-      <p:sp>
-        <p:nvSpPr>
-          <p:cNvPr id="15" name="Shape 12"/>
-          <p:cNvSpPr/>
-          <p:nvPr/>
-        </p:nvSpPr>
-        <p:spPr>
-          <a:xfrm>
-            <a:off x="548640" y="2514600"/>
-            <a:ext cx="3611880" cy="960120"/>
-          </a:xfrm>
-          <a:prstGeom prst="roundRect">
-            <a:avLst>
-              <a:gd name="adj" fmla="val 11429"/>
-            </a:avLst>
-          </a:prstGeom>
-          <a:solidFill>
-            <a:srgbClr val="F4E9DA"/>
-          </a:solidFill>
-          <a:ln/>
-          <a:effectLst>
-            <a:outerShdw sx="100000" sy="100000" kx="0" ky="0" algn="bl" rotWithShape="0" blurRad="76200" dist="25400" dir="5400000">
-              <a:srgbClr val="000000">
-                <a:alpha val="12000"/>
-              </a:srgbClr>
-            </a:outerShdw>
-          </a:effectLst>
-        </p:spPr>
-      </p:sp>
-      <p:sp>
-        <p:nvSpPr>
-          <p:cNvPr id="16" name="Text 13"/>
-          <p:cNvSpPr txBox="1"/>
-          <p:nvPr/>
-        </p:nvSpPr>
-        <p:spPr>
-          <a:xfrm>
-            <a:off x="731520" y="2606040"/>
-            <a:ext cx="3246120" cy="256032"/>
-          </a:xfrm>
-          <a:prstGeom prst="rect">
-            <a:avLst/>
-          </a:prstGeom>
-          <a:noFill/>
-          <a:ln/>
-        </p:spPr>
-        <p:txBody>
-          <a:bodyPr wrap="square" lIns="0" tIns="0" rIns="0" bIns="0" rtlCol="0" anchor="ctr"/>
-          <a:lstStyle/>
-          <a:p>
-            <a:pPr indent="0" marL="0">
-              <a:buNone/>
-            </a:pPr>
-            <a:r>
-              <a:rPr lang="en-US" sz="1000" b="1" spc="100" kern="0" dirty="0">
-                <a:solidFill>
-                  <a:srgbClr val="C9682B"/>
-                </a:solidFill>
-                <a:latin typeface="Calibri" pitchFamily="34" charset="0"/>
-                <a:ea typeface="Calibri" pitchFamily="34" charset="-122"/>
-                <a:cs typeface="Calibri" pitchFamily="34" charset="-120"/>
-              </a:rPr>
-              <a:t>QUÉ NOS CUESTA</a:t>
-            </a:r>
-            <a:endParaRPr lang="en-US" sz="1000" dirty="0"/>
-          </a:p>
-        </p:txBody>
-      </p:sp>
-      <p:sp>
-        <p:nvSpPr>
-          <p:cNvPr id="17" name="Text 14"/>
-          <p:cNvSpPr txBox="1"/>
-          <p:nvPr/>
-        </p:nvSpPr>
-        <p:spPr>
-          <a:xfrm>
-            <a:off x="731520" y="2862072"/>
-            <a:ext cx="3246120" cy="566928"/>
-          </a:xfrm>
-          <a:prstGeom prst="rect">
-            <a:avLst/>
-          </a:prstGeom>
-          <a:noFill/>
-          <a:ln/>
-        </p:spPr>
-        <p:txBody>
-          <a:bodyPr wrap="square" lIns="0" tIns="0" rIns="0" bIns="0" rtlCol="0" anchor="t"/>
-          <a:lstStyle/>
-          <a:p>
-            <a:pPr indent="0" marL="0">
-              <a:buNone/>
-            </a:pPr>
-            <a:r>
-              <a:rPr lang="en-US" sz="1150" dirty="0">
-                <a:solidFill>
-                  <a:srgbClr val="2E2119"/>
-                </a:solidFill>
-                <a:latin typeface="Calibri" pitchFamily="34" charset="0"/>
-                <a:ea typeface="Calibri" pitchFamily="34" charset="-122"/>
-                <a:cs typeface="Calibri" pitchFamily="34" charset="-120"/>
-              </a:rPr>
-              <a:t>Coste fijo: 0 € (niveles gratuitos de todo el stack). Variable: 0 €</a:t>
-            </a:r>
-            <a:endParaRPr lang="en-US" sz="1150" dirty="0"/>
-          </a:p>
-        </p:txBody>
-      </p:sp>
-      <p:sp>
-        <p:nvSpPr>
-          <p:cNvPr id="18" name="Shape 15"/>
-          <p:cNvSpPr/>
-          <p:nvPr/>
-        </p:nvSpPr>
-        <p:spPr>
-          <a:xfrm>
-            <a:off x="4297680" y="2514600"/>
-            <a:ext cx="3611880" cy="960120"/>
-          </a:xfrm>
-          <a:prstGeom prst="roundRect">
-            <a:avLst>
-              <a:gd name="adj" fmla="val 11429"/>
-            </a:avLst>
-          </a:prstGeom>
-          <a:solidFill>
-            <a:srgbClr val="F4E9DA"/>
-          </a:solidFill>
-          <a:ln/>
-          <a:effectLst>
-            <a:outerShdw sx="100000" sy="100000" kx="0" ky="0" algn="bl" rotWithShape="0" blurRad="76200" dist="25400" dir="5400000">
-              <a:srgbClr val="000000">
-                <a:alpha val="12000"/>
-              </a:srgbClr>
-            </a:outerShdw>
-          </a:effectLst>
-        </p:spPr>
-      </p:sp>
-      <p:sp>
-        <p:nvSpPr>
-          <p:cNvPr id="19" name="Text 16"/>
-          <p:cNvSpPr txBox="1"/>
-          <p:nvPr/>
-        </p:nvSpPr>
-        <p:spPr>
-          <a:xfrm>
-            <a:off x="4480560" y="2606040"/>
-            <a:ext cx="3246120" cy="256032"/>
-          </a:xfrm>
-          <a:prstGeom prst="rect">
-            <a:avLst/>
-          </a:prstGeom>
-          <a:noFill/>
-          <a:ln/>
-        </p:spPr>
-        <p:txBody>
-          <a:bodyPr wrap="square" lIns="0" tIns="0" rIns="0" bIns="0" rtlCol="0" anchor="ctr"/>
-          <a:lstStyle/>
-          <a:p>
-            <a:pPr indent="0" marL="0">
-              <a:buNone/>
-            </a:pPr>
-            <a:r>
-              <a:rPr lang="en-US" sz="1000" b="1" spc="100" kern="0" dirty="0">
-                <a:solidFill>
-                  <a:srgbClr val="C9682B"/>
-                </a:solidFill>
-                <a:latin typeface="Calibri" pitchFamily="34" charset="0"/>
-                <a:ea typeface="Calibri" pitchFamily="34" charset="-122"/>
-                <a:cs typeface="Calibri" pitchFamily="34" charset="-120"/>
-              </a:rPr>
-              <a:t>CUÁNTOS HACEN FALTA</a:t>
-            </a:r>
-            <a:endParaRPr lang="en-US" sz="1000" dirty="0"/>
-          </a:p>
-        </p:txBody>
-      </p:sp>
-      <p:sp>
-        <p:nvSpPr>
-          <p:cNvPr id="20" name="Text 17"/>
-          <p:cNvSpPr txBox="1"/>
-          <p:nvPr/>
-        </p:nvSpPr>
-        <p:spPr>
-          <a:xfrm>
-            <a:off x="4480560" y="2862072"/>
-            <a:ext cx="3246120" cy="566928"/>
-          </a:xfrm>
-          <a:prstGeom prst="rect">
-            <a:avLst/>
-          </a:prstGeom>
-          <a:noFill/>
-          <a:ln/>
-        </p:spPr>
-        <p:txBody>
-          <a:bodyPr wrap="square" lIns="0" tIns="0" rIns="0" bIns="0" rtlCol="0" anchor="t"/>
-          <a:lstStyle/>
-          <a:p>
-            <a:pPr indent="0" marL="0">
-              <a:buNone/>
-            </a:pPr>
-            <a:r>
-              <a:rPr lang="en-US" sz="1150" dirty="0">
-                <a:solidFill>
-                  <a:srgbClr val="2E2119"/>
-                </a:solidFill>
-                <a:latin typeface="Calibri" pitchFamily="34" charset="0"/>
-                <a:ea typeface="Calibri" pitchFamily="34" charset="-122"/>
-                <a:cs typeface="Calibri" pitchFamily="34" charset="-120"/>
-              </a:rPr>
-              <a:t>No aplica — no hay ingresos que equilibrar</a:t>
-            </a:r>
-            <a:endParaRPr lang="en-US" sz="1150" dirty="0"/>
-          </a:p>
-        </p:txBody>
-      </p:sp>
-      <p:sp>
-        <p:nvSpPr>
-          <p:cNvPr id="21" name="Shape 18"/>
-          <p:cNvSpPr/>
-          <p:nvPr/>
-        </p:nvSpPr>
-        <p:spPr>
-          <a:xfrm>
-            <a:off x="8046720" y="2514600"/>
-            <a:ext cx="3611880" cy="960120"/>
-          </a:xfrm>
-          <a:prstGeom prst="roundRect">
-            <a:avLst>
-              <a:gd name="adj" fmla="val 11429"/>
-            </a:avLst>
-          </a:prstGeom>
-          <a:solidFill>
-            <a:srgbClr val="F4E9DA"/>
-          </a:solidFill>
-          <a:ln/>
-          <a:effectLst>
-            <a:outerShdw sx="100000" sy="100000" kx="0" ky="0" algn="bl" rotWithShape="0" blurRad="76200" dist="25400" dir="5400000">
-              <a:srgbClr val="000000">
-                <a:alpha val="12000"/>
-              </a:srgbClr>
-            </a:outerShdw>
-          </a:effectLst>
-        </p:spPr>
-      </p:sp>
-      <p:sp>
-        <p:nvSpPr>
-          <p:cNvPr id="22" name="Text 19"/>
-          <p:cNvSpPr txBox="1"/>
-          <p:nvPr/>
-        </p:nvSpPr>
-        <p:spPr>
-          <a:xfrm>
-            <a:off x="8229600" y="2606040"/>
-            <a:ext cx="3246120" cy="256032"/>
-          </a:xfrm>
-          <a:prstGeom prst="rect">
-            <a:avLst/>
-          </a:prstGeom>
-          <a:noFill/>
-          <a:ln/>
-        </p:spPr>
-        <p:txBody>
-          <a:bodyPr wrap="square" lIns="0" tIns="0" rIns="0" bIns="0" rtlCol="0" anchor="ctr"/>
-          <a:lstStyle/>
-          <a:p>
-            <a:pPr indent="0" marL="0">
-              <a:buNone/>
-            </a:pPr>
-            <a:r>
-              <a:rPr lang="en-US" sz="1000" b="1" spc="100" kern="0" dirty="0">
-                <a:solidFill>
-                  <a:srgbClr val="C9682B"/>
-                </a:solidFill>
-                <a:latin typeface="Calibri" pitchFamily="34" charset="0"/>
-                <a:ea typeface="Calibri" pitchFamily="34" charset="-122"/>
-                <a:cs typeface="Calibri" pitchFamily="34" charset="-120"/>
-              </a:rPr>
-              <a:t>CUÁNTOS HAY</a:t>
-            </a:r>
-            <a:endParaRPr lang="en-US" sz="1000" dirty="0"/>
-          </a:p>
-        </p:txBody>
-      </p:sp>
-      <p:sp>
-        <p:nvSpPr>
-          <p:cNvPr id="23" name="Text 20"/>
-          <p:cNvSpPr txBox="1"/>
-          <p:nvPr/>
-        </p:nvSpPr>
-        <p:spPr>
-          <a:xfrm>
-            <a:off x="8229600" y="2862072"/>
-            <a:ext cx="3246120" cy="566928"/>
-          </a:xfrm>
-          <a:prstGeom prst="rect">
-            <a:avLst/>
-          </a:prstGeom>
-          <a:noFill/>
-          <a:ln/>
-        </p:spPr>
-        <p:txBody>
-          <a:bodyPr wrap="square" lIns="0" tIns="0" rIns="0" bIns="0" rtlCol="0" anchor="t"/>
-          <a:lstStyle/>
-          <a:p>
-            <a:pPr indent="0" marL="0">
-              <a:buNone/>
-            </a:pPr>
-            <a:r>
-              <a:rPr lang="en-US" sz="1150" dirty="0">
-                <a:solidFill>
-                  <a:srgbClr val="2E2119"/>
-                </a:solidFill>
-                <a:latin typeface="Calibri" pitchFamily="34" charset="0"/>
-                <a:ea typeface="Calibri" pitchFamily="34" charset="-122"/>
-                <a:cs typeface="Calibri" pitchFamily="34" charset="-120"/>
-              </a:rPr>
-              <a:t>≈ 650 pisos de estudiantes (suelo verificable)</a:t>
-            </a:r>
-            <a:endParaRPr lang="en-US" sz="1150" dirty="0"/>
-          </a:p>
-        </p:txBody>
-      </p:sp>
-      <p:sp>
-        <p:nvSpPr>
-          <p:cNvPr id="24" name="Shape 21"/>
-          <p:cNvSpPr/>
-          <p:nvPr/>
-        </p:nvSpPr>
-        <p:spPr>
-          <a:xfrm>
-            <a:off x="548640" y="3657600"/>
-            <a:ext cx="5349240" cy="1417320"/>
-          </a:xfrm>
-          <a:prstGeom prst="roundRect">
-            <a:avLst>
-              <a:gd name="adj" fmla="val 7742"/>
+              <a:gd name="adj" fmla="val 6667"/>
             </a:avLst>
           </a:prstGeom>
           <a:solidFill>
@@ -10869,69 +12149,50 @@
       </p:sp>
       <p:sp>
         <p:nvSpPr>
-          <p:cNvPr id="25" name="Text 22"/>
-          <p:cNvSpPr txBox="1"/>
-          <p:nvPr/>
-        </p:nvSpPr>
-        <p:spPr>
-          <a:xfrm>
-            <a:off x="548640" y="3767328"/>
-            <a:ext cx="5349240" cy="685800"/>
-          </a:xfrm>
-          <a:prstGeom prst="rect">
-            <a:avLst/>
-          </a:prstGeom>
-          <a:noFill/>
-          <a:ln/>
-        </p:spPr>
-        <p:txBody>
-          <a:bodyPr wrap="square" lIns="0" tIns="0" rIns="0" bIns="0" rtlCol="0" anchor="ctr"/>
-          <a:lstStyle/>
-          <a:p>
-            <a:pPr algn="ctr" indent="0" marL="0">
-              <a:buNone/>
-            </a:pPr>
-            <a:r>
-              <a:rPr lang="en-US" sz="3400" b="1" dirty="0">
+          <p:cNvPr id="16" name="Text 13"/>
+          <p:cNvSpPr txBox="1"/>
+          <p:nvPr/>
+        </p:nvSpPr>
+        <p:spPr>
+          <a:xfrm>
+            <a:off x="6720840" y="4279392"/>
+            <a:ext cx="4480560" cy="1143000"/>
+          </a:xfrm>
+          <a:prstGeom prst="rect">
+            <a:avLst/>
+          </a:prstGeom>
+          <a:noFill/>
+          <a:ln/>
+        </p:spPr>
+        <p:txBody>
+          <a:bodyPr wrap="square" lIns="0" tIns="0" rIns="0" bIns="0" rtlCol="0" anchor="t"/>
+          <a:lstStyle/>
+          <a:p>
+            <a:pPr indent="0" marL="0">
+              <a:spcAft>
+                <a:spcPts val="400"/>
+              </a:spcAft>
+              <a:buNone/>
+            </a:pPr>
+            <a:r>
+              <a:rPr lang="en-US" sz="1100" b="1" dirty="0">
                 <a:solidFill>
                   <a:srgbClr val="D9A441"/>
                 </a:solidFill>
-                <a:latin typeface="Cambria" pitchFamily="34" charset="0"/>
-                <a:ea typeface="Cambria" pitchFamily="34" charset="-122"/>
-                <a:cs typeface="Cambria" pitchFamily="34" charset="-120"/>
-              </a:rPr>
-              <a:t>0 €</a:t>
-            </a:r>
-            <a:endParaRPr lang="en-US" sz="3400" dirty="0"/>
-          </a:p>
-        </p:txBody>
-      </p:sp>
-      <p:sp>
-        <p:nvSpPr>
-          <p:cNvPr id="26" name="Text 23"/>
-          <p:cNvSpPr txBox="1"/>
-          <p:nvPr/>
-        </p:nvSpPr>
-        <p:spPr>
-          <a:xfrm>
-            <a:off x="777240" y="4434840"/>
-            <a:ext cx="4892040" cy="502920"/>
-          </a:xfrm>
-          <a:prstGeom prst="rect">
-            <a:avLst/>
-          </a:prstGeom>
-          <a:noFill/>
-          <a:ln/>
-        </p:spPr>
-        <p:txBody>
-          <a:bodyPr wrap="square" lIns="0" tIns="0" rIns="0" bIns="0" rtlCol="0" anchor="ctr"/>
-          <a:lstStyle/>
-          <a:p>
-            <a:pPr algn="ctr" indent="0" marL="0">
-              <a:buNone/>
-            </a:pPr>
-            <a:r>
-              <a:rPr lang="en-US" sz="1150" dirty="0">
+                <a:latin typeface="Calibri" pitchFamily="34" charset="0"/>
+                <a:ea typeface="Calibri" pitchFamily="34" charset="-122"/>
+                <a:cs typeface="Calibri" pitchFamily="34" charset="-120"/>
+              </a:rPr>
+              <a:t>Esto es exactamente History:  </a:t>
+            </a:r>
+            <a:endParaRPr lang="en-US" sz="1100" dirty="0"/>
+          </a:p>
+          <a:p>
+            <a:pPr indent="0" marL="0">
+              <a:buNone/>
+            </a:pPr>
+            <a:r>
+              <a:rPr lang="en-US" sz="1100" dirty="0">
                 <a:solidFill>
                   <a:srgbClr val="FFFFFF"/>
                 </a:solidFill>
@@ -10939,26 +12200,26 @@
                 <a:ea typeface="Calibri" pitchFamily="34" charset="-122"/>
                 <a:cs typeface="Calibri" pitchFamily="34" charset="-120"/>
               </a:rPr>
-              <a:t>sin monetización — el objetivo es adopción real, no ingresos</a:t>
-            </a:r>
-            <a:endParaRPr lang="en-US" sz="1150" dirty="0"/>
-          </a:p>
-        </p:txBody>
-      </p:sp>
-      <p:sp>
-        <p:nvSpPr>
-          <p:cNvPr id="27" name="Shape 24"/>
+              <a:t>quién compró qué y quién debe a quién, resuelto sin depender de que alguien lo recuerde o lo apunte a mano.</a:t>
+            </a:r>
+            <a:endParaRPr lang="en-US" sz="1100" dirty="0"/>
+          </a:p>
+        </p:txBody>
+      </p:sp>
+      <p:sp>
+        <p:nvSpPr>
+          <p:cNvPr id="17" name="Shape 14"/>
           <p:cNvSpPr/>
           <p:nvPr/>
         </p:nvSpPr>
         <p:spPr>
           <a:xfrm>
-            <a:off x="6035040" y="3657600"/>
-            <a:ext cx="5577840" cy="1417320"/>
+            <a:off x="548640" y="5806440"/>
+            <a:ext cx="11064240" cy="777240"/>
           </a:xfrm>
           <a:prstGeom prst="roundRect">
             <a:avLst>
-              <a:gd name="adj" fmla="val 6452"/>
+              <a:gd name="adj" fmla="val 11765"/>
             </a:avLst>
           </a:prstGeom>
           <a:solidFill>
@@ -10974,14 +12235,14 @@
       </p:sp>
       <p:sp>
         <p:nvSpPr>
-          <p:cNvPr id="28" name="Text 25"/>
-          <p:cNvSpPr txBox="1"/>
-          <p:nvPr/>
-        </p:nvSpPr>
-        <p:spPr>
-          <a:xfrm>
-            <a:off x="6263640" y="3767328"/>
-            <a:ext cx="5120640" cy="1188720"/>
+          <p:cNvPr id="18" name="Text 15"/>
+          <p:cNvSpPr txBox="1"/>
+          <p:nvPr/>
+        </p:nvSpPr>
+        <p:spPr>
+          <a:xfrm>
+            <a:off x="777240" y="5806440"/>
+            <a:ext cx="10607040" cy="777240"/>
           </a:xfrm>
           <a:prstGeom prst="rect">
             <a:avLst/>
@@ -10997,7 +12258,21 @@
               <a:buNone/>
             </a:pPr>
             <a:r>
-              <a:rPr lang="en-US" sz="1150" i="1" dirty="0">
+              <a:rPr lang="en-US" sz="1100" b="1" dirty="0">
+                <a:solidFill>
+                  <a:srgbClr val="C9682B"/>
+                </a:solidFill>
+                <a:latin typeface="Calibri" pitchFamily="34" charset="0"/>
+                <a:ea typeface="Calibri" pitchFamily="34" charset="-122"/>
+                <a:cs typeface="Calibri" pitchFamily="34" charset="-120"/>
+              </a:rPr>
+              <a:t>Ya resuelto en P1, gratis:  </a:t>
+            </a:r>
+            <a:pPr indent="0" marL="0">
+              <a:buNone/>
+            </a:pPr>
+            <a:r>
+              <a:rPr lang="en-US" sz="1100" dirty="0">
                 <a:solidFill>
                   <a:srgbClr val="2E2119"/>
                 </a:solidFill>
@@ -11005,48 +12280,9 @@
                 <a:ea typeface="Calibri" pitchFamily="34" charset="-122"/>
                 <a:cs typeface="Calibri" pitchFamily="34" charset="-120"/>
               </a:rPr>
-              <a:t>Lectura honesta: el backend en Render "duerme" sin uso. Sigue habiendo un reto, pero ya no es económico — es conseguir que la gente use algo nuevo en vez de seguir con WhatsApp o papel, que ya conocen.</a:t>
-            </a:r>
-            <a:endParaRPr lang="en-US" sz="1150" dirty="0"/>
-          </a:p>
-        </p:txBody>
-      </p:sp>
-      <p:sp>
-        <p:nvSpPr>
-          <p:cNvPr id="29" name="Text 26"/>
-          <p:cNvSpPr txBox="1"/>
-          <p:nvPr/>
-        </p:nvSpPr>
-        <p:spPr>
-          <a:xfrm>
-            <a:off x="548640" y="5349240"/>
-            <a:ext cx="11094415" cy="274320"/>
-          </a:xfrm>
-          <a:prstGeom prst="rect">
-            <a:avLst/>
-          </a:prstGeom>
-          <a:noFill/>
-          <a:ln/>
-        </p:spPr>
-        <p:txBody>
-          <a:bodyPr wrap="square" lIns="0" tIns="0" rIns="0" bIns="0" rtlCol="0" anchor="ctr"/>
-          <a:lstStyle/>
-          <a:p>
-            <a:pPr indent="0" marL="0">
-              <a:buNone/>
-            </a:pPr>
-            <a:r>
-              <a:rPr lang="en-US" sz="1000" i="1" dirty="0">
-                <a:solidFill>
-                  <a:srgbClr val="8A7A6D"/>
-                </a:solidFill>
-                <a:latin typeface="Calibri" pitchFamily="34" charset="0"/>
-                <a:ea typeface="Calibri" pitchFamily="34" charset="-122"/>
-                <a:cs typeface="Calibri" pitchFamily="34" charset="-120"/>
-              </a:rPr>
-              <a:t>Decisión explícita (17/09): no se cobra nada a quien use la app, ni se adelanta dinero propio en hosting — coste fijo 0€, siempre.</a:t>
-            </a:r>
-            <a:endParaRPr lang="en-US" sz="1000" dirty="0"/>
+              <a:t>"Pois supoño que cando algo se acabe ninguén avise" — se resuelve solo con que Fridge sea una vista compartida: marcar "se acabó" ya avisa a todo el piso, sin lógica extra ni contar unidades.</a:t>
+            </a:r>
+            <a:endParaRPr lang="en-US" sz="1100" dirty="0"/>
           </a:p>
         </p:txBody>
       </p:sp>

--- a/docs/larder-presentacion.pptx
+++ b/docs/larder-presentacion.pptx
@@ -2014,7 +2014,7 @@
     <p:bg>
       <p:bgPr>
         <a:solidFill>
-          <a:srgbClr val="2E2119"/>
+          <a:srgbClr val="26402C"/>
         </a:solidFill>
       </p:bgPr>
     </p:bg>
@@ -2047,7 +2047,7 @@
             <a:avLst/>
           </a:prstGeom>
           <a:solidFill>
-            <a:srgbClr val="C9682B"/>
+            <a:srgbClr val="C6821E"/>
           </a:solidFill>
           <a:ln/>
         </p:spPr>
@@ -2142,7 +2142,7 @@
             <a:r>
               <a:rPr lang="en-US" sz="1700" i="1" dirty="0">
                 <a:solidFill>
-                  <a:srgbClr val="D9A441"/>
+                  <a:srgbClr val="E3A94A"/>
                 </a:solidFill>
                 <a:latin typeface="Calibri" pitchFamily="34" charset="0"/>
                 <a:ea typeface="Calibri" pitchFamily="34" charset="-122"/>
@@ -2171,7 +2171,7 @@
             </a:avLst>
           </a:prstGeom>
           <a:solidFill>
-            <a:srgbClr val="3D2E23"/>
+            <a:srgbClr val="33513A"/>
           </a:solidFill>
           <a:ln/>
         </p:spPr>
@@ -2220,7 +2220,7 @@
             <a:r>
               <a:rPr lang="en-US" sz="1300" dirty="0">
                 <a:solidFill>
-                  <a:srgbClr val="D8CBBE"/>
+                  <a:srgbClr val="C7D0C2"/>
                 </a:solidFill>
                 <a:latin typeface="Calibri" pitchFamily="34" charset="0"/>
                 <a:ea typeface="Calibri" pitchFamily="34" charset="-122"/>
@@ -2279,7 +2279,7 @@
             <a:avLst/>
           </a:prstGeom>
           <a:solidFill>
-            <a:srgbClr val="C9682B"/>
+            <a:srgbClr val="C6821E"/>
           </a:solidFill>
           <a:ln/>
         </p:spPr>
@@ -2335,7 +2335,7 @@
             <a:r>
               <a:rPr lang="en-US" sz="1200" b="1" spc="200" kern="0" dirty="0">
                 <a:solidFill>
-                  <a:srgbClr val="C9682B"/>
+                  <a:srgbClr val="C6821E"/>
                 </a:solidFill>
                 <a:latin typeface="Calibri" pitchFamily="34" charset="0"/>
                 <a:ea typeface="Calibri" pitchFamily="34" charset="-122"/>
@@ -2374,7 +2374,7 @@
             <a:r>
               <a:rPr lang="en-US" sz="2800" b="1" dirty="0">
                 <a:solidFill>
-                  <a:srgbClr val="2E2119"/>
+                  <a:srgbClr val="26402C"/>
                 </a:solidFill>
                 <a:latin typeface="Cambria" pitchFamily="34" charset="0"/>
                 <a:ea typeface="Cambria" pitchFamily="34" charset="-122"/>
@@ -2403,7 +2403,7 @@
             </a:avLst>
           </a:prstGeom>
           <a:solidFill>
-            <a:srgbClr val="F4E9DA"/>
+            <a:srgbClr val="F2EFE7"/>
           </a:solidFill>
           <a:ln/>
           <a:effectLst>
@@ -2442,7 +2442,7 @@
             <a:r>
               <a:rPr lang="en-US" sz="1100" b="1" spc="100" kern="0" dirty="0">
                 <a:solidFill>
-                  <a:srgbClr val="C9682B"/>
+                  <a:srgbClr val="C6821E"/>
                 </a:solidFill>
                 <a:latin typeface="Calibri" pitchFamily="34" charset="0"/>
                 <a:ea typeface="Calibri" pitchFamily="34" charset="-122"/>
@@ -2481,7 +2481,7 @@
             <a:r>
               <a:rPr lang="en-US" sz="3400" b="1" dirty="0">
                 <a:solidFill>
-                  <a:srgbClr val="2E2119"/>
+                  <a:srgbClr val="26402C"/>
                 </a:solidFill>
                 <a:latin typeface="Cambria" pitchFamily="34" charset="0"/>
                 <a:ea typeface="Cambria" pitchFamily="34" charset="-122"/>
@@ -2520,7 +2520,7 @@
             <a:r>
               <a:rPr lang="en-US" sz="1050" dirty="0">
                 <a:solidFill>
-                  <a:srgbClr val="8A7A6D"/>
+                  <a:srgbClr val="5B6559"/>
                 </a:solidFill>
                 <a:latin typeface="Calibri" pitchFamily="34" charset="0"/>
                 <a:ea typeface="Calibri" pitchFamily="34" charset="-122"/>
@@ -2549,7 +2549,7 @@
             </a:avLst>
           </a:prstGeom>
           <a:solidFill>
-            <a:srgbClr val="2E2119"/>
+            <a:srgbClr val="26402C"/>
           </a:solidFill>
           <a:ln/>
           <a:effectLst>
@@ -2588,7 +2588,7 @@
             <a:r>
               <a:rPr lang="en-US" sz="1100" b="1" spc="100" kern="0" dirty="0">
                 <a:solidFill>
-                  <a:srgbClr val="D9A441"/>
+                  <a:srgbClr val="E3A94A"/>
                 </a:solidFill>
                 <a:latin typeface="Calibri" pitchFamily="34" charset="0"/>
                 <a:ea typeface="Calibri" pitchFamily="34" charset="-122"/>
@@ -2666,7 +2666,7 @@
             <a:r>
               <a:rPr lang="en-US" sz="1050" dirty="0">
                 <a:solidFill>
-                  <a:srgbClr val="D8CBBE"/>
+                  <a:srgbClr val="C7D0C2"/>
                 </a:solidFill>
                 <a:latin typeface="Calibri" pitchFamily="34" charset="0"/>
                 <a:ea typeface="Calibri" pitchFamily="34" charset="-122"/>
@@ -2695,7 +2695,7 @@
             </a:avLst>
           </a:prstGeom>
           <a:solidFill>
-            <a:srgbClr val="F4E9DA"/>
+            <a:srgbClr val="F2EFE7"/>
           </a:solidFill>
           <a:ln/>
           <a:effectLst>
@@ -2734,7 +2734,7 @@
             <a:r>
               <a:rPr lang="en-US" sz="1100" b="1" spc="100" kern="0" dirty="0">
                 <a:solidFill>
-                  <a:srgbClr val="C9682B"/>
+                  <a:srgbClr val="C6821E"/>
                 </a:solidFill>
                 <a:latin typeface="Calibri" pitchFamily="34" charset="0"/>
                 <a:ea typeface="Calibri" pitchFamily="34" charset="-122"/>
@@ -2773,7 +2773,7 @@
             <a:r>
               <a:rPr lang="en-US" sz="3400" b="1" dirty="0">
                 <a:solidFill>
-                  <a:srgbClr val="2E2119"/>
+                  <a:srgbClr val="26402C"/>
                 </a:solidFill>
                 <a:latin typeface="Cambria" pitchFamily="34" charset="0"/>
                 <a:ea typeface="Cambria" pitchFamily="34" charset="-122"/>
@@ -2812,7 +2812,7 @@
             <a:r>
               <a:rPr lang="en-US" sz="1050" dirty="0">
                 <a:solidFill>
-                  <a:srgbClr val="8A7A6D"/>
+                  <a:srgbClr val="5B6559"/>
                 </a:solidFill>
                 <a:latin typeface="Calibri" pitchFamily="34" charset="0"/>
                 <a:ea typeface="Calibri" pitchFamily="34" charset="-122"/>
@@ -2841,11 +2841,11 @@
             </a:avLst>
           </a:prstGeom>
           <a:solidFill>
-            <a:srgbClr val="F6E9D8"/>
+            <a:srgbClr val="F0E0BE"/>
           </a:solidFill>
           <a:ln w="12700">
             <a:solidFill>
-              <a:srgbClr val="C9682B"/>
+              <a:srgbClr val="C6821E"/>
             </a:solidFill>
             <a:prstDash val="solid"/>
           </a:ln>
@@ -2878,7 +2878,7 @@
             <a:r>
               <a:rPr lang="en-US" sz="1200" b="1" dirty="0">
                 <a:solidFill>
-                  <a:srgbClr val="C9682B"/>
+                  <a:srgbClr val="C6821E"/>
                 </a:solidFill>
                 <a:latin typeface="Calibri" pitchFamily="34" charset="0"/>
                 <a:ea typeface="Calibri" pitchFamily="34" charset="-122"/>
@@ -2898,7 +2898,7 @@
             <a:r>
               <a:rPr lang="en-US" sz="1200" dirty="0">
                 <a:solidFill>
-                  <a:srgbClr val="2E2119"/>
+                  <a:srgbClr val="26402C"/>
                 </a:solidFill>
                 <a:latin typeface="Calibri" pitchFamily="34" charset="0"/>
                 <a:ea typeface="Calibri" pitchFamily="34" charset="-122"/>
@@ -2915,7 +2915,7 @@
             <a:r>
               <a:rPr lang="en-US" sz="1200" b="1" dirty="0">
                 <a:solidFill>
-                  <a:srgbClr val="C9682B"/>
+                  <a:srgbClr val="C6821E"/>
                 </a:solidFill>
                 <a:latin typeface="Calibri" pitchFamily="34" charset="0"/>
                 <a:ea typeface="Calibri" pitchFamily="34" charset="-122"/>
@@ -2932,7 +2932,7 @@
             <a:r>
               <a:rPr lang="en-US" sz="1200" dirty="0">
                 <a:solidFill>
-                  <a:srgbClr val="2E2119"/>
+                  <a:srgbClr val="26402C"/>
                 </a:solidFill>
                 <a:latin typeface="Calibri" pitchFamily="34" charset="0"/>
                 <a:ea typeface="Calibri" pitchFamily="34" charset="-122"/>
@@ -2991,7 +2991,7 @@
             <a:avLst/>
           </a:prstGeom>
           <a:solidFill>
-            <a:srgbClr val="C9682B"/>
+            <a:srgbClr val="C6821E"/>
           </a:solidFill>
           <a:ln/>
         </p:spPr>
@@ -3047,7 +3047,7 @@
             <a:r>
               <a:rPr lang="en-US" sz="1200" b="1" spc="200" kern="0" dirty="0">
                 <a:solidFill>
-                  <a:srgbClr val="C9682B"/>
+                  <a:srgbClr val="C6821E"/>
                 </a:solidFill>
                 <a:latin typeface="Calibri" pitchFamily="34" charset="0"/>
                 <a:ea typeface="Calibri" pitchFamily="34" charset="-122"/>
@@ -3086,7 +3086,7 @@
             <a:r>
               <a:rPr lang="en-US" sz="2800" b="1" dirty="0">
                 <a:solidFill>
-                  <a:srgbClr val="2E2119"/>
+                  <a:srgbClr val="26402C"/>
                 </a:solidFill>
                 <a:latin typeface="Cambria" pitchFamily="34" charset="0"/>
                 <a:ea typeface="Cambria" pitchFamily="34" charset="-122"/>
@@ -3115,7 +3115,7 @@
             </a:avLst>
           </a:prstGeom>
           <a:solidFill>
-            <a:srgbClr val="F4E9DA"/>
+            <a:srgbClr val="F2EFE7"/>
           </a:solidFill>
           <a:ln/>
           <a:effectLst>
@@ -3154,7 +3154,7 @@
             <a:r>
               <a:rPr lang="en-US" sz="1000" b="1" spc="100" kern="0" dirty="0">
                 <a:solidFill>
-                  <a:srgbClr val="C9682B"/>
+                  <a:srgbClr val="C6821E"/>
                 </a:solidFill>
                 <a:latin typeface="Calibri" pitchFamily="34" charset="0"/>
                 <a:ea typeface="Calibri" pitchFamily="34" charset="-122"/>
@@ -3193,7 +3193,7 @@
             <a:r>
               <a:rPr lang="en-US" sz="1150" dirty="0">
                 <a:solidFill>
-                  <a:srgbClr val="2E2119"/>
+                  <a:srgbClr val="26402C"/>
                 </a:solidFill>
                 <a:latin typeface="Calibri" pitchFamily="34" charset="0"/>
                 <a:ea typeface="Calibri" pitchFamily="34" charset="-122"/>
@@ -3222,7 +3222,7 @@
             </a:avLst>
           </a:prstGeom>
           <a:solidFill>
-            <a:srgbClr val="F4E9DA"/>
+            <a:srgbClr val="F2EFE7"/>
           </a:solidFill>
           <a:ln/>
           <a:effectLst>
@@ -3261,7 +3261,7 @@
             <a:r>
               <a:rPr lang="en-US" sz="1000" b="1" spc="100" kern="0" dirty="0">
                 <a:solidFill>
-                  <a:srgbClr val="C9682B"/>
+                  <a:srgbClr val="C6821E"/>
                 </a:solidFill>
                 <a:latin typeface="Calibri" pitchFamily="34" charset="0"/>
                 <a:ea typeface="Calibri" pitchFamily="34" charset="-122"/>
@@ -3300,7 +3300,7 @@
             <a:r>
               <a:rPr lang="en-US" sz="1150" dirty="0">
                 <a:solidFill>
-                  <a:srgbClr val="2E2119"/>
+                  <a:srgbClr val="26402C"/>
                 </a:solidFill>
                 <a:latin typeface="Calibri" pitchFamily="34" charset="0"/>
                 <a:ea typeface="Calibri" pitchFamily="34" charset="-122"/>
@@ -3329,7 +3329,7 @@
             </a:avLst>
           </a:prstGeom>
           <a:solidFill>
-            <a:srgbClr val="F4E9DA"/>
+            <a:srgbClr val="F2EFE7"/>
           </a:solidFill>
           <a:ln/>
           <a:effectLst>
@@ -3368,7 +3368,7 @@
             <a:r>
               <a:rPr lang="en-US" sz="1000" b="1" spc="100" kern="0" dirty="0">
                 <a:solidFill>
-                  <a:srgbClr val="C9682B"/>
+                  <a:srgbClr val="C6821E"/>
                 </a:solidFill>
                 <a:latin typeface="Calibri" pitchFamily="34" charset="0"/>
                 <a:ea typeface="Calibri" pitchFamily="34" charset="-122"/>
@@ -3407,7 +3407,7 @@
             <a:r>
               <a:rPr lang="en-US" sz="1150" dirty="0">
                 <a:solidFill>
-                  <a:srgbClr val="2E2119"/>
+                  <a:srgbClr val="26402C"/>
                 </a:solidFill>
                 <a:latin typeface="Calibri" pitchFamily="34" charset="0"/>
                 <a:ea typeface="Calibri" pitchFamily="34" charset="-122"/>
@@ -3436,7 +3436,7 @@
             </a:avLst>
           </a:prstGeom>
           <a:solidFill>
-            <a:srgbClr val="F4E9DA"/>
+            <a:srgbClr val="F2EFE7"/>
           </a:solidFill>
           <a:ln/>
           <a:effectLst>
@@ -3475,7 +3475,7 @@
             <a:r>
               <a:rPr lang="en-US" sz="1000" b="1" spc="100" kern="0" dirty="0">
                 <a:solidFill>
-                  <a:srgbClr val="C9682B"/>
+                  <a:srgbClr val="C6821E"/>
                 </a:solidFill>
                 <a:latin typeface="Calibri" pitchFamily="34" charset="0"/>
                 <a:ea typeface="Calibri" pitchFamily="34" charset="-122"/>
@@ -3514,7 +3514,7 @@
             <a:r>
               <a:rPr lang="en-US" sz="1150" dirty="0">
                 <a:solidFill>
-                  <a:srgbClr val="2E2119"/>
+                  <a:srgbClr val="26402C"/>
                 </a:solidFill>
                 <a:latin typeface="Calibri" pitchFamily="34" charset="0"/>
                 <a:ea typeface="Calibri" pitchFamily="34" charset="-122"/>
@@ -3543,7 +3543,7 @@
             </a:avLst>
           </a:prstGeom>
           <a:solidFill>
-            <a:srgbClr val="F4E9DA"/>
+            <a:srgbClr val="F2EFE7"/>
           </a:solidFill>
           <a:ln/>
           <a:effectLst>
@@ -3582,7 +3582,7 @@
             <a:r>
               <a:rPr lang="en-US" sz="1000" b="1" spc="100" kern="0" dirty="0">
                 <a:solidFill>
-                  <a:srgbClr val="C9682B"/>
+                  <a:srgbClr val="C6821E"/>
                 </a:solidFill>
                 <a:latin typeface="Calibri" pitchFamily="34" charset="0"/>
                 <a:ea typeface="Calibri" pitchFamily="34" charset="-122"/>
@@ -3621,7 +3621,7 @@
             <a:r>
               <a:rPr lang="en-US" sz="1150" dirty="0">
                 <a:solidFill>
-                  <a:srgbClr val="2E2119"/>
+                  <a:srgbClr val="26402C"/>
                 </a:solidFill>
                 <a:latin typeface="Calibri" pitchFamily="34" charset="0"/>
                 <a:ea typeface="Calibri" pitchFamily="34" charset="-122"/>
@@ -3650,7 +3650,7 @@
             </a:avLst>
           </a:prstGeom>
           <a:solidFill>
-            <a:srgbClr val="F4E9DA"/>
+            <a:srgbClr val="F2EFE7"/>
           </a:solidFill>
           <a:ln/>
           <a:effectLst>
@@ -3689,7 +3689,7 @@
             <a:r>
               <a:rPr lang="en-US" sz="1000" b="1" spc="100" kern="0" dirty="0">
                 <a:solidFill>
-                  <a:srgbClr val="C9682B"/>
+                  <a:srgbClr val="C6821E"/>
                 </a:solidFill>
                 <a:latin typeface="Calibri" pitchFamily="34" charset="0"/>
                 <a:ea typeface="Calibri" pitchFamily="34" charset="-122"/>
@@ -3728,7 +3728,7 @@
             <a:r>
               <a:rPr lang="en-US" sz="1150" dirty="0">
                 <a:solidFill>
-                  <a:srgbClr val="2E2119"/>
+                  <a:srgbClr val="26402C"/>
                 </a:solidFill>
                 <a:latin typeface="Calibri" pitchFamily="34" charset="0"/>
                 <a:ea typeface="Calibri" pitchFamily="34" charset="-122"/>
@@ -3757,7 +3757,7 @@
             </a:avLst>
           </a:prstGeom>
           <a:solidFill>
-            <a:srgbClr val="2E2119"/>
+            <a:srgbClr val="26402C"/>
           </a:solidFill>
           <a:ln/>
         </p:spPr>
@@ -3789,7 +3789,7 @@
             <a:r>
               <a:rPr lang="en-US" sz="3400" b="1" dirty="0">
                 <a:solidFill>
-                  <a:srgbClr val="D9A441"/>
+                  <a:srgbClr val="E3A94A"/>
                 </a:solidFill>
                 <a:latin typeface="Cambria" pitchFamily="34" charset="0"/>
                 <a:ea typeface="Cambria" pitchFamily="34" charset="-122"/>
@@ -3857,11 +3857,11 @@
             </a:avLst>
           </a:prstGeom>
           <a:solidFill>
-            <a:srgbClr val="F6E9D8"/>
+            <a:srgbClr val="F0E0BE"/>
           </a:solidFill>
           <a:ln w="12700">
             <a:solidFill>
-              <a:srgbClr val="C9682B"/>
+              <a:srgbClr val="C6821E"/>
             </a:solidFill>
             <a:prstDash val="solid"/>
           </a:ln>
@@ -3894,7 +3894,7 @@
             <a:r>
               <a:rPr lang="en-US" sz="1150" i="1" dirty="0">
                 <a:solidFill>
-                  <a:srgbClr val="2E2119"/>
+                  <a:srgbClr val="26402C"/>
                 </a:solidFill>
                 <a:latin typeface="Calibri" pitchFamily="34" charset="0"/>
                 <a:ea typeface="Calibri" pitchFamily="34" charset="-122"/>
@@ -3933,7 +3933,7 @@
             <a:r>
               <a:rPr lang="en-US" sz="1000" i="1" dirty="0">
                 <a:solidFill>
-                  <a:srgbClr val="8A7A6D"/>
+                  <a:srgbClr val="5B6559"/>
                 </a:solidFill>
                 <a:latin typeface="Calibri" pitchFamily="34" charset="0"/>
                 <a:ea typeface="Calibri" pitchFamily="34" charset="-122"/>
@@ -3992,7 +3992,7 @@
             <a:avLst/>
           </a:prstGeom>
           <a:solidFill>
-            <a:srgbClr val="C9682B"/>
+            <a:srgbClr val="C6821E"/>
           </a:solidFill>
           <a:ln/>
         </p:spPr>
@@ -4048,7 +4048,7 @@
             <a:r>
               <a:rPr lang="en-US" sz="1200" b="1" spc="200" kern="0" dirty="0">
                 <a:solidFill>
-                  <a:srgbClr val="C9682B"/>
+                  <a:srgbClr val="C6821E"/>
                 </a:solidFill>
                 <a:latin typeface="Calibri" pitchFamily="34" charset="0"/>
                 <a:ea typeface="Calibri" pitchFamily="34" charset="-122"/>
@@ -4087,7 +4087,7 @@
             <a:r>
               <a:rPr lang="en-US" sz="2800" b="1" dirty="0">
                 <a:solidFill>
-                  <a:srgbClr val="2E2119"/>
+                  <a:srgbClr val="26402C"/>
                 </a:solidFill>
                 <a:latin typeface="Cambria" pitchFamily="34" charset="0"/>
                 <a:ea typeface="Cambria" pitchFamily="34" charset="-122"/>
@@ -4116,7 +4116,7 @@
             </a:avLst>
           </a:prstGeom>
           <a:solidFill>
-            <a:srgbClr val="F6E4D3"/>
+            <a:srgbClr val="ECD9B8"/>
           </a:solidFill>
           <a:ln/>
           <a:effectLst>
@@ -4145,7 +4145,7 @@
             </a:avLst>
           </a:prstGeom>
           <a:solidFill>
-            <a:srgbClr val="C9682B"/>
+            <a:srgbClr val="C6821E"/>
           </a:solidFill>
           <a:ln/>
         </p:spPr>
@@ -4220,7 +4220,7 @@
             <a:r>
               <a:rPr lang="en-US" sz="1000" dirty="0">
                 <a:solidFill>
-                  <a:srgbClr val="2E2119"/>
+                  <a:srgbClr val="26402C"/>
                 </a:solidFill>
                 <a:latin typeface="Calibri" pitchFamily="34" charset="0"/>
                 <a:ea typeface="Calibri" pitchFamily="34" charset="-122"/>
@@ -4241,7 +4241,7 @@
             <a:r>
               <a:rPr lang="en-US" sz="1000" dirty="0">
                 <a:solidFill>
-                  <a:srgbClr val="2E2119"/>
+                  <a:srgbClr val="26402C"/>
                 </a:solidFill>
                 <a:latin typeface="Calibri" pitchFamily="34" charset="0"/>
                 <a:ea typeface="Calibri" pitchFamily="34" charset="-122"/>
@@ -4262,7 +4262,7 @@
             <a:r>
               <a:rPr lang="en-US" sz="1000" dirty="0">
                 <a:solidFill>
-                  <a:srgbClr val="2E2119"/>
+                  <a:srgbClr val="26402C"/>
                 </a:solidFill>
                 <a:latin typeface="Calibri" pitchFamily="34" charset="0"/>
                 <a:ea typeface="Calibri" pitchFamily="34" charset="-122"/>
@@ -4283,7 +4283,7 @@
             <a:r>
               <a:rPr lang="en-US" sz="1000" dirty="0">
                 <a:solidFill>
-                  <a:srgbClr val="2E2119"/>
+                  <a:srgbClr val="26402C"/>
                 </a:solidFill>
                 <a:latin typeface="Calibri" pitchFamily="34" charset="0"/>
                 <a:ea typeface="Calibri" pitchFamily="34" charset="-122"/>
@@ -4304,7 +4304,7 @@
             <a:r>
               <a:rPr lang="en-US" sz="1000" dirty="0">
                 <a:solidFill>
-                  <a:srgbClr val="2E2119"/>
+                  <a:srgbClr val="26402C"/>
                 </a:solidFill>
                 <a:latin typeface="Calibri" pitchFamily="34" charset="0"/>
                 <a:ea typeface="Calibri" pitchFamily="34" charset="-122"/>
@@ -4333,7 +4333,7 @@
             </a:avLst>
           </a:prstGeom>
           <a:solidFill>
-            <a:srgbClr val="F4EFE8"/>
+            <a:srgbClr val="EDEAE1"/>
           </a:solidFill>
           <a:ln/>
           <a:effectLst>
@@ -4362,7 +4362,7 @@
             </a:avLst>
           </a:prstGeom>
           <a:solidFill>
-            <a:srgbClr val="D9A441"/>
+            <a:srgbClr val="E3A94A"/>
           </a:solidFill>
           <a:ln/>
         </p:spPr>
@@ -4437,7 +4437,7 @@
             <a:r>
               <a:rPr lang="en-US" sz="1000" dirty="0">
                 <a:solidFill>
-                  <a:srgbClr val="2E2119"/>
+                  <a:srgbClr val="26402C"/>
                 </a:solidFill>
                 <a:latin typeface="Calibri" pitchFamily="34" charset="0"/>
                 <a:ea typeface="Calibri" pitchFamily="34" charset="-122"/>
@@ -4458,7 +4458,7 @@
             <a:r>
               <a:rPr lang="en-US" sz="1000" dirty="0">
                 <a:solidFill>
-                  <a:srgbClr val="2E2119"/>
+                  <a:srgbClr val="26402C"/>
                 </a:solidFill>
                 <a:latin typeface="Calibri" pitchFamily="34" charset="0"/>
                 <a:ea typeface="Calibri" pitchFamily="34" charset="-122"/>
@@ -4479,7 +4479,7 @@
             <a:r>
               <a:rPr lang="en-US" sz="1000" dirty="0">
                 <a:solidFill>
-                  <a:srgbClr val="2E2119"/>
+                  <a:srgbClr val="26402C"/>
                 </a:solidFill>
                 <a:latin typeface="Calibri" pitchFamily="34" charset="0"/>
                 <a:ea typeface="Calibri" pitchFamily="34" charset="-122"/>
@@ -4508,7 +4508,7 @@
             </a:avLst>
           </a:prstGeom>
           <a:solidFill>
-            <a:srgbClr val="F4EFE8"/>
+            <a:srgbClr val="EDEAE1"/>
           </a:solidFill>
           <a:ln/>
           <a:effectLst>
@@ -4537,7 +4537,7 @@
             </a:avLst>
           </a:prstGeom>
           <a:solidFill>
-            <a:srgbClr val="8A7A6D"/>
+            <a:srgbClr val="5B6559"/>
           </a:solidFill>
           <a:ln/>
         </p:spPr>
@@ -4612,7 +4612,7 @@
             <a:r>
               <a:rPr lang="en-US" sz="1000" dirty="0">
                 <a:solidFill>
-                  <a:srgbClr val="2E2119"/>
+                  <a:srgbClr val="26402C"/>
                 </a:solidFill>
                 <a:latin typeface="Calibri" pitchFamily="34" charset="0"/>
                 <a:ea typeface="Calibri" pitchFamily="34" charset="-122"/>
@@ -4633,7 +4633,7 @@
             <a:r>
               <a:rPr lang="en-US" sz="1000" dirty="0">
                 <a:solidFill>
-                  <a:srgbClr val="2E2119"/>
+                  <a:srgbClr val="26402C"/>
                 </a:solidFill>
                 <a:latin typeface="Calibri" pitchFamily="34" charset="0"/>
                 <a:ea typeface="Calibri" pitchFamily="34" charset="-122"/>
@@ -4654,7 +4654,7 @@
             <a:r>
               <a:rPr lang="en-US" sz="1000" dirty="0">
                 <a:solidFill>
-                  <a:srgbClr val="2E2119"/>
+                  <a:srgbClr val="26402C"/>
                 </a:solidFill>
                 <a:latin typeface="Calibri" pitchFamily="34" charset="0"/>
                 <a:ea typeface="Calibri" pitchFamily="34" charset="-122"/>
@@ -4675,7 +4675,7 @@
             <a:r>
               <a:rPr lang="en-US" sz="1000" dirty="0">
                 <a:solidFill>
-                  <a:srgbClr val="2E2119"/>
+                  <a:srgbClr val="26402C"/>
                 </a:solidFill>
                 <a:latin typeface="Calibri" pitchFamily="34" charset="0"/>
                 <a:ea typeface="Calibri" pitchFamily="34" charset="-122"/>
@@ -4704,7 +4704,7 @@
             </a:avLst>
           </a:prstGeom>
           <a:solidFill>
-            <a:srgbClr val="2E2119"/>
+            <a:srgbClr val="26402C"/>
           </a:solidFill>
           <a:ln/>
         </p:spPr>
@@ -4736,7 +4736,7 @@
             <a:r>
               <a:rPr lang="en-US" sz="1250" i="1" dirty="0">
                 <a:solidFill>
-                  <a:srgbClr val="D9A441"/>
+                  <a:srgbClr val="E3A94A"/>
                 </a:solidFill>
                 <a:latin typeface="Calibri" pitchFamily="34" charset="0"/>
                 <a:ea typeface="Calibri" pitchFamily="34" charset="-122"/>
@@ -4775,7 +4775,7 @@
             <a:r>
               <a:rPr lang="en-US" sz="1100" dirty="0">
                 <a:solidFill>
-                  <a:srgbClr val="D8CBBE"/>
+                  <a:srgbClr val="C7D0C2"/>
                 </a:solidFill>
                 <a:latin typeface="Calibri" pitchFamily="34" charset="0"/>
                 <a:ea typeface="Calibri" pitchFamily="34" charset="-122"/>
@@ -4834,7 +4834,7 @@
             <a:avLst/>
           </a:prstGeom>
           <a:solidFill>
-            <a:srgbClr val="C9682B"/>
+            <a:srgbClr val="C6821E"/>
           </a:solidFill>
           <a:ln/>
         </p:spPr>
@@ -4890,7 +4890,7 @@
             <a:r>
               <a:rPr lang="en-US" sz="1200" b="1" spc="200" kern="0" dirty="0">
                 <a:solidFill>
-                  <a:srgbClr val="C9682B"/>
+                  <a:srgbClr val="C6821E"/>
                 </a:solidFill>
                 <a:latin typeface="Calibri" pitchFamily="34" charset="0"/>
                 <a:ea typeface="Calibri" pitchFamily="34" charset="-122"/>
@@ -4929,7 +4929,7 @@
             <a:r>
               <a:rPr lang="en-US" sz="2800" b="1" dirty="0">
                 <a:solidFill>
-                  <a:srgbClr val="2E2119"/>
+                  <a:srgbClr val="26402C"/>
                 </a:solidFill>
                 <a:latin typeface="Cambria" pitchFamily="34" charset="0"/>
                 <a:ea typeface="Cambria" pitchFamily="34" charset="-122"/>
@@ -4958,7 +4958,7 @@
             </a:avLst>
           </a:prstGeom>
           <a:solidFill>
-            <a:srgbClr val="F4E9DA"/>
+            <a:srgbClr val="F2EFE7"/>
           </a:solidFill>
           <a:ln/>
           <a:effectLst>
@@ -4997,7 +4997,7 @@
             <a:r>
               <a:rPr lang="en-US" sz="1000" b="1" spc="100" kern="0" dirty="0">
                 <a:solidFill>
-                  <a:srgbClr val="C9682B"/>
+                  <a:srgbClr val="C6821E"/>
                 </a:solidFill>
                 <a:latin typeface="Calibri" pitchFamily="34" charset="0"/>
                 <a:ea typeface="Calibri" pitchFamily="34" charset="-122"/>
@@ -5036,7 +5036,7 @@
             <a:r>
               <a:rPr lang="en-US" sz="1100" dirty="0">
                 <a:solidFill>
-                  <a:srgbClr val="2E2119"/>
+                  <a:srgbClr val="26402C"/>
                 </a:solidFill>
                 <a:latin typeface="Calibri" pitchFamily="34" charset="0"/>
                 <a:ea typeface="Calibri" pitchFamily="34" charset="-122"/>
@@ -5065,7 +5065,7 @@
             </a:avLst>
           </a:prstGeom>
           <a:solidFill>
-            <a:srgbClr val="EDE6DC"/>
+            <a:srgbClr val="E3E8DD"/>
           </a:solidFill>
           <a:ln/>
           <a:effectLst>
@@ -5104,7 +5104,7 @@
             <a:r>
               <a:rPr lang="en-US" sz="1000" b="1" spc="100" kern="0" dirty="0">
                 <a:solidFill>
-                  <a:srgbClr val="C9682B"/>
+                  <a:srgbClr val="C6821E"/>
                 </a:solidFill>
                 <a:latin typeface="Calibri" pitchFamily="34" charset="0"/>
                 <a:ea typeface="Calibri" pitchFamily="34" charset="-122"/>
@@ -5143,7 +5143,7 @@
             <a:r>
               <a:rPr lang="en-US" sz="1100" dirty="0">
                 <a:solidFill>
-                  <a:srgbClr val="2E2119"/>
+                  <a:srgbClr val="26402C"/>
                 </a:solidFill>
                 <a:latin typeface="Calibri" pitchFamily="34" charset="0"/>
                 <a:ea typeface="Calibri" pitchFamily="34" charset="-122"/>
@@ -5172,7 +5172,7 @@
             </a:avLst>
           </a:prstGeom>
           <a:solidFill>
-            <a:srgbClr val="F4E9DA"/>
+            <a:srgbClr val="F2EFE7"/>
           </a:solidFill>
           <a:ln/>
           <a:effectLst>
@@ -5211,7 +5211,7 @@
             <a:r>
               <a:rPr lang="en-US" sz="1000" b="1" spc="100" kern="0" dirty="0">
                 <a:solidFill>
-                  <a:srgbClr val="C9682B"/>
+                  <a:srgbClr val="C6821E"/>
                 </a:solidFill>
                 <a:latin typeface="Calibri" pitchFamily="34" charset="0"/>
                 <a:ea typeface="Calibri" pitchFamily="34" charset="-122"/>
@@ -5250,7 +5250,7 @@
             <a:r>
               <a:rPr lang="en-US" sz="1100" dirty="0">
                 <a:solidFill>
-                  <a:srgbClr val="2E2119"/>
+                  <a:srgbClr val="26402C"/>
                 </a:solidFill>
                 <a:latin typeface="Calibri" pitchFamily="34" charset="0"/>
                 <a:ea typeface="Calibri" pitchFamily="34" charset="-122"/>
@@ -5279,7 +5279,7 @@
             </a:avLst>
           </a:prstGeom>
           <a:solidFill>
-            <a:srgbClr val="EDE6DC"/>
+            <a:srgbClr val="E3E8DD"/>
           </a:solidFill>
           <a:ln/>
           <a:effectLst>
@@ -5318,7 +5318,7 @@
             <a:r>
               <a:rPr lang="en-US" sz="1000" b="1" spc="100" kern="0" dirty="0">
                 <a:solidFill>
-                  <a:srgbClr val="C9682B"/>
+                  <a:srgbClr val="C6821E"/>
                 </a:solidFill>
                 <a:latin typeface="Calibri" pitchFamily="34" charset="0"/>
                 <a:ea typeface="Calibri" pitchFamily="34" charset="-122"/>
@@ -5357,7 +5357,7 @@
             <a:r>
               <a:rPr lang="en-US" sz="1100" dirty="0">
                 <a:solidFill>
-                  <a:srgbClr val="2E2119"/>
+                  <a:srgbClr val="26402C"/>
                 </a:solidFill>
                 <a:latin typeface="Calibri" pitchFamily="34" charset="0"/>
                 <a:ea typeface="Calibri" pitchFamily="34" charset="-122"/>
@@ -5386,7 +5386,7 @@
             </a:avLst>
           </a:prstGeom>
           <a:solidFill>
-            <a:srgbClr val="F4E9DA"/>
+            <a:srgbClr val="F2EFE7"/>
           </a:solidFill>
           <a:ln/>
           <a:effectLst>
@@ -5425,7 +5425,7 @@
             <a:r>
               <a:rPr lang="en-US" sz="1000" b="1" spc="100" kern="0" dirty="0">
                 <a:solidFill>
-                  <a:srgbClr val="C9682B"/>
+                  <a:srgbClr val="C6821E"/>
                 </a:solidFill>
                 <a:latin typeface="Calibri" pitchFamily="34" charset="0"/>
                 <a:ea typeface="Calibri" pitchFamily="34" charset="-122"/>
@@ -5464,7 +5464,7 @@
             <a:r>
               <a:rPr lang="en-US" sz="1100" dirty="0">
                 <a:solidFill>
-                  <a:srgbClr val="2E2119"/>
+                  <a:srgbClr val="26402C"/>
                 </a:solidFill>
                 <a:latin typeface="Calibri" pitchFamily="34" charset="0"/>
                 <a:ea typeface="Calibri" pitchFamily="34" charset="-122"/>
@@ -5493,7 +5493,7 @@
             </a:avLst>
           </a:prstGeom>
           <a:solidFill>
-            <a:srgbClr val="EDE6DC"/>
+            <a:srgbClr val="E3E8DD"/>
           </a:solidFill>
           <a:ln/>
           <a:effectLst>
@@ -5532,7 +5532,7 @@
             <a:r>
               <a:rPr lang="en-US" sz="1000" b="1" spc="100" kern="0" dirty="0">
                 <a:solidFill>
-                  <a:srgbClr val="C9682B"/>
+                  <a:srgbClr val="C6821E"/>
                 </a:solidFill>
                 <a:latin typeface="Calibri" pitchFamily="34" charset="0"/>
                 <a:ea typeface="Calibri" pitchFamily="34" charset="-122"/>
@@ -5571,7 +5571,7 @@
             <a:r>
               <a:rPr lang="en-US" sz="1100" dirty="0">
                 <a:solidFill>
-                  <a:srgbClr val="2E2119"/>
+                  <a:srgbClr val="26402C"/>
                 </a:solidFill>
                 <a:latin typeface="Calibri" pitchFamily="34" charset="0"/>
                 <a:ea typeface="Calibri" pitchFamily="34" charset="-122"/>
@@ -5600,7 +5600,7 @@
             </a:avLst>
           </a:prstGeom>
           <a:solidFill>
-            <a:srgbClr val="F4E9DA"/>
+            <a:srgbClr val="F2EFE7"/>
           </a:solidFill>
           <a:ln/>
           <a:effectLst>
@@ -5639,7 +5639,7 @@
             <a:r>
               <a:rPr lang="en-US" sz="1000" b="1" spc="100" kern="0" dirty="0">
                 <a:solidFill>
-                  <a:srgbClr val="C9682B"/>
+                  <a:srgbClr val="C6821E"/>
                 </a:solidFill>
                 <a:latin typeface="Calibri" pitchFamily="34" charset="0"/>
                 <a:ea typeface="Calibri" pitchFamily="34" charset="-122"/>
@@ -5678,7 +5678,7 @@
             <a:r>
               <a:rPr lang="en-US" sz="1100" dirty="0">
                 <a:solidFill>
-                  <a:srgbClr val="2E2119"/>
+                  <a:srgbClr val="26402C"/>
                 </a:solidFill>
                 <a:latin typeface="Calibri" pitchFamily="34" charset="0"/>
                 <a:ea typeface="Calibri" pitchFamily="34" charset="-122"/>
@@ -5704,7 +5704,7 @@
     <p:bg>
       <p:bgPr>
         <a:solidFill>
-          <a:srgbClr val="2E2119"/>
+          <a:srgbClr val="26402C"/>
         </a:solidFill>
       </p:bgPr>
     </p:bg>
@@ -5737,7 +5737,7 @@
             <a:avLst/>
           </a:prstGeom>
           <a:solidFill>
-            <a:srgbClr val="C9682B"/>
+            <a:srgbClr val="C6821E"/>
           </a:solidFill>
           <a:ln/>
         </p:spPr>
@@ -5836,7 +5836,7 @@
             <a:r>
               <a:rPr lang="en-US" sz="1600" dirty="0">
                 <a:solidFill>
-                  <a:srgbClr val="EFE6DA"/>
+                  <a:srgbClr val="DCE3D6"/>
                 </a:solidFill>
                 <a:latin typeface="Calibri" pitchFamily="34" charset="0"/>
                 <a:ea typeface="Calibri" pitchFamily="34" charset="-122"/>
@@ -5857,7 +5857,7 @@
             <a:r>
               <a:rPr lang="en-US" sz="1600" dirty="0">
                 <a:solidFill>
-                  <a:srgbClr val="EFE6DA"/>
+                  <a:srgbClr val="DCE3D6"/>
                 </a:solidFill>
                 <a:latin typeface="Calibri" pitchFamily="34" charset="0"/>
                 <a:ea typeface="Calibri" pitchFamily="34" charset="-122"/>
@@ -5878,7 +5878,7 @@
             <a:r>
               <a:rPr lang="en-US" sz="1600" dirty="0">
                 <a:solidFill>
-                  <a:srgbClr val="EFE6DA"/>
+                  <a:srgbClr val="DCE3D6"/>
                 </a:solidFill>
                 <a:latin typeface="Calibri" pitchFamily="34" charset="0"/>
                 <a:ea typeface="Calibri" pitchFamily="34" charset="-122"/>
@@ -5899,7 +5899,7 @@
             <a:r>
               <a:rPr lang="en-US" sz="1600" dirty="0">
                 <a:solidFill>
-                  <a:srgbClr val="EFE6DA"/>
+                  <a:srgbClr val="DCE3D6"/>
                 </a:solidFill>
                 <a:latin typeface="Calibri" pitchFamily="34" charset="0"/>
                 <a:ea typeface="Calibri" pitchFamily="34" charset="-122"/>
@@ -5920,7 +5920,7 @@
             <a:r>
               <a:rPr lang="en-US" sz="1600" dirty="0">
                 <a:solidFill>
-                  <a:srgbClr val="EFE6DA"/>
+                  <a:srgbClr val="DCE3D6"/>
                 </a:solidFill>
                 <a:latin typeface="Calibri" pitchFamily="34" charset="0"/>
                 <a:ea typeface="Calibri" pitchFamily="34" charset="-122"/>
@@ -5949,7 +5949,7 @@
             </a:avLst>
           </a:prstGeom>
           <a:solidFill>
-            <a:srgbClr val="3D2E23"/>
+            <a:srgbClr val="33513A"/>
           </a:solidFill>
           <a:ln/>
         </p:spPr>
@@ -5981,7 +5981,7 @@
             <a:r>
               <a:rPr lang="en-US" sz="1250" i="1" dirty="0">
                 <a:solidFill>
-                  <a:srgbClr val="D9A441"/>
+                  <a:srgbClr val="E3A94A"/>
                 </a:solidFill>
                 <a:latin typeface="Calibri" pitchFamily="34" charset="0"/>
                 <a:ea typeface="Calibri" pitchFamily="34" charset="-122"/>
@@ -6040,7 +6040,7 @@
             <a:avLst/>
           </a:prstGeom>
           <a:solidFill>
-            <a:srgbClr val="C9682B"/>
+            <a:srgbClr val="C6821E"/>
           </a:solidFill>
           <a:ln/>
         </p:spPr>
@@ -6096,7 +6096,7 @@
             <a:r>
               <a:rPr lang="en-US" sz="1200" b="1" spc="200" kern="0" dirty="0">
                 <a:solidFill>
-                  <a:srgbClr val="C9682B"/>
+                  <a:srgbClr val="C6821E"/>
                 </a:solidFill>
                 <a:latin typeface="Calibri" pitchFamily="34" charset="0"/>
                 <a:ea typeface="Calibri" pitchFamily="34" charset="-122"/>
@@ -6135,7 +6135,7 @@
             <a:r>
               <a:rPr lang="en-US" sz="2800" b="1" dirty="0">
                 <a:solidFill>
-                  <a:srgbClr val="2E2119"/>
+                  <a:srgbClr val="26402C"/>
                 </a:solidFill>
                 <a:latin typeface="Cambria" pitchFamily="34" charset="0"/>
                 <a:ea typeface="Cambria" pitchFamily="34" charset="-122"/>
@@ -6164,7 +6164,7 @@
             </a:avLst>
           </a:prstGeom>
           <a:solidFill>
-            <a:srgbClr val="EDE6DC"/>
+            <a:srgbClr val="E3E8DD"/>
           </a:solidFill>
           <a:ln/>
           <a:effectLst>
@@ -6203,7 +6203,7 @@
             <a:r>
               <a:rPr lang="en-US" sz="1200" b="1" spc="200" kern="0" dirty="0">
                 <a:solidFill>
-                  <a:srgbClr val="8A7A6D"/>
+                  <a:srgbClr val="5B6559"/>
                 </a:solidFill>
                 <a:latin typeface="Calibri" pitchFamily="34" charset="0"/>
                 <a:ea typeface="Calibri" pitchFamily="34" charset="-122"/>
@@ -6242,7 +6242,7 @@
             <a:r>
               <a:rPr lang="en-US" sz="1500" i="1" dirty="0">
                 <a:solidFill>
-                  <a:srgbClr val="2E2119"/>
+                  <a:srgbClr val="26402C"/>
                 </a:solidFill>
                 <a:latin typeface="Calibri" pitchFamily="34" charset="0"/>
                 <a:ea typeface="Calibri" pitchFamily="34" charset="-122"/>
@@ -6271,7 +6271,7 @@
             </a:avLst>
           </a:prstGeom>
           <a:solidFill>
-            <a:srgbClr val="F4E9DA"/>
+            <a:srgbClr val="F2EFE7"/>
           </a:solidFill>
           <a:ln/>
           <a:effectLst>
@@ -6310,7 +6310,7 @@
             <a:r>
               <a:rPr lang="en-US" sz="1200" b="1" spc="100" kern="0" dirty="0">
                 <a:solidFill>
-                  <a:srgbClr val="C9682B"/>
+                  <a:srgbClr val="C6821E"/>
                 </a:solidFill>
                 <a:latin typeface="Calibri" pitchFamily="34" charset="0"/>
                 <a:ea typeface="Calibri" pitchFamily="34" charset="-122"/>
@@ -6349,7 +6349,7 @@
             <a:r>
               <a:rPr lang="en-US" sz="1350" dirty="0">
                 <a:solidFill>
-                  <a:srgbClr val="2E2119"/>
+                  <a:srgbClr val="26402C"/>
                 </a:solidFill>
                 <a:latin typeface="Calibri" pitchFamily="34" charset="0"/>
                 <a:ea typeface="Calibri" pitchFamily="34" charset="-122"/>
@@ -6378,7 +6378,7 @@
             </a:avLst>
           </a:prstGeom>
           <a:solidFill>
-            <a:srgbClr val="2E2119"/>
+            <a:srgbClr val="26402C"/>
           </a:solidFill>
           <a:ln/>
         </p:spPr>
@@ -6410,7 +6410,7 @@
             <a:r>
               <a:rPr lang="en-US" sz="4000" b="1" dirty="0">
                 <a:solidFill>
-                  <a:srgbClr val="D9A441"/>
+                  <a:srgbClr val="E3A94A"/>
                 </a:solidFill>
                 <a:latin typeface="Cambria" pitchFamily="34" charset="0"/>
                 <a:ea typeface="Cambria" pitchFamily="34" charset="-122"/>
@@ -6488,7 +6488,7 @@
             <a:r>
               <a:rPr lang="en-US" sz="1300" b="1" dirty="0">
                 <a:solidFill>
-                  <a:srgbClr val="2E2119"/>
+                  <a:srgbClr val="26402C"/>
                 </a:solidFill>
                 <a:latin typeface="Calibri" pitchFamily="34" charset="0"/>
                 <a:ea typeface="Calibri" pitchFamily="34" charset="-122"/>
@@ -6508,7 +6508,7 @@
             <a:r>
               <a:rPr lang="en-US" sz="1300" dirty="0">
                 <a:solidFill>
-                  <a:srgbClr val="2E2119"/>
+                  <a:srgbClr val="26402C"/>
                 </a:solidFill>
                 <a:latin typeface="Calibri" pitchFamily="34" charset="0"/>
                 <a:ea typeface="Calibri" pitchFamily="34" charset="-122"/>
@@ -6525,7 +6525,7 @@
             <a:r>
               <a:rPr lang="en-US" sz="1300" b="1" dirty="0">
                 <a:solidFill>
-                  <a:srgbClr val="2E2119"/>
+                  <a:srgbClr val="26402C"/>
                 </a:solidFill>
                 <a:latin typeface="Calibri" pitchFamily="34" charset="0"/>
                 <a:ea typeface="Calibri" pitchFamily="34" charset="-122"/>
@@ -6542,7 +6542,7 @@
             <a:r>
               <a:rPr lang="en-US" sz="1300" dirty="0">
                 <a:solidFill>
-                  <a:srgbClr val="2E2119"/>
+                  <a:srgbClr val="26402C"/>
                 </a:solidFill>
                 <a:latin typeface="Calibri" pitchFamily="34" charset="0"/>
                 <a:ea typeface="Calibri" pitchFamily="34" charset="-122"/>
@@ -6601,7 +6601,7 @@
             <a:avLst/>
           </a:prstGeom>
           <a:solidFill>
-            <a:srgbClr val="C9682B"/>
+            <a:srgbClr val="C6821E"/>
           </a:solidFill>
           <a:ln/>
         </p:spPr>
@@ -6657,7 +6657,7 @@
             <a:r>
               <a:rPr lang="en-US" sz="1200" b="1" spc="200" kern="0" dirty="0">
                 <a:solidFill>
-                  <a:srgbClr val="C9682B"/>
+                  <a:srgbClr val="C6821E"/>
                 </a:solidFill>
                 <a:latin typeface="Calibri" pitchFamily="34" charset="0"/>
                 <a:ea typeface="Calibri" pitchFamily="34" charset="-122"/>
@@ -6696,7 +6696,7 @@
             <a:r>
               <a:rPr lang="en-US" sz="2800" b="1" dirty="0">
                 <a:solidFill>
-                  <a:srgbClr val="2E2119"/>
+                  <a:srgbClr val="26402C"/>
                 </a:solidFill>
                 <a:latin typeface="Cambria" pitchFamily="34" charset="0"/>
                 <a:ea typeface="Cambria" pitchFamily="34" charset="-122"/>
@@ -6735,7 +6735,7 @@
             <a:r>
               <a:rPr lang="en-US" sz="1000" i="1" dirty="0">
                 <a:solidFill>
-                  <a:srgbClr val="8A7A6D"/>
+                  <a:srgbClr val="5B6559"/>
                 </a:solidFill>
                 <a:latin typeface="Calibri" pitchFamily="34" charset="0"/>
                 <a:ea typeface="Calibri" pitchFamily="34" charset="-122"/>
@@ -6804,7 +6804,7 @@
                   <a:tcPr marL="91440" marR="91440" marT="45720" marB="45720" anchor="ctr">
                     <a:lnL w="12700" cap="flat" cmpd="sng" algn="ctr">
                       <a:solidFill>
-                        <a:srgbClr val="E4D9C9"/>
+                        <a:srgbClr val="D6DED2"/>
                       </a:solidFill>
                       <a:prstDash val="solid"/>
                       <a:round/>
@@ -6813,7 +6813,7 @@
                     </a:lnL>
                     <a:lnR w="12700" cap="flat" cmpd="sng" algn="ctr">
                       <a:solidFill>
-                        <a:srgbClr val="E4D9C9"/>
+                        <a:srgbClr val="D6DED2"/>
                       </a:solidFill>
                       <a:prstDash val="solid"/>
                       <a:round/>
@@ -6822,7 +6822,7 @@
                     </a:lnR>
                     <a:lnT w="12700" cap="flat" cmpd="sng" algn="ctr">
                       <a:solidFill>
-                        <a:srgbClr val="E4D9C9"/>
+                        <a:srgbClr val="D6DED2"/>
                       </a:solidFill>
                       <a:prstDash val="solid"/>
                       <a:round/>
@@ -6831,7 +6831,7 @@
                     </a:lnT>
                     <a:lnB w="12700" cap="flat" cmpd="sng" algn="ctr">
                       <a:solidFill>
-                        <a:srgbClr val="E4D9C9"/>
+                        <a:srgbClr val="D6DED2"/>
                       </a:solidFill>
                       <a:prstDash val="solid"/>
                       <a:round/>
@@ -6839,7 +6839,7 @@
                       <a:tailEnd type="none" w="med" len="med"/>
                     </a:lnB>
                     <a:solidFill>
-                      <a:srgbClr val="2E2119"/>
+                      <a:srgbClr val="26402C"/>
                     </a:solidFill>
                   </a:tcPr>
                 </a:tc>
@@ -6872,7 +6872,7 @@
                   <a:tcPr marL="91440" marR="91440" marT="45720" marB="45720" anchor="ctr">
                     <a:lnL w="12700" cap="flat" cmpd="sng" algn="ctr">
                       <a:solidFill>
-                        <a:srgbClr val="E4D9C9"/>
+                        <a:srgbClr val="D6DED2"/>
                       </a:solidFill>
                       <a:prstDash val="solid"/>
                       <a:round/>
@@ -6881,7 +6881,7 @@
                     </a:lnL>
                     <a:lnR w="12700" cap="flat" cmpd="sng" algn="ctr">
                       <a:solidFill>
-                        <a:srgbClr val="E4D9C9"/>
+                        <a:srgbClr val="D6DED2"/>
                       </a:solidFill>
                       <a:prstDash val="solid"/>
                       <a:round/>
@@ -6890,7 +6890,7 @@
                     </a:lnR>
                     <a:lnT w="12700" cap="flat" cmpd="sng" algn="ctr">
                       <a:solidFill>
-                        <a:srgbClr val="E4D9C9"/>
+                        <a:srgbClr val="D6DED2"/>
                       </a:solidFill>
                       <a:prstDash val="solid"/>
                       <a:round/>
@@ -6899,7 +6899,7 @@
                     </a:lnT>
                     <a:lnB w="12700" cap="flat" cmpd="sng" algn="ctr">
                       <a:solidFill>
-                        <a:srgbClr val="E4D9C9"/>
+                        <a:srgbClr val="D6DED2"/>
                       </a:solidFill>
                       <a:prstDash val="solid"/>
                       <a:round/>
@@ -6907,7 +6907,7 @@
                       <a:tailEnd type="none" w="med" len="med"/>
                     </a:lnB>
                     <a:solidFill>
-                      <a:srgbClr val="2E2119"/>
+                      <a:srgbClr val="26402C"/>
                     </a:solidFill>
                   </a:tcPr>
                 </a:tc>
@@ -6940,7 +6940,7 @@
                   <a:tcPr marL="91440" marR="91440" marT="45720" marB="45720" anchor="ctr">
                     <a:lnL w="12700" cap="flat" cmpd="sng" algn="ctr">
                       <a:solidFill>
-                        <a:srgbClr val="E4D9C9"/>
+                        <a:srgbClr val="D6DED2"/>
                       </a:solidFill>
                       <a:prstDash val="solid"/>
                       <a:round/>
@@ -6949,7 +6949,7 @@
                     </a:lnL>
                     <a:lnR w="12700" cap="flat" cmpd="sng" algn="ctr">
                       <a:solidFill>
-                        <a:srgbClr val="E4D9C9"/>
+                        <a:srgbClr val="D6DED2"/>
                       </a:solidFill>
                       <a:prstDash val="solid"/>
                       <a:round/>
@@ -6958,7 +6958,7 @@
                     </a:lnR>
                     <a:lnT w="12700" cap="flat" cmpd="sng" algn="ctr">
                       <a:solidFill>
-                        <a:srgbClr val="E4D9C9"/>
+                        <a:srgbClr val="D6DED2"/>
                       </a:solidFill>
                       <a:prstDash val="solid"/>
                       <a:round/>
@@ -6967,7 +6967,7 @@
                     </a:lnT>
                     <a:lnB w="12700" cap="flat" cmpd="sng" algn="ctr">
                       <a:solidFill>
-                        <a:srgbClr val="E4D9C9"/>
+                        <a:srgbClr val="D6DED2"/>
                       </a:solidFill>
                       <a:prstDash val="solid"/>
                       <a:round/>
@@ -6975,7 +6975,7 @@
                       <a:tailEnd type="none" w="med" len="med"/>
                     </a:lnB>
                     <a:solidFill>
-                      <a:srgbClr val="2E2119"/>
+                      <a:srgbClr val="26402C"/>
                     </a:solidFill>
                   </a:tcPr>
                 </a:tc>
@@ -6992,7 +6992,7 @@
                       <a:r>
                         <a:rPr lang="en-US" sz="1200" dirty="0">
                           <a:solidFill>
-                            <a:srgbClr val="2E2119"/>
+                            <a:srgbClr val="26402C"/>
                           </a:solidFill>
                           <a:latin typeface="Calibri" pitchFamily="34" charset="0"/>
                           <a:ea typeface="Calibri" pitchFamily="34" charset="-122"/>
@@ -7010,7 +7010,7 @@
                   <a:tcPr marL="91440" marR="91440" marT="45720" marB="45720" anchor="ctr">
                     <a:lnL w="12700" cap="flat" cmpd="sng" algn="ctr">
                       <a:solidFill>
-                        <a:srgbClr val="E4D9C9"/>
+                        <a:srgbClr val="D6DED2"/>
                       </a:solidFill>
                       <a:prstDash val="solid"/>
                       <a:round/>
@@ -7019,7 +7019,7 @@
                     </a:lnL>
                     <a:lnR w="12700" cap="flat" cmpd="sng" algn="ctr">
                       <a:solidFill>
-                        <a:srgbClr val="E4D9C9"/>
+                        <a:srgbClr val="D6DED2"/>
                       </a:solidFill>
                       <a:prstDash val="solid"/>
                       <a:round/>
@@ -7028,7 +7028,7 @@
                     </a:lnR>
                     <a:lnT w="12700" cap="flat" cmpd="sng" algn="ctr">
                       <a:solidFill>
-                        <a:srgbClr val="E4D9C9"/>
+                        <a:srgbClr val="D6DED2"/>
                       </a:solidFill>
                       <a:prstDash val="solid"/>
                       <a:round/>
@@ -7037,7 +7037,7 @@
                     </a:lnT>
                     <a:lnB w="12700" cap="flat" cmpd="sng" algn="ctr">
                       <a:solidFill>
-                        <a:srgbClr val="E4D9C9"/>
+                        <a:srgbClr val="D6DED2"/>
                       </a:solidFill>
                       <a:prstDash val="solid"/>
                       <a:round/>
@@ -7060,7 +7060,7 @@
                       <a:r>
                         <a:rPr lang="en-US" sz="1200" dirty="0">
                           <a:solidFill>
-                            <a:srgbClr val="2E2119"/>
+                            <a:srgbClr val="26402C"/>
                           </a:solidFill>
                           <a:latin typeface="Calibri" pitchFamily="34" charset="0"/>
                           <a:ea typeface="Calibri" pitchFamily="34" charset="-122"/>
@@ -7078,7 +7078,7 @@
                   <a:tcPr marL="91440" marR="91440" marT="45720" marB="45720" anchor="ctr">
                     <a:lnL w="12700" cap="flat" cmpd="sng" algn="ctr">
                       <a:solidFill>
-                        <a:srgbClr val="E4D9C9"/>
+                        <a:srgbClr val="D6DED2"/>
                       </a:solidFill>
                       <a:prstDash val="solid"/>
                       <a:round/>
@@ -7087,7 +7087,7 @@
                     </a:lnL>
                     <a:lnR w="12700" cap="flat" cmpd="sng" algn="ctr">
                       <a:solidFill>
-                        <a:srgbClr val="E4D9C9"/>
+                        <a:srgbClr val="D6DED2"/>
                       </a:solidFill>
                       <a:prstDash val="solid"/>
                       <a:round/>
@@ -7096,7 +7096,7 @@
                     </a:lnR>
                     <a:lnT w="12700" cap="flat" cmpd="sng" algn="ctr">
                       <a:solidFill>
-                        <a:srgbClr val="E4D9C9"/>
+                        <a:srgbClr val="D6DED2"/>
                       </a:solidFill>
                       <a:prstDash val="solid"/>
                       <a:round/>
@@ -7105,7 +7105,7 @@
                     </a:lnT>
                     <a:lnB w="12700" cap="flat" cmpd="sng" algn="ctr">
                       <a:solidFill>
-                        <a:srgbClr val="E4D9C9"/>
+                        <a:srgbClr val="D6DED2"/>
                       </a:solidFill>
                       <a:prstDash val="solid"/>
                       <a:round/>
@@ -7128,7 +7128,7 @@
                       <a:r>
                         <a:rPr lang="en-US" sz="1200" dirty="0">
                           <a:solidFill>
-                            <a:srgbClr val="2E2119"/>
+                            <a:srgbClr val="26402C"/>
                           </a:solidFill>
                           <a:latin typeface="Calibri" pitchFamily="34" charset="0"/>
                           <a:ea typeface="Calibri" pitchFamily="34" charset="-122"/>
@@ -7146,7 +7146,7 @@
                   <a:tcPr marL="91440" marR="91440" marT="45720" marB="45720" anchor="ctr">
                     <a:lnL w="12700" cap="flat" cmpd="sng" algn="ctr">
                       <a:solidFill>
-                        <a:srgbClr val="E4D9C9"/>
+                        <a:srgbClr val="D6DED2"/>
                       </a:solidFill>
                       <a:prstDash val="solid"/>
                       <a:round/>
@@ -7155,7 +7155,7 @@
                     </a:lnL>
                     <a:lnR w="12700" cap="flat" cmpd="sng" algn="ctr">
                       <a:solidFill>
-                        <a:srgbClr val="E4D9C9"/>
+                        <a:srgbClr val="D6DED2"/>
                       </a:solidFill>
                       <a:prstDash val="solid"/>
                       <a:round/>
@@ -7164,7 +7164,7 @@
                     </a:lnR>
                     <a:lnT w="12700" cap="flat" cmpd="sng" algn="ctr">
                       <a:solidFill>
-                        <a:srgbClr val="E4D9C9"/>
+                        <a:srgbClr val="D6DED2"/>
                       </a:solidFill>
                       <a:prstDash val="solid"/>
                       <a:round/>
@@ -7173,7 +7173,7 @@
                     </a:lnT>
                     <a:lnB w="12700" cap="flat" cmpd="sng" algn="ctr">
                       <a:solidFill>
-                        <a:srgbClr val="E4D9C9"/>
+                        <a:srgbClr val="D6DED2"/>
                       </a:solidFill>
                       <a:prstDash val="solid"/>
                       <a:round/>
@@ -7198,7 +7198,7 @@
                       <a:r>
                         <a:rPr lang="en-US" sz="1200" dirty="0">
                           <a:solidFill>
-                            <a:srgbClr val="2E2119"/>
+                            <a:srgbClr val="26402C"/>
                           </a:solidFill>
                           <a:latin typeface="Calibri" pitchFamily="34" charset="0"/>
                           <a:ea typeface="Calibri" pitchFamily="34" charset="-122"/>
@@ -7216,7 +7216,7 @@
                   <a:tcPr marL="91440" marR="91440" marT="45720" marB="45720" anchor="ctr">
                     <a:lnL w="12700" cap="flat" cmpd="sng" algn="ctr">
                       <a:solidFill>
-                        <a:srgbClr val="E4D9C9"/>
+                        <a:srgbClr val="D6DED2"/>
                       </a:solidFill>
                       <a:prstDash val="solid"/>
                       <a:round/>
@@ -7225,7 +7225,7 @@
                     </a:lnL>
                     <a:lnR w="12700" cap="flat" cmpd="sng" algn="ctr">
                       <a:solidFill>
-                        <a:srgbClr val="E4D9C9"/>
+                        <a:srgbClr val="D6DED2"/>
                       </a:solidFill>
                       <a:prstDash val="solid"/>
                       <a:round/>
@@ -7234,7 +7234,7 @@
                     </a:lnR>
                     <a:lnT w="12700" cap="flat" cmpd="sng" algn="ctr">
                       <a:solidFill>
-                        <a:srgbClr val="E4D9C9"/>
+                        <a:srgbClr val="D6DED2"/>
                       </a:solidFill>
                       <a:prstDash val="solid"/>
                       <a:round/>
@@ -7243,7 +7243,7 @@
                     </a:lnT>
                     <a:lnB w="12700" cap="flat" cmpd="sng" algn="ctr">
                       <a:solidFill>
-                        <a:srgbClr val="E4D9C9"/>
+                        <a:srgbClr val="D6DED2"/>
                       </a:solidFill>
                       <a:prstDash val="solid"/>
                       <a:round/>
@@ -7266,7 +7266,7 @@
                       <a:r>
                         <a:rPr lang="en-US" sz="1200" dirty="0">
                           <a:solidFill>
-                            <a:srgbClr val="2E2119"/>
+                            <a:srgbClr val="26402C"/>
                           </a:solidFill>
                           <a:latin typeface="Calibri" pitchFamily="34" charset="0"/>
                           <a:ea typeface="Calibri" pitchFamily="34" charset="-122"/>
@@ -7284,7 +7284,7 @@
                   <a:tcPr marL="91440" marR="91440" marT="45720" marB="45720" anchor="ctr">
                     <a:lnL w="12700" cap="flat" cmpd="sng" algn="ctr">
                       <a:solidFill>
-                        <a:srgbClr val="E4D9C9"/>
+                        <a:srgbClr val="D6DED2"/>
                       </a:solidFill>
                       <a:prstDash val="solid"/>
                       <a:round/>
@@ -7293,7 +7293,7 @@
                     </a:lnL>
                     <a:lnR w="12700" cap="flat" cmpd="sng" algn="ctr">
                       <a:solidFill>
-                        <a:srgbClr val="E4D9C9"/>
+                        <a:srgbClr val="D6DED2"/>
                       </a:solidFill>
                       <a:prstDash val="solid"/>
                       <a:round/>
@@ -7302,7 +7302,7 @@
                     </a:lnR>
                     <a:lnT w="12700" cap="flat" cmpd="sng" algn="ctr">
                       <a:solidFill>
-                        <a:srgbClr val="E4D9C9"/>
+                        <a:srgbClr val="D6DED2"/>
                       </a:solidFill>
                       <a:prstDash val="solid"/>
                       <a:round/>
@@ -7311,7 +7311,7 @@
                     </a:lnT>
                     <a:lnB w="12700" cap="flat" cmpd="sng" algn="ctr">
                       <a:solidFill>
-                        <a:srgbClr val="E4D9C9"/>
+                        <a:srgbClr val="D6DED2"/>
                       </a:solidFill>
                       <a:prstDash val="solid"/>
                       <a:round/>
@@ -7334,7 +7334,7 @@
                       <a:r>
                         <a:rPr lang="en-US" sz="1200" dirty="0">
                           <a:solidFill>
-                            <a:srgbClr val="2E2119"/>
+                            <a:srgbClr val="26402C"/>
                           </a:solidFill>
                           <a:latin typeface="Calibri" pitchFamily="34" charset="0"/>
                           <a:ea typeface="Calibri" pitchFamily="34" charset="-122"/>
@@ -7352,7 +7352,7 @@
                   <a:tcPr marL="91440" marR="91440" marT="45720" marB="45720" anchor="ctr">
                     <a:lnL w="12700" cap="flat" cmpd="sng" algn="ctr">
                       <a:solidFill>
-                        <a:srgbClr val="E4D9C9"/>
+                        <a:srgbClr val="D6DED2"/>
                       </a:solidFill>
                       <a:prstDash val="solid"/>
                       <a:round/>
@@ -7361,7 +7361,7 @@
                     </a:lnL>
                     <a:lnR w="12700" cap="flat" cmpd="sng" algn="ctr">
                       <a:solidFill>
-                        <a:srgbClr val="E4D9C9"/>
+                        <a:srgbClr val="D6DED2"/>
                       </a:solidFill>
                       <a:prstDash val="solid"/>
                       <a:round/>
@@ -7370,7 +7370,7 @@
                     </a:lnR>
                     <a:lnT w="12700" cap="flat" cmpd="sng" algn="ctr">
                       <a:solidFill>
-                        <a:srgbClr val="E4D9C9"/>
+                        <a:srgbClr val="D6DED2"/>
                       </a:solidFill>
                       <a:prstDash val="solid"/>
                       <a:round/>
@@ -7379,7 +7379,7 @@
                     </a:lnT>
                     <a:lnB w="12700" cap="flat" cmpd="sng" algn="ctr">
                       <a:solidFill>
-                        <a:srgbClr val="E4D9C9"/>
+                        <a:srgbClr val="D6DED2"/>
                       </a:solidFill>
                       <a:prstDash val="solid"/>
                       <a:round/>
@@ -7404,7 +7404,7 @@
                       <a:r>
                         <a:rPr lang="en-US" sz="1200" dirty="0">
                           <a:solidFill>
-                            <a:srgbClr val="2E2119"/>
+                            <a:srgbClr val="26402C"/>
                           </a:solidFill>
                           <a:latin typeface="Calibri" pitchFamily="34" charset="0"/>
                           <a:ea typeface="Calibri" pitchFamily="34" charset="-122"/>
@@ -7422,7 +7422,7 @@
                   <a:tcPr marL="91440" marR="91440" marT="45720" marB="45720" anchor="ctr">
                     <a:lnL w="12700" cap="flat" cmpd="sng" algn="ctr">
                       <a:solidFill>
-                        <a:srgbClr val="E4D9C9"/>
+                        <a:srgbClr val="D6DED2"/>
                       </a:solidFill>
                       <a:prstDash val="solid"/>
                       <a:round/>
@@ -7431,7 +7431,7 @@
                     </a:lnL>
                     <a:lnR w="12700" cap="flat" cmpd="sng" algn="ctr">
                       <a:solidFill>
-                        <a:srgbClr val="E4D9C9"/>
+                        <a:srgbClr val="D6DED2"/>
                       </a:solidFill>
                       <a:prstDash val="solid"/>
                       <a:round/>
@@ -7440,7 +7440,7 @@
                     </a:lnR>
                     <a:lnT w="12700" cap="flat" cmpd="sng" algn="ctr">
                       <a:solidFill>
-                        <a:srgbClr val="E4D9C9"/>
+                        <a:srgbClr val="D6DED2"/>
                       </a:solidFill>
                       <a:prstDash val="solid"/>
                       <a:round/>
@@ -7449,7 +7449,7 @@
                     </a:lnT>
                     <a:lnB w="12700" cap="flat" cmpd="sng" algn="ctr">
                       <a:solidFill>
-                        <a:srgbClr val="E4D9C9"/>
+                        <a:srgbClr val="D6DED2"/>
                       </a:solidFill>
                       <a:prstDash val="solid"/>
                       <a:round/>
@@ -7472,7 +7472,7 @@
                       <a:r>
                         <a:rPr lang="en-US" sz="1200" dirty="0">
                           <a:solidFill>
-                            <a:srgbClr val="2E2119"/>
+                            <a:srgbClr val="26402C"/>
                           </a:solidFill>
                           <a:latin typeface="Calibri" pitchFamily="34" charset="0"/>
                           <a:ea typeface="Calibri" pitchFamily="34" charset="-122"/>
@@ -7490,7 +7490,7 @@
                   <a:tcPr marL="91440" marR="91440" marT="45720" marB="45720" anchor="ctr">
                     <a:lnL w="12700" cap="flat" cmpd="sng" algn="ctr">
                       <a:solidFill>
-                        <a:srgbClr val="E4D9C9"/>
+                        <a:srgbClr val="D6DED2"/>
                       </a:solidFill>
                       <a:prstDash val="solid"/>
                       <a:round/>
@@ -7499,7 +7499,7 @@
                     </a:lnL>
                     <a:lnR w="12700" cap="flat" cmpd="sng" algn="ctr">
                       <a:solidFill>
-                        <a:srgbClr val="E4D9C9"/>
+                        <a:srgbClr val="D6DED2"/>
                       </a:solidFill>
                       <a:prstDash val="solid"/>
                       <a:round/>
@@ -7508,7 +7508,7 @@
                     </a:lnR>
                     <a:lnT w="12700" cap="flat" cmpd="sng" algn="ctr">
                       <a:solidFill>
-                        <a:srgbClr val="E4D9C9"/>
+                        <a:srgbClr val="D6DED2"/>
                       </a:solidFill>
                       <a:prstDash val="solid"/>
                       <a:round/>
@@ -7517,7 +7517,7 @@
                     </a:lnT>
                     <a:lnB w="12700" cap="flat" cmpd="sng" algn="ctr">
                       <a:solidFill>
-                        <a:srgbClr val="E4D9C9"/>
+                        <a:srgbClr val="D6DED2"/>
                       </a:solidFill>
                       <a:prstDash val="solid"/>
                       <a:round/>
@@ -7540,7 +7540,7 @@
                       <a:r>
                         <a:rPr lang="en-US" sz="1200" dirty="0">
                           <a:solidFill>
-                            <a:srgbClr val="2E2119"/>
+                            <a:srgbClr val="26402C"/>
                           </a:solidFill>
                           <a:latin typeface="Calibri" pitchFamily="34" charset="0"/>
                           <a:ea typeface="Calibri" pitchFamily="34" charset="-122"/>
@@ -7558,7 +7558,7 @@
                   <a:tcPr marL="91440" marR="91440" marT="45720" marB="45720" anchor="ctr">
                     <a:lnL w="12700" cap="flat" cmpd="sng" algn="ctr">
                       <a:solidFill>
-                        <a:srgbClr val="E4D9C9"/>
+                        <a:srgbClr val="D6DED2"/>
                       </a:solidFill>
                       <a:prstDash val="solid"/>
                       <a:round/>
@@ -7567,7 +7567,7 @@
                     </a:lnL>
                     <a:lnR w="12700" cap="flat" cmpd="sng" algn="ctr">
                       <a:solidFill>
-                        <a:srgbClr val="E4D9C9"/>
+                        <a:srgbClr val="D6DED2"/>
                       </a:solidFill>
                       <a:prstDash val="solid"/>
                       <a:round/>
@@ -7576,7 +7576,7 @@
                     </a:lnR>
                     <a:lnT w="12700" cap="flat" cmpd="sng" algn="ctr">
                       <a:solidFill>
-                        <a:srgbClr val="E4D9C9"/>
+                        <a:srgbClr val="D6DED2"/>
                       </a:solidFill>
                       <a:prstDash val="solid"/>
                       <a:round/>
@@ -7585,7 +7585,7 @@
                     </a:lnT>
                     <a:lnB w="12700" cap="flat" cmpd="sng" algn="ctr">
                       <a:solidFill>
-                        <a:srgbClr val="E4D9C9"/>
+                        <a:srgbClr val="D6DED2"/>
                       </a:solidFill>
                       <a:prstDash val="solid"/>
                       <a:round/>
@@ -7610,7 +7610,7 @@
                       <a:r>
                         <a:rPr lang="en-US" sz="1200" dirty="0">
                           <a:solidFill>
-                            <a:srgbClr val="2E2119"/>
+                            <a:srgbClr val="26402C"/>
                           </a:solidFill>
                           <a:latin typeface="Calibri" pitchFamily="34" charset="0"/>
                           <a:ea typeface="Calibri" pitchFamily="34" charset="-122"/>
@@ -7628,7 +7628,7 @@
                   <a:tcPr marL="91440" marR="91440" marT="45720" marB="45720" anchor="ctr">
                     <a:lnL w="12700" cap="flat" cmpd="sng" algn="ctr">
                       <a:solidFill>
-                        <a:srgbClr val="E4D9C9"/>
+                        <a:srgbClr val="D6DED2"/>
                       </a:solidFill>
                       <a:prstDash val="solid"/>
                       <a:round/>
@@ -7637,7 +7637,7 @@
                     </a:lnL>
                     <a:lnR w="12700" cap="flat" cmpd="sng" algn="ctr">
                       <a:solidFill>
-                        <a:srgbClr val="E4D9C9"/>
+                        <a:srgbClr val="D6DED2"/>
                       </a:solidFill>
                       <a:prstDash val="solid"/>
                       <a:round/>
@@ -7646,7 +7646,7 @@
                     </a:lnR>
                     <a:lnT w="12700" cap="flat" cmpd="sng" algn="ctr">
                       <a:solidFill>
-                        <a:srgbClr val="E4D9C9"/>
+                        <a:srgbClr val="D6DED2"/>
                       </a:solidFill>
                       <a:prstDash val="solid"/>
                       <a:round/>
@@ -7655,7 +7655,7 @@
                     </a:lnT>
                     <a:lnB w="12700" cap="flat" cmpd="sng" algn="ctr">
                       <a:solidFill>
-                        <a:srgbClr val="E4D9C9"/>
+                        <a:srgbClr val="D6DED2"/>
                       </a:solidFill>
                       <a:prstDash val="solid"/>
                       <a:round/>
@@ -7678,7 +7678,7 @@
                       <a:r>
                         <a:rPr lang="en-US" sz="1200" dirty="0">
                           <a:solidFill>
-                            <a:srgbClr val="2E2119"/>
+                            <a:srgbClr val="26402C"/>
                           </a:solidFill>
                           <a:latin typeface="Calibri" pitchFamily="34" charset="0"/>
                           <a:ea typeface="Calibri" pitchFamily="34" charset="-122"/>
@@ -7696,7 +7696,7 @@
                   <a:tcPr marL="91440" marR="91440" marT="45720" marB="45720" anchor="ctr">
                     <a:lnL w="12700" cap="flat" cmpd="sng" algn="ctr">
                       <a:solidFill>
-                        <a:srgbClr val="E4D9C9"/>
+                        <a:srgbClr val="D6DED2"/>
                       </a:solidFill>
                       <a:prstDash val="solid"/>
                       <a:round/>
@@ -7705,7 +7705,7 @@
                     </a:lnL>
                     <a:lnR w="12700" cap="flat" cmpd="sng" algn="ctr">
                       <a:solidFill>
-                        <a:srgbClr val="E4D9C9"/>
+                        <a:srgbClr val="D6DED2"/>
                       </a:solidFill>
                       <a:prstDash val="solid"/>
                       <a:round/>
@@ -7714,7 +7714,7 @@
                     </a:lnR>
                     <a:lnT w="12700" cap="flat" cmpd="sng" algn="ctr">
                       <a:solidFill>
-                        <a:srgbClr val="E4D9C9"/>
+                        <a:srgbClr val="D6DED2"/>
                       </a:solidFill>
                       <a:prstDash val="solid"/>
                       <a:round/>
@@ -7723,7 +7723,7 @@
                     </a:lnT>
                     <a:lnB w="12700" cap="flat" cmpd="sng" algn="ctr">
                       <a:solidFill>
-                        <a:srgbClr val="E4D9C9"/>
+                        <a:srgbClr val="D6DED2"/>
                       </a:solidFill>
                       <a:prstDash val="solid"/>
                       <a:round/>
@@ -7746,7 +7746,7 @@
                       <a:r>
                         <a:rPr lang="en-US" sz="1200" dirty="0">
                           <a:solidFill>
-                            <a:srgbClr val="2E2119"/>
+                            <a:srgbClr val="26402C"/>
                           </a:solidFill>
                           <a:latin typeface="Calibri" pitchFamily="34" charset="0"/>
                           <a:ea typeface="Calibri" pitchFamily="34" charset="-122"/>
@@ -7764,7 +7764,7 @@
                   <a:tcPr marL="91440" marR="91440" marT="45720" marB="45720" anchor="ctr">
                     <a:lnL w="12700" cap="flat" cmpd="sng" algn="ctr">
                       <a:solidFill>
-                        <a:srgbClr val="E4D9C9"/>
+                        <a:srgbClr val="D6DED2"/>
                       </a:solidFill>
                       <a:prstDash val="solid"/>
                       <a:round/>
@@ -7773,7 +7773,7 @@
                     </a:lnL>
                     <a:lnR w="12700" cap="flat" cmpd="sng" algn="ctr">
                       <a:solidFill>
-                        <a:srgbClr val="E4D9C9"/>
+                        <a:srgbClr val="D6DED2"/>
                       </a:solidFill>
                       <a:prstDash val="solid"/>
                       <a:round/>
@@ -7782,7 +7782,7 @@
                     </a:lnR>
                     <a:lnT w="12700" cap="flat" cmpd="sng" algn="ctr">
                       <a:solidFill>
-                        <a:srgbClr val="E4D9C9"/>
+                        <a:srgbClr val="D6DED2"/>
                       </a:solidFill>
                       <a:prstDash val="solid"/>
                       <a:round/>
@@ -7791,7 +7791,7 @@
                     </a:lnT>
                     <a:lnB w="12700" cap="flat" cmpd="sng" algn="ctr">
                       <a:solidFill>
-                        <a:srgbClr val="E4D9C9"/>
+                        <a:srgbClr val="D6DED2"/>
                       </a:solidFill>
                       <a:prstDash val="solid"/>
                       <a:round/>
@@ -7825,7 +7825,7 @@
             </a:avLst>
           </a:prstGeom>
           <a:solidFill>
-            <a:srgbClr val="F4E9DA"/>
+            <a:srgbClr val="F2EFE7"/>
           </a:solidFill>
           <a:ln/>
           <a:effectLst>
@@ -7864,7 +7864,7 @@
             <a:r>
               <a:rPr lang="en-US" sz="1300" b="1" dirty="0">
                 <a:solidFill>
-                  <a:srgbClr val="C9682B"/>
+                  <a:srgbClr val="C6821E"/>
                 </a:solidFill>
                 <a:latin typeface="Calibri" pitchFamily="34" charset="0"/>
                 <a:ea typeface="Calibri" pitchFamily="34" charset="-122"/>
@@ -7906,7 +7906,7 @@
             <a:r>
               <a:rPr lang="en-US" sz="1250" dirty="0">
                 <a:solidFill>
-                  <a:srgbClr val="2E2119"/>
+                  <a:srgbClr val="26402C"/>
                 </a:solidFill>
                 <a:latin typeface="Calibri" pitchFamily="34" charset="0"/>
                 <a:ea typeface="Calibri" pitchFamily="34" charset="-122"/>
@@ -7926,7 +7926,7 @@
             <a:r>
               <a:rPr lang="en-US" sz="1250" dirty="0">
                 <a:solidFill>
-                  <a:srgbClr val="2E2119"/>
+                  <a:srgbClr val="26402C"/>
                 </a:solidFill>
                 <a:latin typeface="Calibri" pitchFamily="34" charset="0"/>
                 <a:ea typeface="Calibri" pitchFamily="34" charset="-122"/>
@@ -7943,7 +7943,7 @@
             <a:r>
               <a:rPr lang="en-US" sz="1250" dirty="0">
                 <a:solidFill>
-                  <a:srgbClr val="2E2119"/>
+                  <a:srgbClr val="26402C"/>
                 </a:solidFill>
                 <a:latin typeface="Calibri" pitchFamily="34" charset="0"/>
                 <a:ea typeface="Calibri" pitchFamily="34" charset="-122"/>
@@ -8002,7 +8002,7 @@
             <a:avLst/>
           </a:prstGeom>
           <a:solidFill>
-            <a:srgbClr val="C9682B"/>
+            <a:srgbClr val="C6821E"/>
           </a:solidFill>
           <a:ln/>
         </p:spPr>
@@ -8058,7 +8058,7 @@
             <a:r>
               <a:rPr lang="en-US" sz="1200" b="1" spc="200" kern="0" dirty="0">
                 <a:solidFill>
-                  <a:srgbClr val="C9682B"/>
+                  <a:srgbClr val="C6821E"/>
                 </a:solidFill>
                 <a:latin typeface="Calibri" pitchFamily="34" charset="0"/>
                 <a:ea typeface="Calibri" pitchFamily="34" charset="-122"/>
@@ -8097,7 +8097,7 @@
             <a:r>
               <a:rPr lang="en-US" sz="2800" b="1" dirty="0">
                 <a:solidFill>
-                  <a:srgbClr val="2E2119"/>
+                  <a:srgbClr val="26402C"/>
                 </a:solidFill>
                 <a:latin typeface="Cambria" pitchFamily="34" charset="0"/>
                 <a:ea typeface="Cambria" pitchFamily="34" charset="-122"/>
@@ -8136,7 +8136,7 @@
             <a:r>
               <a:rPr lang="en-US" sz="1000" i="1" dirty="0">
                 <a:solidFill>
-                  <a:srgbClr val="8A7A6D"/>
+                  <a:srgbClr val="5B6559"/>
                 </a:solidFill>
                 <a:latin typeface="Calibri" pitchFamily="34" charset="0"/>
                 <a:ea typeface="Calibri" pitchFamily="34" charset="-122"/>
@@ -8165,7 +8165,7 @@
             </a:avLst>
           </a:prstGeom>
           <a:solidFill>
-            <a:srgbClr val="2E2119"/>
+            <a:srgbClr val="26402C"/>
           </a:solidFill>
           <a:ln/>
         </p:spPr>
@@ -8220,7 +8220,7 @@
             <a:r>
               <a:rPr lang="en-US" sz="950" i="1" dirty="0">
                 <a:solidFill>
-                  <a:srgbClr val="2E2119"/>
+                  <a:srgbClr val="26402C"/>
                 </a:solidFill>
                 <a:latin typeface="Calibri" pitchFamily="34" charset="0"/>
                 <a:ea typeface="Calibri" pitchFamily="34" charset="-122"/>
@@ -8249,7 +8249,7 @@
             </a:avLst>
           </a:prstGeom>
           <a:solidFill>
-            <a:srgbClr val="2E2119"/>
+            <a:srgbClr val="26402C"/>
           </a:solidFill>
           <a:ln/>
         </p:spPr>
@@ -8304,7 +8304,7 @@
             <a:r>
               <a:rPr lang="en-US" sz="950" i="1" dirty="0">
                 <a:solidFill>
-                  <a:srgbClr val="2E2119"/>
+                  <a:srgbClr val="26402C"/>
                 </a:solidFill>
                 <a:latin typeface="Calibri" pitchFamily="34" charset="0"/>
                 <a:ea typeface="Calibri" pitchFamily="34" charset="-122"/>
@@ -8333,7 +8333,7 @@
             </a:avLst>
           </a:prstGeom>
           <a:solidFill>
-            <a:srgbClr val="2E2119"/>
+            <a:srgbClr val="26402C"/>
           </a:solidFill>
           <a:ln/>
         </p:spPr>
@@ -8388,7 +8388,7 @@
             <a:r>
               <a:rPr lang="en-US" sz="950" i="1" dirty="0">
                 <a:solidFill>
-                  <a:srgbClr val="2E2119"/>
+                  <a:srgbClr val="26402C"/>
                 </a:solidFill>
                 <a:latin typeface="Calibri" pitchFamily="34" charset="0"/>
                 <a:ea typeface="Calibri" pitchFamily="34" charset="-122"/>
@@ -8417,7 +8417,7 @@
             </a:avLst>
           </a:prstGeom>
           <a:solidFill>
-            <a:srgbClr val="2E2119"/>
+            <a:srgbClr val="26402C"/>
           </a:solidFill>
           <a:ln/>
         </p:spPr>
@@ -8472,7 +8472,7 @@
             <a:r>
               <a:rPr lang="en-US" sz="950" i="1" dirty="0">
                 <a:solidFill>
-                  <a:srgbClr val="2E2119"/>
+                  <a:srgbClr val="26402C"/>
                 </a:solidFill>
                 <a:latin typeface="Calibri" pitchFamily="34" charset="0"/>
                 <a:ea typeface="Calibri" pitchFamily="34" charset="-122"/>
@@ -8531,7 +8531,7 @@
             <a:avLst/>
           </a:prstGeom>
           <a:solidFill>
-            <a:srgbClr val="C9682B"/>
+            <a:srgbClr val="C6821E"/>
           </a:solidFill>
           <a:ln/>
         </p:spPr>
@@ -8587,7 +8587,7 @@
             <a:r>
               <a:rPr lang="en-US" sz="1200" b="1" spc="200" kern="0" dirty="0">
                 <a:solidFill>
-                  <a:srgbClr val="C9682B"/>
+                  <a:srgbClr val="C6821E"/>
                 </a:solidFill>
                 <a:latin typeface="Calibri" pitchFamily="34" charset="0"/>
                 <a:ea typeface="Calibri" pitchFamily="34" charset="-122"/>
@@ -8626,7 +8626,7 @@
             <a:r>
               <a:rPr lang="en-US" sz="2800" b="1" dirty="0">
                 <a:solidFill>
-                  <a:srgbClr val="2E2119"/>
+                  <a:srgbClr val="26402C"/>
                 </a:solidFill>
                 <a:latin typeface="Cambria" pitchFamily="34" charset="0"/>
                 <a:ea typeface="Cambria" pitchFamily="34" charset="-122"/>
@@ -8665,7 +8665,7 @@
             <a:r>
               <a:rPr lang="en-US" sz="1000" i="1" dirty="0">
                 <a:solidFill>
-                  <a:srgbClr val="8A7A6D"/>
+                  <a:srgbClr val="5B6559"/>
                 </a:solidFill>
                 <a:latin typeface="Calibri" pitchFamily="34" charset="0"/>
                 <a:ea typeface="Calibri" pitchFamily="34" charset="-122"/>
@@ -8694,7 +8694,7 @@
             </a:avLst>
           </a:prstGeom>
           <a:solidFill>
-            <a:srgbClr val="2E2119"/>
+            <a:srgbClr val="26402C"/>
           </a:solidFill>
           <a:ln/>
         </p:spPr>
@@ -8749,7 +8749,7 @@
             <a:r>
               <a:rPr lang="en-US" sz="950" i="1" dirty="0">
                 <a:solidFill>
-                  <a:srgbClr val="2E2119"/>
+                  <a:srgbClr val="26402C"/>
                 </a:solidFill>
                 <a:latin typeface="Calibri" pitchFamily="34" charset="0"/>
                 <a:ea typeface="Calibri" pitchFamily="34" charset="-122"/>
@@ -8778,7 +8778,7 @@
             </a:avLst>
           </a:prstGeom>
           <a:solidFill>
-            <a:srgbClr val="2E2119"/>
+            <a:srgbClr val="26402C"/>
           </a:solidFill>
           <a:ln/>
         </p:spPr>
@@ -8833,7 +8833,7 @@
             <a:r>
               <a:rPr lang="en-US" sz="950" i="1" dirty="0">
                 <a:solidFill>
-                  <a:srgbClr val="2E2119"/>
+                  <a:srgbClr val="26402C"/>
                 </a:solidFill>
                 <a:latin typeface="Calibri" pitchFamily="34" charset="0"/>
                 <a:ea typeface="Calibri" pitchFamily="34" charset="-122"/>
@@ -8862,7 +8862,7 @@
             </a:avLst>
           </a:prstGeom>
           <a:solidFill>
-            <a:srgbClr val="2E2119"/>
+            <a:srgbClr val="26402C"/>
           </a:solidFill>
           <a:ln/>
         </p:spPr>
@@ -8917,7 +8917,7 @@
             <a:r>
               <a:rPr lang="en-US" sz="950" i="1" dirty="0">
                 <a:solidFill>
-                  <a:srgbClr val="2E2119"/>
+                  <a:srgbClr val="26402C"/>
                 </a:solidFill>
                 <a:latin typeface="Calibri" pitchFamily="34" charset="0"/>
                 <a:ea typeface="Calibri" pitchFamily="34" charset="-122"/>
@@ -8946,7 +8946,7 @@
             </a:avLst>
           </a:prstGeom>
           <a:solidFill>
-            <a:srgbClr val="2E2119"/>
+            <a:srgbClr val="26402C"/>
           </a:solidFill>
           <a:ln/>
         </p:spPr>
@@ -9001,7 +9001,7 @@
             <a:r>
               <a:rPr lang="en-US" sz="950" i="1" dirty="0">
                 <a:solidFill>
-                  <a:srgbClr val="2E2119"/>
+                  <a:srgbClr val="26402C"/>
                 </a:solidFill>
                 <a:latin typeface="Calibri" pitchFamily="34" charset="0"/>
                 <a:ea typeface="Calibri" pitchFamily="34" charset="-122"/>
@@ -9060,7 +9060,7 @@
             <a:avLst/>
           </a:prstGeom>
           <a:solidFill>
-            <a:srgbClr val="C9682B"/>
+            <a:srgbClr val="C6821E"/>
           </a:solidFill>
           <a:ln/>
         </p:spPr>
@@ -9116,7 +9116,7 @@
             <a:r>
               <a:rPr lang="en-US" sz="1200" b="1" spc="200" kern="0" dirty="0">
                 <a:solidFill>
-                  <a:srgbClr val="C9682B"/>
+                  <a:srgbClr val="C6821E"/>
                 </a:solidFill>
                 <a:latin typeface="Calibri" pitchFamily="34" charset="0"/>
                 <a:ea typeface="Calibri" pitchFamily="34" charset="-122"/>
@@ -9155,7 +9155,7 @@
             <a:r>
               <a:rPr lang="en-US" sz="2800" b="1" dirty="0">
                 <a:solidFill>
-                  <a:srgbClr val="2E2119"/>
+                  <a:srgbClr val="26402C"/>
                 </a:solidFill>
                 <a:latin typeface="Cambria" pitchFamily="34" charset="0"/>
                 <a:ea typeface="Cambria" pitchFamily="34" charset="-122"/>
@@ -9194,7 +9194,7 @@
             <a:r>
               <a:rPr lang="en-US" sz="1000" i="1" dirty="0">
                 <a:solidFill>
-                  <a:srgbClr val="8A7A6D"/>
+                  <a:srgbClr val="5B6559"/>
                 </a:solidFill>
                 <a:latin typeface="Calibri" pitchFamily="34" charset="0"/>
                 <a:ea typeface="Calibri" pitchFamily="34" charset="-122"/>
@@ -9223,7 +9223,7 @@
             </a:avLst>
           </a:prstGeom>
           <a:solidFill>
-            <a:srgbClr val="2E2119"/>
+            <a:srgbClr val="26402C"/>
           </a:solidFill>
           <a:ln/>
         </p:spPr>
@@ -9255,7 +9255,7 @@
             <a:r>
               <a:rPr lang="en-US" sz="3000" b="1" dirty="0">
                 <a:solidFill>
-                  <a:srgbClr val="D9A441"/>
+                  <a:srgbClr val="E3A94A"/>
                 </a:solidFill>
                 <a:latin typeface="Cambria" pitchFamily="34" charset="0"/>
                 <a:ea typeface="Cambria" pitchFamily="34" charset="-122"/>
@@ -9294,7 +9294,7 @@
             <a:r>
               <a:rPr lang="en-US" sz="1000" dirty="0">
                 <a:solidFill>
-                  <a:srgbClr val="D8CBBE"/>
+                  <a:srgbClr val="C7D0C2"/>
                 </a:solidFill>
                 <a:latin typeface="Calibri" pitchFamily="34" charset="0"/>
                 <a:ea typeface="Calibri" pitchFamily="34" charset="-122"/>
@@ -9323,7 +9323,7 @@
             </a:avLst>
           </a:prstGeom>
           <a:solidFill>
-            <a:srgbClr val="2E2119"/>
+            <a:srgbClr val="26402C"/>
           </a:solidFill>
           <a:ln/>
         </p:spPr>
@@ -9355,7 +9355,7 @@
             <a:r>
               <a:rPr lang="en-US" sz="3000" b="1" dirty="0">
                 <a:solidFill>
-                  <a:srgbClr val="D9A441"/>
+                  <a:srgbClr val="E3A94A"/>
                 </a:solidFill>
                 <a:latin typeface="Cambria" pitchFamily="34" charset="0"/>
                 <a:ea typeface="Cambria" pitchFamily="34" charset="-122"/>
@@ -9394,7 +9394,7 @@
             <a:r>
               <a:rPr lang="en-US" sz="1000" dirty="0">
                 <a:solidFill>
-                  <a:srgbClr val="D8CBBE"/>
+                  <a:srgbClr val="C7D0C2"/>
                 </a:solidFill>
                 <a:latin typeface="Calibri" pitchFamily="34" charset="0"/>
                 <a:ea typeface="Calibri" pitchFamily="34" charset="-122"/>
@@ -9423,7 +9423,7 @@
             </a:avLst>
           </a:prstGeom>
           <a:solidFill>
-            <a:srgbClr val="2E2119"/>
+            <a:srgbClr val="26402C"/>
           </a:solidFill>
           <a:ln/>
         </p:spPr>
@@ -9455,7 +9455,7 @@
             <a:r>
               <a:rPr lang="en-US" sz="3000" b="1" dirty="0">
                 <a:solidFill>
-                  <a:srgbClr val="D9A441"/>
+                  <a:srgbClr val="E3A94A"/>
                 </a:solidFill>
                 <a:latin typeface="Cambria" pitchFamily="34" charset="0"/>
                 <a:ea typeface="Cambria" pitchFamily="34" charset="-122"/>
@@ -9494,7 +9494,7 @@
             <a:r>
               <a:rPr lang="en-US" sz="1000" dirty="0">
                 <a:solidFill>
-                  <a:srgbClr val="D8CBBE"/>
+                  <a:srgbClr val="C7D0C2"/>
                 </a:solidFill>
                 <a:latin typeface="Calibri" pitchFamily="34" charset="0"/>
                 <a:ea typeface="Calibri" pitchFamily="34" charset="-122"/>
@@ -9533,7 +9533,7 @@
             <a:r>
               <a:rPr lang="en-US" sz="1100" i="1" dirty="0">
                 <a:solidFill>
-                  <a:srgbClr val="8A7A6D"/>
+                  <a:srgbClr val="5B6559"/>
                 </a:solidFill>
                 <a:latin typeface="Calibri" pitchFamily="34" charset="0"/>
                 <a:ea typeface="Calibri" pitchFamily="34" charset="-122"/>
@@ -9562,7 +9562,7 @@
             </a:avLst>
           </a:prstGeom>
           <a:solidFill>
-            <a:srgbClr val="F4E9DA"/>
+            <a:srgbClr val="F2EFE7"/>
           </a:solidFill>
           <a:ln/>
           <a:effectLst>
@@ -9601,7 +9601,7 @@
             <a:r>
               <a:rPr lang="en-US" sz="1150" b="1" dirty="0">
                 <a:solidFill>
-                  <a:srgbClr val="C9682B"/>
+                  <a:srgbClr val="C6821E"/>
                 </a:solidFill>
                 <a:latin typeface="Calibri" pitchFamily="34" charset="0"/>
                 <a:ea typeface="Calibri" pitchFamily="34" charset="-122"/>
@@ -9640,7 +9640,7 @@
             <a:r>
               <a:rPr lang="en-US" sz="1100" dirty="0">
                 <a:solidFill>
-                  <a:srgbClr val="2E2119"/>
+                  <a:srgbClr val="26402C"/>
                 </a:solidFill>
                 <a:latin typeface="Calibri" pitchFamily="34" charset="0"/>
                 <a:ea typeface="Calibri" pitchFamily="34" charset="-122"/>
@@ -9669,7 +9669,7 @@
             </a:avLst>
           </a:prstGeom>
           <a:solidFill>
-            <a:srgbClr val="E7DCCB"/>
+            <a:srgbClr val="DCE3D6"/>
           </a:solidFill>
           <a:ln/>
         </p:spPr>
@@ -9691,7 +9691,7 @@
             </a:avLst>
           </a:prstGeom>
           <a:solidFill>
-            <a:srgbClr val="D9A441"/>
+            <a:srgbClr val="E3A94A"/>
           </a:solidFill>
           <a:ln/>
         </p:spPr>
@@ -9723,7 +9723,7 @@
             <a:r>
               <a:rPr lang="en-US" sz="1100" b="1" dirty="0">
                 <a:solidFill>
-                  <a:srgbClr val="2E2119"/>
+                  <a:srgbClr val="26402C"/>
                 </a:solidFill>
                 <a:latin typeface="Calibri" pitchFamily="34" charset="0"/>
                 <a:ea typeface="Calibri" pitchFamily="34" charset="-122"/>
@@ -9762,7 +9762,7 @@
             <a:r>
               <a:rPr lang="en-US" sz="1100" dirty="0">
                 <a:solidFill>
-                  <a:srgbClr val="2E2119"/>
+                  <a:srgbClr val="26402C"/>
                 </a:solidFill>
                 <a:latin typeface="Calibri" pitchFamily="34" charset="0"/>
                 <a:ea typeface="Calibri" pitchFamily="34" charset="-122"/>
@@ -9791,7 +9791,7 @@
             </a:avLst>
           </a:prstGeom>
           <a:solidFill>
-            <a:srgbClr val="E7DCCB"/>
+            <a:srgbClr val="DCE3D6"/>
           </a:solidFill>
           <a:ln/>
         </p:spPr>
@@ -9813,7 +9813,7 @@
             </a:avLst>
           </a:prstGeom>
           <a:solidFill>
-            <a:srgbClr val="C9682B"/>
+            <a:srgbClr val="C6821E"/>
           </a:solidFill>
           <a:ln/>
         </p:spPr>
@@ -9845,7 +9845,7 @@
             <a:r>
               <a:rPr lang="en-US" sz="1100" b="1" dirty="0">
                 <a:solidFill>
-                  <a:srgbClr val="2E2119"/>
+                  <a:srgbClr val="26402C"/>
                 </a:solidFill>
                 <a:latin typeface="Calibri" pitchFamily="34" charset="0"/>
                 <a:ea typeface="Calibri" pitchFamily="34" charset="-122"/>
@@ -9884,7 +9884,7 @@
             <a:r>
               <a:rPr lang="en-US" sz="1100" dirty="0">
                 <a:solidFill>
-                  <a:srgbClr val="2E2119"/>
+                  <a:srgbClr val="26402C"/>
                 </a:solidFill>
                 <a:latin typeface="Calibri" pitchFamily="34" charset="0"/>
                 <a:ea typeface="Calibri" pitchFamily="34" charset="-122"/>
@@ -9913,7 +9913,7 @@
             </a:avLst>
           </a:prstGeom>
           <a:solidFill>
-            <a:srgbClr val="E7DCCB"/>
+            <a:srgbClr val="DCE3D6"/>
           </a:solidFill>
           <a:ln/>
         </p:spPr>
@@ -9935,7 +9935,7 @@
             </a:avLst>
           </a:prstGeom>
           <a:solidFill>
-            <a:srgbClr val="8A7A6D"/>
+            <a:srgbClr val="5B6559"/>
           </a:solidFill>
           <a:ln/>
         </p:spPr>
@@ -9967,7 +9967,7 @@
             <a:r>
               <a:rPr lang="en-US" sz="1100" b="1" dirty="0">
                 <a:solidFill>
-                  <a:srgbClr val="2E2119"/>
+                  <a:srgbClr val="26402C"/>
                 </a:solidFill>
                 <a:latin typeface="Calibri" pitchFamily="34" charset="0"/>
                 <a:ea typeface="Calibri" pitchFamily="34" charset="-122"/>
@@ -10006,7 +10006,7 @@
             <a:r>
               <a:rPr lang="en-US" sz="1100" dirty="0">
                 <a:solidFill>
-                  <a:srgbClr val="2E2119"/>
+                  <a:srgbClr val="26402C"/>
                 </a:solidFill>
                 <a:latin typeface="Calibri" pitchFamily="34" charset="0"/>
                 <a:ea typeface="Calibri" pitchFamily="34" charset="-122"/>
@@ -10035,7 +10035,7 @@
             </a:avLst>
           </a:prstGeom>
           <a:solidFill>
-            <a:srgbClr val="E7DCCB"/>
+            <a:srgbClr val="DCE3D6"/>
           </a:solidFill>
           <a:ln/>
         </p:spPr>
@@ -10057,7 +10057,7 @@
             </a:avLst>
           </a:prstGeom>
           <a:solidFill>
-            <a:srgbClr val="8A7A6D"/>
+            <a:srgbClr val="5B6559"/>
           </a:solidFill>
           <a:ln/>
         </p:spPr>
@@ -10089,7 +10089,7 @@
             <a:r>
               <a:rPr lang="en-US" sz="1100" b="1" dirty="0">
                 <a:solidFill>
-                  <a:srgbClr val="2E2119"/>
+                  <a:srgbClr val="26402C"/>
                 </a:solidFill>
                 <a:latin typeface="Calibri" pitchFamily="34" charset="0"/>
                 <a:ea typeface="Calibri" pitchFamily="34" charset="-122"/>
@@ -10128,7 +10128,7 @@
             <a:r>
               <a:rPr lang="en-US" sz="1100" b="1" dirty="0">
                 <a:solidFill>
-                  <a:srgbClr val="2E2119"/>
+                  <a:srgbClr val="26402C"/>
                 </a:solidFill>
                 <a:latin typeface="Calibri" pitchFamily="34" charset="0"/>
                 <a:ea typeface="Calibri" pitchFamily="34" charset="-122"/>
@@ -10157,7 +10157,7 @@
             </a:avLst>
           </a:prstGeom>
           <a:solidFill>
-            <a:srgbClr val="E7DCCB"/>
+            <a:srgbClr val="DCE3D6"/>
           </a:solidFill>
           <a:ln/>
         </p:spPr>
@@ -10189,7 +10189,7 @@
             <a:r>
               <a:rPr lang="en-US" sz="1100" b="1" dirty="0">
                 <a:solidFill>
-                  <a:srgbClr val="C9682B"/>
+                  <a:srgbClr val="C6821E"/>
                 </a:solidFill>
                 <a:latin typeface="Calibri" pitchFamily="34" charset="0"/>
                 <a:ea typeface="Calibri" pitchFamily="34" charset="-122"/>
@@ -10228,7 +10228,7 @@
             <a:r>
               <a:rPr lang="en-US" sz="950" i="1" dirty="0">
                 <a:solidFill>
-                  <a:srgbClr val="C9682B"/>
+                  <a:srgbClr val="C6821E"/>
                 </a:solidFill>
                 <a:latin typeface="Calibri" pitchFamily="34" charset="0"/>
                 <a:ea typeface="Calibri" pitchFamily="34" charset="-122"/>
@@ -10257,11 +10257,11 @@
             </a:avLst>
           </a:prstGeom>
           <a:solidFill>
-            <a:srgbClr val="F6E9D8"/>
+            <a:srgbClr val="F0E0BE"/>
           </a:solidFill>
           <a:ln w="12700">
             <a:solidFill>
-              <a:srgbClr val="C9682B"/>
+              <a:srgbClr val="C6821E"/>
             </a:solidFill>
             <a:prstDash val="solid"/>
           </a:ln>
@@ -10297,7 +10297,7 @@
             <a:r>
               <a:rPr lang="en-US" sz="1100" b="1" dirty="0">
                 <a:solidFill>
-                  <a:srgbClr val="C9682B"/>
+                  <a:srgbClr val="C6821E"/>
                 </a:solidFill>
                 <a:latin typeface="Calibri" pitchFamily="34" charset="0"/>
                 <a:ea typeface="Calibri" pitchFamily="34" charset="-122"/>
@@ -10314,7 +10314,7 @@
             <a:r>
               <a:rPr lang="en-US" sz="1100" dirty="0">
                 <a:solidFill>
-                  <a:srgbClr val="2E2119"/>
+                  <a:srgbClr val="26402C"/>
                 </a:solidFill>
                 <a:latin typeface="Calibri" pitchFamily="34" charset="0"/>
                 <a:ea typeface="Calibri" pitchFamily="34" charset="-122"/>
@@ -10373,7 +10373,7 @@
             <a:avLst/>
           </a:prstGeom>
           <a:solidFill>
-            <a:srgbClr val="C9682B"/>
+            <a:srgbClr val="C6821E"/>
           </a:solidFill>
           <a:ln/>
         </p:spPr>
@@ -10429,7 +10429,7 @@
             <a:r>
               <a:rPr lang="en-US" sz="1200" b="1" spc="200" kern="0" dirty="0">
                 <a:solidFill>
-                  <a:srgbClr val="C9682B"/>
+                  <a:srgbClr val="C6821E"/>
                 </a:solidFill>
                 <a:latin typeface="Calibri" pitchFamily="34" charset="0"/>
                 <a:ea typeface="Calibri" pitchFamily="34" charset="-122"/>
@@ -10468,7 +10468,7 @@
             <a:r>
               <a:rPr lang="en-US" sz="2800" b="1" dirty="0">
                 <a:solidFill>
-                  <a:srgbClr val="2E2119"/>
+                  <a:srgbClr val="26402C"/>
                 </a:solidFill>
                 <a:latin typeface="Cambria" pitchFamily="34" charset="0"/>
                 <a:ea typeface="Cambria" pitchFamily="34" charset="-122"/>
@@ -10507,7 +10507,7 @@
             <a:r>
               <a:rPr lang="en-US" sz="1000" i="1" dirty="0">
                 <a:solidFill>
-                  <a:srgbClr val="8A7A6D"/>
+                  <a:srgbClr val="5B6559"/>
                 </a:solidFill>
                 <a:latin typeface="Calibri" pitchFamily="34" charset="0"/>
                 <a:ea typeface="Calibri" pitchFamily="34" charset="-122"/>
@@ -10536,7 +10536,7 @@
             </a:avLst>
           </a:prstGeom>
           <a:solidFill>
-            <a:srgbClr val="EDE6DC"/>
+            <a:srgbClr val="E3E8DD"/>
           </a:solidFill>
           <a:ln/>
           <a:effectLst>
@@ -10575,7 +10575,7 @@
             <a:r>
               <a:rPr lang="en-US" sz="1500" i="1" dirty="0">
                 <a:solidFill>
-                  <a:srgbClr val="2E2119"/>
+                  <a:srgbClr val="26402C"/>
                 </a:solidFill>
                 <a:latin typeface="Calibri" pitchFamily="34" charset="0"/>
                 <a:ea typeface="Calibri" pitchFamily="34" charset="-122"/>
@@ -10614,7 +10614,7 @@
             <a:r>
               <a:rPr lang="en-US" sz="1300" b="1" dirty="0">
                 <a:solidFill>
-                  <a:srgbClr val="C9682B"/>
+                  <a:srgbClr val="C6821E"/>
                 </a:solidFill>
                 <a:latin typeface="Calibri" pitchFamily="34" charset="0"/>
                 <a:ea typeface="Calibri" pitchFamily="34" charset="-122"/>
@@ -10628,7 +10628,7 @@
             <a:r>
               <a:rPr lang="en-US" sz="1300" dirty="0">
                 <a:solidFill>
-                  <a:srgbClr val="2E2119"/>
+                  <a:srgbClr val="26402C"/>
                 </a:solidFill>
                 <a:latin typeface="Calibri" pitchFamily="34" charset="0"/>
                 <a:ea typeface="Calibri" pitchFamily="34" charset="-122"/>
@@ -10657,7 +10657,7 @@
             </a:avLst>
           </a:prstGeom>
           <a:solidFill>
-            <a:srgbClr val="F4E9DA"/>
+            <a:srgbClr val="F2EFE7"/>
           </a:solidFill>
           <a:ln/>
           <a:effectLst>
@@ -10696,7 +10696,7 @@
             <a:r>
               <a:rPr lang="en-US" sz="1150" b="1" spc="100" kern="0" dirty="0">
                 <a:solidFill>
-                  <a:srgbClr val="C9682B"/>
+                  <a:srgbClr val="C6821E"/>
                 </a:solidFill>
                 <a:latin typeface="Calibri" pitchFamily="34" charset="0"/>
                 <a:ea typeface="Calibri" pitchFamily="34" charset="-122"/>
@@ -10735,7 +10735,7 @@
             <a:r>
               <a:rPr lang="en-US" sz="1250" dirty="0">
                 <a:solidFill>
-                  <a:srgbClr val="2E2119"/>
+                  <a:srgbClr val="26402C"/>
                 </a:solidFill>
                 <a:latin typeface="Calibri" pitchFamily="34" charset="0"/>
                 <a:ea typeface="Calibri" pitchFamily="34" charset="-122"/>
@@ -10764,7 +10764,7 @@
             </a:avLst>
           </a:prstGeom>
           <a:solidFill>
-            <a:srgbClr val="F6E4D3"/>
+            <a:srgbClr val="ECD9B8"/>
           </a:solidFill>
           <a:ln/>
           <a:effectLst>
@@ -10803,7 +10803,7 @@
             <a:r>
               <a:rPr lang="en-US" sz="1150" b="1" spc="100" kern="0" dirty="0">
                 <a:solidFill>
-                  <a:srgbClr val="C9682B"/>
+                  <a:srgbClr val="C6821E"/>
                 </a:solidFill>
                 <a:latin typeface="Calibri" pitchFamily="34" charset="0"/>
                 <a:ea typeface="Calibri" pitchFamily="34" charset="-122"/>
@@ -10845,7 +10845,7 @@
             <a:r>
               <a:rPr lang="en-US" sz="1150" dirty="0">
                 <a:solidFill>
-                  <a:srgbClr val="2E2119"/>
+                  <a:srgbClr val="26402C"/>
                 </a:solidFill>
                 <a:latin typeface="Calibri" pitchFamily="34" charset="0"/>
                 <a:ea typeface="Calibri" pitchFamily="34" charset="-122"/>
@@ -10862,7 +10862,7 @@
             <a:r>
               <a:rPr lang="en-US" sz="1150" b="1" dirty="0">
                 <a:solidFill>
-                  <a:srgbClr val="C9682B"/>
+                  <a:srgbClr val="C6821E"/>
                 </a:solidFill>
                 <a:latin typeface="Calibri" pitchFamily="34" charset="0"/>
                 <a:ea typeface="Calibri" pitchFamily="34" charset="-122"/>
@@ -10876,7 +10876,7 @@
             <a:r>
               <a:rPr lang="en-US" sz="1150" i="1" dirty="0">
                 <a:solidFill>
-                  <a:srgbClr val="2E2119"/>
+                  <a:srgbClr val="26402C"/>
                 </a:solidFill>
                 <a:latin typeface="Calibri" pitchFamily="34" charset="0"/>
                 <a:ea typeface="Calibri" pitchFamily="34" charset="-122"/>
@@ -10905,7 +10905,7 @@
             </a:avLst>
           </a:prstGeom>
           <a:solidFill>
-            <a:srgbClr val="2E2119"/>
+            <a:srgbClr val="26402C"/>
           </a:solidFill>
           <a:ln/>
         </p:spPr>
@@ -10937,7 +10937,7 @@
             <a:r>
               <a:rPr lang="en-US" sz="1250" i="1" dirty="0">
                 <a:solidFill>
-                  <a:srgbClr val="D9A441"/>
+                  <a:srgbClr val="E3A94A"/>
                 </a:solidFill>
                 <a:latin typeface="Calibri" pitchFamily="34" charset="0"/>
                 <a:ea typeface="Calibri" pitchFamily="34" charset="-122"/>
@@ -10996,7 +10996,7 @@
             <a:avLst/>
           </a:prstGeom>
           <a:solidFill>
-            <a:srgbClr val="C9682B"/>
+            <a:srgbClr val="C6821E"/>
           </a:solidFill>
           <a:ln/>
         </p:spPr>
@@ -11052,7 +11052,7 @@
             <a:r>
               <a:rPr lang="en-US" sz="1200" b="1" spc="200" kern="0" dirty="0">
                 <a:solidFill>
-                  <a:srgbClr val="C9682B"/>
+                  <a:srgbClr val="C6821E"/>
                 </a:solidFill>
                 <a:latin typeface="Calibri" pitchFamily="34" charset="0"/>
                 <a:ea typeface="Calibri" pitchFamily="34" charset="-122"/>
@@ -11091,7 +11091,7 @@
             <a:r>
               <a:rPr lang="en-US" sz="2800" b="1" dirty="0">
                 <a:solidFill>
-                  <a:srgbClr val="2E2119"/>
+                  <a:srgbClr val="26402C"/>
                 </a:solidFill>
                 <a:latin typeface="Cambria" pitchFamily="34" charset="0"/>
                 <a:ea typeface="Cambria" pitchFamily="34" charset="-122"/>
@@ -11120,7 +11120,7 @@
             </a:avLst>
           </a:prstGeom>
           <a:solidFill>
-            <a:srgbClr val="F4E9DA"/>
+            <a:srgbClr val="F2EFE7"/>
           </a:solidFill>
           <a:ln/>
           <a:effectLst>
@@ -11159,7 +11159,7 @@
             <a:r>
               <a:rPr lang="en-US" sz="1500" b="1" dirty="0">
                 <a:solidFill>
-                  <a:srgbClr val="C9682B"/>
+                  <a:srgbClr val="C6821E"/>
                 </a:solidFill>
                 <a:latin typeface="Cambria" pitchFamily="34" charset="0"/>
                 <a:ea typeface="Cambria" pitchFamily="34" charset="-122"/>
@@ -11198,7 +11198,7 @@
             <a:r>
               <a:rPr lang="en-US" sz="1300" dirty="0">
                 <a:solidFill>
-                  <a:srgbClr val="2E2119"/>
+                  <a:srgbClr val="26402C"/>
                 </a:solidFill>
                 <a:latin typeface="Calibri" pitchFamily="34" charset="0"/>
                 <a:ea typeface="Calibri" pitchFamily="34" charset="-122"/>
@@ -11227,7 +11227,7 @@
             </a:avLst>
           </a:prstGeom>
           <a:solidFill>
-            <a:srgbClr val="EDE6DC"/>
+            <a:srgbClr val="E3E8DD"/>
           </a:solidFill>
           <a:ln/>
           <a:effectLst>
@@ -11266,7 +11266,7 @@
             <a:r>
               <a:rPr lang="en-US" sz="1500" b="1" dirty="0">
                 <a:solidFill>
-                  <a:srgbClr val="C9682B"/>
+                  <a:srgbClr val="C6821E"/>
                 </a:solidFill>
                 <a:latin typeface="Cambria" pitchFamily="34" charset="0"/>
                 <a:ea typeface="Cambria" pitchFamily="34" charset="-122"/>
@@ -11305,7 +11305,7 @@
             <a:r>
               <a:rPr lang="en-US" sz="1300" dirty="0">
                 <a:solidFill>
-                  <a:srgbClr val="2E2119"/>
+                  <a:srgbClr val="26402C"/>
                 </a:solidFill>
                 <a:latin typeface="Calibri" pitchFamily="34" charset="0"/>
                 <a:ea typeface="Calibri" pitchFamily="34" charset="-122"/>
@@ -11334,7 +11334,7 @@
             </a:avLst>
           </a:prstGeom>
           <a:solidFill>
-            <a:srgbClr val="F4E9DA"/>
+            <a:srgbClr val="F2EFE7"/>
           </a:solidFill>
           <a:ln/>
           <a:effectLst>
@@ -11373,7 +11373,7 @@
             <a:r>
               <a:rPr lang="en-US" sz="1500" b="1" dirty="0">
                 <a:solidFill>
-                  <a:srgbClr val="C9682B"/>
+                  <a:srgbClr val="C6821E"/>
                 </a:solidFill>
                 <a:latin typeface="Cambria" pitchFamily="34" charset="0"/>
                 <a:ea typeface="Cambria" pitchFamily="34" charset="-122"/>
@@ -11412,7 +11412,7 @@
             <a:r>
               <a:rPr lang="en-US" sz="1300" dirty="0">
                 <a:solidFill>
-                  <a:srgbClr val="2E2119"/>
+                  <a:srgbClr val="26402C"/>
                 </a:solidFill>
                 <a:latin typeface="Calibri" pitchFamily="34" charset="0"/>
                 <a:ea typeface="Calibri" pitchFamily="34" charset="-122"/>
@@ -11441,7 +11441,7 @@
             </a:avLst>
           </a:prstGeom>
           <a:solidFill>
-            <a:srgbClr val="2E2119"/>
+            <a:srgbClr val="26402C"/>
           </a:solidFill>
           <a:ln/>
         </p:spPr>
@@ -11473,7 +11473,7 @@
             <a:r>
               <a:rPr lang="en-US" sz="1300" i="1" dirty="0">
                 <a:solidFill>
-                  <a:srgbClr val="D9A441"/>
+                  <a:srgbClr val="E3A94A"/>
                 </a:solidFill>
                 <a:latin typeface="Calibri" pitchFamily="34" charset="0"/>
                 <a:ea typeface="Calibri" pitchFamily="34" charset="-122"/>
@@ -11532,7 +11532,7 @@
             <a:avLst/>
           </a:prstGeom>
           <a:solidFill>
-            <a:srgbClr val="C9682B"/>
+            <a:srgbClr val="C6821E"/>
           </a:solidFill>
           <a:ln/>
         </p:spPr>
@@ -11588,7 +11588,7 @@
             <a:r>
               <a:rPr lang="en-US" sz="1200" b="1" spc="200" kern="0" dirty="0">
                 <a:solidFill>
-                  <a:srgbClr val="C9682B"/>
+                  <a:srgbClr val="C6821E"/>
                 </a:solidFill>
                 <a:latin typeface="Calibri" pitchFamily="34" charset="0"/>
                 <a:ea typeface="Calibri" pitchFamily="34" charset="-122"/>
@@ -11627,7 +11627,7 @@
             <a:r>
               <a:rPr lang="en-US" sz="2800" b="1" dirty="0">
                 <a:solidFill>
-                  <a:srgbClr val="2E2119"/>
+                  <a:srgbClr val="26402C"/>
                 </a:solidFill>
                 <a:latin typeface="Cambria" pitchFamily="34" charset="0"/>
                 <a:ea typeface="Cambria" pitchFamily="34" charset="-122"/>
@@ -11666,7 +11666,7 @@
             <a:r>
               <a:rPr lang="en-US" sz="1000" i="1" dirty="0">
                 <a:solidFill>
-                  <a:srgbClr val="8A7A6D"/>
+                  <a:srgbClr val="5B6559"/>
                 </a:solidFill>
                 <a:latin typeface="Calibri" pitchFamily="34" charset="0"/>
                 <a:ea typeface="Calibri" pitchFamily="34" charset="-122"/>
@@ -11695,7 +11695,7 @@
             </a:avLst>
           </a:prstGeom>
           <a:solidFill>
-            <a:srgbClr val="F4E9DA"/>
+            <a:srgbClr val="F2EFE7"/>
           </a:solidFill>
           <a:ln/>
           <a:effectLst>
@@ -11734,7 +11734,7 @@
             <a:r>
               <a:rPr lang="en-US" sz="1200" b="1" spc="150" kern="0" dirty="0">
                 <a:solidFill>
-                  <a:srgbClr val="C9682B"/>
+                  <a:srgbClr val="C6821E"/>
                 </a:solidFill>
                 <a:latin typeface="Calibri" pitchFamily="34" charset="0"/>
                 <a:ea typeface="Calibri" pitchFamily="34" charset="-122"/>
@@ -11773,7 +11773,7 @@
             <a:r>
               <a:rPr lang="en-US" sz="1050" i="1" dirty="0">
                 <a:solidFill>
-                  <a:srgbClr val="8A7A6D"/>
+                  <a:srgbClr val="5B6559"/>
                 </a:solidFill>
                 <a:latin typeface="Calibri" pitchFamily="34" charset="0"/>
                 <a:ea typeface="Calibri" pitchFamily="34" charset="-122"/>
@@ -11816,7 +11816,7 @@
             <a:r>
               <a:rPr lang="en-US" sz="1000" i="1" dirty="0">
                 <a:solidFill>
-                  <a:srgbClr val="2E2119"/>
+                  <a:srgbClr val="26402C"/>
                 </a:solidFill>
                 <a:latin typeface="Calibri" pitchFamily="34" charset="0"/>
                 <a:ea typeface="Calibri" pitchFamily="34" charset="-122"/>
@@ -11837,7 +11837,7 @@
             <a:r>
               <a:rPr lang="en-US" sz="1000" i="1" dirty="0">
                 <a:solidFill>
-                  <a:srgbClr val="2E2119"/>
+                  <a:srgbClr val="26402C"/>
                 </a:solidFill>
                 <a:latin typeface="Calibri" pitchFamily="34" charset="0"/>
                 <a:ea typeface="Calibri" pitchFamily="34" charset="-122"/>
@@ -11858,7 +11858,7 @@
             <a:r>
               <a:rPr lang="en-US" sz="1000" i="1" dirty="0">
                 <a:solidFill>
-                  <a:srgbClr val="2E2119"/>
+                  <a:srgbClr val="26402C"/>
                 </a:solidFill>
                 <a:latin typeface="Calibri" pitchFamily="34" charset="0"/>
                 <a:ea typeface="Calibri" pitchFamily="34" charset="-122"/>
@@ -11879,7 +11879,7 @@
             <a:r>
               <a:rPr lang="en-US" sz="1000" i="1" dirty="0">
                 <a:solidFill>
-                  <a:srgbClr val="2E2119"/>
+                  <a:srgbClr val="26402C"/>
                 </a:solidFill>
                 <a:latin typeface="Calibri" pitchFamily="34" charset="0"/>
                 <a:ea typeface="Calibri" pitchFamily="34" charset="-122"/>
@@ -11900,7 +11900,7 @@
             <a:r>
               <a:rPr lang="en-US" sz="1000" i="1" dirty="0">
                 <a:solidFill>
-                  <a:srgbClr val="2E2119"/>
+                  <a:srgbClr val="26402C"/>
                 </a:solidFill>
                 <a:latin typeface="Calibri" pitchFamily="34" charset="0"/>
                 <a:ea typeface="Calibri" pitchFamily="34" charset="-122"/>
@@ -11921,7 +11921,7 @@
             <a:r>
               <a:rPr lang="en-US" sz="1000" i="1" dirty="0">
                 <a:solidFill>
-                  <a:srgbClr val="2E2119"/>
+                  <a:srgbClr val="26402C"/>
                 </a:solidFill>
                 <a:latin typeface="Calibri" pitchFamily="34" charset="0"/>
                 <a:ea typeface="Calibri" pitchFamily="34" charset="-122"/>
@@ -11950,7 +11950,7 @@
             </a:avLst>
           </a:prstGeom>
           <a:solidFill>
-            <a:srgbClr val="EDE6DC"/>
+            <a:srgbClr val="E3E8DD"/>
           </a:solidFill>
           <a:ln/>
           <a:effectLst>
@@ -11989,7 +11989,7 @@
             <a:r>
               <a:rPr lang="en-US" sz="1200" b="1" spc="150" kern="0" dirty="0">
                 <a:solidFill>
-                  <a:srgbClr val="C9682B"/>
+                  <a:srgbClr val="C6821E"/>
                 </a:solidFill>
                 <a:latin typeface="Calibri" pitchFamily="34" charset="0"/>
                 <a:ea typeface="Calibri" pitchFamily="34" charset="-122"/>
@@ -12028,7 +12028,7 @@
             <a:r>
               <a:rPr lang="en-US" sz="1050" i="1" dirty="0">
                 <a:solidFill>
-                  <a:srgbClr val="8A7A6D"/>
+                  <a:srgbClr val="5B6559"/>
                 </a:solidFill>
                 <a:latin typeface="Calibri" pitchFamily="34" charset="0"/>
                 <a:ea typeface="Calibri" pitchFamily="34" charset="-122"/>
@@ -12071,7 +12071,7 @@
             <a:r>
               <a:rPr lang="en-US" sz="1100" i="1" dirty="0">
                 <a:solidFill>
-                  <a:srgbClr val="2E2119"/>
+                  <a:srgbClr val="26402C"/>
                 </a:solidFill>
                 <a:latin typeface="Calibri" pitchFamily="34" charset="0"/>
                 <a:ea typeface="Calibri" pitchFamily="34" charset="-122"/>
@@ -12092,7 +12092,7 @@
             <a:r>
               <a:rPr lang="en-US" sz="1100" i="1" dirty="0">
                 <a:solidFill>
-                  <a:srgbClr val="2E2119"/>
+                  <a:srgbClr val="26402C"/>
                 </a:solidFill>
                 <a:latin typeface="Calibri" pitchFamily="34" charset="0"/>
                 <a:ea typeface="Calibri" pitchFamily="34" charset="-122"/>
@@ -12113,7 +12113,7 @@
             <a:r>
               <a:rPr lang="en-US" sz="1100" i="1" dirty="0">
                 <a:solidFill>
-                  <a:srgbClr val="2E2119"/>
+                  <a:srgbClr val="26402C"/>
                 </a:solidFill>
                 <a:latin typeface="Calibri" pitchFamily="34" charset="0"/>
                 <a:ea typeface="Calibri" pitchFamily="34" charset="-122"/>
@@ -12142,7 +12142,7 @@
             </a:avLst>
           </a:prstGeom>
           <a:solidFill>
-            <a:srgbClr val="2E2119"/>
+            <a:srgbClr val="26402C"/>
           </a:solidFill>
           <a:ln/>
         </p:spPr>
@@ -12177,7 +12177,7 @@
             <a:r>
               <a:rPr lang="en-US" sz="1100" b="1" dirty="0">
                 <a:solidFill>
-                  <a:srgbClr val="D9A441"/>
+                  <a:srgbClr val="E3A94A"/>
                 </a:solidFill>
                 <a:latin typeface="Calibri" pitchFamily="34" charset="0"/>
                 <a:ea typeface="Calibri" pitchFamily="34" charset="-122"/>
@@ -12223,11 +12223,11 @@
             </a:avLst>
           </a:prstGeom>
           <a:solidFill>
-            <a:srgbClr val="F6E9D8"/>
+            <a:srgbClr val="F0E0BE"/>
           </a:solidFill>
           <a:ln w="12700">
             <a:solidFill>
-              <a:srgbClr val="C9682B"/>
+              <a:srgbClr val="C6821E"/>
             </a:solidFill>
             <a:prstDash val="solid"/>
           </a:ln>
@@ -12260,7 +12260,7 @@
             <a:r>
               <a:rPr lang="en-US" sz="1100" b="1" dirty="0">
                 <a:solidFill>
-                  <a:srgbClr val="C9682B"/>
+                  <a:srgbClr val="C6821E"/>
                 </a:solidFill>
                 <a:latin typeface="Calibri" pitchFamily="34" charset="0"/>
                 <a:ea typeface="Calibri" pitchFamily="34" charset="-122"/>
@@ -12274,7 +12274,7 @@
             <a:r>
               <a:rPr lang="en-US" sz="1100" dirty="0">
                 <a:solidFill>
-                  <a:srgbClr val="2E2119"/>
+                  <a:srgbClr val="26402C"/>
                 </a:solidFill>
                 <a:latin typeface="Calibri" pitchFamily="34" charset="0"/>
                 <a:ea typeface="Calibri" pitchFamily="34" charset="-122"/>
